--- a/deck/セルフマネジメント課題_事業構想プレゼン.pptx
+++ b/deck/セルフマネジメント課題_事業構想プレゼン.pptx
@@ -2312,7 +2312,7 @@
             <a:r>
               <a:rPr lang="en-US" dirty="0"/>
               <a:t>【3:00 - 4:20】
-設問①、事業内容です。売るのは記録そのものではなく、熟練者の判断を次の人と機械に渡す仕組みです。土台は、製造ロット、工程条件、試験値、作業記録、そして熟練者がなぜそう判断したかを一つにまとめる現場データ基盤です。その上に、ロットを納入先の施工記録まで追跡するTRACE、熟練者の判断を記録して推奨値を示すKNACK、計画変更の影響を事前に試算するTWIN、搬送ロボットや検査AIとつなぐFLOWを、年に一つずつ載せていきます。価格は1拠点あたり年300万円、初年度は導入支援200万円を加えた500万円です。右のグラフは、対象者100名の拠点での効果です。1人月6時間の削減で、毎月240万円ずつ効果が積み上がり、約2.1か月で初年度費用を上回ります。ただし月6時間は、建設業の書類電子化の実績を準用した仮定です。</a:t>
+設問①、事業内容です。売るのは記録そのものではなく、熟練者の判断を次の人と機械に渡す仕組みです。土台は、製造ロット、工程条件、試験値、作業記録、熟練者の判断理由を一つにまとめる現場データ基盤です。製品戦略は、基盤を先に入れ、モジュールを年に一本ずつ足していくランド・アンド・エクスパンドです。中心となるKNACKは、ナレッジマネジメントでいうSECIモデルの表出化、つまり熟練者の暗黙知を形式知にする部分を仕組みにしたものです。価格戦略は、原価ではなく顧客の得る価値から決める価値基準価格です。右のグラフのとおり、対象者100名の拠点で毎月240万円の効果が積み上がり、約2.1か月で初年度費用500万円を上回ります。年300万円は、年間効果2,880万円の約1割にあたります。ただし月6時間の削減は、建設業の書類電子化の実績を準用した仮定です。</a:t>
             </a:r>
             <a:endParaRPr lang="en-US" dirty="0"/>
           </a:p>
@@ -2401,7 +2401,7 @@
             <a:r>
               <a:rPr lang="en-US" dirty="0"/>
               <a:t>【4:20 - 5:40】
-最初に自分で自分に突きつけた問いが三つありました。コンサルと何が違うのか、MESや大手SIerと何が違うのか、ロボットやAIが来たら人の判断は要らなくなるのではないか、です。コンサルティングが売るのは人の時間で、課金は人月です。当社が売るのはデータ基盤で、人が引いても判断の記録が残ります。MESは生産実績を集める仕組みですが、なぜそう判断したかは残りません。当社は置き換えず、併存します。導入済みの工場こそ、実績は取れているが判断の理由は残っていないと気づいているため、見込み顧客になります。ロボットやAIは現場の手足で、何をどう動かすべきかという一次情報を当社が供給します。弱みとして、製造現場の実務経験が浅いこと、営業と資金調達が未経験であることを正直に挙げています。</a:t>
+最初に自分で自分に突きつけた問いが三つありました。コンサルと何が違うのか、MESや大手SIerと何が違うのか、ロボットやAIが来たら人の判断は要らなくなるのではないか、です。左のポジショニングマップは、横軸が扱う情報、つまり何が起きたかという実績か、なぜそうしたかという判断の理由か。縦軸が提供の形、人の時間か仕組みか、です。MESやロボットは実績と動作を仕組みで扱い、コンサルや社内の熟練者は判断の理由を人で扱っています。判断の理由を仕組みで扱う右上が空いており、ここを取ります。STPでは、製造業を工程の形で分け、熟練者の判断が品質を左右する電線・ケーブル工場を狙います。競争戦略は、コトラーの競争地位でいうニッチャー、ポーターの基本戦略でいう差別化集中です。ERPやMESは置き換えずに連携します。弱みとして、製造現場の経験が浅いことと、営業・資金調達が未経験であることを正直に挙げています。</a:t>
             </a:r>
             <a:endParaRPr lang="en-US" dirty="0"/>
           </a:p>
@@ -2579,7 +2579,7 @@
             <a:r>
               <a:rPr lang="en-US" dirty="0"/>
               <a:t>【6:50 - 8:30】
-設問④、経営計画です。グラフの横軸が年、縦軸が金額です。売上高は1年目1,200万円から、5年目に2億9,000万円まで伸びます。営業利益は3年目まで赤字で、4年目に2,800万円の黒字に転じます。点線の累積営業損益は3年目に6,500万円の赤字で底を打ち、5年目にプラスへ戻ります。この谷を越えるための資金が1.5億円で、谷の0.65億円、運転資金0.29億円、計画が1年遅れた場合の備え0.56億円を積み上げた額です。なぜ4年目に黒字化するのか。右のグラフのとおり、黒字化の条件は売上規模ではなく、社員1人あたりの顧客拠点数です。損益分岐は1人あたり2.8拠点で、3年目は2.73で届かず、4年目に3.67で超えます。顧客の増加が人員の増加を追い越す年です。</a:t>
+設問④、経営計画です。グラフの横軸が年、縦軸が金額です。売上高は1年目1,200万円から、5年目に2億9,000万円まで伸びます。営業利益は3年目まで赤字で、4年目に2,800万円の黒字に転じます。点線の累積営業損益は3年目に6,500万円の赤字で底を打ちます。この谷を越えるための資金が1.5億円で、谷の0.65億円、運転資金0.29億円、1年遅れた場合の備え0.56億円の積み上げです。調達先には、電線メーカーやロボットメーカーのコーポレートベンチャーキャピタルを想定しています。資金だけでなく、実証の現場と販路を同時に得られるためです。なぜ4年目に黒字化するのか。右のグラフのとおり、条件は社員1人あたりの顧客拠点数で、損益分岐は2.8です。3年目は2.73で届かず、4年目に3.67で超えます。顧客の増加が人員の増加を追い越す年です。</a:t>
             </a:r>
             <a:endParaRPr lang="en-US" dirty="0"/>
           </a:p>
@@ -2668,7 +2668,7 @@
             <a:r>
               <a:rPr lang="en-US" dirty="0"/>
               <a:t>【8:30 - 9:50】
-設問⑤、ステージごとの経営課題です。最大のリスクは競合ではなく、創業者である自分が律速になることです。準備期は、製品がない段階での受注と創業者依存、製造現場の知見不足が課題です。有償試験導入を3拠点に限定し、生産技術の経験者を迎えます。中期は、受託化と採用、母数の小ささが課題で、電線業界の353事業所に加え、製品の出口である施工会社へ同じ基盤を広げます。後期は、大手の参入と属人経営からの脱却です。最後に、この事業計画の三つの柱は、すべて現在の勤務先の中にも存在します。顧客は社内の工場、商品は製造記録のデータ化と技能継承、収益は工数削減と品質不良の防止です。だから復職後は、生産技術と情報システムの領域で、現場と技術のあいだを訳す役割を担いたいと考えています。そして、自らの役割を定義しきること自体が、業務を際限なく抱え込まないための再発防止策でもあります。以上です。</a:t>
+設問⑤、経営課題です。最大のリスクは、創業者である自分が律速になることです。準備期は創業者依存と製造知見の不足に、試験導入の限定と生産技術経験者の採用で対応します。中期の母数の小ささには、アンゾフの成長マトリクスでいう新市場開拓として、施工会社へ同じ基盤を広げます。後期は属人経営からの脱却です。そのための仕組みが、下段のバランスト・スコアカードです。財務、顧客、業務プロセス、学習と成長の四つの視点で、重要成功要因と指標を先に決めておけば、私がいなくても判断できます。最後に、この三つの柱、顧客・商品・収益は、すべて現在の勤務先の中にも存在します。だから復職後は、生産技術と情報システムの領域で、現場と技術のあいだを訳す役割を担いたいと考えています。そして、自らの役割を定義しきること自体が、業務を際限なく抱え込まないための再発防止策でもあります。以上です。</a:t>
             </a:r>
             <a:endParaRPr lang="en-US" dirty="0"/>
           </a:p>
@@ -6551,13 +6551,72 @@
       </p:sp>
       <p:sp>
         <p:nvSpPr>
-          <p:cNvPr id="8" name="Shape 5"/>
+          <p:cNvPr id="8" name="Text 5"/>
+          <p:cNvSpPr txBox="1"/>
+          <p:nvPr/>
+        </p:nvSpPr>
+        <p:spPr>
+          <a:xfrm>
+            <a:off x="365760" y="1764792"/>
+            <a:ext cx="4069080" cy="219456"/>
+          </a:xfrm>
+          <a:prstGeom prst="rect">
+            <a:avLst/>
+          </a:prstGeom>
+          <a:noFill/>
+          <a:ln/>
+        </p:spPr>
+        <p:txBody>
+          <a:bodyPr wrap="square" lIns="0" tIns="0" rIns="0" bIns="0" rtlCol="0" anchor="ctr"/>
+          <a:lstStyle/>
+          <a:p>
+            <a:pPr algn="l" indent="0" marL="0">
+              <a:lnSpc>
+                <a:spcPct val="115000"/>
+              </a:lnSpc>
+              <a:buNone/>
+            </a:pPr>
+            <a:r>
+              <a:rPr lang="en-US" sz="850" b="1" dirty="0">
+                <a:solidFill>
+                  <a:srgbClr val="4D4D4D"/>
+                </a:solidFill>
+                <a:latin typeface="Meiryo" pitchFamily="34" charset="0"/>
+                <a:ea typeface="Meiryo" pitchFamily="34" charset="-122"/>
+                <a:cs typeface="Meiryo" pitchFamily="34" charset="-120"/>
+              </a:rPr>
+              <a:t>製品戦略：</a:t>
+            </a:r>
+            <a:pPr algn="l" indent="0" marL="0">
+              <a:lnSpc>
+                <a:spcPct val="115000"/>
+              </a:lnSpc>
+              <a:buNone/>
+            </a:pPr>
+            <a:r>
+              <a:rPr lang="en-US" sz="850" dirty="0">
+                <a:solidFill>
+                  <a:srgbClr val="4D4D4D"/>
+                </a:solidFill>
+                <a:latin typeface="Meiryo" pitchFamily="34" charset="0"/>
+                <a:ea typeface="Meiryo" pitchFamily="34" charset="-122"/>
+                <a:cs typeface="Meiryo" pitchFamily="34" charset="-120"/>
+              </a:rPr>
+              <a:t>基盤が先、モジュールは年1本ずつ追加（ランド＆エクスパンド）</a:t>
+            </a:r>
+            <a:endParaRPr lang="en-US" sz="850" dirty="0"/>
+          </a:p>
+        </p:txBody>
+      </p:sp>
+      <p:sp>
+        <p:nvSpPr>
+          <p:cNvPr id="9" name="Shape 6"/>
           <p:cNvSpPr/>
           <p:nvPr/>
         </p:nvSpPr>
         <p:spPr>
           <a:xfrm>
-            <a:off x="365760" y="1828800"/>
+            <a:off x="365760" y="2011680"/>
             <a:ext cx="4069080" cy="0"/>
           </a:xfrm>
           <a:prstGeom prst="line">
@@ -6574,76 +6633,14 @@
       </p:sp>
       <p:sp>
         <p:nvSpPr>
-          <p:cNvPr id="9" name="Text 6"/>
-          <p:cNvSpPr txBox="1"/>
-          <p:nvPr/>
-        </p:nvSpPr>
-        <p:spPr>
-          <a:xfrm>
-            <a:off x="365760" y="1865376"/>
-            <a:ext cx="1143000" cy="475488"/>
-          </a:xfrm>
-          <a:prstGeom prst="rect">
-            <a:avLst/>
-          </a:prstGeom>
-          <a:noFill/>
-          <a:ln/>
-        </p:spPr>
-        <p:txBody>
-          <a:bodyPr wrap="square" lIns="0" tIns="0" rIns="0" bIns="0" rtlCol="0" anchor="ctr"/>
-          <a:lstStyle/>
-          <a:p>
-            <a:pPr algn="l" indent="0" marL="0">
-              <a:lnSpc>
-                <a:spcPct val="115000"/>
-              </a:lnSpc>
-              <a:buNone/>
-            </a:pPr>
-            <a:r>
-              <a:rPr lang="en-US" sz="1200" b="1" dirty="0">
-                <a:solidFill>
-                  <a:srgbClr val="1A1A1A"/>
-                </a:solidFill>
-                <a:latin typeface="Meiryo" pitchFamily="34" charset="0"/>
-                <a:ea typeface="Meiryo" pitchFamily="34" charset="-122"/>
-                <a:cs typeface="Meiryo" pitchFamily="34" charset="-120"/>
-              </a:rPr>
-              <a:t>TRACE</a:t>
-            </a:r>
-            <a:endParaRPr lang="en-US" sz="1400" dirty="0"/>
-          </a:p>
-          <a:p>
-            <a:pPr algn="l" indent="0" marL="0">
-              <a:lnSpc>
-                <a:spcPct val="115000"/>
-              </a:lnSpc>
-              <a:buNone/>
-            </a:pPr>
-            <a:r>
-              <a:rPr lang="en-US" sz="850" dirty="0">
-                <a:solidFill>
-                  <a:srgbClr val="4D4D4D"/>
-                </a:solidFill>
-                <a:latin typeface="Meiryo" pitchFamily="34" charset="0"/>
-                <a:ea typeface="Meiryo" pitchFamily="34" charset="-122"/>
-                <a:cs typeface="Meiryo" pitchFamily="34" charset="-120"/>
-              </a:rPr>
-              <a:t>ロット追跡</a:t>
-            </a:r>
-            <a:endParaRPr lang="en-US" sz="1400" dirty="0"/>
-          </a:p>
-        </p:txBody>
-      </p:sp>
-      <p:sp>
-        <p:nvSpPr>
           <p:cNvPr id="10" name="Text 7"/>
           <p:cNvSpPr txBox="1"/>
           <p:nvPr/>
         </p:nvSpPr>
         <p:spPr>
           <a:xfrm>
-            <a:off x="1554480" y="1865376"/>
-            <a:ext cx="2286000" cy="475488"/>
+            <a:off x="365760" y="2048256"/>
+            <a:ext cx="1143000" cy="438912"/>
           </a:xfrm>
           <a:prstGeom prst="rect">
             <a:avLst/>
@@ -6662,7 +6659,7 @@
               <a:buNone/>
             </a:pPr>
             <a:r>
-              <a:rPr lang="en-US" sz="950" dirty="0">
+              <a:rPr lang="en-US" sz="1200" b="1" dirty="0">
                 <a:solidFill>
                   <a:srgbClr val="1A1A1A"/>
                 </a:solidFill>
@@ -6670,9 +6667,29 @@
                 <a:ea typeface="Meiryo" pitchFamily="34" charset="-122"/>
                 <a:cs typeface="Meiryo" pitchFamily="34" charset="-120"/>
               </a:rPr>
-              <a:t>材料ロットから出荷試験、納入先の施工記録まで一本で追跡</a:t>
-            </a:r>
-            <a:endParaRPr lang="en-US" sz="950" dirty="0"/>
+              <a:t>TRACE</a:t>
+            </a:r>
+            <a:endParaRPr lang="en-US" sz="1400" dirty="0"/>
+          </a:p>
+          <a:p>
+            <a:pPr algn="l" indent="0" marL="0">
+              <a:lnSpc>
+                <a:spcPct val="115000"/>
+              </a:lnSpc>
+              <a:buNone/>
+            </a:pPr>
+            <a:r>
+              <a:rPr lang="en-US" sz="850" dirty="0">
+                <a:solidFill>
+                  <a:srgbClr val="4D4D4D"/>
+                </a:solidFill>
+                <a:latin typeface="Meiryo" pitchFamily="34" charset="0"/>
+                <a:ea typeface="Meiryo" pitchFamily="34" charset="-122"/>
+                <a:cs typeface="Meiryo" pitchFamily="34" charset="-120"/>
+              </a:rPr>
+              <a:t>ロット追跡</a:t>
+            </a:r>
+            <a:endParaRPr lang="en-US" sz="1400" dirty="0"/>
           </a:p>
         </p:txBody>
       </p:sp>
@@ -6684,8 +6701,8 @@
         </p:nvSpPr>
         <p:spPr>
           <a:xfrm>
-            <a:off x="3886200" y="1865376"/>
-            <a:ext cx="548640" cy="475488"/>
+            <a:off x="1554480" y="2048256"/>
+            <a:ext cx="2286000" cy="438912"/>
           </a:xfrm>
           <a:prstGeom prst="rect">
             <a:avLst/>
@@ -6697,6 +6714,48 @@
           <a:bodyPr wrap="square" lIns="0" tIns="0" rIns="0" bIns="0" rtlCol="0" anchor="ctr"/>
           <a:lstStyle/>
           <a:p>
+            <a:pPr algn="l" indent="0" marL="0">
+              <a:lnSpc>
+                <a:spcPct val="115000"/>
+              </a:lnSpc>
+              <a:buNone/>
+            </a:pPr>
+            <a:r>
+              <a:rPr lang="en-US" sz="950" dirty="0">
+                <a:solidFill>
+                  <a:srgbClr val="1A1A1A"/>
+                </a:solidFill>
+                <a:latin typeface="Meiryo" pitchFamily="34" charset="0"/>
+                <a:ea typeface="Meiryo" pitchFamily="34" charset="-122"/>
+                <a:cs typeface="Meiryo" pitchFamily="34" charset="-120"/>
+              </a:rPr>
+              <a:t>材料ロットから出荷試験、納入先の施工記録まで一本で追跡</a:t>
+            </a:r>
+            <a:endParaRPr lang="en-US" sz="950" dirty="0"/>
+          </a:p>
+        </p:txBody>
+      </p:sp>
+      <p:sp>
+        <p:nvSpPr>
+          <p:cNvPr id="12" name="Text 9"/>
+          <p:cNvSpPr txBox="1"/>
+          <p:nvPr/>
+        </p:nvSpPr>
+        <p:spPr>
+          <a:xfrm>
+            <a:off x="3886200" y="2048256"/>
+            <a:ext cx="548640" cy="438912"/>
+          </a:xfrm>
+          <a:prstGeom prst="rect">
+            <a:avLst/>
+          </a:prstGeom>
+          <a:noFill/>
+          <a:ln/>
+        </p:spPr>
+        <p:txBody>
+          <a:bodyPr wrap="square" lIns="0" tIns="0" rIns="0" bIns="0" rtlCol="0" anchor="ctr"/>
+          <a:lstStyle/>
+          <a:p>
             <a:pPr algn="r" indent="0" marL="0">
               <a:lnSpc>
                 <a:spcPct val="115000"/>
@@ -6720,13 +6779,13 @@
       </p:sp>
       <p:sp>
         <p:nvSpPr>
-          <p:cNvPr id="12" name="Shape 9"/>
+          <p:cNvPr id="13" name="Shape 10"/>
           <p:cNvSpPr/>
           <p:nvPr/>
         </p:nvSpPr>
         <p:spPr>
           <a:xfrm>
-            <a:off x="365760" y="2377440"/>
+            <a:off x="365760" y="2523744"/>
             <a:ext cx="4069080" cy="0"/>
           </a:xfrm>
           <a:prstGeom prst="line">
@@ -6743,76 +6802,14 @@
       </p:sp>
       <p:sp>
         <p:nvSpPr>
-          <p:cNvPr id="13" name="Text 10"/>
-          <p:cNvSpPr txBox="1"/>
-          <p:nvPr/>
-        </p:nvSpPr>
-        <p:spPr>
-          <a:xfrm>
-            <a:off x="365760" y="2414016"/>
-            <a:ext cx="1143000" cy="475488"/>
-          </a:xfrm>
-          <a:prstGeom prst="rect">
-            <a:avLst/>
-          </a:prstGeom>
-          <a:noFill/>
-          <a:ln/>
-        </p:spPr>
-        <p:txBody>
-          <a:bodyPr wrap="square" lIns="0" tIns="0" rIns="0" bIns="0" rtlCol="0" anchor="ctr"/>
-          <a:lstStyle/>
-          <a:p>
-            <a:pPr algn="l" indent="0" marL="0">
-              <a:lnSpc>
-                <a:spcPct val="115000"/>
-              </a:lnSpc>
-              <a:buNone/>
-            </a:pPr>
-            <a:r>
-              <a:rPr lang="en-US" sz="1200" b="1" dirty="0">
-                <a:solidFill>
-                  <a:srgbClr val="1A1A1A"/>
-                </a:solidFill>
-                <a:latin typeface="Meiryo" pitchFamily="34" charset="0"/>
-                <a:ea typeface="Meiryo" pitchFamily="34" charset="-122"/>
-                <a:cs typeface="Meiryo" pitchFamily="34" charset="-120"/>
-              </a:rPr>
-              <a:t>KNACK</a:t>
-            </a:r>
-            <a:endParaRPr lang="en-US" sz="1400" dirty="0"/>
-          </a:p>
-          <a:p>
-            <a:pPr algn="l" indent="0" marL="0">
-              <a:lnSpc>
-                <a:spcPct val="115000"/>
-              </a:lnSpc>
-              <a:buNone/>
-            </a:pPr>
-            <a:r>
-              <a:rPr lang="en-US" sz="850" dirty="0">
-                <a:solidFill>
-                  <a:srgbClr val="4D4D4D"/>
-                </a:solidFill>
-                <a:latin typeface="Meiryo" pitchFamily="34" charset="0"/>
-                <a:ea typeface="Meiryo" pitchFamily="34" charset="-122"/>
-                <a:cs typeface="Meiryo" pitchFamily="34" charset="-120"/>
-              </a:rPr>
-              <a:t>技能継承</a:t>
-            </a:r>
-            <a:endParaRPr lang="en-US" sz="1400" dirty="0"/>
-          </a:p>
-        </p:txBody>
-      </p:sp>
-      <p:sp>
-        <p:nvSpPr>
           <p:cNvPr id="14" name="Text 11"/>
           <p:cNvSpPr txBox="1"/>
           <p:nvPr/>
         </p:nvSpPr>
         <p:spPr>
           <a:xfrm>
-            <a:off x="1554480" y="2414016"/>
-            <a:ext cx="2286000" cy="475488"/>
+            <a:off x="365760" y="2560320"/>
+            <a:ext cx="1143000" cy="438912"/>
           </a:xfrm>
           <a:prstGeom prst="rect">
             <a:avLst/>
@@ -6831,7 +6828,7 @@
               <a:buNone/>
             </a:pPr>
             <a:r>
-              <a:rPr lang="en-US" sz="950" dirty="0">
+              <a:rPr lang="en-US" sz="1200" b="1" dirty="0">
                 <a:solidFill>
                   <a:srgbClr val="1A1A1A"/>
                 </a:solidFill>
@@ -6839,9 +6836,29 @@
                 <a:ea typeface="Meiryo" pitchFamily="34" charset="-122"/>
                 <a:cs typeface="Meiryo" pitchFamily="34" charset="-120"/>
               </a:rPr>
-              <a:t>熟練者の条件出しと判断理由を記録し、類似事例と推奨値を提示</a:t>
-            </a:r>
-            <a:endParaRPr lang="en-US" sz="950" dirty="0"/>
+              <a:t>KNACK</a:t>
+            </a:r>
+            <a:endParaRPr lang="en-US" sz="1400" dirty="0"/>
+          </a:p>
+          <a:p>
+            <a:pPr algn="l" indent="0" marL="0">
+              <a:lnSpc>
+                <a:spcPct val="115000"/>
+              </a:lnSpc>
+              <a:buNone/>
+            </a:pPr>
+            <a:r>
+              <a:rPr lang="en-US" sz="850" dirty="0">
+                <a:solidFill>
+                  <a:srgbClr val="4D4D4D"/>
+                </a:solidFill>
+                <a:latin typeface="Meiryo" pitchFamily="34" charset="0"/>
+                <a:ea typeface="Meiryo" pitchFamily="34" charset="-122"/>
+                <a:cs typeface="Meiryo" pitchFamily="34" charset="-120"/>
+              </a:rPr>
+              <a:t>技能継承（KM）</a:t>
+            </a:r>
+            <a:endParaRPr lang="en-US" sz="1400" dirty="0"/>
           </a:p>
         </p:txBody>
       </p:sp>
@@ -6853,8 +6870,8 @@
         </p:nvSpPr>
         <p:spPr>
           <a:xfrm>
-            <a:off x="3886200" y="2414016"/>
-            <a:ext cx="548640" cy="475488"/>
+            <a:off x="1554480" y="2560320"/>
+            <a:ext cx="2286000" cy="438912"/>
           </a:xfrm>
           <a:prstGeom prst="rect">
             <a:avLst/>
@@ -6866,6 +6883,48 @@
           <a:bodyPr wrap="square" lIns="0" tIns="0" rIns="0" bIns="0" rtlCol="0" anchor="ctr"/>
           <a:lstStyle/>
           <a:p>
+            <a:pPr algn="l" indent="0" marL="0">
+              <a:lnSpc>
+                <a:spcPct val="115000"/>
+              </a:lnSpc>
+              <a:buNone/>
+            </a:pPr>
+            <a:r>
+              <a:rPr lang="en-US" sz="950" dirty="0">
+                <a:solidFill>
+                  <a:srgbClr val="1A1A1A"/>
+                </a:solidFill>
+                <a:latin typeface="Meiryo" pitchFamily="34" charset="0"/>
+                <a:ea typeface="Meiryo" pitchFamily="34" charset="-122"/>
+                <a:cs typeface="Meiryo" pitchFamily="34" charset="-120"/>
+              </a:rPr>
+              <a:t>SECIモデルの表出化。熟練者の判断理由を形式知にし、推奨値を提示</a:t>
+            </a:r>
+            <a:endParaRPr lang="en-US" sz="950" dirty="0"/>
+          </a:p>
+        </p:txBody>
+      </p:sp>
+      <p:sp>
+        <p:nvSpPr>
+          <p:cNvPr id="16" name="Text 13"/>
+          <p:cNvSpPr txBox="1"/>
+          <p:nvPr/>
+        </p:nvSpPr>
+        <p:spPr>
+          <a:xfrm>
+            <a:off x="3886200" y="2560320"/>
+            <a:ext cx="548640" cy="438912"/>
+          </a:xfrm>
+          <a:prstGeom prst="rect">
+            <a:avLst/>
+          </a:prstGeom>
+          <a:noFill/>
+          <a:ln/>
+        </p:spPr>
+        <p:txBody>
+          <a:bodyPr wrap="square" lIns="0" tIns="0" rIns="0" bIns="0" rtlCol="0" anchor="ctr"/>
+          <a:lstStyle/>
+          <a:p>
             <a:pPr algn="r" indent="0" marL="0">
               <a:lnSpc>
                 <a:spcPct val="115000"/>
@@ -6889,13 +6948,13 @@
       </p:sp>
       <p:sp>
         <p:nvSpPr>
-          <p:cNvPr id="16" name="Shape 13"/>
+          <p:cNvPr id="17" name="Shape 14"/>
           <p:cNvSpPr/>
           <p:nvPr/>
         </p:nvSpPr>
         <p:spPr>
           <a:xfrm>
-            <a:off x="365760" y="2926080"/>
+            <a:off x="365760" y="3035808"/>
             <a:ext cx="4069080" cy="0"/>
           </a:xfrm>
           <a:prstGeom prst="line">
@@ -6912,76 +6971,14 @@
       </p:sp>
       <p:sp>
         <p:nvSpPr>
-          <p:cNvPr id="17" name="Text 14"/>
-          <p:cNvSpPr txBox="1"/>
-          <p:nvPr/>
-        </p:nvSpPr>
-        <p:spPr>
-          <a:xfrm>
-            <a:off x="365760" y="2962656"/>
-            <a:ext cx="1143000" cy="475488"/>
-          </a:xfrm>
-          <a:prstGeom prst="rect">
-            <a:avLst/>
-          </a:prstGeom>
-          <a:noFill/>
-          <a:ln/>
-        </p:spPr>
-        <p:txBody>
-          <a:bodyPr wrap="square" lIns="0" tIns="0" rIns="0" bIns="0" rtlCol="0" anchor="ctr"/>
-          <a:lstStyle/>
-          <a:p>
-            <a:pPr algn="l" indent="0" marL="0">
-              <a:lnSpc>
-                <a:spcPct val="115000"/>
-              </a:lnSpc>
-              <a:buNone/>
-            </a:pPr>
-            <a:r>
-              <a:rPr lang="en-US" sz="1200" b="1" dirty="0">
-                <a:solidFill>
-                  <a:srgbClr val="1A1A1A"/>
-                </a:solidFill>
-                <a:latin typeface="Meiryo" pitchFamily="34" charset="0"/>
-                <a:ea typeface="Meiryo" pitchFamily="34" charset="-122"/>
-                <a:cs typeface="Meiryo" pitchFamily="34" charset="-120"/>
-              </a:rPr>
-              <a:t>TWIN</a:t>
-            </a:r>
-            <a:endParaRPr lang="en-US" sz="1400" dirty="0"/>
-          </a:p>
-          <a:p>
-            <a:pPr algn="l" indent="0" marL="0">
-              <a:lnSpc>
-                <a:spcPct val="115000"/>
-              </a:lnSpc>
-              <a:buNone/>
-            </a:pPr>
-            <a:r>
-              <a:rPr lang="en-US" sz="850" dirty="0">
-                <a:solidFill>
-                  <a:srgbClr val="4D4D4D"/>
-                </a:solidFill>
-                <a:latin typeface="Meiryo" pitchFamily="34" charset="0"/>
-                <a:ea typeface="Meiryo" pitchFamily="34" charset="-122"/>
-                <a:cs typeface="Meiryo" pitchFamily="34" charset="-120"/>
-              </a:rPr>
-              <a:t>工程デジタルツイン</a:t>
-            </a:r>
-            <a:endParaRPr lang="en-US" sz="1400" dirty="0"/>
-          </a:p>
-        </p:txBody>
-      </p:sp>
-      <p:sp>
-        <p:nvSpPr>
           <p:cNvPr id="18" name="Text 15"/>
           <p:cNvSpPr txBox="1"/>
           <p:nvPr/>
         </p:nvSpPr>
         <p:spPr>
           <a:xfrm>
-            <a:off x="1554480" y="2962656"/>
-            <a:ext cx="2286000" cy="475488"/>
+            <a:off x="365760" y="3072384"/>
+            <a:ext cx="1143000" cy="438912"/>
           </a:xfrm>
           <a:prstGeom prst="rect">
             <a:avLst/>
@@ -7000,7 +6997,7 @@
               <a:buNone/>
             </a:pPr>
             <a:r>
-              <a:rPr lang="en-US" sz="950" dirty="0">
+              <a:rPr lang="en-US" sz="1200" b="1" dirty="0">
                 <a:solidFill>
                   <a:srgbClr val="1A1A1A"/>
                 </a:solidFill>
@@ -7008,9 +7005,29 @@
                 <a:ea typeface="Meiryo" pitchFamily="34" charset="-122"/>
                 <a:cs typeface="Meiryo" pitchFamily="34" charset="-120"/>
               </a:rPr>
-              <a:t>欠員・設備停止時の計画組み替えの影響を事前に試算</a:t>
-            </a:r>
-            <a:endParaRPr lang="en-US" sz="950" dirty="0"/>
+              <a:t>TWIN</a:t>
+            </a:r>
+            <a:endParaRPr lang="en-US" sz="1400" dirty="0"/>
+          </a:p>
+          <a:p>
+            <a:pPr algn="l" indent="0" marL="0">
+              <a:lnSpc>
+                <a:spcPct val="115000"/>
+              </a:lnSpc>
+              <a:buNone/>
+            </a:pPr>
+            <a:r>
+              <a:rPr lang="en-US" sz="850" dirty="0">
+                <a:solidFill>
+                  <a:srgbClr val="4D4D4D"/>
+                </a:solidFill>
+                <a:latin typeface="Meiryo" pitchFamily="34" charset="0"/>
+                <a:ea typeface="Meiryo" pitchFamily="34" charset="-122"/>
+                <a:cs typeface="Meiryo" pitchFamily="34" charset="-120"/>
+              </a:rPr>
+              <a:t>工程デジタルツイン</a:t>
+            </a:r>
+            <a:endParaRPr lang="en-US" sz="1400" dirty="0"/>
           </a:p>
         </p:txBody>
       </p:sp>
@@ -7022,8 +7039,8 @@
         </p:nvSpPr>
         <p:spPr>
           <a:xfrm>
-            <a:off x="3886200" y="2962656"/>
-            <a:ext cx="548640" cy="475488"/>
+            <a:off x="1554480" y="3072384"/>
+            <a:ext cx="2286000" cy="438912"/>
           </a:xfrm>
           <a:prstGeom prst="rect">
             <a:avLst/>
@@ -7035,6 +7052,48 @@
           <a:bodyPr wrap="square" lIns="0" tIns="0" rIns="0" bIns="0" rtlCol="0" anchor="ctr"/>
           <a:lstStyle/>
           <a:p>
+            <a:pPr algn="l" indent="0" marL="0">
+              <a:lnSpc>
+                <a:spcPct val="115000"/>
+              </a:lnSpc>
+              <a:buNone/>
+            </a:pPr>
+            <a:r>
+              <a:rPr lang="en-US" sz="950" dirty="0">
+                <a:solidFill>
+                  <a:srgbClr val="1A1A1A"/>
+                </a:solidFill>
+                <a:latin typeface="Meiryo" pitchFamily="34" charset="0"/>
+                <a:ea typeface="Meiryo" pitchFamily="34" charset="-122"/>
+                <a:cs typeface="Meiryo" pitchFamily="34" charset="-120"/>
+              </a:rPr>
+              <a:t>欠員・設備停止時の計画組み替えの影響を事前に試算</a:t>
+            </a:r>
+            <a:endParaRPr lang="en-US" sz="950" dirty="0"/>
+          </a:p>
+        </p:txBody>
+      </p:sp>
+      <p:sp>
+        <p:nvSpPr>
+          <p:cNvPr id="20" name="Text 17"/>
+          <p:cNvSpPr txBox="1"/>
+          <p:nvPr/>
+        </p:nvSpPr>
+        <p:spPr>
+          <a:xfrm>
+            <a:off x="3886200" y="3072384"/>
+            <a:ext cx="548640" cy="438912"/>
+          </a:xfrm>
+          <a:prstGeom prst="rect">
+            <a:avLst/>
+          </a:prstGeom>
+          <a:noFill/>
+          <a:ln/>
+        </p:spPr>
+        <p:txBody>
+          <a:bodyPr wrap="square" lIns="0" tIns="0" rIns="0" bIns="0" rtlCol="0" anchor="ctr"/>
+          <a:lstStyle/>
+          <a:p>
             <a:pPr algn="r" indent="0" marL="0">
               <a:lnSpc>
                 <a:spcPct val="115000"/>
@@ -7058,13 +7117,13 @@
       </p:sp>
       <p:sp>
         <p:nvSpPr>
-          <p:cNvPr id="20" name="Shape 17"/>
+          <p:cNvPr id="21" name="Shape 18"/>
           <p:cNvSpPr/>
           <p:nvPr/>
         </p:nvSpPr>
         <p:spPr>
           <a:xfrm>
-            <a:off x="365760" y="3474720"/>
+            <a:off x="365760" y="3547872"/>
             <a:ext cx="4069080" cy="0"/>
           </a:xfrm>
           <a:prstGeom prst="line">
@@ -7081,76 +7140,14 @@
       </p:sp>
       <p:sp>
         <p:nvSpPr>
-          <p:cNvPr id="21" name="Text 18"/>
-          <p:cNvSpPr txBox="1"/>
-          <p:nvPr/>
-        </p:nvSpPr>
-        <p:spPr>
-          <a:xfrm>
-            <a:off x="365760" y="3511296"/>
-            <a:ext cx="1143000" cy="475488"/>
-          </a:xfrm>
-          <a:prstGeom prst="rect">
-            <a:avLst/>
-          </a:prstGeom>
-          <a:noFill/>
-          <a:ln/>
-        </p:spPr>
-        <p:txBody>
-          <a:bodyPr wrap="square" lIns="0" tIns="0" rIns="0" bIns="0" rtlCol="0" anchor="ctr"/>
-          <a:lstStyle/>
-          <a:p>
-            <a:pPr algn="l" indent="0" marL="0">
-              <a:lnSpc>
-                <a:spcPct val="115000"/>
-              </a:lnSpc>
-              <a:buNone/>
-            </a:pPr>
-            <a:r>
-              <a:rPr lang="en-US" sz="1200" b="1" dirty="0">
-                <a:solidFill>
-                  <a:srgbClr val="1A1A1A"/>
-                </a:solidFill>
-                <a:latin typeface="Meiryo" pitchFamily="34" charset="0"/>
-                <a:ea typeface="Meiryo" pitchFamily="34" charset="-122"/>
-                <a:cs typeface="Meiryo" pitchFamily="34" charset="-120"/>
-              </a:rPr>
-              <a:t>FLOW</a:t>
-            </a:r>
-            <a:endParaRPr lang="en-US" sz="1400" dirty="0"/>
-          </a:p>
-          <a:p>
-            <a:pPr algn="l" indent="0" marL="0">
-              <a:lnSpc>
-                <a:spcPct val="115000"/>
-              </a:lnSpc>
-              <a:buNone/>
-            </a:pPr>
-            <a:r>
-              <a:rPr lang="en-US" sz="850" dirty="0">
-                <a:solidFill>
-                  <a:srgbClr val="4D4D4D"/>
-                </a:solidFill>
-                <a:latin typeface="Meiryo" pitchFamily="34" charset="0"/>
-                <a:ea typeface="Meiryo" pitchFamily="34" charset="-122"/>
-                <a:cs typeface="Meiryo" pitchFamily="34" charset="-120"/>
-              </a:rPr>
-              <a:t>自動化連携</a:t>
-            </a:r>
-            <a:endParaRPr lang="en-US" sz="1400" dirty="0"/>
-          </a:p>
-        </p:txBody>
-      </p:sp>
-      <p:sp>
-        <p:nvSpPr>
           <p:cNvPr id="22" name="Text 19"/>
           <p:cNvSpPr txBox="1"/>
           <p:nvPr/>
         </p:nvSpPr>
         <p:spPr>
           <a:xfrm>
-            <a:off x="1554480" y="3511296"/>
-            <a:ext cx="2286000" cy="475488"/>
+            <a:off x="365760" y="3584448"/>
+            <a:ext cx="1143000" cy="438912"/>
           </a:xfrm>
           <a:prstGeom prst="rect">
             <a:avLst/>
@@ -7169,7 +7166,7 @@
               <a:buNone/>
             </a:pPr>
             <a:r>
-              <a:rPr lang="en-US" sz="950" dirty="0">
+              <a:rPr lang="en-US" sz="1200" b="1" dirty="0">
                 <a:solidFill>
                   <a:srgbClr val="1A1A1A"/>
                 </a:solidFill>
@@ -7177,9 +7174,29 @@
                 <a:ea typeface="Meiryo" pitchFamily="34" charset="-122"/>
                 <a:cs typeface="Meiryo" pitchFamily="34" charset="-120"/>
               </a:rPr>
-              <a:t>搬送ロボット・検査AIと人の作業分担を再設計</a:t>
-            </a:r>
-            <a:endParaRPr lang="en-US" sz="950" dirty="0"/>
+              <a:t>FLOW</a:t>
+            </a:r>
+            <a:endParaRPr lang="en-US" sz="1400" dirty="0"/>
+          </a:p>
+          <a:p>
+            <a:pPr algn="l" indent="0" marL="0">
+              <a:lnSpc>
+                <a:spcPct val="115000"/>
+              </a:lnSpc>
+              <a:buNone/>
+            </a:pPr>
+            <a:r>
+              <a:rPr lang="en-US" sz="850" dirty="0">
+                <a:solidFill>
+                  <a:srgbClr val="4D4D4D"/>
+                </a:solidFill>
+                <a:latin typeface="Meiryo" pitchFamily="34" charset="0"/>
+                <a:ea typeface="Meiryo" pitchFamily="34" charset="-122"/>
+                <a:cs typeface="Meiryo" pitchFamily="34" charset="-120"/>
+              </a:rPr>
+              <a:t>自動化連携</a:t>
+            </a:r>
+            <a:endParaRPr lang="en-US" sz="1400" dirty="0"/>
           </a:p>
         </p:txBody>
       </p:sp>
@@ -7191,8 +7208,8 @@
         </p:nvSpPr>
         <p:spPr>
           <a:xfrm>
-            <a:off x="3886200" y="3511296"/>
-            <a:ext cx="548640" cy="475488"/>
+            <a:off x="1554480" y="3584448"/>
+            <a:ext cx="2286000" cy="438912"/>
           </a:xfrm>
           <a:prstGeom prst="rect">
             <a:avLst/>
@@ -7204,6 +7221,48 @@
           <a:bodyPr wrap="square" lIns="0" tIns="0" rIns="0" bIns="0" rtlCol="0" anchor="ctr"/>
           <a:lstStyle/>
           <a:p>
+            <a:pPr algn="l" indent="0" marL="0">
+              <a:lnSpc>
+                <a:spcPct val="115000"/>
+              </a:lnSpc>
+              <a:buNone/>
+            </a:pPr>
+            <a:r>
+              <a:rPr lang="en-US" sz="950" dirty="0">
+                <a:solidFill>
+                  <a:srgbClr val="1A1A1A"/>
+                </a:solidFill>
+                <a:latin typeface="Meiryo" pitchFamily="34" charset="0"/>
+                <a:ea typeface="Meiryo" pitchFamily="34" charset="-122"/>
+                <a:cs typeface="Meiryo" pitchFamily="34" charset="-120"/>
+              </a:rPr>
+              <a:t>搬送ロボット・検査AIと人の作業分担を再設計</a:t>
+            </a:r>
+            <a:endParaRPr lang="en-US" sz="950" dirty="0"/>
+          </a:p>
+        </p:txBody>
+      </p:sp>
+      <p:sp>
+        <p:nvSpPr>
+          <p:cNvPr id="24" name="Text 21"/>
+          <p:cNvSpPr txBox="1"/>
+          <p:nvPr/>
+        </p:nvSpPr>
+        <p:spPr>
+          <a:xfrm>
+            <a:off x="3886200" y="3584448"/>
+            <a:ext cx="548640" cy="438912"/>
+          </a:xfrm>
+          <a:prstGeom prst="rect">
+            <a:avLst/>
+          </a:prstGeom>
+          <a:noFill/>
+          <a:ln/>
+        </p:spPr>
+        <p:txBody>
+          <a:bodyPr wrap="square" lIns="0" tIns="0" rIns="0" bIns="0" rtlCol="0" anchor="ctr"/>
+          <a:lstStyle/>
+          <a:p>
             <a:pPr algn="r" indent="0" marL="0">
               <a:lnSpc>
                 <a:spcPct val="115000"/>
@@ -7227,13 +7286,13 @@
       </p:sp>
       <p:sp>
         <p:nvSpPr>
-          <p:cNvPr id="24" name="Shape 21"/>
+          <p:cNvPr id="25" name="Shape 22"/>
           <p:cNvSpPr/>
           <p:nvPr/>
         </p:nvSpPr>
         <p:spPr>
           <a:xfrm>
-            <a:off x="365760" y="4023360"/>
+            <a:off x="365760" y="4059936"/>
             <a:ext cx="4069080" cy="0"/>
           </a:xfrm>
           <a:prstGeom prst="line">
@@ -7250,7 +7309,7 @@
       </p:sp>
       <p:sp>
         <p:nvSpPr>
-          <p:cNvPr id="25" name="Text 22"/>
+          <p:cNvPr id="26" name="Text 23"/>
           <p:cNvSpPr txBox="1"/>
           <p:nvPr/>
         </p:nvSpPr>
@@ -7292,7 +7351,7 @@
       </p:sp>
       <p:graphicFrame>
         <p:nvGraphicFramePr>
-          <p:cNvPr id="26" name="roi-chart" descr=""/>
+          <p:cNvPr id="27" name="roi-chart" descr=""/>
           <p:cNvGraphicFramePr/>
           <p:nvPr/>
         </p:nvGraphicFramePr>
@@ -7308,7 +7367,7 @@
       </p:graphicFrame>
       <p:sp>
         <p:nvSpPr>
-          <p:cNvPr id="27" name="Text 23"/>
+          <p:cNvPr id="28" name="Text 24"/>
           <p:cNvSpPr txBox="1"/>
           <p:nvPr/>
         </p:nvSpPr>
@@ -7350,7 +7409,7 @@
       </p:sp>
       <p:sp>
         <p:nvSpPr>
-          <p:cNvPr id="28" name="Text 24"/>
+          <p:cNvPr id="29" name="Text 25"/>
           <p:cNvSpPr txBox="1"/>
           <p:nvPr/>
         </p:nvSpPr>
@@ -7392,7 +7451,7 @@
       </p:sp>
       <p:sp>
         <p:nvSpPr>
-          <p:cNvPr id="29" name="Text 25"/>
+          <p:cNvPr id="30" name="Text 26"/>
           <p:cNvSpPr txBox="1"/>
           <p:nvPr/>
         </p:nvSpPr>
@@ -7434,7 +7493,7 @@
       </p:sp>
       <p:sp>
         <p:nvSpPr>
-          <p:cNvPr id="30" name="Text 26"/>
+          <p:cNvPr id="31" name="Text 27"/>
           <p:cNvSpPr txBox="1"/>
           <p:nvPr/>
         </p:nvSpPr>
@@ -7468,7 +7527,7 @@
                 <a:ea typeface="Meiryo" pitchFamily="34" charset="-122"/>
                 <a:cs typeface="Meiryo" pitchFamily="34" charset="-120"/>
               </a:rPr>
-              <a:t>横軸：経過月数。時間単価4,000円（780万円÷1,950h）×月6h×100名＝月240万円。月6hは建設業の書類電子化実績を準用した仮定</a:t>
+              <a:t>価格＝基盤100万＋登録20万×5＋モジュール50万×2。効果＝時間単価4,000円×月6h×100名＝月240万（月6hは建設業の電子化実績を準用した仮定）。横軸は経過月数</a:t>
             </a:r>
             <a:endParaRPr lang="en-US" sz="800" dirty="0"/>
           </a:p>
@@ -7476,7 +7535,7 @@
       </p:sp>
       <p:sp>
         <p:nvSpPr>
-          <p:cNvPr id="31" name="Shape 27"/>
+          <p:cNvPr id="32" name="Shape 28"/>
           <p:cNvSpPr/>
           <p:nvPr/>
         </p:nvSpPr>
@@ -7496,7 +7555,7 @@
       </p:sp>
       <p:sp>
         <p:nvSpPr>
-          <p:cNvPr id="32" name="Shape 28"/>
+          <p:cNvPr id="33" name="Shape 29"/>
           <p:cNvSpPr/>
           <p:nvPr/>
         </p:nvSpPr>
@@ -7519,7 +7578,7 @@
       </p:sp>
       <p:sp>
         <p:nvSpPr>
-          <p:cNvPr id="33" name="Text 29"/>
+          <p:cNvPr id="34" name="Text 30"/>
           <p:cNvSpPr txBox="1"/>
           <p:nvPr/>
         </p:nvSpPr>
@@ -7545,6 +7604,23 @@
               <a:buNone/>
             </a:pPr>
             <a:r>
+              <a:rPr lang="en-US" sz="1000" b="1" dirty="0">
+                <a:solidFill>
+                  <a:srgbClr val="1A1A1A"/>
+                </a:solidFill>
+                <a:latin typeface="Meiryo" pitchFamily="34" charset="0"/>
+                <a:ea typeface="Meiryo" pitchFamily="34" charset="-122"/>
+                <a:cs typeface="Meiryo" pitchFamily="34" charset="-120"/>
+              </a:rPr>
+              <a:t>価格戦略：</a:t>
+            </a:r>
+            <a:pPr algn="l" indent="0" marL="0">
+              <a:lnSpc>
+                <a:spcPct val="115000"/>
+              </a:lnSpc>
+              <a:buNone/>
+            </a:pPr>
+            <a:r>
               <a:rPr lang="en-US" sz="1000" dirty="0">
                 <a:solidFill>
                   <a:srgbClr val="1A1A1A"/>
@@ -7553,7 +7629,7 @@
                 <a:ea typeface="Meiryo" pitchFamily="34" charset="-122"/>
                 <a:cs typeface="Meiryo" pitchFamily="34" charset="-120"/>
               </a:rPr>
-              <a:t>基盤100万円＋登録20万円×平均5＋モジュール50万円×平均2本 ＝ </a:t>
+              <a:t>価値基準価格。</a:t>
             </a:r>
             <a:pPr algn="l" indent="0" marL="0">
               <a:lnSpc>
@@ -7570,7 +7646,7 @@
                 <a:ea typeface="Meiryo" pitchFamily="34" charset="-122"/>
                 <a:cs typeface="Meiryo" pitchFamily="34" charset="-120"/>
               </a:rPr>
-              <a:t>1拠点あたり年300万円</a:t>
+              <a:t>年300万円＝顧客効果2,880万円の約1割</a:t>
             </a:r>
             <a:pPr algn="l" indent="0" marL="0">
               <a:lnSpc>
@@ -7744,1566 +7820,308 @@
                 <a:ea typeface="Meiryo" pitchFamily="34" charset="-122"/>
                 <a:cs typeface="Meiryo" pitchFamily="34" charset="-120"/>
               </a:rPr>
-              <a:t>コンサルでも、MESでも、ロボットベンダーでもない。導入済みの工場こそ見込み顧客</a:t>
+              <a:t>空いているのは「判断の理由」を「仕組み」で扱う象限。ニッチャーとして差別化集中で取る</a:t>
             </a:r>
             <a:endParaRPr lang="en-US" sz="1200" dirty="0"/>
           </a:p>
         </p:txBody>
       </p:sp>
-      <p:graphicFrame>
-        <p:nvGraphicFramePr>
-          <p:cNvPr id="6" name="competitors"/>
-          <p:cNvGraphicFramePr>
-            <a:graphicFrameLocks noGrp="1"/>
-          </p:cNvGraphicFramePr>
-          <p:nvPr>
-            <p:extLst>
-              <p:ext uri="{D42A27DB-BD31-4B8C-83A1-F6EECF244321}">
-                <p14:modId xmlns:p14="http://schemas.microsoft.com/office/powerpoint/2010/main" val="1579011935"/>
-              </p:ext>
-            </p:extLst>
-          </p:nvPr>
-        </p:nvGraphicFramePr>
-        <p:xfrm>
-          <a:off x="365760" y="1051560"/>
-          <a:ext cx="8412480" cy="914400"/>
-        </p:xfrm>
-        <a:graphic>
-          <a:graphicData uri="http://schemas.openxmlformats.org/drawingml/2006/table">
-            <a:tbl>
-              <a:tblPr/>
-              <a:tblGrid>
-                <a:gridCol w="1280160"/>
-                <a:gridCol w="1691640"/>
-                <a:gridCol w="1783080"/>
-                <a:gridCol w="1783080"/>
-                <a:gridCol w="1874520"/>
-              </a:tblGrid>
-              <a:tr h="265176">
-                <a:tc>
-                  <a:txBody>
-                    <a:bodyPr/>
-                    <a:lstStyle/>
-                    <a:p>
-                      <a:pPr algn="l" indent="0" marL="0">
-                        <a:buNone/>
-                      </a:pPr>
-                      <a:endParaRPr lang="en-US" sz="950" dirty="0">
-                        <a:latin typeface="Meiryo" charset="0"/>
-                        <a:ea typeface="Meiryo" charset="0"/>
-                        <a:cs typeface="Meiryo" charset="0"/>
-                      </a:endParaRPr>
-                    </a:p>
-                  </a:txBody>
-                  <a:tcPr marL="54864" marR="54864" marT="18288" marB="18288" anchor="ctr">
-                    <a:lnL w="0" cap="flat" cmpd="sng" algn="ctr">
-                      <a:noFill/>
-                    </a:lnL>
-                    <a:lnR w="0" cap="flat" cmpd="sng" algn="ctr">
-                      <a:noFill/>
-                    </a:lnR>
-                    <a:lnT w="0" cap="flat" cmpd="sng" algn="ctr">
-                      <a:noFill/>
-                    </a:lnT>
-                    <a:lnB w="19050" cap="flat" cmpd="sng" algn="ctr">
-                      <a:solidFill>
-                        <a:srgbClr val="1A1A1A"/>
-                      </a:solidFill>
-                      <a:prstDash val="solid"/>
-                      <a:round/>
-                      <a:headEnd type="none" w="med" len="med"/>
-                      <a:tailEnd type="none" w="med" len="med"/>
-                    </a:lnB>
-                    <a:solidFill>
-                      <a:srgbClr val="F2F2F2"/>
-                    </a:solidFill>
-                  </a:tcPr>
-                </a:tc>
-                <a:tc>
-                  <a:txBody>
-                    <a:bodyPr/>
-                    <a:lstStyle/>
-                    <a:p>
-                      <a:pPr algn="l" indent="0" marL="0">
-                        <a:buNone/>
-                      </a:pPr>
-                      <a:r>
-                        <a:rPr lang="en-US" sz="950" b="1" dirty="0">
-                          <a:solidFill>
-                            <a:srgbClr val="1A1A1A"/>
-                          </a:solidFill>
-                          <a:latin typeface="Meiryo" pitchFamily="34" charset="0"/>
-                          <a:ea typeface="Meiryo" pitchFamily="34" charset="-122"/>
-                          <a:cs typeface="Meiryo" pitchFamily="34" charset="-120"/>
-                        </a:rPr>
-                        <a:t>コンサルティング</a:t>
-                      </a:r>
-                      <a:endParaRPr lang="en-US" sz="950" dirty="0">
-                        <a:latin typeface="Meiryo" charset="0"/>
-                        <a:ea typeface="Meiryo" charset="0"/>
-                        <a:cs typeface="Meiryo" charset="0"/>
-                      </a:endParaRPr>
-                    </a:p>
-                  </a:txBody>
-                  <a:tcPr marL="54864" marR="54864" marT="18288" marB="18288" anchor="ctr">
-                    <a:lnL w="0" cap="flat" cmpd="sng" algn="ctr">
-                      <a:noFill/>
-                    </a:lnL>
-                    <a:lnR w="0" cap="flat" cmpd="sng" algn="ctr">
-                      <a:noFill/>
-                    </a:lnR>
-                    <a:lnT w="0" cap="flat" cmpd="sng" algn="ctr">
-                      <a:noFill/>
-                    </a:lnT>
-                    <a:lnB w="19050" cap="flat" cmpd="sng" algn="ctr">
-                      <a:solidFill>
-                        <a:srgbClr val="1A1A1A"/>
-                      </a:solidFill>
-                      <a:prstDash val="solid"/>
-                      <a:round/>
-                      <a:headEnd type="none" w="med" len="med"/>
-                      <a:tailEnd type="none" w="med" len="med"/>
-                    </a:lnB>
-                    <a:solidFill>
-                      <a:srgbClr val="F2F2F2"/>
-                    </a:solidFill>
-                  </a:tcPr>
-                </a:tc>
-                <a:tc>
-                  <a:txBody>
-                    <a:bodyPr/>
-                    <a:lstStyle/>
-                    <a:p>
-                      <a:pPr algn="l" indent="0" marL="0">
-                        <a:buNone/>
-                      </a:pPr>
-                      <a:r>
-                        <a:rPr lang="en-US" sz="950" b="1" dirty="0">
-                          <a:solidFill>
-                            <a:srgbClr val="1A1A1A"/>
-                          </a:solidFill>
-                          <a:latin typeface="Meiryo" pitchFamily="34" charset="0"/>
-                          <a:ea typeface="Meiryo" pitchFamily="34" charset="-122"/>
-                          <a:cs typeface="Meiryo" pitchFamily="34" charset="-120"/>
-                        </a:rPr>
-                        <a:t>MES・大手SIer</a:t>
-                      </a:r>
-                      <a:endParaRPr lang="en-US" sz="950" dirty="0">
-                        <a:latin typeface="Meiryo" charset="0"/>
-                        <a:ea typeface="Meiryo" charset="0"/>
-                        <a:cs typeface="Meiryo" charset="0"/>
-                      </a:endParaRPr>
-                    </a:p>
-                  </a:txBody>
-                  <a:tcPr marL="54864" marR="54864" marT="18288" marB="18288" anchor="ctr">
-                    <a:lnL w="0" cap="flat" cmpd="sng" algn="ctr">
-                      <a:noFill/>
-                    </a:lnL>
-                    <a:lnR w="0" cap="flat" cmpd="sng" algn="ctr">
-                      <a:noFill/>
-                    </a:lnR>
-                    <a:lnT w="0" cap="flat" cmpd="sng" algn="ctr">
-                      <a:noFill/>
-                    </a:lnT>
-                    <a:lnB w="19050" cap="flat" cmpd="sng" algn="ctr">
-                      <a:solidFill>
-                        <a:srgbClr val="1A1A1A"/>
-                      </a:solidFill>
-                      <a:prstDash val="solid"/>
-                      <a:round/>
-                      <a:headEnd type="none" w="med" len="med"/>
-                      <a:tailEnd type="none" w="med" len="med"/>
-                    </a:lnB>
-                    <a:solidFill>
-                      <a:srgbClr val="F2F2F2"/>
-                    </a:solidFill>
-                  </a:tcPr>
-                </a:tc>
-                <a:tc>
-                  <a:txBody>
-                    <a:bodyPr/>
-                    <a:lstStyle/>
-                    <a:p>
-                      <a:pPr algn="l" indent="0" marL="0">
-                        <a:buNone/>
-                      </a:pPr>
-                      <a:r>
-                        <a:rPr lang="en-US" sz="950" b="1" dirty="0">
-                          <a:solidFill>
-                            <a:srgbClr val="1A1A1A"/>
-                          </a:solidFill>
-                          <a:latin typeface="Meiryo" pitchFamily="34" charset="0"/>
-                          <a:ea typeface="Meiryo" pitchFamily="34" charset="-122"/>
-                          <a:cs typeface="Meiryo" pitchFamily="34" charset="-120"/>
-                        </a:rPr>
-                        <a:t>搬送ロボット・検査AI</a:t>
-                      </a:r>
-                      <a:endParaRPr lang="en-US" sz="950" dirty="0">
-                        <a:latin typeface="Meiryo" charset="0"/>
-                        <a:ea typeface="Meiryo" charset="0"/>
-                        <a:cs typeface="Meiryo" charset="0"/>
-                      </a:endParaRPr>
-                    </a:p>
-                  </a:txBody>
-                  <a:tcPr marL="54864" marR="54864" marT="18288" marB="18288" anchor="ctr">
-                    <a:lnL w="0" cap="flat" cmpd="sng" algn="ctr">
-                      <a:noFill/>
-                    </a:lnL>
-                    <a:lnR w="0" cap="flat" cmpd="sng" algn="ctr">
-                      <a:noFill/>
-                    </a:lnR>
-                    <a:lnT w="0" cap="flat" cmpd="sng" algn="ctr">
-                      <a:noFill/>
-                    </a:lnT>
-                    <a:lnB w="19050" cap="flat" cmpd="sng" algn="ctr">
-                      <a:solidFill>
-                        <a:srgbClr val="1A1A1A"/>
-                      </a:solidFill>
-                      <a:prstDash val="solid"/>
-                      <a:round/>
-                      <a:headEnd type="none" w="med" len="med"/>
-                      <a:tailEnd type="none" w="med" len="med"/>
-                    </a:lnB>
-                    <a:solidFill>
-                      <a:srgbClr val="F2F2F2"/>
-                    </a:solidFill>
-                  </a:tcPr>
-                </a:tc>
-                <a:tc>
-                  <a:txBody>
-                    <a:bodyPr/>
-                    <a:lstStyle/>
-                    <a:p>
-                      <a:pPr algn="l" indent="0" marL="0">
-                        <a:buNone/>
-                      </a:pPr>
-                      <a:r>
-                        <a:rPr lang="en-US" sz="950" b="1" dirty="0">
-                          <a:solidFill>
-                            <a:srgbClr val="1A1A1A"/>
-                          </a:solidFill>
-                          <a:latin typeface="Meiryo" pitchFamily="34" charset="0"/>
-                          <a:ea typeface="Meiryo" pitchFamily="34" charset="-122"/>
-                          <a:cs typeface="Meiryo" pitchFamily="34" charset="-120"/>
-                        </a:rPr>
-                        <a:t>三現ワークス</a:t>
-                      </a:r>
-                      <a:endParaRPr lang="en-US" sz="950" dirty="0">
-                        <a:latin typeface="Meiryo" charset="0"/>
-                        <a:ea typeface="Meiryo" charset="0"/>
-                        <a:cs typeface="Meiryo" charset="0"/>
-                      </a:endParaRPr>
-                    </a:p>
-                  </a:txBody>
-                  <a:tcPr marL="54864" marR="54864" marT="18288" marB="18288" anchor="ctr">
-                    <a:lnL w="0" cap="flat" cmpd="sng" algn="ctr">
-                      <a:noFill/>
-                    </a:lnL>
-                    <a:lnR w="0" cap="flat" cmpd="sng" algn="ctr">
-                      <a:noFill/>
-                    </a:lnR>
-                    <a:lnT w="0" cap="flat" cmpd="sng" algn="ctr">
-                      <a:noFill/>
-                    </a:lnT>
-                    <a:lnB w="19050" cap="flat" cmpd="sng" algn="ctr">
-                      <a:solidFill>
-                        <a:srgbClr val="1A1A1A"/>
-                      </a:solidFill>
-                      <a:prstDash val="solid"/>
-                      <a:round/>
-                      <a:headEnd type="none" w="med" len="med"/>
-                      <a:tailEnd type="none" w="med" len="med"/>
-                    </a:lnB>
-                    <a:solidFill>
-                      <a:srgbClr val="F2F2F2"/>
-                    </a:solidFill>
-                  </a:tcPr>
-                </a:tc>
-              </a:tr>
-              <a:tr h="265176">
-                <a:tc>
-                  <a:txBody>
-                    <a:bodyPr/>
-                    <a:lstStyle/>
-                    <a:p>
-                      <a:pPr algn="l" indent="0" marL="0">
-                        <a:buNone/>
-                      </a:pPr>
-                      <a:r>
-                        <a:rPr lang="en-US" sz="950" dirty="0">
-                          <a:solidFill>
-                            <a:srgbClr val="1A1A1A"/>
-                          </a:solidFill>
-                          <a:latin typeface="Meiryo" pitchFamily="34" charset="0"/>
-                          <a:ea typeface="Meiryo" pitchFamily="34" charset="-122"/>
-                          <a:cs typeface="Meiryo" pitchFamily="34" charset="-120"/>
-                        </a:rPr>
-                        <a:t>代表例</a:t>
-                      </a:r>
-                      <a:endParaRPr lang="en-US" sz="950" dirty="0">
-                        <a:latin typeface="Meiryo" charset="0"/>
-                        <a:ea typeface="Meiryo" charset="0"/>
-                        <a:cs typeface="Meiryo" charset="0"/>
-                      </a:endParaRPr>
-                    </a:p>
-                  </a:txBody>
-                  <a:tcPr marL="54864" marR="54864" marT="18288" marB="18288" anchor="ctr">
-                    <a:lnL w="0" cap="flat" cmpd="sng" algn="ctr">
-                      <a:noFill/>
-                    </a:lnL>
-                    <a:lnR w="0" cap="flat" cmpd="sng" algn="ctr">
-                      <a:noFill/>
-                    </a:lnR>
-                    <a:lnT w="0" cap="flat" cmpd="sng" algn="ctr">
-                      <a:noFill/>
-                    </a:lnT>
-                    <a:lnB w="9525" cap="flat" cmpd="sng" algn="ctr">
-                      <a:solidFill>
-                        <a:srgbClr val="BFBFBF"/>
-                      </a:solidFill>
-                      <a:prstDash val="solid"/>
-                      <a:round/>
-                      <a:headEnd type="none" w="med" len="med"/>
-                      <a:tailEnd type="none" w="med" len="med"/>
-                    </a:lnB>
-                    <a:solidFill>
-                      <a:srgbClr val="FFFFFF"/>
-                    </a:solidFill>
-                  </a:tcPr>
-                </a:tc>
-                <a:tc>
-                  <a:txBody>
-                    <a:bodyPr/>
-                    <a:lstStyle/>
-                    <a:p>
-                      <a:pPr algn="l" indent="0" marL="0">
-                        <a:buNone/>
-                      </a:pPr>
-                      <a:r>
-                        <a:rPr lang="en-US" sz="950" dirty="0">
-                          <a:solidFill>
-                            <a:srgbClr val="1A1A1A"/>
-                          </a:solidFill>
-                          <a:latin typeface="Meiryo" pitchFamily="34" charset="0"/>
-                          <a:ea typeface="Meiryo" pitchFamily="34" charset="-122"/>
-                          <a:cs typeface="Meiryo" pitchFamily="34" charset="-120"/>
-                        </a:rPr>
-                        <a:t>アクセンチュア 等</a:t>
-                      </a:r>
-                      <a:endParaRPr lang="en-US" sz="950" dirty="0">
-                        <a:latin typeface="Meiryo" charset="0"/>
-                        <a:ea typeface="Meiryo" charset="0"/>
-                        <a:cs typeface="Meiryo" charset="0"/>
-                      </a:endParaRPr>
-                    </a:p>
-                  </a:txBody>
-                  <a:tcPr marL="54864" marR="54864" marT="18288" marB="18288" anchor="ctr">
-                    <a:lnL w="0" cap="flat" cmpd="sng" algn="ctr">
-                      <a:noFill/>
-                    </a:lnL>
-                    <a:lnR w="0" cap="flat" cmpd="sng" algn="ctr">
-                      <a:noFill/>
-                    </a:lnR>
-                    <a:lnT w="0" cap="flat" cmpd="sng" algn="ctr">
-                      <a:noFill/>
-                    </a:lnT>
-                    <a:lnB w="9525" cap="flat" cmpd="sng" algn="ctr">
-                      <a:solidFill>
-                        <a:srgbClr val="BFBFBF"/>
-                      </a:solidFill>
-                      <a:prstDash val="solid"/>
-                      <a:round/>
-                      <a:headEnd type="none" w="med" len="med"/>
-                      <a:tailEnd type="none" w="med" len="med"/>
-                    </a:lnB>
-                    <a:solidFill>
-                      <a:srgbClr val="FFFFFF"/>
-                    </a:solidFill>
-                  </a:tcPr>
-                </a:tc>
-                <a:tc>
-                  <a:txBody>
-                    <a:bodyPr/>
-                    <a:lstStyle/>
-                    <a:p>
-                      <a:pPr algn="l" indent="0" marL="0">
-                        <a:buNone/>
-                      </a:pPr>
-                      <a:r>
-                        <a:rPr lang="en-US" sz="950" dirty="0">
-                          <a:solidFill>
-                            <a:srgbClr val="1A1A1A"/>
-                          </a:solidFill>
-                          <a:latin typeface="Meiryo" pitchFamily="34" charset="0"/>
-                          <a:ea typeface="Meiryo" pitchFamily="34" charset="-122"/>
-                          <a:cs typeface="Meiryo" pitchFamily="34" charset="-120"/>
-                        </a:rPr>
-                        <a:t>MESパッケージ・個別開発</a:t>
-                      </a:r>
-                      <a:endParaRPr lang="en-US" sz="950" dirty="0">
-                        <a:latin typeface="Meiryo" charset="0"/>
-                        <a:ea typeface="Meiryo" charset="0"/>
-                        <a:cs typeface="Meiryo" charset="0"/>
-                      </a:endParaRPr>
-                    </a:p>
-                  </a:txBody>
-                  <a:tcPr marL="54864" marR="54864" marT="18288" marB="18288" anchor="ctr">
-                    <a:lnL w="0" cap="flat" cmpd="sng" algn="ctr">
-                      <a:noFill/>
-                    </a:lnL>
-                    <a:lnR w="0" cap="flat" cmpd="sng" algn="ctr">
-                      <a:noFill/>
-                    </a:lnR>
-                    <a:lnT w="0" cap="flat" cmpd="sng" algn="ctr">
-                      <a:noFill/>
-                    </a:lnT>
-                    <a:lnB w="9525" cap="flat" cmpd="sng" algn="ctr">
-                      <a:solidFill>
-                        <a:srgbClr val="BFBFBF"/>
-                      </a:solidFill>
-                      <a:prstDash val="solid"/>
-                      <a:round/>
-                      <a:headEnd type="none" w="med" len="med"/>
-                      <a:tailEnd type="none" w="med" len="med"/>
-                    </a:lnB>
-                    <a:solidFill>
-                      <a:srgbClr val="FFFFFF"/>
-                    </a:solidFill>
-                  </a:tcPr>
-                </a:tc>
-                <a:tc>
-                  <a:txBody>
-                    <a:bodyPr/>
-                    <a:lstStyle/>
-                    <a:p>
-                      <a:pPr algn="l" indent="0" marL="0">
-                        <a:buNone/>
-                      </a:pPr>
-                      <a:r>
-                        <a:rPr lang="en-US" sz="950" dirty="0">
-                          <a:solidFill>
-                            <a:srgbClr val="1A1A1A"/>
-                          </a:solidFill>
-                          <a:latin typeface="Meiryo" pitchFamily="34" charset="0"/>
-                          <a:ea typeface="Meiryo" pitchFamily="34" charset="-122"/>
-                          <a:cs typeface="Meiryo" pitchFamily="34" charset="-120"/>
-                        </a:rPr>
-                        <a:t>自動搬送ロボット・画像検査</a:t>
-                      </a:r>
-                      <a:endParaRPr lang="en-US" sz="950" dirty="0">
-                        <a:latin typeface="Meiryo" charset="0"/>
-                        <a:ea typeface="Meiryo" charset="0"/>
-                        <a:cs typeface="Meiryo" charset="0"/>
-                      </a:endParaRPr>
-                    </a:p>
-                  </a:txBody>
-                  <a:tcPr marL="54864" marR="54864" marT="18288" marB="18288" anchor="ctr">
-                    <a:lnL w="0" cap="flat" cmpd="sng" algn="ctr">
-                      <a:noFill/>
-                    </a:lnL>
-                    <a:lnR w="0" cap="flat" cmpd="sng" algn="ctr">
-                      <a:noFill/>
-                    </a:lnR>
-                    <a:lnT w="0" cap="flat" cmpd="sng" algn="ctr">
-                      <a:noFill/>
-                    </a:lnT>
-                    <a:lnB w="9525" cap="flat" cmpd="sng" algn="ctr">
-                      <a:solidFill>
-                        <a:srgbClr val="BFBFBF"/>
-                      </a:solidFill>
-                      <a:prstDash val="solid"/>
-                      <a:round/>
-                      <a:headEnd type="none" w="med" len="med"/>
-                      <a:tailEnd type="none" w="med" len="med"/>
-                    </a:lnB>
-                    <a:solidFill>
-                      <a:srgbClr val="FFFFFF"/>
-                    </a:solidFill>
-                  </a:tcPr>
-                </a:tc>
-                <a:tc>
-                  <a:txBody>
-                    <a:bodyPr/>
-                    <a:lstStyle/>
-                    <a:p>
-                      <a:pPr algn="l" indent="0" marL="0">
-                        <a:buNone/>
-                      </a:pPr>
-                      <a:r>
-                        <a:rPr lang="en-US" sz="950" dirty="0">
-                          <a:solidFill>
-                            <a:srgbClr val="1A1A1A"/>
-                          </a:solidFill>
-                          <a:latin typeface="Meiryo" pitchFamily="34" charset="0"/>
-                          <a:ea typeface="Meiryo" pitchFamily="34" charset="-122"/>
-                          <a:cs typeface="Meiryo" pitchFamily="34" charset="-120"/>
-                        </a:rPr>
-                        <a:t>─</a:t>
-                      </a:r>
-                      <a:endParaRPr lang="en-US" sz="950" dirty="0">
-                        <a:latin typeface="Meiryo" charset="0"/>
-                        <a:ea typeface="Meiryo" charset="0"/>
-                        <a:cs typeface="Meiryo" charset="0"/>
-                      </a:endParaRPr>
-                    </a:p>
-                  </a:txBody>
-                  <a:tcPr marL="54864" marR="54864" marT="18288" marB="18288" anchor="ctr">
-                    <a:lnL w="0" cap="flat" cmpd="sng" algn="ctr">
-                      <a:noFill/>
-                    </a:lnL>
-                    <a:lnR w="0" cap="flat" cmpd="sng" algn="ctr">
-                      <a:noFill/>
-                    </a:lnR>
-                    <a:lnT w="0" cap="flat" cmpd="sng" algn="ctr">
-                      <a:noFill/>
-                    </a:lnT>
-                    <a:lnB w="9525" cap="flat" cmpd="sng" algn="ctr">
-                      <a:solidFill>
-                        <a:srgbClr val="BFBFBF"/>
-                      </a:solidFill>
-                      <a:prstDash val="solid"/>
-                      <a:round/>
-                      <a:headEnd type="none" w="med" len="med"/>
-                      <a:tailEnd type="none" w="med" len="med"/>
-                    </a:lnB>
-                    <a:solidFill>
-                      <a:srgbClr val="F2F2F2"/>
-                    </a:solidFill>
-                  </a:tcPr>
-                </a:tc>
-              </a:tr>
-              <a:tr h="265176">
-                <a:tc>
-                  <a:txBody>
-                    <a:bodyPr/>
-                    <a:lstStyle/>
-                    <a:p>
-                      <a:pPr algn="l" indent="0" marL="0">
-                        <a:buNone/>
-                      </a:pPr>
-                      <a:r>
-                        <a:rPr lang="en-US" sz="950" dirty="0">
-                          <a:solidFill>
-                            <a:srgbClr val="1A1A1A"/>
-                          </a:solidFill>
-                          <a:latin typeface="Meiryo" pitchFamily="34" charset="0"/>
-                          <a:ea typeface="Meiryo" pitchFamily="34" charset="-122"/>
-                          <a:cs typeface="Meiryo" pitchFamily="34" charset="-120"/>
-                        </a:rPr>
-                        <a:t>できること</a:t>
-                      </a:r>
-                      <a:endParaRPr lang="en-US" sz="950" dirty="0">
-                        <a:latin typeface="Meiryo" charset="0"/>
-                        <a:ea typeface="Meiryo" charset="0"/>
-                        <a:cs typeface="Meiryo" charset="0"/>
-                      </a:endParaRPr>
-                    </a:p>
-                  </a:txBody>
-                  <a:tcPr marL="54864" marR="54864" marT="18288" marB="18288" anchor="ctr">
-                    <a:lnL w="0" cap="flat" cmpd="sng" algn="ctr">
-                      <a:noFill/>
-                    </a:lnL>
-                    <a:lnR w="0" cap="flat" cmpd="sng" algn="ctr">
-                      <a:noFill/>
-                    </a:lnR>
-                    <a:lnT w="0" cap="flat" cmpd="sng" algn="ctr">
-                      <a:noFill/>
-                    </a:lnT>
-                    <a:lnB w="9525" cap="flat" cmpd="sng" algn="ctr">
-                      <a:solidFill>
-                        <a:srgbClr val="BFBFBF"/>
-                      </a:solidFill>
-                      <a:prstDash val="solid"/>
-                      <a:round/>
-                      <a:headEnd type="none" w="med" len="med"/>
-                      <a:tailEnd type="none" w="med" len="med"/>
-                    </a:lnB>
-                    <a:solidFill>
-                      <a:srgbClr val="FFFFFF"/>
-                    </a:solidFill>
-                  </a:tcPr>
-                </a:tc>
-                <a:tc>
-                  <a:txBody>
-                    <a:bodyPr/>
-                    <a:lstStyle/>
-                    <a:p>
-                      <a:pPr algn="l" indent="0" marL="0">
-                        <a:buNone/>
-                      </a:pPr>
-                      <a:r>
-                        <a:rPr lang="en-US" sz="950" dirty="0">
-                          <a:solidFill>
-                            <a:srgbClr val="1A1A1A"/>
-                          </a:solidFill>
-                          <a:latin typeface="Meiryo" pitchFamily="34" charset="0"/>
-                          <a:ea typeface="Meiryo" pitchFamily="34" charset="-122"/>
-                          <a:cs typeface="Meiryo" pitchFamily="34" charset="-120"/>
-                        </a:rPr>
-                        <a:t>人の時間と提言（BPR）</a:t>
-                      </a:r>
-                      <a:endParaRPr lang="en-US" sz="950" dirty="0">
-                        <a:latin typeface="Meiryo" charset="0"/>
-                        <a:ea typeface="Meiryo" charset="0"/>
-                        <a:cs typeface="Meiryo" charset="0"/>
-                      </a:endParaRPr>
-                    </a:p>
-                  </a:txBody>
-                  <a:tcPr marL="54864" marR="54864" marT="18288" marB="18288" anchor="ctr">
-                    <a:lnL w="0" cap="flat" cmpd="sng" algn="ctr">
-                      <a:noFill/>
-                    </a:lnL>
-                    <a:lnR w="0" cap="flat" cmpd="sng" algn="ctr">
-                      <a:noFill/>
-                    </a:lnR>
-                    <a:lnT w="0" cap="flat" cmpd="sng" algn="ctr">
-                      <a:noFill/>
-                    </a:lnT>
-                    <a:lnB w="9525" cap="flat" cmpd="sng" algn="ctr">
-                      <a:solidFill>
-                        <a:srgbClr val="BFBFBF"/>
-                      </a:solidFill>
-                      <a:prstDash val="solid"/>
-                      <a:round/>
-                      <a:headEnd type="none" w="med" len="med"/>
-                      <a:tailEnd type="none" w="med" len="med"/>
-                    </a:lnB>
-                    <a:solidFill>
-                      <a:srgbClr val="FFFFFF"/>
-                    </a:solidFill>
-                  </a:tcPr>
-                </a:tc>
-                <a:tc>
-                  <a:txBody>
-                    <a:bodyPr/>
-                    <a:lstStyle/>
-                    <a:p>
-                      <a:pPr algn="l" indent="0" marL="0">
-                        <a:buNone/>
-                      </a:pPr>
-                      <a:r>
-                        <a:rPr lang="en-US" sz="950" dirty="0">
-                          <a:solidFill>
-                            <a:srgbClr val="1A1A1A"/>
-                          </a:solidFill>
-                          <a:latin typeface="Meiryo" pitchFamily="34" charset="0"/>
-                          <a:ea typeface="Meiryo" pitchFamily="34" charset="-122"/>
-                          <a:cs typeface="Meiryo" pitchFamily="34" charset="-120"/>
-                        </a:rPr>
-                        <a:t>生産実績の収集と管理</a:t>
-                      </a:r>
-                      <a:endParaRPr lang="en-US" sz="950" dirty="0">
-                        <a:latin typeface="Meiryo" charset="0"/>
-                        <a:ea typeface="Meiryo" charset="0"/>
-                        <a:cs typeface="Meiryo" charset="0"/>
-                      </a:endParaRPr>
-                    </a:p>
-                  </a:txBody>
-                  <a:tcPr marL="54864" marR="54864" marT="18288" marB="18288" anchor="ctr">
-                    <a:lnL w="0" cap="flat" cmpd="sng" algn="ctr">
-                      <a:noFill/>
-                    </a:lnL>
-                    <a:lnR w="0" cap="flat" cmpd="sng" algn="ctr">
-                      <a:noFill/>
-                    </a:lnR>
-                    <a:lnT w="0" cap="flat" cmpd="sng" algn="ctr">
-                      <a:noFill/>
-                    </a:lnT>
-                    <a:lnB w="9525" cap="flat" cmpd="sng" algn="ctr">
-                      <a:solidFill>
-                        <a:srgbClr val="BFBFBF"/>
-                      </a:solidFill>
-                      <a:prstDash val="solid"/>
-                      <a:round/>
-                      <a:headEnd type="none" w="med" len="med"/>
-                      <a:tailEnd type="none" w="med" len="med"/>
-                    </a:lnB>
-                    <a:solidFill>
-                      <a:srgbClr val="FFFFFF"/>
-                    </a:solidFill>
-                  </a:tcPr>
-                </a:tc>
-                <a:tc>
-                  <a:txBody>
-                    <a:bodyPr/>
-                    <a:lstStyle/>
-                    <a:p>
-                      <a:pPr algn="l" indent="0" marL="0">
-                        <a:buNone/>
-                      </a:pPr>
-                      <a:r>
-                        <a:rPr lang="en-US" sz="950" dirty="0">
-                          <a:solidFill>
-                            <a:srgbClr val="1A1A1A"/>
-                          </a:solidFill>
-                          <a:latin typeface="Meiryo" pitchFamily="34" charset="0"/>
-                          <a:ea typeface="Meiryo" pitchFamily="34" charset="-122"/>
-                          <a:cs typeface="Meiryo" pitchFamily="34" charset="-120"/>
-                        </a:rPr>
-                        <a:t>搬送・検査の自動化</a:t>
-                      </a:r>
-                      <a:endParaRPr lang="en-US" sz="950" dirty="0">
-                        <a:latin typeface="Meiryo" charset="0"/>
-                        <a:ea typeface="Meiryo" charset="0"/>
-                        <a:cs typeface="Meiryo" charset="0"/>
-                      </a:endParaRPr>
-                    </a:p>
-                  </a:txBody>
-                  <a:tcPr marL="54864" marR="54864" marT="18288" marB="18288" anchor="ctr">
-                    <a:lnL w="0" cap="flat" cmpd="sng" algn="ctr">
-                      <a:noFill/>
-                    </a:lnL>
-                    <a:lnR w="0" cap="flat" cmpd="sng" algn="ctr">
-                      <a:noFill/>
-                    </a:lnR>
-                    <a:lnT w="0" cap="flat" cmpd="sng" algn="ctr">
-                      <a:noFill/>
-                    </a:lnT>
-                    <a:lnB w="9525" cap="flat" cmpd="sng" algn="ctr">
-                      <a:solidFill>
-                        <a:srgbClr val="BFBFBF"/>
-                      </a:solidFill>
-                      <a:prstDash val="solid"/>
-                      <a:round/>
-                      <a:headEnd type="none" w="med" len="med"/>
-                      <a:tailEnd type="none" w="med" len="med"/>
-                    </a:lnB>
-                    <a:solidFill>
-                      <a:srgbClr val="FFFFFF"/>
-                    </a:solidFill>
-                  </a:tcPr>
-                </a:tc>
-                <a:tc>
-                  <a:txBody>
-                    <a:bodyPr/>
-                    <a:lstStyle/>
-                    <a:p>
-                      <a:pPr algn="l" indent="0" marL="0">
-                        <a:buNone/>
-                      </a:pPr>
-                      <a:r>
-                        <a:rPr lang="en-US" sz="950" b="1" dirty="0">
-                          <a:solidFill>
-                            <a:srgbClr val="1A1A1A"/>
-                          </a:solidFill>
-                          <a:latin typeface="Meiryo" pitchFamily="34" charset="0"/>
-                          <a:ea typeface="Meiryo" pitchFamily="34" charset="-122"/>
-                          <a:cs typeface="Meiryo" pitchFamily="34" charset="-120"/>
-                        </a:rPr>
-                        <a:t>判断を記録し、人と機械に渡す</a:t>
-                      </a:r>
-                      <a:endParaRPr lang="en-US" sz="950" dirty="0">
-                        <a:latin typeface="Meiryo" charset="0"/>
-                        <a:ea typeface="Meiryo" charset="0"/>
-                        <a:cs typeface="Meiryo" charset="0"/>
-                      </a:endParaRPr>
-                    </a:p>
-                  </a:txBody>
-                  <a:tcPr marL="54864" marR="54864" marT="18288" marB="18288" anchor="ctr">
-                    <a:lnL w="0" cap="flat" cmpd="sng" algn="ctr">
-                      <a:noFill/>
-                    </a:lnL>
-                    <a:lnR w="0" cap="flat" cmpd="sng" algn="ctr">
-                      <a:noFill/>
-                    </a:lnR>
-                    <a:lnT w="0" cap="flat" cmpd="sng" algn="ctr">
-                      <a:noFill/>
-                    </a:lnT>
-                    <a:lnB w="9525" cap="flat" cmpd="sng" algn="ctr">
-                      <a:solidFill>
-                        <a:srgbClr val="BFBFBF"/>
-                      </a:solidFill>
-                      <a:prstDash val="solid"/>
-                      <a:round/>
-                      <a:headEnd type="none" w="med" len="med"/>
-                      <a:tailEnd type="none" w="med" len="med"/>
-                    </a:lnB>
-                    <a:solidFill>
-                      <a:srgbClr val="F2F2F2"/>
-                    </a:solidFill>
-                  </a:tcPr>
-                </a:tc>
-              </a:tr>
-              <a:tr h="265176">
-                <a:tc>
-                  <a:txBody>
-                    <a:bodyPr/>
-                    <a:lstStyle/>
-                    <a:p>
-                      <a:pPr algn="l" indent="0" marL="0">
-                        <a:buNone/>
-                      </a:pPr>
-                      <a:r>
-                        <a:rPr lang="en-US" sz="950" dirty="0">
-                          <a:solidFill>
-                            <a:srgbClr val="1A1A1A"/>
-                          </a:solidFill>
-                          <a:latin typeface="Meiryo" pitchFamily="34" charset="0"/>
-                          <a:ea typeface="Meiryo" pitchFamily="34" charset="-122"/>
-                          <a:cs typeface="Meiryo" pitchFamily="34" charset="-120"/>
-                        </a:rPr>
-                        <a:t>持っていないもの</a:t>
-                      </a:r>
-                      <a:endParaRPr lang="en-US" sz="950" dirty="0">
-                        <a:latin typeface="Meiryo" charset="0"/>
-                        <a:ea typeface="Meiryo" charset="0"/>
-                        <a:cs typeface="Meiryo" charset="0"/>
-                      </a:endParaRPr>
-                    </a:p>
-                  </a:txBody>
-                  <a:tcPr marL="54864" marR="54864" marT="18288" marB="18288" anchor="ctr">
-                    <a:lnL w="0" cap="flat" cmpd="sng" algn="ctr">
-                      <a:noFill/>
-                    </a:lnL>
-                    <a:lnR w="0" cap="flat" cmpd="sng" algn="ctr">
-                      <a:noFill/>
-                    </a:lnR>
-                    <a:lnT w="0" cap="flat" cmpd="sng" algn="ctr">
-                      <a:noFill/>
-                    </a:lnT>
-                    <a:lnB w="9525" cap="flat" cmpd="sng" algn="ctr">
-                      <a:solidFill>
-                        <a:srgbClr val="BFBFBF"/>
-                      </a:solidFill>
-                      <a:prstDash val="solid"/>
-                      <a:round/>
-                      <a:headEnd type="none" w="med" len="med"/>
-                      <a:tailEnd type="none" w="med" len="med"/>
-                    </a:lnB>
-                    <a:solidFill>
-                      <a:srgbClr val="FFFFFF"/>
-                    </a:solidFill>
-                  </a:tcPr>
-                </a:tc>
-                <a:tc>
-                  <a:txBody>
-                    <a:bodyPr/>
-                    <a:lstStyle/>
-                    <a:p>
-                      <a:pPr algn="l" indent="0" marL="0">
-                        <a:buNone/>
-                      </a:pPr>
-                      <a:r>
-                        <a:rPr lang="en-US" sz="950" dirty="0">
-                          <a:solidFill>
-                            <a:srgbClr val="1A1A1A"/>
-                          </a:solidFill>
-                          <a:latin typeface="Meiryo" pitchFamily="34" charset="0"/>
-                          <a:ea typeface="Meiryo" pitchFamily="34" charset="-122"/>
-                          <a:cs typeface="Meiryo" pitchFamily="34" charset="-120"/>
-                        </a:rPr>
-                        <a:t>製造・施工の実務経験</a:t>
-                      </a:r>
-                      <a:endParaRPr lang="en-US" sz="950" dirty="0">
-                        <a:latin typeface="Meiryo" charset="0"/>
-                        <a:ea typeface="Meiryo" charset="0"/>
-                        <a:cs typeface="Meiryo" charset="0"/>
-                      </a:endParaRPr>
-                    </a:p>
-                  </a:txBody>
-                  <a:tcPr marL="54864" marR="54864" marT="18288" marB="18288" anchor="ctr">
-                    <a:lnL w="0" cap="flat" cmpd="sng" algn="ctr">
-                      <a:noFill/>
-                    </a:lnL>
-                    <a:lnR w="0" cap="flat" cmpd="sng" algn="ctr">
-                      <a:noFill/>
-                    </a:lnR>
-                    <a:lnT w="0" cap="flat" cmpd="sng" algn="ctr">
-                      <a:noFill/>
-                    </a:lnT>
-                    <a:lnB w="9525" cap="flat" cmpd="sng" algn="ctr">
-                      <a:solidFill>
-                        <a:srgbClr val="BFBFBF"/>
-                      </a:solidFill>
-                      <a:prstDash val="solid"/>
-                      <a:round/>
-                      <a:headEnd type="none" w="med" len="med"/>
-                      <a:tailEnd type="none" w="med" len="med"/>
-                    </a:lnB>
-                    <a:solidFill>
-                      <a:srgbClr val="FFFFFF"/>
-                    </a:solidFill>
-                  </a:tcPr>
-                </a:tc>
-                <a:tc>
-                  <a:txBody>
-                    <a:bodyPr/>
-                    <a:lstStyle/>
-                    <a:p>
-                      <a:pPr algn="l" indent="0" marL="0">
-                        <a:buNone/>
-                      </a:pPr>
-                      <a:r>
-                        <a:rPr lang="en-US" sz="950" dirty="0">
-                          <a:solidFill>
-                            <a:srgbClr val="1A1A1A"/>
-                          </a:solidFill>
-                          <a:latin typeface="Meiryo" pitchFamily="34" charset="0"/>
-                          <a:ea typeface="Meiryo" pitchFamily="34" charset="-122"/>
-                          <a:cs typeface="Meiryo" pitchFamily="34" charset="-120"/>
-                        </a:rPr>
-                        <a:t>判断の理由と現場の勘の器</a:t>
-                      </a:r>
-                      <a:endParaRPr lang="en-US" sz="950" dirty="0">
-                        <a:latin typeface="Meiryo" charset="0"/>
-                        <a:ea typeface="Meiryo" charset="0"/>
-                        <a:cs typeface="Meiryo" charset="0"/>
-                      </a:endParaRPr>
-                    </a:p>
-                  </a:txBody>
-                  <a:tcPr marL="54864" marR="54864" marT="18288" marB="18288" anchor="ctr">
-                    <a:lnL w="0" cap="flat" cmpd="sng" algn="ctr">
-                      <a:noFill/>
-                    </a:lnL>
-                    <a:lnR w="0" cap="flat" cmpd="sng" algn="ctr">
-                      <a:noFill/>
-                    </a:lnR>
-                    <a:lnT w="0" cap="flat" cmpd="sng" algn="ctr">
-                      <a:noFill/>
-                    </a:lnT>
-                    <a:lnB w="9525" cap="flat" cmpd="sng" algn="ctr">
-                      <a:solidFill>
-                        <a:srgbClr val="BFBFBF"/>
-                      </a:solidFill>
-                      <a:prstDash val="solid"/>
-                      <a:round/>
-                      <a:headEnd type="none" w="med" len="med"/>
-                      <a:tailEnd type="none" w="med" len="med"/>
-                    </a:lnB>
-                    <a:solidFill>
-                      <a:srgbClr val="FFFFFF"/>
-                    </a:solidFill>
-                  </a:tcPr>
-                </a:tc>
-                <a:tc>
-                  <a:txBody>
-                    <a:bodyPr/>
-                    <a:lstStyle/>
-                    <a:p>
-                      <a:pPr algn="l" indent="0" marL="0">
-                        <a:buNone/>
-                      </a:pPr>
-                      <a:r>
-                        <a:rPr lang="en-US" sz="950" dirty="0">
-                          <a:solidFill>
-                            <a:srgbClr val="1A1A1A"/>
-                          </a:solidFill>
-                          <a:latin typeface="Meiryo" pitchFamily="34" charset="0"/>
-                          <a:ea typeface="Meiryo" pitchFamily="34" charset="-122"/>
-                          <a:cs typeface="Meiryo" pitchFamily="34" charset="-120"/>
-                        </a:rPr>
-                        <a:t>何をどう動かすかの現場文脈</a:t>
-                      </a:r>
-                      <a:endParaRPr lang="en-US" sz="950" dirty="0">
-                        <a:latin typeface="Meiryo" charset="0"/>
-                        <a:ea typeface="Meiryo" charset="0"/>
-                        <a:cs typeface="Meiryo" charset="0"/>
-                      </a:endParaRPr>
-                    </a:p>
-                  </a:txBody>
-                  <a:tcPr marL="54864" marR="54864" marT="18288" marB="18288" anchor="ctr">
-                    <a:lnL w="0" cap="flat" cmpd="sng" algn="ctr">
-                      <a:noFill/>
-                    </a:lnL>
-                    <a:lnR w="0" cap="flat" cmpd="sng" algn="ctr">
-                      <a:noFill/>
-                    </a:lnR>
-                    <a:lnT w="0" cap="flat" cmpd="sng" algn="ctr">
-                      <a:noFill/>
-                    </a:lnT>
-                    <a:lnB w="9525" cap="flat" cmpd="sng" algn="ctr">
-                      <a:solidFill>
-                        <a:srgbClr val="BFBFBF"/>
-                      </a:solidFill>
-                      <a:prstDash val="solid"/>
-                      <a:round/>
-                      <a:headEnd type="none" w="med" len="med"/>
-                      <a:tailEnd type="none" w="med" len="med"/>
-                    </a:lnB>
-                    <a:solidFill>
-                      <a:srgbClr val="FFFFFF"/>
-                    </a:solidFill>
-                  </a:tcPr>
-                </a:tc>
-                <a:tc>
-                  <a:txBody>
-                    <a:bodyPr/>
-                    <a:lstStyle/>
-                    <a:p>
-                      <a:pPr algn="l" indent="0" marL="0">
-                        <a:buNone/>
-                      </a:pPr>
-                      <a:r>
-                        <a:rPr lang="en-US" sz="950" dirty="0">
-                          <a:solidFill>
-                            <a:srgbClr val="1A1A1A"/>
-                          </a:solidFill>
-                          <a:latin typeface="Meiryo" pitchFamily="34" charset="0"/>
-                          <a:ea typeface="Meiryo" pitchFamily="34" charset="-122"/>
-                          <a:cs typeface="Meiryo" pitchFamily="34" charset="-120"/>
-                        </a:rPr>
-                        <a:t>─</a:t>
-                      </a:r>
-                      <a:endParaRPr lang="en-US" sz="950" dirty="0">
-                        <a:latin typeface="Meiryo" charset="0"/>
-                        <a:ea typeface="Meiryo" charset="0"/>
-                        <a:cs typeface="Meiryo" charset="0"/>
-                      </a:endParaRPr>
-                    </a:p>
-                  </a:txBody>
-                  <a:tcPr marL="54864" marR="54864" marT="18288" marB="18288" anchor="ctr">
-                    <a:lnL w="0" cap="flat" cmpd="sng" algn="ctr">
-                      <a:noFill/>
-                    </a:lnL>
-                    <a:lnR w="0" cap="flat" cmpd="sng" algn="ctr">
-                      <a:noFill/>
-                    </a:lnR>
-                    <a:lnT w="0" cap="flat" cmpd="sng" algn="ctr">
-                      <a:noFill/>
-                    </a:lnT>
-                    <a:lnB w="9525" cap="flat" cmpd="sng" algn="ctr">
-                      <a:solidFill>
-                        <a:srgbClr val="BFBFBF"/>
-                      </a:solidFill>
-                      <a:prstDash val="solid"/>
-                      <a:round/>
-                      <a:headEnd type="none" w="med" len="med"/>
-                      <a:tailEnd type="none" w="med" len="med"/>
-                    </a:lnB>
-                    <a:solidFill>
-                      <a:srgbClr val="F2F2F2"/>
-                    </a:solidFill>
-                  </a:tcPr>
-                </a:tc>
-              </a:tr>
-              <a:tr h="265176">
-                <a:tc>
-                  <a:txBody>
-                    <a:bodyPr/>
-                    <a:lstStyle/>
-                    <a:p>
-                      <a:pPr algn="l" indent="0" marL="0">
-                        <a:buNone/>
-                      </a:pPr>
-                      <a:r>
-                        <a:rPr lang="en-US" sz="950" dirty="0">
-                          <a:solidFill>
-                            <a:srgbClr val="1A1A1A"/>
-                          </a:solidFill>
-                          <a:latin typeface="Meiryo" pitchFamily="34" charset="0"/>
-                          <a:ea typeface="Meiryo" pitchFamily="34" charset="-122"/>
-                          <a:cs typeface="Meiryo" pitchFamily="34" charset="-120"/>
-                        </a:rPr>
-                        <a:t>課金形態</a:t>
-                      </a:r>
-                      <a:endParaRPr lang="en-US" sz="950" dirty="0">
-                        <a:latin typeface="Meiryo" charset="0"/>
-                        <a:ea typeface="Meiryo" charset="0"/>
-                        <a:cs typeface="Meiryo" charset="0"/>
-                      </a:endParaRPr>
-                    </a:p>
-                  </a:txBody>
-                  <a:tcPr marL="54864" marR="54864" marT="18288" marB="18288" anchor="ctr">
-                    <a:lnL w="0" cap="flat" cmpd="sng" algn="ctr">
-                      <a:noFill/>
-                    </a:lnL>
-                    <a:lnR w="0" cap="flat" cmpd="sng" algn="ctr">
-                      <a:noFill/>
-                    </a:lnR>
-                    <a:lnT w="0" cap="flat" cmpd="sng" algn="ctr">
-                      <a:noFill/>
-                    </a:lnT>
-                    <a:lnB w="9525" cap="flat" cmpd="sng" algn="ctr">
-                      <a:solidFill>
-                        <a:srgbClr val="BFBFBF"/>
-                      </a:solidFill>
-                      <a:prstDash val="solid"/>
-                      <a:round/>
-                      <a:headEnd type="none" w="med" len="med"/>
-                      <a:tailEnd type="none" w="med" len="med"/>
-                    </a:lnB>
-                    <a:solidFill>
-                      <a:srgbClr val="FFFFFF"/>
-                    </a:solidFill>
-                  </a:tcPr>
-                </a:tc>
-                <a:tc>
-                  <a:txBody>
-                    <a:bodyPr/>
-                    <a:lstStyle/>
-                    <a:p>
-                      <a:pPr algn="l" indent="0" marL="0">
-                        <a:buNone/>
-                      </a:pPr>
-                      <a:r>
-                        <a:rPr lang="en-US" sz="950" dirty="0">
-                          <a:solidFill>
-                            <a:srgbClr val="1A1A1A"/>
-                          </a:solidFill>
-                          <a:latin typeface="Meiryo" pitchFamily="34" charset="0"/>
-                          <a:ea typeface="Meiryo" pitchFamily="34" charset="-122"/>
-                          <a:cs typeface="Meiryo" pitchFamily="34" charset="-120"/>
-                        </a:rPr>
-                        <a:t>人月（フロー）</a:t>
-                      </a:r>
-                      <a:endParaRPr lang="en-US" sz="950" dirty="0">
-                        <a:latin typeface="Meiryo" charset="0"/>
-                        <a:ea typeface="Meiryo" charset="0"/>
-                        <a:cs typeface="Meiryo" charset="0"/>
-                      </a:endParaRPr>
-                    </a:p>
-                  </a:txBody>
-                  <a:tcPr marL="54864" marR="54864" marT="18288" marB="18288" anchor="ctr">
-                    <a:lnL w="0" cap="flat" cmpd="sng" algn="ctr">
-                      <a:noFill/>
-                    </a:lnL>
-                    <a:lnR w="0" cap="flat" cmpd="sng" algn="ctr">
-                      <a:noFill/>
-                    </a:lnR>
-                    <a:lnT w="0" cap="flat" cmpd="sng" algn="ctr">
-                      <a:noFill/>
-                    </a:lnT>
-                    <a:lnB w="9525" cap="flat" cmpd="sng" algn="ctr">
-                      <a:solidFill>
-                        <a:srgbClr val="BFBFBF"/>
-                      </a:solidFill>
-                      <a:prstDash val="solid"/>
-                      <a:round/>
-                      <a:headEnd type="none" w="med" len="med"/>
-                      <a:tailEnd type="none" w="med" len="med"/>
-                    </a:lnB>
-                    <a:solidFill>
-                      <a:srgbClr val="FFFFFF"/>
-                    </a:solidFill>
-                  </a:tcPr>
-                </a:tc>
-                <a:tc>
-                  <a:txBody>
-                    <a:bodyPr/>
-                    <a:lstStyle/>
-                    <a:p>
-                      <a:pPr algn="l" indent="0" marL="0">
-                        <a:buNone/>
-                      </a:pPr>
-                      <a:r>
-                        <a:rPr lang="en-US" sz="950" dirty="0">
-                          <a:solidFill>
-                            <a:srgbClr val="1A1A1A"/>
-                          </a:solidFill>
-                          <a:latin typeface="Meiryo" pitchFamily="34" charset="0"/>
-                          <a:ea typeface="Meiryo" pitchFamily="34" charset="-122"/>
-                          <a:cs typeface="Meiryo" pitchFamily="34" charset="-120"/>
-                        </a:rPr>
-                        <a:t>初期開発＋保守</a:t>
-                      </a:r>
-                      <a:endParaRPr lang="en-US" sz="950" dirty="0">
-                        <a:latin typeface="Meiryo" charset="0"/>
-                        <a:ea typeface="Meiryo" charset="0"/>
-                        <a:cs typeface="Meiryo" charset="0"/>
-                      </a:endParaRPr>
-                    </a:p>
-                  </a:txBody>
-                  <a:tcPr marL="54864" marR="54864" marT="18288" marB="18288" anchor="ctr">
-                    <a:lnL w="0" cap="flat" cmpd="sng" algn="ctr">
-                      <a:noFill/>
-                    </a:lnL>
-                    <a:lnR w="0" cap="flat" cmpd="sng" algn="ctr">
-                      <a:noFill/>
-                    </a:lnR>
-                    <a:lnT w="0" cap="flat" cmpd="sng" algn="ctr">
-                      <a:noFill/>
-                    </a:lnT>
-                    <a:lnB w="9525" cap="flat" cmpd="sng" algn="ctr">
-                      <a:solidFill>
-                        <a:srgbClr val="BFBFBF"/>
-                      </a:solidFill>
-                      <a:prstDash val="solid"/>
-                      <a:round/>
-                      <a:headEnd type="none" w="med" len="med"/>
-                      <a:tailEnd type="none" w="med" len="med"/>
-                    </a:lnB>
-                    <a:solidFill>
-                      <a:srgbClr val="FFFFFF"/>
-                    </a:solidFill>
-                  </a:tcPr>
-                </a:tc>
-                <a:tc>
-                  <a:txBody>
-                    <a:bodyPr/>
-                    <a:lstStyle/>
-                    <a:p>
-                      <a:pPr algn="l" indent="0" marL="0">
-                        <a:buNone/>
-                      </a:pPr>
-                      <a:r>
-                        <a:rPr lang="en-US" sz="950" dirty="0">
-                          <a:solidFill>
-                            <a:srgbClr val="1A1A1A"/>
-                          </a:solidFill>
-                          <a:latin typeface="Meiryo" pitchFamily="34" charset="0"/>
-                          <a:ea typeface="Meiryo" pitchFamily="34" charset="-122"/>
-                          <a:cs typeface="Meiryo" pitchFamily="34" charset="-120"/>
-                        </a:rPr>
-                        <a:t>機器販売・リース</a:t>
-                      </a:r>
-                      <a:endParaRPr lang="en-US" sz="950" dirty="0">
-                        <a:latin typeface="Meiryo" charset="0"/>
-                        <a:ea typeface="Meiryo" charset="0"/>
-                        <a:cs typeface="Meiryo" charset="0"/>
-                      </a:endParaRPr>
-                    </a:p>
-                  </a:txBody>
-                  <a:tcPr marL="54864" marR="54864" marT="18288" marB="18288" anchor="ctr">
-                    <a:lnL w="0" cap="flat" cmpd="sng" algn="ctr">
-                      <a:noFill/>
-                    </a:lnL>
-                    <a:lnR w="0" cap="flat" cmpd="sng" algn="ctr">
-                      <a:noFill/>
-                    </a:lnR>
-                    <a:lnT w="0" cap="flat" cmpd="sng" algn="ctr">
-                      <a:noFill/>
-                    </a:lnT>
-                    <a:lnB w="9525" cap="flat" cmpd="sng" algn="ctr">
-                      <a:solidFill>
-                        <a:srgbClr val="BFBFBF"/>
-                      </a:solidFill>
-                      <a:prstDash val="solid"/>
-                      <a:round/>
-                      <a:headEnd type="none" w="med" len="med"/>
-                      <a:tailEnd type="none" w="med" len="med"/>
-                    </a:lnB>
-                    <a:solidFill>
-                      <a:srgbClr val="FFFFFF"/>
-                    </a:solidFill>
-                  </a:tcPr>
-                </a:tc>
-                <a:tc>
-                  <a:txBody>
-                    <a:bodyPr/>
-                    <a:lstStyle/>
-                    <a:p>
-                      <a:pPr algn="l" indent="0" marL="0">
-                        <a:buNone/>
-                      </a:pPr>
-                      <a:r>
-                        <a:rPr lang="en-US" sz="950" b="1" dirty="0">
-                          <a:solidFill>
-                            <a:srgbClr val="1A1A1A"/>
-                          </a:solidFill>
-                          <a:latin typeface="Meiryo" pitchFamily="34" charset="0"/>
-                          <a:ea typeface="Meiryo" pitchFamily="34" charset="-122"/>
-                          <a:cs typeface="Meiryo" pitchFamily="34" charset="-120"/>
-                        </a:rPr>
-                        <a:t>基盤＋登録単位＋モジュール</a:t>
-                      </a:r>
-                      <a:endParaRPr lang="en-US" sz="950" dirty="0">
-                        <a:latin typeface="Meiryo" charset="0"/>
-                        <a:ea typeface="Meiryo" charset="0"/>
-                        <a:cs typeface="Meiryo" charset="0"/>
-                      </a:endParaRPr>
-                    </a:p>
-                  </a:txBody>
-                  <a:tcPr marL="54864" marR="54864" marT="18288" marB="18288" anchor="ctr">
-                    <a:lnL w="0" cap="flat" cmpd="sng" algn="ctr">
-                      <a:noFill/>
-                    </a:lnL>
-                    <a:lnR w="0" cap="flat" cmpd="sng" algn="ctr">
-                      <a:noFill/>
-                    </a:lnR>
-                    <a:lnT w="0" cap="flat" cmpd="sng" algn="ctr">
-                      <a:noFill/>
-                    </a:lnT>
-                    <a:lnB w="9525" cap="flat" cmpd="sng" algn="ctr">
-                      <a:solidFill>
-                        <a:srgbClr val="BFBFBF"/>
-                      </a:solidFill>
-                      <a:prstDash val="solid"/>
-                      <a:round/>
-                      <a:headEnd type="none" w="med" len="med"/>
-                      <a:tailEnd type="none" w="med" len="med"/>
-                    </a:lnB>
-                    <a:solidFill>
-                      <a:srgbClr val="F2F2F2"/>
-                    </a:solidFill>
-                  </a:tcPr>
-                </a:tc>
-              </a:tr>
-              <a:tr h="265176">
-                <a:tc>
-                  <a:txBody>
-                    <a:bodyPr/>
-                    <a:lstStyle/>
-                    <a:p>
-                      <a:pPr algn="l" indent="0" marL="0">
-                        <a:buNone/>
-                      </a:pPr>
-                      <a:r>
-                        <a:rPr lang="en-US" sz="950" dirty="0">
-                          <a:solidFill>
-                            <a:srgbClr val="1A1A1A"/>
-                          </a:solidFill>
-                          <a:latin typeface="Meiryo" pitchFamily="34" charset="0"/>
-                          <a:ea typeface="Meiryo" pitchFamily="34" charset="-122"/>
-                          <a:cs typeface="Meiryo" pitchFamily="34" charset="-120"/>
-                        </a:rPr>
-                        <a:t>対象領域</a:t>
-                      </a:r>
-                      <a:endParaRPr lang="en-US" sz="950" dirty="0">
-                        <a:latin typeface="Meiryo" charset="0"/>
-                        <a:ea typeface="Meiryo" charset="0"/>
-                        <a:cs typeface="Meiryo" charset="0"/>
-                      </a:endParaRPr>
-                    </a:p>
-                  </a:txBody>
-                  <a:tcPr marL="54864" marR="54864" marT="18288" marB="18288" anchor="ctr">
-                    <a:lnL w="0" cap="flat" cmpd="sng" algn="ctr">
-                      <a:noFill/>
-                    </a:lnL>
-                    <a:lnR w="0" cap="flat" cmpd="sng" algn="ctr">
-                      <a:noFill/>
-                    </a:lnR>
-                    <a:lnT w="0" cap="flat" cmpd="sng" algn="ctr">
-                      <a:noFill/>
-                    </a:lnT>
-                    <a:lnB w="9525" cap="flat" cmpd="sng" algn="ctr">
-                      <a:solidFill>
-                        <a:srgbClr val="BFBFBF"/>
-                      </a:solidFill>
-                      <a:prstDash val="solid"/>
-                      <a:round/>
-                      <a:headEnd type="none" w="med" len="med"/>
-                      <a:tailEnd type="none" w="med" len="med"/>
-                    </a:lnB>
-                    <a:solidFill>
-                      <a:srgbClr val="FFFFFF"/>
-                    </a:solidFill>
-                  </a:tcPr>
-                </a:tc>
-                <a:tc>
-                  <a:txBody>
-                    <a:bodyPr/>
-                    <a:lstStyle/>
-                    <a:p>
-                      <a:pPr algn="l" indent="0" marL="0">
-                        <a:buNone/>
-                      </a:pPr>
-                      <a:r>
-                        <a:rPr lang="en-US" sz="950" dirty="0">
-                          <a:solidFill>
-                            <a:srgbClr val="1A1A1A"/>
-                          </a:solidFill>
-                          <a:latin typeface="Meiryo" pitchFamily="34" charset="0"/>
-                          <a:ea typeface="Meiryo" pitchFamily="34" charset="-122"/>
-                          <a:cs typeface="Meiryo" pitchFamily="34" charset="-120"/>
-                        </a:rPr>
-                        <a:t>全業種</a:t>
-                      </a:r>
-                      <a:endParaRPr lang="en-US" sz="950" dirty="0">
-                        <a:latin typeface="Meiryo" charset="0"/>
-                        <a:ea typeface="Meiryo" charset="0"/>
-                        <a:cs typeface="Meiryo" charset="0"/>
-                      </a:endParaRPr>
-                    </a:p>
-                  </a:txBody>
-                  <a:tcPr marL="54864" marR="54864" marT="18288" marB="18288" anchor="ctr">
-                    <a:lnL w="0" cap="flat" cmpd="sng" algn="ctr">
-                      <a:noFill/>
-                    </a:lnL>
-                    <a:lnR w="0" cap="flat" cmpd="sng" algn="ctr">
-                      <a:noFill/>
-                    </a:lnR>
-                    <a:lnT w="0" cap="flat" cmpd="sng" algn="ctr">
-                      <a:noFill/>
-                    </a:lnT>
-                    <a:lnB w="9525" cap="flat" cmpd="sng" algn="ctr">
-                      <a:solidFill>
-                        <a:srgbClr val="BFBFBF"/>
-                      </a:solidFill>
-                      <a:prstDash val="solid"/>
-                      <a:round/>
-                      <a:headEnd type="none" w="med" len="med"/>
-                      <a:tailEnd type="none" w="med" len="med"/>
-                    </a:lnB>
-                    <a:solidFill>
-                      <a:srgbClr val="FFFFFF"/>
-                    </a:solidFill>
-                  </a:tcPr>
-                </a:tc>
-                <a:tc>
-                  <a:txBody>
-                    <a:bodyPr/>
-                    <a:lstStyle/>
-                    <a:p>
-                      <a:pPr algn="l" indent="0" marL="0">
-                        <a:buNone/>
-                      </a:pPr>
-                      <a:r>
-                        <a:rPr lang="en-US" sz="950" dirty="0">
-                          <a:solidFill>
-                            <a:srgbClr val="1A1A1A"/>
-                          </a:solidFill>
-                          <a:latin typeface="Meiryo" pitchFamily="34" charset="0"/>
-                          <a:ea typeface="Meiryo" pitchFamily="34" charset="-122"/>
-                          <a:cs typeface="Meiryo" pitchFamily="34" charset="-120"/>
-                        </a:rPr>
-                        <a:t>製造業全般</a:t>
-                      </a:r>
-                      <a:endParaRPr lang="en-US" sz="950" dirty="0">
-                        <a:latin typeface="Meiryo" charset="0"/>
-                        <a:ea typeface="Meiryo" charset="0"/>
-                        <a:cs typeface="Meiryo" charset="0"/>
-                      </a:endParaRPr>
-                    </a:p>
-                  </a:txBody>
-                  <a:tcPr marL="54864" marR="54864" marT="18288" marB="18288" anchor="ctr">
-                    <a:lnL w="0" cap="flat" cmpd="sng" algn="ctr">
-                      <a:noFill/>
-                    </a:lnL>
-                    <a:lnR w="0" cap="flat" cmpd="sng" algn="ctr">
-                      <a:noFill/>
-                    </a:lnR>
-                    <a:lnT w="0" cap="flat" cmpd="sng" algn="ctr">
-                      <a:noFill/>
-                    </a:lnT>
-                    <a:lnB w="9525" cap="flat" cmpd="sng" algn="ctr">
-                      <a:solidFill>
-                        <a:srgbClr val="BFBFBF"/>
-                      </a:solidFill>
-                      <a:prstDash val="solid"/>
-                      <a:round/>
-                      <a:headEnd type="none" w="med" len="med"/>
-                      <a:tailEnd type="none" w="med" len="med"/>
-                    </a:lnB>
-                    <a:solidFill>
-                      <a:srgbClr val="FFFFFF"/>
-                    </a:solidFill>
-                  </a:tcPr>
-                </a:tc>
-                <a:tc>
-                  <a:txBody>
-                    <a:bodyPr/>
-                    <a:lstStyle/>
-                    <a:p>
-                      <a:pPr algn="l" indent="0" marL="0">
-                        <a:buNone/>
-                      </a:pPr>
-                      <a:r>
-                        <a:rPr lang="en-US" sz="950" dirty="0">
-                          <a:solidFill>
-                            <a:srgbClr val="1A1A1A"/>
-                          </a:solidFill>
-                          <a:latin typeface="Meiryo" pitchFamily="34" charset="0"/>
-                          <a:ea typeface="Meiryo" pitchFamily="34" charset="-122"/>
-                          <a:cs typeface="Meiryo" pitchFamily="34" charset="-120"/>
-                        </a:rPr>
-                        <a:t>物流・製造全般</a:t>
-                      </a:r>
-                      <a:endParaRPr lang="en-US" sz="950" dirty="0">
-                        <a:latin typeface="Meiryo" charset="0"/>
-                        <a:ea typeface="Meiryo" charset="0"/>
-                        <a:cs typeface="Meiryo" charset="0"/>
-                      </a:endParaRPr>
-                    </a:p>
-                  </a:txBody>
-                  <a:tcPr marL="54864" marR="54864" marT="18288" marB="18288" anchor="ctr">
-                    <a:lnL w="0" cap="flat" cmpd="sng" algn="ctr">
-                      <a:noFill/>
-                    </a:lnL>
-                    <a:lnR w="0" cap="flat" cmpd="sng" algn="ctr">
-                      <a:noFill/>
-                    </a:lnR>
-                    <a:lnT w="0" cap="flat" cmpd="sng" algn="ctr">
-                      <a:noFill/>
-                    </a:lnT>
-                    <a:lnB w="9525" cap="flat" cmpd="sng" algn="ctr">
-                      <a:solidFill>
-                        <a:srgbClr val="BFBFBF"/>
-                      </a:solidFill>
-                      <a:prstDash val="solid"/>
-                      <a:round/>
-                      <a:headEnd type="none" w="med" len="med"/>
-                      <a:tailEnd type="none" w="med" len="med"/>
-                    </a:lnB>
-                    <a:solidFill>
-                      <a:srgbClr val="FFFFFF"/>
-                    </a:solidFill>
-                  </a:tcPr>
-                </a:tc>
-                <a:tc>
-                  <a:txBody>
-                    <a:bodyPr/>
-                    <a:lstStyle/>
-                    <a:p>
-                      <a:pPr algn="l" indent="0" marL="0">
-                        <a:buNone/>
-                      </a:pPr>
-                      <a:r>
-                        <a:rPr lang="en-US" sz="950" b="1" dirty="0">
-                          <a:solidFill>
-                            <a:srgbClr val="1A1A1A"/>
-                          </a:solidFill>
-                          <a:latin typeface="Meiryo" pitchFamily="34" charset="0"/>
-                          <a:ea typeface="Meiryo" pitchFamily="34" charset="-122"/>
-                          <a:cs typeface="Meiryo" pitchFamily="34" charset="-120"/>
-                        </a:rPr>
-                        <a:t>電線工場とその施工現場</a:t>
-                      </a:r>
-                      <a:endParaRPr lang="en-US" sz="950" dirty="0">
-                        <a:latin typeface="Meiryo" charset="0"/>
-                        <a:ea typeface="Meiryo" charset="0"/>
-                        <a:cs typeface="Meiryo" charset="0"/>
-                      </a:endParaRPr>
-                    </a:p>
-                  </a:txBody>
-                  <a:tcPr marL="54864" marR="54864" marT="18288" marB="18288" anchor="ctr">
-                    <a:lnL w="0" cap="flat" cmpd="sng" algn="ctr">
-                      <a:noFill/>
-                    </a:lnL>
-                    <a:lnR w="0" cap="flat" cmpd="sng" algn="ctr">
-                      <a:noFill/>
-                    </a:lnR>
-                    <a:lnT w="0" cap="flat" cmpd="sng" algn="ctr">
-                      <a:noFill/>
-                    </a:lnT>
-                    <a:lnB w="9525" cap="flat" cmpd="sng" algn="ctr">
-                      <a:solidFill>
-                        <a:srgbClr val="BFBFBF"/>
-                      </a:solidFill>
-                      <a:prstDash val="solid"/>
-                      <a:round/>
-                      <a:headEnd type="none" w="med" len="med"/>
-                      <a:tailEnd type="none" w="med" len="med"/>
-                    </a:lnB>
-                    <a:solidFill>
-                      <a:srgbClr val="F2F2F2"/>
-                    </a:solidFill>
-                  </a:tcPr>
-                </a:tc>
-              </a:tr>
-            </a:tbl>
-          </a:graphicData>
-        </a:graphic>
-      </p:graphicFrame>
-      <p:sp>
-        <p:nvSpPr>
-          <p:cNvPr id="6" name="Shape 2"/>
+      <p:sp>
+        <p:nvSpPr>
+          <p:cNvPr id="5" name="Text 2"/>
+          <p:cNvSpPr txBox="1"/>
+          <p:nvPr/>
+        </p:nvSpPr>
+        <p:spPr>
+          <a:xfrm>
+            <a:off x="365760" y="1051560"/>
+            <a:ext cx="4114800" cy="237744"/>
+          </a:xfrm>
+          <a:prstGeom prst="rect">
+            <a:avLst/>
+          </a:prstGeom>
+          <a:noFill/>
+          <a:ln/>
+        </p:spPr>
+        <p:txBody>
+          <a:bodyPr wrap="square" lIns="0" tIns="0" rIns="0" bIns="0" rtlCol="0" anchor="t"/>
+          <a:lstStyle/>
+          <a:p>
+            <a:pPr algn="l" indent="0" marL="0">
+              <a:lnSpc>
+                <a:spcPct val="115000"/>
+              </a:lnSpc>
+              <a:buNone/>
+            </a:pPr>
+            <a:r>
+              <a:rPr lang="en-US" sz="1050" b="1" dirty="0">
+                <a:solidFill>
+                  <a:srgbClr val="1A1A1A"/>
+                </a:solidFill>
+                <a:latin typeface="Meiryo" pitchFamily="34" charset="0"/>
+                <a:ea typeface="Meiryo" pitchFamily="34" charset="-122"/>
+                <a:cs typeface="Meiryo" pitchFamily="34" charset="-120"/>
+              </a:rPr>
+              <a:t>ポジショニングマップ</a:t>
+            </a:r>
+            <a:endParaRPr lang="en-US" sz="1050" dirty="0"/>
+          </a:p>
+        </p:txBody>
+      </p:sp>
+      <p:sp>
+        <p:nvSpPr>
+          <p:cNvPr id="6" name="target-quadrant"/>
           <p:cNvSpPr/>
           <p:nvPr/>
         </p:nvSpPr>
         <p:spPr>
           <a:xfrm>
-            <a:off x="365760" y="2834640"/>
-            <a:ext cx="4069080" cy="1600200"/>
-          </a:xfrm>
-          <a:prstGeom prst="rect">
+            <a:off x="2514600" y="1435608"/>
+            <a:ext cx="1828800" cy="1234440"/>
+          </a:xfrm>
+          <a:prstGeom prst="rect">
+            <a:avLst/>
+          </a:prstGeom>
+          <a:solidFill>
+            <a:srgbClr val="F2F2F2"/>
+          </a:solidFill>
+          <a:ln/>
+        </p:spPr>
+      </p:sp>
+      <p:sp>
+        <p:nvSpPr>
+          <p:cNvPr id="7" name="Shape 4"/>
+          <p:cNvSpPr/>
+          <p:nvPr/>
+        </p:nvSpPr>
+        <p:spPr>
+          <a:xfrm>
+            <a:off x="685800" y="2670048"/>
+            <a:ext cx="3657600" cy="0"/>
+          </a:xfrm>
+          <a:prstGeom prst="line">
+            <a:avLst/>
+          </a:prstGeom>
+          <a:noFill/>
+          <a:ln w="9525">
+            <a:solidFill>
+              <a:srgbClr val="8C8C8C"/>
+            </a:solidFill>
+            <a:prstDash val="solid"/>
+          </a:ln>
+        </p:spPr>
+      </p:sp>
+      <p:sp>
+        <p:nvSpPr>
+          <p:cNvPr id="8" name="Shape 5"/>
+          <p:cNvSpPr/>
+          <p:nvPr/>
+        </p:nvSpPr>
+        <p:spPr>
+          <a:xfrm>
+            <a:off x="2514600" y="1435608"/>
+            <a:ext cx="0" cy="2468880"/>
+          </a:xfrm>
+          <a:prstGeom prst="line">
+            <a:avLst/>
+          </a:prstGeom>
+          <a:noFill/>
+          <a:ln w="9525">
+            <a:solidFill>
+              <a:srgbClr val="8C8C8C"/>
+            </a:solidFill>
+            <a:prstDash val="solid"/>
+          </a:ln>
+        </p:spPr>
+      </p:sp>
+      <p:sp>
+        <p:nvSpPr>
+          <p:cNvPr id="9" name="Text 6"/>
+          <p:cNvSpPr txBox="1"/>
+          <p:nvPr/>
+        </p:nvSpPr>
+        <p:spPr>
+          <a:xfrm>
+            <a:off x="1600200" y="1216152"/>
+            <a:ext cx="1828800" cy="182880"/>
+          </a:xfrm>
+          <a:prstGeom prst="rect">
+            <a:avLst/>
+          </a:prstGeom>
+          <a:noFill/>
+          <a:ln/>
+        </p:spPr>
+        <p:txBody>
+          <a:bodyPr wrap="square" lIns="0" tIns="0" rIns="0" bIns="0" rtlCol="0" anchor="t"/>
+          <a:lstStyle/>
+          <a:p>
+            <a:pPr algn="ctr" indent="0" marL="0">
+              <a:lnSpc>
+                <a:spcPct val="115000"/>
+              </a:lnSpc>
+              <a:buNone/>
+            </a:pPr>
+            <a:r>
+              <a:rPr lang="en-US" sz="850" dirty="0">
+                <a:solidFill>
+                  <a:srgbClr val="4D4D4D"/>
+                </a:solidFill>
+                <a:latin typeface="Meiryo" pitchFamily="34" charset="0"/>
+                <a:ea typeface="Meiryo" pitchFamily="34" charset="-122"/>
+                <a:cs typeface="Meiryo" pitchFamily="34" charset="-120"/>
+              </a:rPr>
+              <a:t>仕組み（プロダクト）</a:t>
+            </a:r>
+            <a:endParaRPr lang="en-US" sz="850" dirty="0"/>
+          </a:p>
+        </p:txBody>
+      </p:sp>
+      <p:sp>
+        <p:nvSpPr>
+          <p:cNvPr id="10" name="Text 7"/>
+          <p:cNvSpPr txBox="1"/>
+          <p:nvPr/>
+        </p:nvSpPr>
+        <p:spPr>
+          <a:xfrm>
+            <a:off x="1600200" y="3941064"/>
+            <a:ext cx="1828800" cy="182880"/>
+          </a:xfrm>
+          <a:prstGeom prst="rect">
+            <a:avLst/>
+          </a:prstGeom>
+          <a:noFill/>
+          <a:ln/>
+        </p:spPr>
+        <p:txBody>
+          <a:bodyPr wrap="square" lIns="0" tIns="0" rIns="0" bIns="0" rtlCol="0" anchor="t"/>
+          <a:lstStyle/>
+          <a:p>
+            <a:pPr algn="ctr" indent="0" marL="0">
+              <a:lnSpc>
+                <a:spcPct val="115000"/>
+              </a:lnSpc>
+              <a:buNone/>
+            </a:pPr>
+            <a:r>
+              <a:rPr lang="en-US" sz="850" dirty="0">
+                <a:solidFill>
+                  <a:srgbClr val="4D4D4D"/>
+                </a:solidFill>
+                <a:latin typeface="Meiryo" pitchFamily="34" charset="0"/>
+                <a:ea typeface="Meiryo" pitchFamily="34" charset="-122"/>
+                <a:cs typeface="Meiryo" pitchFamily="34" charset="-120"/>
+              </a:rPr>
+              <a:t>人の時間（労働集約）</a:t>
+            </a:r>
+            <a:endParaRPr lang="en-US" sz="850" dirty="0"/>
+          </a:p>
+        </p:txBody>
+      </p:sp>
+      <p:sp>
+        <p:nvSpPr>
+          <p:cNvPr id="11" name="Text 8"/>
+          <p:cNvSpPr txBox="1"/>
+          <p:nvPr/>
+        </p:nvSpPr>
+        <p:spPr>
+          <a:xfrm>
+            <a:off x="685800" y="2697480"/>
+            <a:ext cx="1737360" cy="182880"/>
+          </a:xfrm>
+          <a:prstGeom prst="rect">
+            <a:avLst/>
+          </a:prstGeom>
+          <a:noFill/>
+          <a:ln/>
+        </p:spPr>
+        <p:txBody>
+          <a:bodyPr wrap="square" lIns="0" tIns="0" rIns="0" bIns="0" rtlCol="0" anchor="t"/>
+          <a:lstStyle/>
+          <a:p>
+            <a:pPr algn="l" indent="0" marL="0">
+              <a:lnSpc>
+                <a:spcPct val="115000"/>
+              </a:lnSpc>
+              <a:buNone/>
+            </a:pPr>
+            <a:r>
+              <a:rPr lang="en-US" sz="800" dirty="0">
+                <a:solidFill>
+                  <a:srgbClr val="4D4D4D"/>
+                </a:solidFill>
+                <a:latin typeface="Meiryo" pitchFamily="34" charset="0"/>
+                <a:ea typeface="Meiryo" pitchFamily="34" charset="-122"/>
+                <a:cs typeface="Meiryo" pitchFamily="34" charset="-120"/>
+              </a:rPr>
+              <a:t>← 実績（何が起きたか）</a:t>
+            </a:r>
+            <a:endParaRPr lang="en-US" sz="800" dirty="0"/>
+          </a:p>
+        </p:txBody>
+      </p:sp>
+      <p:sp>
+        <p:nvSpPr>
+          <p:cNvPr id="12" name="Text 9"/>
+          <p:cNvSpPr txBox="1"/>
+          <p:nvPr/>
+        </p:nvSpPr>
+        <p:spPr>
+          <a:xfrm>
+            <a:off x="2606040" y="2697480"/>
+            <a:ext cx="1737360" cy="182880"/>
+          </a:xfrm>
+          <a:prstGeom prst="rect">
+            <a:avLst/>
+          </a:prstGeom>
+          <a:noFill/>
+          <a:ln/>
+        </p:spPr>
+        <p:txBody>
+          <a:bodyPr wrap="square" lIns="0" tIns="0" rIns="0" bIns="0" rtlCol="0" anchor="t"/>
+          <a:lstStyle/>
+          <a:p>
+            <a:pPr algn="r" indent="0" marL="0">
+              <a:lnSpc>
+                <a:spcPct val="115000"/>
+              </a:lnSpc>
+              <a:buNone/>
+            </a:pPr>
+            <a:r>
+              <a:rPr lang="en-US" sz="800" dirty="0">
+                <a:solidFill>
+                  <a:srgbClr val="4D4D4D"/>
+                </a:solidFill>
+                <a:latin typeface="Meiryo" pitchFamily="34" charset="0"/>
+                <a:ea typeface="Meiryo" pitchFamily="34" charset="-122"/>
+                <a:cs typeface="Meiryo" pitchFamily="34" charset="-120"/>
+              </a:rPr>
+              <a:t>判断の理由（なぜ）→</a:t>
+            </a:r>
+            <a:endParaRPr lang="en-US" sz="800" dirty="0"/>
+          </a:p>
+        </p:txBody>
+      </p:sp>
+      <p:sp>
+        <p:nvSpPr>
+          <p:cNvPr id="13" name="pos-MES・ERP"/>
+          <p:cNvSpPr/>
+          <p:nvPr/>
+        </p:nvSpPr>
+        <p:spPr>
+          <a:xfrm>
+            <a:off x="1051560" y="1757477"/>
+            <a:ext cx="146304" cy="146304"/>
+          </a:xfrm>
+          <a:prstGeom prst="ellipse">
             <a:avLst/>
           </a:prstGeom>
           <a:solidFill>
             <a:srgbClr val="FFFFFF"/>
           </a:solidFill>
-          <a:ln w="9525">
+          <a:ln w="15875">
             <a:solidFill>
-              <a:srgbClr val="BFBFBF"/>
+              <a:srgbClr val="1A1A1A"/>
             </a:solidFill>
             <a:prstDash val="solid"/>
           </a:ln>
@@ -9311,33 +8129,33 @@
       </p:sp>
       <p:sp>
         <p:nvSpPr>
-          <p:cNvPr id="7" name="Text 3"/>
+          <p:cNvPr id="14" name="Text 11"/>
           <p:cNvSpPr txBox="1"/>
           <p:nvPr/>
         </p:nvSpPr>
         <p:spPr>
           <a:xfrm>
-            <a:off x="502920" y="2926080"/>
-            <a:ext cx="3794760" cy="274320"/>
-          </a:xfrm>
-          <a:prstGeom prst="rect">
-            <a:avLst/>
-          </a:prstGeom>
-          <a:noFill/>
-          <a:ln/>
-        </p:spPr>
-        <p:txBody>
-          <a:bodyPr wrap="square" lIns="0" tIns="0" rIns="0" bIns="0" rtlCol="0" anchor="t"/>
-          <a:lstStyle/>
-          <a:p>
-            <a:pPr algn="l" indent="0" marL="0">
-              <a:lnSpc>
-                <a:spcPct val="115000"/>
-              </a:lnSpc>
-              <a:buNone/>
-            </a:pPr>
-            <a:r>
-              <a:rPr lang="en-US" sz="1150" b="1" dirty="0">
+            <a:off x="1243584" y="1720901"/>
+            <a:ext cx="1463040" cy="219456"/>
+          </a:xfrm>
+          <a:prstGeom prst="rect">
+            <a:avLst/>
+          </a:prstGeom>
+          <a:noFill/>
+          <a:ln/>
+        </p:spPr>
+        <p:txBody>
+          <a:bodyPr wrap="square" lIns="0" tIns="0" rIns="0" bIns="0" rtlCol="0" anchor="ctr"/>
+          <a:lstStyle/>
+          <a:p>
+            <a:pPr algn="l" indent="0" marL="0">
+              <a:lnSpc>
+                <a:spcPct val="115000"/>
+              </a:lnSpc>
+              <a:buNone/>
+            </a:pPr>
+            <a:r>
+              <a:rPr lang="en-US" sz="850" dirty="0">
                 <a:solidFill>
                   <a:srgbClr val="1A1A1A"/>
                 </a:solidFill>
@@ -9345,44 +8163,66 @@
                 <a:ea typeface="Meiryo" pitchFamily="34" charset="-122"/>
                 <a:cs typeface="Meiryo" pitchFamily="34" charset="-120"/>
               </a:rPr>
-              <a:t>MES・ロボット導入済みの工場こそ、見込み顧客になる</a:t>
-            </a:r>
-            <a:endParaRPr lang="en-US" sz="1150" dirty="0"/>
-          </a:p>
-        </p:txBody>
-      </p:sp>
-      <p:sp>
-        <p:nvSpPr>
-          <p:cNvPr id="8" name="Text 4"/>
+              <a:t>MES・ERP</a:t>
+            </a:r>
+            <a:endParaRPr lang="en-US" sz="850" dirty="0"/>
+          </a:p>
+        </p:txBody>
+      </p:sp>
+      <p:sp>
+        <p:nvSpPr>
+          <p:cNvPr id="15" name="pos-搬送ロボット・検査AI"/>
+          <p:cNvSpPr/>
+          <p:nvPr/>
+        </p:nvSpPr>
+        <p:spPr>
+          <a:xfrm>
+            <a:off x="978408" y="2251253"/>
+            <a:ext cx="146304" cy="146304"/>
+          </a:xfrm>
+          <a:prstGeom prst="ellipse">
+            <a:avLst/>
+          </a:prstGeom>
+          <a:solidFill>
+            <a:srgbClr val="FFFFFF"/>
+          </a:solidFill>
+          <a:ln w="15875">
+            <a:solidFill>
+              <a:srgbClr val="1A1A1A"/>
+            </a:solidFill>
+            <a:prstDash val="solid"/>
+          </a:ln>
+        </p:spPr>
+      </p:sp>
+      <p:sp>
+        <p:nvSpPr>
+          <p:cNvPr id="16" name="Text 13"/>
           <p:cNvSpPr txBox="1"/>
           <p:nvPr/>
         </p:nvSpPr>
         <p:spPr>
           <a:xfrm>
-            <a:off x="502920" y="3246120"/>
-            <a:ext cx="3794760" cy="1143000"/>
-          </a:xfrm>
-          <a:prstGeom prst="rect">
-            <a:avLst/>
-          </a:prstGeom>
-          <a:noFill/>
-          <a:ln/>
-        </p:spPr>
-        <p:txBody>
-          <a:bodyPr wrap="square" lIns="0" tIns="0" rIns="0" bIns="0" rtlCol="0" anchor="t"/>
-          <a:lstStyle/>
-          <a:p>
-            <a:pPr algn="l" indent="0" marL="0">
-              <a:lnSpc>
-                <a:spcPct val="115000"/>
-              </a:lnSpc>
-              <a:spcAft>
-                <a:spcPts val="400"/>
-              </a:spcAft>
-              <a:buNone/>
-            </a:pPr>
-            <a:r>
-              <a:rPr lang="en-US" sz="950" b="1" dirty="0">
+            <a:off x="1170432" y="2214677"/>
+            <a:ext cx="1463040" cy="219456"/>
+          </a:xfrm>
+          <a:prstGeom prst="rect">
+            <a:avLst/>
+          </a:prstGeom>
+          <a:noFill/>
+          <a:ln/>
+        </p:spPr>
+        <p:txBody>
+          <a:bodyPr wrap="square" lIns="0" tIns="0" rIns="0" bIns="0" rtlCol="0" anchor="ctr"/>
+          <a:lstStyle/>
+          <a:p>
+            <a:pPr algn="l" indent="0" marL="0">
+              <a:lnSpc>
+                <a:spcPct val="115000"/>
+              </a:lnSpc>
+              <a:buNone/>
+            </a:pPr>
+            <a:r>
+              <a:rPr lang="en-US" sz="850" dirty="0">
                 <a:solidFill>
                   <a:srgbClr val="1A1A1A"/>
                 </a:solidFill>
@@ -9390,19 +8230,66 @@
                 <a:ea typeface="Meiryo" pitchFamily="34" charset="-122"/>
                 <a:cs typeface="Meiryo" pitchFamily="34" charset="-120"/>
               </a:rPr>
-              <a:t>置き換えず併存：</a:t>
-            </a:r>
-            <a:pPr algn="l" indent="0" marL="0">
-              <a:lnSpc>
-                <a:spcPct val="115000"/>
-              </a:lnSpc>
-              <a:spcAft>
-                <a:spcPts val="400"/>
-              </a:spcAft>
-              <a:buNone/>
-            </a:pPr>
-            <a:r>
-              <a:rPr lang="en-US" sz="950" dirty="0">
+              <a:t>搬送ロボット・検査AI</a:t>
+            </a:r>
+            <a:endParaRPr lang="en-US" sz="850" dirty="0"/>
+          </a:p>
+        </p:txBody>
+      </p:sp>
+      <p:sp>
+        <p:nvSpPr>
+          <p:cNvPr id="17" name="pos-コンサル（BPR）"/>
+          <p:cNvSpPr/>
+          <p:nvPr/>
+        </p:nvSpPr>
+        <p:spPr>
+          <a:xfrm>
+            <a:off x="2660904" y="3436315"/>
+            <a:ext cx="146304" cy="146304"/>
+          </a:xfrm>
+          <a:prstGeom prst="ellipse">
+            <a:avLst/>
+          </a:prstGeom>
+          <a:solidFill>
+            <a:srgbClr val="FFFFFF"/>
+          </a:solidFill>
+          <a:ln w="15875">
+            <a:solidFill>
+              <a:srgbClr val="1A1A1A"/>
+            </a:solidFill>
+            <a:prstDash val="solid"/>
+          </a:ln>
+        </p:spPr>
+      </p:sp>
+      <p:sp>
+        <p:nvSpPr>
+          <p:cNvPr id="18" name="Text 15"/>
+          <p:cNvSpPr txBox="1"/>
+          <p:nvPr/>
+        </p:nvSpPr>
+        <p:spPr>
+          <a:xfrm>
+            <a:off x="2852928" y="3399739"/>
+            <a:ext cx="1463040" cy="219456"/>
+          </a:xfrm>
+          <a:prstGeom prst="rect">
+            <a:avLst/>
+          </a:prstGeom>
+          <a:noFill/>
+          <a:ln/>
+        </p:spPr>
+        <p:txBody>
+          <a:bodyPr wrap="square" lIns="0" tIns="0" rIns="0" bIns="0" rtlCol="0" anchor="ctr"/>
+          <a:lstStyle/>
+          <a:p>
+            <a:pPr algn="l" indent="0" marL="0">
+              <a:lnSpc>
+                <a:spcPct val="115000"/>
+              </a:lnSpc>
+              <a:buNone/>
+            </a:pPr>
+            <a:r>
+              <a:rPr lang="en-US" sz="850" dirty="0">
                 <a:solidFill>
                   <a:srgbClr val="1A1A1A"/>
                 </a:solidFill>
@@ -9410,22 +8297,66 @@
                 <a:ea typeface="Meiryo" pitchFamily="34" charset="-122"/>
                 <a:cs typeface="Meiryo" pitchFamily="34" charset="-120"/>
               </a:rPr>
-              <a:t>実績はMES、搬送はロボット、判断の理由と引き継ぎは当社</a:t>
-            </a:r>
-            <a:endParaRPr lang="en-US" sz="950" dirty="0"/>
-          </a:p>
-          <a:p>
-            <a:pPr algn="l" indent="0" marL="0">
-              <a:lnSpc>
-                <a:spcPct val="115000"/>
-              </a:lnSpc>
-              <a:spcAft>
-                <a:spcPts val="400"/>
-              </a:spcAft>
-              <a:buNone/>
-            </a:pPr>
-            <a:r>
-              <a:rPr lang="en-US" sz="950" b="1" dirty="0">
+              <a:t>コンサル（BPR）</a:t>
+            </a:r>
+            <a:endParaRPr lang="en-US" sz="850" dirty="0"/>
+          </a:p>
+        </p:txBody>
+      </p:sp>
+      <p:sp>
+        <p:nvSpPr>
+          <p:cNvPr id="19" name="pos-社内の熟練者（属人）"/>
+          <p:cNvSpPr/>
+          <p:nvPr/>
+        </p:nvSpPr>
+        <p:spPr>
+          <a:xfrm>
+            <a:off x="3685032" y="2991917"/>
+            <a:ext cx="146304" cy="146304"/>
+          </a:xfrm>
+          <a:prstGeom prst="ellipse">
+            <a:avLst/>
+          </a:prstGeom>
+          <a:solidFill>
+            <a:srgbClr val="FFFFFF"/>
+          </a:solidFill>
+          <a:ln w="15875">
+            <a:solidFill>
+              <a:srgbClr val="1A1A1A"/>
+            </a:solidFill>
+            <a:prstDash val="solid"/>
+          </a:ln>
+        </p:spPr>
+      </p:sp>
+      <p:sp>
+        <p:nvSpPr>
+          <p:cNvPr id="20" name="Text 17"/>
+          <p:cNvSpPr txBox="1"/>
+          <p:nvPr/>
+        </p:nvSpPr>
+        <p:spPr>
+          <a:xfrm>
+            <a:off x="2660904" y="3156509"/>
+            <a:ext cx="1280160" cy="219456"/>
+          </a:xfrm>
+          <a:prstGeom prst="rect">
+            <a:avLst/>
+          </a:prstGeom>
+          <a:noFill/>
+          <a:ln/>
+        </p:spPr>
+        <p:txBody>
+          <a:bodyPr wrap="square" lIns="0" tIns="0" rIns="0" bIns="0" rtlCol="0" anchor="ctr"/>
+          <a:lstStyle/>
+          <a:p>
+            <a:pPr algn="r" indent="0" marL="0">
+              <a:lnSpc>
+                <a:spcPct val="115000"/>
+              </a:lnSpc>
+              <a:buNone/>
+            </a:pPr>
+            <a:r>
+              <a:rPr lang="en-US" sz="850" dirty="0">
                 <a:solidFill>
                   <a:srgbClr val="1A1A1A"/>
                 </a:solidFill>
@@ -9433,147 +8364,47 @@
                 <a:ea typeface="Meiryo" pitchFamily="34" charset="-122"/>
                 <a:cs typeface="Meiryo" pitchFamily="34" charset="-120"/>
               </a:rPr>
-              <a:t>導入済み工場の認識：</a:t>
-            </a:r>
-            <a:pPr algn="l" indent="0" marL="0">
-              <a:lnSpc>
-                <a:spcPct val="115000"/>
-              </a:lnSpc>
-              <a:spcAft>
-                <a:spcPts val="400"/>
-              </a:spcAft>
-              <a:buNone/>
-            </a:pPr>
-            <a:r>
-              <a:rPr lang="en-US" sz="950" dirty="0">
-                <a:solidFill>
-                  <a:srgbClr val="1A1A1A"/>
-                </a:solidFill>
-                <a:latin typeface="Meiryo" pitchFamily="34" charset="0"/>
-                <a:ea typeface="Meiryo" pitchFamily="34" charset="-122"/>
-                <a:cs typeface="Meiryo" pitchFamily="34" charset="-120"/>
-              </a:rPr>
-              <a:t>「実績は取れているが、なぜそう判断したかは残っていない」</a:t>
-            </a:r>
-            <a:endParaRPr lang="en-US" sz="950" dirty="0"/>
-          </a:p>
-          <a:p>
-            <a:pPr algn="l" indent="0" marL="0">
-              <a:lnSpc>
-                <a:spcPct val="115000"/>
-              </a:lnSpc>
-              <a:spcAft>
-                <a:spcPts val="400"/>
-              </a:spcAft>
-              <a:buNone/>
-            </a:pPr>
-            <a:r>
-              <a:rPr lang="en-US" sz="950" b="1" dirty="0">
-                <a:solidFill>
-                  <a:srgbClr val="1A1A1A"/>
-                </a:solidFill>
-                <a:latin typeface="Meiryo" pitchFamily="34" charset="0"/>
-                <a:ea typeface="Meiryo" pitchFamily="34" charset="-122"/>
-                <a:cs typeface="Meiryo" pitchFamily="34" charset="-120"/>
-              </a:rPr>
-              <a:t>ロボット・AIは補完：</a:t>
-            </a:r>
-            <a:pPr algn="l" indent="0" marL="0">
-              <a:lnSpc>
-                <a:spcPct val="115000"/>
-              </a:lnSpc>
-              <a:spcAft>
-                <a:spcPts val="400"/>
-              </a:spcAft>
-              <a:buNone/>
-            </a:pPr>
-            <a:r>
-              <a:rPr lang="en-US" sz="950" dirty="0">
-                <a:solidFill>
-                  <a:srgbClr val="1A1A1A"/>
-                </a:solidFill>
-                <a:latin typeface="Meiryo" pitchFamily="34" charset="0"/>
-                <a:ea typeface="Meiryo" pitchFamily="34" charset="-122"/>
-                <a:cs typeface="Meiryo" pitchFamily="34" charset="-120"/>
-              </a:rPr>
-              <a:t>機械は現場の手足。何をどう動かすかの一次情報を当社が供給</a:t>
-            </a:r>
-            <a:endParaRPr lang="en-US" sz="950" dirty="0"/>
-          </a:p>
-        </p:txBody>
-      </p:sp>
-      <p:sp>
-        <p:nvSpPr>
-          <p:cNvPr id="9" name="Text 5"/>
-          <p:cNvSpPr txBox="1"/>
-          <p:nvPr/>
-        </p:nvSpPr>
-        <p:spPr>
-          <a:xfrm>
-            <a:off x="4617720" y="2834640"/>
-            <a:ext cx="4160520" cy="237744"/>
-          </a:xfrm>
-          <a:prstGeom prst="rect">
-            <a:avLst/>
-          </a:prstGeom>
-          <a:noFill/>
-          <a:ln/>
-        </p:spPr>
-        <p:txBody>
-          <a:bodyPr wrap="square" lIns="0" tIns="0" rIns="0" bIns="0" rtlCol="0" anchor="t"/>
-          <a:lstStyle/>
-          <a:p>
-            <a:pPr algn="l" indent="0" marL="0">
-              <a:lnSpc>
-                <a:spcPct val="115000"/>
-              </a:lnSpc>
-              <a:buNone/>
-            </a:pPr>
-            <a:r>
-              <a:rPr lang="en-US" sz="1150" b="1" dirty="0">
-                <a:solidFill>
-                  <a:srgbClr val="1A1A1A"/>
-                </a:solidFill>
-                <a:latin typeface="Meiryo" pitchFamily="34" charset="0"/>
-                <a:ea typeface="Meiryo" pitchFamily="34" charset="-122"/>
-                <a:cs typeface="Meiryo" pitchFamily="34" charset="-120"/>
-              </a:rPr>
-              <a:t>SWOT</a:t>
-            </a:r>
-            <a:endParaRPr lang="en-US" sz="1150" dirty="0"/>
-          </a:p>
-        </p:txBody>
-      </p:sp>
-      <p:sp>
-        <p:nvSpPr>
-          <p:cNvPr id="10" name="Shape 6"/>
+              <a:t>社内の熟練者（属人）</a:t>
+            </a:r>
+            <a:endParaRPr lang="en-US" sz="850" dirty="0"/>
+          </a:p>
+        </p:txBody>
+      </p:sp>
+      <p:sp>
+        <p:nvSpPr>
+          <p:cNvPr id="21" name="pos-三現ワークス"/>
           <p:cNvSpPr/>
           <p:nvPr/>
         </p:nvSpPr>
         <p:spPr>
           <a:xfrm>
-            <a:off x="4617720" y="3154680"/>
-            <a:ext cx="256032" cy="256032"/>
-          </a:xfrm>
-          <a:prstGeom prst="rect">
+            <a:off x="3511296" y="1828800"/>
+            <a:ext cx="201168" cy="201168"/>
+          </a:xfrm>
+          <a:prstGeom prst="ellipse">
             <a:avLst/>
           </a:prstGeom>
           <a:solidFill>
             <a:srgbClr val="1A1A1A"/>
           </a:solidFill>
-          <a:ln/>
-        </p:spPr>
-      </p:sp>
-      <p:sp>
-        <p:nvSpPr>
-          <p:cNvPr id="11" name="Text 7"/>
+          <a:ln w="15875">
+            <a:solidFill>
+              <a:srgbClr val="1A1A1A"/>
+            </a:solidFill>
+            <a:prstDash val="solid"/>
+          </a:ln>
+        </p:spPr>
+      </p:sp>
+      <p:sp>
+        <p:nvSpPr>
+          <p:cNvPr id="22" name="Text 19"/>
           <p:cNvSpPr txBox="1"/>
           <p:nvPr/>
         </p:nvSpPr>
         <p:spPr>
           <a:xfrm>
-            <a:off x="4617720" y="3154680"/>
-            <a:ext cx="256032" cy="256032"/>
+            <a:off x="2002536" y="1819656"/>
+            <a:ext cx="1463040" cy="219456"/>
           </a:xfrm>
           <a:prstGeom prst="rect">
             <a:avLst/>
@@ -9585,56 +8416,56 @@
           <a:bodyPr wrap="square" lIns="0" tIns="0" rIns="0" bIns="0" rtlCol="0" anchor="ctr"/>
           <a:lstStyle/>
           <a:p>
-            <a:pPr algn="ctr" indent="0" marL="0">
-              <a:lnSpc>
-                <a:spcPct val="115000"/>
-              </a:lnSpc>
-              <a:buNone/>
-            </a:pPr>
-            <a:r>
-              <a:rPr lang="en-US" sz="950" b="1" dirty="0">
-                <a:solidFill>
-                  <a:srgbClr val="FFFFFF"/>
-                </a:solidFill>
-                <a:latin typeface="Meiryo" pitchFamily="34" charset="0"/>
-                <a:ea typeface="Meiryo" pitchFamily="34" charset="-122"/>
-                <a:cs typeface="Meiryo" pitchFamily="34" charset="-120"/>
-              </a:rPr>
-              <a:t>S</a:t>
-            </a:r>
-            <a:endParaRPr lang="en-US" sz="950" dirty="0"/>
-          </a:p>
-        </p:txBody>
-      </p:sp>
-      <p:sp>
-        <p:nvSpPr>
-          <p:cNvPr id="12" name="Text 8"/>
+            <a:pPr algn="r" indent="0" marL="0">
+              <a:lnSpc>
+                <a:spcPct val="115000"/>
+              </a:lnSpc>
+              <a:buNone/>
+            </a:pPr>
+            <a:r>
+              <a:rPr lang="en-US" sz="1000" b="1" dirty="0">
+                <a:solidFill>
+                  <a:srgbClr val="1A1A1A"/>
+                </a:solidFill>
+                <a:latin typeface="Meiryo" pitchFamily="34" charset="0"/>
+                <a:ea typeface="Meiryo" pitchFamily="34" charset="-122"/>
+                <a:cs typeface="Meiryo" pitchFamily="34" charset="-120"/>
+              </a:rPr>
+              <a:t>三現ワークス</a:t>
+            </a:r>
+            <a:endParaRPr lang="en-US" sz="1000" dirty="0"/>
+          </a:p>
+        </p:txBody>
+      </p:sp>
+      <p:sp>
+        <p:nvSpPr>
+          <p:cNvPr id="23" name="Text 20"/>
           <p:cNvSpPr txBox="1"/>
           <p:nvPr/>
         </p:nvSpPr>
         <p:spPr>
           <a:xfrm>
-            <a:off x="4965192" y="3127248"/>
-            <a:ext cx="3813048" cy="310896"/>
-          </a:xfrm>
-          <a:prstGeom prst="rect">
-            <a:avLst/>
-          </a:prstGeom>
-          <a:noFill/>
-          <a:ln/>
-        </p:spPr>
-        <p:txBody>
-          <a:bodyPr wrap="square" lIns="0" tIns="0" rIns="0" bIns="0" rtlCol="0" anchor="ctr"/>
-          <a:lstStyle/>
-          <a:p>
-            <a:pPr algn="l" indent="0" marL="0">
-              <a:lnSpc>
-                <a:spcPct val="115000"/>
-              </a:lnSpc>
-              <a:buNone/>
-            </a:pPr>
-            <a:r>
-              <a:rPr lang="en-US" sz="850" dirty="0">
+            <a:off x="4617720" y="1051560"/>
+            <a:ext cx="4160520" cy="237744"/>
+          </a:xfrm>
+          <a:prstGeom prst="rect">
+            <a:avLst/>
+          </a:prstGeom>
+          <a:noFill/>
+          <a:ln/>
+        </p:spPr>
+        <p:txBody>
+          <a:bodyPr wrap="square" lIns="0" tIns="0" rIns="0" bIns="0" rtlCol="0" anchor="t"/>
+          <a:lstStyle/>
+          <a:p>
+            <a:pPr algn="l" indent="0" marL="0">
+              <a:lnSpc>
+                <a:spcPct val="115000"/>
+              </a:lnSpc>
+              <a:buNone/>
+            </a:pPr>
+            <a:r>
+              <a:rPr lang="en-US" sz="1050" b="1" dirty="0">
                 <a:solidFill>
                   <a:srgbClr val="1A1A1A"/>
                 </a:solidFill>
@@ -9642,22 +8473,22 @@
                 <a:ea typeface="Meiryo" pitchFamily="34" charset="-122"/>
                 <a:cs typeface="Meiryo" pitchFamily="34" charset="-120"/>
               </a:rPr>
-              <a:t>施工管理5年と自作開発の両立／製品が使われる現場からの逆算（試験値・不具合の実務知識）</a:t>
-            </a:r>
-            <a:endParaRPr lang="en-US" sz="850" dirty="0"/>
-          </a:p>
-        </p:txBody>
-      </p:sp>
-      <p:sp>
-        <p:nvSpPr>
-          <p:cNvPr id="13" name="Shape 9"/>
+              <a:t>STP</a:t>
+            </a:r>
+            <a:endParaRPr lang="en-US" sz="1050" dirty="0"/>
+          </a:p>
+        </p:txBody>
+      </p:sp>
+      <p:sp>
+        <p:nvSpPr>
+          <p:cNvPr id="24" name="Shape 21"/>
           <p:cNvSpPr/>
           <p:nvPr/>
         </p:nvSpPr>
         <p:spPr>
           <a:xfrm>
-            <a:off x="4617720" y="3483864"/>
-            <a:ext cx="256032" cy="256032"/>
+            <a:off x="4617720" y="1335024"/>
+            <a:ext cx="274320" cy="274320"/>
           </a:xfrm>
           <a:prstGeom prst="rect">
             <a:avLst/>
@@ -9670,14 +8501,14 @@
       </p:sp>
       <p:sp>
         <p:nvSpPr>
-          <p:cNvPr id="14" name="Text 10"/>
+          <p:cNvPr id="25" name="Text 22"/>
           <p:cNvSpPr txBox="1"/>
           <p:nvPr/>
         </p:nvSpPr>
         <p:spPr>
           <a:xfrm>
-            <a:off x="4617720" y="3483864"/>
-            <a:ext cx="256032" cy="256032"/>
+            <a:off x="4617720" y="1335024"/>
+            <a:ext cx="274320" cy="274320"/>
           </a:xfrm>
           <a:prstGeom prst="rect">
             <a:avLst/>
@@ -9696,7 +8527,7 @@
               <a:buNone/>
             </a:pPr>
             <a:r>
-              <a:rPr lang="en-US" sz="950" b="1" dirty="0">
+              <a:rPr lang="en-US" sz="900" b="1" dirty="0">
                 <a:solidFill>
                   <a:srgbClr val="FFFFFF"/>
                 </a:solidFill>
@@ -9704,22 +8535,22 @@
                 <a:ea typeface="Meiryo" pitchFamily="34" charset="-122"/>
                 <a:cs typeface="Meiryo" pitchFamily="34" charset="-120"/>
               </a:rPr>
-              <a:t>W</a:t>
-            </a:r>
-            <a:endParaRPr lang="en-US" sz="950" dirty="0"/>
-          </a:p>
-        </p:txBody>
-      </p:sp>
-      <p:sp>
-        <p:nvSpPr>
-          <p:cNvPr id="15" name="Text 11"/>
+              <a:t>S</a:t>
+            </a:r>
+            <a:endParaRPr lang="en-US" sz="900" dirty="0"/>
+          </a:p>
+        </p:txBody>
+      </p:sp>
+      <p:sp>
+        <p:nvSpPr>
+          <p:cNvPr id="26" name="Text 23"/>
           <p:cNvSpPr txBox="1"/>
           <p:nvPr/>
         </p:nvSpPr>
         <p:spPr>
           <a:xfrm>
-            <a:off x="4965192" y="3456432"/>
-            <a:ext cx="3813048" cy="310896"/>
+            <a:off x="4983480" y="1307592"/>
+            <a:ext cx="3794760" cy="329184"/>
           </a:xfrm>
           <a:prstGeom prst="rect">
             <a:avLst/>
@@ -9746,7 +8577,7 @@
                 <a:ea typeface="Meiryo" pitchFamily="34" charset="-122"/>
                 <a:cs typeface="Meiryo" pitchFamily="34" charset="-120"/>
               </a:rPr>
-              <a:t>製造現場の実務経験が浅い／営業・資金調達・組織運営が未経験／実績ゼロ・創業者依存</a:t>
+              <a:t>製造業を工程の形で区分：連続工程（電線・素材）／組立／施工現場</a:t>
             </a:r>
             <a:endParaRPr lang="en-US" sz="850" dirty="0"/>
           </a:p>
@@ -9754,14 +8585,14 @@
       </p:sp>
       <p:sp>
         <p:nvSpPr>
-          <p:cNvPr id="16" name="Shape 12"/>
+          <p:cNvPr id="27" name="Shape 24"/>
           <p:cNvSpPr/>
           <p:nvPr/>
         </p:nvSpPr>
         <p:spPr>
           <a:xfrm>
-            <a:off x="4617720" y="3813048"/>
-            <a:ext cx="256032" cy="256032"/>
+            <a:off x="4617720" y="1682496"/>
+            <a:ext cx="274320" cy="274320"/>
           </a:xfrm>
           <a:prstGeom prst="rect">
             <a:avLst/>
@@ -9774,14 +8605,14 @@
       </p:sp>
       <p:sp>
         <p:nvSpPr>
-          <p:cNvPr id="17" name="Text 13"/>
+          <p:cNvPr id="28" name="Text 25"/>
           <p:cNvSpPr txBox="1"/>
           <p:nvPr/>
         </p:nvSpPr>
         <p:spPr>
           <a:xfrm>
-            <a:off x="4617720" y="3813048"/>
-            <a:ext cx="256032" cy="256032"/>
+            <a:off x="4617720" y="1682496"/>
+            <a:ext cx="274320" cy="274320"/>
           </a:xfrm>
           <a:prstGeom prst="rect">
             <a:avLst/>
@@ -9800,7 +8631,7 @@
               <a:buNone/>
             </a:pPr>
             <a:r>
-              <a:rPr lang="en-US" sz="950" b="1" dirty="0">
+              <a:rPr lang="en-US" sz="900" b="1" dirty="0">
                 <a:solidFill>
                   <a:srgbClr val="FFFFFF"/>
                 </a:solidFill>
@@ -9808,22 +8639,22 @@
                 <a:ea typeface="Meiryo" pitchFamily="34" charset="-122"/>
                 <a:cs typeface="Meiryo" pitchFamily="34" charset="-120"/>
               </a:rPr>
-              <a:t>O</a:t>
-            </a:r>
-            <a:endParaRPr lang="en-US" sz="950" dirty="0"/>
-          </a:p>
-        </p:txBody>
-      </p:sp>
-      <p:sp>
-        <p:nvSpPr>
-          <p:cNvPr id="18" name="Text 14"/>
+              <a:t>T</a:t>
+            </a:r>
+            <a:endParaRPr lang="en-US" sz="900" dirty="0"/>
+          </a:p>
+        </p:txBody>
+      </p:sp>
+      <p:sp>
+        <p:nvSpPr>
+          <p:cNvPr id="29" name="Text 26"/>
           <p:cNvSpPr txBox="1"/>
           <p:nvPr/>
         </p:nvSpPr>
         <p:spPr>
           <a:xfrm>
-            <a:off x="4965192" y="3785616"/>
-            <a:ext cx="3813048" cy="310896"/>
+            <a:off x="4983480" y="1655064"/>
+            <a:ext cx="3794760" cy="329184"/>
           </a:xfrm>
           <a:prstGeom prst="rect">
             <a:avLst/>
@@ -9850,7 +8681,7 @@
                 <a:ea typeface="Meiryo" pitchFamily="34" charset="-122"/>
                 <a:cs typeface="Meiryo" pitchFamily="34" charset="-120"/>
               </a:rPr>
-              <a:t>担い手の高齢化と減少による技能継承需要／フィジカルAI・自動搬送の実用化</a:t>
+              <a:t>電線・ケーブル工場。長尺・ロット・試験値が揃い、熟練者の判断が品質を左右</a:t>
             </a:r>
             <a:endParaRPr lang="en-US" sz="850" dirty="0"/>
           </a:p>
@@ -9858,14 +8689,14 @@
       </p:sp>
       <p:sp>
         <p:nvSpPr>
-          <p:cNvPr id="19" name="Shape 15"/>
+          <p:cNvPr id="30" name="Shape 27"/>
           <p:cNvSpPr/>
           <p:nvPr/>
         </p:nvSpPr>
         <p:spPr>
           <a:xfrm>
-            <a:off x="4617720" y="4142232"/>
-            <a:ext cx="256032" cy="256032"/>
+            <a:off x="4617720" y="2029968"/>
+            <a:ext cx="274320" cy="274320"/>
           </a:xfrm>
           <a:prstGeom prst="rect">
             <a:avLst/>
@@ -9878,14 +8709,14 @@
       </p:sp>
       <p:sp>
         <p:nvSpPr>
-          <p:cNvPr id="20" name="Text 16"/>
+          <p:cNvPr id="31" name="Text 28"/>
           <p:cNvSpPr txBox="1"/>
           <p:nvPr/>
         </p:nvSpPr>
         <p:spPr>
           <a:xfrm>
-            <a:off x="4617720" y="4142232"/>
-            <a:ext cx="256032" cy="256032"/>
+            <a:off x="4617720" y="2029968"/>
+            <a:ext cx="274320" cy="274320"/>
           </a:xfrm>
           <a:prstGeom prst="rect">
             <a:avLst/>
@@ -9904,7 +8735,7 @@
               <a:buNone/>
             </a:pPr>
             <a:r>
-              <a:rPr lang="en-US" sz="950" b="1" dirty="0">
+              <a:rPr lang="en-US" sz="900" b="1" dirty="0">
                 <a:solidFill>
                   <a:srgbClr val="FFFFFF"/>
                 </a:solidFill>
@@ -9912,22 +8743,630 @@
                 <a:ea typeface="Meiryo" pitchFamily="34" charset="-122"/>
                 <a:cs typeface="Meiryo" pitchFamily="34" charset="-120"/>
               </a:rPr>
+              <a:t>P</a:t>
+            </a:r>
+            <a:endParaRPr lang="en-US" sz="900" dirty="0"/>
+          </a:p>
+        </p:txBody>
+      </p:sp>
+      <p:sp>
+        <p:nvSpPr>
+          <p:cNvPr id="32" name="Text 29"/>
+          <p:cNvSpPr txBox="1"/>
+          <p:nvPr/>
+        </p:nvSpPr>
+        <p:spPr>
+          <a:xfrm>
+            <a:off x="4983480" y="2002536"/>
+            <a:ext cx="3794760" cy="329184"/>
+          </a:xfrm>
+          <a:prstGeom prst="rect">
+            <a:avLst/>
+          </a:prstGeom>
+          <a:noFill/>
+          <a:ln/>
+        </p:spPr>
+        <p:txBody>
+          <a:bodyPr wrap="square" lIns="0" tIns="0" rIns="0" bIns="0" rtlCol="0" anchor="ctr"/>
+          <a:lstStyle/>
+          <a:p>
+            <a:pPr algn="l" indent="0" marL="0">
+              <a:lnSpc>
+                <a:spcPct val="115000"/>
+              </a:lnSpc>
+              <a:buNone/>
+            </a:pPr>
+            <a:r>
+              <a:rPr lang="en-US" sz="850" dirty="0">
+                <a:solidFill>
+                  <a:srgbClr val="1A1A1A"/>
+                </a:solidFill>
+                <a:latin typeface="Meiryo" pitchFamily="34" charset="0"/>
+                <a:ea typeface="Meiryo" pitchFamily="34" charset="-122"/>
+                <a:cs typeface="Meiryo" pitchFamily="34" charset="-120"/>
+              </a:rPr>
+              <a:t>実績はMES・ERP、動作はロボットに任せ、判断の理由を人と機械に渡す層</a:t>
+            </a:r>
+            <a:endParaRPr lang="en-US" sz="850" dirty="0"/>
+          </a:p>
+        </p:txBody>
+      </p:sp>
+      <p:sp>
+        <p:nvSpPr>
+          <p:cNvPr id="33" name="Text 30"/>
+          <p:cNvSpPr txBox="1"/>
+          <p:nvPr/>
+        </p:nvSpPr>
+        <p:spPr>
+          <a:xfrm>
+            <a:off x="4617720" y="2404872"/>
+            <a:ext cx="4160520" cy="237744"/>
+          </a:xfrm>
+          <a:prstGeom prst="rect">
+            <a:avLst/>
+          </a:prstGeom>
+          <a:noFill/>
+          <a:ln/>
+        </p:spPr>
+        <p:txBody>
+          <a:bodyPr wrap="square" lIns="0" tIns="0" rIns="0" bIns="0" rtlCol="0" anchor="t"/>
+          <a:lstStyle/>
+          <a:p>
+            <a:pPr algn="l" indent="0" marL="0">
+              <a:lnSpc>
+                <a:spcPct val="115000"/>
+              </a:lnSpc>
+              <a:buNone/>
+            </a:pPr>
+            <a:r>
+              <a:rPr lang="en-US" sz="1050" b="1" dirty="0">
+                <a:solidFill>
+                  <a:srgbClr val="1A1A1A"/>
+                </a:solidFill>
+                <a:latin typeface="Meiryo" pitchFamily="34" charset="0"/>
+                <a:ea typeface="Meiryo" pitchFamily="34" charset="-122"/>
+                <a:cs typeface="Meiryo" pitchFamily="34" charset="-120"/>
+              </a:rPr>
+              <a:t>競争戦略</a:t>
+            </a:r>
+            <a:endParaRPr lang="en-US" sz="1050" dirty="0"/>
+          </a:p>
+        </p:txBody>
+      </p:sp>
+      <p:sp>
+        <p:nvSpPr>
+          <p:cNvPr id="34" name="Text 31"/>
+          <p:cNvSpPr txBox="1"/>
+          <p:nvPr/>
+        </p:nvSpPr>
+        <p:spPr>
+          <a:xfrm>
+            <a:off x="4617720" y="2660904"/>
+            <a:ext cx="4160520" cy="457200"/>
+          </a:xfrm>
+          <a:prstGeom prst="rect">
+            <a:avLst/>
+          </a:prstGeom>
+          <a:noFill/>
+          <a:ln/>
+        </p:spPr>
+        <p:txBody>
+          <a:bodyPr wrap="square" lIns="0" tIns="0" rIns="0" bIns="0" rtlCol="0" anchor="t"/>
+          <a:lstStyle/>
+          <a:p>
+            <a:pPr algn="l" indent="0" marL="0">
+              <a:lnSpc>
+                <a:spcPct val="115000"/>
+              </a:lnSpc>
+              <a:spcAft>
+                <a:spcPts val="200"/>
+              </a:spcAft>
+              <a:buNone/>
+            </a:pPr>
+            <a:r>
+              <a:rPr lang="en-US" sz="850" b="1" dirty="0">
+                <a:solidFill>
+                  <a:srgbClr val="1A1A1A"/>
+                </a:solidFill>
+                <a:latin typeface="Meiryo" pitchFamily="34" charset="0"/>
+                <a:ea typeface="Meiryo" pitchFamily="34" charset="-122"/>
+                <a:cs typeface="Meiryo" pitchFamily="34" charset="-120"/>
+              </a:rPr>
+              <a:t>コトラーの競争地位：</a:t>
+            </a:r>
+            <a:pPr algn="l" indent="0" marL="0">
+              <a:lnSpc>
+                <a:spcPct val="115000"/>
+              </a:lnSpc>
+              <a:spcAft>
+                <a:spcPts val="200"/>
+              </a:spcAft>
+              <a:buNone/>
+            </a:pPr>
+            <a:r>
+              <a:rPr lang="en-US" sz="850" dirty="0">
+                <a:solidFill>
+                  <a:srgbClr val="1A1A1A"/>
+                </a:solidFill>
+                <a:latin typeface="Meiryo" pitchFamily="34" charset="0"/>
+                <a:ea typeface="Meiryo" pitchFamily="34" charset="-122"/>
+                <a:cs typeface="Meiryo" pitchFamily="34" charset="-120"/>
+              </a:rPr>
+              <a:t>ニッチャー。大手が採算に乗せにくい専門領域に絞る</a:t>
+            </a:r>
+            <a:endParaRPr lang="en-US" sz="850" dirty="0"/>
+          </a:p>
+          <a:p>
+            <a:pPr algn="l" indent="0" marL="0">
+              <a:lnSpc>
+                <a:spcPct val="115000"/>
+              </a:lnSpc>
+              <a:spcAft>
+                <a:spcPts val="200"/>
+              </a:spcAft>
+              <a:buNone/>
+            </a:pPr>
+            <a:r>
+              <a:rPr lang="en-US" sz="850" b="1" dirty="0">
+                <a:solidFill>
+                  <a:srgbClr val="1A1A1A"/>
+                </a:solidFill>
+                <a:latin typeface="Meiryo" pitchFamily="34" charset="0"/>
+                <a:ea typeface="Meiryo" pitchFamily="34" charset="-122"/>
+                <a:cs typeface="Meiryo" pitchFamily="34" charset="-120"/>
+              </a:rPr>
+              <a:t>ポーターの基本戦略：</a:t>
+            </a:r>
+            <a:pPr algn="l" indent="0" marL="0">
+              <a:lnSpc>
+                <a:spcPct val="115000"/>
+              </a:lnSpc>
+              <a:spcAft>
+                <a:spcPts val="200"/>
+              </a:spcAft>
+              <a:buNone/>
+            </a:pPr>
+            <a:r>
+              <a:rPr lang="en-US" sz="850" dirty="0">
+                <a:solidFill>
+                  <a:srgbClr val="1A1A1A"/>
+                </a:solidFill>
+                <a:latin typeface="Meiryo" pitchFamily="34" charset="0"/>
+                <a:ea typeface="Meiryo" pitchFamily="34" charset="-122"/>
+                <a:cs typeface="Meiryo" pitchFamily="34" charset="-120"/>
+              </a:rPr>
+              <a:t>差別化集中。価格ではなく現場の知見で選ばれる</a:t>
+            </a:r>
+            <a:endParaRPr lang="en-US" sz="850" dirty="0"/>
+          </a:p>
+        </p:txBody>
+      </p:sp>
+      <p:sp>
+        <p:nvSpPr>
+          <p:cNvPr id="35" name="Text 32"/>
+          <p:cNvSpPr txBox="1"/>
+          <p:nvPr/>
+        </p:nvSpPr>
+        <p:spPr>
+          <a:xfrm>
+            <a:off x="4617720" y="3172968"/>
+            <a:ext cx="4160520" cy="237744"/>
+          </a:xfrm>
+          <a:prstGeom prst="rect">
+            <a:avLst/>
+          </a:prstGeom>
+          <a:noFill/>
+          <a:ln/>
+        </p:spPr>
+        <p:txBody>
+          <a:bodyPr wrap="square" lIns="0" tIns="0" rIns="0" bIns="0" rtlCol="0" anchor="t"/>
+          <a:lstStyle/>
+          <a:p>
+            <a:pPr algn="l" indent="0" marL="0">
+              <a:lnSpc>
+                <a:spcPct val="115000"/>
+              </a:lnSpc>
+              <a:buNone/>
+            </a:pPr>
+            <a:r>
+              <a:rPr lang="en-US" sz="1050" b="1" dirty="0">
+                <a:solidFill>
+                  <a:srgbClr val="1A1A1A"/>
+                </a:solidFill>
+                <a:latin typeface="Meiryo" pitchFamily="34" charset="0"/>
+                <a:ea typeface="Meiryo" pitchFamily="34" charset="-122"/>
+                <a:cs typeface="Meiryo" pitchFamily="34" charset="-120"/>
+              </a:rPr>
+              <a:t>SWOT</a:t>
+            </a:r>
+            <a:endParaRPr lang="en-US" sz="1050" dirty="0"/>
+          </a:p>
+        </p:txBody>
+      </p:sp>
+      <p:sp>
+        <p:nvSpPr>
+          <p:cNvPr id="36" name="Shape 33"/>
+          <p:cNvSpPr/>
+          <p:nvPr/>
+        </p:nvSpPr>
+        <p:spPr>
+          <a:xfrm>
+            <a:off x="4617720" y="3456432"/>
+            <a:ext cx="274320" cy="201168"/>
+          </a:xfrm>
+          <a:prstGeom prst="rect">
+            <a:avLst/>
+          </a:prstGeom>
+          <a:solidFill>
+            <a:srgbClr val="1A1A1A"/>
+          </a:solidFill>
+          <a:ln/>
+        </p:spPr>
+      </p:sp>
+      <p:sp>
+        <p:nvSpPr>
+          <p:cNvPr id="37" name="Text 34"/>
+          <p:cNvSpPr txBox="1"/>
+          <p:nvPr/>
+        </p:nvSpPr>
+        <p:spPr>
+          <a:xfrm>
+            <a:off x="4617720" y="3456432"/>
+            <a:ext cx="274320" cy="201168"/>
+          </a:xfrm>
+          <a:prstGeom prst="rect">
+            <a:avLst/>
+          </a:prstGeom>
+          <a:noFill/>
+          <a:ln/>
+        </p:spPr>
+        <p:txBody>
+          <a:bodyPr wrap="square" lIns="0" tIns="0" rIns="0" bIns="0" rtlCol="0" anchor="ctr"/>
+          <a:lstStyle/>
+          <a:p>
+            <a:pPr algn="ctr" indent="0" marL="0">
+              <a:lnSpc>
+                <a:spcPct val="115000"/>
+              </a:lnSpc>
+              <a:buNone/>
+            </a:pPr>
+            <a:r>
+              <a:rPr lang="en-US" sz="900" b="1" dirty="0">
+                <a:solidFill>
+                  <a:srgbClr val="FFFFFF"/>
+                </a:solidFill>
+                <a:latin typeface="Meiryo" pitchFamily="34" charset="0"/>
+                <a:ea typeface="Meiryo" pitchFamily="34" charset="-122"/>
+                <a:cs typeface="Meiryo" pitchFamily="34" charset="-120"/>
+              </a:rPr>
+              <a:t>S</a:t>
+            </a:r>
+            <a:endParaRPr lang="en-US" sz="900" dirty="0"/>
+          </a:p>
+        </p:txBody>
+      </p:sp>
+      <p:sp>
+        <p:nvSpPr>
+          <p:cNvPr id="38" name="Text 35"/>
+          <p:cNvSpPr txBox="1"/>
+          <p:nvPr/>
+        </p:nvSpPr>
+        <p:spPr>
+          <a:xfrm>
+            <a:off x="4983480" y="3429000"/>
+            <a:ext cx="3794760" cy="256032"/>
+          </a:xfrm>
+          <a:prstGeom prst="rect">
+            <a:avLst/>
+          </a:prstGeom>
+          <a:noFill/>
+          <a:ln/>
+        </p:spPr>
+        <p:txBody>
+          <a:bodyPr wrap="square" lIns="0" tIns="0" rIns="0" bIns="0" rtlCol="0" anchor="ctr"/>
+          <a:lstStyle/>
+          <a:p>
+            <a:pPr algn="l" indent="0" marL="0">
+              <a:lnSpc>
+                <a:spcPct val="115000"/>
+              </a:lnSpc>
+              <a:buNone/>
+            </a:pPr>
+            <a:r>
+              <a:rPr lang="en-US" sz="850" dirty="0">
+                <a:solidFill>
+                  <a:srgbClr val="1A1A1A"/>
+                </a:solidFill>
+                <a:latin typeface="Meiryo" pitchFamily="34" charset="0"/>
+                <a:ea typeface="Meiryo" pitchFamily="34" charset="-122"/>
+                <a:cs typeface="Meiryo" pitchFamily="34" charset="-120"/>
+              </a:rPr>
+              <a:t>施工管理5年と自作開発の両立／製品が使われる現場からの逆算</a:t>
+            </a:r>
+            <a:endParaRPr lang="en-US" sz="850" dirty="0"/>
+          </a:p>
+        </p:txBody>
+      </p:sp>
+      <p:sp>
+        <p:nvSpPr>
+          <p:cNvPr id="39" name="Shape 36"/>
+          <p:cNvSpPr/>
+          <p:nvPr/>
+        </p:nvSpPr>
+        <p:spPr>
+          <a:xfrm>
+            <a:off x="4617720" y="3721608"/>
+            <a:ext cx="274320" cy="201168"/>
+          </a:xfrm>
+          <a:prstGeom prst="rect">
+            <a:avLst/>
+          </a:prstGeom>
+          <a:solidFill>
+            <a:srgbClr val="1A1A1A"/>
+          </a:solidFill>
+          <a:ln/>
+        </p:spPr>
+      </p:sp>
+      <p:sp>
+        <p:nvSpPr>
+          <p:cNvPr id="40" name="Text 37"/>
+          <p:cNvSpPr txBox="1"/>
+          <p:nvPr/>
+        </p:nvSpPr>
+        <p:spPr>
+          <a:xfrm>
+            <a:off x="4617720" y="3721608"/>
+            <a:ext cx="274320" cy="201168"/>
+          </a:xfrm>
+          <a:prstGeom prst="rect">
+            <a:avLst/>
+          </a:prstGeom>
+          <a:noFill/>
+          <a:ln/>
+        </p:spPr>
+        <p:txBody>
+          <a:bodyPr wrap="square" lIns="0" tIns="0" rIns="0" bIns="0" rtlCol="0" anchor="ctr"/>
+          <a:lstStyle/>
+          <a:p>
+            <a:pPr algn="ctr" indent="0" marL="0">
+              <a:lnSpc>
+                <a:spcPct val="115000"/>
+              </a:lnSpc>
+              <a:buNone/>
+            </a:pPr>
+            <a:r>
+              <a:rPr lang="en-US" sz="900" b="1" dirty="0">
+                <a:solidFill>
+                  <a:srgbClr val="FFFFFF"/>
+                </a:solidFill>
+                <a:latin typeface="Meiryo" pitchFamily="34" charset="0"/>
+                <a:ea typeface="Meiryo" pitchFamily="34" charset="-122"/>
+                <a:cs typeface="Meiryo" pitchFamily="34" charset="-120"/>
+              </a:rPr>
+              <a:t>W</a:t>
+            </a:r>
+            <a:endParaRPr lang="en-US" sz="900" dirty="0"/>
+          </a:p>
+        </p:txBody>
+      </p:sp>
+      <p:sp>
+        <p:nvSpPr>
+          <p:cNvPr id="41" name="Text 38"/>
+          <p:cNvSpPr txBox="1"/>
+          <p:nvPr/>
+        </p:nvSpPr>
+        <p:spPr>
+          <a:xfrm>
+            <a:off x="4983480" y="3694176"/>
+            <a:ext cx="3794760" cy="256032"/>
+          </a:xfrm>
+          <a:prstGeom prst="rect">
+            <a:avLst/>
+          </a:prstGeom>
+          <a:noFill/>
+          <a:ln/>
+        </p:spPr>
+        <p:txBody>
+          <a:bodyPr wrap="square" lIns="0" tIns="0" rIns="0" bIns="0" rtlCol="0" anchor="ctr"/>
+          <a:lstStyle/>
+          <a:p>
+            <a:pPr algn="l" indent="0" marL="0">
+              <a:lnSpc>
+                <a:spcPct val="115000"/>
+              </a:lnSpc>
+              <a:buNone/>
+            </a:pPr>
+            <a:r>
+              <a:rPr lang="en-US" sz="850" dirty="0">
+                <a:solidFill>
+                  <a:srgbClr val="1A1A1A"/>
+                </a:solidFill>
+                <a:latin typeface="Meiryo" pitchFamily="34" charset="0"/>
+                <a:ea typeface="Meiryo" pitchFamily="34" charset="-122"/>
+                <a:cs typeface="Meiryo" pitchFamily="34" charset="-120"/>
+              </a:rPr>
+              <a:t>製造現場の実務経験が浅い／営業・資金調達が未経験／創業者依存</a:t>
+            </a:r>
+            <a:endParaRPr lang="en-US" sz="850" dirty="0"/>
+          </a:p>
+        </p:txBody>
+      </p:sp>
+      <p:sp>
+        <p:nvSpPr>
+          <p:cNvPr id="42" name="Shape 39"/>
+          <p:cNvSpPr/>
+          <p:nvPr/>
+        </p:nvSpPr>
+        <p:spPr>
+          <a:xfrm>
+            <a:off x="4617720" y="3986784"/>
+            <a:ext cx="274320" cy="201168"/>
+          </a:xfrm>
+          <a:prstGeom prst="rect">
+            <a:avLst/>
+          </a:prstGeom>
+          <a:solidFill>
+            <a:srgbClr val="1A1A1A"/>
+          </a:solidFill>
+          <a:ln/>
+        </p:spPr>
+      </p:sp>
+      <p:sp>
+        <p:nvSpPr>
+          <p:cNvPr id="43" name="Text 40"/>
+          <p:cNvSpPr txBox="1"/>
+          <p:nvPr/>
+        </p:nvSpPr>
+        <p:spPr>
+          <a:xfrm>
+            <a:off x="4617720" y="3986784"/>
+            <a:ext cx="274320" cy="201168"/>
+          </a:xfrm>
+          <a:prstGeom prst="rect">
+            <a:avLst/>
+          </a:prstGeom>
+          <a:noFill/>
+          <a:ln/>
+        </p:spPr>
+        <p:txBody>
+          <a:bodyPr wrap="square" lIns="0" tIns="0" rIns="0" bIns="0" rtlCol="0" anchor="ctr"/>
+          <a:lstStyle/>
+          <a:p>
+            <a:pPr algn="ctr" indent="0" marL="0">
+              <a:lnSpc>
+                <a:spcPct val="115000"/>
+              </a:lnSpc>
+              <a:buNone/>
+            </a:pPr>
+            <a:r>
+              <a:rPr lang="en-US" sz="900" b="1" dirty="0">
+                <a:solidFill>
+                  <a:srgbClr val="FFFFFF"/>
+                </a:solidFill>
+                <a:latin typeface="Meiryo" pitchFamily="34" charset="0"/>
+                <a:ea typeface="Meiryo" pitchFamily="34" charset="-122"/>
+                <a:cs typeface="Meiryo" pitchFamily="34" charset="-120"/>
+              </a:rPr>
+              <a:t>O</a:t>
+            </a:r>
+            <a:endParaRPr lang="en-US" sz="900" dirty="0"/>
+          </a:p>
+        </p:txBody>
+      </p:sp>
+      <p:sp>
+        <p:nvSpPr>
+          <p:cNvPr id="44" name="Text 41"/>
+          <p:cNvSpPr txBox="1"/>
+          <p:nvPr/>
+        </p:nvSpPr>
+        <p:spPr>
+          <a:xfrm>
+            <a:off x="4983480" y="3959352"/>
+            <a:ext cx="3794760" cy="256032"/>
+          </a:xfrm>
+          <a:prstGeom prst="rect">
+            <a:avLst/>
+          </a:prstGeom>
+          <a:noFill/>
+          <a:ln/>
+        </p:spPr>
+        <p:txBody>
+          <a:bodyPr wrap="square" lIns="0" tIns="0" rIns="0" bIns="0" rtlCol="0" anchor="ctr"/>
+          <a:lstStyle/>
+          <a:p>
+            <a:pPr algn="l" indent="0" marL="0">
+              <a:lnSpc>
+                <a:spcPct val="115000"/>
+              </a:lnSpc>
+              <a:buNone/>
+            </a:pPr>
+            <a:r>
+              <a:rPr lang="en-US" sz="850" dirty="0">
+                <a:solidFill>
+                  <a:srgbClr val="1A1A1A"/>
+                </a:solidFill>
+                <a:latin typeface="Meiryo" pitchFamily="34" charset="0"/>
+                <a:ea typeface="Meiryo" pitchFamily="34" charset="-122"/>
+                <a:cs typeface="Meiryo" pitchFamily="34" charset="-120"/>
+              </a:rPr>
+              <a:t>担い手の高齢化による技能継承需要／フィジカルAIの実用化</a:t>
+            </a:r>
+            <a:endParaRPr lang="en-US" sz="850" dirty="0"/>
+          </a:p>
+        </p:txBody>
+      </p:sp>
+      <p:sp>
+        <p:nvSpPr>
+          <p:cNvPr id="45" name="Shape 42"/>
+          <p:cNvSpPr/>
+          <p:nvPr/>
+        </p:nvSpPr>
+        <p:spPr>
+          <a:xfrm>
+            <a:off x="4617720" y="4251960"/>
+            <a:ext cx="274320" cy="201168"/>
+          </a:xfrm>
+          <a:prstGeom prst="rect">
+            <a:avLst/>
+          </a:prstGeom>
+          <a:solidFill>
+            <a:srgbClr val="1A1A1A"/>
+          </a:solidFill>
+          <a:ln/>
+        </p:spPr>
+      </p:sp>
+      <p:sp>
+        <p:nvSpPr>
+          <p:cNvPr id="46" name="Text 43"/>
+          <p:cNvSpPr txBox="1"/>
+          <p:nvPr/>
+        </p:nvSpPr>
+        <p:spPr>
+          <a:xfrm>
+            <a:off x="4617720" y="4251960"/>
+            <a:ext cx="274320" cy="201168"/>
+          </a:xfrm>
+          <a:prstGeom prst="rect">
+            <a:avLst/>
+          </a:prstGeom>
+          <a:noFill/>
+          <a:ln/>
+        </p:spPr>
+        <p:txBody>
+          <a:bodyPr wrap="square" lIns="0" tIns="0" rIns="0" bIns="0" rtlCol="0" anchor="ctr"/>
+          <a:lstStyle/>
+          <a:p>
+            <a:pPr algn="ctr" indent="0" marL="0">
+              <a:lnSpc>
+                <a:spcPct val="115000"/>
+              </a:lnSpc>
+              <a:buNone/>
+            </a:pPr>
+            <a:r>
+              <a:rPr lang="en-US" sz="900" b="1" dirty="0">
+                <a:solidFill>
+                  <a:srgbClr val="FFFFFF"/>
+                </a:solidFill>
+                <a:latin typeface="Meiryo" pitchFamily="34" charset="0"/>
+                <a:ea typeface="Meiryo" pitchFamily="34" charset="-122"/>
+                <a:cs typeface="Meiryo" pitchFamily="34" charset="-120"/>
+              </a:rPr>
               <a:t>T</a:t>
             </a:r>
-            <a:endParaRPr lang="en-US" sz="950" dirty="0"/>
-          </a:p>
-        </p:txBody>
-      </p:sp>
-      <p:sp>
-        <p:nvSpPr>
-          <p:cNvPr id="21" name="Text 17"/>
+            <a:endParaRPr lang="en-US" sz="900" dirty="0"/>
+          </a:p>
+        </p:txBody>
+      </p:sp>
+      <p:sp>
+        <p:nvSpPr>
+          <p:cNvPr id="47" name="Text 44"/>
           <p:cNvSpPr txBox="1"/>
           <p:nvPr/>
         </p:nvSpPr>
         <p:spPr>
           <a:xfrm>
-            <a:off x="4965192" y="4114800"/>
-            <a:ext cx="3813048" cy="310896"/>
+            <a:off x="4983480" y="4224528"/>
+            <a:ext cx="3794760" cy="256032"/>
           </a:xfrm>
           <a:prstGeom prst="rect">
             <a:avLst/>
@@ -9954,7 +9393,7 @@
                 <a:ea typeface="Meiryo" pitchFamily="34" charset="-122"/>
                 <a:cs typeface="Meiryo" pitchFamily="34" charset="-120"/>
               </a:rPr>
-              <a:t>大手SIer・ロボットベンダーの参入／顧客の内製化／母数が小さく1拠点の解約が重い</a:t>
+              <a:t>大手SIer・ロボットベンダーの参入／内製化／母数が小さい</a:t>
             </a:r>
             <a:endParaRPr lang="en-US" sz="850" dirty="0"/>
           </a:p>
@@ -9962,7 +9401,7 @@
       </p:sp>
       <p:sp>
         <p:nvSpPr>
-          <p:cNvPr id="22" name="Text 18"/>
+          <p:cNvPr id="48" name="Text 45"/>
           <p:cNvSpPr txBox="1"/>
           <p:nvPr/>
         </p:nvSpPr>
@@ -9996,7 +9435,7 @@
                 <a:ea typeface="Meiryo" pitchFamily="34" charset="-122"/>
                 <a:cs typeface="Meiryo" pitchFamily="34" charset="-120"/>
               </a:rPr>
-              <a:t>※ 電線業界：353事業所・出荷額1兆8,822億円（経済構造実態調査 2024年、従業者10人以上）、日本電線工業会 会員117社（経団連 カーボンニュートラル行動計画 2025年度フォローアップ）</a:t>
+              <a:t>※ ERP・MES・SCMとはAPI連携で併存し、置き換えない。電線業界：353事業所・出荷額1兆8,822億円（経済構造実態調査 2024年、従業者10人以上）</a:t>
             </a:r>
             <a:endParaRPr lang="en-US" sz="800" dirty="0"/>
           </a:p>
@@ -15086,7 +14525,7 @@
         <p:spPr>
           <a:xfrm>
             <a:off x="5715000" y="3447288"/>
-            <a:ext cx="3063240" cy="868680"/>
+            <a:ext cx="3063240" cy="987552"/>
           </a:xfrm>
           <a:prstGeom prst="rect">
             <a:avLst/>
@@ -15147,8 +14586,8 @@
         </p:nvSpPr>
         <p:spPr>
           <a:xfrm>
-            <a:off x="5852160" y="3813048"/>
-            <a:ext cx="2788920" cy="438912"/>
+            <a:off x="5852160" y="3776472"/>
+            <a:ext cx="2788920" cy="621792"/>
           </a:xfrm>
           <a:prstGeom prst="rect">
             <a:avLst/>
@@ -15164,10 +14603,13 @@
               <a:lnSpc>
                 <a:spcPct val="115000"/>
               </a:lnSpc>
-              <a:buNone/>
-            </a:pPr>
-            <a:r>
-              <a:rPr lang="en-US" sz="950" dirty="0">
+              <a:spcAft>
+                <a:spcPts val="300"/>
+              </a:spcAft>
+              <a:buNone/>
+            </a:pPr>
+            <a:r>
+              <a:rPr lang="en-US" sz="850" dirty="0">
                 <a:solidFill>
                   <a:srgbClr val="FFFFFF"/>
                 </a:solidFill>
@@ -15175,9 +14617,32 @@
                 <a:ea typeface="Meiryo" pitchFamily="34" charset="-122"/>
                 <a:cs typeface="Meiryo" pitchFamily="34" charset="-120"/>
               </a:rPr>
-              <a:t>谷 0.65億円＋運転資金 0.29億円＋1年遅延の備え 0.56億円</a:t>
-            </a:r>
-            <a:endParaRPr lang="en-US" sz="950" dirty="0"/>
+              <a:t>谷 0.65億＋運転資金 0.29億＋1年遅延の備え 0.56億</a:t>
+            </a:r>
+            <a:endParaRPr lang="en-US" sz="850" dirty="0"/>
+          </a:p>
+          <a:p>
+            <a:pPr algn="l" indent="0" marL="0">
+              <a:lnSpc>
+                <a:spcPct val="115000"/>
+              </a:lnSpc>
+              <a:spcAft>
+                <a:spcPts val="300"/>
+              </a:spcAft>
+              <a:buNone/>
+            </a:pPr>
+            <a:r>
+              <a:rPr lang="en-US" sz="850" dirty="0">
+                <a:solidFill>
+                  <a:srgbClr val="FFFFFF"/>
+                </a:solidFill>
+                <a:latin typeface="Meiryo" pitchFamily="34" charset="0"/>
+                <a:ea typeface="Meiryo" pitchFamily="34" charset="-122"/>
+                <a:cs typeface="Meiryo" pitchFamily="34" charset="-120"/>
+              </a:rPr>
+              <a:t>調達：電線・ロボットメーカーのCVCから。資金と実証フィールド・販路を同時に得る</a:t>
+            </a:r>
+            <a:endParaRPr lang="en-US" sz="850" dirty="0"/>
           </a:p>
         </p:txBody>
       </p:sp>
@@ -15189,8 +14654,8 @@
         </p:nvSpPr>
         <p:spPr>
           <a:xfrm>
-            <a:off x="365760" y="4434840"/>
-            <a:ext cx="8412480" cy="347472"/>
+            <a:off x="365760" y="4498848"/>
+            <a:ext cx="8412480" cy="329184"/>
           </a:xfrm>
           <a:prstGeom prst="rect">
             <a:avLst/>
@@ -15389,7 +14854,7 @@
         <p:spPr>
           <a:xfrm>
             <a:off x="365760" y="1024128"/>
-            <a:ext cx="2724912" cy="2240280"/>
+            <a:ext cx="2724912" cy="1847088"/>
           </a:xfrm>
           <a:prstGeom prst="rect">
             <a:avLst/>
@@ -15475,8 +14940,8 @@
         </p:nvSpPr>
         <p:spPr>
           <a:xfrm>
-            <a:off x="475488" y="1389888"/>
-            <a:ext cx="2505456" cy="585216"/>
+            <a:off x="475488" y="1353312"/>
+            <a:ext cx="2505456" cy="493776"/>
           </a:xfrm>
           <a:prstGeom prst="rect">
             <a:avLst/>
@@ -15495,7 +14960,7 @@
               <a:buNone/>
             </a:pPr>
             <a:r>
-              <a:rPr lang="en-US" sz="1000" b="1" dirty="0">
+              <a:rPr lang="en-US" sz="950" b="1" dirty="0">
                 <a:solidFill>
                   <a:srgbClr val="1A1A1A"/>
                 </a:solidFill>
@@ -15515,7 +14980,7 @@
               <a:buNone/>
             </a:pPr>
             <a:r>
-              <a:rPr lang="en-US" sz="900" dirty="0">
+              <a:rPr lang="en-US" sz="850" dirty="0">
                 <a:solidFill>
                   <a:srgbClr val="1A1A1A"/>
                 </a:solidFill>
@@ -15537,8 +15002,8 @@
         </p:nvSpPr>
         <p:spPr>
           <a:xfrm>
-            <a:off x="475488" y="2011680"/>
-            <a:ext cx="2505456" cy="585216"/>
+            <a:off x="475488" y="1856232"/>
+            <a:ext cx="2505456" cy="493776"/>
           </a:xfrm>
           <a:prstGeom prst="rect">
             <a:avLst/>
@@ -15557,7 +15022,7 @@
               <a:buNone/>
             </a:pPr>
             <a:r>
-              <a:rPr lang="en-US" sz="1000" b="1" dirty="0">
+              <a:rPr lang="en-US" sz="950" b="1" dirty="0">
                 <a:solidFill>
                   <a:srgbClr val="1A1A1A"/>
                 </a:solidFill>
@@ -15577,7 +15042,7 @@
               <a:buNone/>
             </a:pPr>
             <a:r>
-              <a:rPr lang="en-US" sz="900" dirty="0">
+              <a:rPr lang="en-US" sz="850" dirty="0">
                 <a:solidFill>
                   <a:srgbClr val="1A1A1A"/>
                 </a:solidFill>
@@ -15599,8 +15064,8 @@
         </p:nvSpPr>
         <p:spPr>
           <a:xfrm>
-            <a:off x="475488" y="2633472"/>
-            <a:ext cx="2505456" cy="585216"/>
+            <a:off x="475488" y="2359152"/>
+            <a:ext cx="2505456" cy="493776"/>
           </a:xfrm>
           <a:prstGeom prst="rect">
             <a:avLst/>
@@ -15619,7 +15084,7 @@
               <a:buNone/>
             </a:pPr>
             <a:r>
-              <a:rPr lang="en-US" sz="1000" b="1" dirty="0">
+              <a:rPr lang="en-US" sz="950" b="1" dirty="0">
                 <a:solidFill>
                   <a:srgbClr val="1A1A1A"/>
                 </a:solidFill>
@@ -15639,7 +15104,7 @@
               <a:buNone/>
             </a:pPr>
             <a:r>
-              <a:rPr lang="en-US" sz="900" dirty="0">
+              <a:rPr lang="en-US" sz="850" dirty="0">
                 <a:solidFill>
                   <a:srgbClr val="1A1A1A"/>
                 </a:solidFill>
@@ -15662,7 +15127,7 @@
         <p:spPr>
           <a:xfrm>
             <a:off x="3209544" y="1024128"/>
-            <a:ext cx="2724912" cy="2240280"/>
+            <a:ext cx="2724912" cy="1847088"/>
           </a:xfrm>
           <a:prstGeom prst="rect">
             <a:avLst/>
@@ -15748,8 +15213,8 @@
         </p:nvSpPr>
         <p:spPr>
           <a:xfrm>
-            <a:off x="3319272" y="1389888"/>
-            <a:ext cx="2505456" cy="585216"/>
+            <a:off x="3319272" y="1353312"/>
+            <a:ext cx="2505456" cy="493776"/>
           </a:xfrm>
           <a:prstGeom prst="rect">
             <a:avLst/>
@@ -15768,7 +15233,7 @@
               <a:buNone/>
             </a:pPr>
             <a:r>
-              <a:rPr lang="en-US" sz="1000" b="1" dirty="0">
+              <a:rPr lang="en-US" sz="950" b="1" dirty="0">
                 <a:solidFill>
                   <a:srgbClr val="1A1A1A"/>
                 </a:solidFill>
@@ -15788,7 +15253,7 @@
               <a:buNone/>
             </a:pPr>
             <a:r>
-              <a:rPr lang="en-US" sz="900" dirty="0">
+              <a:rPr lang="en-US" sz="850" dirty="0">
                 <a:solidFill>
                   <a:srgbClr val="1A1A1A"/>
                 </a:solidFill>
@@ -15810,8 +15275,8 @@
         </p:nvSpPr>
         <p:spPr>
           <a:xfrm>
-            <a:off x="3319272" y="2011680"/>
-            <a:ext cx="2505456" cy="585216"/>
+            <a:off x="3319272" y="1856232"/>
+            <a:ext cx="2505456" cy="493776"/>
           </a:xfrm>
           <a:prstGeom prst="rect">
             <a:avLst/>
@@ -15830,7 +15295,7 @@
               <a:buNone/>
             </a:pPr>
             <a:r>
-              <a:rPr lang="en-US" sz="1000" b="1" dirty="0">
+              <a:rPr lang="en-US" sz="950" b="1" dirty="0">
                 <a:solidFill>
                   <a:srgbClr val="1A1A1A"/>
                 </a:solidFill>
@@ -15850,7 +15315,7 @@
               <a:buNone/>
             </a:pPr>
             <a:r>
-              <a:rPr lang="en-US" sz="900" dirty="0">
+              <a:rPr lang="en-US" sz="850" dirty="0">
                 <a:solidFill>
                   <a:srgbClr val="1A1A1A"/>
                 </a:solidFill>
@@ -15872,8 +15337,8 @@
         </p:nvSpPr>
         <p:spPr>
           <a:xfrm>
-            <a:off x="3319272" y="2633472"/>
-            <a:ext cx="2505456" cy="585216"/>
+            <a:off x="3319272" y="2359152"/>
+            <a:ext cx="2505456" cy="493776"/>
           </a:xfrm>
           <a:prstGeom prst="rect">
             <a:avLst/>
@@ -15892,7 +15357,7 @@
               <a:buNone/>
             </a:pPr>
             <a:r>
-              <a:rPr lang="en-US" sz="1000" b="1" dirty="0">
+              <a:rPr lang="en-US" sz="950" b="1" dirty="0">
                 <a:solidFill>
                   <a:srgbClr val="1A1A1A"/>
                 </a:solidFill>
@@ -15912,7 +15377,7 @@
               <a:buNone/>
             </a:pPr>
             <a:r>
-              <a:rPr lang="en-US" sz="900" dirty="0">
+              <a:rPr lang="en-US" sz="850" dirty="0">
                 <a:solidFill>
                   <a:srgbClr val="1A1A1A"/>
                 </a:solidFill>
@@ -15920,7 +15385,7 @@
                 <a:ea typeface="Meiryo" pitchFamily="34" charset="-122"/>
                 <a:cs typeface="Meiryo" pitchFamily="34" charset="-120"/>
               </a:rPr>
-              <a:t>→ 電線業界は353事業所。製品の出口である施工会社へ同じ基盤を展開</a:t>
+              <a:t>→ アンゾフの新市場開拓。施工会社へ同じ基盤を展開、CRMで解約兆候を検知</a:t>
             </a:r>
             <a:endParaRPr lang="en-US" sz="1400" dirty="0"/>
           </a:p>
@@ -15935,7 +15400,7 @@
         <p:spPr>
           <a:xfrm>
             <a:off x="6053328" y="1024128"/>
-            <a:ext cx="2724912" cy="2240280"/>
+            <a:ext cx="2724912" cy="1847088"/>
           </a:xfrm>
           <a:prstGeom prst="rect">
             <a:avLst/>
@@ -16021,8 +15486,8 @@
         </p:nvSpPr>
         <p:spPr>
           <a:xfrm>
-            <a:off x="6163056" y="1389888"/>
-            <a:ext cx="2505456" cy="585216"/>
+            <a:off x="6163056" y="1353312"/>
+            <a:ext cx="2505456" cy="493776"/>
           </a:xfrm>
           <a:prstGeom prst="rect">
             <a:avLst/>
@@ -16041,7 +15506,7 @@
               <a:buNone/>
             </a:pPr>
             <a:r>
-              <a:rPr lang="en-US" sz="1000" b="1" dirty="0">
+              <a:rPr lang="en-US" sz="950" b="1" dirty="0">
                 <a:solidFill>
                   <a:srgbClr val="1A1A1A"/>
                 </a:solidFill>
@@ -16061,7 +15526,7 @@
               <a:buNone/>
             </a:pPr>
             <a:r>
-              <a:rPr lang="en-US" sz="900" dirty="0">
+              <a:rPr lang="en-US" sz="850" dirty="0">
                 <a:solidFill>
                   <a:srgbClr val="1A1A1A"/>
                 </a:solidFill>
@@ -16083,8 +15548,8 @@
         </p:nvSpPr>
         <p:spPr>
           <a:xfrm>
-            <a:off x="6163056" y="2011680"/>
-            <a:ext cx="2505456" cy="585216"/>
+            <a:off x="6163056" y="1856232"/>
+            <a:ext cx="2505456" cy="493776"/>
           </a:xfrm>
           <a:prstGeom prst="rect">
             <a:avLst/>
@@ -16103,7 +15568,7 @@
               <a:buNone/>
             </a:pPr>
             <a:r>
-              <a:rPr lang="en-US" sz="1000" b="1" dirty="0">
+              <a:rPr lang="en-US" sz="950" b="1" dirty="0">
                 <a:solidFill>
                   <a:srgbClr val="1A1A1A"/>
                 </a:solidFill>
@@ -16123,7 +15588,7 @@
               <a:buNone/>
             </a:pPr>
             <a:r>
-              <a:rPr lang="en-US" sz="900" dirty="0">
+              <a:rPr lang="en-US" sz="850" dirty="0">
                 <a:solidFill>
                   <a:srgbClr val="1A1A1A"/>
                 </a:solidFill>
@@ -16145,8 +15610,8 @@
         </p:nvSpPr>
         <p:spPr>
           <a:xfrm>
-            <a:off x="6163056" y="2633472"/>
-            <a:ext cx="2505456" cy="585216"/>
+            <a:off x="6163056" y="2359152"/>
+            <a:ext cx="2505456" cy="493776"/>
           </a:xfrm>
           <a:prstGeom prst="rect">
             <a:avLst/>
@@ -16165,7 +15630,7 @@
               <a:buNone/>
             </a:pPr>
             <a:r>
-              <a:rPr lang="en-US" sz="1000" b="1" dirty="0">
+              <a:rPr lang="en-US" sz="950" b="1" dirty="0">
                 <a:solidFill>
                   <a:srgbClr val="1A1A1A"/>
                 </a:solidFill>
@@ -16185,7 +15650,7 @@
               <a:buNone/>
             </a:pPr>
             <a:r>
-              <a:rPr lang="en-US" sz="900" dirty="0">
+              <a:rPr lang="en-US" sz="850" dirty="0">
                 <a:solidFill>
                   <a:srgbClr val="1A1A1A"/>
                 </a:solidFill>
@@ -16193,7 +15658,7 @@
                 <a:ea typeface="Meiryo" pitchFamily="34" charset="-122"/>
                 <a:cs typeface="Meiryo" pitchFamily="34" charset="-120"/>
               </a:rPr>
-              <a:t>→ 権限委譲と意思決定基準の明文化</a:t>
+              <a:t>→ BSCでCSF・KPIを明文化し、判断を権限委譲</a:t>
             </a:r>
             <a:endParaRPr lang="en-US" sz="1400" dirty="0"/>
           </a:p>
@@ -16201,14 +15666,404 @@
       </p:sp>
       <p:sp>
         <p:nvSpPr>
-          <p:cNvPr id="23" name="closing"/>
+          <p:cNvPr id="23" name="Text 20"/>
+          <p:cNvSpPr txBox="1"/>
+          <p:nvPr/>
+        </p:nvSpPr>
+        <p:spPr>
+          <a:xfrm>
+            <a:off x="365760" y="2944368"/>
+            <a:ext cx="914400" cy="512064"/>
+          </a:xfrm>
+          <a:prstGeom prst="rect">
+            <a:avLst/>
+          </a:prstGeom>
+          <a:noFill/>
+          <a:ln/>
+        </p:spPr>
+        <p:txBody>
+          <a:bodyPr wrap="square" lIns="0" tIns="0" rIns="0" bIns="0" rtlCol="0" anchor="ctr"/>
+          <a:lstStyle/>
+          <a:p>
+            <a:pPr algn="l" indent="0" marL="0">
+              <a:lnSpc>
+                <a:spcPct val="115000"/>
+              </a:lnSpc>
+              <a:buNone/>
+            </a:pPr>
+            <a:r>
+              <a:rPr lang="en-US" sz="1050" b="1" dirty="0">
+                <a:solidFill>
+                  <a:srgbClr val="1A1A1A"/>
+                </a:solidFill>
+                <a:latin typeface="Meiryo" pitchFamily="34" charset="0"/>
+                <a:ea typeface="Meiryo" pitchFamily="34" charset="-122"/>
+                <a:cs typeface="Meiryo" pitchFamily="34" charset="-120"/>
+              </a:rPr>
+              <a:t>BSC</a:t>
+            </a:r>
+            <a:endParaRPr lang="en-US" sz="1400" dirty="0"/>
+          </a:p>
+          <a:p>
+            <a:pPr algn="l" indent="0" marL="0">
+              <a:lnSpc>
+                <a:spcPct val="115000"/>
+              </a:lnSpc>
+              <a:buNone/>
+            </a:pPr>
+            <a:r>
+              <a:rPr lang="en-US" sz="800" dirty="0">
+                <a:solidFill>
+                  <a:srgbClr val="4D4D4D"/>
+                </a:solidFill>
+                <a:latin typeface="Meiryo" pitchFamily="34" charset="0"/>
+                <a:ea typeface="Meiryo" pitchFamily="34" charset="-122"/>
+                <a:cs typeface="Meiryo" pitchFamily="34" charset="-120"/>
+              </a:rPr>
+              <a:t>CSF・KPI</a:t>
+            </a:r>
+            <a:endParaRPr lang="en-US" sz="1400" dirty="0"/>
+          </a:p>
+        </p:txBody>
+      </p:sp>
+      <p:sp>
+        <p:nvSpPr>
+          <p:cNvPr id="24" name="bsc-0"/>
           <p:cNvSpPr/>
           <p:nvPr/>
         </p:nvSpPr>
         <p:spPr>
           <a:xfrm>
-            <a:off x="365760" y="3401568"/>
-            <a:ext cx="8412480" cy="1325880"/>
+            <a:off x="1316736" y="2944368"/>
+            <a:ext cx="1801368" cy="512064"/>
+          </a:xfrm>
+          <a:prstGeom prst="rect">
+            <a:avLst/>
+          </a:prstGeom>
+          <a:solidFill>
+            <a:srgbClr val="F2F2F2"/>
+          </a:solidFill>
+          <a:ln/>
+        </p:spPr>
+      </p:sp>
+      <p:sp>
+        <p:nvSpPr>
+          <p:cNvPr id="25" name="Text 22"/>
+          <p:cNvSpPr txBox="1"/>
+          <p:nvPr/>
+        </p:nvSpPr>
+        <p:spPr>
+          <a:xfrm>
+            <a:off x="1408176" y="2980944"/>
+            <a:ext cx="1618488" cy="438912"/>
+          </a:xfrm>
+          <a:prstGeom prst="rect">
+            <a:avLst/>
+          </a:prstGeom>
+          <a:noFill/>
+          <a:ln/>
+        </p:spPr>
+        <p:txBody>
+          <a:bodyPr wrap="square" lIns="0" tIns="0" rIns="0" bIns="0" rtlCol="0" anchor="ctr"/>
+          <a:lstStyle/>
+          <a:p>
+            <a:pPr algn="l" indent="0" marL="0">
+              <a:lnSpc>
+                <a:spcPct val="115000"/>
+              </a:lnSpc>
+              <a:buNone/>
+            </a:pPr>
+            <a:r>
+              <a:rPr lang="en-US" sz="900" b="1" dirty="0">
+                <a:solidFill>
+                  <a:srgbClr val="1A1A1A"/>
+                </a:solidFill>
+                <a:latin typeface="Meiryo" pitchFamily="34" charset="0"/>
+                <a:ea typeface="Meiryo" pitchFamily="34" charset="-122"/>
+                <a:cs typeface="Meiryo" pitchFamily="34" charset="-120"/>
+              </a:rPr>
+              <a:t>財務</a:t>
+            </a:r>
+            <a:endParaRPr lang="en-US" sz="1400" dirty="0"/>
+          </a:p>
+          <a:p>
+            <a:pPr algn="l" indent="0" marL="0">
+              <a:lnSpc>
+                <a:spcPct val="115000"/>
+              </a:lnSpc>
+              <a:buNone/>
+            </a:pPr>
+            <a:r>
+              <a:rPr lang="en-US" sz="850" dirty="0">
+                <a:solidFill>
+                  <a:srgbClr val="1A1A1A"/>
+                </a:solidFill>
+                <a:latin typeface="Meiryo" pitchFamily="34" charset="0"/>
+                <a:ea typeface="Meiryo" pitchFamily="34" charset="-122"/>
+                <a:cs typeface="Meiryo" pitchFamily="34" charset="-120"/>
+              </a:rPr>
+              <a:t>1人あたり顧客拠点 2.8以上</a:t>
+            </a:r>
+            <a:endParaRPr lang="en-US" sz="1400" dirty="0"/>
+          </a:p>
+        </p:txBody>
+      </p:sp>
+      <p:sp>
+        <p:nvSpPr>
+          <p:cNvPr id="26" name="bsc-1"/>
+          <p:cNvSpPr/>
+          <p:nvPr/>
+        </p:nvSpPr>
+        <p:spPr>
+          <a:xfrm>
+            <a:off x="3191256" y="2944368"/>
+            <a:ext cx="1801368" cy="512064"/>
+          </a:xfrm>
+          <a:prstGeom prst="rect">
+            <a:avLst/>
+          </a:prstGeom>
+          <a:solidFill>
+            <a:srgbClr val="F2F2F2"/>
+          </a:solidFill>
+          <a:ln/>
+        </p:spPr>
+      </p:sp>
+      <p:sp>
+        <p:nvSpPr>
+          <p:cNvPr id="27" name="Text 24"/>
+          <p:cNvSpPr txBox="1"/>
+          <p:nvPr/>
+        </p:nvSpPr>
+        <p:spPr>
+          <a:xfrm>
+            <a:off x="3282696" y="2980944"/>
+            <a:ext cx="1618488" cy="438912"/>
+          </a:xfrm>
+          <a:prstGeom prst="rect">
+            <a:avLst/>
+          </a:prstGeom>
+          <a:noFill/>
+          <a:ln/>
+        </p:spPr>
+        <p:txBody>
+          <a:bodyPr wrap="square" lIns="0" tIns="0" rIns="0" bIns="0" rtlCol="0" anchor="ctr"/>
+          <a:lstStyle/>
+          <a:p>
+            <a:pPr algn="l" indent="0" marL="0">
+              <a:lnSpc>
+                <a:spcPct val="115000"/>
+              </a:lnSpc>
+              <a:buNone/>
+            </a:pPr>
+            <a:r>
+              <a:rPr lang="en-US" sz="900" b="1" dirty="0">
+                <a:solidFill>
+                  <a:srgbClr val="1A1A1A"/>
+                </a:solidFill>
+                <a:latin typeface="Meiryo" pitchFamily="34" charset="0"/>
+                <a:ea typeface="Meiryo" pitchFamily="34" charset="-122"/>
+                <a:cs typeface="Meiryo" pitchFamily="34" charset="-120"/>
+              </a:rPr>
+              <a:t>顧客</a:t>
+            </a:r>
+            <a:endParaRPr lang="en-US" sz="1400" dirty="0"/>
+          </a:p>
+          <a:p>
+            <a:pPr algn="l" indent="0" marL="0">
+              <a:lnSpc>
+                <a:spcPct val="115000"/>
+              </a:lnSpc>
+              <a:buNone/>
+            </a:pPr>
+            <a:r>
+              <a:rPr lang="en-US" sz="850" dirty="0">
+                <a:solidFill>
+                  <a:srgbClr val="1A1A1A"/>
+                </a:solidFill>
+                <a:latin typeface="Meiryo" pitchFamily="34" charset="0"/>
+                <a:ea typeface="Meiryo" pitchFamily="34" charset="-122"/>
+                <a:cs typeface="Meiryo" pitchFamily="34" charset="-120"/>
+              </a:rPr>
+              <a:t>初年度費用の回収 約2.1か月</a:t>
+            </a:r>
+            <a:endParaRPr lang="en-US" sz="1400" dirty="0"/>
+          </a:p>
+        </p:txBody>
+      </p:sp>
+      <p:sp>
+        <p:nvSpPr>
+          <p:cNvPr id="28" name="bsc-2"/>
+          <p:cNvSpPr/>
+          <p:nvPr/>
+        </p:nvSpPr>
+        <p:spPr>
+          <a:xfrm>
+            <a:off x="5065776" y="2944368"/>
+            <a:ext cx="1801368" cy="512064"/>
+          </a:xfrm>
+          <a:prstGeom prst="rect">
+            <a:avLst/>
+          </a:prstGeom>
+          <a:solidFill>
+            <a:srgbClr val="F2F2F2"/>
+          </a:solidFill>
+          <a:ln/>
+        </p:spPr>
+      </p:sp>
+      <p:sp>
+        <p:nvSpPr>
+          <p:cNvPr id="29" name="Text 26"/>
+          <p:cNvSpPr txBox="1"/>
+          <p:nvPr/>
+        </p:nvSpPr>
+        <p:spPr>
+          <a:xfrm>
+            <a:off x="5157216" y="2980944"/>
+            <a:ext cx="1618488" cy="438912"/>
+          </a:xfrm>
+          <a:prstGeom prst="rect">
+            <a:avLst/>
+          </a:prstGeom>
+          <a:noFill/>
+          <a:ln/>
+        </p:spPr>
+        <p:txBody>
+          <a:bodyPr wrap="square" lIns="0" tIns="0" rIns="0" bIns="0" rtlCol="0" anchor="ctr"/>
+          <a:lstStyle/>
+          <a:p>
+            <a:pPr algn="l" indent="0" marL="0">
+              <a:lnSpc>
+                <a:spcPct val="115000"/>
+              </a:lnSpc>
+              <a:buNone/>
+            </a:pPr>
+            <a:r>
+              <a:rPr lang="en-US" sz="900" b="1" dirty="0">
+                <a:solidFill>
+                  <a:srgbClr val="1A1A1A"/>
+                </a:solidFill>
+                <a:latin typeface="Meiryo" pitchFamily="34" charset="0"/>
+                <a:ea typeface="Meiryo" pitchFamily="34" charset="-122"/>
+                <a:cs typeface="Meiryo" pitchFamily="34" charset="-120"/>
+              </a:rPr>
+              <a:t>業務プロセス</a:t>
+            </a:r>
+            <a:endParaRPr lang="en-US" sz="1400" dirty="0"/>
+          </a:p>
+          <a:p>
+            <a:pPr algn="l" indent="0" marL="0">
+              <a:lnSpc>
+                <a:spcPct val="115000"/>
+              </a:lnSpc>
+              <a:buNone/>
+            </a:pPr>
+            <a:r>
+              <a:rPr lang="en-US" sz="850" dirty="0">
+                <a:solidFill>
+                  <a:srgbClr val="1A1A1A"/>
+                </a:solidFill>
+                <a:latin typeface="Meiryo" pitchFamily="34" charset="0"/>
+                <a:ea typeface="Meiryo" pitchFamily="34" charset="-122"/>
+                <a:cs typeface="Meiryo" pitchFamily="34" charset="-120"/>
+              </a:rPr>
+              <a:t>導入2か月／共通機能8割</a:t>
+            </a:r>
+            <a:endParaRPr lang="en-US" sz="1400" dirty="0"/>
+          </a:p>
+        </p:txBody>
+      </p:sp>
+      <p:sp>
+        <p:nvSpPr>
+          <p:cNvPr id="30" name="bsc-3"/>
+          <p:cNvSpPr/>
+          <p:nvPr/>
+        </p:nvSpPr>
+        <p:spPr>
+          <a:xfrm>
+            <a:off x="6940296" y="2944368"/>
+            <a:ext cx="1801368" cy="512064"/>
+          </a:xfrm>
+          <a:prstGeom prst="rect">
+            <a:avLst/>
+          </a:prstGeom>
+          <a:solidFill>
+            <a:srgbClr val="F2F2F2"/>
+          </a:solidFill>
+          <a:ln/>
+        </p:spPr>
+      </p:sp>
+      <p:sp>
+        <p:nvSpPr>
+          <p:cNvPr id="31" name="Text 28"/>
+          <p:cNvSpPr txBox="1"/>
+          <p:nvPr/>
+        </p:nvSpPr>
+        <p:spPr>
+          <a:xfrm>
+            <a:off x="7031736" y="2980944"/>
+            <a:ext cx="1618488" cy="438912"/>
+          </a:xfrm>
+          <a:prstGeom prst="rect">
+            <a:avLst/>
+          </a:prstGeom>
+          <a:noFill/>
+          <a:ln/>
+        </p:spPr>
+        <p:txBody>
+          <a:bodyPr wrap="square" lIns="0" tIns="0" rIns="0" bIns="0" rtlCol="0" anchor="ctr"/>
+          <a:lstStyle/>
+          <a:p>
+            <a:pPr algn="l" indent="0" marL="0">
+              <a:lnSpc>
+                <a:spcPct val="115000"/>
+              </a:lnSpc>
+              <a:buNone/>
+            </a:pPr>
+            <a:r>
+              <a:rPr lang="en-US" sz="900" b="1" dirty="0">
+                <a:solidFill>
+                  <a:srgbClr val="1A1A1A"/>
+                </a:solidFill>
+                <a:latin typeface="Meiryo" pitchFamily="34" charset="0"/>
+                <a:ea typeface="Meiryo" pitchFamily="34" charset="-122"/>
+                <a:cs typeface="Meiryo" pitchFamily="34" charset="-120"/>
+              </a:rPr>
+              <a:t>学習と成長</a:t>
+            </a:r>
+            <a:endParaRPr lang="en-US" sz="1400" dirty="0"/>
+          </a:p>
+          <a:p>
+            <a:pPr algn="l" indent="0" marL="0">
+              <a:lnSpc>
+                <a:spcPct val="115000"/>
+              </a:lnSpc>
+              <a:buNone/>
+            </a:pPr>
+            <a:r>
+              <a:rPr lang="en-US" sz="850" dirty="0">
+                <a:solidFill>
+                  <a:srgbClr val="1A1A1A"/>
+                </a:solidFill>
+                <a:latin typeface="Meiryo" pitchFamily="34" charset="0"/>
+                <a:ea typeface="Meiryo" pitchFamily="34" charset="-122"/>
+                <a:cs typeface="Meiryo" pitchFamily="34" charset="-120"/>
+              </a:rPr>
+              <a:t>創業者1か月不在で事業継続</a:t>
+            </a:r>
+            <a:endParaRPr lang="en-US" sz="1400" dirty="0"/>
+          </a:p>
+        </p:txBody>
+      </p:sp>
+      <p:sp>
+        <p:nvSpPr>
+          <p:cNvPr id="32" name="closing"/>
+          <p:cNvSpPr/>
+          <p:nvPr/>
+        </p:nvSpPr>
+        <p:spPr>
+          <a:xfrm>
+            <a:off x="365760" y="3566160"/>
+            <a:ext cx="8412480" cy="1188720"/>
           </a:xfrm>
           <a:prstGeom prst="rect">
             <a:avLst/>
@@ -16221,13 +16076,13 @@
       </p:sp>
       <p:sp>
         <p:nvSpPr>
-          <p:cNvPr id="24" name="Text 21"/>
+          <p:cNvPr id="33" name="Text 30"/>
           <p:cNvSpPr txBox="1"/>
           <p:nvPr/>
         </p:nvSpPr>
         <p:spPr>
           <a:xfrm>
-            <a:off x="548640" y="3511296"/>
+            <a:off x="548640" y="3657600"/>
             <a:ext cx="8046720" cy="329184"/>
           </a:xfrm>
           <a:prstGeom prst="rect">
@@ -16263,14 +16118,14 @@
       </p:sp>
       <p:sp>
         <p:nvSpPr>
-          <p:cNvPr id="25" name="Text 22"/>
+          <p:cNvPr id="34" name="Text 31"/>
           <p:cNvSpPr txBox="1"/>
           <p:nvPr/>
         </p:nvSpPr>
         <p:spPr>
           <a:xfrm>
-            <a:off x="548640" y="3931920"/>
-            <a:ext cx="8046720" cy="731520"/>
+            <a:off x="548640" y="4041648"/>
+            <a:ext cx="8046720" cy="658368"/>
           </a:xfrm>
           <a:prstGeom prst="rect">
             <a:avLst/>
@@ -16287,7 +16142,7 @@
                 <a:spcPct val="115000"/>
               </a:lnSpc>
               <a:spcAft>
-                <a:spcPts val="600"/>
+                <a:spcPts val="500"/>
               </a:spcAft>
               <a:buNone/>
             </a:pPr>
@@ -16310,7 +16165,7 @@
                 <a:spcPct val="115000"/>
               </a:lnSpc>
               <a:spcAft>
-                <a:spcPts val="600"/>
+                <a:spcPts val="500"/>
               </a:spcAft>
               <a:buNone/>
             </a:pPr>

--- a/deck/セルフマネジメント課題_事業構想プレゼン.pptx
+++ b/deck/セルフマネジメント課題_事業構想プレゼン.pptx
@@ -133,7 +133,7 @@
               <c:strCache>
                 <c:ptCount val="1"/>
                 <c:pt idx="0">
-                  <c:v>累積削減効果</c:v>
+                  <c:v>浮いた工数の累計</c:v>
                 </c:pt>
               </c:strCache>
             </c:strRef>
@@ -2044,8 +2044,9 @@
           <a:p>
             <a:r>
               <a:rPr lang="en-US" dirty="0"/>
-              <a:t>【0:00 - 0:40】
-株式会社三現ワークスの事業構想を発表します。三現とは、現場・現物・現実のことです。工場でも施工現場でも担い手の高齢化と減少が進み、熟練者の勘が記録に残らないまま失われつつあります。この会社は、その一次情報をデータとAIで次の担い手と機械に引き継ぎ、人が減っても現場が迷わず回る仕組みをつくります。右側に設問①から⑤への結論を示しました。まず、この会社が何のために存在するのかからご説明します。</a:t>
+              <a:t>【0:00 - 0:50】
+要約：人が減っても現場が迷わず回る仕組みをつくる。それが三現ワークスの存在意義（設問③）
+株式会社三現ワークスの事業構想を発表します。三現とは、現場・現物・現実のことです。工場でも施工現場でも、熟練者の勘が記録に残らないまま失われつつあります。この会社の存在意義は「現場の勘を、次の担い手へ。」です。使命は、熟練者の判断を記録して、次の人と機械に渡すこと。5年後には85の拠点でそれが当たり前になっている状態を目指します。行動指針は社名のとおり、現場に立つ、現物に触れる、現実で判断する、の三つです。ここから、なぜこの事業が必要か、何をするのか、どう稼ぐのかを順にご説明します。</a:t>
             </a:r>
             <a:endParaRPr lang="en-US" dirty="0"/>
           </a:p>
@@ -2133,8 +2134,9 @@
           <a:p>
             <a:r>
               <a:rPr lang="en-US" dirty="0"/>
-              <a:t>【0:40 - 1:40】
-設問③、経営理念です。Purpose、つまり存在意義は「現場の勘を、次の担い手へ。」です。工場にも施工現場にも、この音がしたら止める、この湿度なら条件を少し変える、といった記録に残らない判断があります。その勘は、担い手が減るいま、退職とともに静かに消えていきます。Missionは、現場・現物・現実の一次情報をデータとAIで引き継ぎ、人が減っても迷わず回る現場をつくることです。Visionとして、5年後に85拠点で熟練者の判断が次の担い手と機械に引き継がれている状態を目指します。行動指針は社名の三現そのもので、現場に立つ、現物に触れる、現実で判断する、の三つです。</a:t>
+              <a:t>【0:50 - 2:00】
+要約：熟練者の勘が、記録に残らないまま消えていく
+まず、解きたい課題です。たとえば電線の押出ラインで外径が振れたとき、熟練者は音や湿度を見て、温度を少し下げて立て直します。ところが、この判断は手順書には書かれていません。数字で見ると、建設業の就業者は55歳以上が36.7%、29歳以下は11.7%です。製造業の就業者は2025年に1,033万人まで減り、技能継承がうまくいっていない企業は3社に2社にのぼります。それなのに、技能継承にデジタル技術を使っている企業は21.7%にとどまります。私は古河電気工業で地中送電線の施工管理を5年間担当し、ケーブルが使われる現場で不具合や試験値を見てきました。同時に、PythonやRAGなどを独学し、仕組みを自分で作ってきました。現場を知り、仕組みを作れる人間として、この課題に取り組みます。</a:t>
             </a:r>
             <a:endParaRPr lang="en-US" dirty="0"/>
           </a:p>
@@ -2222,8 +2224,9 @@
           <a:p>
             <a:r>
               <a:rPr lang="en-US" dirty="0"/>
-              <a:t>【1:40 - 3:00】
-この事業を選んだ理由です。工場でも施工現場でも、条件出しや段取り、異常の見極めは熟練者の勘に頼っています。数字で見ると、建設業の就業者は55歳以上が36.7%、29歳以下は11.7%です。製造業の就業者は2025年に1,033万人まで減り、技能継承がうまくいっていない企業は3社に2社にのぼります。一方、技能継承にデジタル技術を使っている企業は21.7%にとどまります。私は古河電気工業で、地中送電線の施工管理を5年間担当し、ケーブルが使われる現場で不具合や試験値を見てきました。同時に、PythonやFastAPI、RAGなどを独学し、業務の中で仕組みを作ってきました。製品が使われる現場を知り、自分で仕組みを作れることが、この事業を選んだ理由です。</a:t>
+              <a:t>【2:00 - 3:30】
+要約：熟練者の一言をタブレットで記録し、生成AIで整理して、次の人の画面に出す
+設問①、解決策です。具体的には三つの段階で動きます。一つ目は記録です。熟練者は異常に対処したら、タブレットに音声で一言だけ残します。たとえば「湿度が高いので押出温度を2℃下げた」。写真と、MESから取った設備データが自動で紐づきます。二つ目は整理です。生成AIがその一言を、条件・処置・理由に分けて文章にし、ロットや設備のデータと合わせて事例として蓄えます。三つ目は引き継ぎです。似た条件になると、若手のタブレットに過去の事例と推奨値が出ます。搬送ロボットや検査AIには、条件を直接渡します。ただ、道具を渡すだけでは現場に定着しません。そこで最初の2か月は、当社の担当者が現場に入り、熟練者に聞き取りをして判断を棚卸しし、研修まで行います。機能は、記録と検索の基盤から始め、推奨値の提示、ロット追跡、計画の試算、ロボット連携と、年に一つずつ増やしていきます。</a:t>
             </a:r>
             <a:endParaRPr lang="en-US" dirty="0"/>
           </a:p>
@@ -2311,8 +2314,9 @@
           <a:p>
             <a:r>
               <a:rPr lang="en-US" dirty="0"/>
-              <a:t>【3:00 - 4:20】
-設問①、事業内容です。売るのは記録そのものではなく、熟練者の判断を次の人と機械に渡す仕組みです。土台は、製造ロット、工程条件、試験値、作業記録、熟練者の判断理由を一つにまとめる現場データ基盤です。製品戦略は、基盤を先に入れ、モジュールを年に一本ずつ足していくランド・アンド・エクスパンドです。中心となるKNACKは、ナレッジマネジメントでいうSECIモデルの表出化、つまり熟練者の暗黙知を形式知にする部分を仕組みにしたものです。価格戦略は、原価ではなく顧客の得る価値から決める価値基準価格です。右のグラフのとおり、対象者100名の拠点で毎月240万円の効果が積み上がり、約2.1か月で初年度費用500万円を上回ります。年300万円は、年間効果2,880万円の約1割にあたります。ただし月6時間の削減は、建設業の書類電子化の実績を準用した仮定です。</a:t>
+              <a:t>【3:30 - 4:40】
+要約：顧客は1拠点あたり年300万円を払い、約2か月で元を取る
+次に、お金の流れです。お客様の工場1拠点が払うのは、左の帯のとおりです。毎年払うのは、アプリと基盤の利用料100万円、記録するラインの数に応じた登録料が20万円×5ラインで100万円、選んだ追加機能が50万円×2本で100万円、合わせて年300万円です。初年度だけ、当社の担当者が現場に入る導入支援200万円が加わり、500万円になります。お客様から見ると、右のグラフのとおり、対象者100名の拠点で毎月240万円分の工数が浮き、約2.1か月で500万円を上回ります。ただし月6時間の削減は、建設業の書類電子化の実績を当てはめた仮定です。当社から見ると、利用料は粗利率85%で毎年積み上がり、導入支援は粗利率40%で一度きりです。お客様が増えるほど、利用料が積み上がっていく構造です。</a:t>
             </a:r>
             <a:endParaRPr lang="en-US" dirty="0"/>
           </a:p>
@@ -2400,8 +2404,9 @@
           <a:p>
             <a:r>
               <a:rPr lang="en-US" dirty="0"/>
-              <a:t>【4:20 - 5:40】
-最初に自分で自分に突きつけた問いが三つありました。コンサルと何が違うのか、MESや大手SIerと何が違うのか、ロボットやAIが来たら人の判断は要らなくなるのではないか、です。左のポジショニングマップは、横軸が扱う情報、つまり何が起きたかという実績か、なぜそうしたかという判断の理由か。縦軸が提供の形、人の時間か仕組みか、です。MESやロボットは実績と動作を仕組みで扱い、コンサルや社内の熟練者は判断の理由を人で扱っています。判断の理由を仕組みで扱う右上が空いており、ここを取ります。STPでは、製造業を工程の形で分け、熟練者の判断が品質を左右する電線・ケーブル工場を狙います。競争戦略は、コトラーの競争地位でいうニッチャー、ポーターの基本戦略でいう差別化集中です。ERPやMESは置き換えずに連携します。弱みとして、製造現場の経験が浅いことと、営業・資金調達が未経験であることを正直に挙げています。</a:t>
+              <a:t>【4:40 - 5:50】
+要約：判断の理由を仕組みで扱う会社は、まだない
+最初に自分で自分に突きつけた問いが三つありました。コンサルと何が違うのか、MESや大手SIerと何が違うのか、ロボットやAIが来たら人の判断は要らなくなるのではないか、です。左の図は、横軸が扱う情報、つまり何が起きたかという実績か、なぜそうしたかという判断の理由か。縦軸が、人の時間で提供するか、仕組みで提供するかです。MESやロボットは実績と動作を仕組みで扱います。コンサルや社内の熟練者は判断の理由を扱いますが、人に依存します。判断の理由を仕組みで扱う右上は、まだ空いています。ここを、熟練者の判断が品質を左右する電線・ケーブル工場に絞って取ります。大手が採算に乗せにくい専門領域に集中する、ニッチャーの戦い方です。弱みとして、製造現場の経験が浅いことと、営業・資金調達が未経験であることを正直に挙げています。</a:t>
             </a:r>
             <a:endParaRPr lang="en-US" dirty="0"/>
           </a:p>
@@ -2489,8 +2494,9 @@
           <a:p>
             <a:r>
               <a:rPr lang="en-US" dirty="0"/>
-              <a:t>【5:40 - 6:50】
-設問②、組織と採用です。顧客数は希望ではなく、導入担当の人数から逆算しています。1拠点の導入には約2か月かかり、並行は2拠点までなので、導入担当1名あたり年6拠点が上限です。計画値はその6割から8割に置き、1年目は製品が未完成のため3拠点に限定します。累計の顧客拠点は5年目に85、社員は4名から20名とします。採用では、製造や施工の現場経験者にITを教える経路を軸にし、製造知見の不足を補うため、生産技術の経験者を初期メンバーに迎えます。私は代表取締役CEOとして、現場の読み解き方を型にして渡す役割に絞ります。技術の責任者は兼任せず、エンジニアの中から任命します。</a:t>
+              <a:t>【5:50 - 6:50】
+要約：顧客数は、導入担当の人数で決まる
+設問②、組織と採用です。先ほどの導入支援は人の作業なので、顧客を増やせる速さは導入担当の人数で決まります。1拠点に約2か月かかり、並行は2拠点までなので、1名あたり年6拠点が上限です。計画はその6割から8割に置き、1年目は製品が未完成のため3拠点に限定します。累計の顧客拠点は5年目に85、社員は4名から20名とします。採用は、製造や施工の現場経験者にITを教える経路を軸にし、製造知見の不足を補うため、生産技術の経験者を初期メンバーに迎えます。私は代表取締役CEOとして、現場の読み解き方を型にして渡す役割に絞り、技術の責任者は兼任しません。</a:t>
             </a:r>
             <a:endParaRPr lang="en-US" dirty="0"/>
           </a:p>
@@ -2579,7 +2585,8 @@
             <a:r>
               <a:rPr lang="en-US" dirty="0"/>
               <a:t>【6:50 - 8:30】
-設問④、経営計画です。グラフの横軸が年、縦軸が金額です。売上高は1年目1,200万円から、5年目に2億9,000万円まで伸びます。営業利益は3年目まで赤字で、4年目に2,800万円の黒字に転じます。点線の累積営業損益は3年目に6,500万円の赤字で底を打ちます。この谷を越えるための資金が1.5億円で、谷の0.65億円、運転資金0.29億円、1年遅れた場合の備え0.56億円の積み上げです。調達先には、電線メーカーやロボットメーカーのコーポレートベンチャーキャピタルを想定しています。資金だけでなく、実証の現場と販路を同時に得られるためです。なぜ4年目に黒字化するのか。右のグラフのとおり、条件は社員1人あたりの顧客拠点数で、損益分岐は2.8です。3年目は2.73で届かず、4年目に3.67で超えます。顧客の増加が人員の増加を追い越す年です。</a:t>
+要約：3年目の谷を1.5億円で越え、4年目に黒字化する
+設問④、経営計画です。グラフの横軸が年、縦軸が金額です。売上高は1年目1,200万円から、5年目に2億9,000万円まで伸びます。営業利益は3年目まで赤字で、4年目に2,800万円の黒字に転じます。点線の累積営業損益は、3年目に6,500万円の赤字で底を打ちます。この谷を越えるための資金が1.5億円で、谷の0.65億円、運転資金0.29億円、1年遅れた場合の備え0.56億円を積み上げた額です。調達先には、電線メーカーやロボットメーカーのコーポレートベンチャーキャピタルを想定しています。資金と一緒に、実証の現場と販路を得られるためです。なぜ4年目なのか。右のグラフのとおり、社員1人あたりの顧客拠点が2.8を超えると黒字になります。3年目は2.73で届かず、4年目に3.67で超えます。積み上がる利用料が、人件費を追い越す年です。</a:t>
             </a:r>
             <a:endParaRPr lang="en-US" dirty="0"/>
           </a:p>
@@ -2668,7 +2675,8 @@
             <a:r>
               <a:rPr lang="en-US" dirty="0"/>
               <a:t>【8:30 - 9:50】
-設問⑤、経営課題です。最大のリスクは、創業者である自分が律速になることです。準備期は創業者依存と製造知見の不足に、試験導入の限定と生産技術経験者の採用で対応します。中期の母数の小ささには、アンゾフの成長マトリクスでいう新市場開拓として、施工会社へ同じ基盤を広げます。後期は属人経営からの脱却です。そのための仕組みが、下段のバランスト・スコアカードです。財務、顧客、業務プロセス、学習と成長の四つの視点で、重要成功要因と指標を先に決めておけば、私がいなくても判断できます。最後に、この三つの柱、顧客・商品・収益は、すべて現在の勤務先の中にも存在します。だから復職後は、生産技術と情報システムの領域で、現場と技術のあいだを訳す役割を担いたいと考えています。そして、自らの役割を定義しきること自体が、業務を際限なく抱え込まないための再発防止策でもあります。以上です。</a:t>
+要約：最大のリスクは自分。だから役割と判断基準を先に決めておく
+設問⑤、経営課題です。最大のリスクは競合ではなく、創業者である自分が律速になることです。準備期は、試験導入を3拠点に限定し、生産技術の経験者を迎えます。中期は、電線業界が353事業所と小さいため、製品の出口である施工会社へ同じ基盤を広げます。後期は、私がいなくても判断できる会社にします。そのための仕組みが下段のバランスト・スコアカードで、四つの指標を先に決めておきます。最後に、この事業の顧客・商品・収益は、すべて現在の勤務先の中にも存在します。顧客は社内の工場、商品は製造記録のデータ化と技能継承、収益は工数削減と品質不良の防止です。だから復職後は、生産技術と情報システムの領域で、現場と技術のあいだを訳す役割を担いたいと考えています。そして、自らの役割を定義しきること自体が、業務を際限なく抱え込まないための再発防止策でもあります。以上です。</a:t>
             </a:r>
             <a:endParaRPr lang="en-US" dirty="0"/>
           </a:p>
@@ -3262,7 +3270,7 @@
         </p:blipFill>
         <p:spPr>
           <a:xfrm>
-            <a:off x="274320" y="1280160"/>
+            <a:off x="274320" y="1097280"/>
             <a:ext cx="2514600" cy="603504"/>
           </a:xfrm>
           <a:prstGeom prst="rect">
@@ -3278,8 +3286,8 @@
         </p:nvSpPr>
         <p:spPr>
           <a:xfrm>
-            <a:off x="320040" y="2148840"/>
-            <a:ext cx="2651760" cy="731520"/>
+            <a:off x="320040" y="1965960"/>
+            <a:ext cx="2651760" cy="219456"/>
           </a:xfrm>
           <a:prstGeom prst="rect">
             <a:avLst/>
@@ -3293,12 +3301,12 @@
           <a:p>
             <a:pPr algn="l" indent="0" marL="0">
               <a:lnSpc>
-                <a:spcPct val="120000"/>
-              </a:lnSpc>
-              <a:buNone/>
-            </a:pPr>
-            <a:r>
-              <a:rPr lang="en-US" sz="2000" b="1" dirty="0">
+                <a:spcPct val="115000"/>
+              </a:lnSpc>
+              <a:buNone/>
+            </a:pPr>
+            <a:r>
+              <a:rPr lang="en-US" sz="900" b="1" dirty="0">
                 <a:solidFill>
                   <a:srgbClr val="FFFFFF"/>
                 </a:solidFill>
@@ -3306,29 +3314,9 @@
                 <a:ea typeface="Meiryo" pitchFamily="34" charset="-122"/>
                 <a:cs typeface="Meiryo" pitchFamily="34" charset="-120"/>
               </a:rPr>
-              <a:t>現場の勘を、</a:t>
-            </a:r>
-            <a:endParaRPr lang="en-US" sz="2000" dirty="0"/>
-          </a:p>
-          <a:p>
-            <a:pPr algn="l" indent="0" marL="0">
-              <a:lnSpc>
-                <a:spcPct val="120000"/>
-              </a:lnSpc>
-              <a:buNone/>
-            </a:pPr>
-            <a:r>
-              <a:rPr lang="en-US" sz="2000" b="1" dirty="0">
-                <a:solidFill>
-                  <a:srgbClr val="FFFFFF"/>
-                </a:solidFill>
-                <a:latin typeface="Meiryo" pitchFamily="34" charset="0"/>
-                <a:ea typeface="Meiryo" pitchFamily="34" charset="-122"/>
-                <a:cs typeface="Meiryo" pitchFamily="34" charset="-120"/>
-              </a:rPr>
-              <a:t>次の担い手へ。</a:t>
-            </a:r>
-            <a:endParaRPr lang="en-US" sz="2000" dirty="0"/>
+              <a:t>PURPOSE　存在意義</a:t>
+            </a:r>
+            <a:endParaRPr lang="en-US" sz="900" dirty="0"/>
           </a:p>
         </p:txBody>
       </p:sp>
@@ -3340,8 +3328,8 @@
         </p:nvSpPr>
         <p:spPr>
           <a:xfrm>
-            <a:off x="320040" y="3017520"/>
-            <a:ext cx="2651760" cy="274320"/>
+            <a:off x="320040" y="2194560"/>
+            <a:ext cx="2651760" cy="731520"/>
           </a:xfrm>
           <a:prstGeom prst="rect">
             <a:avLst/>
@@ -3355,12 +3343,12 @@
           <a:p>
             <a:pPr algn="l" indent="0" marL="0">
               <a:lnSpc>
-                <a:spcPct val="115000"/>
-              </a:lnSpc>
-              <a:buNone/>
-            </a:pPr>
-            <a:r>
-              <a:rPr lang="en-US" sz="1100" dirty="0">
+                <a:spcPct val="120000"/>
+              </a:lnSpc>
+              <a:buNone/>
+            </a:pPr>
+            <a:r>
+              <a:rPr lang="en-US" sz="2000" b="1" dirty="0">
                 <a:solidFill>
                   <a:srgbClr val="FFFFFF"/>
                 </a:solidFill>
@@ -3368,9 +3356,29 @@
                 <a:ea typeface="Meiryo" pitchFamily="34" charset="-122"/>
                 <a:cs typeface="Meiryo" pitchFamily="34" charset="-120"/>
               </a:rPr>
-              <a:t>株式会社三現ワークス（事業構想）</a:t>
-            </a:r>
-            <a:endParaRPr lang="en-US" sz="1100" dirty="0"/>
+              <a:t>現場の勘を、</a:t>
+            </a:r>
+            <a:endParaRPr lang="en-US" sz="2000" dirty="0"/>
+          </a:p>
+          <a:p>
+            <a:pPr algn="l" indent="0" marL="0">
+              <a:lnSpc>
+                <a:spcPct val="120000"/>
+              </a:lnSpc>
+              <a:buNone/>
+            </a:pPr>
+            <a:r>
+              <a:rPr lang="en-US" sz="2000" b="1" dirty="0">
+                <a:solidFill>
+                  <a:srgbClr val="FFFFFF"/>
+                </a:solidFill>
+                <a:latin typeface="Meiryo" pitchFamily="34" charset="0"/>
+                <a:ea typeface="Meiryo" pitchFamily="34" charset="-122"/>
+                <a:cs typeface="Meiryo" pitchFamily="34" charset="-120"/>
+              </a:rPr>
+              <a:t>次の担い手へ。</a:t>
+            </a:r>
+            <a:endParaRPr lang="en-US" sz="2000" dirty="0"/>
           </a:p>
         </p:txBody>
       </p:sp>
@@ -3382,8 +3390,8 @@
         </p:nvSpPr>
         <p:spPr>
           <a:xfrm>
-            <a:off x="320040" y="3310128"/>
-            <a:ext cx="2651760" cy="256032"/>
+            <a:off x="320040" y="3154680"/>
+            <a:ext cx="2651760" cy="274320"/>
           </a:xfrm>
           <a:prstGeom prst="rect">
             <a:avLst/>
@@ -3402,7 +3410,7 @@
               <a:buNone/>
             </a:pPr>
             <a:r>
-              <a:rPr lang="en-US" sz="950" dirty="0">
+              <a:rPr lang="en-US" sz="1100" dirty="0">
                 <a:solidFill>
                   <a:srgbClr val="FFFFFF"/>
                 </a:solidFill>
@@ -3410,9 +3418,9 @@
                 <a:ea typeface="Meiryo" pitchFamily="34" charset="-122"/>
                 <a:cs typeface="Meiryo" pitchFamily="34" charset="-120"/>
               </a:rPr>
-              <a:t>三現＝現場・現物・現実</a:t>
-            </a:r>
-            <a:endParaRPr lang="en-US" sz="950" dirty="0"/>
+              <a:t>株式会社三現ワークス（事業構想）</a:t>
+            </a:r>
+            <a:endParaRPr lang="en-US" sz="1100" dirty="0"/>
           </a:p>
         </p:txBody>
       </p:sp>
@@ -3424,6 +3432,48 @@
         </p:nvSpPr>
         <p:spPr>
           <a:xfrm>
+            <a:off x="320040" y="3447288"/>
+            <a:ext cx="2651760" cy="256032"/>
+          </a:xfrm>
+          <a:prstGeom prst="rect">
+            <a:avLst/>
+          </a:prstGeom>
+          <a:noFill/>
+          <a:ln/>
+        </p:spPr>
+        <p:txBody>
+          <a:bodyPr wrap="square" lIns="0" tIns="0" rIns="0" bIns="0" rtlCol="0" anchor="t"/>
+          <a:lstStyle/>
+          <a:p>
+            <a:pPr algn="l" indent="0" marL="0">
+              <a:lnSpc>
+                <a:spcPct val="115000"/>
+              </a:lnSpc>
+              <a:buNone/>
+            </a:pPr>
+            <a:r>
+              <a:rPr lang="en-US" sz="950" dirty="0">
+                <a:solidFill>
+                  <a:srgbClr val="FFFFFF"/>
+                </a:solidFill>
+                <a:latin typeface="Meiryo" pitchFamily="34" charset="0"/>
+                <a:ea typeface="Meiryo" pitchFamily="34" charset="-122"/>
+                <a:cs typeface="Meiryo" pitchFamily="34" charset="-120"/>
+              </a:rPr>
+              <a:t>三現＝現場・現物・現実</a:t>
+            </a:r>
+            <a:endParaRPr lang="en-US" sz="950" dirty="0"/>
+          </a:p>
+        </p:txBody>
+      </p:sp>
+      <p:sp>
+        <p:nvSpPr>
+          <p:cNvPr id="9" name="Text 5"/>
+          <p:cNvSpPr txBox="1"/>
+          <p:nvPr/>
+        </p:nvSpPr>
+        <p:spPr>
+          <a:xfrm>
             <a:off x="3429000" y="457200"/>
             <a:ext cx="5074920" cy="256032"/>
           </a:xfrm>
@@ -3460,7 +3510,7 @@
       </p:sp>
       <p:sp>
         <p:nvSpPr>
-          <p:cNvPr id="9" name="Text 5"/>
+          <p:cNvPr id="10" name="Text 6"/>
           <p:cNvSpPr txBox="1"/>
           <p:nvPr/>
         </p:nvSpPr>
@@ -3522,13 +3572,55 @@
       </p:sp>
       <p:sp>
         <p:nvSpPr>
-          <p:cNvPr id="10" name="Shape 6"/>
+          <p:cNvPr id="11" name="Text 7"/>
+          <p:cNvSpPr txBox="1"/>
+          <p:nvPr/>
+        </p:nvSpPr>
+        <p:spPr>
+          <a:xfrm>
+            <a:off x="3429000" y="1700784"/>
+            <a:ext cx="5074920" cy="219456"/>
+          </a:xfrm>
+          <a:prstGeom prst="rect">
+            <a:avLst/>
+          </a:prstGeom>
+          <a:noFill/>
+          <a:ln/>
+        </p:spPr>
+        <p:txBody>
+          <a:bodyPr wrap="square" lIns="0" tIns="0" rIns="0" bIns="0" rtlCol="0" anchor="t"/>
+          <a:lstStyle/>
+          <a:p>
+            <a:pPr algn="l" indent="0" marL="0">
+              <a:lnSpc>
+                <a:spcPct val="115000"/>
+              </a:lnSpc>
+              <a:buNone/>
+            </a:pPr>
+            <a:r>
+              <a:rPr lang="en-US" sz="950" b="1" dirty="0">
+                <a:solidFill>
+                  <a:srgbClr val="4D4D4D"/>
+                </a:solidFill>
+                <a:latin typeface="Meiryo" pitchFamily="34" charset="0"/>
+                <a:ea typeface="Meiryo" pitchFamily="34" charset="-122"/>
+                <a:cs typeface="Meiryo" pitchFamily="34" charset="-120"/>
+              </a:rPr>
+              <a:t>設問③　経営理念</a:t>
+            </a:r>
+            <a:endParaRPr lang="en-US" sz="950" dirty="0"/>
+          </a:p>
+        </p:txBody>
+      </p:sp>
+      <p:sp>
+        <p:nvSpPr>
+          <p:cNvPr id="12" name="Shape 8"/>
           <p:cNvSpPr/>
           <p:nvPr/>
         </p:nvSpPr>
         <p:spPr>
           <a:xfrm>
-            <a:off x="3429000" y="1828800"/>
+            <a:off x="3429000" y="1956816"/>
             <a:ext cx="5074920" cy="0"/>
           </a:xfrm>
           <a:prstGeom prst="line">
@@ -3545,14 +3637,14 @@
       </p:sp>
       <p:sp>
         <p:nvSpPr>
-          <p:cNvPr id="11" name="Text 7"/>
+          <p:cNvPr id="13" name="Text 9"/>
           <p:cNvSpPr txBox="1"/>
           <p:nvPr/>
         </p:nvSpPr>
         <p:spPr>
           <a:xfrm>
-            <a:off x="3429000" y="1828800"/>
-            <a:ext cx="685800" cy="420624"/>
+            <a:off x="3429000" y="1984248"/>
+            <a:ext cx="914400" cy="402336"/>
           </a:xfrm>
           <a:prstGeom prst="rect">
             <a:avLst/>
@@ -3571,7 +3663,7 @@
               <a:buNone/>
             </a:pPr>
             <a:r>
-              <a:rPr lang="en-US" sz="1050" b="1" dirty="0">
+              <a:rPr lang="en-US" sz="1000" b="1" dirty="0">
                 <a:solidFill>
                   <a:srgbClr val="1A1A1A"/>
                 </a:solidFill>
@@ -3579,22 +3671,42 @@
                 <a:ea typeface="Meiryo" pitchFamily="34" charset="-122"/>
                 <a:cs typeface="Meiryo" pitchFamily="34" charset="-120"/>
               </a:rPr>
-              <a:t>① 事業</a:t>
-            </a:r>
-            <a:endParaRPr lang="en-US" sz="1050" dirty="0"/>
-          </a:p>
-        </p:txBody>
-      </p:sp>
-      <p:sp>
-        <p:nvSpPr>
-          <p:cNvPr id="12" name="Text 8"/>
+              <a:t>MISSION</a:t>
+            </a:r>
+            <a:endParaRPr lang="en-US" sz="1400" dirty="0"/>
+          </a:p>
+          <a:p>
+            <a:pPr algn="l" indent="0" marL="0">
+              <a:lnSpc>
+                <a:spcPct val="115000"/>
+              </a:lnSpc>
+              <a:buNone/>
+            </a:pPr>
+            <a:r>
+              <a:rPr lang="en-US" sz="800" dirty="0">
+                <a:solidFill>
+                  <a:srgbClr val="4D4D4D"/>
+                </a:solidFill>
+                <a:latin typeface="Meiryo" pitchFamily="34" charset="0"/>
+                <a:ea typeface="Meiryo" pitchFamily="34" charset="-122"/>
+                <a:cs typeface="Meiryo" pitchFamily="34" charset="-120"/>
+              </a:rPr>
+              <a:t>使命</a:t>
+            </a:r>
+            <a:endParaRPr lang="en-US" sz="1400" dirty="0"/>
+          </a:p>
+        </p:txBody>
+      </p:sp>
+      <p:sp>
+        <p:nvSpPr>
+          <p:cNvPr id="14" name="Text 10"/>
           <p:cNvSpPr txBox="1"/>
           <p:nvPr/>
         </p:nvSpPr>
         <p:spPr>
           <a:xfrm>
-            <a:off x="4114800" y="1828800"/>
-            <a:ext cx="4389120" cy="420624"/>
+            <a:off x="4389120" y="1956816"/>
+            <a:ext cx="4114800" cy="457200"/>
           </a:xfrm>
           <a:prstGeom prst="rect">
             <a:avLst/>
@@ -3613,7 +3725,7 @@
               <a:buNone/>
             </a:pPr>
             <a:r>
-              <a:rPr lang="en-US" sz="1050" dirty="0">
+              <a:rPr lang="en-US" sz="1150" dirty="0">
                 <a:solidFill>
                   <a:srgbClr val="1A1A1A"/>
                 </a:solidFill>
@@ -3621,21 +3733,21 @@
                 <a:ea typeface="Meiryo" pitchFamily="34" charset="-122"/>
                 <a:cs typeface="Meiryo" pitchFamily="34" charset="-120"/>
               </a:rPr>
-              <a:t>工場と施工現場の一次情報を、技能継承と自動化につなぐデータ基盤</a:t>
-            </a:r>
-            <a:endParaRPr lang="en-US" sz="1050" dirty="0"/>
-          </a:p>
-        </p:txBody>
-      </p:sp>
-      <p:sp>
-        <p:nvSpPr>
-          <p:cNvPr id="13" name="Shape 9"/>
+              <a:t>熟練者の判断を記録し、次の担い手と機械に渡す</a:t>
+            </a:r>
+            <a:endParaRPr lang="en-US" sz="1150" dirty="0"/>
+          </a:p>
+        </p:txBody>
+      </p:sp>
+      <p:sp>
+        <p:nvSpPr>
+          <p:cNvPr id="15" name="Shape 11"/>
           <p:cNvSpPr/>
           <p:nvPr/>
         </p:nvSpPr>
         <p:spPr>
           <a:xfrm>
-            <a:off x="3429000" y="2249424"/>
+            <a:off x="3429000" y="2414016"/>
             <a:ext cx="5074920" cy="0"/>
           </a:xfrm>
           <a:prstGeom prst="line">
@@ -3652,14 +3764,14 @@
       </p:sp>
       <p:sp>
         <p:nvSpPr>
-          <p:cNvPr id="14" name="Text 10"/>
+          <p:cNvPr id="16" name="Text 12"/>
           <p:cNvSpPr txBox="1"/>
           <p:nvPr/>
         </p:nvSpPr>
         <p:spPr>
           <a:xfrm>
-            <a:off x="3429000" y="2249424"/>
-            <a:ext cx="685800" cy="420624"/>
+            <a:off x="3429000" y="2441448"/>
+            <a:ext cx="914400" cy="402336"/>
           </a:xfrm>
           <a:prstGeom prst="rect">
             <a:avLst/>
@@ -3678,7 +3790,7 @@
               <a:buNone/>
             </a:pPr>
             <a:r>
-              <a:rPr lang="en-US" sz="1050" b="1" dirty="0">
+              <a:rPr lang="en-US" sz="1000" b="1" dirty="0">
                 <a:solidFill>
                   <a:srgbClr val="1A1A1A"/>
                 </a:solidFill>
@@ -3686,22 +3798,42 @@
                 <a:ea typeface="Meiryo" pitchFamily="34" charset="-122"/>
                 <a:cs typeface="Meiryo" pitchFamily="34" charset="-120"/>
               </a:rPr>
-              <a:t>② 組織</a:t>
-            </a:r>
-            <a:endParaRPr lang="en-US" sz="1050" dirty="0"/>
-          </a:p>
-        </p:txBody>
-      </p:sp>
-      <p:sp>
-        <p:nvSpPr>
-          <p:cNvPr id="15" name="Text 11"/>
+              <a:t>VISION</a:t>
+            </a:r>
+            <a:endParaRPr lang="en-US" sz="1400" dirty="0"/>
+          </a:p>
+          <a:p>
+            <a:pPr algn="l" indent="0" marL="0">
+              <a:lnSpc>
+                <a:spcPct val="115000"/>
+              </a:lnSpc>
+              <a:buNone/>
+            </a:pPr>
+            <a:r>
+              <a:rPr lang="en-US" sz="800" dirty="0">
+                <a:solidFill>
+                  <a:srgbClr val="4D4D4D"/>
+                </a:solidFill>
+                <a:latin typeface="Meiryo" pitchFamily="34" charset="0"/>
+                <a:ea typeface="Meiryo" pitchFamily="34" charset="-122"/>
+                <a:cs typeface="Meiryo" pitchFamily="34" charset="-120"/>
+              </a:rPr>
+              <a:t>5年後</a:t>
+            </a:r>
+            <a:endParaRPr lang="en-US" sz="1400" dirty="0"/>
+          </a:p>
+        </p:txBody>
+      </p:sp>
+      <p:sp>
+        <p:nvSpPr>
+          <p:cNvPr id="17" name="Text 13"/>
           <p:cNvSpPr txBox="1"/>
           <p:nvPr/>
         </p:nvSpPr>
         <p:spPr>
           <a:xfrm>
-            <a:off x="4114800" y="2249424"/>
-            <a:ext cx="4389120" cy="420624"/>
+            <a:off x="4389120" y="2414016"/>
+            <a:ext cx="4114800" cy="457200"/>
           </a:xfrm>
           <a:prstGeom prst="rect">
             <a:avLst/>
@@ -3720,7 +3852,7 @@
               <a:buNone/>
             </a:pPr>
             <a:r>
-              <a:rPr lang="en-US" sz="1050" dirty="0">
+              <a:rPr lang="en-US" sz="1150" dirty="0">
                 <a:solidFill>
                   <a:srgbClr val="1A1A1A"/>
                 </a:solidFill>
@@ -3728,21 +3860,21 @@
                 <a:ea typeface="Meiryo" pitchFamily="34" charset="-122"/>
                 <a:cs typeface="Meiryo" pitchFamily="34" charset="-120"/>
               </a:rPr>
-              <a:t>初年度4名、5年目20名。導入担当1名あたり年6拠点が設計基準</a:t>
-            </a:r>
-            <a:endParaRPr lang="en-US" sz="1050" dirty="0"/>
-          </a:p>
-        </p:txBody>
-      </p:sp>
-      <p:sp>
-        <p:nvSpPr>
-          <p:cNvPr id="16" name="Shape 12"/>
+              <a:t>85拠点で、熟練者がいなくても迷わず判断できている</a:t>
+            </a:r>
+            <a:endParaRPr lang="en-US" sz="1150" dirty="0"/>
+          </a:p>
+        </p:txBody>
+      </p:sp>
+      <p:sp>
+        <p:nvSpPr>
+          <p:cNvPr id="18" name="Shape 14"/>
           <p:cNvSpPr/>
           <p:nvPr/>
         </p:nvSpPr>
         <p:spPr>
           <a:xfrm>
-            <a:off x="3429000" y="2670048"/>
+            <a:off x="3429000" y="2871216"/>
             <a:ext cx="5074920" cy="0"/>
           </a:xfrm>
           <a:prstGeom prst="line">
@@ -3759,14 +3891,14 @@
       </p:sp>
       <p:sp>
         <p:nvSpPr>
-          <p:cNvPr id="17" name="Text 13"/>
+          <p:cNvPr id="19" name="Text 15"/>
           <p:cNvSpPr txBox="1"/>
           <p:nvPr/>
         </p:nvSpPr>
         <p:spPr>
           <a:xfrm>
-            <a:off x="3429000" y="2670048"/>
-            <a:ext cx="685800" cy="420624"/>
+            <a:off x="3429000" y="2898648"/>
+            <a:ext cx="914400" cy="402336"/>
           </a:xfrm>
           <a:prstGeom prst="rect">
             <a:avLst/>
@@ -3785,7 +3917,7 @@
               <a:buNone/>
             </a:pPr>
             <a:r>
-              <a:rPr lang="en-US" sz="1050" b="1" dirty="0">
+              <a:rPr lang="en-US" sz="1000" b="1" dirty="0">
                 <a:solidFill>
                   <a:srgbClr val="1A1A1A"/>
                 </a:solidFill>
@@ -3793,22 +3925,42 @@
                 <a:ea typeface="Meiryo" pitchFamily="34" charset="-122"/>
                 <a:cs typeface="Meiryo" pitchFamily="34" charset="-120"/>
               </a:rPr>
-              <a:t>③ 理念</a:t>
-            </a:r>
-            <a:endParaRPr lang="en-US" sz="1050" dirty="0"/>
-          </a:p>
-        </p:txBody>
-      </p:sp>
-      <p:sp>
-        <p:nvSpPr>
-          <p:cNvPr id="18" name="Text 14"/>
+              <a:t>VALUES</a:t>
+            </a:r>
+            <a:endParaRPr lang="en-US" sz="1400" dirty="0"/>
+          </a:p>
+          <a:p>
+            <a:pPr algn="l" indent="0" marL="0">
+              <a:lnSpc>
+                <a:spcPct val="115000"/>
+              </a:lnSpc>
+              <a:buNone/>
+            </a:pPr>
+            <a:r>
+              <a:rPr lang="en-US" sz="800" dirty="0">
+                <a:solidFill>
+                  <a:srgbClr val="4D4D4D"/>
+                </a:solidFill>
+                <a:latin typeface="Meiryo" pitchFamily="34" charset="0"/>
+                <a:ea typeface="Meiryo" pitchFamily="34" charset="-122"/>
+                <a:cs typeface="Meiryo" pitchFamily="34" charset="-120"/>
+              </a:rPr>
+              <a:t>行動指針</a:t>
+            </a:r>
+            <a:endParaRPr lang="en-US" sz="1400" dirty="0"/>
+          </a:p>
+        </p:txBody>
+      </p:sp>
+      <p:sp>
+        <p:nvSpPr>
+          <p:cNvPr id="20" name="Text 16"/>
           <p:cNvSpPr txBox="1"/>
           <p:nvPr/>
         </p:nvSpPr>
         <p:spPr>
           <a:xfrm>
-            <a:off x="4114800" y="2670048"/>
-            <a:ext cx="4389120" cy="420624"/>
+            <a:off x="4389120" y="2871216"/>
+            <a:ext cx="4114800" cy="457200"/>
           </a:xfrm>
           <a:prstGeom prst="rect">
             <a:avLst/>
@@ -3827,7 +3979,7 @@
               <a:buNone/>
             </a:pPr>
             <a:r>
-              <a:rPr lang="en-US" sz="1050" dirty="0">
+              <a:rPr lang="en-US" sz="1150" dirty="0">
                 <a:solidFill>
                   <a:srgbClr val="1A1A1A"/>
                 </a:solidFill>
@@ -3835,21 +3987,21 @@
                 <a:ea typeface="Meiryo" pitchFamily="34" charset="-122"/>
                 <a:cs typeface="Meiryo" pitchFamily="34" charset="-120"/>
               </a:rPr>
-              <a:t>現場の勘を、次の担い手へ ─ 現場・現物・現実から始める</a:t>
-            </a:r>
-            <a:endParaRPr lang="en-US" sz="1050" dirty="0"/>
-          </a:p>
-        </p:txBody>
-      </p:sp>
-      <p:sp>
-        <p:nvSpPr>
-          <p:cNvPr id="19" name="Shape 15"/>
+              <a:t>現場に立つ／現物に触れる／現実で判断する</a:t>
+            </a:r>
+            <a:endParaRPr lang="en-US" sz="1150" dirty="0"/>
+          </a:p>
+        </p:txBody>
+      </p:sp>
+      <p:sp>
+        <p:nvSpPr>
+          <p:cNvPr id="21" name="Shape 17"/>
           <p:cNvSpPr/>
           <p:nvPr/>
         </p:nvSpPr>
         <p:spPr>
           <a:xfrm>
-            <a:off x="3429000" y="3090672"/>
+            <a:off x="3429000" y="3328416"/>
             <a:ext cx="5074920" cy="0"/>
           </a:xfrm>
           <a:prstGeom prst="line">
@@ -3866,221 +4018,49 @@
       </p:sp>
       <p:sp>
         <p:nvSpPr>
-          <p:cNvPr id="20" name="Text 16"/>
+          <p:cNvPr id="22" name="Text 18"/>
           <p:cNvSpPr txBox="1"/>
           <p:nvPr/>
         </p:nvSpPr>
         <p:spPr>
           <a:xfrm>
-            <a:off x="3429000" y="3090672"/>
-            <a:ext cx="685800" cy="420624"/>
-          </a:xfrm>
-          <a:prstGeom prst="rect">
-            <a:avLst/>
-          </a:prstGeom>
-          <a:noFill/>
-          <a:ln/>
-        </p:spPr>
-        <p:txBody>
-          <a:bodyPr wrap="square" lIns="0" tIns="0" rIns="0" bIns="0" rtlCol="0" anchor="ctr"/>
-          <a:lstStyle/>
-          <a:p>
-            <a:pPr algn="l" indent="0" marL="0">
-              <a:lnSpc>
-                <a:spcPct val="115000"/>
-              </a:lnSpc>
-              <a:buNone/>
-            </a:pPr>
-            <a:r>
-              <a:rPr lang="en-US" sz="1050" b="1" dirty="0">
-                <a:solidFill>
-                  <a:srgbClr val="1A1A1A"/>
-                </a:solidFill>
-                <a:latin typeface="Meiryo" pitchFamily="34" charset="0"/>
-                <a:ea typeface="Meiryo" pitchFamily="34" charset="-122"/>
-                <a:cs typeface="Meiryo" pitchFamily="34" charset="-120"/>
-              </a:rPr>
-              <a:t>④ 計画</a:t>
-            </a:r>
-            <a:endParaRPr lang="en-US" sz="1050" dirty="0"/>
-          </a:p>
-        </p:txBody>
-      </p:sp>
-      <p:sp>
-        <p:nvSpPr>
-          <p:cNvPr id="21" name="Text 17"/>
-          <p:cNvSpPr txBox="1"/>
-          <p:nvPr/>
-        </p:nvSpPr>
-        <p:spPr>
-          <a:xfrm>
-            <a:off x="4114800" y="3090672"/>
-            <a:ext cx="4389120" cy="420624"/>
-          </a:xfrm>
-          <a:prstGeom prst="rect">
-            <a:avLst/>
-          </a:prstGeom>
-          <a:noFill/>
-          <a:ln/>
-        </p:spPr>
-        <p:txBody>
-          <a:bodyPr wrap="square" lIns="0" tIns="0" rIns="0" bIns="0" rtlCol="0" anchor="ctr"/>
-          <a:lstStyle/>
-          <a:p>
-            <a:pPr algn="l" indent="0" marL="0">
-              <a:lnSpc>
-                <a:spcPct val="115000"/>
-              </a:lnSpc>
-              <a:buNone/>
-            </a:pPr>
-            <a:r>
-              <a:rPr lang="en-US" sz="1050" dirty="0">
-                <a:solidFill>
-                  <a:srgbClr val="1A1A1A"/>
-                </a:solidFill>
-                <a:latin typeface="Meiryo" pitchFamily="34" charset="0"/>
-                <a:ea typeface="Meiryo" pitchFamily="34" charset="-122"/>
-                <a:cs typeface="Meiryo" pitchFamily="34" charset="-120"/>
-              </a:rPr>
-              <a:t>4年目に黒字転換。5年目 売上2.9億円・営業利益率24%</a:t>
-            </a:r>
-            <a:endParaRPr lang="en-US" sz="1050" dirty="0"/>
-          </a:p>
-        </p:txBody>
-      </p:sp>
-      <p:sp>
-        <p:nvSpPr>
-          <p:cNvPr id="22" name="Shape 18"/>
-          <p:cNvSpPr/>
-          <p:nvPr/>
-        </p:nvSpPr>
-        <p:spPr>
-          <a:xfrm>
-            <a:off x="3429000" y="3511296"/>
-            <a:ext cx="5074920" cy="0"/>
-          </a:xfrm>
-          <a:prstGeom prst="line">
-            <a:avLst/>
-          </a:prstGeom>
-          <a:noFill/>
-          <a:ln w="9525">
-            <a:solidFill>
-              <a:srgbClr val="BFBFBF"/>
-            </a:solidFill>
-            <a:prstDash val="solid"/>
-          </a:ln>
-        </p:spPr>
+            <a:off x="3429000" y="3520440"/>
+            <a:ext cx="5074920" cy="256032"/>
+          </a:xfrm>
+          <a:prstGeom prst="rect">
+            <a:avLst/>
+          </a:prstGeom>
+          <a:noFill/>
+          <a:ln/>
+        </p:spPr>
+        <p:txBody>
+          <a:bodyPr wrap="square" lIns="0" tIns="0" rIns="0" bIns="0" rtlCol="0" anchor="t"/>
+          <a:lstStyle/>
+          <a:p>
+            <a:pPr algn="l" indent="0" marL="0">
+              <a:lnSpc>
+                <a:spcPct val="115000"/>
+              </a:lnSpc>
+              <a:buNone/>
+            </a:pPr>
+            <a:r>
+              <a:rPr lang="en-US" sz="950" dirty="0">
+                <a:solidFill>
+                  <a:srgbClr val="4D4D4D"/>
+                </a:solidFill>
+                <a:latin typeface="Meiryo" pitchFamily="34" charset="0"/>
+                <a:ea typeface="Meiryo" pitchFamily="34" charset="-122"/>
+                <a:cs typeface="Meiryo" pitchFamily="34" charset="-120"/>
+              </a:rPr>
+              <a:t>本日の流れ：課題 → 解決策 → 収益の仕組み → 競合 → 組織 → 計画 → リスク</a:t>
+            </a:r>
+            <a:endParaRPr lang="en-US" sz="950" dirty="0"/>
+          </a:p>
+        </p:txBody>
       </p:sp>
       <p:sp>
         <p:nvSpPr>
           <p:cNvPr id="23" name="Text 19"/>
-          <p:cNvSpPr txBox="1"/>
-          <p:nvPr/>
-        </p:nvSpPr>
-        <p:spPr>
-          <a:xfrm>
-            <a:off x="3429000" y="3511296"/>
-            <a:ext cx="685800" cy="420624"/>
-          </a:xfrm>
-          <a:prstGeom prst="rect">
-            <a:avLst/>
-          </a:prstGeom>
-          <a:noFill/>
-          <a:ln/>
-        </p:spPr>
-        <p:txBody>
-          <a:bodyPr wrap="square" lIns="0" tIns="0" rIns="0" bIns="0" rtlCol="0" anchor="ctr"/>
-          <a:lstStyle/>
-          <a:p>
-            <a:pPr algn="l" indent="0" marL="0">
-              <a:lnSpc>
-                <a:spcPct val="115000"/>
-              </a:lnSpc>
-              <a:buNone/>
-            </a:pPr>
-            <a:r>
-              <a:rPr lang="en-US" sz="1050" b="1" dirty="0">
-                <a:solidFill>
-                  <a:srgbClr val="1A1A1A"/>
-                </a:solidFill>
-                <a:latin typeface="Meiryo" pitchFamily="34" charset="0"/>
-                <a:ea typeface="Meiryo" pitchFamily="34" charset="-122"/>
-                <a:cs typeface="Meiryo" pitchFamily="34" charset="-120"/>
-              </a:rPr>
-              <a:t>⑤ 課題</a:t>
-            </a:r>
-            <a:endParaRPr lang="en-US" sz="1050" dirty="0"/>
-          </a:p>
-        </p:txBody>
-      </p:sp>
-      <p:sp>
-        <p:nvSpPr>
-          <p:cNvPr id="24" name="Text 20"/>
-          <p:cNvSpPr txBox="1"/>
-          <p:nvPr/>
-        </p:nvSpPr>
-        <p:spPr>
-          <a:xfrm>
-            <a:off x="4114800" y="3511296"/>
-            <a:ext cx="4389120" cy="420624"/>
-          </a:xfrm>
-          <a:prstGeom prst="rect">
-            <a:avLst/>
-          </a:prstGeom>
-          <a:noFill/>
-          <a:ln/>
-        </p:spPr>
-        <p:txBody>
-          <a:bodyPr wrap="square" lIns="0" tIns="0" rIns="0" bIns="0" rtlCol="0" anchor="ctr"/>
-          <a:lstStyle/>
-          <a:p>
-            <a:pPr algn="l" indent="0" marL="0">
-              <a:lnSpc>
-                <a:spcPct val="115000"/>
-              </a:lnSpc>
-              <a:buNone/>
-            </a:pPr>
-            <a:r>
-              <a:rPr lang="en-US" sz="1050" dirty="0">
-                <a:solidFill>
-                  <a:srgbClr val="1A1A1A"/>
-                </a:solidFill>
-                <a:latin typeface="Meiryo" pitchFamily="34" charset="0"/>
-                <a:ea typeface="Meiryo" pitchFamily="34" charset="-122"/>
-                <a:cs typeface="Meiryo" pitchFamily="34" charset="-120"/>
-              </a:rPr>
-              <a:t>準備期＝創業者依存と製造知見　中期＝受託化と採用　後期＝大手参入</a:t>
-            </a:r>
-            <a:endParaRPr lang="en-US" sz="1050" dirty="0"/>
-          </a:p>
-        </p:txBody>
-      </p:sp>
-      <p:sp>
-        <p:nvSpPr>
-          <p:cNvPr id="25" name="Shape 21"/>
-          <p:cNvSpPr/>
-          <p:nvPr/>
-        </p:nvSpPr>
-        <p:spPr>
-          <a:xfrm>
-            <a:off x="3429000" y="3931920"/>
-            <a:ext cx="5074920" cy="0"/>
-          </a:xfrm>
-          <a:prstGeom prst="line">
-            <a:avLst/>
-          </a:prstGeom>
-          <a:noFill/>
-          <a:ln w="9525">
-            <a:solidFill>
-              <a:srgbClr val="BFBFBF"/>
-            </a:solidFill>
-            <a:prstDash val="solid"/>
-          </a:ln>
-        </p:spPr>
-      </p:sp>
-      <p:sp>
-        <p:nvSpPr>
-          <p:cNvPr id="26" name="Text 22"/>
           <p:cNvSpPr txBox="1"/>
           <p:nvPr/>
         </p:nvSpPr>
@@ -4229,7 +4209,7 @@
                 <a:ea typeface="Meiryo" pitchFamily="34" charset="-122"/>
                 <a:cs typeface="Meiryo" pitchFamily="34" charset="-120"/>
               </a:rPr>
-              <a:t>設問③　経営理念 ─ 現場の勘を、次の担い手へ</a:t>
+              <a:t>設問①　課題 ─ 熟練者の勘が、記録に残らないまま消えていく</a:t>
             </a:r>
             <a:endParaRPr lang="en-US" sz="2000" dirty="0"/>
           </a:p>
@@ -4271,7 +4251,7 @@
                 <a:ea typeface="Meiryo" pitchFamily="34" charset="-122"/>
                 <a:cs typeface="Meiryo" pitchFamily="34" charset="-120"/>
               </a:rPr>
-              <a:t>存在意義・使命・5年後の姿・行動指針を一本の言葉から組み立てる</a:t>
+              <a:t>担い手は高齢化して減っているのに、技能継承にデジタルを使う企業は2割にとどまる</a:t>
             </a:r>
             <a:endParaRPr lang="en-US" sz="1200" dirty="0"/>
           </a:p>
@@ -4279,58 +4259,34 @@
       </p:sp>
       <p:sp>
         <p:nvSpPr>
-          <p:cNvPr id="5" name="purpose-band"/>
+          <p:cNvPr id="5" name="example"/>
           <p:cNvSpPr/>
           <p:nvPr/>
         </p:nvSpPr>
         <p:spPr>
           <a:xfrm>
-            <a:off x="365760" y="1024128"/>
-            <a:ext cx="8412480" cy="914400"/>
+            <a:off x="365760" y="1051560"/>
+            <a:ext cx="4343400" cy="1188720"/>
           </a:xfrm>
           <a:prstGeom prst="rect">
             <a:avLst/>
           </a:prstGeom>
           <a:solidFill>
-            <a:srgbClr val="1A1A1A"/>
+            <a:srgbClr val="F2F2F2"/>
           </a:solidFill>
           <a:ln/>
         </p:spPr>
       </p:sp>
-      <p:pic>
-        <p:nvPicPr>
-          <p:cNvPr id="6" name="Image 0" descr="preencoded.png">    </p:cNvPr>
-          <p:cNvPicPr>
-            <a:picLocks noChangeAspect="1"/>
-          </p:cNvPicPr>
-          <p:nvPr/>
-        </p:nvPicPr>
-        <p:blipFill>
-          <a:blip r:embed="rId1"/>
-          <a:stretch>
-            <a:fillRect/>
-          </a:stretch>
-        </p:blipFill>
-        <p:spPr>
-          <a:xfrm>
-            <a:off x="640080" y="1133856"/>
-            <a:ext cx="694944" cy="694944"/>
-          </a:xfrm>
-          <a:prstGeom prst="rect">
-            <a:avLst/>
-          </a:prstGeom>
-        </p:spPr>
-      </p:pic>
-      <p:sp>
-        <p:nvSpPr>
-          <p:cNvPr id="7" name="Text 3"/>
+      <p:sp>
+        <p:nvSpPr>
+          <p:cNvPr id="6" name="Text 3"/>
           <p:cNvSpPr txBox="1"/>
           <p:nvPr/>
         </p:nvSpPr>
         <p:spPr>
           <a:xfrm>
-            <a:off x="1600200" y="1097280"/>
-            <a:ext cx="6949440" cy="219456"/>
+            <a:off x="502920" y="1124712"/>
+            <a:ext cx="4069080" cy="256032"/>
           </a:xfrm>
           <a:prstGeom prst="rect">
             <a:avLst/>
@@ -4349,77 +4305,381 @@
               <a:buNone/>
             </a:pPr>
             <a:r>
-              <a:rPr lang="en-US" sz="950" b="1" dirty="0">
-                <a:solidFill>
-                  <a:srgbClr val="FFFFFF"/>
-                </a:solidFill>
-                <a:latin typeface="Meiryo" pitchFamily="34" charset="0"/>
-                <a:ea typeface="Meiryo" pitchFamily="34" charset="-122"/>
-                <a:cs typeface="Meiryo" pitchFamily="34" charset="-120"/>
-              </a:rPr>
-              <a:t>PURPOSE　存在意義</a:t>
-            </a:r>
-            <a:endParaRPr lang="en-US" sz="950" dirty="0"/>
-          </a:p>
-        </p:txBody>
-      </p:sp>
-      <p:sp>
-        <p:nvSpPr>
-          <p:cNvPr id="8" name="Text 4"/>
+              <a:rPr lang="en-US" sz="1100" b="1" dirty="0">
+                <a:solidFill>
+                  <a:srgbClr val="1A1A1A"/>
+                </a:solidFill>
+                <a:latin typeface="Meiryo" pitchFamily="34" charset="0"/>
+                <a:ea typeface="Meiryo" pitchFamily="34" charset="-122"/>
+                <a:cs typeface="Meiryo" pitchFamily="34" charset="-120"/>
+              </a:rPr>
+              <a:t>例：電線の押出ラインで外径が振れたとき</a:t>
+            </a:r>
+            <a:endParaRPr lang="en-US" sz="1100" dirty="0"/>
+          </a:p>
+        </p:txBody>
+      </p:sp>
+      <p:sp>
+        <p:nvSpPr>
+          <p:cNvPr id="7" name="Text 4"/>
           <p:cNvSpPr txBox="1"/>
           <p:nvPr/>
         </p:nvSpPr>
         <p:spPr>
           <a:xfrm>
-            <a:off x="1600200" y="1298448"/>
-            <a:ext cx="6949440" cy="566928"/>
-          </a:xfrm>
-          <a:prstGeom prst="rect">
-            <a:avLst/>
-          </a:prstGeom>
-          <a:noFill/>
-          <a:ln/>
-        </p:spPr>
-        <p:txBody>
-          <a:bodyPr wrap="square" lIns="0" tIns="0" rIns="0" bIns="0" rtlCol="0" anchor="ctr"/>
-          <a:lstStyle/>
-          <a:p>
-            <a:pPr algn="l" indent="0" marL="0">
-              <a:lnSpc>
-                <a:spcPct val="115000"/>
-              </a:lnSpc>
-              <a:buNone/>
-            </a:pPr>
-            <a:r>
-              <a:rPr lang="en-US" sz="3000" b="1" dirty="0">
-                <a:solidFill>
-                  <a:srgbClr val="FFFFFF"/>
-                </a:solidFill>
-                <a:latin typeface="Meiryo" pitchFamily="34" charset="0"/>
-                <a:ea typeface="Meiryo" pitchFamily="34" charset="-122"/>
-                <a:cs typeface="Meiryo" pitchFamily="34" charset="-120"/>
-              </a:rPr>
-              <a:t>現場の勘を、次の担い手へ。</a:t>
-            </a:r>
-            <a:endParaRPr lang="en-US" sz="3000" dirty="0"/>
-          </a:p>
-        </p:txBody>
-      </p:sp>
-      <p:sp>
-        <p:nvSpPr>
-          <p:cNvPr id="9" name="Shape 5"/>
+            <a:off x="502920" y="1435608"/>
+            <a:ext cx="4069080" cy="749808"/>
+          </a:xfrm>
+          <a:prstGeom prst="rect">
+            <a:avLst/>
+          </a:prstGeom>
+          <a:noFill/>
+          <a:ln/>
+        </p:spPr>
+        <p:txBody>
+          <a:bodyPr wrap="square" lIns="0" tIns="0" rIns="0" bIns="0" rtlCol="0" anchor="t"/>
+          <a:lstStyle/>
+          <a:p>
+            <a:pPr algn="l" indent="0" marL="0">
+              <a:lnSpc>
+                <a:spcPct val="115000"/>
+              </a:lnSpc>
+              <a:spcAft>
+                <a:spcPts val="300"/>
+              </a:spcAft>
+              <a:buNone/>
+            </a:pPr>
+            <a:r>
+              <a:rPr lang="en-US" sz="1000" b="1" dirty="0">
+                <a:solidFill>
+                  <a:srgbClr val="1A1A1A"/>
+                </a:solidFill>
+                <a:latin typeface="Meiryo" pitchFamily="34" charset="0"/>
+                <a:ea typeface="Meiryo" pitchFamily="34" charset="-122"/>
+                <a:cs typeface="Meiryo" pitchFamily="34" charset="-120"/>
+              </a:rPr>
+              <a:t>熟練者</a:t>
+            </a:r>
+            <a:pPr algn="l" indent="0" marL="0">
+              <a:lnSpc>
+                <a:spcPct val="115000"/>
+              </a:lnSpc>
+              <a:spcAft>
+                <a:spcPts val="300"/>
+              </a:spcAft>
+              <a:buNone/>
+            </a:pPr>
+            <a:r>
+              <a:rPr lang="en-US" sz="1000" dirty="0">
+                <a:solidFill>
+                  <a:srgbClr val="1A1A1A"/>
+                </a:solidFill>
+                <a:latin typeface="Meiryo" pitchFamily="34" charset="0"/>
+                <a:ea typeface="Meiryo" pitchFamily="34" charset="-122"/>
+                <a:cs typeface="Meiryo" pitchFamily="34" charset="-120"/>
+              </a:rPr>
+              <a:t>　音と湿度を見て、押出温度を少し下げて立て直す</a:t>
+            </a:r>
+            <a:endParaRPr lang="en-US" sz="1000" dirty="0"/>
+          </a:p>
+          <a:p>
+            <a:pPr algn="l" indent="0" marL="0">
+              <a:lnSpc>
+                <a:spcPct val="115000"/>
+              </a:lnSpc>
+              <a:spcAft>
+                <a:spcPts val="300"/>
+              </a:spcAft>
+              <a:buNone/>
+            </a:pPr>
+            <a:r>
+              <a:rPr lang="en-US" sz="1000" b="1" dirty="0">
+                <a:solidFill>
+                  <a:srgbClr val="1A1A1A"/>
+                </a:solidFill>
+                <a:latin typeface="Meiryo" pitchFamily="34" charset="0"/>
+                <a:ea typeface="Meiryo" pitchFamily="34" charset="-122"/>
+                <a:cs typeface="Meiryo" pitchFamily="34" charset="-120"/>
+              </a:rPr>
+              <a:t>手順書</a:t>
+            </a:r>
+            <a:pPr algn="l" indent="0" marL="0">
+              <a:lnSpc>
+                <a:spcPct val="115000"/>
+              </a:lnSpc>
+              <a:spcAft>
+                <a:spcPts val="300"/>
+              </a:spcAft>
+              <a:buNone/>
+            </a:pPr>
+            <a:r>
+              <a:rPr lang="en-US" sz="1000" dirty="0">
+                <a:solidFill>
+                  <a:srgbClr val="1A1A1A"/>
+                </a:solidFill>
+                <a:latin typeface="Meiryo" pitchFamily="34" charset="0"/>
+                <a:ea typeface="Meiryo" pitchFamily="34" charset="-122"/>
+                <a:cs typeface="Meiryo" pitchFamily="34" charset="-120"/>
+              </a:rPr>
+              <a:t>　この判断は書かれていない</a:t>
+            </a:r>
+            <a:endParaRPr lang="en-US" sz="1000" dirty="0"/>
+          </a:p>
+          <a:p>
+            <a:pPr algn="l" indent="0" marL="0">
+              <a:lnSpc>
+                <a:spcPct val="115000"/>
+              </a:lnSpc>
+              <a:spcAft>
+                <a:spcPts val="300"/>
+              </a:spcAft>
+              <a:buNone/>
+            </a:pPr>
+            <a:r>
+              <a:rPr lang="en-US" sz="1000" b="1" dirty="0">
+                <a:solidFill>
+                  <a:srgbClr val="1A1A1A"/>
+                </a:solidFill>
+                <a:latin typeface="Meiryo" pitchFamily="34" charset="0"/>
+                <a:ea typeface="Meiryo" pitchFamily="34" charset="-122"/>
+                <a:cs typeface="Meiryo" pitchFamily="34" charset="-120"/>
+              </a:rPr>
+              <a:t>退職後</a:t>
+            </a:r>
+            <a:pPr algn="l" indent="0" marL="0">
+              <a:lnSpc>
+                <a:spcPct val="115000"/>
+              </a:lnSpc>
+              <a:spcAft>
+                <a:spcPts val="300"/>
+              </a:spcAft>
+              <a:buNone/>
+            </a:pPr>
+            <a:r>
+              <a:rPr lang="en-US" sz="1000" dirty="0">
+                <a:solidFill>
+                  <a:srgbClr val="1A1A1A"/>
+                </a:solidFill>
+                <a:latin typeface="Meiryo" pitchFamily="34" charset="0"/>
+                <a:ea typeface="Meiryo" pitchFamily="34" charset="-122"/>
+                <a:cs typeface="Meiryo" pitchFamily="34" charset="-120"/>
+              </a:rPr>
+              <a:t>　若手は原因が分からず、ラインを止めて不良を出す</a:t>
+            </a:r>
+            <a:endParaRPr lang="en-US" sz="1000" dirty="0"/>
+          </a:p>
+        </p:txBody>
+      </p:sp>
+      <p:sp>
+        <p:nvSpPr>
+          <p:cNvPr id="8" name="Text 5"/>
+          <p:cNvSpPr txBox="1"/>
+          <p:nvPr/>
+        </p:nvSpPr>
+        <p:spPr>
+          <a:xfrm>
+            <a:off x="365760" y="2514600"/>
+            <a:ext cx="4343400" cy="256032"/>
+          </a:xfrm>
+          <a:prstGeom prst="rect">
+            <a:avLst/>
+          </a:prstGeom>
+          <a:noFill/>
+          <a:ln/>
+        </p:spPr>
+        <p:txBody>
+          <a:bodyPr wrap="square" lIns="0" tIns="0" rIns="0" bIns="0" rtlCol="0" anchor="t"/>
+          <a:lstStyle/>
+          <a:p>
+            <a:pPr algn="l" indent="0" marL="0">
+              <a:lnSpc>
+                <a:spcPct val="115000"/>
+              </a:lnSpc>
+              <a:buNone/>
+            </a:pPr>
+            <a:r>
+              <a:rPr lang="en-US" sz="1200" b="1" dirty="0">
+                <a:solidFill>
+                  <a:srgbClr val="1A1A1A"/>
+                </a:solidFill>
+                <a:latin typeface="Meiryo" pitchFamily="34" charset="0"/>
+                <a:ea typeface="Meiryo" pitchFamily="34" charset="-122"/>
+                <a:cs typeface="Meiryo" pitchFamily="34" charset="-120"/>
+              </a:rPr>
+              <a:t>なぜ自分が取り組むのか</a:t>
+            </a:r>
+            <a:endParaRPr lang="en-US" sz="1200" dirty="0"/>
+          </a:p>
+        </p:txBody>
+      </p:sp>
+      <p:sp>
+        <p:nvSpPr>
+          <p:cNvPr id="9" name="Text 6"/>
+          <p:cNvSpPr txBox="1"/>
+          <p:nvPr/>
+        </p:nvSpPr>
+        <p:spPr>
+          <a:xfrm>
+            <a:off x="365760" y="2788920"/>
+            <a:ext cx="4343400" cy="1371600"/>
+          </a:xfrm>
+          <a:prstGeom prst="rect">
+            <a:avLst/>
+          </a:prstGeom>
+          <a:noFill/>
+          <a:ln/>
+        </p:spPr>
+        <p:txBody>
+          <a:bodyPr wrap="square" lIns="0" tIns="0" rIns="0" bIns="0" rtlCol="0" anchor="t"/>
+          <a:lstStyle/>
+          <a:p>
+            <a:pPr algn="l" indent="0" marL="0">
+              <a:lnSpc>
+                <a:spcPct val="115000"/>
+              </a:lnSpc>
+              <a:spcAft>
+                <a:spcPts val="400"/>
+              </a:spcAft>
+              <a:buNone/>
+            </a:pPr>
+            <a:r>
+              <a:rPr lang="en-US" sz="1000" b="1" dirty="0">
+                <a:solidFill>
+                  <a:srgbClr val="1A1A1A"/>
+                </a:solidFill>
+                <a:latin typeface="Meiryo" pitchFamily="34" charset="0"/>
+                <a:ea typeface="Meiryo" pitchFamily="34" charset="-122"/>
+                <a:cs typeface="Meiryo" pitchFamily="34" charset="-120"/>
+              </a:rPr>
+              <a:t>現場を知っている：</a:t>
+            </a:r>
+            <a:pPr algn="l" indent="0" marL="0">
+              <a:lnSpc>
+                <a:spcPct val="115000"/>
+              </a:lnSpc>
+              <a:spcAft>
+                <a:spcPts val="400"/>
+              </a:spcAft>
+              <a:buNone/>
+            </a:pPr>
+            <a:r>
+              <a:rPr lang="en-US" sz="1000" dirty="0">
+                <a:solidFill>
+                  <a:srgbClr val="1A1A1A"/>
+                </a:solidFill>
+                <a:latin typeface="Meiryo" pitchFamily="34" charset="0"/>
+                <a:ea typeface="Meiryo" pitchFamily="34" charset="-122"/>
+                <a:cs typeface="Meiryo" pitchFamily="34" charset="-120"/>
+              </a:rPr>
+              <a:t>66kV／275kV 地中送電線の施工管理5年。製品が使われる現場の不具合と試験値を実地で把握</a:t>
+            </a:r>
+            <a:endParaRPr lang="en-US" sz="1000" dirty="0"/>
+          </a:p>
+          <a:p>
+            <a:pPr algn="l" indent="0" marL="0">
+              <a:lnSpc>
+                <a:spcPct val="115000"/>
+              </a:lnSpc>
+              <a:spcAft>
+                <a:spcPts val="400"/>
+              </a:spcAft>
+              <a:buNone/>
+            </a:pPr>
+            <a:r>
+              <a:rPr lang="en-US" sz="1000" b="1" dirty="0">
+                <a:solidFill>
+                  <a:srgbClr val="1A1A1A"/>
+                </a:solidFill>
+                <a:latin typeface="Meiryo" pitchFamily="34" charset="0"/>
+                <a:ea typeface="Meiryo" pitchFamily="34" charset="-122"/>
+                <a:cs typeface="Meiryo" pitchFamily="34" charset="-120"/>
+              </a:rPr>
+              <a:t>仕組みを作れる：</a:t>
+            </a:r>
+            <a:pPr algn="l" indent="0" marL="0">
+              <a:lnSpc>
+                <a:spcPct val="115000"/>
+              </a:lnSpc>
+              <a:spcAft>
+                <a:spcPts val="400"/>
+              </a:spcAft>
+              <a:buNone/>
+            </a:pPr>
+            <a:r>
+              <a:rPr lang="en-US" sz="1000" dirty="0">
+                <a:solidFill>
+                  <a:srgbClr val="1A1A1A"/>
+                </a:solidFill>
+                <a:latin typeface="Meiryo" pitchFamily="34" charset="0"/>
+                <a:ea typeface="Meiryo" pitchFamily="34" charset="-122"/>
+                <a:cs typeface="Meiryo" pitchFamily="34" charset="-120"/>
+              </a:rPr>
+              <a:t>Python・Power BI・FastAPI・Docker・LangChain・RAG を独学し業務に実装</a:t>
+            </a:r>
+            <a:endParaRPr lang="en-US" sz="1000" dirty="0"/>
+          </a:p>
+          <a:p>
+            <a:pPr algn="l" indent="0" marL="0">
+              <a:lnSpc>
+                <a:spcPct val="115000"/>
+              </a:lnSpc>
+              <a:spcAft>
+                <a:spcPts val="400"/>
+              </a:spcAft>
+              <a:buNone/>
+            </a:pPr>
+            <a:r>
+              <a:rPr lang="en-US" sz="1000" b="1" dirty="0">
+                <a:solidFill>
+                  <a:srgbClr val="1A1A1A"/>
+                </a:solidFill>
+                <a:latin typeface="Meiryo" pitchFamily="34" charset="0"/>
+                <a:ea typeface="Meiryo" pitchFamily="34" charset="-122"/>
+                <a:cs typeface="Meiryo" pitchFamily="34" charset="-120"/>
+              </a:rPr>
+              <a:t>資格：</a:t>
+            </a:r>
+            <a:pPr algn="l" indent="0" marL="0">
+              <a:lnSpc>
+                <a:spcPct val="115000"/>
+              </a:lnSpc>
+              <a:spcAft>
+                <a:spcPts val="400"/>
+              </a:spcAft>
+              <a:buNone/>
+            </a:pPr>
+            <a:r>
+              <a:rPr lang="en-US" sz="1000" dirty="0">
+                <a:solidFill>
+                  <a:srgbClr val="1A1A1A"/>
+                </a:solidFill>
+                <a:latin typeface="Meiryo" pitchFamily="34" charset="0"/>
+                <a:ea typeface="Meiryo" pitchFamily="34" charset="-122"/>
+                <a:cs typeface="Meiryo" pitchFamily="34" charset="-120"/>
+              </a:rPr>
+              <a:t>1級電気工事施工管理技士・G検定</a:t>
+            </a:r>
+            <a:endParaRPr lang="en-US" sz="1000" dirty="0"/>
+          </a:p>
+        </p:txBody>
+      </p:sp>
+      <p:sp>
+        <p:nvSpPr>
+          <p:cNvPr id="10" name="stat-0"/>
           <p:cNvSpPr/>
           <p:nvPr/>
         </p:nvSpPr>
         <p:spPr>
           <a:xfrm>
-            <a:off x="365760" y="2057400"/>
-            <a:ext cx="8412480" cy="0"/>
-          </a:xfrm>
-          <a:prstGeom prst="line">
-            <a:avLst/>
-          </a:prstGeom>
-          <a:noFill/>
+            <a:off x="4937760" y="1051560"/>
+            <a:ext cx="1874520" cy="1481328"/>
+          </a:xfrm>
+          <a:prstGeom prst="rect">
+            <a:avLst/>
+          </a:prstGeom>
+          <a:solidFill>
+            <a:srgbClr val="FFFFFF"/>
+          </a:solidFill>
           <a:ln w="9525">
             <a:solidFill>
               <a:srgbClr val="BFBFBF"/>
@@ -4430,14 +4690,14 @@
       </p:sp>
       <p:sp>
         <p:nvSpPr>
-          <p:cNvPr id="10" name="Text 6"/>
+          <p:cNvPr id="11" name="Text 8"/>
           <p:cNvSpPr txBox="1"/>
           <p:nvPr/>
         </p:nvSpPr>
         <p:spPr>
           <a:xfrm>
-            <a:off x="365760" y="2093976"/>
-            <a:ext cx="1371600" cy="384048"/>
+            <a:off x="5047488" y="1188720"/>
+            <a:ext cx="1655064" cy="457200"/>
           </a:xfrm>
           <a:prstGeom prst="rect">
             <a:avLst/>
@@ -4456,7 +4716,7 @@
               <a:buNone/>
             </a:pPr>
             <a:r>
-              <a:rPr lang="en-US" sz="1050" b="1" dirty="0">
+              <a:rPr lang="en-US" sz="2000" b="1" dirty="0">
                 <a:solidFill>
                   <a:srgbClr val="1A1A1A"/>
                 </a:solidFill>
@@ -4464,61 +4724,41 @@
                 <a:ea typeface="Meiryo" pitchFamily="34" charset="-122"/>
                 <a:cs typeface="Meiryo" pitchFamily="34" charset="-120"/>
               </a:rPr>
-              <a:t>MISSION</a:t>
-            </a:r>
-            <a:endParaRPr lang="en-US" sz="1400" dirty="0"/>
-          </a:p>
-          <a:p>
-            <a:pPr algn="l" indent="0" marL="0">
-              <a:lnSpc>
-                <a:spcPct val="115000"/>
-              </a:lnSpc>
-              <a:buNone/>
-            </a:pPr>
-            <a:r>
-              <a:rPr lang="en-US" sz="850" dirty="0">
-                <a:solidFill>
-                  <a:srgbClr val="4D4D4D"/>
-                </a:solidFill>
-                <a:latin typeface="Meiryo" pitchFamily="34" charset="0"/>
-                <a:ea typeface="Meiryo" pitchFamily="34" charset="-122"/>
-                <a:cs typeface="Meiryo" pitchFamily="34" charset="-120"/>
-              </a:rPr>
-              <a:t>使命</a:t>
-            </a:r>
-            <a:endParaRPr lang="en-US" sz="1400" dirty="0"/>
-          </a:p>
-        </p:txBody>
-      </p:sp>
-      <p:sp>
-        <p:nvSpPr>
-          <p:cNvPr id="11" name="Text 7"/>
+              <a:t>36.7%</a:t>
+            </a:r>
+            <a:endParaRPr lang="en-US" sz="2000" dirty="0"/>
+          </a:p>
+        </p:txBody>
+      </p:sp>
+      <p:sp>
+        <p:nvSpPr>
+          <p:cNvPr id="12" name="Text 9"/>
           <p:cNvSpPr txBox="1"/>
           <p:nvPr/>
         </p:nvSpPr>
         <p:spPr>
           <a:xfrm>
-            <a:off x="1828800" y="2093976"/>
-            <a:ext cx="6949440" cy="384048"/>
-          </a:xfrm>
-          <a:prstGeom prst="rect">
-            <a:avLst/>
-          </a:prstGeom>
-          <a:noFill/>
-          <a:ln/>
-        </p:spPr>
-        <p:txBody>
-          <a:bodyPr wrap="square" lIns="0" tIns="0" rIns="0" bIns="0" rtlCol="0" anchor="ctr"/>
-          <a:lstStyle/>
-          <a:p>
-            <a:pPr algn="l" indent="0" marL="0">
-              <a:lnSpc>
-                <a:spcPct val="115000"/>
-              </a:lnSpc>
-              <a:buNone/>
-            </a:pPr>
-            <a:r>
-              <a:rPr lang="en-US" sz="1050" dirty="0">
+            <a:off x="5047488" y="1737360"/>
+            <a:ext cx="1655064" cy="731520"/>
+          </a:xfrm>
+          <a:prstGeom prst="rect">
+            <a:avLst/>
+          </a:prstGeom>
+          <a:noFill/>
+          <a:ln/>
+        </p:spPr>
+        <p:txBody>
+          <a:bodyPr wrap="square" lIns="0" tIns="0" rIns="0" bIns="0" rtlCol="0" anchor="t"/>
+          <a:lstStyle/>
+          <a:p>
+            <a:pPr algn="l" indent="0" marL="0">
+              <a:lnSpc>
+                <a:spcPct val="115000"/>
+              </a:lnSpc>
+              <a:buNone/>
+            </a:pPr>
+            <a:r>
+              <a:rPr lang="en-US" sz="950" dirty="0">
                 <a:solidFill>
                   <a:srgbClr val="1A1A1A"/>
                 </a:solidFill>
@@ -4526,27 +4766,29 @@
                 <a:ea typeface="Meiryo" pitchFamily="34" charset="-122"/>
                 <a:cs typeface="Meiryo" pitchFamily="34" charset="-120"/>
               </a:rPr>
-              <a:t>現場・現物・現実の一次情報をデータとAIで引き継ぎ、人が減っても迷わず回る現場をつくる</a:t>
-            </a:r>
-            <a:endParaRPr lang="en-US" sz="1050" dirty="0"/>
-          </a:p>
-        </p:txBody>
-      </p:sp>
-      <p:sp>
-        <p:nvSpPr>
-          <p:cNvPr id="12" name="Shape 8"/>
+              <a:t>建設業就業者のうち55歳以上（29歳以下は11.7%）</a:t>
+            </a:r>
+            <a:endParaRPr lang="en-US" sz="950" dirty="0"/>
+          </a:p>
+        </p:txBody>
+      </p:sp>
+      <p:sp>
+        <p:nvSpPr>
+          <p:cNvPr id="13" name="stat-1"/>
           <p:cNvSpPr/>
           <p:nvPr/>
         </p:nvSpPr>
         <p:spPr>
           <a:xfrm>
-            <a:off x="365760" y="2487168"/>
-            <a:ext cx="8412480" cy="0"/>
-          </a:xfrm>
-          <a:prstGeom prst="line">
-            <a:avLst/>
-          </a:prstGeom>
-          <a:noFill/>
+            <a:off x="6903720" y="1051560"/>
+            <a:ext cx="1874520" cy="1481328"/>
+          </a:xfrm>
+          <a:prstGeom prst="rect">
+            <a:avLst/>
+          </a:prstGeom>
+          <a:solidFill>
+            <a:srgbClr val="FFFFFF"/>
+          </a:solidFill>
           <a:ln w="9525">
             <a:solidFill>
               <a:srgbClr val="BFBFBF"/>
@@ -4557,14 +4799,14 @@
       </p:sp>
       <p:sp>
         <p:nvSpPr>
-          <p:cNvPr id="13" name="Text 9"/>
+          <p:cNvPr id="14" name="Text 11"/>
           <p:cNvSpPr txBox="1"/>
           <p:nvPr/>
         </p:nvSpPr>
         <p:spPr>
           <a:xfrm>
-            <a:off x="365760" y="2523744"/>
-            <a:ext cx="1371600" cy="384048"/>
+            <a:off x="7013448" y="1188720"/>
+            <a:ext cx="1655064" cy="457200"/>
           </a:xfrm>
           <a:prstGeom prst="rect">
             <a:avLst/>
@@ -4583,7 +4825,7 @@
               <a:buNone/>
             </a:pPr>
             <a:r>
-              <a:rPr lang="en-US" sz="1050" b="1" dirty="0">
+              <a:rPr lang="en-US" sz="2000" b="1" dirty="0">
                 <a:solidFill>
                   <a:srgbClr val="1A1A1A"/>
                 </a:solidFill>
@@ -4591,61 +4833,41 @@
                 <a:ea typeface="Meiryo" pitchFamily="34" charset="-122"/>
                 <a:cs typeface="Meiryo" pitchFamily="34" charset="-120"/>
               </a:rPr>
-              <a:t>VISION</a:t>
-            </a:r>
-            <a:endParaRPr lang="en-US" sz="1400" dirty="0"/>
-          </a:p>
-          <a:p>
-            <a:pPr algn="l" indent="0" marL="0">
-              <a:lnSpc>
-                <a:spcPct val="115000"/>
-              </a:lnSpc>
-              <a:buNone/>
-            </a:pPr>
-            <a:r>
-              <a:rPr lang="en-US" sz="850" dirty="0">
-                <a:solidFill>
-                  <a:srgbClr val="4D4D4D"/>
-                </a:solidFill>
-                <a:latin typeface="Meiryo" pitchFamily="34" charset="0"/>
-                <a:ea typeface="Meiryo" pitchFamily="34" charset="-122"/>
-                <a:cs typeface="Meiryo" pitchFamily="34" charset="-120"/>
-              </a:rPr>
-              <a:t>5年後の姿</a:t>
-            </a:r>
-            <a:endParaRPr lang="en-US" sz="1400" dirty="0"/>
-          </a:p>
-        </p:txBody>
-      </p:sp>
-      <p:sp>
-        <p:nvSpPr>
-          <p:cNvPr id="14" name="Text 10"/>
+              <a:t>1,033万人</a:t>
+            </a:r>
+            <a:endParaRPr lang="en-US" sz="2000" dirty="0"/>
+          </a:p>
+        </p:txBody>
+      </p:sp>
+      <p:sp>
+        <p:nvSpPr>
+          <p:cNvPr id="15" name="Text 12"/>
           <p:cNvSpPr txBox="1"/>
           <p:nvPr/>
         </p:nvSpPr>
         <p:spPr>
           <a:xfrm>
-            <a:off x="1828800" y="2523744"/>
-            <a:ext cx="6949440" cy="384048"/>
-          </a:xfrm>
-          <a:prstGeom prst="rect">
-            <a:avLst/>
-          </a:prstGeom>
-          <a:noFill/>
-          <a:ln/>
-        </p:spPr>
-        <p:txBody>
-          <a:bodyPr wrap="square" lIns="0" tIns="0" rIns="0" bIns="0" rtlCol="0" anchor="ctr"/>
-          <a:lstStyle/>
-          <a:p>
-            <a:pPr algn="l" indent="0" marL="0">
-              <a:lnSpc>
-                <a:spcPct val="115000"/>
-              </a:lnSpc>
-              <a:buNone/>
-            </a:pPr>
-            <a:r>
-              <a:rPr lang="en-US" sz="1050" dirty="0">
+            <a:off x="7013448" y="1737360"/>
+            <a:ext cx="1655064" cy="731520"/>
+          </a:xfrm>
+          <a:prstGeom prst="rect">
+            <a:avLst/>
+          </a:prstGeom>
+          <a:noFill/>
+          <a:ln/>
+        </p:spPr>
+        <p:txBody>
+          <a:bodyPr wrap="square" lIns="0" tIns="0" rIns="0" bIns="0" rtlCol="0" anchor="t"/>
+          <a:lstStyle/>
+          <a:p>
+            <a:pPr algn="l" indent="0" marL="0">
+              <a:lnSpc>
+                <a:spcPct val="115000"/>
+              </a:lnSpc>
+              <a:buNone/>
+            </a:pPr>
+            <a:r>
+              <a:rPr lang="en-US" sz="950" dirty="0">
                 <a:solidFill>
                   <a:srgbClr val="1A1A1A"/>
                 </a:solidFill>
@@ -4653,27 +4875,29 @@
                 <a:ea typeface="Meiryo" pitchFamily="34" charset="-122"/>
                 <a:cs typeface="Meiryo" pitchFamily="34" charset="-120"/>
               </a:rPr>
-              <a:t>85拠点の現場で、熟練者の判断が次の担い手と機械に引き継がれている。売上2.9億円・営業利益率24%</a:t>
-            </a:r>
-            <a:endParaRPr lang="en-US" sz="1050" dirty="0"/>
-          </a:p>
-        </p:txBody>
-      </p:sp>
-      <p:sp>
-        <p:nvSpPr>
-          <p:cNvPr id="15" name="Shape 11"/>
+              <a:t>製造業就業者数（2025年。2023年の1,055万人から減少）</a:t>
+            </a:r>
+            <a:endParaRPr lang="en-US" sz="950" dirty="0"/>
+          </a:p>
+        </p:txBody>
+      </p:sp>
+      <p:sp>
+        <p:nvSpPr>
+          <p:cNvPr id="16" name="stat-2"/>
           <p:cNvSpPr/>
           <p:nvPr/>
         </p:nvSpPr>
         <p:spPr>
           <a:xfrm>
-            <a:off x="365760" y="2916936"/>
-            <a:ext cx="8412480" cy="0"/>
-          </a:xfrm>
-          <a:prstGeom prst="line">
-            <a:avLst/>
-          </a:prstGeom>
-          <a:noFill/>
+            <a:off x="4937760" y="2624328"/>
+            <a:ext cx="1874520" cy="1481328"/>
+          </a:xfrm>
+          <a:prstGeom prst="rect">
+            <a:avLst/>
+          </a:prstGeom>
+          <a:solidFill>
+            <a:srgbClr val="FFFFFF"/>
+          </a:solidFill>
           <a:ln w="9525">
             <a:solidFill>
               <a:srgbClr val="BFBFBF"/>
@@ -4684,14 +4908,14 @@
       </p:sp>
       <p:sp>
         <p:nvSpPr>
-          <p:cNvPr id="16" name="Text 12"/>
+          <p:cNvPr id="17" name="Text 14"/>
           <p:cNvSpPr txBox="1"/>
           <p:nvPr/>
         </p:nvSpPr>
         <p:spPr>
           <a:xfrm>
-            <a:off x="365760" y="2953512"/>
-            <a:ext cx="1371600" cy="384048"/>
+            <a:off x="5047488" y="2761488"/>
+            <a:ext cx="1655064" cy="457200"/>
           </a:xfrm>
           <a:prstGeom prst="rect">
             <a:avLst/>
@@ -4710,7 +4934,7 @@
               <a:buNone/>
             </a:pPr>
             <a:r>
-              <a:rPr lang="en-US" sz="1050" b="1" dirty="0">
+              <a:rPr lang="en-US" sz="2000" b="1" dirty="0">
                 <a:solidFill>
                   <a:srgbClr val="1A1A1A"/>
                 </a:solidFill>
@@ -4718,61 +4942,41 @@
                 <a:ea typeface="Meiryo" pitchFamily="34" charset="-122"/>
                 <a:cs typeface="Meiryo" pitchFamily="34" charset="-120"/>
               </a:rPr>
-              <a:t>PHILOSOPHY</a:t>
-            </a:r>
-            <a:endParaRPr lang="en-US" sz="1400" dirty="0"/>
-          </a:p>
-          <a:p>
-            <a:pPr algn="l" indent="0" marL="0">
-              <a:lnSpc>
-                <a:spcPct val="115000"/>
-              </a:lnSpc>
-              <a:buNone/>
-            </a:pPr>
-            <a:r>
-              <a:rPr lang="en-US" sz="850" dirty="0">
-                <a:solidFill>
-                  <a:srgbClr val="4D4D4D"/>
-                </a:solidFill>
-                <a:latin typeface="Meiryo" pitchFamily="34" charset="0"/>
-                <a:ea typeface="Meiryo" pitchFamily="34" charset="-122"/>
-                <a:cs typeface="Meiryo" pitchFamily="34" charset="-120"/>
-              </a:rPr>
-              <a:t>創業の想い</a:t>
-            </a:r>
-            <a:endParaRPr lang="en-US" sz="1400" dirty="0"/>
-          </a:p>
-        </p:txBody>
-      </p:sp>
-      <p:sp>
-        <p:nvSpPr>
-          <p:cNvPr id="17" name="Text 13"/>
+              <a:t>3社に2社</a:t>
+            </a:r>
+            <a:endParaRPr lang="en-US" sz="2000" dirty="0"/>
+          </a:p>
+        </p:txBody>
+      </p:sp>
+      <p:sp>
+        <p:nvSpPr>
+          <p:cNvPr id="18" name="Text 15"/>
           <p:cNvSpPr txBox="1"/>
           <p:nvPr/>
         </p:nvSpPr>
         <p:spPr>
           <a:xfrm>
-            <a:off x="1828800" y="2953512"/>
-            <a:ext cx="6949440" cy="384048"/>
-          </a:xfrm>
-          <a:prstGeom prst="rect">
-            <a:avLst/>
-          </a:prstGeom>
-          <a:noFill/>
-          <a:ln/>
-        </p:spPr>
-        <p:txBody>
-          <a:bodyPr wrap="square" lIns="0" tIns="0" rIns="0" bIns="0" rtlCol="0" anchor="ctr"/>
-          <a:lstStyle/>
-          <a:p>
-            <a:pPr algn="l" indent="0" marL="0">
-              <a:lnSpc>
-                <a:spcPct val="115000"/>
-              </a:lnSpc>
-              <a:buNone/>
-            </a:pPr>
-            <a:r>
-              <a:rPr lang="en-US" sz="1050" dirty="0">
+            <a:off x="5047488" y="3310128"/>
+            <a:ext cx="1655064" cy="731520"/>
+          </a:xfrm>
+          <a:prstGeom prst="rect">
+            <a:avLst/>
+          </a:prstGeom>
+          <a:noFill/>
+          <a:ln/>
+        </p:spPr>
+        <p:txBody>
+          <a:bodyPr wrap="square" lIns="0" tIns="0" rIns="0" bIns="0" rtlCol="0" anchor="t"/>
+          <a:lstStyle/>
+          <a:p>
+            <a:pPr algn="l" indent="0" marL="0">
+              <a:lnSpc>
+                <a:spcPct val="115000"/>
+              </a:lnSpc>
+              <a:buNone/>
+            </a:pPr>
+            <a:r>
+              <a:rPr lang="en-US" sz="950" dirty="0">
                 <a:solidFill>
                   <a:srgbClr val="1A1A1A"/>
                 </a:solidFill>
@@ -4780,27 +4984,29 @@
                 <a:ea typeface="Meiryo" pitchFamily="34" charset="-122"/>
                 <a:cs typeface="Meiryo" pitchFamily="34" charset="-120"/>
               </a:rPr>
-              <a:t>記録は目的ではなく燃料。熟練者の勘を、退職とともに消えるものから、次の人が使える資産に変える</a:t>
-            </a:r>
-            <a:endParaRPr lang="en-US" sz="1050" dirty="0"/>
-          </a:p>
-        </p:txBody>
-      </p:sp>
-      <p:sp>
-        <p:nvSpPr>
-          <p:cNvPr id="18" name="Shape 14"/>
+              <a:t>技能継承がうまくいっていない製造企業</a:t>
+            </a:r>
+            <a:endParaRPr lang="en-US" sz="950" dirty="0"/>
+          </a:p>
+        </p:txBody>
+      </p:sp>
+      <p:sp>
+        <p:nvSpPr>
+          <p:cNvPr id="19" name="stat-3"/>
           <p:cNvSpPr/>
           <p:nvPr/>
         </p:nvSpPr>
         <p:spPr>
           <a:xfrm>
-            <a:off x="365760" y="3346704"/>
-            <a:ext cx="8412480" cy="0"/>
-          </a:xfrm>
-          <a:prstGeom prst="line">
-            <a:avLst/>
-          </a:prstGeom>
-          <a:noFill/>
+            <a:off x="6903720" y="2624328"/>
+            <a:ext cx="1874520" cy="1481328"/>
+          </a:xfrm>
+          <a:prstGeom prst="rect">
+            <a:avLst/>
+          </a:prstGeom>
+          <a:solidFill>
+            <a:srgbClr val="FFFFFF"/>
+          </a:solidFill>
           <a:ln w="9525">
             <a:solidFill>
               <a:srgbClr val="BFBFBF"/>
@@ -4811,14 +5017,56 @@
       </p:sp>
       <p:sp>
         <p:nvSpPr>
-          <p:cNvPr id="19" name="Text 15"/>
+          <p:cNvPr id="20" name="Text 17"/>
           <p:cNvSpPr txBox="1"/>
           <p:nvPr/>
         </p:nvSpPr>
         <p:spPr>
           <a:xfrm>
-            <a:off x="365760" y="3456432"/>
-            <a:ext cx="8412480" cy="219456"/>
+            <a:off x="7013448" y="2761488"/>
+            <a:ext cx="1655064" cy="457200"/>
+          </a:xfrm>
+          <a:prstGeom prst="rect">
+            <a:avLst/>
+          </a:prstGeom>
+          <a:noFill/>
+          <a:ln/>
+        </p:spPr>
+        <p:txBody>
+          <a:bodyPr wrap="square" lIns="0" tIns="0" rIns="0" bIns="0" rtlCol="0" anchor="ctr"/>
+          <a:lstStyle/>
+          <a:p>
+            <a:pPr algn="l" indent="0" marL="0">
+              <a:lnSpc>
+                <a:spcPct val="115000"/>
+              </a:lnSpc>
+              <a:buNone/>
+            </a:pPr>
+            <a:r>
+              <a:rPr lang="en-US" sz="2000" b="1" dirty="0">
+                <a:solidFill>
+                  <a:srgbClr val="1A1A1A"/>
+                </a:solidFill>
+                <a:latin typeface="Meiryo" pitchFamily="34" charset="0"/>
+                <a:ea typeface="Meiryo" pitchFamily="34" charset="-122"/>
+                <a:cs typeface="Meiryo" pitchFamily="34" charset="-120"/>
+              </a:rPr>
+              <a:t>21.7%</a:t>
+            </a:r>
+            <a:endParaRPr lang="en-US" sz="2000" dirty="0"/>
+          </a:p>
+        </p:txBody>
+      </p:sp>
+      <p:sp>
+        <p:nvSpPr>
+          <p:cNvPr id="21" name="Text 18"/>
+          <p:cNvSpPr txBox="1"/>
+          <p:nvPr/>
+        </p:nvSpPr>
+        <p:spPr>
+          <a:xfrm>
+            <a:off x="7013448" y="3310128"/>
+            <a:ext cx="1655064" cy="731520"/>
           </a:xfrm>
           <a:prstGeom prst="rect">
             <a:avLst/>
@@ -4837,7 +5085,49 @@
               <a:buNone/>
             </a:pPr>
             <a:r>
-              <a:rPr lang="en-US" sz="950" b="1" dirty="0">
+              <a:rPr lang="en-US" sz="950" dirty="0">
+                <a:solidFill>
+                  <a:srgbClr val="1A1A1A"/>
+                </a:solidFill>
+                <a:latin typeface="Meiryo" pitchFamily="34" charset="0"/>
+                <a:ea typeface="Meiryo" pitchFamily="34" charset="-122"/>
+                <a:cs typeface="Meiryo" pitchFamily="34" charset="-120"/>
+              </a:rPr>
+              <a:t>技能継承にデジタル技術を活用している企業</a:t>
+            </a:r>
+            <a:endParaRPr lang="en-US" sz="950" dirty="0"/>
+          </a:p>
+        </p:txBody>
+      </p:sp>
+      <p:sp>
+        <p:nvSpPr>
+          <p:cNvPr id="22" name="Text 19"/>
+          <p:cNvSpPr txBox="1"/>
+          <p:nvPr/>
+        </p:nvSpPr>
+        <p:spPr>
+          <a:xfrm>
+            <a:off x="365760" y="4480560"/>
+            <a:ext cx="8412480" cy="347472"/>
+          </a:xfrm>
+          <a:prstGeom prst="rect">
+            <a:avLst/>
+          </a:prstGeom>
+          <a:noFill/>
+          <a:ln/>
+        </p:spPr>
+        <p:txBody>
+          <a:bodyPr wrap="square" lIns="0" tIns="0" rIns="0" bIns="0" rtlCol="0" anchor="t"/>
+          <a:lstStyle/>
+          <a:p>
+            <a:pPr algn="l" indent="0" marL="0">
+              <a:lnSpc>
+                <a:spcPct val="115000"/>
+              </a:lnSpc>
+              <a:buNone/>
+            </a:pPr>
+            <a:r>
+              <a:rPr lang="en-US" sz="800" dirty="0">
                 <a:solidFill>
                   <a:srgbClr val="4D4D4D"/>
                 </a:solidFill>
@@ -4845,321 +5135,9 @@
                 <a:ea typeface="Meiryo" pitchFamily="34" charset="-122"/>
                 <a:cs typeface="Meiryo" pitchFamily="34" charset="-120"/>
               </a:rPr>
-              <a:t>VALUES　行動指針（三現）</a:t>
-            </a:r>
-            <a:endParaRPr lang="en-US" sz="950" dirty="0"/>
-          </a:p>
-        </p:txBody>
-      </p:sp>
-      <p:sp>
-        <p:nvSpPr>
-          <p:cNvPr id="20" name="value-1"/>
-          <p:cNvSpPr/>
-          <p:nvPr/>
-        </p:nvSpPr>
-        <p:spPr>
-          <a:xfrm>
-            <a:off x="365760" y="3703320"/>
-            <a:ext cx="2715768" cy="1024128"/>
-          </a:xfrm>
-          <a:prstGeom prst="rect">
-            <a:avLst/>
-          </a:prstGeom>
-          <a:solidFill>
-            <a:srgbClr val="F2F2F2"/>
-          </a:solidFill>
-          <a:ln/>
-        </p:spPr>
-      </p:sp>
-      <p:sp>
-        <p:nvSpPr>
-          <p:cNvPr id="21" name="Text 17"/>
-          <p:cNvSpPr txBox="1"/>
-          <p:nvPr/>
-        </p:nvSpPr>
-        <p:spPr>
-          <a:xfrm>
-            <a:off x="502920" y="3776472"/>
-            <a:ext cx="2441448" cy="292608"/>
-          </a:xfrm>
-          <a:prstGeom prst="rect">
-            <a:avLst/>
-          </a:prstGeom>
-          <a:noFill/>
-          <a:ln/>
-        </p:spPr>
-        <p:txBody>
-          <a:bodyPr wrap="square" lIns="0" tIns="0" rIns="0" bIns="0" rtlCol="0" anchor="t"/>
-          <a:lstStyle/>
-          <a:p>
-            <a:pPr algn="l" indent="0" marL="0">
-              <a:lnSpc>
-                <a:spcPct val="115000"/>
-              </a:lnSpc>
-              <a:buNone/>
-            </a:pPr>
-            <a:r>
-              <a:rPr lang="en-US" sz="1300" b="1" dirty="0">
-                <a:solidFill>
-                  <a:srgbClr val="1A1A1A"/>
-                </a:solidFill>
-                <a:latin typeface="Meiryo" pitchFamily="34" charset="0"/>
-                <a:ea typeface="Meiryo" pitchFamily="34" charset="-122"/>
-                <a:cs typeface="Meiryo" pitchFamily="34" charset="-120"/>
-              </a:rPr>
-              <a:t>現場に立つ</a:t>
-            </a:r>
-            <a:endParaRPr lang="en-US" sz="1300" dirty="0"/>
-          </a:p>
-        </p:txBody>
-      </p:sp>
-      <p:sp>
-        <p:nvSpPr>
-          <p:cNvPr id="22" name="Text 18"/>
-          <p:cNvSpPr txBox="1"/>
-          <p:nvPr/>
-        </p:nvSpPr>
-        <p:spPr>
-          <a:xfrm>
-            <a:off x="502920" y="4105656"/>
-            <a:ext cx="2441448" cy="566928"/>
-          </a:xfrm>
-          <a:prstGeom prst="rect">
-            <a:avLst/>
-          </a:prstGeom>
-          <a:noFill/>
-          <a:ln/>
-        </p:spPr>
-        <p:txBody>
-          <a:bodyPr wrap="square" lIns="0" tIns="0" rIns="0" bIns="0" rtlCol="0" anchor="t"/>
-          <a:lstStyle/>
-          <a:p>
-            <a:pPr algn="l" indent="0" marL="0">
-              <a:lnSpc>
-                <a:spcPct val="115000"/>
-              </a:lnSpc>
-              <a:buNone/>
-            </a:pPr>
-            <a:r>
-              <a:rPr lang="en-US" sz="950" dirty="0">
-                <a:solidFill>
-                  <a:srgbClr val="1A1A1A"/>
-                </a:solidFill>
-                <a:latin typeface="Meiryo" pitchFamily="34" charset="0"/>
-                <a:ea typeface="Meiryo" pitchFamily="34" charset="-122"/>
-                <a:cs typeface="Meiryo" pitchFamily="34" charset="-120"/>
-              </a:rPr>
-              <a:t>仕組みを作る前に、その現場で作業を見る。記録のために現場の手を増やさない</a:t>
-            </a:r>
-            <a:endParaRPr lang="en-US" sz="950" dirty="0"/>
-          </a:p>
-        </p:txBody>
-      </p:sp>
-      <p:sp>
-        <p:nvSpPr>
-          <p:cNvPr id="23" name="value-2"/>
-          <p:cNvSpPr/>
-          <p:nvPr/>
-        </p:nvSpPr>
-        <p:spPr>
-          <a:xfrm>
-            <a:off x="3214116" y="3703320"/>
-            <a:ext cx="2715768" cy="1024128"/>
-          </a:xfrm>
-          <a:prstGeom prst="rect">
-            <a:avLst/>
-          </a:prstGeom>
-          <a:solidFill>
-            <a:srgbClr val="F2F2F2"/>
-          </a:solidFill>
-          <a:ln/>
-        </p:spPr>
-      </p:sp>
-      <p:sp>
-        <p:nvSpPr>
-          <p:cNvPr id="24" name="Text 20"/>
-          <p:cNvSpPr txBox="1"/>
-          <p:nvPr/>
-        </p:nvSpPr>
-        <p:spPr>
-          <a:xfrm>
-            <a:off x="3351276" y="3776472"/>
-            <a:ext cx="2441448" cy="292608"/>
-          </a:xfrm>
-          <a:prstGeom prst="rect">
-            <a:avLst/>
-          </a:prstGeom>
-          <a:noFill/>
-          <a:ln/>
-        </p:spPr>
-        <p:txBody>
-          <a:bodyPr wrap="square" lIns="0" tIns="0" rIns="0" bIns="0" rtlCol="0" anchor="t"/>
-          <a:lstStyle/>
-          <a:p>
-            <a:pPr algn="l" indent="0" marL="0">
-              <a:lnSpc>
-                <a:spcPct val="115000"/>
-              </a:lnSpc>
-              <a:buNone/>
-            </a:pPr>
-            <a:r>
-              <a:rPr lang="en-US" sz="1300" b="1" dirty="0">
-                <a:solidFill>
-                  <a:srgbClr val="1A1A1A"/>
-                </a:solidFill>
-                <a:latin typeface="Meiryo" pitchFamily="34" charset="0"/>
-                <a:ea typeface="Meiryo" pitchFamily="34" charset="-122"/>
-                <a:cs typeface="Meiryo" pitchFamily="34" charset="-120"/>
-              </a:rPr>
-              <a:t>現物に触れる</a:t>
-            </a:r>
-            <a:endParaRPr lang="en-US" sz="1300" dirty="0"/>
-          </a:p>
-        </p:txBody>
-      </p:sp>
-      <p:sp>
-        <p:nvSpPr>
-          <p:cNvPr id="25" name="Text 21"/>
-          <p:cNvSpPr txBox="1"/>
-          <p:nvPr/>
-        </p:nvSpPr>
-        <p:spPr>
-          <a:xfrm>
-            <a:off x="3351276" y="4105656"/>
-            <a:ext cx="2441448" cy="566928"/>
-          </a:xfrm>
-          <a:prstGeom prst="rect">
-            <a:avLst/>
-          </a:prstGeom>
-          <a:noFill/>
-          <a:ln/>
-        </p:spPr>
-        <p:txBody>
-          <a:bodyPr wrap="square" lIns="0" tIns="0" rIns="0" bIns="0" rtlCol="0" anchor="t"/>
-          <a:lstStyle/>
-          <a:p>
-            <a:pPr algn="l" indent="0" marL="0">
-              <a:lnSpc>
-                <a:spcPct val="115000"/>
-              </a:lnSpc>
-              <a:buNone/>
-            </a:pPr>
-            <a:r>
-              <a:rPr lang="en-US" sz="950" dirty="0">
-                <a:solidFill>
-                  <a:srgbClr val="1A1A1A"/>
-                </a:solidFill>
-                <a:latin typeface="Meiryo" pitchFamily="34" charset="0"/>
-                <a:ea typeface="Meiryo" pitchFamily="34" charset="-122"/>
-                <a:cs typeface="Meiryo" pitchFamily="34" charset="-120"/>
-              </a:rPr>
-              <a:t>帳票ではなく実物と実測値から始める。熟練者がなぜそう判断したかまで残す</a:t>
-            </a:r>
-            <a:endParaRPr lang="en-US" sz="950" dirty="0"/>
-          </a:p>
-        </p:txBody>
-      </p:sp>
-      <p:sp>
-        <p:nvSpPr>
-          <p:cNvPr id="26" name="value-3"/>
-          <p:cNvSpPr/>
-          <p:nvPr/>
-        </p:nvSpPr>
-        <p:spPr>
-          <a:xfrm>
-            <a:off x="6062472" y="3703320"/>
-            <a:ext cx="2715768" cy="1024128"/>
-          </a:xfrm>
-          <a:prstGeom prst="rect">
-            <a:avLst/>
-          </a:prstGeom>
-          <a:solidFill>
-            <a:srgbClr val="F2F2F2"/>
-          </a:solidFill>
-          <a:ln/>
-        </p:spPr>
-      </p:sp>
-      <p:sp>
-        <p:nvSpPr>
-          <p:cNvPr id="27" name="Text 23"/>
-          <p:cNvSpPr txBox="1"/>
-          <p:nvPr/>
-        </p:nvSpPr>
-        <p:spPr>
-          <a:xfrm>
-            <a:off x="6199632" y="3776472"/>
-            <a:ext cx="2441448" cy="292608"/>
-          </a:xfrm>
-          <a:prstGeom prst="rect">
-            <a:avLst/>
-          </a:prstGeom>
-          <a:noFill/>
-          <a:ln/>
-        </p:spPr>
-        <p:txBody>
-          <a:bodyPr wrap="square" lIns="0" tIns="0" rIns="0" bIns="0" rtlCol="0" anchor="t"/>
-          <a:lstStyle/>
-          <a:p>
-            <a:pPr algn="l" indent="0" marL="0">
-              <a:lnSpc>
-                <a:spcPct val="115000"/>
-              </a:lnSpc>
-              <a:buNone/>
-            </a:pPr>
-            <a:r>
-              <a:rPr lang="en-US" sz="1300" b="1" dirty="0">
-                <a:solidFill>
-                  <a:srgbClr val="1A1A1A"/>
-                </a:solidFill>
-                <a:latin typeface="Meiryo" pitchFamily="34" charset="0"/>
-                <a:ea typeface="Meiryo" pitchFamily="34" charset="-122"/>
-                <a:cs typeface="Meiryo" pitchFamily="34" charset="-120"/>
-              </a:rPr>
-              <a:t>現実で判断する</a:t>
-            </a:r>
-            <a:endParaRPr lang="en-US" sz="1300" dirty="0"/>
-          </a:p>
-        </p:txBody>
-      </p:sp>
-      <p:sp>
-        <p:nvSpPr>
-          <p:cNvPr id="28" name="Text 24"/>
-          <p:cNvSpPr txBox="1"/>
-          <p:nvPr/>
-        </p:nvSpPr>
-        <p:spPr>
-          <a:xfrm>
-            <a:off x="6199632" y="4105656"/>
-            <a:ext cx="2441448" cy="566928"/>
-          </a:xfrm>
-          <a:prstGeom prst="rect">
-            <a:avLst/>
-          </a:prstGeom>
-          <a:noFill/>
-          <a:ln/>
-        </p:spPr>
-        <p:txBody>
-          <a:bodyPr wrap="square" lIns="0" tIns="0" rIns="0" bIns="0" rtlCol="0" anchor="t"/>
-          <a:lstStyle/>
-          <a:p>
-            <a:pPr algn="l" indent="0" marL="0">
-              <a:lnSpc>
-                <a:spcPct val="115000"/>
-              </a:lnSpc>
-              <a:buNone/>
-            </a:pPr>
-            <a:r>
-              <a:rPr lang="en-US" sz="950" dirty="0">
-                <a:solidFill>
-                  <a:srgbClr val="1A1A1A"/>
-                </a:solidFill>
-                <a:latin typeface="Meiryo" pitchFamily="34" charset="0"/>
-                <a:ea typeface="Meiryo" pitchFamily="34" charset="-122"/>
-                <a:cs typeface="Meiryo" pitchFamily="34" charset="-120"/>
-              </a:rPr>
-              <a:t>期待ではなく実績で計画を組み替える。データは顧客のもの。囲い込まない</a:t>
-            </a:r>
-            <a:endParaRPr lang="en-US" sz="950" dirty="0"/>
+              <a:t>出典：国土交通省（総務省「労働力調査」2024年）／経済産業省・厚生労働省・文部科学省「ものづくり白書」2026年版／労働政策研究・研修機構「ものづくり産業における人材確保・定着と技能継承に関する調査」（2026年5月）</a:t>
+            </a:r>
+            <a:endParaRPr lang="en-US" sz="800" dirty="0"/>
           </a:p>
         </p:txBody>
       </p:sp>
@@ -5272,7 +5250,7 @@
                 <a:ea typeface="Meiryo" pitchFamily="34" charset="-122"/>
                 <a:cs typeface="Meiryo" pitchFamily="34" charset="-120"/>
               </a:rPr>
-              <a:t>設問①-2　選んだ理由 ─ 熟練者の勘は、記録に残らず消えていく</a:t>
+              <a:t>設問①　解決策 ─ 熟練者の一言を記録し、次の人の画面に出す</a:t>
             </a:r>
             <a:endParaRPr lang="en-US" sz="2000" dirty="0"/>
           </a:p>
@@ -5314,7 +5292,7 @@
                 <a:ea typeface="Meiryo" pitchFamily="34" charset="-122"/>
                 <a:cs typeface="Meiryo" pitchFamily="34" charset="-120"/>
               </a:rPr>
-              <a:t>担い手の高齢化と減少に対し、技能継承へのデジタル活用は2割にとどまる</a:t>
+              <a:t>道具はタブレットアプリと生成AI。道具だけでは定着しないため、最初の2か月は当社が現場に入る</a:t>
             </a:r>
             <a:endParaRPr lang="en-US" sz="1200" dirty="0"/>
           </a:p>
@@ -5322,504 +5300,14 @@
       </p:sp>
       <p:sp>
         <p:nvSpPr>
-          <p:cNvPr id="5" name="Text 2"/>
-          <p:cNvSpPr txBox="1"/>
-          <p:nvPr/>
-        </p:nvSpPr>
-        <p:spPr>
-          <a:xfrm>
-            <a:off x="365760" y="1097280"/>
-            <a:ext cx="4343400" cy="256032"/>
-          </a:xfrm>
-          <a:prstGeom prst="rect">
-            <a:avLst/>
-          </a:prstGeom>
-          <a:noFill/>
-          <a:ln/>
-        </p:spPr>
-        <p:txBody>
-          <a:bodyPr wrap="square" lIns="0" tIns="0" rIns="0" bIns="0" rtlCol="0" anchor="t"/>
-          <a:lstStyle/>
-          <a:p>
-            <a:pPr algn="l" indent="0" marL="0">
-              <a:lnSpc>
-                <a:spcPct val="115000"/>
-              </a:lnSpc>
-              <a:buNone/>
-            </a:pPr>
-            <a:r>
-              <a:rPr lang="en-US" sz="1200" b="1" dirty="0">
-                <a:solidFill>
-                  <a:srgbClr val="1A1A1A"/>
-                </a:solidFill>
-                <a:latin typeface="Meiryo" pitchFamily="34" charset="0"/>
-                <a:ea typeface="Meiryo" pitchFamily="34" charset="-122"/>
-                <a:cs typeface="Meiryo" pitchFamily="34" charset="-120"/>
-              </a:rPr>
-              <a:t>解くべき課題</a:t>
-            </a:r>
-            <a:endParaRPr lang="en-US" sz="1200" dirty="0"/>
-          </a:p>
-        </p:txBody>
-      </p:sp>
-      <p:sp>
-        <p:nvSpPr>
-          <p:cNvPr id="6" name="Text 3"/>
-          <p:cNvSpPr txBox="1"/>
-          <p:nvPr/>
-        </p:nvSpPr>
-        <p:spPr>
-          <a:xfrm>
-            <a:off x="365760" y="1371600"/>
-            <a:ext cx="4343400" cy="868680"/>
-          </a:xfrm>
-          <a:prstGeom prst="rect">
-            <a:avLst/>
-          </a:prstGeom>
-          <a:noFill/>
-          <a:ln/>
-        </p:spPr>
-        <p:txBody>
-          <a:bodyPr wrap="square" lIns="0" tIns="0" rIns="0" bIns="0" rtlCol="0" anchor="t"/>
-          <a:lstStyle/>
-          <a:p>
-            <a:pPr algn="l" indent="0" marL="0">
-              <a:lnSpc>
-                <a:spcPct val="115000"/>
-              </a:lnSpc>
-              <a:buNone/>
-            </a:pPr>
-            <a:r>
-              <a:rPr lang="en-US" sz="1000" dirty="0">
-                <a:solidFill>
-                  <a:srgbClr val="1A1A1A"/>
-                </a:solidFill>
-                <a:latin typeface="Meiryo" pitchFamily="34" charset="0"/>
-                <a:ea typeface="Meiryo" pitchFamily="34" charset="-122"/>
-                <a:cs typeface="Meiryo" pitchFamily="34" charset="-120"/>
-              </a:rPr>
-              <a:t>工場でも施工現場でも、条件出し・段取り・異常の見極めは熟練者の勘に依存。担い手の高齢化と減少により、その一次情報が記録に残らないまま失われつつある。人が減る前提で判断を記録とデータで支え、機械に任せる範囲を広げる必要がある</a:t>
-            </a:r>
-            <a:endParaRPr lang="en-US" sz="1000" dirty="0"/>
-          </a:p>
-        </p:txBody>
-      </p:sp>
-      <p:sp>
-        <p:nvSpPr>
-          <p:cNvPr id="7" name="Text 4"/>
-          <p:cNvSpPr txBox="1"/>
-          <p:nvPr/>
-        </p:nvSpPr>
-        <p:spPr>
-          <a:xfrm>
-            <a:off x="365760" y="2286000"/>
-            <a:ext cx="4343400" cy="256032"/>
-          </a:xfrm>
-          <a:prstGeom prst="rect">
-            <a:avLst/>
-          </a:prstGeom>
-          <a:noFill/>
-          <a:ln/>
-        </p:spPr>
-        <p:txBody>
-          <a:bodyPr wrap="square" lIns="0" tIns="0" rIns="0" bIns="0" rtlCol="0" anchor="t"/>
-          <a:lstStyle/>
-          <a:p>
-            <a:pPr algn="l" indent="0" marL="0">
-              <a:lnSpc>
-                <a:spcPct val="115000"/>
-              </a:lnSpc>
-              <a:buNone/>
-            </a:pPr>
-            <a:r>
-              <a:rPr lang="en-US" sz="1200" b="1" dirty="0">
-                <a:solidFill>
-                  <a:srgbClr val="1A1A1A"/>
-                </a:solidFill>
-                <a:latin typeface="Meiryo" pitchFamily="34" charset="0"/>
-                <a:ea typeface="Meiryo" pitchFamily="34" charset="-122"/>
-                <a:cs typeface="Meiryo" pitchFamily="34" charset="-120"/>
-              </a:rPr>
-              <a:t>原体験</a:t>
-            </a:r>
-            <a:endParaRPr lang="en-US" sz="1200" dirty="0"/>
-          </a:p>
-        </p:txBody>
-      </p:sp>
-      <p:sp>
-        <p:nvSpPr>
-          <p:cNvPr id="8" name="Text 5"/>
-          <p:cNvSpPr txBox="1"/>
-          <p:nvPr/>
-        </p:nvSpPr>
-        <p:spPr>
-          <a:xfrm>
-            <a:off x="365760" y="2560320"/>
-            <a:ext cx="4343400" cy="914400"/>
-          </a:xfrm>
-          <a:prstGeom prst="rect">
-            <a:avLst/>
-          </a:prstGeom>
-          <a:noFill/>
-          <a:ln/>
-        </p:spPr>
-        <p:txBody>
-          <a:bodyPr wrap="square" lIns="0" tIns="0" rIns="0" bIns="0" rtlCol="0" anchor="t"/>
-          <a:lstStyle/>
-          <a:p>
-            <a:pPr algn="l" indent="0" marL="0">
-              <a:lnSpc>
-                <a:spcPct val="115000"/>
-              </a:lnSpc>
-              <a:spcAft>
-                <a:spcPts val="200"/>
-              </a:spcAft>
-              <a:buNone/>
-            </a:pPr>
-            <a:r>
-              <a:rPr lang="en-US" sz="1000" dirty="0">
-                <a:solidFill>
-                  <a:srgbClr val="1A1A1A"/>
-                </a:solidFill>
-                <a:latin typeface="Meiryo" pitchFamily="34" charset="0"/>
-                <a:ea typeface="Meiryo" pitchFamily="34" charset="-122"/>
-                <a:cs typeface="Meiryo" pitchFamily="34" charset="-120"/>
-              </a:rPr>
-              <a:t>66kV／275kV 地中送電線の施工管理 5年：製品が使われる現場の不具合と試験値を実地で把握</a:t>
-            </a:r>
-            <a:endParaRPr lang="en-US" sz="1000" dirty="0"/>
-          </a:p>
-          <a:p>
-            <a:pPr algn="l" indent="0" marL="0">
-              <a:lnSpc>
-                <a:spcPct val="115000"/>
-              </a:lnSpc>
-              <a:spcAft>
-                <a:spcPts val="200"/>
-              </a:spcAft>
-              <a:buNone/>
-            </a:pPr>
-            <a:r>
-              <a:rPr lang="en-US" sz="1000" dirty="0">
-                <a:solidFill>
-                  <a:srgbClr val="1A1A1A"/>
-                </a:solidFill>
-                <a:latin typeface="Meiryo" pitchFamily="34" charset="0"/>
-                <a:ea typeface="Meiryo" pitchFamily="34" charset="-122"/>
-                <a:cs typeface="Meiryo" pitchFamily="34" charset="-120"/>
-              </a:rPr>
-              <a:t>Python・Power BI・FastAPI・Docker・LangChain・RAG の独学と業務実装</a:t>
-            </a:r>
-            <a:endParaRPr lang="en-US" sz="1000" dirty="0"/>
-          </a:p>
-          <a:p>
-            <a:pPr algn="l" indent="0" marL="0">
-              <a:lnSpc>
-                <a:spcPct val="115000"/>
-              </a:lnSpc>
-              <a:spcAft>
-                <a:spcPts val="200"/>
-              </a:spcAft>
-              <a:buNone/>
-            </a:pPr>
-            <a:r>
-              <a:rPr lang="en-US" sz="1000" dirty="0">
-                <a:solidFill>
-                  <a:srgbClr val="1A1A1A"/>
-                </a:solidFill>
-                <a:latin typeface="Meiryo" pitchFamily="34" charset="0"/>
-                <a:ea typeface="Meiryo" pitchFamily="34" charset="-122"/>
-                <a:cs typeface="Meiryo" pitchFamily="34" charset="-120"/>
-              </a:rPr>
-              <a:t>1級電気工事施工管理技士・G検定</a:t>
-            </a:r>
-            <a:endParaRPr lang="en-US" sz="1000" dirty="0"/>
-          </a:p>
-        </p:txBody>
-      </p:sp>
-      <p:sp>
-        <p:nvSpPr>
-          <p:cNvPr id="9" name="Shape 6"/>
+          <p:cNvPr id="5" name="step-1"/>
           <p:cNvSpPr/>
           <p:nvPr/>
         </p:nvSpPr>
         <p:spPr>
           <a:xfrm>
-            <a:off x="365760" y="3520440"/>
-            <a:ext cx="4343400" cy="0"/>
-          </a:xfrm>
-          <a:prstGeom prst="line">
-            <a:avLst/>
-          </a:prstGeom>
-          <a:noFill/>
-          <a:ln w="9525">
-            <a:solidFill>
-              <a:srgbClr val="BFBFBF"/>
-            </a:solidFill>
-            <a:prstDash val="solid"/>
-          </a:ln>
-        </p:spPr>
-      </p:sp>
-      <p:sp>
-        <p:nvSpPr>
-          <p:cNvPr id="10" name="Text 7"/>
-          <p:cNvSpPr txBox="1"/>
-          <p:nvPr/>
-        </p:nvSpPr>
-        <p:spPr>
-          <a:xfrm>
-            <a:off x="365760" y="3584448"/>
-            <a:ext cx="4343400" cy="256032"/>
-          </a:xfrm>
-          <a:prstGeom prst="rect">
-            <a:avLst/>
-          </a:prstGeom>
-          <a:noFill/>
-          <a:ln/>
-        </p:spPr>
-        <p:txBody>
-          <a:bodyPr wrap="square" lIns="0" tIns="0" rIns="0" bIns="0" rtlCol="0" anchor="t"/>
-          <a:lstStyle/>
-          <a:p>
-            <a:pPr algn="l" indent="0" marL="0">
-              <a:lnSpc>
-                <a:spcPct val="115000"/>
-              </a:lnSpc>
-              <a:buNone/>
-            </a:pPr>
-            <a:r>
-              <a:rPr lang="en-US" sz="1200" b="1" dirty="0">
-                <a:solidFill>
-                  <a:srgbClr val="1A1A1A"/>
-                </a:solidFill>
-                <a:latin typeface="Meiryo" pitchFamily="34" charset="0"/>
-                <a:ea typeface="Meiryo" pitchFamily="34" charset="-122"/>
-                <a:cs typeface="Meiryo" pitchFamily="34" charset="-120"/>
-              </a:rPr>
-              <a:t>追い風は二方向から</a:t>
-            </a:r>
-            <a:endParaRPr lang="en-US" sz="1200" dirty="0"/>
-          </a:p>
-        </p:txBody>
-      </p:sp>
-      <p:sp>
-        <p:nvSpPr>
-          <p:cNvPr id="11" name="Shape 8"/>
-          <p:cNvSpPr/>
-          <p:nvPr/>
-        </p:nvSpPr>
-        <p:spPr>
-          <a:xfrm>
-            <a:off x="365760" y="3886200"/>
-            <a:ext cx="457200" cy="219456"/>
-          </a:xfrm>
-          <a:prstGeom prst="rect">
-            <a:avLst/>
-          </a:prstGeom>
-          <a:solidFill>
-            <a:srgbClr val="1A1A1A"/>
-          </a:solidFill>
-          <a:ln/>
-        </p:spPr>
-      </p:sp>
-      <p:sp>
-        <p:nvSpPr>
-          <p:cNvPr id="12" name="Text 9"/>
-          <p:cNvSpPr txBox="1"/>
-          <p:nvPr/>
-        </p:nvSpPr>
-        <p:spPr>
-          <a:xfrm>
-            <a:off x="365760" y="3886200"/>
-            <a:ext cx="457200" cy="219456"/>
-          </a:xfrm>
-          <a:prstGeom prst="rect">
-            <a:avLst/>
-          </a:prstGeom>
-          <a:noFill/>
-          <a:ln/>
-        </p:spPr>
-        <p:txBody>
-          <a:bodyPr wrap="square" lIns="0" tIns="0" rIns="0" bIns="0" rtlCol="0" anchor="ctr"/>
-          <a:lstStyle/>
-          <a:p>
-            <a:pPr algn="ctr" indent="0" marL="0">
-              <a:lnSpc>
-                <a:spcPct val="115000"/>
-              </a:lnSpc>
-              <a:buNone/>
-            </a:pPr>
-            <a:r>
-              <a:rPr lang="en-US" sz="950" b="1" dirty="0">
-                <a:solidFill>
-                  <a:srgbClr val="FFFFFF"/>
-                </a:solidFill>
-                <a:latin typeface="Meiryo" pitchFamily="34" charset="0"/>
-                <a:ea typeface="Meiryo" pitchFamily="34" charset="-122"/>
-                <a:cs typeface="Meiryo" pitchFamily="34" charset="-120"/>
-              </a:rPr>
-              <a:t>技術</a:t>
-            </a:r>
-            <a:endParaRPr lang="en-US" sz="950" dirty="0"/>
-          </a:p>
-        </p:txBody>
-      </p:sp>
-      <p:sp>
-        <p:nvSpPr>
-          <p:cNvPr id="13" name="Text 10"/>
-          <p:cNvSpPr txBox="1"/>
-          <p:nvPr/>
-        </p:nvSpPr>
-        <p:spPr>
-          <a:xfrm>
-            <a:off x="932688" y="3858768"/>
-            <a:ext cx="3776472" cy="274320"/>
-          </a:xfrm>
-          <a:prstGeom prst="rect">
-            <a:avLst/>
-          </a:prstGeom>
-          <a:noFill/>
-          <a:ln/>
-        </p:spPr>
-        <p:txBody>
-          <a:bodyPr wrap="square" lIns="0" tIns="0" rIns="0" bIns="0" rtlCol="0" anchor="ctr"/>
-          <a:lstStyle/>
-          <a:p>
-            <a:pPr algn="l" indent="0" marL="0">
-              <a:lnSpc>
-                <a:spcPct val="115000"/>
-              </a:lnSpc>
-              <a:buNone/>
-            </a:pPr>
-            <a:r>
-              <a:rPr lang="en-US" sz="1000" dirty="0">
-                <a:solidFill>
-                  <a:srgbClr val="1A1A1A"/>
-                </a:solidFill>
-                <a:latin typeface="Meiryo" pitchFamily="34" charset="0"/>
-                <a:ea typeface="Meiryo" pitchFamily="34" charset="-122"/>
-                <a:cs typeface="Meiryo" pitchFamily="34" charset="-120"/>
-              </a:rPr>
-              <a:t>フィジカルAI・自動搬送ロボット・デジタルツインの実用化</a:t>
-            </a:r>
-            <a:endParaRPr lang="en-US" sz="1000" dirty="0"/>
-          </a:p>
-        </p:txBody>
-      </p:sp>
-      <p:sp>
-        <p:nvSpPr>
-          <p:cNvPr id="14" name="Shape 11"/>
-          <p:cNvSpPr/>
-          <p:nvPr/>
-        </p:nvSpPr>
-        <p:spPr>
-          <a:xfrm>
-            <a:off x="365760" y="4178808"/>
-            <a:ext cx="457200" cy="219456"/>
-          </a:xfrm>
-          <a:prstGeom prst="rect">
-            <a:avLst/>
-          </a:prstGeom>
-          <a:solidFill>
-            <a:srgbClr val="1A1A1A"/>
-          </a:solidFill>
-          <a:ln/>
-        </p:spPr>
-      </p:sp>
-      <p:sp>
-        <p:nvSpPr>
-          <p:cNvPr id="15" name="Text 12"/>
-          <p:cNvSpPr txBox="1"/>
-          <p:nvPr/>
-        </p:nvSpPr>
-        <p:spPr>
-          <a:xfrm>
-            <a:off x="365760" y="4178808"/>
-            <a:ext cx="457200" cy="219456"/>
-          </a:xfrm>
-          <a:prstGeom prst="rect">
-            <a:avLst/>
-          </a:prstGeom>
-          <a:noFill/>
-          <a:ln/>
-        </p:spPr>
-        <p:txBody>
-          <a:bodyPr wrap="square" lIns="0" tIns="0" rIns="0" bIns="0" rtlCol="0" anchor="ctr"/>
-          <a:lstStyle/>
-          <a:p>
-            <a:pPr algn="ctr" indent="0" marL="0">
-              <a:lnSpc>
-                <a:spcPct val="115000"/>
-              </a:lnSpc>
-              <a:buNone/>
-            </a:pPr>
-            <a:r>
-              <a:rPr lang="en-US" sz="950" b="1" dirty="0">
-                <a:solidFill>
-                  <a:srgbClr val="FFFFFF"/>
-                </a:solidFill>
-                <a:latin typeface="Meiryo" pitchFamily="34" charset="0"/>
-                <a:ea typeface="Meiryo" pitchFamily="34" charset="-122"/>
-                <a:cs typeface="Meiryo" pitchFamily="34" charset="-120"/>
-              </a:rPr>
-              <a:t>需要</a:t>
-            </a:r>
-            <a:endParaRPr lang="en-US" sz="950" dirty="0"/>
-          </a:p>
-        </p:txBody>
-      </p:sp>
-      <p:sp>
-        <p:nvSpPr>
-          <p:cNvPr id="16" name="Text 13"/>
-          <p:cNvSpPr txBox="1"/>
-          <p:nvPr/>
-        </p:nvSpPr>
-        <p:spPr>
-          <a:xfrm>
-            <a:off x="932688" y="4151376"/>
-            <a:ext cx="3776472" cy="274320"/>
-          </a:xfrm>
-          <a:prstGeom prst="rect">
-            <a:avLst/>
-          </a:prstGeom>
-          <a:noFill/>
-          <a:ln/>
-        </p:spPr>
-        <p:txBody>
-          <a:bodyPr wrap="square" lIns="0" tIns="0" rIns="0" bIns="0" rtlCol="0" anchor="ctr"/>
-          <a:lstStyle/>
-          <a:p>
-            <a:pPr algn="l" indent="0" marL="0">
-              <a:lnSpc>
-                <a:spcPct val="115000"/>
-              </a:lnSpc>
-              <a:buNone/>
-            </a:pPr>
-            <a:r>
-              <a:rPr lang="en-US" sz="1000" dirty="0">
-                <a:solidFill>
-                  <a:srgbClr val="1A1A1A"/>
-                </a:solidFill>
-                <a:latin typeface="Meiryo" pitchFamily="34" charset="0"/>
-                <a:ea typeface="Meiryo" pitchFamily="34" charset="-122"/>
-                <a:cs typeface="Meiryo" pitchFamily="34" charset="-120"/>
-              </a:rPr>
-              <a:t>設備の経年対策・データセンター向けの電線需要増</a:t>
-            </a:r>
-            <a:endParaRPr lang="en-US" sz="1000" dirty="0"/>
-          </a:p>
-        </p:txBody>
-      </p:sp>
-      <p:sp>
-        <p:nvSpPr>
-          <p:cNvPr id="17" name="stat-0"/>
-          <p:cNvSpPr/>
-          <p:nvPr/>
-        </p:nvSpPr>
-        <p:spPr>
-          <a:xfrm>
-            <a:off x="4937760" y="1097280"/>
-            <a:ext cx="1874520" cy="1481328"/>
+            <a:off x="365760" y="1051560"/>
+            <a:ext cx="2578608" cy="1828800"/>
           </a:xfrm>
           <a:prstGeom prst="rect">
             <a:avLst/>
@@ -5837,14 +5325,34 @@
       </p:sp>
       <p:sp>
         <p:nvSpPr>
-          <p:cNvPr id="18" name="Text 15"/>
+          <p:cNvPr id="6" name="Shape 3"/>
+          <p:cNvSpPr/>
+          <p:nvPr/>
+        </p:nvSpPr>
+        <p:spPr>
+          <a:xfrm>
+            <a:off x="365760" y="1051560"/>
+            <a:ext cx="2578608" cy="310896"/>
+          </a:xfrm>
+          <a:prstGeom prst="rect">
+            <a:avLst/>
+          </a:prstGeom>
+          <a:solidFill>
+            <a:srgbClr val="1A1A1A"/>
+          </a:solidFill>
+          <a:ln/>
+        </p:spPr>
+      </p:sp>
+      <p:sp>
+        <p:nvSpPr>
+          <p:cNvPr id="7" name="Text 4"/>
           <p:cNvSpPr txBox="1"/>
           <p:nvPr/>
         </p:nvSpPr>
         <p:spPr>
           <a:xfrm>
-            <a:off x="5047488" y="1234440"/>
-            <a:ext cx="1655064" cy="457200"/>
+            <a:off x="475488" y="1051560"/>
+            <a:ext cx="2359152" cy="310896"/>
           </a:xfrm>
           <a:prstGeom prst="rect">
             <a:avLst/>
@@ -5863,7 +5371,66 @@
               <a:buNone/>
             </a:pPr>
             <a:r>
-              <a:rPr lang="en-US" sz="2000" b="1" dirty="0">
+              <a:rPr lang="en-US" sz="1150" b="1" dirty="0">
+                <a:solidFill>
+                  <a:srgbClr val="FFFFFF"/>
+                </a:solidFill>
+                <a:latin typeface="Meiryo" pitchFamily="34" charset="0"/>
+                <a:ea typeface="Meiryo" pitchFamily="34" charset="-122"/>
+                <a:cs typeface="Meiryo" pitchFamily="34" charset="-120"/>
+              </a:rPr>
+              <a:t>① 記録する</a:t>
+            </a:r>
+            <a:pPr algn="l" indent="0" marL="0">
+              <a:lnSpc>
+                <a:spcPct val="115000"/>
+              </a:lnSpc>
+              <a:buNone/>
+            </a:pPr>
+            <a:r>
+              <a:rPr lang="en-US" sz="900" dirty="0">
+                <a:solidFill>
+                  <a:srgbClr val="FFFFFF"/>
+                </a:solidFill>
+                <a:latin typeface="Meiryo" pitchFamily="34" charset="0"/>
+                <a:ea typeface="Meiryo" pitchFamily="34" charset="-122"/>
+                <a:cs typeface="Meiryo" pitchFamily="34" charset="-120"/>
+              </a:rPr>
+              <a:t>　熟練者</a:t>
+            </a:r>
+            <a:endParaRPr lang="en-US" sz="1150" dirty="0"/>
+          </a:p>
+        </p:txBody>
+      </p:sp>
+      <p:sp>
+        <p:nvSpPr>
+          <p:cNvPr id="8" name="Text 5"/>
+          <p:cNvSpPr txBox="1"/>
+          <p:nvPr/>
+        </p:nvSpPr>
+        <p:spPr>
+          <a:xfrm>
+            <a:off x="475488" y="1435608"/>
+            <a:ext cx="2359152" cy="804672"/>
+          </a:xfrm>
+          <a:prstGeom prst="rect">
+            <a:avLst/>
+          </a:prstGeom>
+          <a:noFill/>
+          <a:ln/>
+        </p:spPr>
+        <p:txBody>
+          <a:bodyPr wrap="square" lIns="0" tIns="0" rIns="0" bIns="0" rtlCol="0" anchor="t"/>
+          <a:lstStyle/>
+          <a:p>
+            <a:pPr algn="l" indent="0" marL="0">
+              <a:lnSpc>
+                <a:spcPct val="115000"/>
+              </a:lnSpc>
+              <a:buNone/>
+            </a:pPr>
+            <a:r>
+              <a:rPr lang="en-US" sz="1000" dirty="0">
                 <a:solidFill>
                   <a:srgbClr val="1A1A1A"/>
                 </a:solidFill>
@@ -5871,22 +5438,65 @@
                 <a:ea typeface="Meiryo" pitchFamily="34" charset="-122"/>
                 <a:cs typeface="Meiryo" pitchFamily="34" charset="-120"/>
               </a:rPr>
-              <a:t>36.7%</a:t>
-            </a:r>
-            <a:endParaRPr lang="en-US" sz="2000" dirty="0"/>
-          </a:p>
-        </p:txBody>
-      </p:sp>
-      <p:sp>
-        <p:nvSpPr>
-          <p:cNvPr id="19" name="Text 16"/>
+              <a:t>異常に対処したら、タブレットに音声で一言残す。</a:t>
+            </a:r>
+            <a:endParaRPr lang="en-US" sz="1000" dirty="0"/>
+          </a:p>
+          <a:p>
+            <a:pPr algn="l" indent="0" marL="0">
+              <a:lnSpc>
+                <a:spcPct val="115000"/>
+              </a:lnSpc>
+              <a:buNone/>
+            </a:pPr>
+            <a:r>
+              <a:rPr lang="en-US" sz="1000" dirty="0">
+                <a:solidFill>
+                  <a:srgbClr val="1A1A1A"/>
+                </a:solidFill>
+                <a:latin typeface="Meiryo" pitchFamily="34" charset="0"/>
+                <a:ea typeface="Meiryo" pitchFamily="34" charset="-122"/>
+                <a:cs typeface="Meiryo" pitchFamily="34" charset="-120"/>
+              </a:rPr>
+              <a:t>例「湿度が高いので温度を2℃下げた」</a:t>
+            </a:r>
+            <a:endParaRPr lang="en-US" sz="1000" dirty="0"/>
+          </a:p>
+        </p:txBody>
+      </p:sp>
+      <p:sp>
+        <p:nvSpPr>
+          <p:cNvPr id="9" name="Shape 6"/>
+          <p:cNvSpPr/>
+          <p:nvPr/>
+        </p:nvSpPr>
+        <p:spPr>
+          <a:xfrm>
+            <a:off x="475488" y="2295144"/>
+            <a:ext cx="2359152" cy="0"/>
+          </a:xfrm>
+          <a:prstGeom prst="line">
+            <a:avLst/>
+          </a:prstGeom>
+          <a:noFill/>
+          <a:ln w="9525">
+            <a:solidFill>
+              <a:srgbClr val="BFBFBF"/>
+            </a:solidFill>
+            <a:prstDash val="solid"/>
+          </a:ln>
+        </p:spPr>
+      </p:sp>
+      <p:sp>
+        <p:nvSpPr>
+          <p:cNvPr id="10" name="Text 7"/>
           <p:cNvSpPr txBox="1"/>
           <p:nvPr/>
         </p:nvSpPr>
         <p:spPr>
           <a:xfrm>
-            <a:off x="5047488" y="1783080"/>
-            <a:ext cx="1655064" cy="731520"/>
+            <a:off x="475488" y="2350008"/>
+            <a:ext cx="2359152" cy="475488"/>
           </a:xfrm>
           <a:prstGeom prst="rect">
             <a:avLst/>
@@ -5905,7 +5515,7 @@
               <a:buNone/>
             </a:pPr>
             <a:r>
-              <a:rPr lang="en-US" sz="950" dirty="0">
+              <a:rPr lang="en-US" sz="900" b="1" dirty="0">
                 <a:solidFill>
                   <a:srgbClr val="1A1A1A"/>
                 </a:solidFill>
@@ -5913,22 +5523,81 @@
                 <a:ea typeface="Meiryo" pitchFamily="34" charset="-122"/>
                 <a:cs typeface="Meiryo" pitchFamily="34" charset="-120"/>
               </a:rPr>
-              <a:t>建設業就業者のうち55歳以上（29歳以下は11.7%）</a:t>
-            </a:r>
-            <a:endParaRPr lang="en-US" sz="950" dirty="0"/>
-          </a:p>
-        </p:txBody>
-      </p:sp>
-      <p:sp>
-        <p:nvSpPr>
-          <p:cNvPr id="20" name="stat-1"/>
+              <a:t>道具：</a:t>
+            </a:r>
+            <a:pPr algn="l" indent="0" marL="0">
+              <a:lnSpc>
+                <a:spcPct val="115000"/>
+              </a:lnSpc>
+              <a:buNone/>
+            </a:pPr>
+            <a:r>
+              <a:rPr lang="en-US" sz="900" dirty="0">
+                <a:solidFill>
+                  <a:srgbClr val="1A1A1A"/>
+                </a:solidFill>
+                <a:latin typeface="Meiryo" pitchFamily="34" charset="0"/>
+                <a:ea typeface="Meiryo" pitchFamily="34" charset="-122"/>
+                <a:cs typeface="Meiryo" pitchFamily="34" charset="-120"/>
+              </a:rPr>
+              <a:t>現場記録アプリ（音声・写真）＋MESから設備データを自動取得</a:t>
+            </a:r>
+            <a:endParaRPr lang="en-US" sz="900" dirty="0"/>
+          </a:p>
+        </p:txBody>
+      </p:sp>
+      <p:sp>
+        <p:nvSpPr>
+          <p:cNvPr id="11" name="Text 8"/>
+          <p:cNvSpPr txBox="1"/>
+          <p:nvPr/>
+        </p:nvSpPr>
+        <p:spPr>
+          <a:xfrm>
+            <a:off x="2944368" y="1801368"/>
+            <a:ext cx="338328" cy="329184"/>
+          </a:xfrm>
+          <a:prstGeom prst="rect">
+            <a:avLst/>
+          </a:prstGeom>
+          <a:noFill/>
+          <a:ln/>
+        </p:spPr>
+        <p:txBody>
+          <a:bodyPr wrap="square" lIns="0" tIns="0" rIns="0" bIns="0" rtlCol="0" anchor="ctr"/>
+          <a:lstStyle/>
+          <a:p>
+            <a:pPr algn="ctr" indent="0" marL="0">
+              <a:lnSpc>
+                <a:spcPct val="115000"/>
+              </a:lnSpc>
+              <a:buNone/>
+            </a:pPr>
+            <a:r>
+              <a:rPr lang="en-US" sz="1400" dirty="0">
+                <a:solidFill>
+                  <a:srgbClr val="1A1A1A"/>
+                </a:solidFill>
+                <a:latin typeface="Meiryo" pitchFamily="34" charset="0"/>
+                <a:ea typeface="Meiryo" pitchFamily="34" charset="-122"/>
+                <a:cs typeface="Meiryo" pitchFamily="34" charset="-120"/>
+              </a:rPr>
+              <a:t>▶</a:t>
+            </a:r>
+            <a:endParaRPr lang="en-US" sz="1400" dirty="0"/>
+          </a:p>
+        </p:txBody>
+      </p:sp>
+      <p:sp>
+        <p:nvSpPr>
+          <p:cNvPr id="12" name="step-2"/>
           <p:cNvSpPr/>
           <p:nvPr/>
         </p:nvSpPr>
         <p:spPr>
           <a:xfrm>
-            <a:off x="6903720" y="1097280"/>
-            <a:ext cx="1874520" cy="1481328"/>
+            <a:off x="3282696" y="1051560"/>
+            <a:ext cx="2578608" cy="1828800"/>
           </a:xfrm>
           <a:prstGeom prst="rect">
             <a:avLst/>
@@ -5946,14 +5615,34 @@
       </p:sp>
       <p:sp>
         <p:nvSpPr>
-          <p:cNvPr id="21" name="Text 18"/>
+          <p:cNvPr id="13" name="Shape 10"/>
+          <p:cNvSpPr/>
+          <p:nvPr/>
+        </p:nvSpPr>
+        <p:spPr>
+          <a:xfrm>
+            <a:off x="3282696" y="1051560"/>
+            <a:ext cx="2578608" cy="310896"/>
+          </a:xfrm>
+          <a:prstGeom prst="rect">
+            <a:avLst/>
+          </a:prstGeom>
+          <a:solidFill>
+            <a:srgbClr val="1A1A1A"/>
+          </a:solidFill>
+          <a:ln/>
+        </p:spPr>
+      </p:sp>
+      <p:sp>
+        <p:nvSpPr>
+          <p:cNvPr id="14" name="Text 11"/>
           <p:cNvSpPr txBox="1"/>
           <p:nvPr/>
         </p:nvSpPr>
         <p:spPr>
           <a:xfrm>
-            <a:off x="7013448" y="1234440"/>
-            <a:ext cx="1655064" cy="457200"/>
+            <a:off x="3392424" y="1051560"/>
+            <a:ext cx="2359152" cy="310896"/>
           </a:xfrm>
           <a:prstGeom prst="rect">
             <a:avLst/>
@@ -5972,7 +5661,66 @@
               <a:buNone/>
             </a:pPr>
             <a:r>
-              <a:rPr lang="en-US" sz="2000" b="1" dirty="0">
+              <a:rPr lang="en-US" sz="1150" b="1" dirty="0">
+                <a:solidFill>
+                  <a:srgbClr val="FFFFFF"/>
+                </a:solidFill>
+                <a:latin typeface="Meiryo" pitchFamily="34" charset="0"/>
+                <a:ea typeface="Meiryo" pitchFamily="34" charset="-122"/>
+                <a:cs typeface="Meiryo" pitchFamily="34" charset="-120"/>
+              </a:rPr>
+              <a:t>② 整理する</a:t>
+            </a:r>
+            <a:pPr algn="l" indent="0" marL="0">
+              <a:lnSpc>
+                <a:spcPct val="115000"/>
+              </a:lnSpc>
+              <a:buNone/>
+            </a:pPr>
+            <a:r>
+              <a:rPr lang="en-US" sz="900" dirty="0">
+                <a:solidFill>
+                  <a:srgbClr val="FFFFFF"/>
+                </a:solidFill>
+                <a:latin typeface="Meiryo" pitchFamily="34" charset="0"/>
+                <a:ea typeface="Meiryo" pitchFamily="34" charset="-122"/>
+                <a:cs typeface="Meiryo" pitchFamily="34" charset="-120"/>
+              </a:rPr>
+              <a:t>　生成AI</a:t>
+            </a:r>
+            <a:endParaRPr lang="en-US" sz="1150" dirty="0"/>
+          </a:p>
+        </p:txBody>
+      </p:sp>
+      <p:sp>
+        <p:nvSpPr>
+          <p:cNvPr id="15" name="Text 12"/>
+          <p:cNvSpPr txBox="1"/>
+          <p:nvPr/>
+        </p:nvSpPr>
+        <p:spPr>
+          <a:xfrm>
+            <a:off x="3392424" y="1435608"/>
+            <a:ext cx="2359152" cy="804672"/>
+          </a:xfrm>
+          <a:prstGeom prst="rect">
+            <a:avLst/>
+          </a:prstGeom>
+          <a:noFill/>
+          <a:ln/>
+        </p:spPr>
+        <p:txBody>
+          <a:bodyPr wrap="square" lIns="0" tIns="0" rIns="0" bIns="0" rtlCol="0" anchor="t"/>
+          <a:lstStyle/>
+          <a:p>
+            <a:pPr algn="l" indent="0" marL="0">
+              <a:lnSpc>
+                <a:spcPct val="115000"/>
+              </a:lnSpc>
+              <a:buNone/>
+            </a:pPr>
+            <a:r>
+              <a:rPr lang="en-US" sz="1000" dirty="0">
                 <a:solidFill>
                   <a:srgbClr val="1A1A1A"/>
                 </a:solidFill>
@@ -5980,22 +5728,45 @@
                 <a:ea typeface="Meiryo" pitchFamily="34" charset="-122"/>
                 <a:cs typeface="Meiryo" pitchFamily="34" charset="-120"/>
               </a:rPr>
-              <a:t>1,033万人</a:t>
-            </a:r>
-            <a:endParaRPr lang="en-US" sz="2000" dirty="0"/>
-          </a:p>
-        </p:txBody>
-      </p:sp>
-      <p:sp>
-        <p:nvSpPr>
-          <p:cNvPr id="22" name="Text 19"/>
+              <a:t>一言を「条件・処置・理由」に分けて文章化し、ロット・設備データと紐づけて事例として蓄積</a:t>
+            </a:r>
+            <a:endParaRPr lang="en-US" sz="1000" dirty="0"/>
+          </a:p>
+        </p:txBody>
+      </p:sp>
+      <p:sp>
+        <p:nvSpPr>
+          <p:cNvPr id="16" name="Shape 13"/>
+          <p:cNvSpPr/>
+          <p:nvPr/>
+        </p:nvSpPr>
+        <p:spPr>
+          <a:xfrm>
+            <a:off x="3392424" y="2295144"/>
+            <a:ext cx="2359152" cy="0"/>
+          </a:xfrm>
+          <a:prstGeom prst="line">
+            <a:avLst/>
+          </a:prstGeom>
+          <a:noFill/>
+          <a:ln w="9525">
+            <a:solidFill>
+              <a:srgbClr val="BFBFBF"/>
+            </a:solidFill>
+            <a:prstDash val="solid"/>
+          </a:ln>
+        </p:spPr>
+      </p:sp>
+      <p:sp>
+        <p:nvSpPr>
+          <p:cNvPr id="17" name="Text 14"/>
           <p:cNvSpPr txBox="1"/>
           <p:nvPr/>
         </p:nvSpPr>
         <p:spPr>
           <a:xfrm>
-            <a:off x="7013448" y="1783080"/>
-            <a:ext cx="1655064" cy="731520"/>
+            <a:off x="3392424" y="2350008"/>
+            <a:ext cx="2359152" cy="475488"/>
           </a:xfrm>
           <a:prstGeom prst="rect">
             <a:avLst/>
@@ -6014,7 +5785,7 @@
               <a:buNone/>
             </a:pPr>
             <a:r>
-              <a:rPr lang="en-US" sz="950" dirty="0">
+              <a:rPr lang="en-US" sz="900" b="1" dirty="0">
                 <a:solidFill>
                   <a:srgbClr val="1A1A1A"/>
                 </a:solidFill>
@@ -6022,22 +5793,81 @@
                 <a:ea typeface="Meiryo" pitchFamily="34" charset="-122"/>
                 <a:cs typeface="Meiryo" pitchFamily="34" charset="-120"/>
               </a:rPr>
-              <a:t>製造業就業者数（2025年。2023年の1,055万人から減少）</a:t>
-            </a:r>
-            <a:endParaRPr lang="en-US" sz="950" dirty="0"/>
-          </a:p>
-        </p:txBody>
-      </p:sp>
-      <p:sp>
-        <p:nvSpPr>
-          <p:cNvPr id="23" name="stat-2"/>
+              <a:t>道具：</a:t>
+            </a:r>
+            <a:pPr algn="l" indent="0" marL="0">
+              <a:lnSpc>
+                <a:spcPct val="115000"/>
+              </a:lnSpc>
+              <a:buNone/>
+            </a:pPr>
+            <a:r>
+              <a:rPr lang="en-US" sz="900" dirty="0">
+                <a:solidFill>
+                  <a:srgbClr val="1A1A1A"/>
+                </a:solidFill>
+                <a:latin typeface="Meiryo" pitchFamily="34" charset="0"/>
+                <a:ea typeface="Meiryo" pitchFamily="34" charset="-122"/>
+                <a:cs typeface="Meiryo" pitchFamily="34" charset="-120"/>
+              </a:rPr>
+              <a:t>生成AI＋現場データ基盤（クラウド）</a:t>
+            </a:r>
+            <a:endParaRPr lang="en-US" sz="900" dirty="0"/>
+          </a:p>
+        </p:txBody>
+      </p:sp>
+      <p:sp>
+        <p:nvSpPr>
+          <p:cNvPr id="18" name="Text 15"/>
+          <p:cNvSpPr txBox="1"/>
+          <p:nvPr/>
+        </p:nvSpPr>
+        <p:spPr>
+          <a:xfrm>
+            <a:off x="5861304" y="1801368"/>
+            <a:ext cx="338328" cy="329184"/>
+          </a:xfrm>
+          <a:prstGeom prst="rect">
+            <a:avLst/>
+          </a:prstGeom>
+          <a:noFill/>
+          <a:ln/>
+        </p:spPr>
+        <p:txBody>
+          <a:bodyPr wrap="square" lIns="0" tIns="0" rIns="0" bIns="0" rtlCol="0" anchor="ctr"/>
+          <a:lstStyle/>
+          <a:p>
+            <a:pPr algn="ctr" indent="0" marL="0">
+              <a:lnSpc>
+                <a:spcPct val="115000"/>
+              </a:lnSpc>
+              <a:buNone/>
+            </a:pPr>
+            <a:r>
+              <a:rPr lang="en-US" sz="1400" dirty="0">
+                <a:solidFill>
+                  <a:srgbClr val="1A1A1A"/>
+                </a:solidFill>
+                <a:latin typeface="Meiryo" pitchFamily="34" charset="0"/>
+                <a:ea typeface="Meiryo" pitchFamily="34" charset="-122"/>
+                <a:cs typeface="Meiryo" pitchFamily="34" charset="-120"/>
+              </a:rPr>
+              <a:t>▶</a:t>
+            </a:r>
+            <a:endParaRPr lang="en-US" sz="1400" dirty="0"/>
+          </a:p>
+        </p:txBody>
+      </p:sp>
+      <p:sp>
+        <p:nvSpPr>
+          <p:cNvPr id="19" name="step-3"/>
           <p:cNvSpPr/>
           <p:nvPr/>
         </p:nvSpPr>
         <p:spPr>
           <a:xfrm>
-            <a:off x="4937760" y="2670048"/>
-            <a:ext cx="1874520" cy="1481328"/>
+            <a:off x="6199632" y="1051560"/>
+            <a:ext cx="2578608" cy="1828800"/>
           </a:xfrm>
           <a:prstGeom prst="rect">
             <a:avLst/>
@@ -6055,14 +5885,34 @@
       </p:sp>
       <p:sp>
         <p:nvSpPr>
-          <p:cNvPr id="24" name="Text 21"/>
+          <p:cNvPr id="20" name="Shape 17"/>
+          <p:cNvSpPr/>
+          <p:nvPr/>
+        </p:nvSpPr>
+        <p:spPr>
+          <a:xfrm>
+            <a:off x="6199632" y="1051560"/>
+            <a:ext cx="2578608" cy="310896"/>
+          </a:xfrm>
+          <a:prstGeom prst="rect">
+            <a:avLst/>
+          </a:prstGeom>
+          <a:solidFill>
+            <a:srgbClr val="1A1A1A"/>
+          </a:solidFill>
+          <a:ln/>
+        </p:spPr>
+      </p:sp>
+      <p:sp>
+        <p:nvSpPr>
+          <p:cNvPr id="21" name="Text 18"/>
           <p:cNvSpPr txBox="1"/>
           <p:nvPr/>
         </p:nvSpPr>
         <p:spPr>
           <a:xfrm>
-            <a:off x="5047488" y="2807208"/>
-            <a:ext cx="1655064" cy="457200"/>
+            <a:off x="6309360" y="1051560"/>
+            <a:ext cx="2359152" cy="310896"/>
           </a:xfrm>
           <a:prstGeom prst="rect">
             <a:avLst/>
@@ -6081,7 +5931,66 @@
               <a:buNone/>
             </a:pPr>
             <a:r>
-              <a:rPr lang="en-US" sz="2000" b="1" dirty="0">
+              <a:rPr lang="en-US" sz="1150" b="1" dirty="0">
+                <a:solidFill>
+                  <a:srgbClr val="FFFFFF"/>
+                </a:solidFill>
+                <a:latin typeface="Meiryo" pitchFamily="34" charset="0"/>
+                <a:ea typeface="Meiryo" pitchFamily="34" charset="-122"/>
+                <a:cs typeface="Meiryo" pitchFamily="34" charset="-120"/>
+              </a:rPr>
+              <a:t>③ 引き継ぐ</a:t>
+            </a:r>
+            <a:pPr algn="l" indent="0" marL="0">
+              <a:lnSpc>
+                <a:spcPct val="115000"/>
+              </a:lnSpc>
+              <a:buNone/>
+            </a:pPr>
+            <a:r>
+              <a:rPr lang="en-US" sz="900" dirty="0">
+                <a:solidFill>
+                  <a:srgbClr val="FFFFFF"/>
+                </a:solidFill>
+                <a:latin typeface="Meiryo" pitchFamily="34" charset="0"/>
+                <a:ea typeface="Meiryo" pitchFamily="34" charset="-122"/>
+                <a:cs typeface="Meiryo" pitchFamily="34" charset="-120"/>
+              </a:rPr>
+              <a:t>　若手・機械</a:t>
+            </a:r>
+            <a:endParaRPr lang="en-US" sz="1150" dirty="0"/>
+          </a:p>
+        </p:txBody>
+      </p:sp>
+      <p:sp>
+        <p:nvSpPr>
+          <p:cNvPr id="22" name="Text 19"/>
+          <p:cNvSpPr txBox="1"/>
+          <p:nvPr/>
+        </p:nvSpPr>
+        <p:spPr>
+          <a:xfrm>
+            <a:off x="6309360" y="1435608"/>
+            <a:ext cx="2359152" cy="804672"/>
+          </a:xfrm>
+          <a:prstGeom prst="rect">
+            <a:avLst/>
+          </a:prstGeom>
+          <a:noFill/>
+          <a:ln/>
+        </p:spPr>
+        <p:txBody>
+          <a:bodyPr wrap="square" lIns="0" tIns="0" rIns="0" bIns="0" rtlCol="0" anchor="t"/>
+          <a:lstStyle/>
+          <a:p>
+            <a:pPr algn="l" indent="0" marL="0">
+              <a:lnSpc>
+                <a:spcPct val="115000"/>
+              </a:lnSpc>
+              <a:buNone/>
+            </a:pPr>
+            <a:r>
+              <a:rPr lang="en-US" sz="1000" dirty="0">
                 <a:solidFill>
                   <a:srgbClr val="1A1A1A"/>
                 </a:solidFill>
@@ -6089,71 +5998,27 @@
                 <a:ea typeface="Meiryo" pitchFamily="34" charset="-122"/>
                 <a:cs typeface="Meiryo" pitchFamily="34" charset="-120"/>
               </a:rPr>
-              <a:t>3社に2社</a:t>
-            </a:r>
-            <a:endParaRPr lang="en-US" sz="2000" dirty="0"/>
-          </a:p>
-        </p:txBody>
-      </p:sp>
-      <p:sp>
-        <p:nvSpPr>
-          <p:cNvPr id="25" name="Text 22"/>
-          <p:cNvSpPr txBox="1"/>
-          <p:nvPr/>
-        </p:nvSpPr>
-        <p:spPr>
-          <a:xfrm>
-            <a:off x="5047488" y="3355848"/>
-            <a:ext cx="1655064" cy="731520"/>
-          </a:xfrm>
-          <a:prstGeom prst="rect">
-            <a:avLst/>
-          </a:prstGeom>
-          <a:noFill/>
-          <a:ln/>
-        </p:spPr>
-        <p:txBody>
-          <a:bodyPr wrap="square" lIns="0" tIns="0" rIns="0" bIns="0" rtlCol="0" anchor="t"/>
-          <a:lstStyle/>
-          <a:p>
-            <a:pPr algn="l" indent="0" marL="0">
-              <a:lnSpc>
-                <a:spcPct val="115000"/>
-              </a:lnSpc>
-              <a:buNone/>
-            </a:pPr>
-            <a:r>
-              <a:rPr lang="en-US" sz="950" dirty="0">
-                <a:solidFill>
-                  <a:srgbClr val="1A1A1A"/>
-                </a:solidFill>
-                <a:latin typeface="Meiryo" pitchFamily="34" charset="0"/>
-                <a:ea typeface="Meiryo" pitchFamily="34" charset="-122"/>
-                <a:cs typeface="Meiryo" pitchFamily="34" charset="-120"/>
-              </a:rPr>
-              <a:t>技能継承がうまくいっていない製造企業</a:t>
-            </a:r>
-            <a:endParaRPr lang="en-US" sz="950" dirty="0"/>
-          </a:p>
-        </p:txBody>
-      </p:sp>
-      <p:sp>
-        <p:nvSpPr>
-          <p:cNvPr id="26" name="stat-3"/>
+              <a:t>似た条件になると、若手の画面に過去事例と推奨値を表示。ロボット・検査AIには条件を直接渡す</a:t>
+            </a:r>
+            <a:endParaRPr lang="en-US" sz="1000" dirty="0"/>
+          </a:p>
+        </p:txBody>
+      </p:sp>
+      <p:sp>
+        <p:nvSpPr>
+          <p:cNvPr id="23" name="Shape 20"/>
           <p:cNvSpPr/>
           <p:nvPr/>
         </p:nvSpPr>
         <p:spPr>
           <a:xfrm>
-            <a:off x="6903720" y="2670048"/>
-            <a:ext cx="1874520" cy="1481328"/>
-          </a:xfrm>
-          <a:prstGeom prst="rect">
-            <a:avLst/>
-          </a:prstGeom>
-          <a:solidFill>
-            <a:srgbClr val="FFFFFF"/>
-          </a:solidFill>
+            <a:off x="6309360" y="2295144"/>
+            <a:ext cx="2359152" cy="0"/>
+          </a:xfrm>
+          <a:prstGeom prst="line">
+            <a:avLst/>
+          </a:prstGeom>
+          <a:noFill/>
           <a:ln w="9525">
             <a:solidFill>
               <a:srgbClr val="BFBFBF"/>
@@ -6164,33 +6029,157 @@
       </p:sp>
       <p:sp>
         <p:nvSpPr>
+          <p:cNvPr id="24" name="Text 21"/>
+          <p:cNvSpPr txBox="1"/>
+          <p:nvPr/>
+        </p:nvSpPr>
+        <p:spPr>
+          <a:xfrm>
+            <a:off x="6309360" y="2350008"/>
+            <a:ext cx="2359152" cy="475488"/>
+          </a:xfrm>
+          <a:prstGeom prst="rect">
+            <a:avLst/>
+          </a:prstGeom>
+          <a:noFill/>
+          <a:ln/>
+        </p:spPr>
+        <p:txBody>
+          <a:bodyPr wrap="square" lIns="0" tIns="0" rIns="0" bIns="0" rtlCol="0" anchor="t"/>
+          <a:lstStyle/>
+          <a:p>
+            <a:pPr algn="l" indent="0" marL="0">
+              <a:lnSpc>
+                <a:spcPct val="115000"/>
+              </a:lnSpc>
+              <a:buNone/>
+            </a:pPr>
+            <a:r>
+              <a:rPr lang="en-US" sz="900" b="1" dirty="0">
+                <a:solidFill>
+                  <a:srgbClr val="1A1A1A"/>
+                </a:solidFill>
+                <a:latin typeface="Meiryo" pitchFamily="34" charset="0"/>
+                <a:ea typeface="Meiryo" pitchFamily="34" charset="-122"/>
+                <a:cs typeface="Meiryo" pitchFamily="34" charset="-120"/>
+              </a:rPr>
+              <a:t>道具：</a:t>
+            </a:r>
+            <a:pPr algn="l" indent="0" marL="0">
+              <a:lnSpc>
+                <a:spcPct val="115000"/>
+              </a:lnSpc>
+              <a:buNone/>
+            </a:pPr>
+            <a:r>
+              <a:rPr lang="en-US" sz="900" dirty="0">
+                <a:solidFill>
+                  <a:srgbClr val="1A1A1A"/>
+                </a:solidFill>
+                <a:latin typeface="Meiryo" pitchFamily="34" charset="0"/>
+                <a:ea typeface="Meiryo" pitchFamily="34" charset="-122"/>
+                <a:cs typeface="Meiryo" pitchFamily="34" charset="-120"/>
+              </a:rPr>
+              <a:t>アプリの通知＋API連携</a:t>
+            </a:r>
+            <a:endParaRPr lang="en-US" sz="900" dirty="0"/>
+          </a:p>
+        </p:txBody>
+      </p:sp>
+      <p:sp>
+        <p:nvSpPr>
+          <p:cNvPr id="25" name="onboarding"/>
+          <p:cNvSpPr/>
+          <p:nvPr/>
+        </p:nvSpPr>
+        <p:spPr>
+          <a:xfrm>
+            <a:off x="365760" y="3035808"/>
+            <a:ext cx="4023360" cy="1371600"/>
+          </a:xfrm>
+          <a:prstGeom prst="rect">
+            <a:avLst/>
+          </a:prstGeom>
+          <a:solidFill>
+            <a:srgbClr val="F2F2F2"/>
+          </a:solidFill>
+          <a:ln/>
+        </p:spPr>
+      </p:sp>
+      <p:sp>
+        <p:nvSpPr>
+          <p:cNvPr id="26" name="Text 23"/>
+          <p:cNvSpPr txBox="1"/>
+          <p:nvPr/>
+        </p:nvSpPr>
+        <p:spPr>
+          <a:xfrm>
+            <a:off x="502920" y="3108960"/>
+            <a:ext cx="3749040" cy="256032"/>
+          </a:xfrm>
+          <a:prstGeom prst="rect">
+            <a:avLst/>
+          </a:prstGeom>
+          <a:noFill/>
+          <a:ln/>
+        </p:spPr>
+        <p:txBody>
+          <a:bodyPr wrap="square" lIns="0" tIns="0" rIns="0" bIns="0" rtlCol="0" anchor="t"/>
+          <a:lstStyle/>
+          <a:p>
+            <a:pPr algn="l" indent="0" marL="0">
+              <a:lnSpc>
+                <a:spcPct val="115000"/>
+              </a:lnSpc>
+              <a:buNone/>
+            </a:pPr>
+            <a:r>
+              <a:rPr lang="en-US" sz="1100" b="1" dirty="0">
+                <a:solidFill>
+                  <a:srgbClr val="1A1A1A"/>
+                </a:solidFill>
+                <a:latin typeface="Meiryo" pitchFamily="34" charset="0"/>
+                <a:ea typeface="Meiryo" pitchFamily="34" charset="-122"/>
+                <a:cs typeface="Meiryo" pitchFamily="34" charset="-120"/>
+              </a:rPr>
+              <a:t>道具以外：導入支援（初年度・約2か月）</a:t>
+            </a:r>
+            <a:endParaRPr lang="en-US" sz="1100" dirty="0"/>
+          </a:p>
+        </p:txBody>
+      </p:sp>
+      <p:sp>
+        <p:nvSpPr>
           <p:cNvPr id="27" name="Text 24"/>
           <p:cNvSpPr txBox="1"/>
           <p:nvPr/>
         </p:nvSpPr>
         <p:spPr>
           <a:xfrm>
-            <a:off x="7013448" y="2807208"/>
-            <a:ext cx="1655064" cy="457200"/>
-          </a:xfrm>
-          <a:prstGeom prst="rect">
-            <a:avLst/>
-          </a:prstGeom>
-          <a:noFill/>
-          <a:ln/>
-        </p:spPr>
-        <p:txBody>
-          <a:bodyPr wrap="square" lIns="0" tIns="0" rIns="0" bIns="0" rtlCol="0" anchor="ctr"/>
-          <a:lstStyle/>
-          <a:p>
-            <a:pPr algn="l" indent="0" marL="0">
-              <a:lnSpc>
-                <a:spcPct val="115000"/>
-              </a:lnSpc>
-              <a:buNone/>
-            </a:pPr>
-            <a:r>
-              <a:rPr lang="en-US" sz="2000" b="1" dirty="0">
+            <a:off x="502920" y="3419856"/>
+            <a:ext cx="3749040" cy="932688"/>
+          </a:xfrm>
+          <a:prstGeom prst="rect">
+            <a:avLst/>
+          </a:prstGeom>
+          <a:noFill/>
+          <a:ln/>
+        </p:spPr>
+        <p:txBody>
+          <a:bodyPr wrap="square" lIns="0" tIns="0" rIns="0" bIns="0" rtlCol="0" anchor="t"/>
+          <a:lstStyle/>
+          <a:p>
+            <a:pPr algn="l" indent="0" marL="0">
+              <a:lnSpc>
+                <a:spcPct val="115000"/>
+              </a:lnSpc>
+              <a:spcAft>
+                <a:spcPts val="300"/>
+              </a:spcAft>
+              <a:buNone/>
+            </a:pPr>
+            <a:r>
+              <a:rPr lang="en-US" sz="950" dirty="0">
                 <a:solidFill>
                   <a:srgbClr val="1A1A1A"/>
                 </a:solidFill>
@@ -6198,9 +6187,55 @@
                 <a:ea typeface="Meiryo" pitchFamily="34" charset="-122"/>
                 <a:cs typeface="Meiryo" pitchFamily="34" charset="-120"/>
               </a:rPr>
-              <a:t>21.7%</a:t>
-            </a:r>
-            <a:endParaRPr lang="en-US" sz="2000" dirty="0"/>
+              <a:t>当社の担当者が現場に入り、熟練者に聞き取りして判断を棚卸し</a:t>
+            </a:r>
+            <a:endParaRPr lang="en-US" sz="950" dirty="0"/>
+          </a:p>
+          <a:p>
+            <a:pPr algn="l" indent="0" marL="0">
+              <a:lnSpc>
+                <a:spcPct val="115000"/>
+              </a:lnSpc>
+              <a:spcAft>
+                <a:spcPts val="300"/>
+              </a:spcAft>
+              <a:buNone/>
+            </a:pPr>
+            <a:r>
+              <a:rPr lang="en-US" sz="950" dirty="0">
+                <a:solidFill>
+                  <a:srgbClr val="1A1A1A"/>
+                </a:solidFill>
+                <a:latin typeface="Meiryo" pitchFamily="34" charset="0"/>
+                <a:ea typeface="Meiryo" pitchFamily="34" charset="-122"/>
+                <a:cs typeface="Meiryo" pitchFamily="34" charset="-120"/>
+              </a:rPr>
+              <a:t>既存の帳票・試験記録をデータとして移行</a:t>
+            </a:r>
+            <a:endParaRPr lang="en-US" sz="950" dirty="0"/>
+          </a:p>
+          <a:p>
+            <a:pPr algn="l" indent="0" marL="0">
+              <a:lnSpc>
+                <a:spcPct val="115000"/>
+              </a:lnSpc>
+              <a:spcAft>
+                <a:spcPts val="300"/>
+              </a:spcAft>
+              <a:buNone/>
+            </a:pPr>
+            <a:r>
+              <a:rPr lang="en-US" sz="950" dirty="0">
+                <a:solidFill>
+                  <a:srgbClr val="1A1A1A"/>
+                </a:solidFill>
+                <a:latin typeface="Meiryo" pitchFamily="34" charset="0"/>
+                <a:ea typeface="Meiryo" pitchFamily="34" charset="-122"/>
+                <a:cs typeface="Meiryo" pitchFamily="34" charset="-120"/>
+              </a:rPr>
+              <a:t>現場研修で、記録が「いつもの作業の延長」になるまで定着させる</a:t>
+            </a:r>
+            <a:endParaRPr lang="en-US" sz="950" dirty="0"/>
           </a:p>
         </p:txBody>
       </p:sp>
@@ -6212,8 +6247,8 @@
         </p:nvSpPr>
         <p:spPr>
           <a:xfrm>
-            <a:off x="7013448" y="3355848"/>
-            <a:ext cx="1655064" cy="731520"/>
+            <a:off x="4572000" y="3035808"/>
+            <a:ext cx="4206240" cy="237744"/>
           </a:xfrm>
           <a:prstGeom prst="rect">
             <a:avLst/>
@@ -6232,7 +6267,7 @@
               <a:buNone/>
             </a:pPr>
             <a:r>
-              <a:rPr lang="en-US" sz="950" dirty="0">
+              <a:rPr lang="en-US" sz="1000" b="1" dirty="0">
                 <a:solidFill>
                   <a:srgbClr val="1A1A1A"/>
                 </a:solidFill>
@@ -6240,22 +6275,790 @@
                 <a:ea typeface="Meiryo" pitchFamily="34" charset="-122"/>
                 <a:cs typeface="Meiryo" pitchFamily="34" charset="-120"/>
               </a:rPr>
-              <a:t>技能継承にデジタル技術を活用している企業</a:t>
-            </a:r>
-            <a:endParaRPr lang="en-US" sz="950" dirty="0"/>
-          </a:p>
-        </p:txBody>
-      </p:sp>
-      <p:sp>
-        <p:nvSpPr>
-          <p:cNvPr id="29" name="Text 26"/>
+              <a:t>機能の広げ方（製品戦略：基盤が先、追加機能は年1本ずつ）</a:t>
+            </a:r>
+            <a:endParaRPr lang="en-US" sz="1000" dirty="0"/>
+          </a:p>
+        </p:txBody>
+      </p:sp>
+      <p:sp>
+        <p:nvSpPr>
+          <p:cNvPr id="29" name="Shape 26"/>
+          <p:cNvSpPr/>
+          <p:nvPr/>
+        </p:nvSpPr>
+        <p:spPr>
+          <a:xfrm>
+            <a:off x="4572000" y="3310128"/>
+            <a:ext cx="4206240" cy="0"/>
+          </a:xfrm>
+          <a:prstGeom prst="line">
+            <a:avLst/>
+          </a:prstGeom>
+          <a:noFill/>
+          <a:ln w="9525">
+            <a:solidFill>
+              <a:srgbClr val="BFBFBF"/>
+            </a:solidFill>
+            <a:prstDash val="solid"/>
+          </a:ln>
+        </p:spPr>
+      </p:sp>
+      <p:sp>
+        <p:nvSpPr>
+          <p:cNvPr id="30" name="Text 27"/>
           <p:cNvSpPr txBox="1"/>
           <p:nvPr/>
         </p:nvSpPr>
         <p:spPr>
           <a:xfrm>
-            <a:off x="365760" y="4480560"/>
-            <a:ext cx="8412480" cy="347472"/>
+            <a:off x="4572000" y="3310128"/>
+            <a:ext cx="502920" cy="219456"/>
+          </a:xfrm>
+          <a:prstGeom prst="rect">
+            <a:avLst/>
+          </a:prstGeom>
+          <a:noFill/>
+          <a:ln/>
+        </p:spPr>
+        <p:txBody>
+          <a:bodyPr wrap="square" lIns="0" tIns="0" rIns="0" bIns="0" rtlCol="0" anchor="ctr"/>
+          <a:lstStyle/>
+          <a:p>
+            <a:pPr algn="l" indent="0" marL="0">
+              <a:lnSpc>
+                <a:spcPct val="115000"/>
+              </a:lnSpc>
+              <a:buNone/>
+            </a:pPr>
+            <a:r>
+              <a:rPr lang="en-US" sz="850" dirty="0">
+                <a:solidFill>
+                  <a:srgbClr val="4D4D4D"/>
+                </a:solidFill>
+                <a:latin typeface="Meiryo" pitchFamily="34" charset="0"/>
+                <a:ea typeface="Meiryo" pitchFamily="34" charset="-122"/>
+                <a:cs typeface="Meiryo" pitchFamily="34" charset="-120"/>
+              </a:rPr>
+              <a:t>1年目</a:t>
+            </a:r>
+            <a:endParaRPr lang="en-US" sz="850" dirty="0"/>
+          </a:p>
+        </p:txBody>
+      </p:sp>
+      <p:sp>
+        <p:nvSpPr>
+          <p:cNvPr id="31" name="Text 28"/>
+          <p:cNvSpPr txBox="1"/>
+          <p:nvPr/>
+        </p:nvSpPr>
+        <p:spPr>
+          <a:xfrm>
+            <a:off x="5074920" y="3310128"/>
+            <a:ext cx="685800" cy="219456"/>
+          </a:xfrm>
+          <a:prstGeom prst="rect">
+            <a:avLst/>
+          </a:prstGeom>
+          <a:noFill/>
+          <a:ln/>
+        </p:spPr>
+        <p:txBody>
+          <a:bodyPr wrap="square" lIns="0" tIns="0" rIns="0" bIns="0" rtlCol="0" anchor="ctr"/>
+          <a:lstStyle/>
+          <a:p>
+            <a:pPr algn="l" indent="0" marL="0">
+              <a:lnSpc>
+                <a:spcPct val="115000"/>
+              </a:lnSpc>
+              <a:buNone/>
+            </a:pPr>
+            <a:r>
+              <a:rPr lang="en-US" sz="900" b="1" dirty="0">
+                <a:solidFill>
+                  <a:srgbClr val="1A1A1A"/>
+                </a:solidFill>
+                <a:latin typeface="Meiryo" pitchFamily="34" charset="0"/>
+                <a:ea typeface="Meiryo" pitchFamily="34" charset="-122"/>
+                <a:cs typeface="Meiryo" pitchFamily="34" charset="-120"/>
+              </a:rPr>
+              <a:t>基盤</a:t>
+            </a:r>
+            <a:endParaRPr lang="en-US" sz="900" dirty="0"/>
+          </a:p>
+        </p:txBody>
+      </p:sp>
+      <p:sp>
+        <p:nvSpPr>
+          <p:cNvPr id="32" name="Text 29"/>
+          <p:cNvSpPr txBox="1"/>
+          <p:nvPr/>
+        </p:nvSpPr>
+        <p:spPr>
+          <a:xfrm>
+            <a:off x="5760720" y="3310128"/>
+            <a:ext cx="3017520" cy="219456"/>
+          </a:xfrm>
+          <a:prstGeom prst="rect">
+            <a:avLst/>
+          </a:prstGeom>
+          <a:noFill/>
+          <a:ln/>
+        </p:spPr>
+        <p:txBody>
+          <a:bodyPr wrap="square" lIns="0" tIns="0" rIns="0" bIns="0" rtlCol="0" anchor="ctr"/>
+          <a:lstStyle/>
+          <a:p>
+            <a:pPr algn="l" indent="0" marL="0">
+              <a:lnSpc>
+                <a:spcPct val="115000"/>
+              </a:lnSpc>
+              <a:buNone/>
+            </a:pPr>
+            <a:r>
+              <a:rPr lang="en-US" sz="850" dirty="0">
+                <a:solidFill>
+                  <a:srgbClr val="1A1A1A"/>
+                </a:solidFill>
+                <a:latin typeface="Meiryo" pitchFamily="34" charset="0"/>
+                <a:ea typeface="Meiryo" pitchFamily="34" charset="-122"/>
+                <a:cs typeface="Meiryo" pitchFamily="34" charset="-120"/>
+              </a:rPr>
+              <a:t>記録・検索（①②と過去事例の検索）。全顧客が使う</a:t>
+            </a:r>
+            <a:endParaRPr lang="en-US" sz="850" dirty="0"/>
+          </a:p>
+        </p:txBody>
+      </p:sp>
+      <p:sp>
+        <p:nvSpPr>
+          <p:cNvPr id="33" name="Shape 30"/>
+          <p:cNvSpPr/>
+          <p:nvPr/>
+        </p:nvSpPr>
+        <p:spPr>
+          <a:xfrm>
+            <a:off x="4572000" y="3529584"/>
+            <a:ext cx="4206240" cy="0"/>
+          </a:xfrm>
+          <a:prstGeom prst="line">
+            <a:avLst/>
+          </a:prstGeom>
+          <a:noFill/>
+          <a:ln w="9525">
+            <a:solidFill>
+              <a:srgbClr val="BFBFBF"/>
+            </a:solidFill>
+            <a:prstDash val="solid"/>
+          </a:ln>
+        </p:spPr>
+      </p:sp>
+      <p:sp>
+        <p:nvSpPr>
+          <p:cNvPr id="34" name="Text 31"/>
+          <p:cNvSpPr txBox="1"/>
+          <p:nvPr/>
+        </p:nvSpPr>
+        <p:spPr>
+          <a:xfrm>
+            <a:off x="4572000" y="3529584"/>
+            <a:ext cx="502920" cy="219456"/>
+          </a:xfrm>
+          <a:prstGeom prst="rect">
+            <a:avLst/>
+          </a:prstGeom>
+          <a:noFill/>
+          <a:ln/>
+        </p:spPr>
+        <p:txBody>
+          <a:bodyPr wrap="square" lIns="0" tIns="0" rIns="0" bIns="0" rtlCol="0" anchor="ctr"/>
+          <a:lstStyle/>
+          <a:p>
+            <a:pPr algn="l" indent="0" marL="0">
+              <a:lnSpc>
+                <a:spcPct val="115000"/>
+              </a:lnSpc>
+              <a:buNone/>
+            </a:pPr>
+            <a:r>
+              <a:rPr lang="en-US" sz="850" dirty="0">
+                <a:solidFill>
+                  <a:srgbClr val="4D4D4D"/>
+                </a:solidFill>
+                <a:latin typeface="Meiryo" pitchFamily="34" charset="0"/>
+                <a:ea typeface="Meiryo" pitchFamily="34" charset="-122"/>
+                <a:cs typeface="Meiryo" pitchFamily="34" charset="-120"/>
+              </a:rPr>
+              <a:t>2年目</a:t>
+            </a:r>
+            <a:endParaRPr lang="en-US" sz="850" dirty="0"/>
+          </a:p>
+        </p:txBody>
+      </p:sp>
+      <p:sp>
+        <p:nvSpPr>
+          <p:cNvPr id="35" name="Text 32"/>
+          <p:cNvSpPr txBox="1"/>
+          <p:nvPr/>
+        </p:nvSpPr>
+        <p:spPr>
+          <a:xfrm>
+            <a:off x="5074920" y="3529584"/>
+            <a:ext cx="685800" cy="219456"/>
+          </a:xfrm>
+          <a:prstGeom prst="rect">
+            <a:avLst/>
+          </a:prstGeom>
+          <a:noFill/>
+          <a:ln/>
+        </p:spPr>
+        <p:txBody>
+          <a:bodyPr wrap="square" lIns="0" tIns="0" rIns="0" bIns="0" rtlCol="0" anchor="ctr"/>
+          <a:lstStyle/>
+          <a:p>
+            <a:pPr algn="l" indent="0" marL="0">
+              <a:lnSpc>
+                <a:spcPct val="115000"/>
+              </a:lnSpc>
+              <a:buNone/>
+            </a:pPr>
+            <a:r>
+              <a:rPr lang="en-US" sz="900" b="1" dirty="0">
+                <a:solidFill>
+                  <a:srgbClr val="1A1A1A"/>
+                </a:solidFill>
+                <a:latin typeface="Meiryo" pitchFamily="34" charset="0"/>
+                <a:ea typeface="Meiryo" pitchFamily="34" charset="-122"/>
+                <a:cs typeface="Meiryo" pitchFamily="34" charset="-120"/>
+              </a:rPr>
+              <a:t>KNACK</a:t>
+            </a:r>
+            <a:endParaRPr lang="en-US" sz="900" dirty="0"/>
+          </a:p>
+        </p:txBody>
+      </p:sp>
+      <p:sp>
+        <p:nvSpPr>
+          <p:cNvPr id="36" name="Text 33"/>
+          <p:cNvSpPr txBox="1"/>
+          <p:nvPr/>
+        </p:nvSpPr>
+        <p:spPr>
+          <a:xfrm>
+            <a:off x="5760720" y="3529584"/>
+            <a:ext cx="3017520" cy="219456"/>
+          </a:xfrm>
+          <a:prstGeom prst="rect">
+            <a:avLst/>
+          </a:prstGeom>
+          <a:noFill/>
+          <a:ln/>
+        </p:spPr>
+        <p:txBody>
+          <a:bodyPr wrap="square" lIns="0" tIns="0" rIns="0" bIns="0" rtlCol="0" anchor="ctr"/>
+          <a:lstStyle/>
+          <a:p>
+            <a:pPr algn="l" indent="0" marL="0">
+              <a:lnSpc>
+                <a:spcPct val="115000"/>
+              </a:lnSpc>
+              <a:buNone/>
+            </a:pPr>
+            <a:r>
+              <a:rPr lang="en-US" sz="850" dirty="0">
+                <a:solidFill>
+                  <a:srgbClr val="1A1A1A"/>
+                </a:solidFill>
+                <a:latin typeface="Meiryo" pitchFamily="34" charset="0"/>
+                <a:ea typeface="Meiryo" pitchFamily="34" charset="-122"/>
+                <a:cs typeface="Meiryo" pitchFamily="34" charset="-120"/>
+              </a:rPr>
+              <a:t>推奨値の自動提示（③）</a:t>
+            </a:r>
+            <a:endParaRPr lang="en-US" sz="850" dirty="0"/>
+          </a:p>
+        </p:txBody>
+      </p:sp>
+      <p:sp>
+        <p:nvSpPr>
+          <p:cNvPr id="37" name="Shape 34"/>
+          <p:cNvSpPr/>
+          <p:nvPr/>
+        </p:nvSpPr>
+        <p:spPr>
+          <a:xfrm>
+            <a:off x="4572000" y="3749040"/>
+            <a:ext cx="4206240" cy="0"/>
+          </a:xfrm>
+          <a:prstGeom prst="line">
+            <a:avLst/>
+          </a:prstGeom>
+          <a:noFill/>
+          <a:ln w="9525">
+            <a:solidFill>
+              <a:srgbClr val="BFBFBF"/>
+            </a:solidFill>
+            <a:prstDash val="solid"/>
+          </a:ln>
+        </p:spPr>
+      </p:sp>
+      <p:sp>
+        <p:nvSpPr>
+          <p:cNvPr id="38" name="Text 35"/>
+          <p:cNvSpPr txBox="1"/>
+          <p:nvPr/>
+        </p:nvSpPr>
+        <p:spPr>
+          <a:xfrm>
+            <a:off x="4572000" y="3749040"/>
+            <a:ext cx="502920" cy="219456"/>
+          </a:xfrm>
+          <a:prstGeom prst="rect">
+            <a:avLst/>
+          </a:prstGeom>
+          <a:noFill/>
+          <a:ln/>
+        </p:spPr>
+        <p:txBody>
+          <a:bodyPr wrap="square" lIns="0" tIns="0" rIns="0" bIns="0" rtlCol="0" anchor="ctr"/>
+          <a:lstStyle/>
+          <a:p>
+            <a:pPr algn="l" indent="0" marL="0">
+              <a:lnSpc>
+                <a:spcPct val="115000"/>
+              </a:lnSpc>
+              <a:buNone/>
+            </a:pPr>
+            <a:r>
+              <a:rPr lang="en-US" sz="850" dirty="0">
+                <a:solidFill>
+                  <a:srgbClr val="4D4D4D"/>
+                </a:solidFill>
+                <a:latin typeface="Meiryo" pitchFamily="34" charset="0"/>
+                <a:ea typeface="Meiryo" pitchFamily="34" charset="-122"/>
+                <a:cs typeface="Meiryo" pitchFamily="34" charset="-120"/>
+              </a:rPr>
+              <a:t>3年目</a:t>
+            </a:r>
+            <a:endParaRPr lang="en-US" sz="850" dirty="0"/>
+          </a:p>
+        </p:txBody>
+      </p:sp>
+      <p:sp>
+        <p:nvSpPr>
+          <p:cNvPr id="39" name="Text 36"/>
+          <p:cNvSpPr txBox="1"/>
+          <p:nvPr/>
+        </p:nvSpPr>
+        <p:spPr>
+          <a:xfrm>
+            <a:off x="5074920" y="3749040"/>
+            <a:ext cx="685800" cy="219456"/>
+          </a:xfrm>
+          <a:prstGeom prst="rect">
+            <a:avLst/>
+          </a:prstGeom>
+          <a:noFill/>
+          <a:ln/>
+        </p:spPr>
+        <p:txBody>
+          <a:bodyPr wrap="square" lIns="0" tIns="0" rIns="0" bIns="0" rtlCol="0" anchor="ctr"/>
+          <a:lstStyle/>
+          <a:p>
+            <a:pPr algn="l" indent="0" marL="0">
+              <a:lnSpc>
+                <a:spcPct val="115000"/>
+              </a:lnSpc>
+              <a:buNone/>
+            </a:pPr>
+            <a:r>
+              <a:rPr lang="en-US" sz="900" b="1" dirty="0">
+                <a:solidFill>
+                  <a:srgbClr val="1A1A1A"/>
+                </a:solidFill>
+                <a:latin typeface="Meiryo" pitchFamily="34" charset="0"/>
+                <a:ea typeface="Meiryo" pitchFamily="34" charset="-122"/>
+                <a:cs typeface="Meiryo" pitchFamily="34" charset="-120"/>
+              </a:rPr>
+              <a:t>TRACE</a:t>
+            </a:r>
+            <a:endParaRPr lang="en-US" sz="900" dirty="0"/>
+          </a:p>
+        </p:txBody>
+      </p:sp>
+      <p:sp>
+        <p:nvSpPr>
+          <p:cNvPr id="40" name="Text 37"/>
+          <p:cNvSpPr txBox="1"/>
+          <p:nvPr/>
+        </p:nvSpPr>
+        <p:spPr>
+          <a:xfrm>
+            <a:off x="5760720" y="3749040"/>
+            <a:ext cx="3017520" cy="219456"/>
+          </a:xfrm>
+          <a:prstGeom prst="rect">
+            <a:avLst/>
+          </a:prstGeom>
+          <a:noFill/>
+          <a:ln/>
+        </p:spPr>
+        <p:txBody>
+          <a:bodyPr wrap="square" lIns="0" tIns="0" rIns="0" bIns="0" rtlCol="0" anchor="ctr"/>
+          <a:lstStyle/>
+          <a:p>
+            <a:pPr algn="l" indent="0" marL="0">
+              <a:lnSpc>
+                <a:spcPct val="115000"/>
+              </a:lnSpc>
+              <a:buNone/>
+            </a:pPr>
+            <a:r>
+              <a:rPr lang="en-US" sz="850" dirty="0">
+                <a:solidFill>
+                  <a:srgbClr val="1A1A1A"/>
+                </a:solidFill>
+                <a:latin typeface="Meiryo" pitchFamily="34" charset="0"/>
+                <a:ea typeface="Meiryo" pitchFamily="34" charset="-122"/>
+                <a:cs typeface="Meiryo" pitchFamily="34" charset="-120"/>
+              </a:rPr>
+              <a:t>不具合時に、材料ロットから納入先まで追跡</a:t>
+            </a:r>
+            <a:endParaRPr lang="en-US" sz="850" dirty="0"/>
+          </a:p>
+        </p:txBody>
+      </p:sp>
+      <p:sp>
+        <p:nvSpPr>
+          <p:cNvPr id="41" name="Shape 38"/>
+          <p:cNvSpPr/>
+          <p:nvPr/>
+        </p:nvSpPr>
+        <p:spPr>
+          <a:xfrm>
+            <a:off x="4572000" y="3968496"/>
+            <a:ext cx="4206240" cy="0"/>
+          </a:xfrm>
+          <a:prstGeom prst="line">
+            <a:avLst/>
+          </a:prstGeom>
+          <a:noFill/>
+          <a:ln w="9525">
+            <a:solidFill>
+              <a:srgbClr val="BFBFBF"/>
+            </a:solidFill>
+            <a:prstDash val="solid"/>
+          </a:ln>
+        </p:spPr>
+      </p:sp>
+      <p:sp>
+        <p:nvSpPr>
+          <p:cNvPr id="42" name="Text 39"/>
+          <p:cNvSpPr txBox="1"/>
+          <p:nvPr/>
+        </p:nvSpPr>
+        <p:spPr>
+          <a:xfrm>
+            <a:off x="4572000" y="3968496"/>
+            <a:ext cx="502920" cy="219456"/>
+          </a:xfrm>
+          <a:prstGeom prst="rect">
+            <a:avLst/>
+          </a:prstGeom>
+          <a:noFill/>
+          <a:ln/>
+        </p:spPr>
+        <p:txBody>
+          <a:bodyPr wrap="square" lIns="0" tIns="0" rIns="0" bIns="0" rtlCol="0" anchor="ctr"/>
+          <a:lstStyle/>
+          <a:p>
+            <a:pPr algn="l" indent="0" marL="0">
+              <a:lnSpc>
+                <a:spcPct val="115000"/>
+              </a:lnSpc>
+              <a:buNone/>
+            </a:pPr>
+            <a:r>
+              <a:rPr lang="en-US" sz="850" dirty="0">
+                <a:solidFill>
+                  <a:srgbClr val="4D4D4D"/>
+                </a:solidFill>
+                <a:latin typeface="Meiryo" pitchFamily="34" charset="0"/>
+                <a:ea typeface="Meiryo" pitchFamily="34" charset="-122"/>
+                <a:cs typeface="Meiryo" pitchFamily="34" charset="-120"/>
+              </a:rPr>
+              <a:t>4年目</a:t>
+            </a:r>
+            <a:endParaRPr lang="en-US" sz="850" dirty="0"/>
+          </a:p>
+        </p:txBody>
+      </p:sp>
+      <p:sp>
+        <p:nvSpPr>
+          <p:cNvPr id="43" name="Text 40"/>
+          <p:cNvSpPr txBox="1"/>
+          <p:nvPr/>
+        </p:nvSpPr>
+        <p:spPr>
+          <a:xfrm>
+            <a:off x="5074920" y="3968496"/>
+            <a:ext cx="685800" cy="219456"/>
+          </a:xfrm>
+          <a:prstGeom prst="rect">
+            <a:avLst/>
+          </a:prstGeom>
+          <a:noFill/>
+          <a:ln/>
+        </p:spPr>
+        <p:txBody>
+          <a:bodyPr wrap="square" lIns="0" tIns="0" rIns="0" bIns="0" rtlCol="0" anchor="ctr"/>
+          <a:lstStyle/>
+          <a:p>
+            <a:pPr algn="l" indent="0" marL="0">
+              <a:lnSpc>
+                <a:spcPct val="115000"/>
+              </a:lnSpc>
+              <a:buNone/>
+            </a:pPr>
+            <a:r>
+              <a:rPr lang="en-US" sz="900" b="1" dirty="0">
+                <a:solidFill>
+                  <a:srgbClr val="1A1A1A"/>
+                </a:solidFill>
+                <a:latin typeface="Meiryo" pitchFamily="34" charset="0"/>
+                <a:ea typeface="Meiryo" pitchFamily="34" charset="-122"/>
+                <a:cs typeface="Meiryo" pitchFamily="34" charset="-120"/>
+              </a:rPr>
+              <a:t>TWIN</a:t>
+            </a:r>
+            <a:endParaRPr lang="en-US" sz="900" dirty="0"/>
+          </a:p>
+        </p:txBody>
+      </p:sp>
+      <p:sp>
+        <p:nvSpPr>
+          <p:cNvPr id="44" name="Text 41"/>
+          <p:cNvSpPr txBox="1"/>
+          <p:nvPr/>
+        </p:nvSpPr>
+        <p:spPr>
+          <a:xfrm>
+            <a:off x="5760720" y="3968496"/>
+            <a:ext cx="3017520" cy="219456"/>
+          </a:xfrm>
+          <a:prstGeom prst="rect">
+            <a:avLst/>
+          </a:prstGeom>
+          <a:noFill/>
+          <a:ln/>
+        </p:spPr>
+        <p:txBody>
+          <a:bodyPr wrap="square" lIns="0" tIns="0" rIns="0" bIns="0" rtlCol="0" anchor="ctr"/>
+          <a:lstStyle/>
+          <a:p>
+            <a:pPr algn="l" indent="0" marL="0">
+              <a:lnSpc>
+                <a:spcPct val="115000"/>
+              </a:lnSpc>
+              <a:buNone/>
+            </a:pPr>
+            <a:r>
+              <a:rPr lang="en-US" sz="850" dirty="0">
+                <a:solidFill>
+                  <a:srgbClr val="1A1A1A"/>
+                </a:solidFill>
+                <a:latin typeface="Meiryo" pitchFamily="34" charset="0"/>
+                <a:ea typeface="Meiryo" pitchFamily="34" charset="-122"/>
+                <a:cs typeface="Meiryo" pitchFamily="34" charset="-120"/>
+              </a:rPr>
+              <a:t>欠員・設備停止時の計画組み替えを試算</a:t>
+            </a:r>
+            <a:endParaRPr lang="en-US" sz="850" dirty="0"/>
+          </a:p>
+        </p:txBody>
+      </p:sp>
+      <p:sp>
+        <p:nvSpPr>
+          <p:cNvPr id="45" name="Shape 42"/>
+          <p:cNvSpPr/>
+          <p:nvPr/>
+        </p:nvSpPr>
+        <p:spPr>
+          <a:xfrm>
+            <a:off x="4572000" y="4187952"/>
+            <a:ext cx="4206240" cy="0"/>
+          </a:xfrm>
+          <a:prstGeom prst="line">
+            <a:avLst/>
+          </a:prstGeom>
+          <a:noFill/>
+          <a:ln w="9525">
+            <a:solidFill>
+              <a:srgbClr val="BFBFBF"/>
+            </a:solidFill>
+            <a:prstDash val="solid"/>
+          </a:ln>
+        </p:spPr>
+      </p:sp>
+      <p:sp>
+        <p:nvSpPr>
+          <p:cNvPr id="46" name="Text 43"/>
+          <p:cNvSpPr txBox="1"/>
+          <p:nvPr/>
+        </p:nvSpPr>
+        <p:spPr>
+          <a:xfrm>
+            <a:off x="4572000" y="4187952"/>
+            <a:ext cx="502920" cy="219456"/>
+          </a:xfrm>
+          <a:prstGeom prst="rect">
+            <a:avLst/>
+          </a:prstGeom>
+          <a:noFill/>
+          <a:ln/>
+        </p:spPr>
+        <p:txBody>
+          <a:bodyPr wrap="square" lIns="0" tIns="0" rIns="0" bIns="0" rtlCol="0" anchor="ctr"/>
+          <a:lstStyle/>
+          <a:p>
+            <a:pPr algn="l" indent="0" marL="0">
+              <a:lnSpc>
+                <a:spcPct val="115000"/>
+              </a:lnSpc>
+              <a:buNone/>
+            </a:pPr>
+            <a:r>
+              <a:rPr lang="en-US" sz="850" dirty="0">
+                <a:solidFill>
+                  <a:srgbClr val="4D4D4D"/>
+                </a:solidFill>
+                <a:latin typeface="Meiryo" pitchFamily="34" charset="0"/>
+                <a:ea typeface="Meiryo" pitchFamily="34" charset="-122"/>
+                <a:cs typeface="Meiryo" pitchFamily="34" charset="-120"/>
+              </a:rPr>
+              <a:t>5年目</a:t>
+            </a:r>
+            <a:endParaRPr lang="en-US" sz="850" dirty="0"/>
+          </a:p>
+        </p:txBody>
+      </p:sp>
+      <p:sp>
+        <p:nvSpPr>
+          <p:cNvPr id="47" name="Text 44"/>
+          <p:cNvSpPr txBox="1"/>
+          <p:nvPr/>
+        </p:nvSpPr>
+        <p:spPr>
+          <a:xfrm>
+            <a:off x="5074920" y="4187952"/>
+            <a:ext cx="685800" cy="219456"/>
+          </a:xfrm>
+          <a:prstGeom prst="rect">
+            <a:avLst/>
+          </a:prstGeom>
+          <a:noFill/>
+          <a:ln/>
+        </p:spPr>
+        <p:txBody>
+          <a:bodyPr wrap="square" lIns="0" tIns="0" rIns="0" bIns="0" rtlCol="0" anchor="ctr"/>
+          <a:lstStyle/>
+          <a:p>
+            <a:pPr algn="l" indent="0" marL="0">
+              <a:lnSpc>
+                <a:spcPct val="115000"/>
+              </a:lnSpc>
+              <a:buNone/>
+            </a:pPr>
+            <a:r>
+              <a:rPr lang="en-US" sz="900" b="1" dirty="0">
+                <a:solidFill>
+                  <a:srgbClr val="1A1A1A"/>
+                </a:solidFill>
+                <a:latin typeface="Meiryo" pitchFamily="34" charset="0"/>
+                <a:ea typeface="Meiryo" pitchFamily="34" charset="-122"/>
+                <a:cs typeface="Meiryo" pitchFamily="34" charset="-120"/>
+              </a:rPr>
+              <a:t>FLOW</a:t>
+            </a:r>
+            <a:endParaRPr lang="en-US" sz="900" dirty="0"/>
+          </a:p>
+        </p:txBody>
+      </p:sp>
+      <p:sp>
+        <p:nvSpPr>
+          <p:cNvPr id="48" name="Text 45"/>
+          <p:cNvSpPr txBox="1"/>
+          <p:nvPr/>
+        </p:nvSpPr>
+        <p:spPr>
+          <a:xfrm>
+            <a:off x="5760720" y="4187952"/>
+            <a:ext cx="3017520" cy="219456"/>
+          </a:xfrm>
+          <a:prstGeom prst="rect">
+            <a:avLst/>
+          </a:prstGeom>
+          <a:noFill/>
+          <a:ln/>
+        </p:spPr>
+        <p:txBody>
+          <a:bodyPr wrap="square" lIns="0" tIns="0" rIns="0" bIns="0" rtlCol="0" anchor="ctr"/>
+          <a:lstStyle/>
+          <a:p>
+            <a:pPr algn="l" indent="0" marL="0">
+              <a:lnSpc>
+                <a:spcPct val="115000"/>
+              </a:lnSpc>
+              <a:buNone/>
+            </a:pPr>
+            <a:r>
+              <a:rPr lang="en-US" sz="850" dirty="0">
+                <a:solidFill>
+                  <a:srgbClr val="1A1A1A"/>
+                </a:solidFill>
+                <a:latin typeface="Meiryo" pitchFamily="34" charset="0"/>
+                <a:ea typeface="Meiryo" pitchFamily="34" charset="-122"/>
+                <a:cs typeface="Meiryo" pitchFamily="34" charset="-120"/>
+              </a:rPr>
+              <a:t>搬送ロボット・検査AIと連携</a:t>
+            </a:r>
+            <a:endParaRPr lang="en-US" sz="850" dirty="0"/>
+          </a:p>
+        </p:txBody>
+      </p:sp>
+      <p:sp>
+        <p:nvSpPr>
+          <p:cNvPr id="49" name="Shape 46"/>
+          <p:cNvSpPr/>
+          <p:nvPr/>
+        </p:nvSpPr>
+        <p:spPr>
+          <a:xfrm>
+            <a:off x="4572000" y="4407408"/>
+            <a:ext cx="4206240" cy="0"/>
+          </a:xfrm>
+          <a:prstGeom prst="line">
+            <a:avLst/>
+          </a:prstGeom>
+          <a:noFill/>
+          <a:ln w="9525">
+            <a:solidFill>
+              <a:srgbClr val="BFBFBF"/>
+            </a:solidFill>
+            <a:prstDash val="solid"/>
+          </a:ln>
+        </p:spPr>
+      </p:sp>
+      <p:sp>
+        <p:nvSpPr>
+          <p:cNvPr id="50" name="Text 47"/>
+          <p:cNvSpPr txBox="1"/>
+          <p:nvPr/>
+        </p:nvSpPr>
+        <p:spPr>
+          <a:xfrm>
+            <a:off x="365760" y="4498848"/>
+            <a:ext cx="8412480" cy="274320"/>
           </a:xfrm>
           <a:prstGeom prst="rect">
             <a:avLst/>
@@ -6282,7 +7085,7 @@
                 <a:ea typeface="Meiryo" pitchFamily="34" charset="-122"/>
                 <a:cs typeface="Meiryo" pitchFamily="34" charset="-120"/>
               </a:rPr>
-              <a:t>出典：国土交通省（総務省「労働力調査」2024年）／経済産業省・厚生労働省・文部科学省「ものづくり白書」2026年版／労働政策研究・研修機構「ものづくり産業における人材確保・定着と技能継承に関する調査」（2026年5月）</a:t>
+              <a:t>対象：電線・ケーブル工場の生産技術・製造部門（のちに、その製品を施工する工事会社）</a:t>
             </a:r>
             <a:endParaRPr lang="en-US" sz="800" dirty="0"/>
           </a:p>
@@ -6397,7 +7200,7 @@
                 <a:ea typeface="Meiryo" pitchFamily="34" charset="-122"/>
                 <a:cs typeface="Meiryo" pitchFamily="34" charset="-120"/>
               </a:rPr>
-              <a:t>設問①-1　事業内容 ─ 熟練者の判断を、次の人と機械に渡す</a:t>
+              <a:t>収益の仕組み ─ 顧客は年300万円を払い、約2か月で元を取る</a:t>
             </a:r>
             <a:endParaRPr lang="en-US" sz="2000" dirty="0"/>
           </a:p>
@@ -6439,7 +7242,7 @@
                 <a:ea typeface="Meiryo" pitchFamily="34" charset="-122"/>
                 <a:cs typeface="Meiryo" pitchFamily="34" charset="-120"/>
               </a:rPr>
-              <a:t>1拠点あたり年300万円。顧客は約2.1か月で初年度費用を回収できる</a:t>
+              <a:t>当社の収入は、毎年積み上がる利用料と、初年度だけの導入支援の二本</a:t>
             </a:r>
             <a:endParaRPr lang="en-US" sz="1200" dirty="0"/>
           </a:p>
@@ -6447,14 +7250,98 @@
       </p:sp>
       <p:sp>
         <p:nvSpPr>
-          <p:cNvPr id="5" name="Shape 2"/>
+          <p:cNvPr id="5" name="Text 2"/>
+          <p:cNvSpPr txBox="1"/>
+          <p:nvPr/>
+        </p:nvSpPr>
+        <p:spPr>
+          <a:xfrm>
+            <a:off x="365760" y="1051560"/>
+            <a:ext cx="4069080" cy="237744"/>
+          </a:xfrm>
+          <a:prstGeom prst="rect">
+            <a:avLst/>
+          </a:prstGeom>
+          <a:noFill/>
+          <a:ln/>
+        </p:spPr>
+        <p:txBody>
+          <a:bodyPr wrap="square" lIns="0" tIns="0" rIns="0" bIns="0" rtlCol="0" anchor="t"/>
+          <a:lstStyle/>
+          <a:p>
+            <a:pPr algn="l" indent="0" marL="0">
+              <a:lnSpc>
+                <a:spcPct val="115000"/>
+              </a:lnSpc>
+              <a:buNone/>
+            </a:pPr>
+            <a:r>
+              <a:rPr lang="en-US" sz="1050" b="1" dirty="0">
+                <a:solidFill>
+                  <a:srgbClr val="1A1A1A"/>
+                </a:solidFill>
+                <a:latin typeface="Meiryo" pitchFamily="34" charset="0"/>
+                <a:ea typeface="Meiryo" pitchFamily="34" charset="-122"/>
+                <a:cs typeface="Meiryo" pitchFamily="34" charset="-120"/>
+              </a:rPr>
+              <a:t>1拠点が払う金額（万円）</a:t>
+            </a:r>
+            <a:endParaRPr lang="en-US" sz="1050" dirty="0"/>
+          </a:p>
+        </p:txBody>
+      </p:sp>
+      <p:sp>
+        <p:nvSpPr>
+          <p:cNvPr id="6" name="Text 3"/>
+          <p:cNvSpPr txBox="1"/>
+          <p:nvPr/>
+        </p:nvSpPr>
+        <p:spPr>
+          <a:xfrm>
+            <a:off x="365760" y="1380744"/>
+            <a:ext cx="777240" cy="384048"/>
+          </a:xfrm>
+          <a:prstGeom prst="rect">
+            <a:avLst/>
+          </a:prstGeom>
+          <a:noFill/>
+          <a:ln/>
+        </p:spPr>
+        <p:txBody>
+          <a:bodyPr wrap="square" lIns="0" tIns="0" rIns="0" bIns="0" rtlCol="0" anchor="ctr"/>
+          <a:lstStyle/>
+          <a:p>
+            <a:pPr algn="l" indent="0" marL="0">
+              <a:lnSpc>
+                <a:spcPct val="115000"/>
+              </a:lnSpc>
+              <a:buNone/>
+            </a:pPr>
+            <a:r>
+              <a:rPr lang="en-US" sz="950" b="1" dirty="0">
+                <a:solidFill>
+                  <a:srgbClr val="1A1A1A"/>
+                </a:solidFill>
+                <a:latin typeface="Meiryo" pitchFamily="34" charset="0"/>
+                <a:ea typeface="Meiryo" pitchFamily="34" charset="-122"/>
+                <a:cs typeface="Meiryo" pitchFamily="34" charset="-120"/>
+              </a:rPr>
+              <a:t>初年度</a:t>
+            </a:r>
+            <a:endParaRPr lang="en-US" sz="950" dirty="0"/>
+          </a:p>
+        </p:txBody>
+      </p:sp>
+      <p:sp>
+        <p:nvSpPr>
+          <p:cNvPr id="7" name="seg-基盤0"/>
           <p:cNvSpPr/>
           <p:nvPr/>
         </p:nvSpPr>
         <p:spPr>
           <a:xfrm>
-            <a:off x="365760" y="1051560"/>
-            <a:ext cx="4069080" cy="658368"/>
+            <a:off x="1143000" y="1380744"/>
+            <a:ext cx="621792" cy="384048"/>
           </a:xfrm>
           <a:prstGeom prst="rect">
             <a:avLst/>
@@ -6462,92 +7349,13 @@
           <a:solidFill>
             <a:srgbClr val="1A1A1A"/>
           </a:solidFill>
-          <a:ln/>
-        </p:spPr>
-      </p:sp>
-      <p:sp>
-        <p:nvSpPr>
-          <p:cNvPr id="6" name="Text 3"/>
-          <p:cNvSpPr txBox="1"/>
-          <p:nvPr/>
-        </p:nvSpPr>
-        <p:spPr>
-          <a:xfrm>
-            <a:off x="502920" y="1106424"/>
-            <a:ext cx="3794760" cy="256032"/>
-          </a:xfrm>
-          <a:prstGeom prst="rect">
-            <a:avLst/>
-          </a:prstGeom>
-          <a:noFill/>
-          <a:ln/>
-        </p:spPr>
-        <p:txBody>
-          <a:bodyPr wrap="square" lIns="0" tIns="0" rIns="0" bIns="0" rtlCol="0" anchor="t"/>
-          <a:lstStyle/>
-          <a:p>
-            <a:pPr algn="l" indent="0" marL="0">
-              <a:lnSpc>
-                <a:spcPct val="115000"/>
-              </a:lnSpc>
-              <a:buNone/>
-            </a:pPr>
-            <a:r>
-              <a:rPr lang="en-US" sz="1200" b="1" dirty="0">
-                <a:solidFill>
-                  <a:srgbClr val="FFFFFF"/>
-                </a:solidFill>
-                <a:latin typeface="Meiryo" pitchFamily="34" charset="0"/>
-                <a:ea typeface="Meiryo" pitchFamily="34" charset="-122"/>
-                <a:cs typeface="Meiryo" pitchFamily="34" charset="-120"/>
-              </a:rPr>
-              <a:t>共通基盤　現場データ基盤</a:t>
-            </a:r>
-            <a:endParaRPr lang="en-US" sz="1200" dirty="0"/>
-          </a:p>
-        </p:txBody>
-      </p:sp>
-      <p:sp>
-        <p:nvSpPr>
-          <p:cNvPr id="7" name="Text 4"/>
-          <p:cNvSpPr txBox="1"/>
-          <p:nvPr/>
-        </p:nvSpPr>
-        <p:spPr>
-          <a:xfrm>
-            <a:off x="502920" y="1362456"/>
-            <a:ext cx="3794760" cy="310896"/>
-          </a:xfrm>
-          <a:prstGeom prst="rect">
-            <a:avLst/>
-          </a:prstGeom>
-          <a:noFill/>
-          <a:ln/>
-        </p:spPr>
-        <p:txBody>
-          <a:bodyPr wrap="square" lIns="0" tIns="0" rIns="0" bIns="0" rtlCol="0" anchor="t"/>
-          <a:lstStyle/>
-          <a:p>
-            <a:pPr algn="l" indent="0" marL="0">
-              <a:lnSpc>
-                <a:spcPct val="115000"/>
-              </a:lnSpc>
-              <a:buNone/>
-            </a:pPr>
-            <a:r>
-              <a:rPr lang="en-US" sz="950" dirty="0">
-                <a:solidFill>
-                  <a:srgbClr val="FFFFFF"/>
-                </a:solidFill>
-                <a:latin typeface="Meiryo" pitchFamily="34" charset="0"/>
-                <a:ea typeface="Meiryo" pitchFamily="34" charset="-122"/>
-                <a:cs typeface="Meiryo" pitchFamily="34" charset="-120"/>
-              </a:rPr>
-              <a:t>製造ロット・工程条件・試験値・作業記録・熟練者の判断理由を単一のデータモデルに統合</a:t>
-            </a:r>
-            <a:endParaRPr lang="en-US" sz="950" dirty="0"/>
-          </a:p>
-        </p:txBody>
+          <a:ln w="9525">
+            <a:solidFill>
+              <a:srgbClr val="1A1A1A"/>
+            </a:solidFill>
+            <a:prstDash val="solid"/>
+          </a:ln>
+        </p:spPr>
       </p:sp>
       <p:sp>
         <p:nvSpPr>
@@ -6557,8 +7365,8 @@
         </p:nvSpPr>
         <p:spPr>
           <a:xfrm>
-            <a:off x="365760" y="1764792"/>
-            <a:ext cx="4069080" cy="219456"/>
+            <a:off x="1143000" y="1380744"/>
+            <a:ext cx="621792" cy="384048"/>
           </a:xfrm>
           <a:prstGeom prst="rect">
             <a:avLst/>
@@ -6570,7 +7378,7 @@
           <a:bodyPr wrap="square" lIns="0" tIns="0" rIns="0" bIns="0" rtlCol="0" anchor="ctr"/>
           <a:lstStyle/>
           <a:p>
-            <a:pPr algn="l" indent="0" marL="0">
+            <a:pPr algn="ctr" indent="0" marL="0">
               <a:lnSpc>
                 <a:spcPct val="115000"/>
               </a:lnSpc>
@@ -6579,30 +7387,13 @@
             <a:r>
               <a:rPr lang="en-US" sz="850" b="1" dirty="0">
                 <a:solidFill>
-                  <a:srgbClr val="4D4D4D"/>
-                </a:solidFill>
-                <a:latin typeface="Meiryo" pitchFamily="34" charset="0"/>
-                <a:ea typeface="Meiryo" pitchFamily="34" charset="-122"/>
-                <a:cs typeface="Meiryo" pitchFamily="34" charset="-120"/>
-              </a:rPr>
-              <a:t>製品戦略：</a:t>
-            </a:r>
-            <a:pPr algn="l" indent="0" marL="0">
-              <a:lnSpc>
-                <a:spcPct val="115000"/>
-              </a:lnSpc>
-              <a:buNone/>
-            </a:pPr>
-            <a:r>
-              <a:rPr lang="en-US" sz="850" dirty="0">
-                <a:solidFill>
-                  <a:srgbClr val="4D4D4D"/>
-                </a:solidFill>
-                <a:latin typeface="Meiryo" pitchFamily="34" charset="0"/>
-                <a:ea typeface="Meiryo" pitchFamily="34" charset="-122"/>
-                <a:cs typeface="Meiryo" pitchFamily="34" charset="-120"/>
-              </a:rPr>
-              <a:t>基盤が先、モジュールは年1本ずつ追加（ランド＆エクスパンド）</a:t>
+                  <a:srgbClr val="FFFFFF"/>
+                </a:solidFill>
+                <a:latin typeface="Meiryo" pitchFamily="34" charset="0"/>
+                <a:ea typeface="Meiryo" pitchFamily="34" charset="-122"/>
+                <a:cs typeface="Meiryo" pitchFamily="34" charset="-120"/>
+              </a:rPr>
+              <a:t>基盤 100</a:t>
             </a:r>
             <a:endParaRPr lang="en-US" sz="850" dirty="0"/>
           </a:p>
@@ -6610,13 +7401,541 @@
       </p:sp>
       <p:sp>
         <p:nvSpPr>
-          <p:cNvPr id="9" name="Shape 6"/>
+          <p:cNvPr id="9" name="seg-ライン登録0"/>
           <p:cNvSpPr/>
           <p:nvPr/>
         </p:nvSpPr>
         <p:spPr>
           <a:xfrm>
-            <a:off x="365760" y="2011680"/>
+            <a:off x="1764792" y="1380744"/>
+            <a:ext cx="621792" cy="384048"/>
+          </a:xfrm>
+          <a:prstGeom prst="rect">
+            <a:avLst/>
+          </a:prstGeom>
+          <a:solidFill>
+            <a:srgbClr val="4D4D4D"/>
+          </a:solidFill>
+          <a:ln w="9525">
+            <a:solidFill>
+              <a:srgbClr val="1A1A1A"/>
+            </a:solidFill>
+            <a:prstDash val="solid"/>
+          </a:ln>
+        </p:spPr>
+      </p:sp>
+      <p:sp>
+        <p:nvSpPr>
+          <p:cNvPr id="10" name="Text 7"/>
+          <p:cNvSpPr txBox="1"/>
+          <p:nvPr/>
+        </p:nvSpPr>
+        <p:spPr>
+          <a:xfrm>
+            <a:off x="1764792" y="1380744"/>
+            <a:ext cx="621792" cy="384048"/>
+          </a:xfrm>
+          <a:prstGeom prst="rect">
+            <a:avLst/>
+          </a:prstGeom>
+          <a:noFill/>
+          <a:ln/>
+        </p:spPr>
+        <p:txBody>
+          <a:bodyPr wrap="square" lIns="0" tIns="0" rIns="0" bIns="0" rtlCol="0" anchor="ctr"/>
+          <a:lstStyle/>
+          <a:p>
+            <a:pPr algn="ctr" indent="0" marL="0">
+              <a:lnSpc>
+                <a:spcPct val="115000"/>
+              </a:lnSpc>
+              <a:buNone/>
+            </a:pPr>
+            <a:r>
+              <a:rPr lang="en-US" sz="850" b="1" dirty="0">
+                <a:solidFill>
+                  <a:srgbClr val="FFFFFF"/>
+                </a:solidFill>
+                <a:latin typeface="Meiryo" pitchFamily="34" charset="0"/>
+                <a:ea typeface="Meiryo" pitchFamily="34" charset="-122"/>
+                <a:cs typeface="Meiryo" pitchFamily="34" charset="-120"/>
+              </a:rPr>
+              <a:t>ライン登録 100</a:t>
+            </a:r>
+            <a:endParaRPr lang="en-US" sz="850" dirty="0"/>
+          </a:p>
+        </p:txBody>
+      </p:sp>
+      <p:sp>
+        <p:nvSpPr>
+          <p:cNvPr id="11" name="seg-追加機能0"/>
+          <p:cNvSpPr/>
+          <p:nvPr/>
+        </p:nvSpPr>
+        <p:spPr>
+          <a:xfrm>
+            <a:off x="2386584" y="1380744"/>
+            <a:ext cx="621792" cy="384048"/>
+          </a:xfrm>
+          <a:prstGeom prst="rect">
+            <a:avLst/>
+          </a:prstGeom>
+          <a:solidFill>
+            <a:srgbClr val="8C8C8C"/>
+          </a:solidFill>
+          <a:ln w="9525">
+            <a:solidFill>
+              <a:srgbClr val="1A1A1A"/>
+            </a:solidFill>
+            <a:prstDash val="solid"/>
+          </a:ln>
+        </p:spPr>
+      </p:sp>
+      <p:sp>
+        <p:nvSpPr>
+          <p:cNvPr id="12" name="Text 9"/>
+          <p:cNvSpPr txBox="1"/>
+          <p:nvPr/>
+        </p:nvSpPr>
+        <p:spPr>
+          <a:xfrm>
+            <a:off x="2386584" y="1380744"/>
+            <a:ext cx="621792" cy="384048"/>
+          </a:xfrm>
+          <a:prstGeom prst="rect">
+            <a:avLst/>
+          </a:prstGeom>
+          <a:noFill/>
+          <a:ln/>
+        </p:spPr>
+        <p:txBody>
+          <a:bodyPr wrap="square" lIns="0" tIns="0" rIns="0" bIns="0" rtlCol="0" anchor="ctr"/>
+          <a:lstStyle/>
+          <a:p>
+            <a:pPr algn="ctr" indent="0" marL="0">
+              <a:lnSpc>
+                <a:spcPct val="115000"/>
+              </a:lnSpc>
+              <a:buNone/>
+            </a:pPr>
+            <a:r>
+              <a:rPr lang="en-US" sz="850" b="1" dirty="0">
+                <a:solidFill>
+                  <a:srgbClr val="1A1A1A"/>
+                </a:solidFill>
+                <a:latin typeface="Meiryo" pitchFamily="34" charset="0"/>
+                <a:ea typeface="Meiryo" pitchFamily="34" charset="-122"/>
+                <a:cs typeface="Meiryo" pitchFamily="34" charset="-120"/>
+              </a:rPr>
+              <a:t>追加機能 100</a:t>
+            </a:r>
+            <a:endParaRPr lang="en-US" sz="850" dirty="0"/>
+          </a:p>
+        </p:txBody>
+      </p:sp>
+      <p:sp>
+        <p:nvSpPr>
+          <p:cNvPr id="13" name="seg-導入支援0"/>
+          <p:cNvSpPr/>
+          <p:nvPr/>
+        </p:nvSpPr>
+        <p:spPr>
+          <a:xfrm>
+            <a:off x="3008376" y="1380744"/>
+            <a:ext cx="1243584" cy="384048"/>
+          </a:xfrm>
+          <a:prstGeom prst="rect">
+            <a:avLst/>
+          </a:prstGeom>
+          <a:solidFill>
+            <a:srgbClr val="FFFFFF"/>
+          </a:solidFill>
+          <a:ln w="9525">
+            <a:solidFill>
+              <a:srgbClr val="1A1A1A"/>
+            </a:solidFill>
+            <a:prstDash val="solid"/>
+          </a:ln>
+        </p:spPr>
+      </p:sp>
+      <p:sp>
+        <p:nvSpPr>
+          <p:cNvPr id="14" name="Text 11"/>
+          <p:cNvSpPr txBox="1"/>
+          <p:nvPr/>
+        </p:nvSpPr>
+        <p:spPr>
+          <a:xfrm>
+            <a:off x="3008376" y="1380744"/>
+            <a:ext cx="1243584" cy="384048"/>
+          </a:xfrm>
+          <a:prstGeom prst="rect">
+            <a:avLst/>
+          </a:prstGeom>
+          <a:noFill/>
+          <a:ln/>
+        </p:spPr>
+        <p:txBody>
+          <a:bodyPr wrap="square" lIns="0" tIns="0" rIns="0" bIns="0" rtlCol="0" anchor="ctr"/>
+          <a:lstStyle/>
+          <a:p>
+            <a:pPr algn="ctr" indent="0" marL="0">
+              <a:lnSpc>
+                <a:spcPct val="115000"/>
+              </a:lnSpc>
+              <a:buNone/>
+            </a:pPr>
+            <a:r>
+              <a:rPr lang="en-US" sz="850" b="1" dirty="0">
+                <a:solidFill>
+                  <a:srgbClr val="1A1A1A"/>
+                </a:solidFill>
+                <a:latin typeface="Meiryo" pitchFamily="34" charset="0"/>
+                <a:ea typeface="Meiryo" pitchFamily="34" charset="-122"/>
+                <a:cs typeface="Meiryo" pitchFamily="34" charset="-120"/>
+              </a:rPr>
+              <a:t>導入支援 200</a:t>
+            </a:r>
+            <a:endParaRPr lang="en-US" sz="850" dirty="0"/>
+          </a:p>
+        </p:txBody>
+      </p:sp>
+      <p:sp>
+        <p:nvSpPr>
+          <p:cNvPr id="15" name="Text 12"/>
+          <p:cNvSpPr txBox="1"/>
+          <p:nvPr/>
+        </p:nvSpPr>
+        <p:spPr>
+          <a:xfrm>
+            <a:off x="4288536" y="1380744"/>
+            <a:ext cx="365760" cy="384048"/>
+          </a:xfrm>
+          <a:prstGeom prst="rect">
+            <a:avLst/>
+          </a:prstGeom>
+          <a:noFill/>
+          <a:ln/>
+        </p:spPr>
+        <p:txBody>
+          <a:bodyPr wrap="square" lIns="0" tIns="0" rIns="0" bIns="0" rtlCol="0" anchor="ctr"/>
+          <a:lstStyle/>
+          <a:p>
+            <a:pPr algn="l" indent="0" marL="0">
+              <a:lnSpc>
+                <a:spcPct val="115000"/>
+              </a:lnSpc>
+              <a:buNone/>
+            </a:pPr>
+            <a:r>
+              <a:rPr lang="en-US" sz="1100" b="1" dirty="0">
+                <a:solidFill>
+                  <a:srgbClr val="1A1A1A"/>
+                </a:solidFill>
+                <a:latin typeface="Meiryo" pitchFamily="34" charset="0"/>
+                <a:ea typeface="Meiryo" pitchFamily="34" charset="-122"/>
+                <a:cs typeface="Meiryo" pitchFamily="34" charset="-120"/>
+              </a:rPr>
+              <a:t>500</a:t>
+            </a:r>
+            <a:endParaRPr lang="en-US" sz="1100" dirty="0"/>
+          </a:p>
+        </p:txBody>
+      </p:sp>
+      <p:sp>
+        <p:nvSpPr>
+          <p:cNvPr id="16" name="Text 13"/>
+          <p:cNvSpPr txBox="1"/>
+          <p:nvPr/>
+        </p:nvSpPr>
+        <p:spPr>
+          <a:xfrm>
+            <a:off x="365760" y="1892808"/>
+            <a:ext cx="777240" cy="384048"/>
+          </a:xfrm>
+          <a:prstGeom prst="rect">
+            <a:avLst/>
+          </a:prstGeom>
+          <a:noFill/>
+          <a:ln/>
+        </p:spPr>
+        <p:txBody>
+          <a:bodyPr wrap="square" lIns="0" tIns="0" rIns="0" bIns="0" rtlCol="0" anchor="ctr"/>
+          <a:lstStyle/>
+          <a:p>
+            <a:pPr algn="l" indent="0" marL="0">
+              <a:lnSpc>
+                <a:spcPct val="115000"/>
+              </a:lnSpc>
+              <a:buNone/>
+            </a:pPr>
+            <a:r>
+              <a:rPr lang="en-US" sz="950" b="1" dirty="0">
+                <a:solidFill>
+                  <a:srgbClr val="1A1A1A"/>
+                </a:solidFill>
+                <a:latin typeface="Meiryo" pitchFamily="34" charset="0"/>
+                <a:ea typeface="Meiryo" pitchFamily="34" charset="-122"/>
+                <a:cs typeface="Meiryo" pitchFamily="34" charset="-120"/>
+              </a:rPr>
+              <a:t>2年目以降</a:t>
+            </a:r>
+            <a:endParaRPr lang="en-US" sz="950" dirty="0"/>
+          </a:p>
+        </p:txBody>
+      </p:sp>
+      <p:sp>
+        <p:nvSpPr>
+          <p:cNvPr id="17" name="seg-基盤1"/>
+          <p:cNvSpPr/>
+          <p:nvPr/>
+        </p:nvSpPr>
+        <p:spPr>
+          <a:xfrm>
+            <a:off x="1143000" y="1892808"/>
+            <a:ext cx="621792" cy="384048"/>
+          </a:xfrm>
+          <a:prstGeom prst="rect">
+            <a:avLst/>
+          </a:prstGeom>
+          <a:solidFill>
+            <a:srgbClr val="1A1A1A"/>
+          </a:solidFill>
+          <a:ln w="9525">
+            <a:solidFill>
+              <a:srgbClr val="1A1A1A"/>
+            </a:solidFill>
+            <a:prstDash val="solid"/>
+          </a:ln>
+        </p:spPr>
+      </p:sp>
+      <p:sp>
+        <p:nvSpPr>
+          <p:cNvPr id="18" name="Text 15"/>
+          <p:cNvSpPr txBox="1"/>
+          <p:nvPr/>
+        </p:nvSpPr>
+        <p:spPr>
+          <a:xfrm>
+            <a:off x="1143000" y="1892808"/>
+            <a:ext cx="621792" cy="384048"/>
+          </a:xfrm>
+          <a:prstGeom prst="rect">
+            <a:avLst/>
+          </a:prstGeom>
+          <a:noFill/>
+          <a:ln/>
+        </p:spPr>
+        <p:txBody>
+          <a:bodyPr wrap="square" lIns="0" tIns="0" rIns="0" bIns="0" rtlCol="0" anchor="ctr"/>
+          <a:lstStyle/>
+          <a:p>
+            <a:pPr algn="ctr" indent="0" marL="0">
+              <a:lnSpc>
+                <a:spcPct val="115000"/>
+              </a:lnSpc>
+              <a:buNone/>
+            </a:pPr>
+            <a:r>
+              <a:rPr lang="en-US" sz="850" b="1" dirty="0">
+                <a:solidFill>
+                  <a:srgbClr val="FFFFFF"/>
+                </a:solidFill>
+                <a:latin typeface="Meiryo" pitchFamily="34" charset="0"/>
+                <a:ea typeface="Meiryo" pitchFamily="34" charset="-122"/>
+                <a:cs typeface="Meiryo" pitchFamily="34" charset="-120"/>
+              </a:rPr>
+              <a:t>基盤 100</a:t>
+            </a:r>
+            <a:endParaRPr lang="en-US" sz="850" dirty="0"/>
+          </a:p>
+        </p:txBody>
+      </p:sp>
+      <p:sp>
+        <p:nvSpPr>
+          <p:cNvPr id="19" name="seg-ライン登録1"/>
+          <p:cNvSpPr/>
+          <p:nvPr/>
+        </p:nvSpPr>
+        <p:spPr>
+          <a:xfrm>
+            <a:off x="1764792" y="1892808"/>
+            <a:ext cx="621792" cy="384048"/>
+          </a:xfrm>
+          <a:prstGeom prst="rect">
+            <a:avLst/>
+          </a:prstGeom>
+          <a:solidFill>
+            <a:srgbClr val="4D4D4D"/>
+          </a:solidFill>
+          <a:ln w="9525">
+            <a:solidFill>
+              <a:srgbClr val="1A1A1A"/>
+            </a:solidFill>
+            <a:prstDash val="solid"/>
+          </a:ln>
+        </p:spPr>
+      </p:sp>
+      <p:sp>
+        <p:nvSpPr>
+          <p:cNvPr id="20" name="Text 17"/>
+          <p:cNvSpPr txBox="1"/>
+          <p:nvPr/>
+        </p:nvSpPr>
+        <p:spPr>
+          <a:xfrm>
+            <a:off x="1764792" y="1892808"/>
+            <a:ext cx="621792" cy="384048"/>
+          </a:xfrm>
+          <a:prstGeom prst="rect">
+            <a:avLst/>
+          </a:prstGeom>
+          <a:noFill/>
+          <a:ln/>
+        </p:spPr>
+        <p:txBody>
+          <a:bodyPr wrap="square" lIns="0" tIns="0" rIns="0" bIns="0" rtlCol="0" anchor="ctr"/>
+          <a:lstStyle/>
+          <a:p>
+            <a:pPr algn="ctr" indent="0" marL="0">
+              <a:lnSpc>
+                <a:spcPct val="115000"/>
+              </a:lnSpc>
+              <a:buNone/>
+            </a:pPr>
+            <a:r>
+              <a:rPr lang="en-US" sz="850" b="1" dirty="0">
+                <a:solidFill>
+                  <a:srgbClr val="FFFFFF"/>
+                </a:solidFill>
+                <a:latin typeface="Meiryo" pitchFamily="34" charset="0"/>
+                <a:ea typeface="Meiryo" pitchFamily="34" charset="-122"/>
+                <a:cs typeface="Meiryo" pitchFamily="34" charset="-120"/>
+              </a:rPr>
+              <a:t>ライン登録 100</a:t>
+            </a:r>
+            <a:endParaRPr lang="en-US" sz="850" dirty="0"/>
+          </a:p>
+        </p:txBody>
+      </p:sp>
+      <p:sp>
+        <p:nvSpPr>
+          <p:cNvPr id="21" name="seg-追加機能1"/>
+          <p:cNvSpPr/>
+          <p:nvPr/>
+        </p:nvSpPr>
+        <p:spPr>
+          <a:xfrm>
+            <a:off x="2386584" y="1892808"/>
+            <a:ext cx="621792" cy="384048"/>
+          </a:xfrm>
+          <a:prstGeom prst="rect">
+            <a:avLst/>
+          </a:prstGeom>
+          <a:solidFill>
+            <a:srgbClr val="8C8C8C"/>
+          </a:solidFill>
+          <a:ln w="9525">
+            <a:solidFill>
+              <a:srgbClr val="1A1A1A"/>
+            </a:solidFill>
+            <a:prstDash val="solid"/>
+          </a:ln>
+        </p:spPr>
+      </p:sp>
+      <p:sp>
+        <p:nvSpPr>
+          <p:cNvPr id="22" name="Text 19"/>
+          <p:cNvSpPr txBox="1"/>
+          <p:nvPr/>
+        </p:nvSpPr>
+        <p:spPr>
+          <a:xfrm>
+            <a:off x="2386584" y="1892808"/>
+            <a:ext cx="621792" cy="384048"/>
+          </a:xfrm>
+          <a:prstGeom prst="rect">
+            <a:avLst/>
+          </a:prstGeom>
+          <a:noFill/>
+          <a:ln/>
+        </p:spPr>
+        <p:txBody>
+          <a:bodyPr wrap="square" lIns="0" tIns="0" rIns="0" bIns="0" rtlCol="0" anchor="ctr"/>
+          <a:lstStyle/>
+          <a:p>
+            <a:pPr algn="ctr" indent="0" marL="0">
+              <a:lnSpc>
+                <a:spcPct val="115000"/>
+              </a:lnSpc>
+              <a:buNone/>
+            </a:pPr>
+            <a:r>
+              <a:rPr lang="en-US" sz="850" b="1" dirty="0">
+                <a:solidFill>
+                  <a:srgbClr val="1A1A1A"/>
+                </a:solidFill>
+                <a:latin typeface="Meiryo" pitchFamily="34" charset="0"/>
+                <a:ea typeface="Meiryo" pitchFamily="34" charset="-122"/>
+                <a:cs typeface="Meiryo" pitchFamily="34" charset="-120"/>
+              </a:rPr>
+              <a:t>追加機能 100</a:t>
+            </a:r>
+            <a:endParaRPr lang="en-US" sz="850" dirty="0"/>
+          </a:p>
+        </p:txBody>
+      </p:sp>
+      <p:sp>
+        <p:nvSpPr>
+          <p:cNvPr id="23" name="Text 20"/>
+          <p:cNvSpPr txBox="1"/>
+          <p:nvPr/>
+        </p:nvSpPr>
+        <p:spPr>
+          <a:xfrm>
+            <a:off x="3044952" y="1892808"/>
+            <a:ext cx="365760" cy="384048"/>
+          </a:xfrm>
+          <a:prstGeom prst="rect">
+            <a:avLst/>
+          </a:prstGeom>
+          <a:noFill/>
+          <a:ln/>
+        </p:spPr>
+        <p:txBody>
+          <a:bodyPr wrap="square" lIns="0" tIns="0" rIns="0" bIns="0" rtlCol="0" anchor="ctr"/>
+          <a:lstStyle/>
+          <a:p>
+            <a:pPr algn="l" indent="0" marL="0">
+              <a:lnSpc>
+                <a:spcPct val="115000"/>
+              </a:lnSpc>
+              <a:buNone/>
+            </a:pPr>
+            <a:r>
+              <a:rPr lang="en-US" sz="1100" b="1" dirty="0">
+                <a:solidFill>
+                  <a:srgbClr val="1A1A1A"/>
+                </a:solidFill>
+                <a:latin typeface="Meiryo" pitchFamily="34" charset="0"/>
+                <a:ea typeface="Meiryo" pitchFamily="34" charset="-122"/>
+                <a:cs typeface="Meiryo" pitchFamily="34" charset="-120"/>
+              </a:rPr>
+              <a:t>300</a:t>
+            </a:r>
+            <a:endParaRPr lang="en-US" sz="1100" dirty="0"/>
+          </a:p>
+        </p:txBody>
+      </p:sp>
+      <p:sp>
+        <p:nvSpPr>
+          <p:cNvPr id="24" name="Shape 21"/>
+          <p:cNvSpPr/>
+          <p:nvPr/>
+        </p:nvSpPr>
+        <p:spPr>
+          <a:xfrm>
+            <a:off x="365760" y="2468880"/>
             <a:ext cx="4069080" cy="0"/>
           </a:xfrm>
           <a:prstGeom prst="line">
@@ -6633,14 +7952,14 @@
       </p:sp>
       <p:sp>
         <p:nvSpPr>
-          <p:cNvPr id="10" name="Text 7"/>
+          <p:cNvPr id="25" name="Text 22"/>
           <p:cNvSpPr txBox="1"/>
           <p:nvPr/>
         </p:nvSpPr>
         <p:spPr>
           <a:xfrm>
-            <a:off x="365760" y="2048256"/>
-            <a:ext cx="1143000" cy="438912"/>
+            <a:off x="365760" y="2487168"/>
+            <a:ext cx="1325880" cy="310896"/>
           </a:xfrm>
           <a:prstGeom prst="rect">
             <a:avLst/>
@@ -6659,7 +7978,7 @@
               <a:buNone/>
             </a:pPr>
             <a:r>
-              <a:rPr lang="en-US" sz="1200" b="1" dirty="0">
+              <a:rPr lang="en-US" sz="900" b="1" dirty="0">
                 <a:solidFill>
                   <a:srgbClr val="1A1A1A"/>
                 </a:solidFill>
@@ -6667,19 +7986,19 @@
                 <a:ea typeface="Meiryo" pitchFamily="34" charset="-122"/>
                 <a:cs typeface="Meiryo" pitchFamily="34" charset="-120"/>
               </a:rPr>
-              <a:t>TRACE</a:t>
-            </a:r>
-            <a:endParaRPr lang="en-US" sz="1400" dirty="0"/>
-          </a:p>
-          <a:p>
-            <a:pPr algn="l" indent="0" marL="0">
-              <a:lnSpc>
-                <a:spcPct val="115000"/>
-              </a:lnSpc>
-              <a:buNone/>
-            </a:pPr>
-            <a:r>
-              <a:rPr lang="en-US" sz="850" dirty="0">
+              <a:t>基盤</a:t>
+            </a:r>
+            <a:endParaRPr lang="en-US" sz="900" dirty="0"/>
+          </a:p>
+          <a:p>
+            <a:pPr algn="l" indent="0" marL="0">
+              <a:lnSpc>
+                <a:spcPct val="115000"/>
+              </a:lnSpc>
+              <a:buNone/>
+            </a:pPr>
+            <a:r>
+              <a:rPr lang="en-US" sz="800" dirty="0">
                 <a:solidFill>
                   <a:srgbClr val="4D4D4D"/>
                 </a:solidFill>
@@ -6687,22 +8006,22 @@
                 <a:ea typeface="Meiryo" pitchFamily="34" charset="-122"/>
                 <a:cs typeface="Meiryo" pitchFamily="34" charset="-120"/>
               </a:rPr>
-              <a:t>ロット追跡</a:t>
-            </a:r>
-            <a:endParaRPr lang="en-US" sz="1400" dirty="0"/>
-          </a:p>
-        </p:txBody>
-      </p:sp>
-      <p:sp>
-        <p:nvSpPr>
-          <p:cNvPr id="11" name="Text 8"/>
+              <a:t>100万円／年</a:t>
+            </a:r>
+            <a:endParaRPr lang="en-US" sz="900" dirty="0"/>
+          </a:p>
+        </p:txBody>
+      </p:sp>
+      <p:sp>
+        <p:nvSpPr>
+          <p:cNvPr id="26" name="Text 23"/>
           <p:cNvSpPr txBox="1"/>
           <p:nvPr/>
         </p:nvSpPr>
         <p:spPr>
           <a:xfrm>
-            <a:off x="1554480" y="2048256"/>
-            <a:ext cx="2286000" cy="438912"/>
+            <a:off x="1737360" y="2468880"/>
+            <a:ext cx="2697480" cy="329184"/>
           </a:xfrm>
           <a:prstGeom prst="rect">
             <a:avLst/>
@@ -6721,7 +8040,7 @@
               <a:buNone/>
             </a:pPr>
             <a:r>
-              <a:rPr lang="en-US" sz="950" dirty="0">
+              <a:rPr lang="en-US" sz="900" dirty="0">
                 <a:solidFill>
                   <a:srgbClr val="1A1A1A"/>
                 </a:solidFill>
@@ -6729,63 +8048,21 @@
                 <a:ea typeface="Meiryo" pitchFamily="34" charset="-122"/>
                 <a:cs typeface="Meiryo" pitchFamily="34" charset="-120"/>
               </a:rPr>
-              <a:t>材料ロットから出荷試験、納入先の施工記録まで一本で追跡</a:t>
-            </a:r>
-            <a:endParaRPr lang="en-US" sz="950" dirty="0"/>
-          </a:p>
-        </p:txBody>
-      </p:sp>
-      <p:sp>
-        <p:nvSpPr>
-          <p:cNvPr id="12" name="Text 9"/>
-          <p:cNvSpPr txBox="1"/>
-          <p:nvPr/>
-        </p:nvSpPr>
-        <p:spPr>
-          <a:xfrm>
-            <a:off x="3886200" y="2048256"/>
-            <a:ext cx="548640" cy="438912"/>
-          </a:xfrm>
-          <a:prstGeom prst="rect">
-            <a:avLst/>
-          </a:prstGeom>
-          <a:noFill/>
-          <a:ln/>
-        </p:spPr>
-        <p:txBody>
-          <a:bodyPr wrap="square" lIns="0" tIns="0" rIns="0" bIns="0" rtlCol="0" anchor="ctr"/>
-          <a:lstStyle/>
-          <a:p>
-            <a:pPr algn="r" indent="0" marL="0">
-              <a:lnSpc>
-                <a:spcPct val="115000"/>
-              </a:lnSpc>
-              <a:buNone/>
-            </a:pPr>
-            <a:r>
-              <a:rPr lang="en-US" sz="850" dirty="0">
-                <a:solidFill>
-                  <a:srgbClr val="4D4D4D"/>
-                </a:solidFill>
-                <a:latin typeface="Meiryo" pitchFamily="34" charset="0"/>
-                <a:ea typeface="Meiryo" pitchFamily="34" charset="-122"/>
-                <a:cs typeface="Meiryo" pitchFamily="34" charset="-120"/>
-              </a:rPr>
-              <a:t>2年目</a:t>
-            </a:r>
-            <a:endParaRPr lang="en-US" sz="850" dirty="0"/>
-          </a:p>
-        </p:txBody>
-      </p:sp>
-      <p:sp>
-        <p:nvSpPr>
-          <p:cNvPr id="13" name="Shape 10"/>
+              <a:t>アプリと現場データ基盤の利用料（1拠点）</a:t>
+            </a:r>
+            <a:endParaRPr lang="en-US" sz="900" dirty="0"/>
+          </a:p>
+        </p:txBody>
+      </p:sp>
+      <p:sp>
+        <p:nvSpPr>
+          <p:cNvPr id="27" name="Shape 24"/>
           <p:cNvSpPr/>
           <p:nvPr/>
         </p:nvSpPr>
         <p:spPr>
           <a:xfrm>
-            <a:off x="365760" y="2523744"/>
+            <a:off x="365760" y="2798064"/>
             <a:ext cx="4069080" cy="0"/>
           </a:xfrm>
           <a:prstGeom prst="line">
@@ -6802,14 +8079,14 @@
       </p:sp>
       <p:sp>
         <p:nvSpPr>
-          <p:cNvPr id="14" name="Text 11"/>
+          <p:cNvPr id="28" name="Text 25"/>
           <p:cNvSpPr txBox="1"/>
           <p:nvPr/>
         </p:nvSpPr>
         <p:spPr>
           <a:xfrm>
-            <a:off x="365760" y="2560320"/>
-            <a:ext cx="1143000" cy="438912"/>
+            <a:off x="365760" y="2816352"/>
+            <a:ext cx="1325880" cy="310896"/>
           </a:xfrm>
           <a:prstGeom prst="rect">
             <a:avLst/>
@@ -6828,7 +8105,7 @@
               <a:buNone/>
             </a:pPr>
             <a:r>
-              <a:rPr lang="en-US" sz="1200" b="1" dirty="0">
+              <a:rPr lang="en-US" sz="900" b="1" dirty="0">
                 <a:solidFill>
                   <a:srgbClr val="1A1A1A"/>
                 </a:solidFill>
@@ -6836,19 +8113,19 @@
                 <a:ea typeface="Meiryo" pitchFamily="34" charset="-122"/>
                 <a:cs typeface="Meiryo" pitchFamily="34" charset="-120"/>
               </a:rPr>
-              <a:t>KNACK</a:t>
-            </a:r>
-            <a:endParaRPr lang="en-US" sz="1400" dirty="0"/>
-          </a:p>
-          <a:p>
-            <a:pPr algn="l" indent="0" marL="0">
-              <a:lnSpc>
-                <a:spcPct val="115000"/>
-              </a:lnSpc>
-              <a:buNone/>
-            </a:pPr>
-            <a:r>
-              <a:rPr lang="en-US" sz="850" dirty="0">
+              <a:t>ライン登録</a:t>
+            </a:r>
+            <a:endParaRPr lang="en-US" sz="900" dirty="0"/>
+          </a:p>
+          <a:p>
+            <a:pPr algn="l" indent="0" marL="0">
+              <a:lnSpc>
+                <a:spcPct val="115000"/>
+              </a:lnSpc>
+              <a:buNone/>
+            </a:pPr>
+            <a:r>
+              <a:rPr lang="en-US" sz="800" dirty="0">
                 <a:solidFill>
                   <a:srgbClr val="4D4D4D"/>
                 </a:solidFill>
@@ -6856,22 +8133,22 @@
                 <a:ea typeface="Meiryo" pitchFamily="34" charset="-122"/>
                 <a:cs typeface="Meiryo" pitchFamily="34" charset="-120"/>
               </a:rPr>
-              <a:t>技能継承（KM）</a:t>
-            </a:r>
-            <a:endParaRPr lang="en-US" sz="1400" dirty="0"/>
-          </a:p>
-        </p:txBody>
-      </p:sp>
-      <p:sp>
-        <p:nvSpPr>
-          <p:cNvPr id="15" name="Text 12"/>
+              <a:t>20万円×5ライン</a:t>
+            </a:r>
+            <a:endParaRPr lang="en-US" sz="900" dirty="0"/>
+          </a:p>
+        </p:txBody>
+      </p:sp>
+      <p:sp>
+        <p:nvSpPr>
+          <p:cNvPr id="29" name="Text 26"/>
           <p:cNvSpPr txBox="1"/>
           <p:nvPr/>
         </p:nvSpPr>
         <p:spPr>
           <a:xfrm>
-            <a:off x="1554480" y="2560320"/>
-            <a:ext cx="2286000" cy="438912"/>
+            <a:off x="1737360" y="2798064"/>
+            <a:ext cx="2697480" cy="329184"/>
           </a:xfrm>
           <a:prstGeom prst="rect">
             <a:avLst/>
@@ -6890,7 +8167,7 @@
               <a:buNone/>
             </a:pPr>
             <a:r>
-              <a:rPr lang="en-US" sz="950" dirty="0">
+              <a:rPr lang="en-US" sz="900" dirty="0">
                 <a:solidFill>
                   <a:srgbClr val="1A1A1A"/>
                 </a:solidFill>
@@ -6898,63 +8175,21 @@
                 <a:ea typeface="Meiryo" pitchFamily="34" charset="-122"/>
                 <a:cs typeface="Meiryo" pitchFamily="34" charset="-120"/>
               </a:rPr>
-              <a:t>SECIモデルの表出化。熟練者の判断理由を形式知にし、推奨値を提示</a:t>
-            </a:r>
-            <a:endParaRPr lang="en-US" sz="950" dirty="0"/>
-          </a:p>
-        </p:txBody>
-      </p:sp>
-      <p:sp>
-        <p:nvSpPr>
-          <p:cNvPr id="16" name="Text 13"/>
-          <p:cNvSpPr txBox="1"/>
-          <p:nvPr/>
-        </p:nvSpPr>
-        <p:spPr>
-          <a:xfrm>
-            <a:off x="3886200" y="2560320"/>
-            <a:ext cx="548640" cy="438912"/>
-          </a:xfrm>
-          <a:prstGeom prst="rect">
-            <a:avLst/>
-          </a:prstGeom>
-          <a:noFill/>
-          <a:ln/>
-        </p:spPr>
-        <p:txBody>
-          <a:bodyPr wrap="square" lIns="0" tIns="0" rIns="0" bIns="0" rtlCol="0" anchor="ctr"/>
-          <a:lstStyle/>
-          <a:p>
-            <a:pPr algn="r" indent="0" marL="0">
-              <a:lnSpc>
-                <a:spcPct val="115000"/>
-              </a:lnSpc>
-              <a:buNone/>
-            </a:pPr>
-            <a:r>
-              <a:rPr lang="en-US" sz="850" dirty="0">
-                <a:solidFill>
-                  <a:srgbClr val="4D4D4D"/>
-                </a:solidFill>
-                <a:latin typeface="Meiryo" pitchFamily="34" charset="0"/>
-                <a:ea typeface="Meiryo" pitchFamily="34" charset="-122"/>
-                <a:cs typeface="Meiryo" pitchFamily="34" charset="-120"/>
-              </a:rPr>
-              <a:t>3年目</a:t>
-            </a:r>
-            <a:endParaRPr lang="en-US" sz="850" dirty="0"/>
-          </a:p>
-        </p:txBody>
-      </p:sp>
-      <p:sp>
-        <p:nvSpPr>
-          <p:cNvPr id="17" name="Shape 14"/>
+              <a:t>記録の対象にする生産ライン・工区の数に比例</a:t>
+            </a:r>
+            <a:endParaRPr lang="en-US" sz="900" dirty="0"/>
+          </a:p>
+        </p:txBody>
+      </p:sp>
+      <p:sp>
+        <p:nvSpPr>
+          <p:cNvPr id="30" name="Shape 27"/>
           <p:cNvSpPr/>
           <p:nvPr/>
         </p:nvSpPr>
         <p:spPr>
           <a:xfrm>
-            <a:off x="365760" y="3035808"/>
+            <a:off x="365760" y="3127248"/>
             <a:ext cx="4069080" cy="0"/>
           </a:xfrm>
           <a:prstGeom prst="line">
@@ -6971,14 +8206,14 @@
       </p:sp>
       <p:sp>
         <p:nvSpPr>
-          <p:cNvPr id="18" name="Text 15"/>
+          <p:cNvPr id="31" name="Text 28"/>
           <p:cNvSpPr txBox="1"/>
           <p:nvPr/>
         </p:nvSpPr>
         <p:spPr>
           <a:xfrm>
-            <a:off x="365760" y="3072384"/>
-            <a:ext cx="1143000" cy="438912"/>
+            <a:off x="365760" y="3145536"/>
+            <a:ext cx="1325880" cy="310896"/>
           </a:xfrm>
           <a:prstGeom prst="rect">
             <a:avLst/>
@@ -6997,7 +8232,7 @@
               <a:buNone/>
             </a:pPr>
             <a:r>
-              <a:rPr lang="en-US" sz="1200" b="1" dirty="0">
+              <a:rPr lang="en-US" sz="900" b="1" dirty="0">
                 <a:solidFill>
                   <a:srgbClr val="1A1A1A"/>
                 </a:solidFill>
@@ -7005,19 +8240,19 @@
                 <a:ea typeface="Meiryo" pitchFamily="34" charset="-122"/>
                 <a:cs typeface="Meiryo" pitchFamily="34" charset="-120"/>
               </a:rPr>
-              <a:t>TWIN</a:t>
-            </a:r>
-            <a:endParaRPr lang="en-US" sz="1400" dirty="0"/>
-          </a:p>
-          <a:p>
-            <a:pPr algn="l" indent="0" marL="0">
-              <a:lnSpc>
-                <a:spcPct val="115000"/>
-              </a:lnSpc>
-              <a:buNone/>
-            </a:pPr>
-            <a:r>
-              <a:rPr lang="en-US" sz="850" dirty="0">
+              <a:t>追加機能</a:t>
+            </a:r>
+            <a:endParaRPr lang="en-US" sz="900" dirty="0"/>
+          </a:p>
+          <a:p>
+            <a:pPr algn="l" indent="0" marL="0">
+              <a:lnSpc>
+                <a:spcPct val="115000"/>
+              </a:lnSpc>
+              <a:buNone/>
+            </a:pPr>
+            <a:r>
+              <a:rPr lang="en-US" sz="800" dirty="0">
                 <a:solidFill>
                   <a:srgbClr val="4D4D4D"/>
                 </a:solidFill>
@@ -7025,22 +8260,22 @@
                 <a:ea typeface="Meiryo" pitchFamily="34" charset="-122"/>
                 <a:cs typeface="Meiryo" pitchFamily="34" charset="-120"/>
               </a:rPr>
-              <a:t>工程デジタルツイン</a:t>
-            </a:r>
-            <a:endParaRPr lang="en-US" sz="1400" dirty="0"/>
-          </a:p>
-        </p:txBody>
-      </p:sp>
-      <p:sp>
-        <p:nvSpPr>
-          <p:cNvPr id="19" name="Text 16"/>
+              <a:t>50万円×2本</a:t>
+            </a:r>
+            <a:endParaRPr lang="en-US" sz="900" dirty="0"/>
+          </a:p>
+        </p:txBody>
+      </p:sp>
+      <p:sp>
+        <p:nvSpPr>
+          <p:cNvPr id="32" name="Text 29"/>
           <p:cNvSpPr txBox="1"/>
           <p:nvPr/>
         </p:nvSpPr>
         <p:spPr>
           <a:xfrm>
-            <a:off x="1554480" y="3072384"/>
-            <a:ext cx="2286000" cy="438912"/>
+            <a:off x="1737360" y="3127248"/>
+            <a:ext cx="2697480" cy="329184"/>
           </a:xfrm>
           <a:prstGeom prst="rect">
             <a:avLst/>
@@ -7059,7 +8294,7 @@
               <a:buNone/>
             </a:pPr>
             <a:r>
-              <a:rPr lang="en-US" sz="950" dirty="0">
+              <a:rPr lang="en-US" sz="900" dirty="0">
                 <a:solidFill>
                   <a:srgbClr val="1A1A1A"/>
                 </a:solidFill>
@@ -7067,63 +8302,21 @@
                 <a:ea typeface="Meiryo" pitchFamily="34" charset="-122"/>
                 <a:cs typeface="Meiryo" pitchFamily="34" charset="-120"/>
               </a:rPr>
-              <a:t>欠員・設備停止時の計画組み替えの影響を事前に試算</a:t>
-            </a:r>
-            <a:endParaRPr lang="en-US" sz="950" dirty="0"/>
-          </a:p>
-        </p:txBody>
-      </p:sp>
-      <p:sp>
-        <p:nvSpPr>
-          <p:cNvPr id="20" name="Text 17"/>
-          <p:cNvSpPr txBox="1"/>
-          <p:nvPr/>
-        </p:nvSpPr>
-        <p:spPr>
-          <a:xfrm>
-            <a:off x="3886200" y="3072384"/>
-            <a:ext cx="548640" cy="438912"/>
-          </a:xfrm>
-          <a:prstGeom prst="rect">
-            <a:avLst/>
-          </a:prstGeom>
-          <a:noFill/>
-          <a:ln/>
-        </p:spPr>
-        <p:txBody>
-          <a:bodyPr wrap="square" lIns="0" tIns="0" rIns="0" bIns="0" rtlCol="0" anchor="ctr"/>
-          <a:lstStyle/>
-          <a:p>
-            <a:pPr algn="r" indent="0" marL="0">
-              <a:lnSpc>
-                <a:spcPct val="115000"/>
-              </a:lnSpc>
-              <a:buNone/>
-            </a:pPr>
-            <a:r>
-              <a:rPr lang="en-US" sz="850" dirty="0">
-                <a:solidFill>
-                  <a:srgbClr val="4D4D4D"/>
-                </a:solidFill>
-                <a:latin typeface="Meiryo" pitchFamily="34" charset="0"/>
-                <a:ea typeface="Meiryo" pitchFamily="34" charset="-122"/>
-                <a:cs typeface="Meiryo" pitchFamily="34" charset="-120"/>
-              </a:rPr>
-              <a:t>4年目</a:t>
-            </a:r>
-            <a:endParaRPr lang="en-US" sz="850" dirty="0"/>
-          </a:p>
-        </p:txBody>
-      </p:sp>
-      <p:sp>
-        <p:nvSpPr>
-          <p:cNvPr id="21" name="Shape 18"/>
+              <a:t>KNACK・TRACEなど、選んだ機能の数に比例</a:t>
+            </a:r>
+            <a:endParaRPr lang="en-US" sz="900" dirty="0"/>
+          </a:p>
+        </p:txBody>
+      </p:sp>
+      <p:sp>
+        <p:nvSpPr>
+          <p:cNvPr id="33" name="Shape 30"/>
           <p:cNvSpPr/>
           <p:nvPr/>
         </p:nvSpPr>
         <p:spPr>
           <a:xfrm>
-            <a:off x="365760" y="3547872"/>
+            <a:off x="365760" y="3456432"/>
             <a:ext cx="4069080" cy="0"/>
           </a:xfrm>
           <a:prstGeom prst="line">
@@ -7140,14 +8333,14 @@
       </p:sp>
       <p:sp>
         <p:nvSpPr>
-          <p:cNvPr id="22" name="Text 19"/>
+          <p:cNvPr id="34" name="Text 31"/>
           <p:cNvSpPr txBox="1"/>
           <p:nvPr/>
         </p:nvSpPr>
         <p:spPr>
           <a:xfrm>
-            <a:off x="365760" y="3584448"/>
-            <a:ext cx="1143000" cy="438912"/>
+            <a:off x="365760" y="3474720"/>
+            <a:ext cx="1325880" cy="310896"/>
           </a:xfrm>
           <a:prstGeom prst="rect">
             <a:avLst/>
@@ -7166,7 +8359,7 @@
               <a:buNone/>
             </a:pPr>
             <a:r>
-              <a:rPr lang="en-US" sz="1200" b="1" dirty="0">
+              <a:rPr lang="en-US" sz="900" b="1" dirty="0">
                 <a:solidFill>
                   <a:srgbClr val="1A1A1A"/>
                 </a:solidFill>
@@ -7174,19 +8367,19 @@
                 <a:ea typeface="Meiryo" pitchFamily="34" charset="-122"/>
                 <a:cs typeface="Meiryo" pitchFamily="34" charset="-120"/>
               </a:rPr>
-              <a:t>FLOW</a:t>
-            </a:r>
-            <a:endParaRPr lang="en-US" sz="1400" dirty="0"/>
-          </a:p>
-          <a:p>
-            <a:pPr algn="l" indent="0" marL="0">
-              <a:lnSpc>
-                <a:spcPct val="115000"/>
-              </a:lnSpc>
-              <a:buNone/>
-            </a:pPr>
-            <a:r>
-              <a:rPr lang="en-US" sz="850" dirty="0">
+              <a:t>導入支援</a:t>
+            </a:r>
+            <a:endParaRPr lang="en-US" sz="900" dirty="0"/>
+          </a:p>
+          <a:p>
+            <a:pPr algn="l" indent="0" marL="0">
+              <a:lnSpc>
+                <a:spcPct val="115000"/>
+              </a:lnSpc>
+              <a:buNone/>
+            </a:pPr>
+            <a:r>
+              <a:rPr lang="en-US" sz="800" dirty="0">
                 <a:solidFill>
                   <a:srgbClr val="4D4D4D"/>
                 </a:solidFill>
@@ -7194,22 +8387,22 @@
                 <a:ea typeface="Meiryo" pitchFamily="34" charset="-122"/>
                 <a:cs typeface="Meiryo" pitchFamily="34" charset="-120"/>
               </a:rPr>
-              <a:t>自動化連携</a:t>
-            </a:r>
-            <a:endParaRPr lang="en-US" sz="1400" dirty="0"/>
-          </a:p>
-        </p:txBody>
-      </p:sp>
-      <p:sp>
-        <p:nvSpPr>
-          <p:cNvPr id="23" name="Text 20"/>
+              <a:t>200万円（初年度のみ）</a:t>
+            </a:r>
+            <a:endParaRPr lang="en-US" sz="900" dirty="0"/>
+          </a:p>
+        </p:txBody>
+      </p:sp>
+      <p:sp>
+        <p:nvSpPr>
+          <p:cNvPr id="35" name="Text 32"/>
           <p:cNvSpPr txBox="1"/>
           <p:nvPr/>
         </p:nvSpPr>
         <p:spPr>
           <a:xfrm>
-            <a:off x="1554480" y="3584448"/>
-            <a:ext cx="2286000" cy="438912"/>
+            <a:off x="1737360" y="3456432"/>
+            <a:ext cx="2697480" cy="329184"/>
           </a:xfrm>
           <a:prstGeom prst="rect">
             <a:avLst/>
@@ -7228,7 +8421,7 @@
               <a:buNone/>
             </a:pPr>
             <a:r>
-              <a:rPr lang="en-US" sz="950" dirty="0">
+              <a:rPr lang="en-US" sz="900" dirty="0">
                 <a:solidFill>
                   <a:srgbClr val="1A1A1A"/>
                 </a:solidFill>
@@ -7236,63 +8429,21 @@
                 <a:ea typeface="Meiryo" pitchFamily="34" charset="-122"/>
                 <a:cs typeface="Meiryo" pitchFamily="34" charset="-120"/>
               </a:rPr>
-              <a:t>搬送ロボット・検査AIと人の作業分担を再設計</a:t>
-            </a:r>
-            <a:endParaRPr lang="en-US" sz="950" dirty="0"/>
-          </a:p>
-        </p:txBody>
-      </p:sp>
-      <p:sp>
-        <p:nvSpPr>
-          <p:cNvPr id="24" name="Text 21"/>
-          <p:cNvSpPr txBox="1"/>
-          <p:nvPr/>
-        </p:nvSpPr>
-        <p:spPr>
-          <a:xfrm>
-            <a:off x="3886200" y="3584448"/>
-            <a:ext cx="548640" cy="438912"/>
-          </a:xfrm>
-          <a:prstGeom prst="rect">
-            <a:avLst/>
-          </a:prstGeom>
-          <a:noFill/>
-          <a:ln/>
-        </p:spPr>
-        <p:txBody>
-          <a:bodyPr wrap="square" lIns="0" tIns="0" rIns="0" bIns="0" rtlCol="0" anchor="ctr"/>
-          <a:lstStyle/>
-          <a:p>
-            <a:pPr algn="r" indent="0" marL="0">
-              <a:lnSpc>
-                <a:spcPct val="115000"/>
-              </a:lnSpc>
-              <a:buNone/>
-            </a:pPr>
-            <a:r>
-              <a:rPr lang="en-US" sz="850" dirty="0">
-                <a:solidFill>
-                  <a:srgbClr val="4D4D4D"/>
-                </a:solidFill>
-                <a:latin typeface="Meiryo" pitchFamily="34" charset="0"/>
-                <a:ea typeface="Meiryo" pitchFamily="34" charset="-122"/>
-                <a:cs typeface="Meiryo" pitchFamily="34" charset="-120"/>
-              </a:rPr>
-              <a:t>5年目</a:t>
-            </a:r>
-            <a:endParaRPr lang="en-US" sz="850" dirty="0"/>
-          </a:p>
-        </p:txBody>
-      </p:sp>
-      <p:sp>
-        <p:nvSpPr>
-          <p:cNvPr id="25" name="Shape 22"/>
+              <a:t>当社の担当者が約2か月、現場に入る作業</a:t>
+            </a:r>
+            <a:endParaRPr lang="en-US" sz="900" dirty="0"/>
+          </a:p>
+        </p:txBody>
+      </p:sp>
+      <p:sp>
+        <p:nvSpPr>
+          <p:cNvPr id="36" name="Shape 33"/>
           <p:cNvSpPr/>
           <p:nvPr/>
         </p:nvSpPr>
         <p:spPr>
           <a:xfrm>
-            <a:off x="365760" y="4059936"/>
+            <a:off x="365760" y="3785616"/>
             <a:ext cx="4069080" cy="0"/>
           </a:xfrm>
           <a:prstGeom prst="line">
@@ -7309,7 +8460,86 @@
       </p:sp>
       <p:sp>
         <p:nvSpPr>
-          <p:cNvPr id="26" name="Text 23"/>
+          <p:cNvPr id="37" name="Shape 34"/>
+          <p:cNvSpPr/>
+          <p:nvPr/>
+        </p:nvSpPr>
+        <p:spPr>
+          <a:xfrm>
+            <a:off x="365760" y="3895344"/>
+            <a:ext cx="4069080" cy="475488"/>
+          </a:xfrm>
+          <a:prstGeom prst="rect">
+            <a:avLst/>
+          </a:prstGeom>
+          <a:solidFill>
+            <a:srgbClr val="1A1A1A"/>
+          </a:solidFill>
+          <a:ln/>
+        </p:spPr>
+      </p:sp>
+      <p:sp>
+        <p:nvSpPr>
+          <p:cNvPr id="38" name="Text 35"/>
+          <p:cNvSpPr txBox="1"/>
+          <p:nvPr/>
+        </p:nvSpPr>
+        <p:spPr>
+          <a:xfrm>
+            <a:off x="475488" y="3895344"/>
+            <a:ext cx="3849624" cy="475488"/>
+          </a:xfrm>
+          <a:prstGeom prst="rect">
+            <a:avLst/>
+          </a:prstGeom>
+          <a:noFill/>
+          <a:ln/>
+        </p:spPr>
+        <p:txBody>
+          <a:bodyPr wrap="square" lIns="0" tIns="0" rIns="0" bIns="0" rtlCol="0" anchor="ctr"/>
+          <a:lstStyle/>
+          <a:p>
+            <a:pPr algn="l" indent="0" marL="0">
+              <a:lnSpc>
+                <a:spcPct val="115000"/>
+              </a:lnSpc>
+              <a:buNone/>
+            </a:pPr>
+            <a:r>
+              <a:rPr lang="en-US" sz="900" b="1" dirty="0">
+                <a:solidFill>
+                  <a:srgbClr val="FFFFFF"/>
+                </a:solidFill>
+                <a:latin typeface="Meiryo" pitchFamily="34" charset="0"/>
+                <a:ea typeface="Meiryo" pitchFamily="34" charset="-122"/>
+                <a:cs typeface="Meiryo" pitchFamily="34" charset="-120"/>
+              </a:rPr>
+              <a:t>当社の利益：</a:t>
+            </a:r>
+            <a:pPr algn="l" indent="0" marL="0">
+              <a:lnSpc>
+                <a:spcPct val="115000"/>
+              </a:lnSpc>
+              <a:buNone/>
+            </a:pPr>
+            <a:r>
+              <a:rPr lang="en-US" sz="900" dirty="0">
+                <a:solidFill>
+                  <a:srgbClr val="FFFFFF"/>
+                </a:solidFill>
+                <a:latin typeface="Meiryo" pitchFamily="34" charset="0"/>
+                <a:ea typeface="Meiryo" pitchFamily="34" charset="-122"/>
+                <a:cs typeface="Meiryo" pitchFamily="34" charset="-120"/>
+              </a:rPr>
+              <a:t>利用料300万円は粗利率85%で毎年積み上がり、導入支援は粗利率40%で一度きり。顧客が増えるほど利用料が積み上がる</a:t>
+            </a:r>
+            <a:endParaRPr lang="en-US" sz="900" dirty="0"/>
+          </a:p>
+        </p:txBody>
+      </p:sp>
+      <p:sp>
+        <p:nvSpPr>
+          <p:cNvPr id="39" name="Text 36"/>
           <p:cNvSpPr txBox="1"/>
           <p:nvPr/>
         </p:nvSpPr>
@@ -7343,7 +8573,7 @@
                 <a:ea typeface="Meiryo" pitchFamily="34" charset="-122"/>
                 <a:cs typeface="Meiryo" pitchFamily="34" charset="-120"/>
               </a:rPr>
-              <a:t>顧客側の投資回収（対象者100名の拠点・万円）</a:t>
+              <a:t>顧客から見た回収（対象者100名の拠点・万円）</a:t>
             </a:r>
             <a:endParaRPr lang="en-US" sz="1050" dirty="0"/>
           </a:p>
@@ -7351,7 +8581,7 @@
       </p:sp>
       <p:graphicFrame>
         <p:nvGraphicFramePr>
-          <p:cNvPr id="27" name="roi-chart" descr=""/>
+          <p:cNvPr id="40" name="roi-chart" descr=""/>
           <p:cNvGraphicFramePr/>
           <p:nvPr/>
         </p:nvGraphicFramePr>
@@ -7367,7 +8597,7 @@
       </p:graphicFrame>
       <p:sp>
         <p:nvSpPr>
-          <p:cNvPr id="28" name="Text 24"/>
+          <p:cNvPr id="41" name="Text 37"/>
           <p:cNvSpPr txBox="1"/>
           <p:nvPr/>
         </p:nvSpPr>
@@ -7409,7 +8639,7 @@
       </p:sp>
       <p:sp>
         <p:nvSpPr>
-          <p:cNvPr id="29" name="Text 25"/>
+          <p:cNvPr id="42" name="Text 38"/>
           <p:cNvSpPr txBox="1"/>
           <p:nvPr/>
         </p:nvSpPr>
@@ -7451,14 +8681,14 @@
       </p:sp>
       <p:sp>
         <p:nvSpPr>
-          <p:cNvPr id="30" name="Text 26"/>
+          <p:cNvPr id="43" name="Text 39"/>
           <p:cNvSpPr txBox="1"/>
           <p:nvPr/>
         </p:nvSpPr>
         <p:spPr>
           <a:xfrm>
             <a:off x="5212080" y="1417320"/>
-            <a:ext cx="2194560" cy="237744"/>
+            <a:ext cx="3291840" cy="237744"/>
           </a:xfrm>
           <a:prstGeom prst="rect">
             <a:avLst/>
@@ -7477,7 +8707,7 @@
               <a:buNone/>
             </a:pPr>
             <a:r>
-              <a:rPr lang="en-US" sz="1050" b="1" dirty="0">
+              <a:rPr lang="en-US" sz="1000" b="1" dirty="0">
                 <a:solidFill>
                   <a:srgbClr val="1A1A1A"/>
                 </a:solidFill>
@@ -7485,22 +8715,22 @@
                 <a:ea typeface="Meiryo" pitchFamily="34" charset="-122"/>
                 <a:cs typeface="Meiryo" pitchFamily="34" charset="-120"/>
               </a:rPr>
-              <a:t>12か月で2,880万円（5.8倍）</a:t>
-            </a:r>
-            <a:endParaRPr lang="en-US" sz="1050" dirty="0"/>
-          </a:p>
-        </p:txBody>
-      </p:sp>
-      <p:sp>
-        <p:nvSpPr>
-          <p:cNvPr id="31" name="Text 27"/>
+              <a:t>浮いた工数の累計：12か月で2,880万円（5.8倍）</a:t>
+            </a:r>
+            <a:endParaRPr lang="en-US" sz="1000" dirty="0"/>
+          </a:p>
+        </p:txBody>
+      </p:sp>
+      <p:sp>
+        <p:nvSpPr>
+          <p:cNvPr id="44" name="Text 40"/>
           <p:cNvSpPr txBox="1"/>
           <p:nvPr/>
         </p:nvSpPr>
         <p:spPr>
           <a:xfrm>
             <a:off x="4617720" y="3739896"/>
-            <a:ext cx="4160520" cy="310896"/>
+            <a:ext cx="4160520" cy="457200"/>
           </a:xfrm>
           <a:prstGeom prst="rect">
             <a:avLst/>
@@ -7527,145 +8757,9 @@
                 <a:ea typeface="Meiryo" pitchFamily="34" charset="-122"/>
                 <a:cs typeface="Meiryo" pitchFamily="34" charset="-120"/>
               </a:rPr>
-              <a:t>価格＝基盤100万＋登録20万×5＋モジュール50万×2。効果＝時間単価4,000円×月6h×100名＝月240万（月6hは建設業の電子化実績を準用した仮定）。横軸は経過月数</a:t>
+              <a:t>横軸は経過月数。時間単価4,000円（780万円÷1,950h）×月6h×100名＝月240万円。月6hは建設業の書類電子化実績を準用した仮定。年300万円は顧客効果の約1割（価値基準価格）</a:t>
             </a:r>
             <a:endParaRPr lang="en-US" sz="800" dirty="0"/>
-          </a:p>
-        </p:txBody>
-      </p:sp>
-      <p:sp>
-        <p:nvSpPr>
-          <p:cNvPr id="32" name="Shape 28"/>
-          <p:cNvSpPr/>
-          <p:nvPr/>
-        </p:nvSpPr>
-        <p:spPr>
-          <a:xfrm>
-            <a:off x="365760" y="4389120"/>
-            <a:ext cx="8412480" cy="347472"/>
-          </a:xfrm>
-          <a:prstGeom prst="rect">
-            <a:avLst/>
-          </a:prstGeom>
-          <a:solidFill>
-            <a:srgbClr val="F2F2F2"/>
-          </a:solidFill>
-          <a:ln/>
-        </p:spPr>
-      </p:sp>
-      <p:sp>
-        <p:nvSpPr>
-          <p:cNvPr id="33" name="Shape 29"/>
-          <p:cNvSpPr/>
-          <p:nvPr/>
-        </p:nvSpPr>
-        <p:spPr>
-          <a:xfrm>
-            <a:off x="365760" y="4389120"/>
-            <a:ext cx="8412480" cy="0"/>
-          </a:xfrm>
-          <a:prstGeom prst="line">
-            <a:avLst/>
-          </a:prstGeom>
-          <a:noFill/>
-          <a:ln w="19050">
-            <a:solidFill>
-              <a:srgbClr val="1A1A1A"/>
-            </a:solidFill>
-            <a:prstDash val="solid"/>
-          </a:ln>
-        </p:spPr>
-      </p:sp>
-      <p:sp>
-        <p:nvSpPr>
-          <p:cNvPr id="34" name="Text 30"/>
-          <p:cNvSpPr txBox="1"/>
-          <p:nvPr/>
-        </p:nvSpPr>
-        <p:spPr>
-          <a:xfrm>
-            <a:off x="502920" y="4389120"/>
-            <a:ext cx="8138160" cy="347472"/>
-          </a:xfrm>
-          <a:prstGeom prst="rect">
-            <a:avLst/>
-          </a:prstGeom>
-          <a:noFill/>
-          <a:ln/>
-        </p:spPr>
-        <p:txBody>
-          <a:bodyPr wrap="square" lIns="0" tIns="0" rIns="0" bIns="0" rtlCol="0" anchor="ctr"/>
-          <a:lstStyle/>
-          <a:p>
-            <a:pPr algn="l" indent="0" marL="0">
-              <a:lnSpc>
-                <a:spcPct val="115000"/>
-              </a:lnSpc>
-              <a:buNone/>
-            </a:pPr>
-            <a:r>
-              <a:rPr lang="en-US" sz="1000" b="1" dirty="0">
-                <a:solidFill>
-                  <a:srgbClr val="1A1A1A"/>
-                </a:solidFill>
-                <a:latin typeface="Meiryo" pitchFamily="34" charset="0"/>
-                <a:ea typeface="Meiryo" pitchFamily="34" charset="-122"/>
-                <a:cs typeface="Meiryo" pitchFamily="34" charset="-120"/>
-              </a:rPr>
-              <a:t>価格戦略：</a:t>
-            </a:r>
-            <a:pPr algn="l" indent="0" marL="0">
-              <a:lnSpc>
-                <a:spcPct val="115000"/>
-              </a:lnSpc>
-              <a:buNone/>
-            </a:pPr>
-            <a:r>
-              <a:rPr lang="en-US" sz="1000" dirty="0">
-                <a:solidFill>
-                  <a:srgbClr val="1A1A1A"/>
-                </a:solidFill>
-                <a:latin typeface="Meiryo" pitchFamily="34" charset="0"/>
-                <a:ea typeface="Meiryo" pitchFamily="34" charset="-122"/>
-                <a:cs typeface="Meiryo" pitchFamily="34" charset="-120"/>
-              </a:rPr>
-              <a:t>価値基準価格。</a:t>
-            </a:r>
-            <a:pPr algn="l" indent="0" marL="0">
-              <a:lnSpc>
-                <a:spcPct val="115000"/>
-              </a:lnSpc>
-              <a:buNone/>
-            </a:pPr>
-            <a:r>
-              <a:rPr lang="en-US" sz="1000" b="1" dirty="0">
-                <a:solidFill>
-                  <a:srgbClr val="1A1A1A"/>
-                </a:solidFill>
-                <a:latin typeface="Meiryo" pitchFamily="34" charset="0"/>
-                <a:ea typeface="Meiryo" pitchFamily="34" charset="-122"/>
-                <a:cs typeface="Meiryo" pitchFamily="34" charset="-120"/>
-              </a:rPr>
-              <a:t>年300万円＝顧客効果2,880万円の約1割</a:t>
-            </a:r>
-            <a:pPr algn="l" indent="0" marL="0">
-              <a:lnSpc>
-                <a:spcPct val="115000"/>
-              </a:lnSpc>
-              <a:buNone/>
-            </a:pPr>
-            <a:r>
-              <a:rPr lang="en-US" sz="1000" dirty="0">
-                <a:solidFill>
-                  <a:srgbClr val="1A1A1A"/>
-                </a:solidFill>
-                <a:latin typeface="Meiryo" pitchFamily="34" charset="0"/>
-                <a:ea typeface="Meiryo" pitchFamily="34" charset="-122"/>
-                <a:cs typeface="Meiryo" pitchFamily="34" charset="-120"/>
-              </a:rPr>
-              <a:t>（初年度のみ導入支援200万円）</a:t>
-            </a:r>
-            <a:endParaRPr lang="en-US" sz="1000" dirty="0"/>
           </a:p>
         </p:txBody>
       </p:sp>
@@ -7778,7 +8872,7 @@
                 <a:ea typeface="Meiryo" pitchFamily="34" charset="-122"/>
                 <a:cs typeface="Meiryo" pitchFamily="34" charset="-120"/>
               </a:rPr>
-              <a:t>競合分析 ─ 既存の仕組みは置き換えず、判断を渡す層を担う</a:t>
+              <a:t>競合 ─ 判断の理由を仕組みで扱う会社は、まだない</a:t>
             </a:r>
             <a:endParaRPr lang="en-US" sz="2000" dirty="0"/>
           </a:p>
@@ -7820,7 +8914,7 @@
                 <a:ea typeface="Meiryo" pitchFamily="34" charset="-122"/>
                 <a:cs typeface="Meiryo" pitchFamily="34" charset="-120"/>
               </a:rPr>
-              <a:t>空いているのは「判断の理由」を「仕組み」で扱う象限。ニッチャーとして差別化集中で取る</a:t>
+              <a:t>空いている右上を、電線工場に絞って取る（ニッチャー・差別化集中）</a:t>
             </a:r>
             <a:endParaRPr lang="en-US" sz="1200" dirty="0"/>
           </a:p>
@@ -9550,7 +10644,7 @@
                 <a:ea typeface="Meiryo" pitchFamily="34" charset="-122"/>
                 <a:cs typeface="Meiryo" pitchFamily="34" charset="-120"/>
               </a:rPr>
-              <a:t>設問②　組織と採用 ─ 顧客数は、導入担当の人数から逆算する</a:t>
+              <a:t>設問②　組織 ─ 顧客数は、導入担当の人数で決まる</a:t>
             </a:r>
             <a:endParaRPr lang="en-US" sz="2000" dirty="0"/>
           </a:p>
@@ -14797,7 +15891,7 @@
                 <a:ea typeface="Meiryo" pitchFamily="34" charset="-122"/>
                 <a:cs typeface="Meiryo" pitchFamily="34" charset="-120"/>
               </a:rPr>
-              <a:t>設問⑤　経営課題 ─ 最大のリスクは、自分が律速になること</a:t>
+              <a:t>設問⑤　リスク ─ 最大のリスクは自分。判断基準を先に決める</a:t>
             </a:r>
             <a:endParaRPr lang="en-US" sz="2000" dirty="0"/>
           </a:p>
@@ -14839,7 +15933,7 @@
                 <a:ea typeface="Meiryo" pitchFamily="34" charset="-122"/>
                 <a:cs typeface="Meiryo" pitchFamily="34" charset="-120"/>
               </a:rPr>
-              <a:t>だから役割を定義し、創業者が1か月不在でも回る状態を5年目の目標に置く</a:t>
+              <a:t>創業者が1か月不在でも回る状態を5年目に置き、BSCの4指標で任せる</a:t>
             </a:r>
             <a:endParaRPr lang="en-US" sz="1200" dirty="0"/>
           </a:p>

--- a/deck/セルフマネジメント課題_事業構想プレゼン.pptx
+++ b/deck/セルフマネジメント課題_事業構想プレゼン.pptx
@@ -2045,8 +2045,8 @@
             <a:r>
               <a:rPr lang="en-US" dirty="0"/>
               <a:t>【0:00 - 0:50】
-要約：人が減っても現場が迷わず回る仕組みをつくる。それが三現ワークスの存在意義（設問③）
-株式会社三現ワークスの事業構想を発表します。三現とは、現場・現物・現実のことです。工場でも施工現場でも、熟練者の勘が記録に残らないまま失われつつあります。この会社の存在意義は「現場の勘を、次の担い手へ。」です。使命は、熟練者の判断を記録して、次の人と機械に渡すこと。5年後には85の拠点でそれが当たり前になっている状態を目指します。行動指針は社名のとおり、現場に立つ、現物に触れる、現実で判断する、の三つです。ここから、なぜこの事業が必要か、何をするのか、どう稼ぐのかを順にご説明します。</a:t>
+要約：人が減っても現場が迷わず回る仕組みをつくり、日本の品質を支える現場の勘を遺産として残す（設問③）
+株式会社三現ワークスの事業構想を発表します。三現とは、現場・現物・現実のことです。メイド・イン・ジャパンの品質を支えてきたのは、現場の熟練者の勘です。ところがその勘は、記録に残らないまま、退職とともに失われつつあります。この会社の存在意義は「現場の勘を、次の担い手へ。」です。使命は、熟練者の勘を言葉にし、教材と仕組みにして次の担い手に渡すこと。5年後には85の拠点で、勘どころが教材として残り、誰でも迷わず判断できる状態を目指します。人に依存しない形で、日本の品質を遺産として残す会社です。ここから、課題、解決策、稼ぎ方の順にご説明します。</a:t>
             </a:r>
             <a:endParaRPr lang="en-US" dirty="0"/>
           </a:p>
@@ -2225,8 +2225,8 @@
             <a:r>
               <a:rPr lang="en-US" dirty="0"/>
               <a:t>【2:00 - 3:30】
-要約：熟練者の一言をタブレットで記録し、生成AIで整理して、次の人の画面に出す
-設問①、解決策です。具体的には三つの段階で動きます。一つ目は記録です。熟練者は異常に対処したら、タブレットに音声で一言だけ残します。たとえば「湿度が高いので押出温度を2℃下げた」。写真と、MESから取った設備データが自動で紐づきます。二つ目は整理です。生成AIがその一言を、条件・処置・理由に分けて文章にし、ロットや設備のデータと合わせて事例として蓄えます。三つ目は引き継ぎです。似た条件になると、若手のタブレットに過去の事例と推奨値が出ます。搬送ロボットや検査AIには、条件を直接渡します。ただ、道具を渡すだけでは現場に定着しません。そこで最初の2か月は、当社の担当者が現場に入り、熟練者に聞き取りをして判断を棚卸しし、研修まで行います。機能は、記録と検索の基盤から始め、推奨値の提示、ロット追跡、計画の試算、ロボット連携と、年に一つずつ増やしていきます。</a:t>
+要約：引退した熟練者が、隣で教えてくれる現場をつくる。データ集めで終わらせず、教材まで当社が作る
+設問①、解決策です。目指すのは、引退した熟練者が隣で教えてくれるような現場です。仕組みは三段階です。熟練者は、異常に対処したらタブレットに音声で一言残します。生成AIがそれを条件・処置・理由に分けて事例にします。そして三つ目が大事で、当社はデータを集めて終わりにしません。現場は忙しく、研修資料や教材を作る時間がありません。そこで当社が、勘どころを言葉にし、通勤中に聞ける音声番組、短い動画、研修資料まで作って届けます。音声の自動配信は、私が個人で、ニュースを要約して音声合成し毎朝配信する仕組みとしてすでに作っています。渡し方は年ごとに増やし、3年目は手順書を開くと過去の事故やヒヤリの場所が出る機能、4年目は3Dの仮想工場、5年目は音声の指示でCAD図面を描く機能です。触覚の訓練シミュレーターは研究開発として進めます。最初の2か月は、当社の担当者が現場に入って定着まで支えます。</a:t>
             </a:r>
             <a:endParaRPr lang="en-US" dirty="0"/>
           </a:p>
@@ -2316,7 +2316,7 @@
               <a:rPr lang="en-US" dirty="0"/>
               <a:t>【3:30 - 4:40】
 要約：顧客は1拠点あたり年300万円を払い、約2か月で元を取る
-次に、お金の流れです。お客様の工場1拠点が払うのは、左の帯のとおりです。毎年払うのは、アプリと基盤の利用料100万円、記録するラインの数に応じた登録料が20万円×5ラインで100万円、選んだ追加機能が50万円×2本で100万円、合わせて年300万円です。初年度だけ、当社の担当者が現場に入る導入支援200万円が加わり、500万円になります。お客様から見ると、右のグラフのとおり、対象者100名の拠点で毎月240万円分の工数が浮き、約2.1か月で500万円を上回ります。ただし月6時間の削減は、建設業の書類電子化の実績を当てはめた仮定です。当社から見ると、利用料は粗利率85%で毎年積み上がり、導入支援は粗利率40%で一度きりです。お客様が増えるほど、利用料が積み上がっていく構造です。</a:t>
+次に、お金の流れです。お客様の工場1拠点が毎年払うのは、アプリと基盤の利用料100万円、記録するラインの数に応じた登録料100万円、そして教材制作や危険表示など選んだ機能の料金100万円、合わせて年300万円です。初年度だけ、当社の担当者が現場に入る導入支援200万円が加わり、500万円になります。お客様から見ると、右のグラフのとおり、対象者100名の拠点で毎月240万円分の工数が浮き、約2.1か月で500万円を上回ります。ただし月6時間の削減は、建設業の書類電子化の実績を当てはめた仮定です。当社から見ると、利用料は粗利率85%で毎年積み上がり、導入支援は粗利率40%で一度きりです。お客様が増えるほど、利用料が積み上がっていく構造です。</a:t>
             </a:r>
             <a:endParaRPr lang="en-US" dirty="0"/>
           </a:p>
@@ -3390,8 +3390,8 @@
         </p:nvSpPr>
         <p:spPr>
           <a:xfrm>
-            <a:off x="320040" y="3154680"/>
-            <a:ext cx="2651760" cy="274320"/>
+            <a:off x="320040" y="2971800"/>
+            <a:ext cx="2514600" cy="457200"/>
           </a:xfrm>
           <a:prstGeom prst="rect">
             <a:avLst/>
@@ -3410,7 +3410,7 @@
               <a:buNone/>
             </a:pPr>
             <a:r>
-              <a:rPr lang="en-US" sz="1100" dirty="0">
+              <a:rPr lang="en-US" sz="950" dirty="0">
                 <a:solidFill>
                   <a:srgbClr val="FFFFFF"/>
                 </a:solidFill>
@@ -3418,9 +3418,9 @@
                 <a:ea typeface="Meiryo" pitchFamily="34" charset="-122"/>
                 <a:cs typeface="Meiryo" pitchFamily="34" charset="-120"/>
               </a:rPr>
-              <a:t>株式会社三現ワークス（事業構想）</a:t>
-            </a:r>
-            <a:endParaRPr lang="en-US" sz="1100" dirty="0"/>
+              <a:t>日本の品質を支える現場の勘を、人に依存しない遺産として残す</a:t>
+            </a:r>
+            <a:endParaRPr lang="en-US" sz="950" dirty="0"/>
           </a:p>
         </p:txBody>
       </p:sp>
@@ -3432,8 +3432,8 @@
         </p:nvSpPr>
         <p:spPr>
           <a:xfrm>
-            <a:off x="320040" y="3447288"/>
-            <a:ext cx="2651760" cy="256032"/>
+            <a:off x="320040" y="3520440"/>
+            <a:ext cx="2651760" cy="274320"/>
           </a:xfrm>
           <a:prstGeom prst="rect">
             <a:avLst/>
@@ -3452,7 +3452,7 @@
               <a:buNone/>
             </a:pPr>
             <a:r>
-              <a:rPr lang="en-US" sz="950" dirty="0">
+              <a:rPr lang="en-US" sz="1100" dirty="0">
                 <a:solidFill>
                   <a:srgbClr val="FFFFFF"/>
                 </a:solidFill>
@@ -3460,9 +3460,9 @@
                 <a:ea typeface="Meiryo" pitchFamily="34" charset="-122"/>
                 <a:cs typeface="Meiryo" pitchFamily="34" charset="-120"/>
               </a:rPr>
-              <a:t>三現＝現場・現物・現実</a:t>
-            </a:r>
-            <a:endParaRPr lang="en-US" sz="950" dirty="0"/>
+              <a:t>株式会社三現ワークス（事業構想）</a:t>
+            </a:r>
+            <a:endParaRPr lang="en-US" sz="1100" dirty="0"/>
           </a:p>
         </p:txBody>
       </p:sp>
@@ -3474,6 +3474,48 @@
         </p:nvSpPr>
         <p:spPr>
           <a:xfrm>
+            <a:off x="320040" y="3813048"/>
+            <a:ext cx="2651760" cy="256032"/>
+          </a:xfrm>
+          <a:prstGeom prst="rect">
+            <a:avLst/>
+          </a:prstGeom>
+          <a:noFill/>
+          <a:ln/>
+        </p:spPr>
+        <p:txBody>
+          <a:bodyPr wrap="square" lIns="0" tIns="0" rIns="0" bIns="0" rtlCol="0" anchor="t"/>
+          <a:lstStyle/>
+          <a:p>
+            <a:pPr algn="l" indent="0" marL="0">
+              <a:lnSpc>
+                <a:spcPct val="115000"/>
+              </a:lnSpc>
+              <a:buNone/>
+            </a:pPr>
+            <a:r>
+              <a:rPr lang="en-US" sz="950" dirty="0">
+                <a:solidFill>
+                  <a:srgbClr val="FFFFFF"/>
+                </a:solidFill>
+                <a:latin typeface="Meiryo" pitchFamily="34" charset="0"/>
+                <a:ea typeface="Meiryo" pitchFamily="34" charset="-122"/>
+                <a:cs typeface="Meiryo" pitchFamily="34" charset="-120"/>
+              </a:rPr>
+              <a:t>三現＝現場・現物・現実</a:t>
+            </a:r>
+            <a:endParaRPr lang="en-US" sz="950" dirty="0"/>
+          </a:p>
+        </p:txBody>
+      </p:sp>
+      <p:sp>
+        <p:nvSpPr>
+          <p:cNvPr id="10" name="Text 6"/>
+          <p:cNvSpPr txBox="1"/>
+          <p:nvPr/>
+        </p:nvSpPr>
+        <p:spPr>
+          <a:xfrm>
             <a:off x="3429000" y="457200"/>
             <a:ext cx="5074920" cy="256032"/>
           </a:xfrm>
@@ -3510,7 +3552,7 @@
       </p:sp>
       <p:sp>
         <p:nvSpPr>
-          <p:cNvPr id="10" name="Text 6"/>
+          <p:cNvPr id="11" name="Text 7"/>
           <p:cNvSpPr txBox="1"/>
           <p:nvPr/>
         </p:nvSpPr>
@@ -3572,7 +3614,7 @@
       </p:sp>
       <p:sp>
         <p:nvSpPr>
-          <p:cNvPr id="11" name="Text 7"/>
+          <p:cNvPr id="12" name="Text 8"/>
           <p:cNvSpPr txBox="1"/>
           <p:nvPr/>
         </p:nvSpPr>
@@ -3614,7 +3656,7 @@
       </p:sp>
       <p:sp>
         <p:nvSpPr>
-          <p:cNvPr id="12" name="Shape 8"/>
+          <p:cNvPr id="13" name="Shape 9"/>
           <p:cNvSpPr/>
           <p:nvPr/>
         </p:nvSpPr>
@@ -3637,7 +3679,7 @@
       </p:sp>
       <p:sp>
         <p:nvSpPr>
-          <p:cNvPr id="13" name="Text 9"/>
+          <p:cNvPr id="14" name="Text 10"/>
           <p:cNvSpPr txBox="1"/>
           <p:nvPr/>
         </p:nvSpPr>
@@ -3699,7 +3741,7 @@
       </p:sp>
       <p:sp>
         <p:nvSpPr>
-          <p:cNvPr id="14" name="Text 10"/>
+          <p:cNvPr id="15" name="Text 11"/>
           <p:cNvSpPr txBox="1"/>
           <p:nvPr/>
         </p:nvSpPr>
@@ -3733,7 +3775,7 @@
                 <a:ea typeface="Meiryo" pitchFamily="34" charset="-122"/>
                 <a:cs typeface="Meiryo" pitchFamily="34" charset="-120"/>
               </a:rPr>
-              <a:t>熟練者の判断を記録し、次の担い手と機械に渡す</a:t>
+              <a:t>熟練者の勘を言語化し、教材と仕組みで次の人へ渡す</a:t>
             </a:r>
             <a:endParaRPr lang="en-US" sz="1150" dirty="0"/>
           </a:p>
@@ -3741,7 +3783,7 @@
       </p:sp>
       <p:sp>
         <p:nvSpPr>
-          <p:cNvPr id="15" name="Shape 11"/>
+          <p:cNvPr id="16" name="Shape 12"/>
           <p:cNvSpPr/>
           <p:nvPr/>
         </p:nvSpPr>
@@ -3764,7 +3806,7 @@
       </p:sp>
       <p:sp>
         <p:nvSpPr>
-          <p:cNvPr id="16" name="Text 12"/>
+          <p:cNvPr id="17" name="Text 13"/>
           <p:cNvSpPr txBox="1"/>
           <p:nvPr/>
         </p:nvSpPr>
@@ -3826,7 +3868,7 @@
       </p:sp>
       <p:sp>
         <p:nvSpPr>
-          <p:cNvPr id="17" name="Text 13"/>
+          <p:cNvPr id="18" name="Text 14"/>
           <p:cNvSpPr txBox="1"/>
           <p:nvPr/>
         </p:nvSpPr>
@@ -3860,7 +3902,7 @@
                 <a:ea typeface="Meiryo" pitchFamily="34" charset="-122"/>
                 <a:cs typeface="Meiryo" pitchFamily="34" charset="-120"/>
               </a:rPr>
-              <a:t>85拠点で、熟練者がいなくても迷わず判断できている</a:t>
+              <a:t>85拠点で、勘どころが教材として残っている</a:t>
             </a:r>
             <a:endParaRPr lang="en-US" sz="1150" dirty="0"/>
           </a:p>
@@ -3868,7 +3910,7 @@
       </p:sp>
       <p:sp>
         <p:nvSpPr>
-          <p:cNvPr id="18" name="Shape 14"/>
+          <p:cNvPr id="19" name="Shape 15"/>
           <p:cNvSpPr/>
           <p:nvPr/>
         </p:nvSpPr>
@@ -3891,7 +3933,7 @@
       </p:sp>
       <p:sp>
         <p:nvSpPr>
-          <p:cNvPr id="19" name="Text 15"/>
+          <p:cNvPr id="20" name="Text 16"/>
           <p:cNvSpPr txBox="1"/>
           <p:nvPr/>
         </p:nvSpPr>
@@ -3953,7 +3995,7 @@
       </p:sp>
       <p:sp>
         <p:nvSpPr>
-          <p:cNvPr id="20" name="Text 16"/>
+          <p:cNvPr id="21" name="Text 17"/>
           <p:cNvSpPr txBox="1"/>
           <p:nvPr/>
         </p:nvSpPr>
@@ -3995,7 +4037,7 @@
       </p:sp>
       <p:sp>
         <p:nvSpPr>
-          <p:cNvPr id="21" name="Shape 17"/>
+          <p:cNvPr id="22" name="Shape 18"/>
           <p:cNvSpPr/>
           <p:nvPr/>
         </p:nvSpPr>
@@ -4018,7 +4060,7 @@
       </p:sp>
       <p:sp>
         <p:nvSpPr>
-          <p:cNvPr id="22" name="Text 18"/>
+          <p:cNvPr id="23" name="Text 19"/>
           <p:cNvSpPr txBox="1"/>
           <p:nvPr/>
         </p:nvSpPr>
@@ -4060,7 +4102,7 @@
       </p:sp>
       <p:sp>
         <p:nvSpPr>
-          <p:cNvPr id="23" name="Text 19"/>
+          <p:cNvPr id="24" name="Text 20"/>
           <p:cNvSpPr txBox="1"/>
           <p:nvPr/>
         </p:nvSpPr>
@@ -5250,7 +5292,7 @@
                 <a:ea typeface="Meiryo" pitchFamily="34" charset="-122"/>
                 <a:cs typeface="Meiryo" pitchFamily="34" charset="-120"/>
               </a:rPr>
-              <a:t>設問①　解決策 ─ 熟練者の一言を記録し、次の人の画面に出す</a:t>
+              <a:t>設問①　解決策 ─ 引退した熟練者が、隣で教えてくれる現場</a:t>
             </a:r>
             <a:endParaRPr lang="en-US" sz="2000" dirty="0"/>
           </a:p>
@@ -5292,7 +5334,7 @@
                 <a:ea typeface="Meiryo" pitchFamily="34" charset="-122"/>
                 <a:cs typeface="Meiryo" pitchFamily="34" charset="-120"/>
               </a:rPr>
-              <a:t>道具はタブレットアプリと生成AI。道具だけでは定着しないため、最初の2か月は当社が現場に入る</a:t>
+              <a:t>データを集めて終わらせない。勘どころを言語化し、研修資料・音声番組・動画まで当社が作って届ける</a:t>
             </a:r>
             <a:endParaRPr lang="en-US" sz="1200" dirty="0"/>
           </a:p>
@@ -5306,8 +5348,8 @@
         </p:nvSpPr>
         <p:spPr>
           <a:xfrm>
-            <a:off x="365760" y="1051560"/>
-            <a:ext cx="2578608" cy="1828800"/>
+            <a:off x="365760" y="1024128"/>
+            <a:ext cx="2578608" cy="1371600"/>
           </a:xfrm>
           <a:prstGeom prst="rect">
             <a:avLst/>
@@ -5331,8 +5373,8 @@
         </p:nvSpPr>
         <p:spPr>
           <a:xfrm>
-            <a:off x="365760" y="1051560"/>
-            <a:ext cx="2578608" cy="310896"/>
+            <a:off x="365760" y="1024128"/>
+            <a:ext cx="2578608" cy="274320"/>
           </a:xfrm>
           <a:prstGeom prst="rect">
             <a:avLst/>
@@ -5351,8 +5393,8 @@
         </p:nvSpPr>
         <p:spPr>
           <a:xfrm>
-            <a:off x="475488" y="1051560"/>
-            <a:ext cx="2359152" cy="310896"/>
+            <a:off x="475488" y="1024128"/>
+            <a:ext cx="2359152" cy="274320"/>
           </a:xfrm>
           <a:prstGeom prst="rect">
             <a:avLst/>
@@ -5371,7 +5413,7 @@
               <a:buNone/>
             </a:pPr>
             <a:r>
-              <a:rPr lang="en-US" sz="1150" b="1" dirty="0">
+              <a:rPr lang="en-US" sz="1100" b="1" dirty="0">
                 <a:solidFill>
                   <a:srgbClr val="FFFFFF"/>
                 </a:solidFill>
@@ -5398,7 +5440,7 @@
               </a:rPr>
               <a:t>　熟練者</a:t>
             </a:r>
-            <a:endParaRPr lang="en-US" sz="1150" dirty="0"/>
+            <a:endParaRPr lang="en-US" sz="1100" dirty="0"/>
           </a:p>
         </p:txBody>
       </p:sp>
@@ -5410,8 +5452,8 @@
         </p:nvSpPr>
         <p:spPr>
           <a:xfrm>
-            <a:off x="475488" y="1435608"/>
-            <a:ext cx="2359152" cy="804672"/>
+            <a:off x="475488" y="1353312"/>
+            <a:ext cx="2359152" cy="603504"/>
           </a:xfrm>
           <a:prstGeom prst="rect">
             <a:avLst/>
@@ -5430,7 +5472,7 @@
               <a:buNone/>
             </a:pPr>
             <a:r>
-              <a:rPr lang="en-US" sz="1000" dirty="0">
+              <a:rPr lang="en-US" sz="950" dirty="0">
                 <a:solidFill>
                   <a:srgbClr val="1A1A1A"/>
                 </a:solidFill>
@@ -5438,54 +5480,70 @@
                 <a:ea typeface="Meiryo" pitchFamily="34" charset="-122"/>
                 <a:cs typeface="Meiryo" pitchFamily="34" charset="-120"/>
               </a:rPr>
-              <a:t>異常に対処したら、タブレットに音声で一言残す。</a:t>
-            </a:r>
-            <a:endParaRPr lang="en-US" sz="1000" dirty="0"/>
-          </a:p>
-          <a:p>
-            <a:pPr algn="l" indent="0" marL="0">
-              <a:lnSpc>
-                <a:spcPct val="115000"/>
-              </a:lnSpc>
-              <a:buNone/>
-            </a:pPr>
-            <a:r>
-              <a:rPr lang="en-US" sz="1000" dirty="0">
-                <a:solidFill>
-                  <a:srgbClr val="1A1A1A"/>
-                </a:solidFill>
-                <a:latin typeface="Meiryo" pitchFamily="34" charset="0"/>
-                <a:ea typeface="Meiryo" pitchFamily="34" charset="-122"/>
-                <a:cs typeface="Meiryo" pitchFamily="34" charset="-120"/>
-              </a:rPr>
-              <a:t>例「湿度が高いので温度を2℃下げた」</a:t>
-            </a:r>
-            <a:endParaRPr lang="en-US" sz="1000" dirty="0"/>
-          </a:p>
-        </p:txBody>
-      </p:sp>
-      <p:sp>
-        <p:nvSpPr>
-          <p:cNvPr id="9" name="Shape 6"/>
-          <p:cNvSpPr/>
-          <p:nvPr/>
-        </p:nvSpPr>
-        <p:spPr>
-          <a:xfrm>
-            <a:off x="475488" y="2295144"/>
-            <a:ext cx="2359152" cy="0"/>
-          </a:xfrm>
-          <a:prstGeom prst="line">
-            <a:avLst/>
-          </a:prstGeom>
-          <a:noFill/>
-          <a:ln w="9525">
-            <a:solidFill>
-              <a:srgbClr val="BFBFBF"/>
-            </a:solidFill>
-            <a:prstDash val="solid"/>
-          </a:ln>
-        </p:spPr>
+              <a:t>異常に対処したら、タブレットに音声で一言残す。例「湿度が高いので温度を2℃下げた」</a:t>
+            </a:r>
+            <a:endParaRPr lang="en-US" sz="950" dirty="0"/>
+          </a:p>
+        </p:txBody>
+      </p:sp>
+      <p:sp>
+        <p:nvSpPr>
+          <p:cNvPr id="9" name="Text 6"/>
+          <p:cNvSpPr txBox="1"/>
+          <p:nvPr/>
+        </p:nvSpPr>
+        <p:spPr>
+          <a:xfrm>
+            <a:off x="475488" y="2029968"/>
+            <a:ext cx="2359152" cy="310896"/>
+          </a:xfrm>
+          <a:prstGeom prst="rect">
+            <a:avLst/>
+          </a:prstGeom>
+          <a:noFill/>
+          <a:ln/>
+        </p:spPr>
+        <p:txBody>
+          <a:bodyPr wrap="square" lIns="0" tIns="0" rIns="0" bIns="0" rtlCol="0" anchor="t"/>
+          <a:lstStyle/>
+          <a:p>
+            <a:pPr algn="l" indent="0" marL="0">
+              <a:lnSpc>
+                <a:spcPct val="115000"/>
+              </a:lnSpc>
+              <a:buNone/>
+            </a:pPr>
+            <a:r>
+              <a:rPr lang="en-US" sz="850" b="1" dirty="0">
+                <a:solidFill>
+                  <a:srgbClr val="4D4D4D"/>
+                </a:solidFill>
+                <a:latin typeface="Meiryo" pitchFamily="34" charset="0"/>
+                <a:ea typeface="Meiryo" pitchFamily="34" charset="-122"/>
+                <a:cs typeface="Meiryo" pitchFamily="34" charset="-120"/>
+              </a:rPr>
+              <a:t>道具：</a:t>
+            </a:r>
+            <a:pPr algn="l" indent="0" marL="0">
+              <a:lnSpc>
+                <a:spcPct val="115000"/>
+              </a:lnSpc>
+              <a:buNone/>
+            </a:pPr>
+            <a:r>
+              <a:rPr lang="en-US" sz="850" dirty="0">
+                <a:solidFill>
+                  <a:srgbClr val="4D4D4D"/>
+                </a:solidFill>
+                <a:latin typeface="Meiryo" pitchFamily="34" charset="0"/>
+                <a:ea typeface="Meiryo" pitchFamily="34" charset="-122"/>
+                <a:cs typeface="Meiryo" pitchFamily="34" charset="-120"/>
+              </a:rPr>
+              <a:t>記録アプリ（音声・写真）＋MES連携</a:t>
+            </a:r>
+            <a:endParaRPr lang="en-US" sz="850" dirty="0"/>
+          </a:p>
+        </p:txBody>
       </p:sp>
       <p:sp>
         <p:nvSpPr>
@@ -5495,27 +5553,27 @@
         </p:nvSpPr>
         <p:spPr>
           <a:xfrm>
-            <a:off x="475488" y="2350008"/>
-            <a:ext cx="2359152" cy="475488"/>
-          </a:xfrm>
-          <a:prstGeom prst="rect">
-            <a:avLst/>
-          </a:prstGeom>
-          <a:noFill/>
-          <a:ln/>
-        </p:spPr>
-        <p:txBody>
-          <a:bodyPr wrap="square" lIns="0" tIns="0" rIns="0" bIns="0" rtlCol="0" anchor="t"/>
-          <a:lstStyle/>
-          <a:p>
-            <a:pPr algn="l" indent="0" marL="0">
-              <a:lnSpc>
-                <a:spcPct val="115000"/>
-              </a:lnSpc>
-              <a:buNone/>
-            </a:pPr>
-            <a:r>
-              <a:rPr lang="en-US" sz="900" b="1" dirty="0">
+            <a:off x="2944368" y="1545336"/>
+            <a:ext cx="338328" cy="329184"/>
+          </a:xfrm>
+          <a:prstGeom prst="rect">
+            <a:avLst/>
+          </a:prstGeom>
+          <a:noFill/>
+          <a:ln/>
+        </p:spPr>
+        <p:txBody>
+          <a:bodyPr wrap="square" lIns="0" tIns="0" rIns="0" bIns="0" rtlCol="0" anchor="ctr"/>
+          <a:lstStyle/>
+          <a:p>
+            <a:pPr algn="ctr" indent="0" marL="0">
+              <a:lnSpc>
+                <a:spcPct val="115000"/>
+              </a:lnSpc>
+              <a:buNone/>
+            </a:pPr>
+            <a:r>
+              <a:rPr lang="en-US" sz="1400" dirty="0">
                 <a:solidFill>
                   <a:srgbClr val="1A1A1A"/>
                 </a:solidFill>
@@ -5523,65 +5581,6 @@
                 <a:ea typeface="Meiryo" pitchFamily="34" charset="-122"/>
                 <a:cs typeface="Meiryo" pitchFamily="34" charset="-120"/>
               </a:rPr>
-              <a:t>道具：</a:t>
-            </a:r>
-            <a:pPr algn="l" indent="0" marL="0">
-              <a:lnSpc>
-                <a:spcPct val="115000"/>
-              </a:lnSpc>
-              <a:buNone/>
-            </a:pPr>
-            <a:r>
-              <a:rPr lang="en-US" sz="900" dirty="0">
-                <a:solidFill>
-                  <a:srgbClr val="1A1A1A"/>
-                </a:solidFill>
-                <a:latin typeface="Meiryo" pitchFamily="34" charset="0"/>
-                <a:ea typeface="Meiryo" pitchFamily="34" charset="-122"/>
-                <a:cs typeface="Meiryo" pitchFamily="34" charset="-120"/>
-              </a:rPr>
-              <a:t>現場記録アプリ（音声・写真）＋MESから設備データを自動取得</a:t>
-            </a:r>
-            <a:endParaRPr lang="en-US" sz="900" dirty="0"/>
-          </a:p>
-        </p:txBody>
-      </p:sp>
-      <p:sp>
-        <p:nvSpPr>
-          <p:cNvPr id="11" name="Text 8"/>
-          <p:cNvSpPr txBox="1"/>
-          <p:nvPr/>
-        </p:nvSpPr>
-        <p:spPr>
-          <a:xfrm>
-            <a:off x="2944368" y="1801368"/>
-            <a:ext cx="338328" cy="329184"/>
-          </a:xfrm>
-          <a:prstGeom prst="rect">
-            <a:avLst/>
-          </a:prstGeom>
-          <a:noFill/>
-          <a:ln/>
-        </p:spPr>
-        <p:txBody>
-          <a:bodyPr wrap="square" lIns="0" tIns="0" rIns="0" bIns="0" rtlCol="0" anchor="ctr"/>
-          <a:lstStyle/>
-          <a:p>
-            <a:pPr algn="ctr" indent="0" marL="0">
-              <a:lnSpc>
-                <a:spcPct val="115000"/>
-              </a:lnSpc>
-              <a:buNone/>
-            </a:pPr>
-            <a:r>
-              <a:rPr lang="en-US" sz="1400" dirty="0">
-                <a:solidFill>
-                  <a:srgbClr val="1A1A1A"/>
-                </a:solidFill>
-                <a:latin typeface="Meiryo" pitchFamily="34" charset="0"/>
-                <a:ea typeface="Meiryo" pitchFamily="34" charset="-122"/>
-                <a:cs typeface="Meiryo" pitchFamily="34" charset="-120"/>
-              </a:rPr>
               <a:t>▶</a:t>
             </a:r>
             <a:endParaRPr lang="en-US" sz="1400" dirty="0"/>
@@ -5590,14 +5589,14 @@
       </p:sp>
       <p:sp>
         <p:nvSpPr>
-          <p:cNvPr id="12" name="step-2"/>
+          <p:cNvPr id="11" name="step-2"/>
           <p:cNvSpPr/>
           <p:nvPr/>
         </p:nvSpPr>
         <p:spPr>
           <a:xfrm>
-            <a:off x="3282696" y="1051560"/>
-            <a:ext cx="2578608" cy="1828800"/>
+            <a:off x="3282696" y="1024128"/>
+            <a:ext cx="2578608" cy="1371600"/>
           </a:xfrm>
           <a:prstGeom prst="rect">
             <a:avLst/>
@@ -5615,14 +5614,14 @@
       </p:sp>
       <p:sp>
         <p:nvSpPr>
-          <p:cNvPr id="13" name="Shape 10"/>
+          <p:cNvPr id="12" name="Shape 9"/>
           <p:cNvSpPr/>
           <p:nvPr/>
         </p:nvSpPr>
         <p:spPr>
           <a:xfrm>
-            <a:off x="3282696" y="1051560"/>
-            <a:ext cx="2578608" cy="310896"/>
+            <a:off x="3282696" y="1024128"/>
+            <a:ext cx="2578608" cy="274320"/>
           </a:xfrm>
           <a:prstGeom prst="rect">
             <a:avLst/>
@@ -5635,60 +5634,102 @@
       </p:sp>
       <p:sp>
         <p:nvSpPr>
+          <p:cNvPr id="13" name="Text 10"/>
+          <p:cNvSpPr txBox="1"/>
+          <p:nvPr/>
+        </p:nvSpPr>
+        <p:spPr>
+          <a:xfrm>
+            <a:off x="3392424" y="1024128"/>
+            <a:ext cx="2359152" cy="274320"/>
+          </a:xfrm>
+          <a:prstGeom prst="rect">
+            <a:avLst/>
+          </a:prstGeom>
+          <a:noFill/>
+          <a:ln/>
+        </p:spPr>
+        <p:txBody>
+          <a:bodyPr wrap="square" lIns="0" tIns="0" rIns="0" bIns="0" rtlCol="0" anchor="ctr"/>
+          <a:lstStyle/>
+          <a:p>
+            <a:pPr algn="l" indent="0" marL="0">
+              <a:lnSpc>
+                <a:spcPct val="115000"/>
+              </a:lnSpc>
+              <a:buNone/>
+            </a:pPr>
+            <a:r>
+              <a:rPr lang="en-US" sz="1100" b="1" dirty="0">
+                <a:solidFill>
+                  <a:srgbClr val="FFFFFF"/>
+                </a:solidFill>
+                <a:latin typeface="Meiryo" pitchFamily="34" charset="0"/>
+                <a:ea typeface="Meiryo" pitchFamily="34" charset="-122"/>
+                <a:cs typeface="Meiryo" pitchFamily="34" charset="-120"/>
+              </a:rPr>
+              <a:t>② 整理する</a:t>
+            </a:r>
+            <a:pPr algn="l" indent="0" marL="0">
+              <a:lnSpc>
+                <a:spcPct val="115000"/>
+              </a:lnSpc>
+              <a:buNone/>
+            </a:pPr>
+            <a:r>
+              <a:rPr lang="en-US" sz="900" dirty="0">
+                <a:solidFill>
+                  <a:srgbClr val="FFFFFF"/>
+                </a:solidFill>
+                <a:latin typeface="Meiryo" pitchFamily="34" charset="0"/>
+                <a:ea typeface="Meiryo" pitchFamily="34" charset="-122"/>
+                <a:cs typeface="Meiryo" pitchFamily="34" charset="-120"/>
+              </a:rPr>
+              <a:t>　生成AI</a:t>
+            </a:r>
+            <a:endParaRPr lang="en-US" sz="1100" dirty="0"/>
+          </a:p>
+        </p:txBody>
+      </p:sp>
+      <p:sp>
+        <p:nvSpPr>
           <p:cNvPr id="14" name="Text 11"/>
           <p:cNvSpPr txBox="1"/>
           <p:nvPr/>
         </p:nvSpPr>
         <p:spPr>
           <a:xfrm>
-            <a:off x="3392424" y="1051560"/>
-            <a:ext cx="2359152" cy="310896"/>
-          </a:xfrm>
-          <a:prstGeom prst="rect">
-            <a:avLst/>
-          </a:prstGeom>
-          <a:noFill/>
-          <a:ln/>
-        </p:spPr>
-        <p:txBody>
-          <a:bodyPr wrap="square" lIns="0" tIns="0" rIns="0" bIns="0" rtlCol="0" anchor="ctr"/>
-          <a:lstStyle/>
-          <a:p>
-            <a:pPr algn="l" indent="0" marL="0">
-              <a:lnSpc>
-                <a:spcPct val="115000"/>
-              </a:lnSpc>
-              <a:buNone/>
-            </a:pPr>
-            <a:r>
-              <a:rPr lang="en-US" sz="1150" b="1" dirty="0">
-                <a:solidFill>
-                  <a:srgbClr val="FFFFFF"/>
-                </a:solidFill>
-                <a:latin typeface="Meiryo" pitchFamily="34" charset="0"/>
-                <a:ea typeface="Meiryo" pitchFamily="34" charset="-122"/>
-                <a:cs typeface="Meiryo" pitchFamily="34" charset="-120"/>
-              </a:rPr>
-              <a:t>② 整理する</a:t>
-            </a:r>
-            <a:pPr algn="l" indent="0" marL="0">
-              <a:lnSpc>
-                <a:spcPct val="115000"/>
-              </a:lnSpc>
-              <a:buNone/>
-            </a:pPr>
-            <a:r>
-              <a:rPr lang="en-US" sz="900" dirty="0">
-                <a:solidFill>
-                  <a:srgbClr val="FFFFFF"/>
-                </a:solidFill>
-                <a:latin typeface="Meiryo" pitchFamily="34" charset="0"/>
-                <a:ea typeface="Meiryo" pitchFamily="34" charset="-122"/>
-                <a:cs typeface="Meiryo" pitchFamily="34" charset="-120"/>
-              </a:rPr>
-              <a:t>　生成AI</a:t>
-            </a:r>
-            <a:endParaRPr lang="en-US" sz="1150" dirty="0"/>
+            <a:off x="3392424" y="1353312"/>
+            <a:ext cx="2359152" cy="603504"/>
+          </a:xfrm>
+          <a:prstGeom prst="rect">
+            <a:avLst/>
+          </a:prstGeom>
+          <a:noFill/>
+          <a:ln/>
+        </p:spPr>
+        <p:txBody>
+          <a:bodyPr wrap="square" lIns="0" tIns="0" rIns="0" bIns="0" rtlCol="0" anchor="t"/>
+          <a:lstStyle/>
+          <a:p>
+            <a:pPr algn="l" indent="0" marL="0">
+              <a:lnSpc>
+                <a:spcPct val="115000"/>
+              </a:lnSpc>
+              <a:buNone/>
+            </a:pPr>
+            <a:r>
+              <a:rPr lang="en-US" sz="950" dirty="0">
+                <a:solidFill>
+                  <a:srgbClr val="1A1A1A"/>
+                </a:solidFill>
+                <a:latin typeface="Meiryo" pitchFamily="34" charset="0"/>
+                <a:ea typeface="Meiryo" pitchFamily="34" charset="-122"/>
+                <a:cs typeface="Meiryo" pitchFamily="34" charset="-120"/>
+              </a:rPr>
+              <a:t>一言を「条件・処置・理由」に分けて文章化し、ロット・設備データと紐づけて事例にする</a:t>
+            </a:r>
+            <a:endParaRPr lang="en-US" sz="950" dirty="0"/>
           </a:p>
         </p:txBody>
       </p:sp>
@@ -5700,8 +5741,8 @@
         </p:nvSpPr>
         <p:spPr>
           <a:xfrm>
-            <a:off x="3392424" y="1435608"/>
-            <a:ext cx="2359152" cy="804672"/>
+            <a:off x="3392424" y="2029968"/>
+            <a:ext cx="2359152" cy="310896"/>
           </a:xfrm>
           <a:prstGeom prst="rect">
             <a:avLst/>
@@ -5720,7 +5761,66 @@
               <a:buNone/>
             </a:pPr>
             <a:r>
-              <a:rPr lang="en-US" sz="1000" dirty="0">
+              <a:rPr lang="en-US" sz="850" b="1" dirty="0">
+                <a:solidFill>
+                  <a:srgbClr val="4D4D4D"/>
+                </a:solidFill>
+                <a:latin typeface="Meiryo" pitchFamily="34" charset="0"/>
+                <a:ea typeface="Meiryo" pitchFamily="34" charset="-122"/>
+                <a:cs typeface="Meiryo" pitchFamily="34" charset="-120"/>
+              </a:rPr>
+              <a:t>道具：</a:t>
+            </a:r>
+            <a:pPr algn="l" indent="0" marL="0">
+              <a:lnSpc>
+                <a:spcPct val="115000"/>
+              </a:lnSpc>
+              <a:buNone/>
+            </a:pPr>
+            <a:r>
+              <a:rPr lang="en-US" sz="850" dirty="0">
+                <a:solidFill>
+                  <a:srgbClr val="4D4D4D"/>
+                </a:solidFill>
+                <a:latin typeface="Meiryo" pitchFamily="34" charset="0"/>
+                <a:ea typeface="Meiryo" pitchFamily="34" charset="-122"/>
+                <a:cs typeface="Meiryo" pitchFamily="34" charset="-120"/>
+              </a:rPr>
+              <a:t>生成AI＋現場データ基盤（クラウド）</a:t>
+            </a:r>
+            <a:endParaRPr lang="en-US" sz="850" dirty="0"/>
+          </a:p>
+        </p:txBody>
+      </p:sp>
+      <p:sp>
+        <p:nvSpPr>
+          <p:cNvPr id="16" name="Text 13"/>
+          <p:cNvSpPr txBox="1"/>
+          <p:nvPr/>
+        </p:nvSpPr>
+        <p:spPr>
+          <a:xfrm>
+            <a:off x="5861304" y="1545336"/>
+            <a:ext cx="338328" cy="329184"/>
+          </a:xfrm>
+          <a:prstGeom prst="rect">
+            <a:avLst/>
+          </a:prstGeom>
+          <a:noFill/>
+          <a:ln/>
+        </p:spPr>
+        <p:txBody>
+          <a:bodyPr wrap="square" lIns="0" tIns="0" rIns="0" bIns="0" rtlCol="0" anchor="ctr"/>
+          <a:lstStyle/>
+          <a:p>
+            <a:pPr algn="ctr" indent="0" marL="0">
+              <a:lnSpc>
+                <a:spcPct val="115000"/>
+              </a:lnSpc>
+              <a:buNone/>
+            </a:pPr>
+            <a:r>
+              <a:rPr lang="en-US" sz="1400" dirty="0">
                 <a:solidFill>
                   <a:srgbClr val="1A1A1A"/>
                 </a:solidFill>
@@ -5728,146 +5828,22 @@
                 <a:ea typeface="Meiryo" pitchFamily="34" charset="-122"/>
                 <a:cs typeface="Meiryo" pitchFamily="34" charset="-120"/>
               </a:rPr>
-              <a:t>一言を「条件・処置・理由」に分けて文章化し、ロット・設備データと紐づけて事例として蓄積</a:t>
-            </a:r>
-            <a:endParaRPr lang="en-US" sz="1000" dirty="0"/>
-          </a:p>
-        </p:txBody>
-      </p:sp>
-      <p:sp>
-        <p:nvSpPr>
-          <p:cNvPr id="16" name="Shape 13"/>
+              <a:t>▶</a:t>
+            </a:r>
+            <a:endParaRPr lang="en-US" sz="1400" dirty="0"/>
+          </a:p>
+        </p:txBody>
+      </p:sp>
+      <p:sp>
+        <p:nvSpPr>
+          <p:cNvPr id="17" name="step-3"/>
           <p:cNvSpPr/>
           <p:nvPr/>
         </p:nvSpPr>
         <p:spPr>
           <a:xfrm>
-            <a:off x="3392424" y="2295144"/>
-            <a:ext cx="2359152" cy="0"/>
-          </a:xfrm>
-          <a:prstGeom prst="line">
-            <a:avLst/>
-          </a:prstGeom>
-          <a:noFill/>
-          <a:ln w="9525">
-            <a:solidFill>
-              <a:srgbClr val="BFBFBF"/>
-            </a:solidFill>
-            <a:prstDash val="solid"/>
-          </a:ln>
-        </p:spPr>
-      </p:sp>
-      <p:sp>
-        <p:nvSpPr>
-          <p:cNvPr id="17" name="Text 14"/>
-          <p:cNvSpPr txBox="1"/>
-          <p:nvPr/>
-        </p:nvSpPr>
-        <p:spPr>
-          <a:xfrm>
-            <a:off x="3392424" y="2350008"/>
-            <a:ext cx="2359152" cy="475488"/>
-          </a:xfrm>
-          <a:prstGeom prst="rect">
-            <a:avLst/>
-          </a:prstGeom>
-          <a:noFill/>
-          <a:ln/>
-        </p:spPr>
-        <p:txBody>
-          <a:bodyPr wrap="square" lIns="0" tIns="0" rIns="0" bIns="0" rtlCol="0" anchor="t"/>
-          <a:lstStyle/>
-          <a:p>
-            <a:pPr algn="l" indent="0" marL="0">
-              <a:lnSpc>
-                <a:spcPct val="115000"/>
-              </a:lnSpc>
-              <a:buNone/>
-            </a:pPr>
-            <a:r>
-              <a:rPr lang="en-US" sz="900" b="1" dirty="0">
-                <a:solidFill>
-                  <a:srgbClr val="1A1A1A"/>
-                </a:solidFill>
-                <a:latin typeface="Meiryo" pitchFamily="34" charset="0"/>
-                <a:ea typeface="Meiryo" pitchFamily="34" charset="-122"/>
-                <a:cs typeface="Meiryo" pitchFamily="34" charset="-120"/>
-              </a:rPr>
-              <a:t>道具：</a:t>
-            </a:r>
-            <a:pPr algn="l" indent="0" marL="0">
-              <a:lnSpc>
-                <a:spcPct val="115000"/>
-              </a:lnSpc>
-              <a:buNone/>
-            </a:pPr>
-            <a:r>
-              <a:rPr lang="en-US" sz="900" dirty="0">
-                <a:solidFill>
-                  <a:srgbClr val="1A1A1A"/>
-                </a:solidFill>
-                <a:latin typeface="Meiryo" pitchFamily="34" charset="0"/>
-                <a:ea typeface="Meiryo" pitchFamily="34" charset="-122"/>
-                <a:cs typeface="Meiryo" pitchFamily="34" charset="-120"/>
-              </a:rPr>
-              <a:t>生成AI＋現場データ基盤（クラウド）</a:t>
-            </a:r>
-            <a:endParaRPr lang="en-US" sz="900" dirty="0"/>
-          </a:p>
-        </p:txBody>
-      </p:sp>
-      <p:sp>
-        <p:nvSpPr>
-          <p:cNvPr id="18" name="Text 15"/>
-          <p:cNvSpPr txBox="1"/>
-          <p:nvPr/>
-        </p:nvSpPr>
-        <p:spPr>
-          <a:xfrm>
-            <a:off x="5861304" y="1801368"/>
-            <a:ext cx="338328" cy="329184"/>
-          </a:xfrm>
-          <a:prstGeom prst="rect">
-            <a:avLst/>
-          </a:prstGeom>
-          <a:noFill/>
-          <a:ln/>
-        </p:spPr>
-        <p:txBody>
-          <a:bodyPr wrap="square" lIns="0" tIns="0" rIns="0" bIns="0" rtlCol="0" anchor="ctr"/>
-          <a:lstStyle/>
-          <a:p>
-            <a:pPr algn="ctr" indent="0" marL="0">
-              <a:lnSpc>
-                <a:spcPct val="115000"/>
-              </a:lnSpc>
-              <a:buNone/>
-            </a:pPr>
-            <a:r>
-              <a:rPr lang="en-US" sz="1400" dirty="0">
-                <a:solidFill>
-                  <a:srgbClr val="1A1A1A"/>
-                </a:solidFill>
-                <a:latin typeface="Meiryo" pitchFamily="34" charset="0"/>
-                <a:ea typeface="Meiryo" pitchFamily="34" charset="-122"/>
-                <a:cs typeface="Meiryo" pitchFamily="34" charset="-120"/>
-              </a:rPr>
-              <a:t>▶</a:t>
-            </a:r>
-            <a:endParaRPr lang="en-US" sz="1400" dirty="0"/>
-          </a:p>
-        </p:txBody>
-      </p:sp>
-      <p:sp>
-        <p:nvSpPr>
-          <p:cNvPr id="19" name="step-3"/>
-          <p:cNvSpPr/>
-          <p:nvPr/>
-        </p:nvSpPr>
-        <p:spPr>
-          <a:xfrm>
-            <a:off x="6199632" y="1051560"/>
-            <a:ext cx="2578608" cy="1828800"/>
+            <a:off x="6199632" y="1024128"/>
+            <a:ext cx="2578608" cy="1371600"/>
           </a:xfrm>
           <a:prstGeom prst="rect">
             <a:avLst/>
@@ -5885,14 +5861,14 @@
       </p:sp>
       <p:sp>
         <p:nvSpPr>
-          <p:cNvPr id="20" name="Shape 17"/>
+          <p:cNvPr id="18" name="Shape 15"/>
           <p:cNvSpPr/>
           <p:nvPr/>
         </p:nvSpPr>
         <p:spPr>
           <a:xfrm>
-            <a:off x="6199632" y="1051560"/>
-            <a:ext cx="2578608" cy="310896"/>
+            <a:off x="6199632" y="1024128"/>
+            <a:ext cx="2578608" cy="274320"/>
           </a:xfrm>
           <a:prstGeom prst="rect">
             <a:avLst/>
@@ -5905,13 +5881,114 @@
       </p:sp>
       <p:sp>
         <p:nvSpPr>
+          <p:cNvPr id="19" name="Text 16"/>
+          <p:cNvSpPr txBox="1"/>
+          <p:nvPr/>
+        </p:nvSpPr>
+        <p:spPr>
+          <a:xfrm>
+            <a:off x="6309360" y="1024128"/>
+            <a:ext cx="2359152" cy="274320"/>
+          </a:xfrm>
+          <a:prstGeom prst="rect">
+            <a:avLst/>
+          </a:prstGeom>
+          <a:noFill/>
+          <a:ln/>
+        </p:spPr>
+        <p:txBody>
+          <a:bodyPr wrap="square" lIns="0" tIns="0" rIns="0" bIns="0" rtlCol="0" anchor="ctr"/>
+          <a:lstStyle/>
+          <a:p>
+            <a:pPr algn="l" indent="0" marL="0">
+              <a:lnSpc>
+                <a:spcPct val="115000"/>
+              </a:lnSpc>
+              <a:buNone/>
+            </a:pPr>
+            <a:r>
+              <a:rPr lang="en-US" sz="1100" b="1" dirty="0">
+                <a:solidFill>
+                  <a:srgbClr val="FFFFFF"/>
+                </a:solidFill>
+                <a:latin typeface="Meiryo" pitchFamily="34" charset="0"/>
+                <a:ea typeface="Meiryo" pitchFamily="34" charset="-122"/>
+                <a:cs typeface="Meiryo" pitchFamily="34" charset="-120"/>
+              </a:rPr>
+              <a:t>③ 教材にして渡す</a:t>
+            </a:r>
+            <a:pPr algn="l" indent="0" marL="0">
+              <a:lnSpc>
+                <a:spcPct val="115000"/>
+              </a:lnSpc>
+              <a:buNone/>
+            </a:pPr>
+            <a:r>
+              <a:rPr lang="en-US" sz="900" dirty="0">
+                <a:solidFill>
+                  <a:srgbClr val="FFFFFF"/>
+                </a:solidFill>
+                <a:latin typeface="Meiryo" pitchFamily="34" charset="0"/>
+                <a:ea typeface="Meiryo" pitchFamily="34" charset="-122"/>
+                <a:cs typeface="Meiryo" pitchFamily="34" charset="-120"/>
+              </a:rPr>
+              <a:t>　当社</a:t>
+            </a:r>
+            <a:endParaRPr lang="en-US" sz="1100" dirty="0"/>
+          </a:p>
+        </p:txBody>
+      </p:sp>
+      <p:sp>
+        <p:nvSpPr>
+          <p:cNvPr id="20" name="Text 17"/>
+          <p:cNvSpPr txBox="1"/>
+          <p:nvPr/>
+        </p:nvSpPr>
+        <p:spPr>
+          <a:xfrm>
+            <a:off x="6309360" y="1353312"/>
+            <a:ext cx="2359152" cy="603504"/>
+          </a:xfrm>
+          <a:prstGeom prst="rect">
+            <a:avLst/>
+          </a:prstGeom>
+          <a:noFill/>
+          <a:ln/>
+        </p:spPr>
+        <p:txBody>
+          <a:bodyPr wrap="square" lIns="0" tIns="0" rIns="0" bIns="0" rtlCol="0" anchor="t"/>
+          <a:lstStyle/>
+          <a:p>
+            <a:pPr algn="l" indent="0" marL="0">
+              <a:lnSpc>
+                <a:spcPct val="115000"/>
+              </a:lnSpc>
+              <a:buNone/>
+            </a:pPr>
+            <a:r>
+              <a:rPr lang="en-US" sz="950" dirty="0">
+                <a:solidFill>
+                  <a:srgbClr val="1A1A1A"/>
+                </a:solidFill>
+                <a:latin typeface="Meiryo" pitchFamily="34" charset="0"/>
+                <a:ea typeface="Meiryo" pitchFamily="34" charset="-122"/>
+                <a:cs typeface="Meiryo" pitchFamily="34" charset="-120"/>
+              </a:rPr>
+              <a:t>現場が忙しくて作れない研修資料・音声番組・動画を当社が制作し、現場に届ける</a:t>
+            </a:r>
+            <a:endParaRPr lang="en-US" sz="950" dirty="0"/>
+          </a:p>
+        </p:txBody>
+      </p:sp>
+      <p:sp>
+        <p:nvSpPr>
           <p:cNvPr id="21" name="Text 18"/>
           <p:cNvSpPr txBox="1"/>
           <p:nvPr/>
         </p:nvSpPr>
         <p:spPr>
           <a:xfrm>
-            <a:off x="6309360" y="1051560"/>
+            <a:off x="6309360" y="2029968"/>
             <a:ext cx="2359152" cy="310896"/>
           </a:xfrm>
           <a:prstGeom prst="rect">
@@ -5921,44 +5998,44 @@
           <a:ln/>
         </p:spPr>
         <p:txBody>
-          <a:bodyPr wrap="square" lIns="0" tIns="0" rIns="0" bIns="0" rtlCol="0" anchor="ctr"/>
-          <a:lstStyle/>
-          <a:p>
-            <a:pPr algn="l" indent="0" marL="0">
-              <a:lnSpc>
-                <a:spcPct val="115000"/>
-              </a:lnSpc>
-              <a:buNone/>
-            </a:pPr>
-            <a:r>
-              <a:rPr lang="en-US" sz="1150" b="1" dirty="0">
-                <a:solidFill>
-                  <a:srgbClr val="FFFFFF"/>
-                </a:solidFill>
-                <a:latin typeface="Meiryo" pitchFamily="34" charset="0"/>
-                <a:ea typeface="Meiryo" pitchFamily="34" charset="-122"/>
-                <a:cs typeface="Meiryo" pitchFamily="34" charset="-120"/>
-              </a:rPr>
-              <a:t>③ 引き継ぐ</a:t>
-            </a:r>
-            <a:pPr algn="l" indent="0" marL="0">
-              <a:lnSpc>
-                <a:spcPct val="115000"/>
-              </a:lnSpc>
-              <a:buNone/>
-            </a:pPr>
-            <a:r>
-              <a:rPr lang="en-US" sz="900" dirty="0">
-                <a:solidFill>
-                  <a:srgbClr val="FFFFFF"/>
-                </a:solidFill>
-                <a:latin typeface="Meiryo" pitchFamily="34" charset="0"/>
-                <a:ea typeface="Meiryo" pitchFamily="34" charset="-122"/>
-                <a:cs typeface="Meiryo" pitchFamily="34" charset="-120"/>
-              </a:rPr>
-              <a:t>　若手・機械</a:t>
-            </a:r>
-            <a:endParaRPr lang="en-US" sz="1150" dirty="0"/>
+          <a:bodyPr wrap="square" lIns="0" tIns="0" rIns="0" bIns="0" rtlCol="0" anchor="t"/>
+          <a:lstStyle/>
+          <a:p>
+            <a:pPr algn="l" indent="0" marL="0">
+              <a:lnSpc>
+                <a:spcPct val="115000"/>
+              </a:lnSpc>
+              <a:buNone/>
+            </a:pPr>
+            <a:r>
+              <a:rPr lang="en-US" sz="850" b="1" dirty="0">
+                <a:solidFill>
+                  <a:srgbClr val="4D4D4D"/>
+                </a:solidFill>
+                <a:latin typeface="Meiryo" pitchFamily="34" charset="0"/>
+                <a:ea typeface="Meiryo" pitchFamily="34" charset="-122"/>
+                <a:cs typeface="Meiryo" pitchFamily="34" charset="-120"/>
+              </a:rPr>
+              <a:t>道具：</a:t>
+            </a:r>
+            <a:pPr algn="l" indent="0" marL="0">
+              <a:lnSpc>
+                <a:spcPct val="115000"/>
+              </a:lnSpc>
+              <a:buNone/>
+            </a:pPr>
+            <a:r>
+              <a:rPr lang="en-US" sz="850" dirty="0">
+                <a:solidFill>
+                  <a:srgbClr val="4D4D4D"/>
+                </a:solidFill>
+                <a:latin typeface="Meiryo" pitchFamily="34" charset="0"/>
+                <a:ea typeface="Meiryo" pitchFamily="34" charset="-122"/>
+                <a:cs typeface="Meiryo" pitchFamily="34" charset="-120"/>
+              </a:rPr>
+              <a:t>生成AIで台本→当社が監修→配信</a:t>
+            </a:r>
+            <a:endParaRPr lang="en-US" sz="850" dirty="0"/>
           </a:p>
         </p:txBody>
       </p:sp>
@@ -5970,8 +6047,8 @@
         </p:nvSpPr>
         <p:spPr>
           <a:xfrm>
-            <a:off x="6309360" y="1435608"/>
-            <a:ext cx="2359152" cy="804672"/>
+            <a:off x="365760" y="2542032"/>
+            <a:ext cx="4572000" cy="219456"/>
           </a:xfrm>
           <a:prstGeom prst="rect">
             <a:avLst/>
@@ -5990,7 +6067,7 @@
               <a:buNone/>
             </a:pPr>
             <a:r>
-              <a:rPr lang="en-US" sz="1000" dirty="0">
+              <a:rPr lang="en-US" sz="950" b="1" dirty="0">
                 <a:solidFill>
                   <a:srgbClr val="1A1A1A"/>
                 </a:solidFill>
@@ -5998,9 +6075,9 @@
                 <a:ea typeface="Meiryo" pitchFamily="34" charset="-122"/>
                 <a:cs typeface="Meiryo" pitchFamily="34" charset="-120"/>
               </a:rPr>
-              <a:t>似た条件になると、若手の画面に過去事例と推奨値を表示。ロボット・検査AIには条件を直接渡す</a:t>
-            </a:r>
-            <a:endParaRPr lang="en-US" sz="1000" dirty="0"/>
+              <a:t>渡し方を増やす（製品戦略：基盤が先、追加機能は年1本ずつ）</a:t>
+            </a:r>
+            <a:endParaRPr lang="en-US" sz="950" dirty="0"/>
           </a:p>
         </p:txBody>
       </p:sp>
@@ -6012,8 +6089,8 @@
         </p:nvSpPr>
         <p:spPr>
           <a:xfrm>
-            <a:off x="6309360" y="2295144"/>
-            <a:ext cx="2359152" cy="0"/>
+            <a:off x="365760" y="2788920"/>
+            <a:ext cx="4572000" cy="0"/>
           </a:xfrm>
           <a:prstGeom prst="line">
             <a:avLst/>
@@ -6035,27 +6112,69 @@
         </p:nvSpPr>
         <p:spPr>
           <a:xfrm>
-            <a:off x="6309360" y="2350008"/>
-            <a:ext cx="2359152" cy="475488"/>
-          </a:xfrm>
-          <a:prstGeom prst="rect">
-            <a:avLst/>
-          </a:prstGeom>
-          <a:noFill/>
-          <a:ln/>
-        </p:spPr>
-        <p:txBody>
-          <a:bodyPr wrap="square" lIns="0" tIns="0" rIns="0" bIns="0" rtlCol="0" anchor="t"/>
-          <a:lstStyle/>
-          <a:p>
-            <a:pPr algn="l" indent="0" marL="0">
-              <a:lnSpc>
-                <a:spcPct val="115000"/>
-              </a:lnSpc>
-              <a:buNone/>
-            </a:pPr>
-            <a:r>
-              <a:rPr lang="en-US" sz="900" b="1" dirty="0">
+            <a:off x="402336" y="2788920"/>
+            <a:ext cx="420624" cy="228600"/>
+          </a:xfrm>
+          <a:prstGeom prst="rect">
+            <a:avLst/>
+          </a:prstGeom>
+          <a:noFill/>
+          <a:ln/>
+        </p:spPr>
+        <p:txBody>
+          <a:bodyPr wrap="square" lIns="0" tIns="0" rIns="0" bIns="0" rtlCol="0" anchor="ctr"/>
+          <a:lstStyle/>
+          <a:p>
+            <a:pPr algn="l" indent="0" marL="0">
+              <a:lnSpc>
+                <a:spcPct val="115000"/>
+              </a:lnSpc>
+              <a:buNone/>
+            </a:pPr>
+            <a:r>
+              <a:rPr lang="en-US" sz="800" dirty="0">
+                <a:solidFill>
+                  <a:srgbClr val="4D4D4D"/>
+                </a:solidFill>
+                <a:latin typeface="Meiryo" pitchFamily="34" charset="0"/>
+                <a:ea typeface="Meiryo" pitchFamily="34" charset="-122"/>
+                <a:cs typeface="Meiryo" pitchFamily="34" charset="-120"/>
+              </a:rPr>
+              <a:t>1年目</a:t>
+            </a:r>
+            <a:endParaRPr lang="en-US" sz="800" dirty="0"/>
+          </a:p>
+        </p:txBody>
+      </p:sp>
+      <p:sp>
+        <p:nvSpPr>
+          <p:cNvPr id="25" name="Text 22"/>
+          <p:cNvSpPr txBox="1"/>
+          <p:nvPr/>
+        </p:nvSpPr>
+        <p:spPr>
+          <a:xfrm>
+            <a:off x="822960" y="2788920"/>
+            <a:ext cx="621792" cy="228600"/>
+          </a:xfrm>
+          <a:prstGeom prst="rect">
+            <a:avLst/>
+          </a:prstGeom>
+          <a:noFill/>
+          <a:ln/>
+        </p:spPr>
+        <p:txBody>
+          <a:bodyPr wrap="square" lIns="0" tIns="0" rIns="0" bIns="0" rtlCol="0" anchor="ctr"/>
+          <a:lstStyle/>
+          <a:p>
+            <a:pPr algn="l" indent="0" marL="0">
+              <a:lnSpc>
+                <a:spcPct val="115000"/>
+              </a:lnSpc>
+              <a:buNone/>
+            </a:pPr>
+            <a:r>
+              <a:rPr lang="en-US" sz="850" b="1" dirty="0">
                 <a:solidFill>
                   <a:srgbClr val="1A1A1A"/>
                 </a:solidFill>
@@ -6063,48 +6182,11 @@
                 <a:ea typeface="Meiryo" pitchFamily="34" charset="-122"/>
                 <a:cs typeface="Meiryo" pitchFamily="34" charset="-120"/>
               </a:rPr>
-              <a:t>道具：</a:t>
-            </a:r>
-            <a:pPr algn="l" indent="0" marL="0">
-              <a:lnSpc>
-                <a:spcPct val="115000"/>
-              </a:lnSpc>
-              <a:buNone/>
-            </a:pPr>
-            <a:r>
-              <a:rPr lang="en-US" sz="900" dirty="0">
-                <a:solidFill>
-                  <a:srgbClr val="1A1A1A"/>
-                </a:solidFill>
-                <a:latin typeface="Meiryo" pitchFamily="34" charset="0"/>
-                <a:ea typeface="Meiryo" pitchFamily="34" charset="-122"/>
-                <a:cs typeface="Meiryo" pitchFamily="34" charset="-120"/>
-              </a:rPr>
-              <a:t>アプリの通知＋API連携</a:t>
-            </a:r>
-            <a:endParaRPr lang="en-US" sz="900" dirty="0"/>
-          </a:p>
-        </p:txBody>
-      </p:sp>
-      <p:sp>
-        <p:nvSpPr>
-          <p:cNvPr id="25" name="onboarding"/>
-          <p:cNvSpPr/>
-          <p:nvPr/>
-        </p:nvSpPr>
-        <p:spPr>
-          <a:xfrm>
-            <a:off x="365760" y="3035808"/>
-            <a:ext cx="4023360" cy="1371600"/>
-          </a:xfrm>
-          <a:prstGeom prst="rect">
-            <a:avLst/>
-          </a:prstGeom>
-          <a:solidFill>
-            <a:srgbClr val="F2F2F2"/>
-          </a:solidFill>
-          <a:ln/>
-        </p:spPr>
+              <a:t>基盤</a:t>
+            </a:r>
+            <a:endParaRPr lang="en-US" sz="850" dirty="0"/>
+          </a:p>
+        </p:txBody>
       </p:sp>
       <p:sp>
         <p:nvSpPr>
@@ -6114,37 +6196,37 @@
         </p:nvSpPr>
         <p:spPr>
           <a:xfrm>
-            <a:off x="502920" y="3108960"/>
-            <a:ext cx="3749040" cy="256032"/>
-          </a:xfrm>
-          <a:prstGeom prst="rect">
-            <a:avLst/>
-          </a:prstGeom>
-          <a:noFill/>
-          <a:ln/>
-        </p:spPr>
-        <p:txBody>
-          <a:bodyPr wrap="square" lIns="0" tIns="0" rIns="0" bIns="0" rtlCol="0" anchor="t"/>
-          <a:lstStyle/>
-          <a:p>
-            <a:pPr algn="l" indent="0" marL="0">
-              <a:lnSpc>
-                <a:spcPct val="115000"/>
-              </a:lnSpc>
-              <a:buNone/>
-            </a:pPr>
-            <a:r>
-              <a:rPr lang="en-US" sz="1100" b="1" dirty="0">
-                <a:solidFill>
-                  <a:srgbClr val="1A1A1A"/>
-                </a:solidFill>
-                <a:latin typeface="Meiryo" pitchFamily="34" charset="0"/>
-                <a:ea typeface="Meiryo" pitchFamily="34" charset="-122"/>
-                <a:cs typeface="Meiryo" pitchFamily="34" charset="-120"/>
-              </a:rPr>
-              <a:t>道具以外：導入支援（初年度・約2か月）</a:t>
-            </a:r>
-            <a:endParaRPr lang="en-US" sz="1100" dirty="0"/>
+            <a:off x="1444752" y="2788920"/>
+            <a:ext cx="603504" cy="228600"/>
+          </a:xfrm>
+          <a:prstGeom prst="rect">
+            <a:avLst/>
+          </a:prstGeom>
+          <a:noFill/>
+          <a:ln/>
+        </p:spPr>
+        <p:txBody>
+          <a:bodyPr wrap="square" lIns="0" tIns="0" rIns="0" bIns="0" rtlCol="0" anchor="ctr"/>
+          <a:lstStyle/>
+          <a:p>
+            <a:pPr algn="l" indent="0" marL="0">
+              <a:lnSpc>
+                <a:spcPct val="115000"/>
+              </a:lnSpc>
+              <a:buNone/>
+            </a:pPr>
+            <a:r>
+              <a:rPr lang="en-US" sz="800" dirty="0">
+                <a:solidFill>
+                  <a:srgbClr val="4D4D4D"/>
+                </a:solidFill>
+                <a:latin typeface="Meiryo" pitchFamily="34" charset="0"/>
+                <a:ea typeface="Meiryo" pitchFamily="34" charset="-122"/>
+                <a:cs typeface="Meiryo" pitchFamily="34" charset="-120"/>
+              </a:rPr>
+              <a:t>画面</a:t>
+            </a:r>
+            <a:endParaRPr lang="en-US" sz="800" dirty="0"/>
           </a:p>
         </p:txBody>
       </p:sp>
@@ -6156,30 +6238,27 @@
         </p:nvSpPr>
         <p:spPr>
           <a:xfrm>
-            <a:off x="502920" y="3419856"/>
-            <a:ext cx="3749040" cy="932688"/>
-          </a:xfrm>
-          <a:prstGeom prst="rect">
-            <a:avLst/>
-          </a:prstGeom>
-          <a:noFill/>
-          <a:ln/>
-        </p:spPr>
-        <p:txBody>
-          <a:bodyPr wrap="square" lIns="0" tIns="0" rIns="0" bIns="0" rtlCol="0" anchor="t"/>
-          <a:lstStyle/>
-          <a:p>
-            <a:pPr algn="l" indent="0" marL="0">
-              <a:lnSpc>
-                <a:spcPct val="115000"/>
-              </a:lnSpc>
-              <a:spcAft>
-                <a:spcPts val="300"/>
-              </a:spcAft>
-              <a:buNone/>
-            </a:pPr>
-            <a:r>
-              <a:rPr lang="en-US" sz="950" dirty="0">
+            <a:off x="2048256" y="2788920"/>
+            <a:ext cx="2468880" cy="228600"/>
+          </a:xfrm>
+          <a:prstGeom prst="rect">
+            <a:avLst/>
+          </a:prstGeom>
+          <a:noFill/>
+          <a:ln/>
+        </p:spPr>
+        <p:txBody>
+          <a:bodyPr wrap="square" lIns="0" tIns="0" rIns="0" bIns="0" rtlCol="0" anchor="ctr"/>
+          <a:lstStyle/>
+          <a:p>
+            <a:pPr algn="l" indent="0" marL="0">
+              <a:lnSpc>
+                <a:spcPct val="115000"/>
+              </a:lnSpc>
+              <a:buNone/>
+            </a:pPr>
+            <a:r>
+              <a:rPr lang="en-US" sz="800" dirty="0">
                 <a:solidFill>
                   <a:srgbClr val="1A1A1A"/>
                 </a:solidFill>
@@ -6187,55 +6266,9 @@
                 <a:ea typeface="Meiryo" pitchFamily="34" charset="-122"/>
                 <a:cs typeface="Meiryo" pitchFamily="34" charset="-120"/>
               </a:rPr>
-              <a:t>当社の担当者が現場に入り、熟練者に聞き取りして判断を棚卸し</a:t>
-            </a:r>
-            <a:endParaRPr lang="en-US" sz="950" dirty="0"/>
-          </a:p>
-          <a:p>
-            <a:pPr algn="l" indent="0" marL="0">
-              <a:lnSpc>
-                <a:spcPct val="115000"/>
-              </a:lnSpc>
-              <a:spcAft>
-                <a:spcPts val="300"/>
-              </a:spcAft>
-              <a:buNone/>
-            </a:pPr>
-            <a:r>
-              <a:rPr lang="en-US" sz="950" dirty="0">
-                <a:solidFill>
-                  <a:srgbClr val="1A1A1A"/>
-                </a:solidFill>
-                <a:latin typeface="Meiryo" pitchFamily="34" charset="0"/>
-                <a:ea typeface="Meiryo" pitchFamily="34" charset="-122"/>
-                <a:cs typeface="Meiryo" pitchFamily="34" charset="-120"/>
-              </a:rPr>
-              <a:t>既存の帳票・試験記録をデータとして移行</a:t>
-            </a:r>
-            <a:endParaRPr lang="en-US" sz="950" dirty="0"/>
-          </a:p>
-          <a:p>
-            <a:pPr algn="l" indent="0" marL="0">
-              <a:lnSpc>
-                <a:spcPct val="115000"/>
-              </a:lnSpc>
-              <a:spcAft>
-                <a:spcPts val="300"/>
-              </a:spcAft>
-              <a:buNone/>
-            </a:pPr>
-            <a:r>
-              <a:rPr lang="en-US" sz="950" dirty="0">
-                <a:solidFill>
-                  <a:srgbClr val="1A1A1A"/>
-                </a:solidFill>
-                <a:latin typeface="Meiryo" pitchFamily="34" charset="0"/>
-                <a:ea typeface="Meiryo" pitchFamily="34" charset="-122"/>
-                <a:cs typeface="Meiryo" pitchFamily="34" charset="-120"/>
-              </a:rPr>
-              <a:t>現場研修で、記録が「いつもの作業の延長」になるまで定着させる</a:t>
-            </a:r>
-            <a:endParaRPr lang="en-US" sz="950" dirty="0"/>
+              <a:t>記録・過去事例の検索（全顧客）</a:t>
+            </a:r>
+            <a:endParaRPr lang="en-US" sz="800" dirty="0"/>
           </a:p>
         </p:txBody>
       </p:sp>
@@ -6247,27 +6280,27 @@
         </p:nvSpPr>
         <p:spPr>
           <a:xfrm>
-            <a:off x="4572000" y="3035808"/>
-            <a:ext cx="4206240" cy="237744"/>
-          </a:xfrm>
-          <a:prstGeom prst="rect">
-            <a:avLst/>
-          </a:prstGeom>
-          <a:noFill/>
-          <a:ln/>
-        </p:spPr>
-        <p:txBody>
-          <a:bodyPr wrap="square" lIns="0" tIns="0" rIns="0" bIns="0" rtlCol="0" anchor="t"/>
-          <a:lstStyle/>
-          <a:p>
-            <a:pPr algn="l" indent="0" marL="0">
-              <a:lnSpc>
-                <a:spcPct val="115000"/>
-              </a:lnSpc>
-              <a:buNone/>
-            </a:pPr>
-            <a:r>
-              <a:rPr lang="en-US" sz="1000" b="1" dirty="0">
+            <a:off x="4517136" y="2788920"/>
+            <a:ext cx="384048" cy="228600"/>
+          </a:xfrm>
+          <a:prstGeom prst="rect">
+            <a:avLst/>
+          </a:prstGeom>
+          <a:noFill/>
+          <a:ln/>
+        </p:spPr>
+        <p:txBody>
+          <a:bodyPr wrap="square" lIns="0" tIns="0" rIns="0" bIns="0" rtlCol="0" anchor="ctr"/>
+          <a:lstStyle/>
+          <a:p>
+            <a:pPr algn="r" indent="0" marL="0">
+              <a:lnSpc>
+                <a:spcPct val="115000"/>
+              </a:lnSpc>
+              <a:buNone/>
+            </a:pPr>
+            <a:r>
+              <a:rPr lang="en-US" sz="800" dirty="0">
                 <a:solidFill>
                   <a:srgbClr val="1A1A1A"/>
                 </a:solidFill>
@@ -6275,9 +6308,9 @@
                 <a:ea typeface="Meiryo" pitchFamily="34" charset="-122"/>
                 <a:cs typeface="Meiryo" pitchFamily="34" charset="-120"/>
               </a:rPr>
-              <a:t>機能の広げ方（製品戦略：基盤が先、追加機能は年1本ずつ）</a:t>
-            </a:r>
-            <a:endParaRPr lang="en-US" sz="1000" dirty="0"/>
+              <a:t>製品</a:t>
+            </a:r>
+            <a:endParaRPr lang="en-US" sz="800" dirty="0"/>
           </a:p>
         </p:txBody>
       </p:sp>
@@ -6289,8 +6322,8 @@
         </p:nvSpPr>
         <p:spPr>
           <a:xfrm>
-            <a:off x="4572000" y="3310128"/>
-            <a:ext cx="4206240" cy="0"/>
+            <a:off x="365760" y="3017520"/>
+            <a:ext cx="4572000" cy="0"/>
           </a:xfrm>
           <a:prstGeom prst="line">
             <a:avLst/>
@@ -6312,8 +6345,8 @@
         </p:nvSpPr>
         <p:spPr>
           <a:xfrm>
-            <a:off x="4572000" y="3310128"/>
-            <a:ext cx="502920" cy="219456"/>
+            <a:off x="402336" y="3017520"/>
+            <a:ext cx="420624" cy="228600"/>
           </a:xfrm>
           <a:prstGeom prst="rect">
             <a:avLst/>
@@ -6332,7 +6365,7 @@
               <a:buNone/>
             </a:pPr>
             <a:r>
-              <a:rPr lang="en-US" sz="850" dirty="0">
+              <a:rPr lang="en-US" sz="800" dirty="0">
                 <a:solidFill>
                   <a:srgbClr val="4D4D4D"/>
                 </a:solidFill>
@@ -6340,9 +6373,9 @@
                 <a:ea typeface="Meiryo" pitchFamily="34" charset="-122"/>
                 <a:cs typeface="Meiryo" pitchFamily="34" charset="-120"/>
               </a:rPr>
-              <a:t>1年目</a:t>
-            </a:r>
-            <a:endParaRPr lang="en-US" sz="850" dirty="0"/>
+              <a:t>2年目</a:t>
+            </a:r>
+            <a:endParaRPr lang="en-US" sz="800" dirty="0"/>
           </a:p>
         </p:txBody>
       </p:sp>
@@ -6354,8 +6387,8 @@
         </p:nvSpPr>
         <p:spPr>
           <a:xfrm>
-            <a:off x="5074920" y="3310128"/>
-            <a:ext cx="685800" cy="219456"/>
+            <a:off x="822960" y="3017520"/>
+            <a:ext cx="621792" cy="228600"/>
           </a:xfrm>
           <a:prstGeom prst="rect">
             <a:avLst/>
@@ -6374,7 +6407,7 @@
               <a:buNone/>
             </a:pPr>
             <a:r>
-              <a:rPr lang="en-US" sz="900" b="1" dirty="0">
+              <a:rPr lang="en-US" sz="850" b="1" dirty="0">
                 <a:solidFill>
                   <a:srgbClr val="1A1A1A"/>
                 </a:solidFill>
@@ -6382,9 +6415,9 @@
                 <a:ea typeface="Meiryo" pitchFamily="34" charset="-122"/>
                 <a:cs typeface="Meiryo" pitchFamily="34" charset="-120"/>
               </a:rPr>
-              <a:t>基盤</a:t>
-            </a:r>
-            <a:endParaRPr lang="en-US" sz="900" dirty="0"/>
+              <a:t>KNACK</a:t>
+            </a:r>
+            <a:endParaRPr lang="en-US" sz="850" dirty="0"/>
           </a:p>
         </p:txBody>
       </p:sp>
@@ -6396,8 +6429,8 @@
         </p:nvSpPr>
         <p:spPr>
           <a:xfrm>
-            <a:off x="5760720" y="3310128"/>
-            <a:ext cx="3017520" cy="219456"/>
+            <a:off x="1444752" y="3017520"/>
+            <a:ext cx="603504" cy="228600"/>
           </a:xfrm>
           <a:prstGeom prst="rect">
             <a:avLst/>
@@ -6416,7 +6449,49 @@
               <a:buNone/>
             </a:pPr>
             <a:r>
-              <a:rPr lang="en-US" sz="850" dirty="0">
+              <a:rPr lang="en-US" sz="800" dirty="0">
+                <a:solidFill>
+                  <a:srgbClr val="4D4D4D"/>
+                </a:solidFill>
+                <a:latin typeface="Meiryo" pitchFamily="34" charset="0"/>
+                <a:ea typeface="Meiryo" pitchFamily="34" charset="-122"/>
+                <a:cs typeface="Meiryo" pitchFamily="34" charset="-120"/>
+              </a:rPr>
+              <a:t>教材</a:t>
+            </a:r>
+            <a:endParaRPr lang="en-US" sz="800" dirty="0"/>
+          </a:p>
+        </p:txBody>
+      </p:sp>
+      <p:sp>
+        <p:nvSpPr>
+          <p:cNvPr id="33" name="Text 30"/>
+          <p:cNvSpPr txBox="1"/>
+          <p:nvPr/>
+        </p:nvSpPr>
+        <p:spPr>
+          <a:xfrm>
+            <a:off x="2048256" y="3017520"/>
+            <a:ext cx="2468880" cy="228600"/>
+          </a:xfrm>
+          <a:prstGeom prst="rect">
+            <a:avLst/>
+          </a:prstGeom>
+          <a:noFill/>
+          <a:ln/>
+        </p:spPr>
+        <p:txBody>
+          <a:bodyPr wrap="square" lIns="0" tIns="0" rIns="0" bIns="0" rtlCol="0" anchor="ctr"/>
+          <a:lstStyle/>
+          <a:p>
+            <a:pPr algn="l" indent="0" marL="0">
+              <a:lnSpc>
+                <a:spcPct val="115000"/>
+              </a:lnSpc>
+              <a:buNone/>
+            </a:pPr>
+            <a:r>
+              <a:rPr lang="en-US" sz="800" dirty="0">
                 <a:solidFill>
                   <a:srgbClr val="1A1A1A"/>
                 </a:solidFill>
@@ -6424,22 +6499,64 @@
                 <a:ea typeface="Meiryo" pitchFamily="34" charset="-122"/>
                 <a:cs typeface="Meiryo" pitchFamily="34" charset="-120"/>
               </a:rPr>
-              <a:t>記録・検索（①②と過去事例の検索）。全顧客が使う</a:t>
-            </a:r>
-            <a:endParaRPr lang="en-US" sz="850" dirty="0"/>
-          </a:p>
-        </p:txBody>
-      </p:sp>
-      <p:sp>
-        <p:nvSpPr>
-          <p:cNvPr id="33" name="Shape 30"/>
+              <a:t>勘どころの音声番組・動画・研修資料を制作</a:t>
+            </a:r>
+            <a:endParaRPr lang="en-US" sz="800" dirty="0"/>
+          </a:p>
+        </p:txBody>
+      </p:sp>
+      <p:sp>
+        <p:nvSpPr>
+          <p:cNvPr id="34" name="Text 31"/>
+          <p:cNvSpPr txBox="1"/>
+          <p:nvPr/>
+        </p:nvSpPr>
+        <p:spPr>
+          <a:xfrm>
+            <a:off x="4517136" y="3017520"/>
+            <a:ext cx="384048" cy="228600"/>
+          </a:xfrm>
+          <a:prstGeom prst="rect">
+            <a:avLst/>
+          </a:prstGeom>
+          <a:noFill/>
+          <a:ln/>
+        </p:spPr>
+        <p:txBody>
+          <a:bodyPr wrap="square" lIns="0" tIns="0" rIns="0" bIns="0" rtlCol="0" anchor="ctr"/>
+          <a:lstStyle/>
+          <a:p>
+            <a:pPr algn="r" indent="0" marL="0">
+              <a:lnSpc>
+                <a:spcPct val="115000"/>
+              </a:lnSpc>
+              <a:buNone/>
+            </a:pPr>
+            <a:r>
+              <a:rPr lang="en-US" sz="800" dirty="0">
+                <a:solidFill>
+                  <a:srgbClr val="1A1A1A"/>
+                </a:solidFill>
+                <a:latin typeface="Meiryo" pitchFamily="34" charset="0"/>
+                <a:ea typeface="Meiryo" pitchFamily="34" charset="-122"/>
+                <a:cs typeface="Meiryo" pitchFamily="34" charset="-120"/>
+              </a:rPr>
+              <a:t>製品</a:t>
+            </a:r>
+            <a:endParaRPr lang="en-US" sz="800" dirty="0"/>
+          </a:p>
+        </p:txBody>
+      </p:sp>
+      <p:sp>
+        <p:nvSpPr>
+          <p:cNvPr id="35" name="Shape 32"/>
           <p:cNvSpPr/>
           <p:nvPr/>
         </p:nvSpPr>
         <p:spPr>
           <a:xfrm>
-            <a:off x="4572000" y="3529584"/>
-            <a:ext cx="4206240" cy="0"/>
+            <a:off x="365760" y="3246120"/>
+            <a:ext cx="4572000" cy="0"/>
           </a:xfrm>
           <a:prstGeom prst="line">
             <a:avLst/>
@@ -6455,98 +6572,14 @@
       </p:sp>
       <p:sp>
         <p:nvSpPr>
-          <p:cNvPr id="34" name="Text 31"/>
-          <p:cNvSpPr txBox="1"/>
-          <p:nvPr/>
-        </p:nvSpPr>
-        <p:spPr>
-          <a:xfrm>
-            <a:off x="4572000" y="3529584"/>
-            <a:ext cx="502920" cy="219456"/>
-          </a:xfrm>
-          <a:prstGeom prst="rect">
-            <a:avLst/>
-          </a:prstGeom>
-          <a:noFill/>
-          <a:ln/>
-        </p:spPr>
-        <p:txBody>
-          <a:bodyPr wrap="square" lIns="0" tIns="0" rIns="0" bIns="0" rtlCol="0" anchor="ctr"/>
-          <a:lstStyle/>
-          <a:p>
-            <a:pPr algn="l" indent="0" marL="0">
-              <a:lnSpc>
-                <a:spcPct val="115000"/>
-              </a:lnSpc>
-              <a:buNone/>
-            </a:pPr>
-            <a:r>
-              <a:rPr lang="en-US" sz="850" dirty="0">
-                <a:solidFill>
-                  <a:srgbClr val="4D4D4D"/>
-                </a:solidFill>
-                <a:latin typeface="Meiryo" pitchFamily="34" charset="0"/>
-                <a:ea typeface="Meiryo" pitchFamily="34" charset="-122"/>
-                <a:cs typeface="Meiryo" pitchFamily="34" charset="-120"/>
-              </a:rPr>
-              <a:t>2年目</a:t>
-            </a:r>
-            <a:endParaRPr lang="en-US" sz="850" dirty="0"/>
-          </a:p>
-        </p:txBody>
-      </p:sp>
-      <p:sp>
-        <p:nvSpPr>
-          <p:cNvPr id="35" name="Text 32"/>
-          <p:cNvSpPr txBox="1"/>
-          <p:nvPr/>
-        </p:nvSpPr>
-        <p:spPr>
-          <a:xfrm>
-            <a:off x="5074920" y="3529584"/>
-            <a:ext cx="685800" cy="219456"/>
-          </a:xfrm>
-          <a:prstGeom prst="rect">
-            <a:avLst/>
-          </a:prstGeom>
-          <a:noFill/>
-          <a:ln/>
-        </p:spPr>
-        <p:txBody>
-          <a:bodyPr wrap="square" lIns="0" tIns="0" rIns="0" bIns="0" rtlCol="0" anchor="ctr"/>
-          <a:lstStyle/>
-          <a:p>
-            <a:pPr algn="l" indent="0" marL="0">
-              <a:lnSpc>
-                <a:spcPct val="115000"/>
-              </a:lnSpc>
-              <a:buNone/>
-            </a:pPr>
-            <a:r>
-              <a:rPr lang="en-US" sz="900" b="1" dirty="0">
-                <a:solidFill>
-                  <a:srgbClr val="1A1A1A"/>
-                </a:solidFill>
-                <a:latin typeface="Meiryo" pitchFamily="34" charset="0"/>
-                <a:ea typeface="Meiryo" pitchFamily="34" charset="-122"/>
-                <a:cs typeface="Meiryo" pitchFamily="34" charset="-120"/>
-              </a:rPr>
-              <a:t>KNACK</a:t>
-            </a:r>
-            <a:endParaRPr lang="en-US" sz="900" dirty="0"/>
-          </a:p>
-        </p:txBody>
-      </p:sp>
-      <p:sp>
-        <p:nvSpPr>
           <p:cNvPr id="36" name="Text 33"/>
           <p:cNvSpPr txBox="1"/>
           <p:nvPr/>
         </p:nvSpPr>
         <p:spPr>
           <a:xfrm>
-            <a:off x="5760720" y="3529584"/>
-            <a:ext cx="3017520" cy="219456"/>
+            <a:off x="402336" y="3246120"/>
+            <a:ext cx="420624" cy="228600"/>
           </a:xfrm>
           <a:prstGeom prst="rect">
             <a:avLst/>
@@ -6565,7 +6598,49 @@
               <a:buNone/>
             </a:pPr>
             <a:r>
-              <a:rPr lang="en-US" sz="850" dirty="0">
+              <a:rPr lang="en-US" sz="800" dirty="0">
+                <a:solidFill>
+                  <a:srgbClr val="4D4D4D"/>
+                </a:solidFill>
+                <a:latin typeface="Meiryo" pitchFamily="34" charset="0"/>
+                <a:ea typeface="Meiryo" pitchFamily="34" charset="-122"/>
+                <a:cs typeface="Meiryo" pitchFamily="34" charset="-120"/>
+              </a:rPr>
+              <a:t>3年目</a:t>
+            </a:r>
+            <a:endParaRPr lang="en-US" sz="800" dirty="0"/>
+          </a:p>
+        </p:txBody>
+      </p:sp>
+      <p:sp>
+        <p:nvSpPr>
+          <p:cNvPr id="37" name="Text 34"/>
+          <p:cNvSpPr txBox="1"/>
+          <p:nvPr/>
+        </p:nvSpPr>
+        <p:spPr>
+          <a:xfrm>
+            <a:off x="822960" y="3246120"/>
+            <a:ext cx="621792" cy="228600"/>
+          </a:xfrm>
+          <a:prstGeom prst="rect">
+            <a:avLst/>
+          </a:prstGeom>
+          <a:noFill/>
+          <a:ln/>
+        </p:spPr>
+        <p:txBody>
+          <a:bodyPr wrap="square" lIns="0" tIns="0" rIns="0" bIns="0" rtlCol="0" anchor="ctr"/>
+          <a:lstStyle/>
+          <a:p>
+            <a:pPr algn="l" indent="0" marL="0">
+              <a:lnSpc>
+                <a:spcPct val="115000"/>
+              </a:lnSpc>
+              <a:buNone/>
+            </a:pPr>
+            <a:r>
+              <a:rPr lang="en-US" sz="850" b="1" dirty="0">
                 <a:solidFill>
                   <a:srgbClr val="1A1A1A"/>
                 </a:solidFill>
@@ -6573,7 +6648,7 @@
                 <a:ea typeface="Meiryo" pitchFamily="34" charset="-122"/>
                 <a:cs typeface="Meiryo" pitchFamily="34" charset="-120"/>
               </a:rPr>
-              <a:t>推奨値の自動提示（③）</a:t>
+              <a:t>SAFE</a:t>
             </a:r>
             <a:endParaRPr lang="en-US" sz="850" dirty="0"/>
           </a:p>
@@ -6581,14 +6656,140 @@
       </p:sp>
       <p:sp>
         <p:nvSpPr>
-          <p:cNvPr id="37" name="Shape 34"/>
+          <p:cNvPr id="38" name="Text 35"/>
+          <p:cNvSpPr txBox="1"/>
+          <p:nvPr/>
+        </p:nvSpPr>
+        <p:spPr>
+          <a:xfrm>
+            <a:off x="1444752" y="3246120"/>
+            <a:ext cx="603504" cy="228600"/>
+          </a:xfrm>
+          <a:prstGeom prst="rect">
+            <a:avLst/>
+          </a:prstGeom>
+          <a:noFill/>
+          <a:ln/>
+        </p:spPr>
+        <p:txBody>
+          <a:bodyPr wrap="square" lIns="0" tIns="0" rIns="0" bIns="0" rtlCol="0" anchor="ctr"/>
+          <a:lstStyle/>
+          <a:p>
+            <a:pPr algn="l" indent="0" marL="0">
+              <a:lnSpc>
+                <a:spcPct val="115000"/>
+              </a:lnSpc>
+              <a:buNone/>
+            </a:pPr>
+            <a:r>
+              <a:rPr lang="en-US" sz="800" dirty="0">
+                <a:solidFill>
+                  <a:srgbClr val="4D4D4D"/>
+                </a:solidFill>
+                <a:latin typeface="Meiryo" pitchFamily="34" charset="0"/>
+                <a:ea typeface="Meiryo" pitchFamily="34" charset="-122"/>
+                <a:cs typeface="Meiryo" pitchFamily="34" charset="-120"/>
+              </a:rPr>
+              <a:t>警告</a:t>
+            </a:r>
+            <a:endParaRPr lang="en-US" sz="800" dirty="0"/>
+          </a:p>
+        </p:txBody>
+      </p:sp>
+      <p:sp>
+        <p:nvSpPr>
+          <p:cNvPr id="39" name="Text 36"/>
+          <p:cNvSpPr txBox="1"/>
+          <p:nvPr/>
+        </p:nvSpPr>
+        <p:spPr>
+          <a:xfrm>
+            <a:off x="2048256" y="3246120"/>
+            <a:ext cx="2468880" cy="228600"/>
+          </a:xfrm>
+          <a:prstGeom prst="rect">
+            <a:avLst/>
+          </a:prstGeom>
+          <a:noFill/>
+          <a:ln/>
+        </p:spPr>
+        <p:txBody>
+          <a:bodyPr wrap="square" lIns="0" tIns="0" rIns="0" bIns="0" rtlCol="0" anchor="ctr"/>
+          <a:lstStyle/>
+          <a:p>
+            <a:pPr algn="l" indent="0" marL="0">
+              <a:lnSpc>
+                <a:spcPct val="115000"/>
+              </a:lnSpc>
+              <a:buNone/>
+            </a:pPr>
+            <a:r>
+              <a:rPr lang="en-US" sz="800" dirty="0">
+                <a:solidFill>
+                  <a:srgbClr val="1A1A1A"/>
+                </a:solidFill>
+                <a:latin typeface="Meiryo" pitchFamily="34" charset="0"/>
+                <a:ea typeface="Meiryo" pitchFamily="34" charset="-122"/>
+                <a:cs typeface="Meiryo" pitchFamily="34" charset="-120"/>
+              </a:rPr>
+              <a:t>手順書を開くと過去の事故・ヒヤリ地点を表示</a:t>
+            </a:r>
+            <a:endParaRPr lang="en-US" sz="800" dirty="0"/>
+          </a:p>
+        </p:txBody>
+      </p:sp>
+      <p:sp>
+        <p:nvSpPr>
+          <p:cNvPr id="40" name="Text 37"/>
+          <p:cNvSpPr txBox="1"/>
+          <p:nvPr/>
+        </p:nvSpPr>
+        <p:spPr>
+          <a:xfrm>
+            <a:off x="4517136" y="3246120"/>
+            <a:ext cx="384048" cy="228600"/>
+          </a:xfrm>
+          <a:prstGeom prst="rect">
+            <a:avLst/>
+          </a:prstGeom>
+          <a:noFill/>
+          <a:ln/>
+        </p:spPr>
+        <p:txBody>
+          <a:bodyPr wrap="square" lIns="0" tIns="0" rIns="0" bIns="0" rtlCol="0" anchor="ctr"/>
+          <a:lstStyle/>
+          <a:p>
+            <a:pPr algn="r" indent="0" marL="0">
+              <a:lnSpc>
+                <a:spcPct val="115000"/>
+              </a:lnSpc>
+              <a:buNone/>
+            </a:pPr>
+            <a:r>
+              <a:rPr lang="en-US" sz="800" dirty="0">
+                <a:solidFill>
+                  <a:srgbClr val="1A1A1A"/>
+                </a:solidFill>
+                <a:latin typeface="Meiryo" pitchFamily="34" charset="0"/>
+                <a:ea typeface="Meiryo" pitchFamily="34" charset="-122"/>
+                <a:cs typeface="Meiryo" pitchFamily="34" charset="-120"/>
+              </a:rPr>
+              <a:t>製品</a:t>
+            </a:r>
+            <a:endParaRPr lang="en-US" sz="800" dirty="0"/>
+          </a:p>
+        </p:txBody>
+      </p:sp>
+      <p:sp>
+        <p:nvSpPr>
+          <p:cNvPr id="41" name="Shape 38"/>
           <p:cNvSpPr/>
           <p:nvPr/>
         </p:nvSpPr>
         <p:spPr>
           <a:xfrm>
-            <a:off x="4572000" y="3749040"/>
-            <a:ext cx="4206240" cy="0"/>
+            <a:off x="365760" y="3474720"/>
+            <a:ext cx="4572000" cy="0"/>
           </a:xfrm>
           <a:prstGeom prst="line">
             <a:avLst/>
@@ -6604,14 +6805,14 @@
       </p:sp>
       <p:sp>
         <p:nvSpPr>
-          <p:cNvPr id="38" name="Text 35"/>
+          <p:cNvPr id="42" name="Text 39"/>
           <p:cNvSpPr txBox="1"/>
           <p:nvPr/>
         </p:nvSpPr>
         <p:spPr>
           <a:xfrm>
-            <a:off x="4572000" y="3749040"/>
-            <a:ext cx="502920" cy="219456"/>
+            <a:off x="402336" y="3474720"/>
+            <a:ext cx="420624" cy="228600"/>
           </a:xfrm>
           <a:prstGeom prst="rect">
             <a:avLst/>
@@ -6630,7 +6831,7 @@
               <a:buNone/>
             </a:pPr>
             <a:r>
-              <a:rPr lang="en-US" sz="850" dirty="0">
+              <a:rPr lang="en-US" sz="800" dirty="0">
                 <a:solidFill>
                   <a:srgbClr val="4D4D4D"/>
                 </a:solidFill>
@@ -6638,7 +6839,49 @@
                 <a:ea typeface="Meiryo" pitchFamily="34" charset="-122"/>
                 <a:cs typeface="Meiryo" pitchFamily="34" charset="-120"/>
               </a:rPr>
-              <a:t>3年目</a:t>
+              <a:t>4年目</a:t>
+            </a:r>
+            <a:endParaRPr lang="en-US" sz="800" dirty="0"/>
+          </a:p>
+        </p:txBody>
+      </p:sp>
+      <p:sp>
+        <p:nvSpPr>
+          <p:cNvPr id="43" name="Text 40"/>
+          <p:cNvSpPr txBox="1"/>
+          <p:nvPr/>
+        </p:nvSpPr>
+        <p:spPr>
+          <a:xfrm>
+            <a:off x="822960" y="3474720"/>
+            <a:ext cx="621792" cy="228600"/>
+          </a:xfrm>
+          <a:prstGeom prst="rect">
+            <a:avLst/>
+          </a:prstGeom>
+          <a:noFill/>
+          <a:ln/>
+        </p:spPr>
+        <p:txBody>
+          <a:bodyPr wrap="square" lIns="0" tIns="0" rIns="0" bIns="0" rtlCol="0" anchor="ctr"/>
+          <a:lstStyle/>
+          <a:p>
+            <a:pPr algn="l" indent="0" marL="0">
+              <a:lnSpc>
+                <a:spcPct val="115000"/>
+              </a:lnSpc>
+              <a:buNone/>
+            </a:pPr>
+            <a:r>
+              <a:rPr lang="en-US" sz="850" b="1" dirty="0">
+                <a:solidFill>
+                  <a:srgbClr val="1A1A1A"/>
+                </a:solidFill>
+                <a:latin typeface="Meiryo" pitchFamily="34" charset="0"/>
+                <a:ea typeface="Meiryo" pitchFamily="34" charset="-122"/>
+                <a:cs typeface="Meiryo" pitchFamily="34" charset="-120"/>
+              </a:rPr>
+              <a:t>TWIN</a:t>
             </a:r>
             <a:endParaRPr lang="en-US" sz="850" dirty="0"/>
           </a:p>
@@ -6646,14 +6889,14 @@
       </p:sp>
       <p:sp>
         <p:nvSpPr>
-          <p:cNvPr id="39" name="Text 36"/>
+          <p:cNvPr id="44" name="Text 41"/>
           <p:cNvSpPr txBox="1"/>
           <p:nvPr/>
         </p:nvSpPr>
         <p:spPr>
           <a:xfrm>
-            <a:off x="5074920" y="3749040"/>
-            <a:ext cx="685800" cy="219456"/>
+            <a:off x="1444752" y="3474720"/>
+            <a:ext cx="603504" cy="228600"/>
           </a:xfrm>
           <a:prstGeom prst="rect">
             <a:avLst/>
@@ -6672,7 +6915,49 @@
               <a:buNone/>
             </a:pPr>
             <a:r>
-              <a:rPr lang="en-US" sz="900" b="1" dirty="0">
+              <a:rPr lang="en-US" sz="800" dirty="0">
+                <a:solidFill>
+                  <a:srgbClr val="4D4D4D"/>
+                </a:solidFill>
+                <a:latin typeface="Meiryo" pitchFamily="34" charset="0"/>
+                <a:ea typeface="Meiryo" pitchFamily="34" charset="-122"/>
+                <a:cs typeface="Meiryo" pitchFamily="34" charset="-120"/>
+              </a:rPr>
+              <a:t>3D</a:t>
+            </a:r>
+            <a:endParaRPr lang="en-US" sz="800" dirty="0"/>
+          </a:p>
+        </p:txBody>
+      </p:sp>
+      <p:sp>
+        <p:nvSpPr>
+          <p:cNvPr id="45" name="Text 42"/>
+          <p:cNvSpPr txBox="1"/>
+          <p:nvPr/>
+        </p:nvSpPr>
+        <p:spPr>
+          <a:xfrm>
+            <a:off x="2048256" y="3474720"/>
+            <a:ext cx="2468880" cy="228600"/>
+          </a:xfrm>
+          <a:prstGeom prst="rect">
+            <a:avLst/>
+          </a:prstGeom>
+          <a:noFill/>
+          <a:ln/>
+        </p:spPr>
+        <p:txBody>
+          <a:bodyPr wrap="square" lIns="0" tIns="0" rIns="0" bIns="0" rtlCol="0" anchor="ctr"/>
+          <a:lstStyle/>
+          <a:p>
+            <a:pPr algn="l" indent="0" marL="0">
+              <a:lnSpc>
+                <a:spcPct val="115000"/>
+              </a:lnSpc>
+              <a:buNone/>
+            </a:pPr>
+            <a:r>
+              <a:rPr lang="en-US" sz="800" dirty="0">
                 <a:solidFill>
                   <a:srgbClr val="1A1A1A"/>
                 </a:solidFill>
@@ -6680,22 +6965,22 @@
                 <a:ea typeface="Meiryo" pitchFamily="34" charset="-122"/>
                 <a:cs typeface="Meiryo" pitchFamily="34" charset="-120"/>
               </a:rPr>
-              <a:t>TRACE</a:t>
-            </a:r>
-            <a:endParaRPr lang="en-US" sz="900" dirty="0"/>
-          </a:p>
-        </p:txBody>
-      </p:sp>
-      <p:sp>
-        <p:nvSpPr>
-          <p:cNvPr id="40" name="Text 37"/>
+              <a:t>3D仮想工場でレイアウト・ラインの流れを試算</a:t>
+            </a:r>
+            <a:endParaRPr lang="en-US" sz="800" dirty="0"/>
+          </a:p>
+        </p:txBody>
+      </p:sp>
+      <p:sp>
+        <p:nvSpPr>
+          <p:cNvPr id="46" name="Text 43"/>
           <p:cNvSpPr txBox="1"/>
           <p:nvPr/>
         </p:nvSpPr>
         <p:spPr>
           <a:xfrm>
-            <a:off x="5760720" y="3749040"/>
-            <a:ext cx="3017520" cy="219456"/>
+            <a:off x="4517136" y="3474720"/>
+            <a:ext cx="384048" cy="228600"/>
           </a:xfrm>
           <a:prstGeom prst="rect">
             <a:avLst/>
@@ -6707,14 +6992,14 @@
           <a:bodyPr wrap="square" lIns="0" tIns="0" rIns="0" bIns="0" rtlCol="0" anchor="ctr"/>
           <a:lstStyle/>
           <a:p>
-            <a:pPr algn="l" indent="0" marL="0">
-              <a:lnSpc>
-                <a:spcPct val="115000"/>
-              </a:lnSpc>
-              <a:buNone/>
-            </a:pPr>
-            <a:r>
-              <a:rPr lang="en-US" sz="850" dirty="0">
+            <a:pPr algn="r" indent="0" marL="0">
+              <a:lnSpc>
+                <a:spcPct val="115000"/>
+              </a:lnSpc>
+              <a:buNone/>
+            </a:pPr>
+            <a:r>
+              <a:rPr lang="en-US" sz="800" dirty="0">
                 <a:solidFill>
                   <a:srgbClr val="1A1A1A"/>
                 </a:solidFill>
@@ -6722,22 +7007,22 @@
                 <a:ea typeface="Meiryo" pitchFamily="34" charset="-122"/>
                 <a:cs typeface="Meiryo" pitchFamily="34" charset="-120"/>
               </a:rPr>
-              <a:t>不具合時に、材料ロットから納入先まで追跡</a:t>
-            </a:r>
-            <a:endParaRPr lang="en-US" sz="850" dirty="0"/>
-          </a:p>
-        </p:txBody>
-      </p:sp>
-      <p:sp>
-        <p:nvSpPr>
-          <p:cNvPr id="41" name="Shape 38"/>
+              <a:t>製品</a:t>
+            </a:r>
+            <a:endParaRPr lang="en-US" sz="800" dirty="0"/>
+          </a:p>
+        </p:txBody>
+      </p:sp>
+      <p:sp>
+        <p:nvSpPr>
+          <p:cNvPr id="47" name="Shape 44"/>
           <p:cNvSpPr/>
           <p:nvPr/>
         </p:nvSpPr>
         <p:spPr>
           <a:xfrm>
-            <a:off x="4572000" y="3968496"/>
-            <a:ext cx="4206240" cy="0"/>
+            <a:off x="365760" y="3703320"/>
+            <a:ext cx="4572000" cy="0"/>
           </a:xfrm>
           <a:prstGeom prst="line">
             <a:avLst/>
@@ -6753,14 +7038,14 @@
       </p:sp>
       <p:sp>
         <p:nvSpPr>
-          <p:cNvPr id="42" name="Text 39"/>
+          <p:cNvPr id="48" name="Text 45"/>
           <p:cNvSpPr txBox="1"/>
           <p:nvPr/>
         </p:nvSpPr>
         <p:spPr>
           <a:xfrm>
-            <a:off x="4572000" y="3968496"/>
-            <a:ext cx="502920" cy="219456"/>
+            <a:off x="402336" y="3703320"/>
+            <a:ext cx="420624" cy="228600"/>
           </a:xfrm>
           <a:prstGeom prst="rect">
             <a:avLst/>
@@ -6779,7 +7064,7 @@
               <a:buNone/>
             </a:pPr>
             <a:r>
-              <a:rPr lang="en-US" sz="850" dirty="0">
+              <a:rPr lang="en-US" sz="800" dirty="0">
                 <a:solidFill>
                   <a:srgbClr val="4D4D4D"/>
                 </a:solidFill>
@@ -6787,7 +7072,49 @@
                 <a:ea typeface="Meiryo" pitchFamily="34" charset="-122"/>
                 <a:cs typeface="Meiryo" pitchFamily="34" charset="-120"/>
               </a:rPr>
-              <a:t>4年目</a:t>
+              <a:t>5年目</a:t>
+            </a:r>
+            <a:endParaRPr lang="en-US" sz="800" dirty="0"/>
+          </a:p>
+        </p:txBody>
+      </p:sp>
+      <p:sp>
+        <p:nvSpPr>
+          <p:cNvPr id="49" name="Text 46"/>
+          <p:cNvSpPr txBox="1"/>
+          <p:nvPr/>
+        </p:nvSpPr>
+        <p:spPr>
+          <a:xfrm>
+            <a:off x="822960" y="3703320"/>
+            <a:ext cx="621792" cy="228600"/>
+          </a:xfrm>
+          <a:prstGeom prst="rect">
+            <a:avLst/>
+          </a:prstGeom>
+          <a:noFill/>
+          <a:ln/>
+        </p:spPr>
+        <p:txBody>
+          <a:bodyPr wrap="square" lIns="0" tIns="0" rIns="0" bIns="0" rtlCol="0" anchor="ctr"/>
+          <a:lstStyle/>
+          <a:p>
+            <a:pPr algn="l" indent="0" marL="0">
+              <a:lnSpc>
+                <a:spcPct val="115000"/>
+              </a:lnSpc>
+              <a:buNone/>
+            </a:pPr>
+            <a:r>
+              <a:rPr lang="en-US" sz="850" b="1" dirty="0">
+                <a:solidFill>
+                  <a:srgbClr val="1A1A1A"/>
+                </a:solidFill>
+                <a:latin typeface="Meiryo" pitchFamily="34" charset="0"/>
+                <a:ea typeface="Meiryo" pitchFamily="34" charset="-122"/>
+                <a:cs typeface="Meiryo" pitchFamily="34" charset="-120"/>
+              </a:rPr>
+              <a:t>DRAW</a:t>
             </a:r>
             <a:endParaRPr lang="en-US" sz="850" dirty="0"/>
           </a:p>
@@ -6795,14 +7122,14 @@
       </p:sp>
       <p:sp>
         <p:nvSpPr>
-          <p:cNvPr id="43" name="Text 40"/>
+          <p:cNvPr id="50" name="Text 47"/>
           <p:cNvSpPr txBox="1"/>
           <p:nvPr/>
         </p:nvSpPr>
         <p:spPr>
           <a:xfrm>
-            <a:off x="5074920" y="3968496"/>
-            <a:ext cx="685800" cy="219456"/>
+            <a:off x="1444752" y="3703320"/>
+            <a:ext cx="603504" cy="228600"/>
           </a:xfrm>
           <a:prstGeom prst="rect">
             <a:avLst/>
@@ -6821,7 +7148,49 @@
               <a:buNone/>
             </a:pPr>
             <a:r>
-              <a:rPr lang="en-US" sz="900" b="1" dirty="0">
+              <a:rPr lang="en-US" sz="800" dirty="0">
+                <a:solidFill>
+                  <a:srgbClr val="4D4D4D"/>
+                </a:solidFill>
+                <a:latin typeface="Meiryo" pitchFamily="34" charset="0"/>
+                <a:ea typeface="Meiryo" pitchFamily="34" charset="-122"/>
+                <a:cs typeface="Meiryo" pitchFamily="34" charset="-120"/>
+              </a:rPr>
+              <a:t>図面</a:t>
+            </a:r>
+            <a:endParaRPr lang="en-US" sz="800" dirty="0"/>
+          </a:p>
+        </p:txBody>
+      </p:sp>
+      <p:sp>
+        <p:nvSpPr>
+          <p:cNvPr id="51" name="Text 48"/>
+          <p:cNvSpPr txBox="1"/>
+          <p:nvPr/>
+        </p:nvSpPr>
+        <p:spPr>
+          <a:xfrm>
+            <a:off x="2048256" y="3703320"/>
+            <a:ext cx="2468880" cy="228600"/>
+          </a:xfrm>
+          <a:prstGeom prst="rect">
+            <a:avLst/>
+          </a:prstGeom>
+          <a:noFill/>
+          <a:ln/>
+        </p:spPr>
+        <p:txBody>
+          <a:bodyPr wrap="square" lIns="0" tIns="0" rIns="0" bIns="0" rtlCol="0" anchor="ctr"/>
+          <a:lstStyle/>
+          <a:p>
+            <a:pPr algn="l" indent="0" marL="0">
+              <a:lnSpc>
+                <a:spcPct val="115000"/>
+              </a:lnSpc>
+              <a:buNone/>
+            </a:pPr>
+            <a:r>
+              <a:rPr lang="en-US" sz="800" dirty="0">
                 <a:solidFill>
                   <a:srgbClr val="1A1A1A"/>
                 </a:solidFill>
@@ -6829,22 +7198,22 @@
                 <a:ea typeface="Meiryo" pitchFamily="34" charset="-122"/>
                 <a:cs typeface="Meiryo" pitchFamily="34" charset="-120"/>
               </a:rPr>
-              <a:t>TWIN</a:t>
-            </a:r>
-            <a:endParaRPr lang="en-US" sz="900" dirty="0"/>
-          </a:p>
-        </p:txBody>
-      </p:sp>
-      <p:sp>
-        <p:nvSpPr>
-          <p:cNvPr id="44" name="Text 41"/>
+              <a:t>登録したパターンを音声指示でCAD作図</a:t>
+            </a:r>
+            <a:endParaRPr lang="en-US" sz="800" dirty="0"/>
+          </a:p>
+        </p:txBody>
+      </p:sp>
+      <p:sp>
+        <p:nvSpPr>
+          <p:cNvPr id="52" name="Text 49"/>
           <p:cNvSpPr txBox="1"/>
           <p:nvPr/>
         </p:nvSpPr>
         <p:spPr>
           <a:xfrm>
-            <a:off x="5760720" y="3968496"/>
-            <a:ext cx="3017520" cy="219456"/>
+            <a:off x="4517136" y="3703320"/>
+            <a:ext cx="384048" cy="228600"/>
           </a:xfrm>
           <a:prstGeom prst="rect">
             <a:avLst/>
@@ -6856,14 +7225,14 @@
           <a:bodyPr wrap="square" lIns="0" tIns="0" rIns="0" bIns="0" rtlCol="0" anchor="ctr"/>
           <a:lstStyle/>
           <a:p>
-            <a:pPr algn="l" indent="0" marL="0">
-              <a:lnSpc>
-                <a:spcPct val="115000"/>
-              </a:lnSpc>
-              <a:buNone/>
-            </a:pPr>
-            <a:r>
-              <a:rPr lang="en-US" sz="850" dirty="0">
+            <a:pPr algn="r" indent="0" marL="0">
+              <a:lnSpc>
+                <a:spcPct val="115000"/>
+              </a:lnSpc>
+              <a:buNone/>
+            </a:pPr>
+            <a:r>
+              <a:rPr lang="en-US" sz="800" dirty="0">
                 <a:solidFill>
                   <a:srgbClr val="1A1A1A"/>
                 </a:solidFill>
@@ -6871,22 +7240,42 @@
                 <a:ea typeface="Meiryo" pitchFamily="34" charset="-122"/>
                 <a:cs typeface="Meiryo" pitchFamily="34" charset="-120"/>
               </a:rPr>
-              <a:t>欠員・設備停止時の計画組み替えを試算</a:t>
-            </a:r>
-            <a:endParaRPr lang="en-US" sz="850" dirty="0"/>
-          </a:p>
-        </p:txBody>
-      </p:sp>
-      <p:sp>
-        <p:nvSpPr>
-          <p:cNvPr id="45" name="Shape 42"/>
+              <a:t>製品</a:t>
+            </a:r>
+            <a:endParaRPr lang="en-US" sz="800" dirty="0"/>
+          </a:p>
+        </p:txBody>
+      </p:sp>
+      <p:sp>
+        <p:nvSpPr>
+          <p:cNvPr id="53" name="Shape 50"/>
           <p:cNvSpPr/>
           <p:nvPr/>
         </p:nvSpPr>
         <p:spPr>
           <a:xfrm>
-            <a:off x="4572000" y="4187952"/>
-            <a:ext cx="4206240" cy="0"/>
+            <a:off x="365760" y="3931920"/>
+            <a:ext cx="4572000" cy="228600"/>
+          </a:xfrm>
+          <a:prstGeom prst="rect">
+            <a:avLst/>
+          </a:prstGeom>
+          <a:solidFill>
+            <a:srgbClr val="F2F2F2"/>
+          </a:solidFill>
+          <a:ln/>
+        </p:spPr>
+      </p:sp>
+      <p:sp>
+        <p:nvSpPr>
+          <p:cNvPr id="54" name="Shape 51"/>
+          <p:cNvSpPr/>
+          <p:nvPr/>
+        </p:nvSpPr>
+        <p:spPr>
+          <a:xfrm>
+            <a:off x="365760" y="3931920"/>
+            <a:ext cx="4572000" cy="0"/>
           </a:xfrm>
           <a:prstGeom prst="line">
             <a:avLst/>
@@ -6902,14 +7291,14 @@
       </p:sp>
       <p:sp>
         <p:nvSpPr>
-          <p:cNvPr id="46" name="Text 43"/>
+          <p:cNvPr id="55" name="Text 52"/>
           <p:cNvSpPr txBox="1"/>
           <p:nvPr/>
         </p:nvSpPr>
         <p:spPr>
           <a:xfrm>
-            <a:off x="4572000" y="4187952"/>
-            <a:ext cx="502920" cy="219456"/>
+            <a:off x="402336" y="3931920"/>
+            <a:ext cx="420624" cy="228600"/>
           </a:xfrm>
           <a:prstGeom prst="rect">
             <a:avLst/>
@@ -6928,7 +7317,7 @@
               <a:buNone/>
             </a:pPr>
             <a:r>
-              <a:rPr lang="en-US" sz="850" dirty="0">
+              <a:rPr lang="en-US" sz="800" dirty="0">
                 <a:solidFill>
                   <a:srgbClr val="4D4D4D"/>
                 </a:solidFill>
@@ -6936,7 +7325,49 @@
                 <a:ea typeface="Meiryo" pitchFamily="34" charset="-122"/>
                 <a:cs typeface="Meiryo" pitchFamily="34" charset="-120"/>
               </a:rPr>
-              <a:t>5年目</a:t>
+              <a:t>研究</a:t>
+            </a:r>
+            <a:endParaRPr lang="en-US" sz="800" dirty="0"/>
+          </a:p>
+        </p:txBody>
+      </p:sp>
+      <p:sp>
+        <p:nvSpPr>
+          <p:cNvPr id="56" name="Text 53"/>
+          <p:cNvSpPr txBox="1"/>
+          <p:nvPr/>
+        </p:nvSpPr>
+        <p:spPr>
+          <a:xfrm>
+            <a:off x="822960" y="3931920"/>
+            <a:ext cx="621792" cy="228600"/>
+          </a:xfrm>
+          <a:prstGeom prst="rect">
+            <a:avLst/>
+          </a:prstGeom>
+          <a:noFill/>
+          <a:ln/>
+        </p:spPr>
+        <p:txBody>
+          <a:bodyPr wrap="square" lIns="0" tIns="0" rIns="0" bIns="0" rtlCol="0" anchor="ctr"/>
+          <a:lstStyle/>
+          <a:p>
+            <a:pPr algn="l" indent="0" marL="0">
+              <a:lnSpc>
+                <a:spcPct val="115000"/>
+              </a:lnSpc>
+              <a:buNone/>
+            </a:pPr>
+            <a:r>
+              <a:rPr lang="en-US" sz="850" b="1" dirty="0">
+                <a:solidFill>
+                  <a:srgbClr val="1A1A1A"/>
+                </a:solidFill>
+                <a:latin typeface="Meiryo" pitchFamily="34" charset="0"/>
+                <a:ea typeface="Meiryo" pitchFamily="34" charset="-122"/>
+                <a:cs typeface="Meiryo" pitchFamily="34" charset="-120"/>
+              </a:rPr>
+              <a:t>HAPTIC</a:t>
             </a:r>
             <a:endParaRPr lang="en-US" sz="850" dirty="0"/>
           </a:p>
@@ -6944,14 +7375,14 @@
       </p:sp>
       <p:sp>
         <p:nvSpPr>
-          <p:cNvPr id="47" name="Text 44"/>
+          <p:cNvPr id="57" name="Text 54"/>
           <p:cNvSpPr txBox="1"/>
           <p:nvPr/>
         </p:nvSpPr>
         <p:spPr>
           <a:xfrm>
-            <a:off x="5074920" y="4187952"/>
-            <a:ext cx="685800" cy="219456"/>
+            <a:off x="1444752" y="3931920"/>
+            <a:ext cx="603504" cy="228600"/>
           </a:xfrm>
           <a:prstGeom prst="rect">
             <a:avLst/>
@@ -6970,7 +7401,49 @@
               <a:buNone/>
             </a:pPr>
             <a:r>
-              <a:rPr lang="en-US" sz="900" b="1" dirty="0">
+              <a:rPr lang="en-US" sz="800" dirty="0">
+                <a:solidFill>
+                  <a:srgbClr val="4D4D4D"/>
+                </a:solidFill>
+                <a:latin typeface="Meiryo" pitchFamily="34" charset="0"/>
+                <a:ea typeface="Meiryo" pitchFamily="34" charset="-122"/>
+                <a:cs typeface="Meiryo" pitchFamily="34" charset="-120"/>
+              </a:rPr>
+              <a:t>触覚</a:t>
+            </a:r>
+            <a:endParaRPr lang="en-US" sz="800" dirty="0"/>
+          </a:p>
+        </p:txBody>
+      </p:sp>
+      <p:sp>
+        <p:nvSpPr>
+          <p:cNvPr id="58" name="Text 55"/>
+          <p:cNvSpPr txBox="1"/>
+          <p:nvPr/>
+        </p:nvSpPr>
+        <p:spPr>
+          <a:xfrm>
+            <a:off x="2048256" y="3931920"/>
+            <a:ext cx="2468880" cy="228600"/>
+          </a:xfrm>
+          <a:prstGeom prst="rect">
+            <a:avLst/>
+          </a:prstGeom>
+          <a:noFill/>
+          <a:ln/>
+        </p:spPr>
+        <p:txBody>
+          <a:bodyPr wrap="square" lIns="0" tIns="0" rIns="0" bIns="0" rtlCol="0" anchor="ctr"/>
+          <a:lstStyle/>
+          <a:p>
+            <a:pPr algn="l" indent="0" marL="0">
+              <a:lnSpc>
+                <a:spcPct val="115000"/>
+              </a:lnSpc>
+              <a:buNone/>
+            </a:pPr>
+            <a:r>
+              <a:rPr lang="en-US" sz="800" dirty="0">
                 <a:solidFill>
                   <a:srgbClr val="1A1A1A"/>
                 </a:solidFill>
@@ -6978,22 +7451,22 @@
                 <a:ea typeface="Meiryo" pitchFamily="34" charset="-122"/>
                 <a:cs typeface="Meiryo" pitchFamily="34" charset="-120"/>
               </a:rPr>
-              <a:t>FLOW</a:t>
-            </a:r>
-            <a:endParaRPr lang="en-US" sz="900" dirty="0"/>
-          </a:p>
-        </p:txBody>
-      </p:sp>
-      <p:sp>
-        <p:nvSpPr>
-          <p:cNvPr id="48" name="Text 45"/>
+              <a:t>力加減を体験できる訓練シミュレーター</a:t>
+            </a:r>
+            <a:endParaRPr lang="en-US" sz="800" dirty="0"/>
+          </a:p>
+        </p:txBody>
+      </p:sp>
+      <p:sp>
+        <p:nvSpPr>
+          <p:cNvPr id="59" name="Text 56"/>
           <p:cNvSpPr txBox="1"/>
           <p:nvPr/>
         </p:nvSpPr>
         <p:spPr>
           <a:xfrm>
-            <a:off x="5760720" y="4187952"/>
-            <a:ext cx="3017520" cy="219456"/>
+            <a:off x="4517136" y="3931920"/>
+            <a:ext cx="384048" cy="228600"/>
           </a:xfrm>
           <a:prstGeom prst="rect">
             <a:avLst/>
@@ -7005,14 +7478,14 @@
           <a:bodyPr wrap="square" lIns="0" tIns="0" rIns="0" bIns="0" rtlCol="0" anchor="ctr"/>
           <a:lstStyle/>
           <a:p>
-            <a:pPr algn="l" indent="0" marL="0">
-              <a:lnSpc>
-                <a:spcPct val="115000"/>
-              </a:lnSpc>
-              <a:buNone/>
-            </a:pPr>
-            <a:r>
-              <a:rPr lang="en-US" sz="850" dirty="0">
+            <a:pPr algn="r" indent="0" marL="0">
+              <a:lnSpc>
+                <a:spcPct val="115000"/>
+              </a:lnSpc>
+              <a:buNone/>
+            </a:pPr>
+            <a:r>
+              <a:rPr lang="en-US" sz="800" b="1" dirty="0">
                 <a:solidFill>
                   <a:srgbClr val="1A1A1A"/>
                 </a:solidFill>
@@ -7020,22 +7493,42 @@
                 <a:ea typeface="Meiryo" pitchFamily="34" charset="-122"/>
                 <a:cs typeface="Meiryo" pitchFamily="34" charset="-120"/>
               </a:rPr>
-              <a:t>搬送ロボット・検査AIと連携</a:t>
-            </a:r>
-            <a:endParaRPr lang="en-US" sz="850" dirty="0"/>
-          </a:p>
-        </p:txBody>
-      </p:sp>
-      <p:sp>
-        <p:nvSpPr>
-          <p:cNvPr id="49" name="Shape 46"/>
+              <a:t>R&amp;D</a:t>
+            </a:r>
+            <a:endParaRPr lang="en-US" sz="800" dirty="0"/>
+          </a:p>
+        </p:txBody>
+      </p:sp>
+      <p:sp>
+        <p:nvSpPr>
+          <p:cNvPr id="60" name="Shape 57"/>
           <p:cNvSpPr/>
           <p:nvPr/>
         </p:nvSpPr>
         <p:spPr>
           <a:xfrm>
-            <a:off x="4572000" y="4407408"/>
-            <a:ext cx="4206240" cy="0"/>
+            <a:off x="365760" y="4160520"/>
+            <a:ext cx="4572000" cy="228600"/>
+          </a:xfrm>
+          <a:prstGeom prst="rect">
+            <a:avLst/>
+          </a:prstGeom>
+          <a:solidFill>
+            <a:srgbClr val="F2F2F2"/>
+          </a:solidFill>
+          <a:ln/>
+        </p:spPr>
+      </p:sp>
+      <p:sp>
+        <p:nvSpPr>
+          <p:cNvPr id="61" name="Shape 58"/>
+          <p:cNvSpPr/>
+          <p:nvPr/>
+        </p:nvSpPr>
+        <p:spPr>
+          <a:xfrm>
+            <a:off x="365760" y="4160520"/>
+            <a:ext cx="4572000" cy="0"/>
           </a:xfrm>
           <a:prstGeom prst="line">
             <a:avLst/>
@@ -7051,13 +7544,606 @@
       </p:sp>
       <p:sp>
         <p:nvSpPr>
-          <p:cNvPr id="50" name="Text 47"/>
+          <p:cNvPr id="62" name="Text 59"/>
           <p:cNvSpPr txBox="1"/>
           <p:nvPr/>
         </p:nvSpPr>
         <p:spPr>
           <a:xfrm>
-            <a:off x="365760" y="4498848"/>
+            <a:off x="402336" y="4160520"/>
+            <a:ext cx="420624" cy="228600"/>
+          </a:xfrm>
+          <a:prstGeom prst="rect">
+            <a:avLst/>
+          </a:prstGeom>
+          <a:noFill/>
+          <a:ln/>
+        </p:spPr>
+        <p:txBody>
+          <a:bodyPr wrap="square" lIns="0" tIns="0" rIns="0" bIns="0" rtlCol="0" anchor="ctr"/>
+          <a:lstStyle/>
+          <a:p>
+            <a:pPr algn="l" indent="0" marL="0">
+              <a:lnSpc>
+                <a:spcPct val="115000"/>
+              </a:lnSpc>
+              <a:buNone/>
+            </a:pPr>
+            <a:r>
+              <a:rPr lang="en-US" sz="800" dirty="0">
+                <a:solidFill>
+                  <a:srgbClr val="4D4D4D"/>
+                </a:solidFill>
+                <a:latin typeface="Meiryo" pitchFamily="34" charset="0"/>
+                <a:ea typeface="Meiryo" pitchFamily="34" charset="-122"/>
+                <a:cs typeface="Meiryo" pitchFamily="34" charset="-120"/>
+              </a:rPr>
+              <a:t>研究</a:t>
+            </a:r>
+            <a:endParaRPr lang="en-US" sz="800" dirty="0"/>
+          </a:p>
+        </p:txBody>
+      </p:sp>
+      <p:sp>
+        <p:nvSpPr>
+          <p:cNvPr id="63" name="Text 60"/>
+          <p:cNvSpPr txBox="1"/>
+          <p:nvPr/>
+        </p:nvSpPr>
+        <p:spPr>
+          <a:xfrm>
+            <a:off x="822960" y="4160520"/>
+            <a:ext cx="621792" cy="228600"/>
+          </a:xfrm>
+          <a:prstGeom prst="rect">
+            <a:avLst/>
+          </a:prstGeom>
+          <a:noFill/>
+          <a:ln/>
+        </p:spPr>
+        <p:txBody>
+          <a:bodyPr wrap="square" lIns="0" tIns="0" rIns="0" bIns="0" rtlCol="0" anchor="ctr"/>
+          <a:lstStyle/>
+          <a:p>
+            <a:pPr algn="l" indent="0" marL="0">
+              <a:lnSpc>
+                <a:spcPct val="115000"/>
+              </a:lnSpc>
+              <a:buNone/>
+            </a:pPr>
+            <a:r>
+              <a:rPr lang="en-US" sz="850" b="1" dirty="0">
+                <a:solidFill>
+                  <a:srgbClr val="1A1A1A"/>
+                </a:solidFill>
+                <a:latin typeface="Meiryo" pitchFamily="34" charset="0"/>
+                <a:ea typeface="Meiryo" pitchFamily="34" charset="-122"/>
+                <a:cs typeface="Meiryo" pitchFamily="34" charset="-120"/>
+              </a:rPr>
+              <a:t>FLOW</a:t>
+            </a:r>
+            <a:endParaRPr lang="en-US" sz="850" dirty="0"/>
+          </a:p>
+        </p:txBody>
+      </p:sp>
+      <p:sp>
+        <p:nvSpPr>
+          <p:cNvPr id="64" name="Text 61"/>
+          <p:cNvSpPr txBox="1"/>
+          <p:nvPr/>
+        </p:nvSpPr>
+        <p:spPr>
+          <a:xfrm>
+            <a:off x="1444752" y="4160520"/>
+            <a:ext cx="603504" cy="228600"/>
+          </a:xfrm>
+          <a:prstGeom prst="rect">
+            <a:avLst/>
+          </a:prstGeom>
+          <a:noFill/>
+          <a:ln/>
+        </p:spPr>
+        <p:txBody>
+          <a:bodyPr wrap="square" lIns="0" tIns="0" rIns="0" bIns="0" rtlCol="0" anchor="ctr"/>
+          <a:lstStyle/>
+          <a:p>
+            <a:pPr algn="l" indent="0" marL="0">
+              <a:lnSpc>
+                <a:spcPct val="115000"/>
+              </a:lnSpc>
+              <a:buNone/>
+            </a:pPr>
+            <a:r>
+              <a:rPr lang="en-US" sz="800" dirty="0">
+                <a:solidFill>
+                  <a:srgbClr val="4D4D4D"/>
+                </a:solidFill>
+                <a:latin typeface="Meiryo" pitchFamily="34" charset="0"/>
+                <a:ea typeface="Meiryo" pitchFamily="34" charset="-122"/>
+                <a:cs typeface="Meiryo" pitchFamily="34" charset="-120"/>
+              </a:rPr>
+              <a:t>機械</a:t>
+            </a:r>
+            <a:endParaRPr lang="en-US" sz="800" dirty="0"/>
+          </a:p>
+        </p:txBody>
+      </p:sp>
+      <p:sp>
+        <p:nvSpPr>
+          <p:cNvPr id="65" name="Text 62"/>
+          <p:cNvSpPr txBox="1"/>
+          <p:nvPr/>
+        </p:nvSpPr>
+        <p:spPr>
+          <a:xfrm>
+            <a:off x="2048256" y="4160520"/>
+            <a:ext cx="2468880" cy="228600"/>
+          </a:xfrm>
+          <a:prstGeom prst="rect">
+            <a:avLst/>
+          </a:prstGeom>
+          <a:noFill/>
+          <a:ln/>
+        </p:spPr>
+        <p:txBody>
+          <a:bodyPr wrap="square" lIns="0" tIns="0" rIns="0" bIns="0" rtlCol="0" anchor="ctr"/>
+          <a:lstStyle/>
+          <a:p>
+            <a:pPr algn="l" indent="0" marL="0">
+              <a:lnSpc>
+                <a:spcPct val="115000"/>
+              </a:lnSpc>
+              <a:buNone/>
+            </a:pPr>
+            <a:r>
+              <a:rPr lang="en-US" sz="800" dirty="0">
+                <a:solidFill>
+                  <a:srgbClr val="1A1A1A"/>
+                </a:solidFill>
+                <a:latin typeface="Meiryo" pitchFamily="34" charset="0"/>
+                <a:ea typeface="Meiryo" pitchFamily="34" charset="-122"/>
+                <a:cs typeface="Meiryo" pitchFamily="34" charset="-120"/>
+              </a:rPr>
+              <a:t>搬送ロボット・検査AIへ条件を直接渡す</a:t>
+            </a:r>
+            <a:endParaRPr lang="en-US" sz="800" dirty="0"/>
+          </a:p>
+        </p:txBody>
+      </p:sp>
+      <p:sp>
+        <p:nvSpPr>
+          <p:cNvPr id="66" name="Text 63"/>
+          <p:cNvSpPr txBox="1"/>
+          <p:nvPr/>
+        </p:nvSpPr>
+        <p:spPr>
+          <a:xfrm>
+            <a:off x="4517136" y="4160520"/>
+            <a:ext cx="384048" cy="228600"/>
+          </a:xfrm>
+          <a:prstGeom prst="rect">
+            <a:avLst/>
+          </a:prstGeom>
+          <a:noFill/>
+          <a:ln/>
+        </p:spPr>
+        <p:txBody>
+          <a:bodyPr wrap="square" lIns="0" tIns="0" rIns="0" bIns="0" rtlCol="0" anchor="ctr"/>
+          <a:lstStyle/>
+          <a:p>
+            <a:pPr algn="r" indent="0" marL="0">
+              <a:lnSpc>
+                <a:spcPct val="115000"/>
+              </a:lnSpc>
+              <a:buNone/>
+            </a:pPr>
+            <a:r>
+              <a:rPr lang="en-US" sz="800" b="1" dirty="0">
+                <a:solidFill>
+                  <a:srgbClr val="1A1A1A"/>
+                </a:solidFill>
+                <a:latin typeface="Meiryo" pitchFamily="34" charset="0"/>
+                <a:ea typeface="Meiryo" pitchFamily="34" charset="-122"/>
+                <a:cs typeface="Meiryo" pitchFamily="34" charset="-120"/>
+              </a:rPr>
+              <a:t>R&amp;D</a:t>
+            </a:r>
+            <a:endParaRPr lang="en-US" sz="800" dirty="0"/>
+          </a:p>
+        </p:txBody>
+      </p:sp>
+      <p:sp>
+        <p:nvSpPr>
+          <p:cNvPr id="67" name="Shape 64"/>
+          <p:cNvSpPr/>
+          <p:nvPr/>
+        </p:nvSpPr>
+        <p:spPr>
+          <a:xfrm>
+            <a:off x="365760" y="4389120"/>
+            <a:ext cx="4572000" cy="0"/>
+          </a:xfrm>
+          <a:prstGeom prst="line">
+            <a:avLst/>
+          </a:prstGeom>
+          <a:noFill/>
+          <a:ln w="9525">
+            <a:solidFill>
+              <a:srgbClr val="BFBFBF"/>
+            </a:solidFill>
+            <a:prstDash val="solid"/>
+          </a:ln>
+        </p:spPr>
+      </p:sp>
+      <p:sp>
+        <p:nvSpPr>
+          <p:cNvPr id="68" name="rnd"/>
+          <p:cNvSpPr/>
+          <p:nvPr/>
+        </p:nvSpPr>
+        <p:spPr>
+          <a:xfrm>
+            <a:off x="5120640" y="2542032"/>
+            <a:ext cx="3657600" cy="1207008"/>
+          </a:xfrm>
+          <a:prstGeom prst="rect">
+            <a:avLst/>
+          </a:prstGeom>
+          <a:solidFill>
+            <a:srgbClr val="1A1A1A"/>
+          </a:solidFill>
+          <a:ln/>
+        </p:spPr>
+      </p:sp>
+      <p:sp>
+        <p:nvSpPr>
+          <p:cNvPr id="69" name="Text 66"/>
+          <p:cNvSpPr txBox="1"/>
+          <p:nvPr/>
+        </p:nvSpPr>
+        <p:spPr>
+          <a:xfrm>
+            <a:off x="5230368" y="2587752"/>
+            <a:ext cx="3438144" cy="237744"/>
+          </a:xfrm>
+          <a:prstGeom prst="rect">
+            <a:avLst/>
+          </a:prstGeom>
+          <a:noFill/>
+          <a:ln/>
+        </p:spPr>
+        <p:txBody>
+          <a:bodyPr wrap="square" lIns="0" tIns="0" rIns="0" bIns="0" rtlCol="0" anchor="t"/>
+          <a:lstStyle/>
+          <a:p>
+            <a:pPr algn="l" indent="0" marL="0">
+              <a:lnSpc>
+                <a:spcPct val="115000"/>
+              </a:lnSpc>
+              <a:buNone/>
+            </a:pPr>
+            <a:r>
+              <a:rPr lang="en-US" sz="1050" b="1" dirty="0">
+                <a:solidFill>
+                  <a:srgbClr val="FFFFFF"/>
+                </a:solidFill>
+                <a:latin typeface="Meiryo" pitchFamily="34" charset="0"/>
+                <a:ea typeface="Meiryo" pitchFamily="34" charset="-122"/>
+                <a:cs typeface="Meiryo" pitchFamily="34" charset="-120"/>
+              </a:rPr>
+              <a:t>R&amp;D戦略（技術開発）</a:t>
+            </a:r>
+            <a:endParaRPr lang="en-US" sz="1050" dirty="0"/>
+          </a:p>
+        </p:txBody>
+      </p:sp>
+      <p:sp>
+        <p:nvSpPr>
+          <p:cNvPr id="70" name="Text 67"/>
+          <p:cNvSpPr txBox="1"/>
+          <p:nvPr/>
+        </p:nvSpPr>
+        <p:spPr>
+          <a:xfrm>
+            <a:off x="5230368" y="2834640"/>
+            <a:ext cx="3438144" cy="896112"/>
+          </a:xfrm>
+          <a:prstGeom prst="rect">
+            <a:avLst/>
+          </a:prstGeom>
+          <a:noFill/>
+          <a:ln/>
+        </p:spPr>
+        <p:txBody>
+          <a:bodyPr wrap="square" lIns="0" tIns="0" rIns="0" bIns="0" rtlCol="0" anchor="t"/>
+          <a:lstStyle/>
+          <a:p>
+            <a:pPr algn="l" indent="0" marL="0">
+              <a:lnSpc>
+                <a:spcPct val="115000"/>
+              </a:lnSpc>
+              <a:spcAft>
+                <a:spcPts val="100"/>
+              </a:spcAft>
+              <a:buNone/>
+            </a:pPr>
+            <a:r>
+              <a:rPr lang="en-US" sz="850" b="1" dirty="0">
+                <a:solidFill>
+                  <a:srgbClr val="FFFFFF"/>
+                </a:solidFill>
+                <a:latin typeface="Meiryo" pitchFamily="34" charset="0"/>
+                <a:ea typeface="Meiryo" pitchFamily="34" charset="-122"/>
+                <a:cs typeface="Meiryo" pitchFamily="34" charset="-120"/>
+              </a:rPr>
+              <a:t>作る：</a:t>
+            </a:r>
+            <a:pPr algn="l" indent="0" marL="0">
+              <a:lnSpc>
+                <a:spcPct val="115000"/>
+              </a:lnSpc>
+              <a:spcAft>
+                <a:spcPts val="100"/>
+              </a:spcAft>
+              <a:buNone/>
+            </a:pPr>
+            <a:r>
+              <a:rPr lang="en-US" sz="850" dirty="0">
+                <a:solidFill>
+                  <a:srgbClr val="FFFFFF"/>
+                </a:solidFill>
+                <a:latin typeface="Meiryo" pitchFamily="34" charset="0"/>
+                <a:ea typeface="Meiryo" pitchFamily="34" charset="-122"/>
+                <a:cs typeface="Meiryo" pitchFamily="34" charset="-120"/>
+              </a:rPr>
+              <a:t>記録の構造化（生成AI）と、渡し方の設計</a:t>
+            </a:r>
+            <a:endParaRPr lang="en-US" sz="850" dirty="0"/>
+          </a:p>
+          <a:p>
+            <a:pPr algn="l" indent="0" marL="0">
+              <a:lnSpc>
+                <a:spcPct val="115000"/>
+              </a:lnSpc>
+              <a:spcAft>
+                <a:spcPts val="100"/>
+              </a:spcAft>
+              <a:buNone/>
+            </a:pPr>
+            <a:r>
+              <a:rPr lang="en-US" sz="850" b="1" dirty="0">
+                <a:solidFill>
+                  <a:srgbClr val="FFFFFF"/>
+                </a:solidFill>
+                <a:latin typeface="Meiryo" pitchFamily="34" charset="0"/>
+                <a:ea typeface="Meiryo" pitchFamily="34" charset="-122"/>
+                <a:cs typeface="Meiryo" pitchFamily="34" charset="-120"/>
+              </a:rPr>
+              <a:t>組む：</a:t>
+            </a:r>
+            <a:pPr algn="l" indent="0" marL="0">
+              <a:lnSpc>
+                <a:spcPct val="115000"/>
+              </a:lnSpc>
+              <a:spcAft>
+                <a:spcPts val="100"/>
+              </a:spcAft>
+              <a:buNone/>
+            </a:pPr>
+            <a:r>
+              <a:rPr lang="en-US" sz="850" dirty="0">
+                <a:solidFill>
+                  <a:srgbClr val="FFFFFF"/>
+                </a:solidFill>
+                <a:latin typeface="Meiryo" pitchFamily="34" charset="0"/>
+                <a:ea typeface="Meiryo" pitchFamily="34" charset="-122"/>
+                <a:cs typeface="Meiryo" pitchFamily="34" charset="-120"/>
+              </a:rPr>
+              <a:t>CAD・3D・触覚デバイスはベンダー・大学と共同研究</a:t>
+            </a:r>
+            <a:endParaRPr lang="en-US" sz="850" dirty="0"/>
+          </a:p>
+          <a:p>
+            <a:pPr algn="l" indent="0" marL="0">
+              <a:lnSpc>
+                <a:spcPct val="115000"/>
+              </a:lnSpc>
+              <a:spcAft>
+                <a:spcPts val="100"/>
+              </a:spcAft>
+              <a:buNone/>
+            </a:pPr>
+            <a:r>
+              <a:rPr lang="en-US" sz="850" b="1" dirty="0">
+                <a:solidFill>
+                  <a:srgbClr val="FFFFFF"/>
+                </a:solidFill>
+                <a:latin typeface="Meiryo" pitchFamily="34" charset="0"/>
+                <a:ea typeface="Meiryo" pitchFamily="34" charset="-122"/>
+                <a:cs typeface="Meiryo" pitchFamily="34" charset="-120"/>
+              </a:rPr>
+              <a:t>試す：</a:t>
+            </a:r>
+            <a:pPr algn="l" indent="0" marL="0">
+              <a:lnSpc>
+                <a:spcPct val="115000"/>
+              </a:lnSpc>
+              <a:spcAft>
+                <a:spcPts val="100"/>
+              </a:spcAft>
+              <a:buNone/>
+            </a:pPr>
+            <a:r>
+              <a:rPr lang="en-US" sz="850" dirty="0">
+                <a:solidFill>
+                  <a:srgbClr val="FFFFFF"/>
+                </a:solidFill>
+                <a:latin typeface="Meiryo" pitchFamily="34" charset="0"/>
+                <a:ea typeface="Meiryo" pitchFamily="34" charset="-122"/>
+                <a:cs typeface="Meiryo" pitchFamily="34" charset="-120"/>
+              </a:rPr>
+              <a:t>CVC出資元の工場を実証の場にする</a:t>
+            </a:r>
+            <a:endParaRPr lang="en-US" sz="850" dirty="0"/>
+          </a:p>
+          <a:p>
+            <a:pPr algn="l" indent="0" marL="0">
+              <a:lnSpc>
+                <a:spcPct val="115000"/>
+              </a:lnSpc>
+              <a:spcAft>
+                <a:spcPts val="100"/>
+              </a:spcAft>
+              <a:buNone/>
+            </a:pPr>
+            <a:r>
+              <a:rPr lang="en-US" sz="850" b="1" dirty="0">
+                <a:solidFill>
+                  <a:srgbClr val="FFFFFF"/>
+                </a:solidFill>
+                <a:latin typeface="Meiryo" pitchFamily="34" charset="0"/>
+                <a:ea typeface="Meiryo" pitchFamily="34" charset="-122"/>
+                <a:cs typeface="Meiryo" pitchFamily="34" charset="-120"/>
+              </a:rPr>
+              <a:t>試作済み：</a:t>
+            </a:r>
+            <a:pPr algn="l" indent="0" marL="0">
+              <a:lnSpc>
+                <a:spcPct val="115000"/>
+              </a:lnSpc>
+              <a:spcAft>
+                <a:spcPts val="100"/>
+              </a:spcAft>
+              <a:buNone/>
+            </a:pPr>
+            <a:r>
+              <a:rPr lang="en-US" sz="850" dirty="0">
+                <a:solidFill>
+                  <a:srgbClr val="FFFFFF"/>
+                </a:solidFill>
+                <a:latin typeface="Meiryo" pitchFamily="34" charset="0"/>
+                <a:ea typeface="Meiryo" pitchFamily="34" charset="-122"/>
+                <a:cs typeface="Meiryo" pitchFamily="34" charset="-120"/>
+              </a:rPr>
+              <a:t>ニュース要約→音声合成→ポッドキャスト自動配信を個人で実装</a:t>
+            </a:r>
+            <a:endParaRPr lang="en-US" sz="850" dirty="0"/>
+          </a:p>
+        </p:txBody>
+      </p:sp>
+      <p:sp>
+        <p:nvSpPr>
+          <p:cNvPr id="71" name="onboarding"/>
+          <p:cNvSpPr/>
+          <p:nvPr/>
+        </p:nvSpPr>
+        <p:spPr>
+          <a:xfrm>
+            <a:off x="5120640" y="3840480"/>
+            <a:ext cx="3657600" cy="658368"/>
+          </a:xfrm>
+          <a:prstGeom prst="rect">
+            <a:avLst/>
+          </a:prstGeom>
+          <a:solidFill>
+            <a:srgbClr val="F2F2F2"/>
+          </a:solidFill>
+          <a:ln/>
+        </p:spPr>
+      </p:sp>
+      <p:sp>
+        <p:nvSpPr>
+          <p:cNvPr id="72" name="Text 69"/>
+          <p:cNvSpPr txBox="1"/>
+          <p:nvPr/>
+        </p:nvSpPr>
+        <p:spPr>
+          <a:xfrm>
+            <a:off x="5230368" y="3877056"/>
+            <a:ext cx="3438144" cy="237744"/>
+          </a:xfrm>
+          <a:prstGeom prst="rect">
+            <a:avLst/>
+          </a:prstGeom>
+          <a:noFill/>
+          <a:ln/>
+        </p:spPr>
+        <p:txBody>
+          <a:bodyPr wrap="square" lIns="0" tIns="0" rIns="0" bIns="0" rtlCol="0" anchor="t"/>
+          <a:lstStyle/>
+          <a:p>
+            <a:pPr algn="l" indent="0" marL="0">
+              <a:lnSpc>
+                <a:spcPct val="115000"/>
+              </a:lnSpc>
+              <a:buNone/>
+            </a:pPr>
+            <a:r>
+              <a:rPr lang="en-US" sz="1000" b="1" dirty="0">
+                <a:solidFill>
+                  <a:srgbClr val="1A1A1A"/>
+                </a:solidFill>
+                <a:latin typeface="Meiryo" pitchFamily="34" charset="0"/>
+                <a:ea typeface="Meiryo" pitchFamily="34" charset="-122"/>
+                <a:cs typeface="Meiryo" pitchFamily="34" charset="-120"/>
+              </a:rPr>
+              <a:t>道具以外：導入支援（初年度・約2か月）</a:t>
+            </a:r>
+            <a:endParaRPr lang="en-US" sz="1000" dirty="0"/>
+          </a:p>
+        </p:txBody>
+      </p:sp>
+      <p:sp>
+        <p:nvSpPr>
+          <p:cNvPr id="73" name="Text 70"/>
+          <p:cNvSpPr txBox="1"/>
+          <p:nvPr/>
+        </p:nvSpPr>
+        <p:spPr>
+          <a:xfrm>
+            <a:off x="5230368" y="4114800"/>
+            <a:ext cx="3438144" cy="365760"/>
+          </a:xfrm>
+          <a:prstGeom prst="rect">
+            <a:avLst/>
+          </a:prstGeom>
+          <a:noFill/>
+          <a:ln/>
+        </p:spPr>
+        <p:txBody>
+          <a:bodyPr wrap="square" lIns="0" tIns="0" rIns="0" bIns="0" rtlCol="0" anchor="t"/>
+          <a:lstStyle/>
+          <a:p>
+            <a:pPr algn="l" indent="0" marL="0">
+              <a:lnSpc>
+                <a:spcPct val="115000"/>
+              </a:lnSpc>
+              <a:buNone/>
+            </a:pPr>
+            <a:r>
+              <a:rPr lang="en-US" sz="850" dirty="0">
+                <a:solidFill>
+                  <a:srgbClr val="1A1A1A"/>
+                </a:solidFill>
+                <a:latin typeface="Meiryo" pitchFamily="34" charset="0"/>
+                <a:ea typeface="Meiryo" pitchFamily="34" charset="-122"/>
+                <a:cs typeface="Meiryo" pitchFamily="34" charset="-120"/>
+              </a:rPr>
+              <a:t>当社の担当者が現場に入り、熟練者への聞き取り・帳票の移行・現場研修まで行う</a:t>
+            </a:r>
+            <a:endParaRPr lang="en-US" sz="850" dirty="0"/>
+          </a:p>
+        </p:txBody>
+      </p:sp>
+      <p:sp>
+        <p:nvSpPr>
+          <p:cNvPr id="74" name="Text 71"/>
+          <p:cNvSpPr txBox="1"/>
+          <p:nvPr/>
+        </p:nvSpPr>
+        <p:spPr>
+          <a:xfrm>
+            <a:off x="365760" y="4517136"/>
             <a:ext cx="8412480" cy="274320"/>
           </a:xfrm>
           <a:prstGeom prst="rect">
@@ -7085,7 +8171,7 @@
                 <a:ea typeface="Meiryo" pitchFamily="34" charset="-122"/>
                 <a:cs typeface="Meiryo" pitchFamily="34" charset="-120"/>
               </a:rPr>
-              <a:t>対象：電線・ケーブル工場の生産技術・製造部門（のちに、その製品を施工する工事会社）</a:t>
+              <a:t>対象：電線・ケーブル工場の生産技術・製造部門（のちに、その製品を施工する工事会社）。R&amp;D行はエンジニア2→9名の範囲で進め、製品化前の売上は計画に含めない</a:t>
             </a:r>
             <a:endParaRPr lang="en-US" sz="800" dirty="0"/>
           </a:p>
@@ -8302,7 +9388,7 @@
                 <a:ea typeface="Meiryo" pitchFamily="34" charset="-122"/>
                 <a:cs typeface="Meiryo" pitchFamily="34" charset="-120"/>
               </a:rPr>
-              <a:t>KNACK・TRACEなど、選んだ機能の数に比例</a:t>
+              <a:t>教材制作（KNACK）・危険表示（SAFE）など、選んだ数に比例</a:t>
             </a:r>
             <a:endParaRPr lang="en-US" sz="900" dirty="0"/>
           </a:p>
@@ -9879,7 +10965,7 @@
                 <a:ea typeface="Meiryo" pitchFamily="34" charset="-122"/>
                 <a:cs typeface="Meiryo" pitchFamily="34" charset="-120"/>
               </a:rPr>
-              <a:t>実績はMES・ERP、動作はロボットに任せ、判断の理由を人と機械に渡す層</a:t>
+              <a:t>実績はMES・ERPに任せ、判断の理由を教材と仕組みにして渡す層</a:t>
             </a:r>
             <a:endParaRPr lang="en-US" sz="850" dirty="0"/>
           </a:p>

--- a/deck/セルフマネジメント課題_事業構想プレゼン.pptx
+++ b/deck/セルフマネジメント課題_事業構想プレゼン.pptx
@@ -2405,8 +2405,8 @@
             <a:r>
               <a:rPr lang="en-US" dirty="0"/>
               <a:t>【4:40 - 5:50】
-要約：判断の理由を仕組みで扱う会社は、まだない
-最初に自分で自分に突きつけた問いが三つありました。コンサルと何が違うのか、MESや大手SIerと何が違うのか、ロボットやAIが来たら人の判断は要らなくなるのではないか、です。左の図は、横軸が扱う情報、つまり何が起きたかという実績か、なぜそうしたかという判断の理由か。縦軸が、人の時間で提供するか、仕組みで提供するかです。MESやロボットは実績と動作を仕組みで扱います。コンサルや社内の熟練者は判断の理由を扱いますが、人に依存します。判断の理由を仕組みで扱う右上は、まだ空いています。ここを、熟練者の判断が品質を左右する電線・ケーブル工場に絞って取ります。大手が採算に乗せにくい専門領域に集中する、ニッチャーの戦い方です。弱みとして、製造現場の経験が浅いことと、営業・資金調達が未経験であることを正直に挙げています。</a:t>
+要約：判断の理由を内製で仕組み化した事業会社は希少。大手だけで、電力インフラでは公開事例が見当たらない
+最初に自分で自分に突きつけた問いが三つありました。コンサルと何が違うのか、MESや大手SIerと何が違うのか、そして、すでに自社で同じことをしている会社があるのではないか、です。三つ目について調べると、先行事例はあります。ダイキンと日立のろう付け技能のデジタル化、ライオンとNTTデータの勘所集の生成AI検索、日立の大みか事業所でのトラブル事例検索などです。ただし共通点があり、いずれも大手が大手SIerと組んだ個別開発です。中堅の工場には、その予算も人手も届きません。そして、電線・送配電・電気工事といった電力インフラの分野では、公開された事例は見当たりませんでした。私の勤務先でも、スマートグラスでの技術伝承は構想の段階です。左の図の右上、判断の理由を仕組みで扱う場所には、大手の内製しかいません。当社は、大手が内製で行っていることを、教材の制作まで含めたサービスとして中堅の電線工場に届けます。ニッチャーとして差別化集中で戦います。弱みは、製造現場の経験が浅いことと、営業・資金調達が未経験であることです。</a:t>
             </a:r>
             <a:endParaRPr lang="en-US" dirty="0"/>
           </a:p>
@@ -9958,7 +9958,7 @@
                 <a:ea typeface="Meiryo" pitchFamily="34" charset="-122"/>
                 <a:cs typeface="Meiryo" pitchFamily="34" charset="-120"/>
               </a:rPr>
-              <a:t>競合 ─ 判断の理由を仕組みで扱う会社は、まだない</a:t>
+              <a:t>競合 ─ 判断の理由を内製で仕組み化した事業会社は、希少</a:t>
             </a:r>
             <a:endParaRPr lang="en-US" sz="2000" dirty="0"/>
           </a:p>
@@ -10000,7 +10000,7 @@
                 <a:ea typeface="Meiryo" pitchFamily="34" charset="-122"/>
                 <a:cs typeface="Meiryo" pitchFamily="34" charset="-120"/>
               </a:rPr>
-              <a:t>空いている右上を、電線工場に絞って取る（ニッチャー・差別化集中）</a:t>
+              <a:t>製造業では大手がSIerと組んで始めたが、電力インフラ（電線・送配電・電気工事）では公開事例が見当たらない</a:t>
             </a:r>
             <a:endParaRPr lang="en-US" sz="1200" dirty="0"/>
           </a:p>
@@ -10552,13 +10552,147 @@
       </p:sp>
       <p:sp>
         <p:nvSpPr>
-          <p:cNvPr id="21" name="pos-三現ワークス"/>
+          <p:cNvPr id="21" name="pos-大手の内製（＋大手SIer）"/>
           <p:cNvSpPr/>
           <p:nvPr/>
         </p:nvSpPr>
         <p:spPr>
           <a:xfrm>
-            <a:off x="3511296" y="1828800"/>
+            <a:off x="2880360" y="2251253"/>
+            <a:ext cx="146304" cy="146304"/>
+          </a:xfrm>
+          <a:prstGeom prst="ellipse">
+            <a:avLst/>
+          </a:prstGeom>
+          <a:solidFill>
+            <a:srgbClr val="FFFFFF"/>
+          </a:solidFill>
+          <a:ln w="15875">
+            <a:solidFill>
+              <a:srgbClr val="1A1A1A"/>
+            </a:solidFill>
+            <a:prstDash val="solid"/>
+          </a:ln>
+        </p:spPr>
+      </p:sp>
+      <p:sp>
+        <p:nvSpPr>
+          <p:cNvPr id="22" name="Text 19"/>
+          <p:cNvSpPr txBox="1"/>
+          <p:nvPr/>
+        </p:nvSpPr>
+        <p:spPr>
+          <a:xfrm>
+            <a:off x="3072384" y="2214677"/>
+            <a:ext cx="1463040" cy="219456"/>
+          </a:xfrm>
+          <a:prstGeom prst="rect">
+            <a:avLst/>
+          </a:prstGeom>
+          <a:noFill/>
+          <a:ln/>
+        </p:spPr>
+        <p:txBody>
+          <a:bodyPr wrap="square" lIns="0" tIns="0" rIns="0" bIns="0" rtlCol="0" anchor="ctr"/>
+          <a:lstStyle/>
+          <a:p>
+            <a:pPr algn="l" indent="0" marL="0">
+              <a:lnSpc>
+                <a:spcPct val="115000"/>
+              </a:lnSpc>
+              <a:buNone/>
+            </a:pPr>
+            <a:r>
+              <a:rPr lang="en-US" sz="850" dirty="0">
+                <a:solidFill>
+                  <a:srgbClr val="1A1A1A"/>
+                </a:solidFill>
+                <a:latin typeface="Meiryo" pitchFamily="34" charset="0"/>
+                <a:ea typeface="Meiryo" pitchFamily="34" charset="-122"/>
+                <a:cs typeface="Meiryo" pitchFamily="34" charset="-120"/>
+              </a:rPr>
+              <a:t>大手の内製（＋大手SIer）</a:t>
+            </a:r>
+            <a:endParaRPr lang="en-US" sz="850" dirty="0"/>
+          </a:p>
+        </p:txBody>
+      </p:sp>
+      <p:sp>
+        <p:nvSpPr>
+          <p:cNvPr id="23" name="pos-動画マニュアルSaaS"/>
+          <p:cNvSpPr/>
+          <p:nvPr/>
+        </p:nvSpPr>
+        <p:spPr>
+          <a:xfrm>
+            <a:off x="2295144" y="1485900"/>
+            <a:ext cx="146304" cy="146304"/>
+          </a:xfrm>
+          <a:prstGeom prst="ellipse">
+            <a:avLst/>
+          </a:prstGeom>
+          <a:solidFill>
+            <a:srgbClr val="FFFFFF"/>
+          </a:solidFill>
+          <a:ln w="15875">
+            <a:solidFill>
+              <a:srgbClr val="1A1A1A"/>
+            </a:solidFill>
+            <a:prstDash val="solid"/>
+          </a:ln>
+        </p:spPr>
+      </p:sp>
+      <p:sp>
+        <p:nvSpPr>
+          <p:cNvPr id="24" name="Text 21"/>
+          <p:cNvSpPr txBox="1"/>
+          <p:nvPr/>
+        </p:nvSpPr>
+        <p:spPr>
+          <a:xfrm>
+            <a:off x="786384" y="1449324"/>
+            <a:ext cx="1463040" cy="219456"/>
+          </a:xfrm>
+          <a:prstGeom prst="rect">
+            <a:avLst/>
+          </a:prstGeom>
+          <a:noFill/>
+          <a:ln/>
+        </p:spPr>
+        <p:txBody>
+          <a:bodyPr wrap="square" lIns="0" tIns="0" rIns="0" bIns="0" rtlCol="0" anchor="ctr"/>
+          <a:lstStyle/>
+          <a:p>
+            <a:pPr algn="r" indent="0" marL="0">
+              <a:lnSpc>
+                <a:spcPct val="115000"/>
+              </a:lnSpc>
+              <a:buNone/>
+            </a:pPr>
+            <a:r>
+              <a:rPr lang="en-US" sz="850" dirty="0">
+                <a:solidFill>
+                  <a:srgbClr val="1A1A1A"/>
+                </a:solidFill>
+                <a:latin typeface="Meiryo" pitchFamily="34" charset="0"/>
+                <a:ea typeface="Meiryo" pitchFamily="34" charset="-122"/>
+                <a:cs typeface="Meiryo" pitchFamily="34" charset="-120"/>
+              </a:rPr>
+              <a:t>動画マニュアルSaaS</a:t>
+            </a:r>
+            <a:endParaRPr lang="en-US" sz="850" dirty="0"/>
+          </a:p>
+        </p:txBody>
+      </p:sp>
+      <p:sp>
+        <p:nvSpPr>
+          <p:cNvPr id="25" name="pos-三現ワークス"/>
+          <p:cNvSpPr/>
+          <p:nvPr/>
+        </p:nvSpPr>
+        <p:spPr>
+          <a:xfrm>
+            <a:off x="3511296" y="1730045"/>
             <a:ext cx="201168" cy="201168"/>
           </a:xfrm>
           <a:prstGeom prst="ellipse">
@@ -10577,13 +10711,13 @@
       </p:sp>
       <p:sp>
         <p:nvSpPr>
-          <p:cNvPr id="22" name="Text 19"/>
+          <p:cNvPr id="26" name="Text 23"/>
           <p:cNvSpPr txBox="1"/>
           <p:nvPr/>
         </p:nvSpPr>
         <p:spPr>
           <a:xfrm>
-            <a:off x="2002536" y="1819656"/>
+            <a:off x="2002536" y="1720901"/>
             <a:ext cx="1463040" cy="219456"/>
           </a:xfrm>
           <a:prstGeom prst="rect">
@@ -10619,7 +10753,7 @@
       </p:sp>
       <p:sp>
         <p:nvSpPr>
-          <p:cNvPr id="23" name="Text 20"/>
+          <p:cNvPr id="27" name="Text 24"/>
           <p:cNvSpPr txBox="1"/>
           <p:nvPr/>
         </p:nvSpPr>
@@ -10653,7 +10787,7 @@
                 <a:ea typeface="Meiryo" pitchFamily="34" charset="-122"/>
                 <a:cs typeface="Meiryo" pitchFamily="34" charset="-120"/>
               </a:rPr>
-              <a:t>STP</a:t>
+              <a:t>内製化の先行事例（公開情報）</a:t>
             </a:r>
             <a:endParaRPr lang="en-US" sz="1050" dirty="0"/>
           </a:p>
@@ -10661,14 +10795,782 @@
       </p:sp>
       <p:sp>
         <p:nvSpPr>
-          <p:cNvPr id="24" name="Shape 21"/>
+          <p:cNvPr id="28" name="Shape 25"/>
           <p:cNvSpPr/>
           <p:nvPr/>
         </p:nvSpPr>
         <p:spPr>
           <a:xfrm>
-            <a:off x="4617720" y="1335024"/>
-            <a:ext cx="274320" cy="274320"/>
+            <a:off x="4617720" y="1307592"/>
+            <a:ext cx="4160520" cy="0"/>
+          </a:xfrm>
+          <a:prstGeom prst="line">
+            <a:avLst/>
+          </a:prstGeom>
+          <a:noFill/>
+          <a:ln w="9525">
+            <a:solidFill>
+              <a:srgbClr val="BFBFBF"/>
+            </a:solidFill>
+            <a:prstDash val="solid"/>
+          </a:ln>
+        </p:spPr>
+      </p:sp>
+      <p:sp>
+        <p:nvSpPr>
+          <p:cNvPr id="29" name="Text 26"/>
+          <p:cNvSpPr txBox="1"/>
+          <p:nvPr/>
+        </p:nvSpPr>
+        <p:spPr>
+          <a:xfrm>
+            <a:off x="4617720" y="1307592"/>
+            <a:ext cx="1325880" cy="228600"/>
+          </a:xfrm>
+          <a:prstGeom prst="rect">
+            <a:avLst/>
+          </a:prstGeom>
+          <a:noFill/>
+          <a:ln/>
+        </p:spPr>
+        <p:txBody>
+          <a:bodyPr wrap="square" lIns="0" tIns="0" rIns="0" bIns="0" rtlCol="0" anchor="ctr"/>
+          <a:lstStyle/>
+          <a:p>
+            <a:pPr algn="l" indent="0" marL="0">
+              <a:lnSpc>
+                <a:spcPct val="115000"/>
+              </a:lnSpc>
+              <a:buNone/>
+            </a:pPr>
+            <a:r>
+              <a:rPr lang="en-US" sz="850" b="1" dirty="0">
+                <a:solidFill>
+                  <a:srgbClr val="1A1A1A"/>
+                </a:solidFill>
+                <a:latin typeface="Meiryo" pitchFamily="34" charset="0"/>
+                <a:ea typeface="Meiryo" pitchFamily="34" charset="-122"/>
+                <a:cs typeface="Meiryo" pitchFamily="34" charset="-120"/>
+              </a:rPr>
+              <a:t>ダイキン×日立</a:t>
+            </a:r>
+            <a:endParaRPr lang="en-US" sz="850" dirty="0"/>
+          </a:p>
+        </p:txBody>
+      </p:sp>
+      <p:sp>
+        <p:nvSpPr>
+          <p:cNvPr id="30" name="Text 27"/>
+          <p:cNvSpPr txBox="1"/>
+          <p:nvPr/>
+        </p:nvSpPr>
+        <p:spPr>
+          <a:xfrm>
+            <a:off x="5943600" y="1307592"/>
+            <a:ext cx="2468880" cy="228600"/>
+          </a:xfrm>
+          <a:prstGeom prst="rect">
+            <a:avLst/>
+          </a:prstGeom>
+          <a:noFill/>
+          <a:ln/>
+        </p:spPr>
+        <p:txBody>
+          <a:bodyPr wrap="square" lIns="0" tIns="0" rIns="0" bIns="0" rtlCol="0" anchor="ctr"/>
+          <a:lstStyle/>
+          <a:p>
+            <a:pPr algn="l" indent="0" marL="0">
+              <a:lnSpc>
+                <a:spcPct val="115000"/>
+              </a:lnSpc>
+              <a:buNone/>
+            </a:pPr>
+            <a:r>
+              <a:rPr lang="en-US" sz="800" dirty="0">
+                <a:solidFill>
+                  <a:srgbClr val="1A1A1A"/>
+                </a:solidFill>
+                <a:latin typeface="Meiryo" pitchFamily="34" charset="0"/>
+                <a:ea typeface="Meiryo" pitchFamily="34" charset="-122"/>
+                <a:cs typeface="Meiryo" pitchFamily="34" charset="-120"/>
+              </a:rPr>
+              <a:t>ろう付け技能をIoT・画像解析でデジタル化</a:t>
+            </a:r>
+            <a:endParaRPr lang="en-US" sz="800" dirty="0"/>
+          </a:p>
+        </p:txBody>
+      </p:sp>
+      <p:sp>
+        <p:nvSpPr>
+          <p:cNvPr id="31" name="Text 28"/>
+          <p:cNvSpPr txBox="1"/>
+          <p:nvPr/>
+        </p:nvSpPr>
+        <p:spPr>
+          <a:xfrm>
+            <a:off x="8412480" y="1307592"/>
+            <a:ext cx="365760" cy="228600"/>
+          </a:xfrm>
+          <a:prstGeom prst="rect">
+            <a:avLst/>
+          </a:prstGeom>
+          <a:noFill/>
+          <a:ln/>
+        </p:spPr>
+        <p:txBody>
+          <a:bodyPr wrap="square" lIns="0" tIns="0" rIns="0" bIns="0" rtlCol="0" anchor="ctr"/>
+          <a:lstStyle/>
+          <a:p>
+            <a:pPr algn="r" indent="0" marL="0">
+              <a:lnSpc>
+                <a:spcPct val="115000"/>
+              </a:lnSpc>
+              <a:buNone/>
+            </a:pPr>
+            <a:r>
+              <a:rPr lang="en-US" sz="800" dirty="0">
+                <a:solidFill>
+                  <a:srgbClr val="4D4D4D"/>
+                </a:solidFill>
+                <a:latin typeface="Meiryo" pitchFamily="34" charset="0"/>
+                <a:ea typeface="Meiryo" pitchFamily="34" charset="-122"/>
+                <a:cs typeface="Meiryo" pitchFamily="34" charset="-120"/>
+              </a:rPr>
+              <a:t>2017</a:t>
+            </a:r>
+            <a:endParaRPr lang="en-US" sz="800" dirty="0"/>
+          </a:p>
+        </p:txBody>
+      </p:sp>
+      <p:sp>
+        <p:nvSpPr>
+          <p:cNvPr id="32" name="Shape 29"/>
+          <p:cNvSpPr/>
+          <p:nvPr/>
+        </p:nvSpPr>
+        <p:spPr>
+          <a:xfrm>
+            <a:off x="4617720" y="1536192"/>
+            <a:ext cx="4160520" cy="0"/>
+          </a:xfrm>
+          <a:prstGeom prst="line">
+            <a:avLst/>
+          </a:prstGeom>
+          <a:noFill/>
+          <a:ln w="9525">
+            <a:solidFill>
+              <a:srgbClr val="BFBFBF"/>
+            </a:solidFill>
+            <a:prstDash val="solid"/>
+          </a:ln>
+        </p:spPr>
+      </p:sp>
+      <p:sp>
+        <p:nvSpPr>
+          <p:cNvPr id="33" name="Text 30"/>
+          <p:cNvSpPr txBox="1"/>
+          <p:nvPr/>
+        </p:nvSpPr>
+        <p:spPr>
+          <a:xfrm>
+            <a:off x="4617720" y="1536192"/>
+            <a:ext cx="1325880" cy="228600"/>
+          </a:xfrm>
+          <a:prstGeom prst="rect">
+            <a:avLst/>
+          </a:prstGeom>
+          <a:noFill/>
+          <a:ln/>
+        </p:spPr>
+        <p:txBody>
+          <a:bodyPr wrap="square" lIns="0" tIns="0" rIns="0" bIns="0" rtlCol="0" anchor="ctr"/>
+          <a:lstStyle/>
+          <a:p>
+            <a:pPr algn="l" indent="0" marL="0">
+              <a:lnSpc>
+                <a:spcPct val="115000"/>
+              </a:lnSpc>
+              <a:buNone/>
+            </a:pPr>
+            <a:r>
+              <a:rPr lang="en-US" sz="850" b="1" dirty="0">
+                <a:solidFill>
+                  <a:srgbClr val="1A1A1A"/>
+                </a:solidFill>
+                <a:latin typeface="Meiryo" pitchFamily="34" charset="0"/>
+                <a:ea typeface="Meiryo" pitchFamily="34" charset="-122"/>
+                <a:cs typeface="Meiryo" pitchFamily="34" charset="-120"/>
+              </a:rPr>
+              <a:t>住友ゴム×NEC</a:t>
+            </a:r>
+            <a:endParaRPr lang="en-US" sz="850" dirty="0"/>
+          </a:p>
+        </p:txBody>
+      </p:sp>
+      <p:sp>
+        <p:nvSpPr>
+          <p:cNvPr id="34" name="Text 31"/>
+          <p:cNvSpPr txBox="1"/>
+          <p:nvPr/>
+        </p:nvSpPr>
+        <p:spPr>
+          <a:xfrm>
+            <a:off x="5943600" y="1536192"/>
+            <a:ext cx="2468880" cy="228600"/>
+          </a:xfrm>
+          <a:prstGeom prst="rect">
+            <a:avLst/>
+          </a:prstGeom>
+          <a:noFill/>
+          <a:ln/>
+        </p:spPr>
+        <p:txBody>
+          <a:bodyPr wrap="square" lIns="0" tIns="0" rIns="0" bIns="0" rtlCol="0" anchor="ctr"/>
+          <a:lstStyle/>
+          <a:p>
+            <a:pPr algn="l" indent="0" marL="0">
+              <a:lnSpc>
+                <a:spcPct val="115000"/>
+              </a:lnSpc>
+              <a:buNone/>
+            </a:pPr>
+            <a:r>
+              <a:rPr lang="en-US" sz="800" dirty="0">
+                <a:solidFill>
+                  <a:srgbClr val="1A1A1A"/>
+                </a:solidFill>
+                <a:latin typeface="Meiryo" pitchFamily="34" charset="0"/>
+                <a:ea typeface="Meiryo" pitchFamily="34" charset="-122"/>
+                <a:cs typeface="Meiryo" pitchFamily="34" charset="-120"/>
+              </a:rPr>
+              <a:t>タイヤ設計の熟練者ノウハウをAI化</a:t>
+            </a:r>
+            <a:endParaRPr lang="en-US" sz="800" dirty="0"/>
+          </a:p>
+        </p:txBody>
+      </p:sp>
+      <p:sp>
+        <p:nvSpPr>
+          <p:cNvPr id="35" name="Text 32"/>
+          <p:cNvSpPr txBox="1"/>
+          <p:nvPr/>
+        </p:nvSpPr>
+        <p:spPr>
+          <a:xfrm>
+            <a:off x="8412480" y="1536192"/>
+            <a:ext cx="365760" cy="228600"/>
+          </a:xfrm>
+          <a:prstGeom prst="rect">
+            <a:avLst/>
+          </a:prstGeom>
+          <a:noFill/>
+          <a:ln/>
+        </p:spPr>
+        <p:txBody>
+          <a:bodyPr wrap="square" lIns="0" tIns="0" rIns="0" bIns="0" rtlCol="0" anchor="ctr"/>
+          <a:lstStyle/>
+          <a:p>
+            <a:pPr algn="r" indent="0" marL="0">
+              <a:lnSpc>
+                <a:spcPct val="115000"/>
+              </a:lnSpc>
+              <a:buNone/>
+            </a:pPr>
+            <a:r>
+              <a:rPr lang="en-US" sz="800" dirty="0">
+                <a:solidFill>
+                  <a:srgbClr val="4D4D4D"/>
+                </a:solidFill>
+                <a:latin typeface="Meiryo" pitchFamily="34" charset="0"/>
+                <a:ea typeface="Meiryo" pitchFamily="34" charset="-122"/>
+                <a:cs typeface="Meiryo" pitchFamily="34" charset="-120"/>
+              </a:rPr>
+              <a:t>2022</a:t>
+            </a:r>
+            <a:endParaRPr lang="en-US" sz="800" dirty="0"/>
+          </a:p>
+        </p:txBody>
+      </p:sp>
+      <p:sp>
+        <p:nvSpPr>
+          <p:cNvPr id="36" name="Shape 33"/>
+          <p:cNvSpPr/>
+          <p:nvPr/>
+        </p:nvSpPr>
+        <p:spPr>
+          <a:xfrm>
+            <a:off x="4617720" y="1764792"/>
+            <a:ext cx="4160520" cy="0"/>
+          </a:xfrm>
+          <a:prstGeom prst="line">
+            <a:avLst/>
+          </a:prstGeom>
+          <a:noFill/>
+          <a:ln w="9525">
+            <a:solidFill>
+              <a:srgbClr val="BFBFBF"/>
+            </a:solidFill>
+            <a:prstDash val="solid"/>
+          </a:ln>
+        </p:spPr>
+      </p:sp>
+      <p:sp>
+        <p:nvSpPr>
+          <p:cNvPr id="37" name="Text 34"/>
+          <p:cNvSpPr txBox="1"/>
+          <p:nvPr/>
+        </p:nvSpPr>
+        <p:spPr>
+          <a:xfrm>
+            <a:off x="4617720" y="1764792"/>
+            <a:ext cx="1325880" cy="228600"/>
+          </a:xfrm>
+          <a:prstGeom prst="rect">
+            <a:avLst/>
+          </a:prstGeom>
+          <a:noFill/>
+          <a:ln/>
+        </p:spPr>
+        <p:txBody>
+          <a:bodyPr wrap="square" lIns="0" tIns="0" rIns="0" bIns="0" rtlCol="0" anchor="ctr"/>
+          <a:lstStyle/>
+          <a:p>
+            <a:pPr algn="l" indent="0" marL="0">
+              <a:lnSpc>
+                <a:spcPct val="115000"/>
+              </a:lnSpc>
+              <a:buNone/>
+            </a:pPr>
+            <a:r>
+              <a:rPr lang="en-US" sz="850" b="1" dirty="0">
+                <a:solidFill>
+                  <a:srgbClr val="1A1A1A"/>
+                </a:solidFill>
+                <a:latin typeface="Meiryo" pitchFamily="34" charset="0"/>
+                <a:ea typeface="Meiryo" pitchFamily="34" charset="-122"/>
+                <a:cs typeface="Meiryo" pitchFamily="34" charset="-120"/>
+              </a:rPr>
+              <a:t>ライオン×NTTデータ</a:t>
+            </a:r>
+            <a:endParaRPr lang="en-US" sz="850" dirty="0"/>
+          </a:p>
+        </p:txBody>
+      </p:sp>
+      <p:sp>
+        <p:nvSpPr>
+          <p:cNvPr id="38" name="Text 35"/>
+          <p:cNvSpPr txBox="1"/>
+          <p:nvPr/>
+        </p:nvSpPr>
+        <p:spPr>
+          <a:xfrm>
+            <a:off x="5943600" y="1764792"/>
+            <a:ext cx="2468880" cy="228600"/>
+          </a:xfrm>
+          <a:prstGeom prst="rect">
+            <a:avLst/>
+          </a:prstGeom>
+          <a:noFill/>
+          <a:ln/>
+        </p:spPr>
+        <p:txBody>
+          <a:bodyPr wrap="square" lIns="0" tIns="0" rIns="0" bIns="0" rtlCol="0" anchor="ctr"/>
+          <a:lstStyle/>
+          <a:p>
+            <a:pPr algn="l" indent="0" marL="0">
+              <a:lnSpc>
+                <a:spcPct val="115000"/>
+              </a:lnSpc>
+              <a:buNone/>
+            </a:pPr>
+            <a:r>
+              <a:rPr lang="en-US" sz="800" dirty="0">
+                <a:solidFill>
+                  <a:srgbClr val="1A1A1A"/>
+                </a:solidFill>
+                <a:latin typeface="Meiryo" pitchFamily="34" charset="0"/>
+                <a:ea typeface="Meiryo" pitchFamily="34" charset="-122"/>
+                <a:cs typeface="Meiryo" pitchFamily="34" charset="-120"/>
+              </a:rPr>
+              <a:t>製造プロセスの勘所集を生成AIで検索</a:t>
+            </a:r>
+            <a:endParaRPr lang="en-US" sz="800" dirty="0"/>
+          </a:p>
+        </p:txBody>
+      </p:sp>
+      <p:sp>
+        <p:nvSpPr>
+          <p:cNvPr id="39" name="Text 36"/>
+          <p:cNvSpPr txBox="1"/>
+          <p:nvPr/>
+        </p:nvSpPr>
+        <p:spPr>
+          <a:xfrm>
+            <a:off x="8412480" y="1764792"/>
+            <a:ext cx="365760" cy="228600"/>
+          </a:xfrm>
+          <a:prstGeom prst="rect">
+            <a:avLst/>
+          </a:prstGeom>
+          <a:noFill/>
+          <a:ln/>
+        </p:spPr>
+        <p:txBody>
+          <a:bodyPr wrap="square" lIns="0" tIns="0" rIns="0" bIns="0" rtlCol="0" anchor="ctr"/>
+          <a:lstStyle/>
+          <a:p>
+            <a:pPr algn="r" indent="0" marL="0">
+              <a:lnSpc>
+                <a:spcPct val="115000"/>
+              </a:lnSpc>
+              <a:buNone/>
+            </a:pPr>
+            <a:r>
+              <a:rPr lang="en-US" sz="800" dirty="0">
+                <a:solidFill>
+                  <a:srgbClr val="4D4D4D"/>
+                </a:solidFill>
+                <a:latin typeface="Meiryo" pitchFamily="34" charset="0"/>
+                <a:ea typeface="Meiryo" pitchFamily="34" charset="-122"/>
+                <a:cs typeface="Meiryo" pitchFamily="34" charset="-120"/>
+              </a:rPr>
+              <a:t>2024</a:t>
+            </a:r>
+            <a:endParaRPr lang="en-US" sz="800" dirty="0"/>
+          </a:p>
+        </p:txBody>
+      </p:sp>
+      <p:sp>
+        <p:nvSpPr>
+          <p:cNvPr id="40" name="Shape 37"/>
+          <p:cNvSpPr/>
+          <p:nvPr/>
+        </p:nvSpPr>
+        <p:spPr>
+          <a:xfrm>
+            <a:off x="4617720" y="1993392"/>
+            <a:ext cx="4160520" cy="0"/>
+          </a:xfrm>
+          <a:prstGeom prst="line">
+            <a:avLst/>
+          </a:prstGeom>
+          <a:noFill/>
+          <a:ln w="9525">
+            <a:solidFill>
+              <a:srgbClr val="BFBFBF"/>
+            </a:solidFill>
+            <a:prstDash val="solid"/>
+          </a:ln>
+        </p:spPr>
+      </p:sp>
+      <p:sp>
+        <p:nvSpPr>
+          <p:cNvPr id="41" name="Text 38"/>
+          <p:cNvSpPr txBox="1"/>
+          <p:nvPr/>
+        </p:nvSpPr>
+        <p:spPr>
+          <a:xfrm>
+            <a:off x="4617720" y="1993392"/>
+            <a:ext cx="1325880" cy="228600"/>
+          </a:xfrm>
+          <a:prstGeom prst="rect">
+            <a:avLst/>
+          </a:prstGeom>
+          <a:noFill/>
+          <a:ln/>
+        </p:spPr>
+        <p:txBody>
+          <a:bodyPr wrap="square" lIns="0" tIns="0" rIns="0" bIns="0" rtlCol="0" anchor="ctr"/>
+          <a:lstStyle/>
+          <a:p>
+            <a:pPr algn="l" indent="0" marL="0">
+              <a:lnSpc>
+                <a:spcPct val="115000"/>
+              </a:lnSpc>
+              <a:buNone/>
+            </a:pPr>
+            <a:r>
+              <a:rPr lang="en-US" sz="850" b="1" dirty="0">
+                <a:solidFill>
+                  <a:srgbClr val="1A1A1A"/>
+                </a:solidFill>
+                <a:latin typeface="Meiryo" pitchFamily="34" charset="0"/>
+                <a:ea typeface="Meiryo" pitchFamily="34" charset="-122"/>
+                <a:cs typeface="Meiryo" pitchFamily="34" charset="-120"/>
+              </a:rPr>
+              <a:t>日立 大みか事業所</a:t>
+            </a:r>
+            <a:endParaRPr lang="en-US" sz="850" dirty="0"/>
+          </a:p>
+        </p:txBody>
+      </p:sp>
+      <p:sp>
+        <p:nvSpPr>
+          <p:cNvPr id="42" name="Text 39"/>
+          <p:cNvSpPr txBox="1"/>
+          <p:nvPr/>
+        </p:nvSpPr>
+        <p:spPr>
+          <a:xfrm>
+            <a:off x="5943600" y="1993392"/>
+            <a:ext cx="2468880" cy="228600"/>
+          </a:xfrm>
+          <a:prstGeom prst="rect">
+            <a:avLst/>
+          </a:prstGeom>
+          <a:noFill/>
+          <a:ln/>
+        </p:spPr>
+        <p:txBody>
+          <a:bodyPr wrap="square" lIns="0" tIns="0" rIns="0" bIns="0" rtlCol="0" anchor="ctr"/>
+          <a:lstStyle/>
+          <a:p>
+            <a:pPr algn="l" indent="0" marL="0">
+              <a:lnSpc>
+                <a:spcPct val="115000"/>
+              </a:lnSpc>
+              <a:buNone/>
+            </a:pPr>
+            <a:r>
+              <a:rPr lang="en-US" sz="800" dirty="0">
+                <a:solidFill>
+                  <a:srgbClr val="1A1A1A"/>
+                </a:solidFill>
+                <a:latin typeface="Meiryo" pitchFamily="34" charset="0"/>
+                <a:ea typeface="Meiryo" pitchFamily="34" charset="-122"/>
+                <a:cs typeface="Meiryo" pitchFamily="34" charset="-120"/>
+              </a:rPr>
+              <a:t>熟練者の知見で、事例検索を約9割短縮</a:t>
+            </a:r>
+            <a:endParaRPr lang="en-US" sz="800" dirty="0"/>
+          </a:p>
+        </p:txBody>
+      </p:sp>
+      <p:sp>
+        <p:nvSpPr>
+          <p:cNvPr id="43" name="Text 40"/>
+          <p:cNvSpPr txBox="1"/>
+          <p:nvPr/>
+        </p:nvSpPr>
+        <p:spPr>
+          <a:xfrm>
+            <a:off x="8412480" y="1993392"/>
+            <a:ext cx="365760" cy="228600"/>
+          </a:xfrm>
+          <a:prstGeom prst="rect">
+            <a:avLst/>
+          </a:prstGeom>
+          <a:noFill/>
+          <a:ln/>
+        </p:spPr>
+        <p:txBody>
+          <a:bodyPr wrap="square" lIns="0" tIns="0" rIns="0" bIns="0" rtlCol="0" anchor="ctr"/>
+          <a:lstStyle/>
+          <a:p>
+            <a:pPr algn="r" indent="0" marL="0">
+              <a:lnSpc>
+                <a:spcPct val="115000"/>
+              </a:lnSpc>
+              <a:buNone/>
+            </a:pPr>
+            <a:r>
+              <a:rPr lang="en-US" sz="800" dirty="0">
+                <a:solidFill>
+                  <a:srgbClr val="4D4D4D"/>
+                </a:solidFill>
+                <a:latin typeface="Meiryo" pitchFamily="34" charset="0"/>
+                <a:ea typeface="Meiryo" pitchFamily="34" charset="-122"/>
+                <a:cs typeface="Meiryo" pitchFamily="34" charset="-120"/>
+              </a:rPr>
+              <a:t>2025</a:t>
+            </a:r>
+            <a:endParaRPr lang="en-US" sz="800" dirty="0"/>
+          </a:p>
+        </p:txBody>
+      </p:sp>
+      <p:sp>
+        <p:nvSpPr>
+          <p:cNvPr id="44" name="Shape 41"/>
+          <p:cNvSpPr/>
+          <p:nvPr/>
+        </p:nvSpPr>
+        <p:spPr>
+          <a:xfrm>
+            <a:off x="4617720" y="2221992"/>
+            <a:ext cx="4160520" cy="0"/>
+          </a:xfrm>
+          <a:prstGeom prst="line">
+            <a:avLst/>
+          </a:prstGeom>
+          <a:noFill/>
+          <a:ln w="9525">
+            <a:solidFill>
+              <a:srgbClr val="BFBFBF"/>
+            </a:solidFill>
+            <a:prstDash val="solid"/>
+          </a:ln>
+        </p:spPr>
+      </p:sp>
+      <p:sp>
+        <p:nvSpPr>
+          <p:cNvPr id="45" name="Text 42"/>
+          <p:cNvSpPr txBox="1"/>
+          <p:nvPr/>
+        </p:nvSpPr>
+        <p:spPr>
+          <a:xfrm>
+            <a:off x="4617720" y="2221992"/>
+            <a:ext cx="1325880" cy="228600"/>
+          </a:xfrm>
+          <a:prstGeom prst="rect">
+            <a:avLst/>
+          </a:prstGeom>
+          <a:noFill/>
+          <a:ln/>
+        </p:spPr>
+        <p:txBody>
+          <a:bodyPr wrap="square" lIns="0" tIns="0" rIns="0" bIns="0" rtlCol="0" anchor="ctr"/>
+          <a:lstStyle/>
+          <a:p>
+            <a:pPr algn="l" indent="0" marL="0">
+              <a:lnSpc>
+                <a:spcPct val="115000"/>
+              </a:lnSpc>
+              <a:buNone/>
+            </a:pPr>
+            <a:r>
+              <a:rPr lang="en-US" sz="850" b="1" dirty="0">
+                <a:solidFill>
+                  <a:srgbClr val="1A1A1A"/>
+                </a:solidFill>
+                <a:latin typeface="Meiryo" pitchFamily="34" charset="0"/>
+                <a:ea typeface="Meiryo" pitchFamily="34" charset="-122"/>
+                <a:cs typeface="Meiryo" pitchFamily="34" charset="-120"/>
+              </a:rPr>
+              <a:t>川崎重工×NTTデータ</a:t>
+            </a:r>
+            <a:endParaRPr lang="en-US" sz="850" dirty="0"/>
+          </a:p>
+        </p:txBody>
+      </p:sp>
+      <p:sp>
+        <p:nvSpPr>
+          <p:cNvPr id="46" name="Text 43"/>
+          <p:cNvSpPr txBox="1"/>
+          <p:nvPr/>
+        </p:nvSpPr>
+        <p:spPr>
+          <a:xfrm>
+            <a:off x="5943600" y="2221992"/>
+            <a:ext cx="2468880" cy="228600"/>
+          </a:xfrm>
+          <a:prstGeom prst="rect">
+            <a:avLst/>
+          </a:prstGeom>
+          <a:noFill/>
+          <a:ln/>
+        </p:spPr>
+        <p:txBody>
+          <a:bodyPr wrap="square" lIns="0" tIns="0" rIns="0" bIns="0" rtlCol="0" anchor="ctr"/>
+          <a:lstStyle/>
+          <a:p>
+            <a:pPr algn="l" indent="0" marL="0">
+              <a:lnSpc>
+                <a:spcPct val="115000"/>
+              </a:lnSpc>
+              <a:buNone/>
+            </a:pPr>
+            <a:r>
+              <a:rPr lang="en-US" sz="800" dirty="0">
+                <a:solidFill>
+                  <a:srgbClr val="1A1A1A"/>
+                </a:solidFill>
+                <a:latin typeface="Meiryo" pitchFamily="34" charset="0"/>
+                <a:ea typeface="Meiryo" pitchFamily="34" charset="-122"/>
+                <a:cs typeface="Meiryo" pitchFamily="34" charset="-120"/>
+              </a:rPr>
+              <a:t>生成AIによる暗黙知伝承</a:t>
+            </a:r>
+            <a:endParaRPr lang="en-US" sz="800" dirty="0"/>
+          </a:p>
+        </p:txBody>
+      </p:sp>
+      <p:sp>
+        <p:nvSpPr>
+          <p:cNvPr id="47" name="Text 44"/>
+          <p:cNvSpPr txBox="1"/>
+          <p:nvPr/>
+        </p:nvSpPr>
+        <p:spPr>
+          <a:xfrm>
+            <a:off x="8412480" y="2221992"/>
+            <a:ext cx="365760" cy="228600"/>
+          </a:xfrm>
+          <a:prstGeom prst="rect">
+            <a:avLst/>
+          </a:prstGeom>
+          <a:noFill/>
+          <a:ln/>
+        </p:spPr>
+        <p:txBody>
+          <a:bodyPr wrap="square" lIns="0" tIns="0" rIns="0" bIns="0" rtlCol="0" anchor="ctr"/>
+          <a:lstStyle/>
+          <a:p>
+            <a:pPr algn="r" indent="0" marL="0">
+              <a:lnSpc>
+                <a:spcPct val="115000"/>
+              </a:lnSpc>
+              <a:buNone/>
+            </a:pPr>
+            <a:r>
+              <a:rPr lang="en-US" sz="800" dirty="0">
+                <a:solidFill>
+                  <a:srgbClr val="4D4D4D"/>
+                </a:solidFill>
+                <a:latin typeface="Meiryo" pitchFamily="34" charset="0"/>
+                <a:ea typeface="Meiryo" pitchFamily="34" charset="-122"/>
+                <a:cs typeface="Meiryo" pitchFamily="34" charset="-120"/>
+              </a:rPr>
+              <a:t>2025</a:t>
+            </a:r>
+            <a:endParaRPr lang="en-US" sz="800" dirty="0"/>
+          </a:p>
+        </p:txBody>
+      </p:sp>
+      <p:sp>
+        <p:nvSpPr>
+          <p:cNvPr id="48" name="Shape 45"/>
+          <p:cNvSpPr/>
+          <p:nvPr/>
+        </p:nvSpPr>
+        <p:spPr>
+          <a:xfrm>
+            <a:off x="4617720" y="2450592"/>
+            <a:ext cx="4160520" cy="0"/>
+          </a:xfrm>
+          <a:prstGeom prst="line">
+            <a:avLst/>
+          </a:prstGeom>
+          <a:noFill/>
+          <a:ln w="9525">
+            <a:solidFill>
+              <a:srgbClr val="BFBFBF"/>
+            </a:solidFill>
+            <a:prstDash val="solid"/>
+          </a:ln>
+        </p:spPr>
+      </p:sp>
+      <p:sp>
+        <p:nvSpPr>
+          <p:cNvPr id="49" name="precedent-summary"/>
+          <p:cNvSpPr/>
+          <p:nvPr/>
+        </p:nvSpPr>
+        <p:spPr>
+          <a:xfrm>
+            <a:off x="4617720" y="2514600"/>
+            <a:ext cx="4160520" cy="457200"/>
           </a:xfrm>
           <a:prstGeom prst="rect">
             <a:avLst/>
@@ -10681,14 +11583,14 @@
       </p:sp>
       <p:sp>
         <p:nvSpPr>
-          <p:cNvPr id="25" name="Text 22"/>
+          <p:cNvPr id="50" name="Text 47"/>
           <p:cNvSpPr txBox="1"/>
           <p:nvPr/>
         </p:nvSpPr>
         <p:spPr>
           <a:xfrm>
-            <a:off x="4617720" y="1335024"/>
-            <a:ext cx="274320" cy="274320"/>
+            <a:off x="4727448" y="2514600"/>
+            <a:ext cx="3941064" cy="457200"/>
           </a:xfrm>
           <a:prstGeom prst="rect">
             <a:avLst/>
@@ -10700,14 +11602,14 @@
           <a:bodyPr wrap="square" lIns="0" tIns="0" rIns="0" bIns="0" rtlCol="0" anchor="ctr"/>
           <a:lstStyle/>
           <a:p>
-            <a:pPr algn="ctr" indent="0" marL="0">
-              <a:lnSpc>
-                <a:spcPct val="115000"/>
-              </a:lnSpc>
-              <a:buNone/>
-            </a:pPr>
-            <a:r>
-              <a:rPr lang="en-US" sz="900" b="1" dirty="0">
+            <a:pPr algn="l" indent="0" marL="0">
+              <a:lnSpc>
+                <a:spcPct val="115000"/>
+              </a:lnSpc>
+              <a:buNone/>
+            </a:pPr>
+            <a:r>
+              <a:rPr lang="en-US" sz="850" b="1" dirty="0">
                 <a:solidFill>
                   <a:srgbClr val="FFFFFF"/>
                 </a:solidFill>
@@ -10715,41 +11617,58 @@
                 <a:ea typeface="Meiryo" pitchFamily="34" charset="-122"/>
                 <a:cs typeface="Meiryo" pitchFamily="34" charset="-120"/>
               </a:rPr>
-              <a:t>S</a:t>
-            </a:r>
-            <a:endParaRPr lang="en-US" sz="900" dirty="0"/>
-          </a:p>
-        </p:txBody>
-      </p:sp>
-      <p:sp>
-        <p:nvSpPr>
-          <p:cNvPr id="26" name="Text 23"/>
+              <a:t>共通点：</a:t>
+            </a:r>
+            <a:pPr algn="l" indent="0" marL="0">
+              <a:lnSpc>
+                <a:spcPct val="115000"/>
+              </a:lnSpc>
+              <a:buNone/>
+            </a:pPr>
+            <a:r>
+              <a:rPr lang="en-US" sz="850" dirty="0">
+                <a:solidFill>
+                  <a:srgbClr val="FFFFFF"/>
+                </a:solidFill>
+                <a:latin typeface="Meiryo" pitchFamily="34" charset="0"/>
+                <a:ea typeface="Meiryo" pitchFamily="34" charset="-122"/>
+                <a:cs typeface="Meiryo" pitchFamily="34" charset="-120"/>
+              </a:rPr>
+              <a:t>大手が大手SIerと個別開発。中堅の工場には予算も人手も届かない。電力インフラでは、古河電工がスマートグラスでの技術伝承を構想する段階</a:t>
+            </a:r>
+            <a:endParaRPr lang="en-US" sz="850" dirty="0"/>
+          </a:p>
+        </p:txBody>
+      </p:sp>
+      <p:sp>
+        <p:nvSpPr>
+          <p:cNvPr id="51" name="Text 48"/>
           <p:cNvSpPr txBox="1"/>
           <p:nvPr/>
         </p:nvSpPr>
         <p:spPr>
           <a:xfrm>
-            <a:off x="4983480" y="1307592"/>
-            <a:ext cx="3794760" cy="329184"/>
-          </a:xfrm>
-          <a:prstGeom prst="rect">
-            <a:avLst/>
-          </a:prstGeom>
-          <a:noFill/>
-          <a:ln/>
-        </p:spPr>
-        <p:txBody>
-          <a:bodyPr wrap="square" lIns="0" tIns="0" rIns="0" bIns="0" rtlCol="0" anchor="ctr"/>
-          <a:lstStyle/>
-          <a:p>
-            <a:pPr algn="l" indent="0" marL="0">
-              <a:lnSpc>
-                <a:spcPct val="115000"/>
-              </a:lnSpc>
-              <a:buNone/>
-            </a:pPr>
-            <a:r>
-              <a:rPr lang="en-US" sz="850" dirty="0">
+            <a:off x="4617720" y="3063240"/>
+            <a:ext cx="4160520" cy="237744"/>
+          </a:xfrm>
+          <a:prstGeom prst="rect">
+            <a:avLst/>
+          </a:prstGeom>
+          <a:noFill/>
+          <a:ln/>
+        </p:spPr>
+        <p:txBody>
+          <a:bodyPr wrap="square" lIns="0" tIns="0" rIns="0" bIns="0" rtlCol="0" anchor="t"/>
+          <a:lstStyle/>
+          <a:p>
+            <a:pPr algn="l" indent="0" marL="0">
+              <a:lnSpc>
+                <a:spcPct val="115000"/>
+              </a:lnSpc>
+              <a:buNone/>
+            </a:pPr>
+            <a:r>
+              <a:rPr lang="en-US" sz="1050" b="1" dirty="0">
                 <a:solidFill>
                   <a:srgbClr val="1A1A1A"/>
                 </a:solidFill>
@@ -10757,22 +11676,22 @@
                 <a:ea typeface="Meiryo" pitchFamily="34" charset="-122"/>
                 <a:cs typeface="Meiryo" pitchFamily="34" charset="-120"/>
               </a:rPr>
-              <a:t>製造業を工程の形で区分：連続工程（電線・素材）／組立／施工現場</a:t>
-            </a:r>
-            <a:endParaRPr lang="en-US" sz="850" dirty="0"/>
-          </a:p>
-        </p:txBody>
-      </p:sp>
-      <p:sp>
-        <p:nvSpPr>
-          <p:cNvPr id="27" name="Shape 24"/>
+              <a:t>STP と競争戦略</a:t>
+            </a:r>
+            <a:endParaRPr lang="en-US" sz="1050" dirty="0"/>
+          </a:p>
+        </p:txBody>
+      </p:sp>
+      <p:sp>
+        <p:nvSpPr>
+          <p:cNvPr id="52" name="Shape 49"/>
           <p:cNvSpPr/>
           <p:nvPr/>
         </p:nvSpPr>
         <p:spPr>
           <a:xfrm>
-            <a:off x="4617720" y="1682496"/>
-            <a:ext cx="274320" cy="274320"/>
+            <a:off x="4617720" y="3328416"/>
+            <a:ext cx="274320" cy="201168"/>
           </a:xfrm>
           <a:prstGeom prst="rect">
             <a:avLst/>
@@ -10785,14 +11704,14 @@
       </p:sp>
       <p:sp>
         <p:nvSpPr>
-          <p:cNvPr id="28" name="Text 25"/>
+          <p:cNvPr id="53" name="Text 50"/>
           <p:cNvSpPr txBox="1"/>
           <p:nvPr/>
         </p:nvSpPr>
         <p:spPr>
           <a:xfrm>
-            <a:off x="4617720" y="1682496"/>
-            <a:ext cx="274320" cy="274320"/>
+            <a:off x="4617720" y="3328416"/>
+            <a:ext cx="274320" cy="201168"/>
           </a:xfrm>
           <a:prstGeom prst="rect">
             <a:avLst/>
@@ -10819,7 +11738,7 @@
                 <a:ea typeface="Meiryo" pitchFamily="34" charset="-122"/>
                 <a:cs typeface="Meiryo" pitchFamily="34" charset="-120"/>
               </a:rPr>
-              <a:t>T</a:t>
+              <a:t>S</a:t>
             </a:r>
             <a:endParaRPr lang="en-US" sz="900" dirty="0"/>
           </a:p>
@@ -10827,14 +11746,14 @@
       </p:sp>
       <p:sp>
         <p:nvSpPr>
-          <p:cNvPr id="29" name="Text 26"/>
+          <p:cNvPr id="54" name="Text 51"/>
           <p:cNvSpPr txBox="1"/>
           <p:nvPr/>
         </p:nvSpPr>
         <p:spPr>
           <a:xfrm>
-            <a:off x="4983480" y="1655064"/>
-            <a:ext cx="3794760" cy="329184"/>
+            <a:off x="4983480" y="3300984"/>
+            <a:ext cx="3794760" cy="256032"/>
           </a:xfrm>
           <a:prstGeom prst="rect">
             <a:avLst/>
@@ -10861,7 +11780,7 @@
                 <a:ea typeface="Meiryo" pitchFamily="34" charset="-122"/>
                 <a:cs typeface="Meiryo" pitchFamily="34" charset="-120"/>
               </a:rPr>
-              <a:t>電線・ケーブル工場。長尺・ロット・試験値が揃い、熟練者の判断が品質を左右</a:t>
+              <a:t>製造業を工程と規模で区分：大手（内製できる）／中堅（できない）</a:t>
             </a:r>
             <a:endParaRPr lang="en-US" sz="850" dirty="0"/>
           </a:p>
@@ -10869,14 +11788,14 @@
       </p:sp>
       <p:sp>
         <p:nvSpPr>
-          <p:cNvPr id="30" name="Shape 27"/>
+          <p:cNvPr id="55" name="Shape 52"/>
           <p:cNvSpPr/>
           <p:nvPr/>
         </p:nvSpPr>
         <p:spPr>
           <a:xfrm>
-            <a:off x="4617720" y="2029968"/>
-            <a:ext cx="274320" cy="274320"/>
+            <a:off x="4617720" y="3593592"/>
+            <a:ext cx="274320" cy="201168"/>
           </a:xfrm>
           <a:prstGeom prst="rect">
             <a:avLst/>
@@ -10889,14 +11808,14 @@
       </p:sp>
       <p:sp>
         <p:nvSpPr>
-          <p:cNvPr id="31" name="Text 28"/>
+          <p:cNvPr id="56" name="Text 53"/>
           <p:cNvSpPr txBox="1"/>
           <p:nvPr/>
         </p:nvSpPr>
         <p:spPr>
           <a:xfrm>
-            <a:off x="4617720" y="2029968"/>
-            <a:ext cx="274320" cy="274320"/>
+            <a:off x="4617720" y="3593592"/>
+            <a:ext cx="274320" cy="201168"/>
           </a:xfrm>
           <a:prstGeom prst="rect">
             <a:avLst/>
@@ -10923,7 +11842,7 @@
                 <a:ea typeface="Meiryo" pitchFamily="34" charset="-122"/>
                 <a:cs typeface="Meiryo" pitchFamily="34" charset="-120"/>
               </a:rPr>
-              <a:t>P</a:t>
+              <a:t>T</a:t>
             </a:r>
             <a:endParaRPr lang="en-US" sz="900" dirty="0"/>
           </a:p>
@@ -10931,14 +11850,14 @@
       </p:sp>
       <p:sp>
         <p:nvSpPr>
-          <p:cNvPr id="32" name="Text 29"/>
+          <p:cNvPr id="57" name="Text 54"/>
           <p:cNvSpPr txBox="1"/>
           <p:nvPr/>
         </p:nvSpPr>
         <p:spPr>
           <a:xfrm>
-            <a:off x="4983480" y="2002536"/>
-            <a:ext cx="3794760" cy="329184"/>
+            <a:off x="4983480" y="3566160"/>
+            <a:ext cx="3794760" cy="256032"/>
           </a:xfrm>
           <a:prstGeom prst="rect">
             <a:avLst/>
@@ -10965,7 +11884,7 @@
                 <a:ea typeface="Meiryo" pitchFamily="34" charset="-122"/>
                 <a:cs typeface="Meiryo" pitchFamily="34" charset="-120"/>
               </a:rPr>
-              <a:t>実績はMES・ERPに任せ、判断の理由を教材と仕組みにして渡す層</a:t>
+              <a:t>中堅の電線・ケーブル工場。熟練者の判断が品質を左右する</a:t>
             </a:r>
             <a:endParaRPr lang="en-US" sz="850" dirty="0"/>
           </a:p>
@@ -10973,205 +11892,13 @@
       </p:sp>
       <p:sp>
         <p:nvSpPr>
-          <p:cNvPr id="33" name="Text 30"/>
-          <p:cNvSpPr txBox="1"/>
-          <p:nvPr/>
-        </p:nvSpPr>
-        <p:spPr>
-          <a:xfrm>
-            <a:off x="4617720" y="2404872"/>
-            <a:ext cx="4160520" cy="237744"/>
-          </a:xfrm>
-          <a:prstGeom prst="rect">
-            <a:avLst/>
-          </a:prstGeom>
-          <a:noFill/>
-          <a:ln/>
-        </p:spPr>
-        <p:txBody>
-          <a:bodyPr wrap="square" lIns="0" tIns="0" rIns="0" bIns="0" rtlCol="0" anchor="t"/>
-          <a:lstStyle/>
-          <a:p>
-            <a:pPr algn="l" indent="0" marL="0">
-              <a:lnSpc>
-                <a:spcPct val="115000"/>
-              </a:lnSpc>
-              <a:buNone/>
-            </a:pPr>
-            <a:r>
-              <a:rPr lang="en-US" sz="1050" b="1" dirty="0">
-                <a:solidFill>
-                  <a:srgbClr val="1A1A1A"/>
-                </a:solidFill>
-                <a:latin typeface="Meiryo" pitchFamily="34" charset="0"/>
-                <a:ea typeface="Meiryo" pitchFamily="34" charset="-122"/>
-                <a:cs typeface="Meiryo" pitchFamily="34" charset="-120"/>
-              </a:rPr>
-              <a:t>競争戦略</a:t>
-            </a:r>
-            <a:endParaRPr lang="en-US" sz="1050" dirty="0"/>
-          </a:p>
-        </p:txBody>
-      </p:sp>
-      <p:sp>
-        <p:nvSpPr>
-          <p:cNvPr id="34" name="Text 31"/>
-          <p:cNvSpPr txBox="1"/>
-          <p:nvPr/>
-        </p:nvSpPr>
-        <p:spPr>
-          <a:xfrm>
-            <a:off x="4617720" y="2660904"/>
-            <a:ext cx="4160520" cy="457200"/>
-          </a:xfrm>
-          <a:prstGeom prst="rect">
-            <a:avLst/>
-          </a:prstGeom>
-          <a:noFill/>
-          <a:ln/>
-        </p:spPr>
-        <p:txBody>
-          <a:bodyPr wrap="square" lIns="0" tIns="0" rIns="0" bIns="0" rtlCol="0" anchor="t"/>
-          <a:lstStyle/>
-          <a:p>
-            <a:pPr algn="l" indent="0" marL="0">
-              <a:lnSpc>
-                <a:spcPct val="115000"/>
-              </a:lnSpc>
-              <a:spcAft>
-                <a:spcPts val="200"/>
-              </a:spcAft>
-              <a:buNone/>
-            </a:pPr>
-            <a:r>
-              <a:rPr lang="en-US" sz="850" b="1" dirty="0">
-                <a:solidFill>
-                  <a:srgbClr val="1A1A1A"/>
-                </a:solidFill>
-                <a:latin typeface="Meiryo" pitchFamily="34" charset="0"/>
-                <a:ea typeface="Meiryo" pitchFamily="34" charset="-122"/>
-                <a:cs typeface="Meiryo" pitchFamily="34" charset="-120"/>
-              </a:rPr>
-              <a:t>コトラーの競争地位：</a:t>
-            </a:r>
-            <a:pPr algn="l" indent="0" marL="0">
-              <a:lnSpc>
-                <a:spcPct val="115000"/>
-              </a:lnSpc>
-              <a:spcAft>
-                <a:spcPts val="200"/>
-              </a:spcAft>
-              <a:buNone/>
-            </a:pPr>
-            <a:r>
-              <a:rPr lang="en-US" sz="850" dirty="0">
-                <a:solidFill>
-                  <a:srgbClr val="1A1A1A"/>
-                </a:solidFill>
-                <a:latin typeface="Meiryo" pitchFamily="34" charset="0"/>
-                <a:ea typeface="Meiryo" pitchFamily="34" charset="-122"/>
-                <a:cs typeface="Meiryo" pitchFamily="34" charset="-120"/>
-              </a:rPr>
-              <a:t>ニッチャー。大手が採算に乗せにくい専門領域に絞る</a:t>
-            </a:r>
-            <a:endParaRPr lang="en-US" sz="850" dirty="0"/>
-          </a:p>
-          <a:p>
-            <a:pPr algn="l" indent="0" marL="0">
-              <a:lnSpc>
-                <a:spcPct val="115000"/>
-              </a:lnSpc>
-              <a:spcAft>
-                <a:spcPts val="200"/>
-              </a:spcAft>
-              <a:buNone/>
-            </a:pPr>
-            <a:r>
-              <a:rPr lang="en-US" sz="850" b="1" dirty="0">
-                <a:solidFill>
-                  <a:srgbClr val="1A1A1A"/>
-                </a:solidFill>
-                <a:latin typeface="Meiryo" pitchFamily="34" charset="0"/>
-                <a:ea typeface="Meiryo" pitchFamily="34" charset="-122"/>
-                <a:cs typeface="Meiryo" pitchFamily="34" charset="-120"/>
-              </a:rPr>
-              <a:t>ポーターの基本戦略：</a:t>
-            </a:r>
-            <a:pPr algn="l" indent="0" marL="0">
-              <a:lnSpc>
-                <a:spcPct val="115000"/>
-              </a:lnSpc>
-              <a:spcAft>
-                <a:spcPts val="200"/>
-              </a:spcAft>
-              <a:buNone/>
-            </a:pPr>
-            <a:r>
-              <a:rPr lang="en-US" sz="850" dirty="0">
-                <a:solidFill>
-                  <a:srgbClr val="1A1A1A"/>
-                </a:solidFill>
-                <a:latin typeface="Meiryo" pitchFamily="34" charset="0"/>
-                <a:ea typeface="Meiryo" pitchFamily="34" charset="-122"/>
-                <a:cs typeface="Meiryo" pitchFamily="34" charset="-120"/>
-              </a:rPr>
-              <a:t>差別化集中。価格ではなく現場の知見で選ばれる</a:t>
-            </a:r>
-            <a:endParaRPr lang="en-US" sz="850" dirty="0"/>
-          </a:p>
-        </p:txBody>
-      </p:sp>
-      <p:sp>
-        <p:nvSpPr>
-          <p:cNvPr id="35" name="Text 32"/>
-          <p:cNvSpPr txBox="1"/>
-          <p:nvPr/>
-        </p:nvSpPr>
-        <p:spPr>
-          <a:xfrm>
-            <a:off x="4617720" y="3172968"/>
-            <a:ext cx="4160520" cy="237744"/>
-          </a:xfrm>
-          <a:prstGeom prst="rect">
-            <a:avLst/>
-          </a:prstGeom>
-          <a:noFill/>
-          <a:ln/>
-        </p:spPr>
-        <p:txBody>
-          <a:bodyPr wrap="square" lIns="0" tIns="0" rIns="0" bIns="0" rtlCol="0" anchor="t"/>
-          <a:lstStyle/>
-          <a:p>
-            <a:pPr algn="l" indent="0" marL="0">
-              <a:lnSpc>
-                <a:spcPct val="115000"/>
-              </a:lnSpc>
-              <a:buNone/>
-            </a:pPr>
-            <a:r>
-              <a:rPr lang="en-US" sz="1050" b="1" dirty="0">
-                <a:solidFill>
-                  <a:srgbClr val="1A1A1A"/>
-                </a:solidFill>
-                <a:latin typeface="Meiryo" pitchFamily="34" charset="0"/>
-                <a:ea typeface="Meiryo" pitchFamily="34" charset="-122"/>
-                <a:cs typeface="Meiryo" pitchFamily="34" charset="-120"/>
-              </a:rPr>
-              <a:t>SWOT</a:t>
-            </a:r>
-            <a:endParaRPr lang="en-US" sz="1050" dirty="0"/>
-          </a:p>
-        </p:txBody>
-      </p:sp>
-      <p:sp>
-        <p:nvSpPr>
-          <p:cNvPr id="36" name="Shape 33"/>
+          <p:cNvPr id="58" name="Shape 55"/>
           <p:cNvSpPr/>
           <p:nvPr/>
         </p:nvSpPr>
         <p:spPr>
           <a:xfrm>
-            <a:off x="4617720" y="3456432"/>
+            <a:off x="4617720" y="3858768"/>
             <a:ext cx="274320" cy="201168"/>
           </a:xfrm>
           <a:prstGeom prst="rect">
@@ -11185,13 +11912,13 @@
       </p:sp>
       <p:sp>
         <p:nvSpPr>
-          <p:cNvPr id="37" name="Text 34"/>
+          <p:cNvPr id="59" name="Text 56"/>
           <p:cNvSpPr txBox="1"/>
           <p:nvPr/>
         </p:nvSpPr>
         <p:spPr>
           <a:xfrm>
-            <a:off x="4617720" y="3456432"/>
+            <a:off x="4617720" y="3858768"/>
             <a:ext cx="274320" cy="201168"/>
           </a:xfrm>
           <a:prstGeom prst="rect">
@@ -11219,7 +11946,7 @@
                 <a:ea typeface="Meiryo" pitchFamily="34" charset="-122"/>
                 <a:cs typeface="Meiryo" pitchFamily="34" charset="-120"/>
               </a:rPr>
-              <a:t>S</a:t>
+              <a:t>P</a:t>
             </a:r>
             <a:endParaRPr lang="en-US" sz="900" dirty="0"/>
           </a:p>
@@ -11227,13 +11954,13 @@
       </p:sp>
       <p:sp>
         <p:nvSpPr>
-          <p:cNvPr id="38" name="Text 35"/>
+          <p:cNvPr id="60" name="Text 57"/>
           <p:cNvSpPr txBox="1"/>
           <p:nvPr/>
         </p:nvSpPr>
         <p:spPr>
           <a:xfrm>
-            <a:off x="4983480" y="3429000"/>
+            <a:off x="4983480" y="3831336"/>
             <a:ext cx="3794760" cy="256032"/>
           </a:xfrm>
           <a:prstGeom prst="rect">
@@ -11261,7 +11988,7 @@
                 <a:ea typeface="Meiryo" pitchFamily="34" charset="-122"/>
                 <a:cs typeface="Meiryo" pitchFamily="34" charset="-120"/>
               </a:rPr>
-              <a:t>施工管理5年と自作開発の両立／製品が使われる現場からの逆算</a:t>
+              <a:t>大手の内製と同じことを、教材制作込みのサービスで中堅に届ける</a:t>
             </a:r>
             <a:endParaRPr lang="en-US" sz="850" dirty="0"/>
           </a:p>
@@ -11269,325 +11996,121 @@
       </p:sp>
       <p:sp>
         <p:nvSpPr>
-          <p:cNvPr id="39" name="Shape 36"/>
-          <p:cNvSpPr/>
-          <p:nvPr/>
-        </p:nvSpPr>
-        <p:spPr>
-          <a:xfrm>
-            <a:off x="4617720" y="3721608"/>
-            <a:ext cx="274320" cy="201168"/>
-          </a:xfrm>
-          <a:prstGeom prst="rect">
-            <a:avLst/>
-          </a:prstGeom>
-          <a:solidFill>
-            <a:srgbClr val="1A1A1A"/>
-          </a:solidFill>
-          <a:ln/>
-        </p:spPr>
-      </p:sp>
-      <p:sp>
-        <p:nvSpPr>
-          <p:cNvPr id="40" name="Text 37"/>
+          <p:cNvPr id="61" name="Text 58"/>
           <p:cNvSpPr txBox="1"/>
           <p:nvPr/>
         </p:nvSpPr>
         <p:spPr>
           <a:xfrm>
-            <a:off x="4617720" y="3721608"/>
-            <a:ext cx="274320" cy="201168"/>
-          </a:xfrm>
-          <a:prstGeom prst="rect">
-            <a:avLst/>
-          </a:prstGeom>
-          <a:noFill/>
-          <a:ln/>
-        </p:spPr>
-        <p:txBody>
-          <a:bodyPr wrap="square" lIns="0" tIns="0" rIns="0" bIns="0" rtlCol="0" anchor="ctr"/>
-          <a:lstStyle/>
-          <a:p>
-            <a:pPr algn="ctr" indent="0" marL="0">
-              <a:lnSpc>
-                <a:spcPct val="115000"/>
-              </a:lnSpc>
-              <a:buNone/>
-            </a:pPr>
-            <a:r>
-              <a:rPr lang="en-US" sz="900" b="1" dirty="0">
-                <a:solidFill>
-                  <a:srgbClr val="FFFFFF"/>
-                </a:solidFill>
-                <a:latin typeface="Meiryo" pitchFamily="34" charset="0"/>
-                <a:ea typeface="Meiryo" pitchFamily="34" charset="-122"/>
-                <a:cs typeface="Meiryo" pitchFamily="34" charset="-120"/>
-              </a:rPr>
-              <a:t>W</a:t>
-            </a:r>
-            <a:endParaRPr lang="en-US" sz="900" dirty="0"/>
-          </a:p>
-        </p:txBody>
-      </p:sp>
-      <p:sp>
-        <p:nvSpPr>
-          <p:cNvPr id="41" name="Text 38"/>
+            <a:off x="4617720" y="4123944"/>
+            <a:ext cx="4160520" cy="329184"/>
+          </a:xfrm>
+          <a:prstGeom prst="rect">
+            <a:avLst/>
+          </a:prstGeom>
+          <a:noFill/>
+          <a:ln/>
+        </p:spPr>
+        <p:txBody>
+          <a:bodyPr wrap="square" lIns="0" tIns="0" rIns="0" bIns="0" rtlCol="0" anchor="t"/>
+          <a:lstStyle/>
+          <a:p>
+            <a:pPr algn="l" indent="0" marL="0">
+              <a:lnSpc>
+                <a:spcPct val="115000"/>
+              </a:lnSpc>
+              <a:spcAft>
+                <a:spcPts val="100"/>
+              </a:spcAft>
+              <a:buNone/>
+            </a:pPr>
+            <a:r>
+              <a:rPr lang="en-US" sz="850" b="1" dirty="0">
+                <a:solidFill>
+                  <a:srgbClr val="1A1A1A"/>
+                </a:solidFill>
+                <a:latin typeface="Meiryo" pitchFamily="34" charset="0"/>
+                <a:ea typeface="Meiryo" pitchFamily="34" charset="-122"/>
+                <a:cs typeface="Meiryo" pitchFamily="34" charset="-120"/>
+              </a:rPr>
+              <a:t>競争戦略：</a:t>
+            </a:r>
+            <a:pPr algn="l" indent="0" marL="0">
+              <a:lnSpc>
+                <a:spcPct val="115000"/>
+              </a:lnSpc>
+              <a:spcAft>
+                <a:spcPts val="100"/>
+              </a:spcAft>
+              <a:buNone/>
+            </a:pPr>
+            <a:r>
+              <a:rPr lang="en-US" sz="850" dirty="0">
+                <a:solidFill>
+                  <a:srgbClr val="1A1A1A"/>
+                </a:solidFill>
+                <a:latin typeface="Meiryo" pitchFamily="34" charset="0"/>
+                <a:ea typeface="Meiryo" pitchFamily="34" charset="-122"/>
+                <a:cs typeface="Meiryo" pitchFamily="34" charset="-120"/>
+              </a:rPr>
+              <a:t>ニッチャー（コトラー）×差別化集中（ポーター）</a:t>
+            </a:r>
+            <a:endParaRPr lang="en-US" sz="850" dirty="0"/>
+          </a:p>
+          <a:p>
+            <a:pPr algn="l" indent="0" marL="0">
+              <a:lnSpc>
+                <a:spcPct val="115000"/>
+              </a:lnSpc>
+              <a:spcAft>
+                <a:spcPts val="100"/>
+              </a:spcAft>
+              <a:buNone/>
+            </a:pPr>
+            <a:r>
+              <a:rPr lang="en-US" sz="850" b="1" dirty="0">
+                <a:solidFill>
+                  <a:srgbClr val="1A1A1A"/>
+                </a:solidFill>
+                <a:latin typeface="Meiryo" pitchFamily="34" charset="0"/>
+                <a:ea typeface="Meiryo" pitchFamily="34" charset="-122"/>
+                <a:cs typeface="Meiryo" pitchFamily="34" charset="-120"/>
+              </a:rPr>
+              <a:t>弱み：</a:t>
+            </a:r>
+            <a:pPr algn="l" indent="0" marL="0">
+              <a:lnSpc>
+                <a:spcPct val="115000"/>
+              </a:lnSpc>
+              <a:spcAft>
+                <a:spcPts val="100"/>
+              </a:spcAft>
+              <a:buNone/>
+            </a:pPr>
+            <a:r>
+              <a:rPr lang="en-US" sz="850" dirty="0">
+                <a:solidFill>
+                  <a:srgbClr val="1A1A1A"/>
+                </a:solidFill>
+                <a:latin typeface="Meiryo" pitchFamily="34" charset="0"/>
+                <a:ea typeface="Meiryo" pitchFamily="34" charset="-122"/>
+                <a:cs typeface="Meiryo" pitchFamily="34" charset="-120"/>
+              </a:rPr>
+              <a:t>製造現場の実務経験が浅い／営業・資金調達が未経験</a:t>
+            </a:r>
+            <a:endParaRPr lang="en-US" sz="850" dirty="0"/>
+          </a:p>
+        </p:txBody>
+      </p:sp>
+      <p:sp>
+        <p:nvSpPr>
+          <p:cNvPr id="62" name="Text 59"/>
           <p:cNvSpPr txBox="1"/>
           <p:nvPr/>
         </p:nvSpPr>
         <p:spPr>
           <a:xfrm>
-            <a:off x="4983480" y="3694176"/>
-            <a:ext cx="3794760" cy="256032"/>
-          </a:xfrm>
-          <a:prstGeom prst="rect">
-            <a:avLst/>
-          </a:prstGeom>
-          <a:noFill/>
-          <a:ln/>
-        </p:spPr>
-        <p:txBody>
-          <a:bodyPr wrap="square" lIns="0" tIns="0" rIns="0" bIns="0" rtlCol="0" anchor="ctr"/>
-          <a:lstStyle/>
-          <a:p>
-            <a:pPr algn="l" indent="0" marL="0">
-              <a:lnSpc>
-                <a:spcPct val="115000"/>
-              </a:lnSpc>
-              <a:buNone/>
-            </a:pPr>
-            <a:r>
-              <a:rPr lang="en-US" sz="850" dirty="0">
-                <a:solidFill>
-                  <a:srgbClr val="1A1A1A"/>
-                </a:solidFill>
-                <a:latin typeface="Meiryo" pitchFamily="34" charset="0"/>
-                <a:ea typeface="Meiryo" pitchFamily="34" charset="-122"/>
-                <a:cs typeface="Meiryo" pitchFamily="34" charset="-120"/>
-              </a:rPr>
-              <a:t>製造現場の実務経験が浅い／営業・資金調達が未経験／創業者依存</a:t>
-            </a:r>
-            <a:endParaRPr lang="en-US" sz="850" dirty="0"/>
-          </a:p>
-        </p:txBody>
-      </p:sp>
-      <p:sp>
-        <p:nvSpPr>
-          <p:cNvPr id="42" name="Shape 39"/>
-          <p:cNvSpPr/>
-          <p:nvPr/>
-        </p:nvSpPr>
-        <p:spPr>
-          <a:xfrm>
-            <a:off x="4617720" y="3986784"/>
-            <a:ext cx="274320" cy="201168"/>
-          </a:xfrm>
-          <a:prstGeom prst="rect">
-            <a:avLst/>
-          </a:prstGeom>
-          <a:solidFill>
-            <a:srgbClr val="1A1A1A"/>
-          </a:solidFill>
-          <a:ln/>
-        </p:spPr>
-      </p:sp>
-      <p:sp>
-        <p:nvSpPr>
-          <p:cNvPr id="43" name="Text 40"/>
-          <p:cNvSpPr txBox="1"/>
-          <p:nvPr/>
-        </p:nvSpPr>
-        <p:spPr>
-          <a:xfrm>
-            <a:off x="4617720" y="3986784"/>
-            <a:ext cx="274320" cy="201168"/>
-          </a:xfrm>
-          <a:prstGeom prst="rect">
-            <a:avLst/>
-          </a:prstGeom>
-          <a:noFill/>
-          <a:ln/>
-        </p:spPr>
-        <p:txBody>
-          <a:bodyPr wrap="square" lIns="0" tIns="0" rIns="0" bIns="0" rtlCol="0" anchor="ctr"/>
-          <a:lstStyle/>
-          <a:p>
-            <a:pPr algn="ctr" indent="0" marL="0">
-              <a:lnSpc>
-                <a:spcPct val="115000"/>
-              </a:lnSpc>
-              <a:buNone/>
-            </a:pPr>
-            <a:r>
-              <a:rPr lang="en-US" sz="900" b="1" dirty="0">
-                <a:solidFill>
-                  <a:srgbClr val="FFFFFF"/>
-                </a:solidFill>
-                <a:latin typeface="Meiryo" pitchFamily="34" charset="0"/>
-                <a:ea typeface="Meiryo" pitchFamily="34" charset="-122"/>
-                <a:cs typeface="Meiryo" pitchFamily="34" charset="-120"/>
-              </a:rPr>
-              <a:t>O</a:t>
-            </a:r>
-            <a:endParaRPr lang="en-US" sz="900" dirty="0"/>
-          </a:p>
-        </p:txBody>
-      </p:sp>
-      <p:sp>
-        <p:nvSpPr>
-          <p:cNvPr id="44" name="Text 41"/>
-          <p:cNvSpPr txBox="1"/>
-          <p:nvPr/>
-        </p:nvSpPr>
-        <p:spPr>
-          <a:xfrm>
-            <a:off x="4983480" y="3959352"/>
-            <a:ext cx="3794760" cy="256032"/>
-          </a:xfrm>
-          <a:prstGeom prst="rect">
-            <a:avLst/>
-          </a:prstGeom>
-          <a:noFill/>
-          <a:ln/>
-        </p:spPr>
-        <p:txBody>
-          <a:bodyPr wrap="square" lIns="0" tIns="0" rIns="0" bIns="0" rtlCol="0" anchor="ctr"/>
-          <a:lstStyle/>
-          <a:p>
-            <a:pPr algn="l" indent="0" marL="0">
-              <a:lnSpc>
-                <a:spcPct val="115000"/>
-              </a:lnSpc>
-              <a:buNone/>
-            </a:pPr>
-            <a:r>
-              <a:rPr lang="en-US" sz="850" dirty="0">
-                <a:solidFill>
-                  <a:srgbClr val="1A1A1A"/>
-                </a:solidFill>
-                <a:latin typeface="Meiryo" pitchFamily="34" charset="0"/>
-                <a:ea typeface="Meiryo" pitchFamily="34" charset="-122"/>
-                <a:cs typeface="Meiryo" pitchFamily="34" charset="-120"/>
-              </a:rPr>
-              <a:t>担い手の高齢化による技能継承需要／フィジカルAIの実用化</a:t>
-            </a:r>
-            <a:endParaRPr lang="en-US" sz="850" dirty="0"/>
-          </a:p>
-        </p:txBody>
-      </p:sp>
-      <p:sp>
-        <p:nvSpPr>
-          <p:cNvPr id="45" name="Shape 42"/>
-          <p:cNvSpPr/>
-          <p:nvPr/>
-        </p:nvSpPr>
-        <p:spPr>
-          <a:xfrm>
-            <a:off x="4617720" y="4251960"/>
-            <a:ext cx="274320" cy="201168"/>
-          </a:xfrm>
-          <a:prstGeom prst="rect">
-            <a:avLst/>
-          </a:prstGeom>
-          <a:solidFill>
-            <a:srgbClr val="1A1A1A"/>
-          </a:solidFill>
-          <a:ln/>
-        </p:spPr>
-      </p:sp>
-      <p:sp>
-        <p:nvSpPr>
-          <p:cNvPr id="46" name="Text 43"/>
-          <p:cNvSpPr txBox="1"/>
-          <p:nvPr/>
-        </p:nvSpPr>
-        <p:spPr>
-          <a:xfrm>
-            <a:off x="4617720" y="4251960"/>
-            <a:ext cx="274320" cy="201168"/>
-          </a:xfrm>
-          <a:prstGeom prst="rect">
-            <a:avLst/>
-          </a:prstGeom>
-          <a:noFill/>
-          <a:ln/>
-        </p:spPr>
-        <p:txBody>
-          <a:bodyPr wrap="square" lIns="0" tIns="0" rIns="0" bIns="0" rtlCol="0" anchor="ctr"/>
-          <a:lstStyle/>
-          <a:p>
-            <a:pPr algn="ctr" indent="0" marL="0">
-              <a:lnSpc>
-                <a:spcPct val="115000"/>
-              </a:lnSpc>
-              <a:buNone/>
-            </a:pPr>
-            <a:r>
-              <a:rPr lang="en-US" sz="900" b="1" dirty="0">
-                <a:solidFill>
-                  <a:srgbClr val="FFFFFF"/>
-                </a:solidFill>
-                <a:latin typeface="Meiryo" pitchFamily="34" charset="0"/>
-                <a:ea typeface="Meiryo" pitchFamily="34" charset="-122"/>
-                <a:cs typeface="Meiryo" pitchFamily="34" charset="-120"/>
-              </a:rPr>
-              <a:t>T</a:t>
-            </a:r>
-            <a:endParaRPr lang="en-US" sz="900" dirty="0"/>
-          </a:p>
-        </p:txBody>
-      </p:sp>
-      <p:sp>
-        <p:nvSpPr>
-          <p:cNvPr id="47" name="Text 44"/>
-          <p:cNvSpPr txBox="1"/>
-          <p:nvPr/>
-        </p:nvSpPr>
-        <p:spPr>
-          <a:xfrm>
-            <a:off x="4983480" y="4224528"/>
-            <a:ext cx="3794760" cy="256032"/>
-          </a:xfrm>
-          <a:prstGeom prst="rect">
-            <a:avLst/>
-          </a:prstGeom>
-          <a:noFill/>
-          <a:ln/>
-        </p:spPr>
-        <p:txBody>
-          <a:bodyPr wrap="square" lIns="0" tIns="0" rIns="0" bIns="0" rtlCol="0" anchor="ctr"/>
-          <a:lstStyle/>
-          <a:p>
-            <a:pPr algn="l" indent="0" marL="0">
-              <a:lnSpc>
-                <a:spcPct val="115000"/>
-              </a:lnSpc>
-              <a:buNone/>
-            </a:pPr>
-            <a:r>
-              <a:rPr lang="en-US" sz="850" dirty="0">
-                <a:solidFill>
-                  <a:srgbClr val="1A1A1A"/>
-                </a:solidFill>
-                <a:latin typeface="Meiryo" pitchFamily="34" charset="0"/>
-                <a:ea typeface="Meiryo" pitchFamily="34" charset="-122"/>
-                <a:cs typeface="Meiryo" pitchFamily="34" charset="-120"/>
-              </a:rPr>
-              <a:t>大手SIer・ロボットベンダーの参入／内製化／母数が小さい</a:t>
-            </a:r>
-            <a:endParaRPr lang="en-US" sz="850" dirty="0"/>
-          </a:p>
-        </p:txBody>
-      </p:sp>
-      <p:sp>
-        <p:nvSpPr>
-          <p:cNvPr id="48" name="Text 45"/>
-          <p:cNvSpPr txBox="1"/>
-          <p:nvPr/>
-        </p:nvSpPr>
-        <p:spPr>
-          <a:xfrm>
-            <a:off x="365760" y="4498848"/>
+            <a:off x="365760" y="4535424"/>
             <a:ext cx="8412480" cy="310896"/>
           </a:xfrm>
           <a:prstGeom prst="rect">
@@ -11615,7 +12138,7 @@
                 <a:ea typeface="Meiryo" pitchFamily="34" charset="-122"/>
                 <a:cs typeface="Meiryo" pitchFamily="34" charset="-120"/>
               </a:rPr>
-              <a:t>※ ERP・MES・SCMとはAPI連携で併存し、置き換えない。電線業界：353事業所・出荷額1兆8,822億円（経済構造実態調査 2024年、従業者10人以上）</a:t>
+              <a:t>出典：日立製作所・ダイキン工業（2017年9月）、NEC（2022年11月）、ライオン・NTTデータ（2024年6月）、日立（2025年6月）、NTTデータ（2025年12月）、MONOist 古河電工インタビュー（2021年3月）。※電力インフラに公開事例が見当たらないことは、存在しないことを意味しない</a:t>
             </a:r>
             <a:endParaRPr lang="en-US" sz="800" dirty="0"/>
           </a:p>

--- a/deck/セルフマネジメント課題_事業構想プレゼン.pptx
+++ b/deck/セルフマネジメント課題_事業構想プレゼン.pptx
@@ -2046,7 +2046,7 @@
               <a:rPr lang="en-US" dirty="0"/>
               <a:t>【0:00 - 0:50】
 要約：人が減っても現場が迷わず回る仕組みをつくり、日本の品質を支える現場の勘を遺産として残す（設問③）
-株式会社三現ワークスの事業構想を発表します。三現とは、現場・現物・現実のことです。メイド・イン・ジャパンの品質を支えてきたのは、現場の熟練者の勘です。ところがその勘は、記録に残らないまま、退職とともに失われつつあります。この会社の存在意義は「現場の勘を、次の担い手へ。」です。使命は、熟練者の勘を言葉にし、教材と仕組みにして次の担い手に渡すこと。5年後には85の拠点で、勘どころが教材として残り、誰でも迷わず判断できる状態を目指します。人に依存しない形で、日本の品質を遺産として残す会社です。ここから、課題、解決策、稼ぎ方の順にご説明します。</a:t>
+株式会社三現ワークスの事業構想を発表します。三現とは、現場・現物・現実のことです。メイド・イン・ジャパンの品質を支えてきたのは、現場の熟練者の勘です。その勘は、記録に残らないまま、退職とともに失われつつあります。この会社の存在意義は「現場の勘を、次の担い手へ。」です。使命は、熟練者の勘を言葉にし、教材と仕組みで次の人へ渡すこと。5年後には85の拠点で、勘どころが教材として残っている状態を目指します。今年7月に閣議決定された国の人工知能基本計画も、暗黙知が豊富な現場へのAIの実装を推進すると明記しています。この会社は、その現場の側に立ちます。</a:t>
             </a:r>
             <a:endParaRPr lang="en-US" dirty="0"/>
           </a:p>
@@ -2135,8 +2135,8 @@
             <a:r>
               <a:rPr lang="en-US" dirty="0"/>
               <a:t>【0:50 - 2:00】
-要約：熟練者の勘が、記録に残らないまま消えていく
-まず、解きたい課題です。たとえば電線の押出ラインで外径が振れたとき、熟練者は音や湿度を見て、温度を少し下げて立て直します。ところが、この判断は手順書には書かれていません。数字で見ると、建設業の就業者は55歳以上が36.7%、29歳以下は11.7%です。製造業の就業者は2025年に1,033万人まで減り、技能継承がうまくいっていない企業は3社に2社にのぼります。それなのに、技能継承にデジタル技術を使っている企業は21.7%にとどまります。私は古河電気工業で地中送電線の施工管理を5年間担当し、ケーブルが使われる現場で不具合や試験値を見てきました。同時に、PythonやRAGなどを独学し、仕組みを自分で作ってきました。現場を知り、仕組みを作れる人間として、この課題に取り組みます。</a:t>
+要約：デジタル化は進んだのに、技能継承は人頼みのまま
+まず、解きたい課題です。たとえば押出ラインで外径が振れたとき、熟練者は音や湿度を見て温度を少し下げて立て直します。この判断は手順書に書かれていません。国の調査を見ると、製造業で業務改善にデジタル技術を使っている企業は77.2%にのぼります。ところが、その効果として技能継承が円滑になった企業は8.7%しかありません。デジタル化は進んだのに、技能継承にはほとんど効いていないのです。実際、技能継承の取り組みで最も多いのは、再雇用や勤務延長でベテランに居続けてもらうことで、54.8%です。継承は、いまも人に頼ったままです。さらに製造業の62.8%が、指導する人材が足りないと答えています。私は施工管理として製品が使われる現場を見てきました。そして、仕組みを自分で作れます。だからこの課題に取り組みます。</a:t>
             </a:r>
             <a:endParaRPr lang="en-US" dirty="0"/>
           </a:p>
@@ -2225,8 +2225,8 @@
             <a:r>
               <a:rPr lang="en-US" dirty="0"/>
               <a:t>【2:00 - 3:30】
-要約：引退した熟練者が、隣で教えてくれる現場をつくる。データ集めで終わらせず、教材まで当社が作る
-設問①、解決策です。目指すのは、引退した熟練者が隣で教えてくれるような現場です。仕組みは三段階です。熟練者は、異常に対処したらタブレットに音声で一言残します。生成AIがそれを条件・処置・理由に分けて事例にします。そして三つ目が大事で、当社はデータを集めて終わりにしません。現場は忙しく、研修資料や教材を作る時間がありません。そこで当社が、勘どころを言葉にし、通勤中に聞ける音声番組、短い動画、研修資料まで作って届けます。音声の自動配信は、私が個人で、ニュースを要約して音声合成し毎朝配信する仕組みとしてすでに作っています。渡し方は年ごとに増やし、3年目は手順書を開くと過去の事故やヒヤリの場所が出る機能、4年目は3Dの仮想工場、5年目は音声の指示でCAD図面を描く機能です。触覚の訓練シミュレーターは研究開発として進めます。最初の2か月は、当社の担当者が現場に入って定着まで支えます。</a:t>
+要約：引退した熟練者が隣で教えてくれる現場をつくる。差別化は、教材にして届けること
+設問①、解決策です。目指すのは、引退した熟練者が隣で教えてくれるような現場です。熟練者は、異常に対処したらタブレットに音声で一言残すだけです。構造化を現場に求めない設計で、これは国の人工知能基本計画の方針とも一致します。生成AIがそれを条件・処置・理由に分けて事例にします。ただ、記録と整理はすでに他社も手がけており、当社の差別化にはなりません。差別化は三つ目です。指導役が足りない事業所は59.5%、育成の時間がない事業所は47.4%あります。貯めたデータから教材を作る作業が現場に残ると、使われません。だから当社が、連続工程の勘どころを研修資料、通勤中に聞ける音声番組、短い動画にして届けます。教材化は初年度から提供し、その後、危険箇所の表示、3Dの仮想工場、音声での作図と渡し方を増やします。技術は作らない部分を決めています。音声記録やAIの構造化は汎用技術を使い、自前開発は工程データとの紐づけと教材化の手順に集中します。</a:t>
             </a:r>
             <a:endParaRPr lang="en-US" dirty="0"/>
           </a:p>
@@ -2405,8 +2405,8 @@
             <a:r>
               <a:rPr lang="en-US" dirty="0"/>
               <a:t>【4:40 - 5:50】
-要約：判断の理由を内製で仕組み化した事業会社は希少。大手だけで、電力インフラでは公開事例が見当たらない
-最初に自分で自分に突きつけた問いが三つありました。コンサルと何が違うのか、MESや大手SIerと何が違うのか、そして、すでに自社で同じことをしている会社があるのではないか、です。三つ目について調べると、先行事例はあります。ダイキンと日立のろう付け技能のデジタル化、ライオンとNTTデータの勘所集の生成AI検索、日立の大みか事業所でのトラブル事例検索などです。ただし共通点があり、いずれも大手が大手SIerと組んだ個別開発です。中堅の工場には、その予算も人手も届きません。そして、電線・送配電・電気工事といった電力インフラの分野では、公開された事例は見当たりませんでした。私の勤務先でも、スマートグラスでの技術伝承は構想の段階です。左の図の右上、判断の理由を仕組みで扱う場所には、大手の内製しかいません。当社は、大手が内製で行っていることを、教材の制作まで含めたサービスとして中堅の電線工場に届けます。ニッチャーとして差別化集中で戦います。弱みは、製造現場の経験が浅いことと、営業・資金調達が未経験であることです。</a:t>
+要約：「貯める」会社は現れた。当社は「渡す」で分かれる
+最初に自分で自分に突きつけた問いが三つありました。コンサルと何が違うのか、同じことをしている会社はないのか、大手が降りてきたらどうするのか、です。調べると、判断の理由を扱う会社はすでに現れています。東大発のAirionは、ベテランとAIの対話で知識を構造化します。キャディのCADDiは、設計意図や判断履歴をデータ化しています。正直に言えば、貯める部分は当社とほぼ同じ設計です。これは、この課題に市場があることの証明だと考えています。分かれるのは渡す部分です。どの会社も、貯めたものを教材にして届けるところまではやっていません。また、CADDiの対象は組立の製造業で、扱うのは図面とBOMです。電線のような連続工程の現場処置は、図面には現れません。最大の脅威は、CADDiが連続工程に降りてくることです。防御線は、図面に現れない現場処置の蓄積と、現場で監修できる人です。</a:t>
             </a:r>
             <a:endParaRPr lang="en-US" dirty="0"/>
           </a:p>
@@ -2675,8 +2675,8 @@
             <a:r>
               <a:rPr lang="en-US" dirty="0"/>
               <a:t>【8:30 - 9:50】
-要約：最大のリスクは自分。だから役割と判断基準を先に決めておく
-設問⑤、経営課題です。最大のリスクは競合ではなく、創業者である自分が律速になることです。準備期は、試験導入を3拠点に限定し、生産技術の経験者を迎えます。中期は、電線業界が353事業所と小さいため、製品の出口である施工会社へ同じ基盤を広げます。後期は、私がいなくても判断できる会社にします。そのための仕組みが下段のバランスト・スコアカードで、四つの指標を先に決めておきます。最後に、この事業の顧客・商品・収益は、すべて現在の勤務先の中にも存在します。顧客は社内の工場、商品は製造記録のデータ化と技能継承、収益は工数削減と品質不良の防止です。だから復職後は、生産技術と情報システムの領域で、現場と技術のあいだを訳す役割を担いたいと考えています。そして、自らの役割を定義しきること自体が、業務を際限なく抱え込まないための再発防止策でもあります。以上です。</a:t>
+要約：最大のリスクは自分。判断基準を先に決めておく
+設問⑤、経営課題です。最大のリスクは競合ではなく、創業者である自分が律速になることです。準備期は、試験導入を3拠点に限定し、生産技術の経験者を迎えます。中期は、電線業界が353事業所と小さいため、製品の出口である施工会社へ同じ基盤を広げます。後期は、大手のデータ基盤が連続工程に降りてくることへの備えと、私がいなくても判断できる会社にすることです。そのための仕組みが下段のバランスト・スコアカードで、四つの指標を先に決めておきます。最後に、この事業の顧客・商品・収益は、すべて現在の勤務先の中にも存在します。だから復職後は、生産技術と情報システムの領域で、現場と技術のあいだを訳す役割を担いたいと考えています。そして、自らの役割を定義しきること自体が、業務を際限なく抱え込まないための再発防止策でもあります。以上です。</a:t>
             </a:r>
             <a:endParaRPr lang="en-US" dirty="0"/>
           </a:p>
@@ -4060,14 +4060,34 @@
       </p:sp>
       <p:sp>
         <p:nvSpPr>
-          <p:cNvPr id="23" name="Text 19"/>
+          <p:cNvPr id="23" name="policy-quote"/>
+          <p:cNvSpPr/>
+          <p:nvPr/>
+        </p:nvSpPr>
+        <p:spPr>
+          <a:xfrm>
+            <a:off x="3429000" y="3456432"/>
+            <a:ext cx="5074920" cy="658368"/>
+          </a:xfrm>
+          <a:prstGeom prst="rect">
+            <a:avLst/>
+          </a:prstGeom>
+          <a:solidFill>
+            <a:srgbClr val="F2F2F2"/>
+          </a:solidFill>
+          <a:ln/>
+        </p:spPr>
+      </p:sp>
+      <p:sp>
+        <p:nvSpPr>
+          <p:cNvPr id="24" name="Text 20"/>
           <p:cNvSpPr txBox="1"/>
           <p:nvPr/>
         </p:nvSpPr>
         <p:spPr>
           <a:xfrm>
-            <a:off x="3429000" y="3520440"/>
-            <a:ext cx="5074920" cy="256032"/>
+            <a:off x="3538728" y="3456432"/>
+            <a:ext cx="4855464" cy="658368"/>
           </a:xfrm>
           <a:prstGeom prst="rect">
             <a:avLst/>
@@ -4076,17 +4096,43 @@
           <a:ln/>
         </p:spPr>
         <p:txBody>
-          <a:bodyPr wrap="square" lIns="0" tIns="0" rIns="0" bIns="0" rtlCol="0" anchor="t"/>
+          <a:bodyPr wrap="square" lIns="0" tIns="0" rIns="0" bIns="0" rtlCol="0" anchor="ctr"/>
           <a:lstStyle/>
           <a:p>
             <a:pPr algn="l" indent="0" marL="0">
               <a:lnSpc>
                 <a:spcPct val="115000"/>
               </a:lnSpc>
-              <a:buNone/>
-            </a:pPr>
-            <a:r>
-              <a:rPr lang="en-US" sz="950" dirty="0">
+              <a:spcAft>
+                <a:spcPts val="200"/>
+              </a:spcAft>
+              <a:buNone/>
+            </a:pPr>
+            <a:r>
+              <a:rPr lang="en-US" sz="950" b="1" dirty="0">
+                <a:solidFill>
+                  <a:srgbClr val="1A1A1A"/>
+                </a:solidFill>
+                <a:latin typeface="Meiryo" pitchFamily="34" charset="0"/>
+                <a:ea typeface="Meiryo" pitchFamily="34" charset="-122"/>
+                <a:cs typeface="Meiryo" pitchFamily="34" charset="-120"/>
+              </a:rPr>
+              <a:t>「暗黙知が豊富な現場へのバーティカルAIの開発・実装を推進し、輸出も促進する」</a:t>
+            </a:r>
+            <a:endParaRPr lang="en-US" sz="950" dirty="0"/>
+          </a:p>
+          <a:p>
+            <a:pPr algn="l" indent="0" marL="0">
+              <a:lnSpc>
+                <a:spcPct val="115000"/>
+              </a:lnSpc>
+              <a:spcAft>
+                <a:spcPts val="200"/>
+              </a:spcAft>
+              <a:buNone/>
+            </a:pPr>
+            <a:r>
+              <a:rPr lang="en-US" sz="800" dirty="0">
                 <a:solidFill>
                   <a:srgbClr val="4D4D4D"/>
                 </a:solidFill>
@@ -4094,7 +4140,7 @@
                 <a:ea typeface="Meiryo" pitchFamily="34" charset="-122"/>
                 <a:cs typeface="Meiryo" pitchFamily="34" charset="-120"/>
               </a:rPr>
-              <a:t>本日の流れ：課題 → 解決策 → 収益の仕組み → 競合 → 組織 → 計画 → リスク</a:t>
+              <a:t>─ 内閣府「人工知能基本計画 ～日本AX、より強く、より豊かに～」（令和8年7月14日 閣議決定）</a:t>
             </a:r>
             <a:endParaRPr lang="en-US" sz="950" dirty="0"/>
           </a:p>
@@ -4102,7 +4148,7 @@
       </p:sp>
       <p:sp>
         <p:nvSpPr>
-          <p:cNvPr id="24" name="Text 20"/>
+          <p:cNvPr id="25" name="Text 21"/>
           <p:cNvSpPr txBox="1"/>
           <p:nvPr/>
         </p:nvSpPr>
@@ -4251,7 +4297,7 @@
                 <a:ea typeface="Meiryo" pitchFamily="34" charset="-122"/>
                 <a:cs typeface="Meiryo" pitchFamily="34" charset="-120"/>
               </a:rPr>
-              <a:t>設問①　課題 ─ 熟練者の勘が、記録に残らないまま消えていく</a:t>
+              <a:t>設問①　課題 ─ デジタル化は進んだのに、技能継承は人頼みのまま</a:t>
             </a:r>
             <a:endParaRPr lang="en-US" sz="2000" dirty="0"/>
           </a:p>
@@ -4293,7 +4339,7 @@
                 <a:ea typeface="Meiryo" pitchFamily="34" charset="-122"/>
                 <a:cs typeface="Meiryo" pitchFamily="34" charset="-120"/>
               </a:rPr>
-              <a:t>担い手は高齢化して減っているのに、技能継承にデジタルを使う企業は2割にとどまる</a:t>
+              <a:t>技能継承の主流は「ベテランに居続けてもらう」。デジタル活用で継承が円滑になった企業は8.7%</a:t>
             </a:r>
             <a:endParaRPr lang="en-US" sz="1200" dirty="0"/>
           </a:p>
@@ -4308,7 +4354,7 @@
         <p:spPr>
           <a:xfrm>
             <a:off x="365760" y="1051560"/>
-            <a:ext cx="4343400" cy="1188720"/>
+            <a:ext cx="4206240" cy="1115568"/>
           </a:xfrm>
           <a:prstGeom prst="rect">
             <a:avLst/>
@@ -4328,7 +4374,7 @@
         <p:spPr>
           <a:xfrm>
             <a:off x="502920" y="1124712"/>
-            <a:ext cx="4069080" cy="256032"/>
+            <a:ext cx="3931920" cy="256032"/>
           </a:xfrm>
           <a:prstGeom prst="rect">
             <a:avLst/>
@@ -4369,8 +4415,8 @@
         </p:nvSpPr>
         <p:spPr>
           <a:xfrm>
-            <a:off x="502920" y="1435608"/>
-            <a:ext cx="4069080" cy="749808"/>
+            <a:off x="502920" y="1417320"/>
+            <a:ext cx="3931920" cy="713232"/>
           </a:xfrm>
           <a:prstGeom prst="rect">
             <a:avLst/>
@@ -4520,8 +4566,8 @@
         </p:nvSpPr>
         <p:spPr>
           <a:xfrm>
-            <a:off x="365760" y="2514600"/>
-            <a:ext cx="4343400" cy="256032"/>
+            <a:off x="365760" y="2423160"/>
+            <a:ext cx="4206240" cy="256032"/>
           </a:xfrm>
           <a:prstGeom prst="rect">
             <a:avLst/>
@@ -4562,8 +4608,8 @@
         </p:nvSpPr>
         <p:spPr>
           <a:xfrm>
-            <a:off x="365760" y="2788920"/>
-            <a:ext cx="4343400" cy="1371600"/>
+            <a:off x="365760" y="2697480"/>
+            <a:ext cx="4206240" cy="1371600"/>
           </a:xfrm>
           <a:prstGeom prst="rect">
             <a:avLst/>
@@ -4656,7 +4702,7 @@
                 <a:ea typeface="Meiryo" pitchFamily="34" charset="-122"/>
                 <a:cs typeface="Meiryo" pitchFamily="34" charset="-120"/>
               </a:rPr>
-              <a:t>Python・Power BI・FastAPI・Docker・LangChain・RAG を独学し業務に実装</a:t>
+              <a:t>Python・FastAPI・Docker・LangChain・RAG を独学し業務に実装。音声の自動配信も個人で構築</a:t>
             </a:r>
             <a:endParaRPr lang="en-US" sz="1000" dirty="0"/>
           </a:p>
@@ -4707,14 +4753,304 @@
       </p:sp>
       <p:sp>
         <p:nvSpPr>
-          <p:cNvPr id="10" name="stat-0"/>
+          <p:cNvPr id="10" name="Text 7"/>
+          <p:cNvSpPr txBox="1"/>
+          <p:nvPr/>
+        </p:nvSpPr>
+        <p:spPr>
+          <a:xfrm>
+            <a:off x="4800600" y="1051560"/>
+            <a:ext cx="3977640" cy="237744"/>
+          </a:xfrm>
+          <a:prstGeom prst="rect">
+            <a:avLst/>
+          </a:prstGeom>
+          <a:noFill/>
+          <a:ln/>
+        </p:spPr>
+        <p:txBody>
+          <a:bodyPr wrap="square" lIns="0" tIns="0" rIns="0" bIns="0" rtlCol="0" anchor="t"/>
+          <a:lstStyle/>
+          <a:p>
+            <a:pPr algn="l" indent="0" marL="0">
+              <a:lnSpc>
+                <a:spcPct val="115000"/>
+              </a:lnSpc>
+              <a:buNone/>
+            </a:pPr>
+            <a:r>
+              <a:rPr lang="en-US" sz="1050" b="1" dirty="0">
+                <a:solidFill>
+                  <a:srgbClr val="1A1A1A"/>
+                </a:solidFill>
+                <a:latin typeface="Meiryo" pitchFamily="34" charset="0"/>
+                <a:ea typeface="Meiryo" pitchFamily="34" charset="-122"/>
+                <a:cs typeface="Meiryo" pitchFamily="34" charset="-120"/>
+              </a:rPr>
+              <a:t>デジタル化と技能継承のギャップ（製造業）</a:t>
+            </a:r>
+            <a:endParaRPr lang="en-US" sz="1050" dirty="0"/>
+          </a:p>
+        </p:txBody>
+      </p:sp>
+      <p:sp>
+        <p:nvSpPr>
+          <p:cNvPr id="11" name="Text 8"/>
+          <p:cNvSpPr txBox="1"/>
+          <p:nvPr/>
+        </p:nvSpPr>
+        <p:spPr>
+          <a:xfrm>
+            <a:off x="4800600" y="1362456"/>
+            <a:ext cx="3977640" cy="201168"/>
+          </a:xfrm>
+          <a:prstGeom prst="rect">
+            <a:avLst/>
+          </a:prstGeom>
+          <a:noFill/>
+          <a:ln/>
+        </p:spPr>
+        <p:txBody>
+          <a:bodyPr wrap="square" lIns="0" tIns="0" rIns="0" bIns="0" rtlCol="0" anchor="t"/>
+          <a:lstStyle/>
+          <a:p>
+            <a:pPr algn="l" indent="0" marL="0">
+              <a:lnSpc>
+                <a:spcPct val="115000"/>
+              </a:lnSpc>
+              <a:buNone/>
+            </a:pPr>
+            <a:r>
+              <a:rPr lang="en-US" sz="850" dirty="0">
+                <a:solidFill>
+                  <a:srgbClr val="1A1A1A"/>
+                </a:solidFill>
+                <a:latin typeface="Meiryo" pitchFamily="34" charset="0"/>
+                <a:ea typeface="Meiryo" pitchFamily="34" charset="-122"/>
+                <a:cs typeface="Meiryo" pitchFamily="34" charset="-120"/>
+              </a:rPr>
+              <a:t>業務改善にデジタル技術を活用している企業 (1)</a:t>
+            </a:r>
+            <a:endParaRPr lang="en-US" sz="850" dirty="0"/>
+          </a:p>
+        </p:txBody>
+      </p:sp>
+      <p:sp>
+        <p:nvSpPr>
+          <p:cNvPr id="12" name="Shape 9"/>
           <p:cNvSpPr/>
           <p:nvPr/>
         </p:nvSpPr>
         <p:spPr>
           <a:xfrm>
-            <a:off x="4937760" y="1051560"/>
-            <a:ext cx="1874520" cy="1481328"/>
+            <a:off x="4846320" y="1581912"/>
+            <a:ext cx="3291840" cy="274320"/>
+          </a:xfrm>
+          <a:prstGeom prst="rect">
+            <a:avLst/>
+          </a:prstGeom>
+          <a:solidFill>
+            <a:srgbClr val="F2F2F2"/>
+          </a:solidFill>
+          <a:ln/>
+        </p:spPr>
+      </p:sp>
+      <p:sp>
+        <p:nvSpPr>
+          <p:cNvPr id="13" name="bar-0"/>
+          <p:cNvSpPr/>
+          <p:nvPr/>
+        </p:nvSpPr>
+        <p:spPr>
+          <a:xfrm>
+            <a:off x="4846320" y="1581912"/>
+            <a:ext cx="2541300" cy="274320"/>
+          </a:xfrm>
+          <a:prstGeom prst="rect">
+            <a:avLst/>
+          </a:prstGeom>
+          <a:solidFill>
+            <a:srgbClr val="1A1A1A"/>
+          </a:solidFill>
+          <a:ln/>
+        </p:spPr>
+      </p:sp>
+      <p:sp>
+        <p:nvSpPr>
+          <p:cNvPr id="14" name="Text 11"/>
+          <p:cNvSpPr txBox="1"/>
+          <p:nvPr/>
+        </p:nvSpPr>
+        <p:spPr>
+          <a:xfrm>
+            <a:off x="7442484" y="1563624"/>
+            <a:ext cx="685800" cy="310896"/>
+          </a:xfrm>
+          <a:prstGeom prst="rect">
+            <a:avLst/>
+          </a:prstGeom>
+          <a:noFill/>
+          <a:ln/>
+        </p:spPr>
+        <p:txBody>
+          <a:bodyPr wrap="square" lIns="0" tIns="0" rIns="0" bIns="0" rtlCol="0" anchor="ctr"/>
+          <a:lstStyle/>
+          <a:p>
+            <a:pPr algn="l" indent="0" marL="0">
+              <a:lnSpc>
+                <a:spcPct val="115000"/>
+              </a:lnSpc>
+              <a:buNone/>
+            </a:pPr>
+            <a:r>
+              <a:rPr lang="en-US" sz="1400" b="1" dirty="0">
+                <a:solidFill>
+                  <a:srgbClr val="1A1A1A"/>
+                </a:solidFill>
+                <a:latin typeface="Meiryo" pitchFamily="34" charset="0"/>
+                <a:ea typeface="Meiryo" pitchFamily="34" charset="-122"/>
+                <a:cs typeface="Meiryo" pitchFamily="34" charset="-120"/>
+              </a:rPr>
+              <a:t>77.2%</a:t>
+            </a:r>
+            <a:endParaRPr lang="en-US" sz="1400" dirty="0"/>
+          </a:p>
+        </p:txBody>
+      </p:sp>
+      <p:sp>
+        <p:nvSpPr>
+          <p:cNvPr id="15" name="Text 12"/>
+          <p:cNvSpPr txBox="1"/>
+          <p:nvPr/>
+        </p:nvSpPr>
+        <p:spPr>
+          <a:xfrm>
+            <a:off x="4800600" y="1984248"/>
+            <a:ext cx="3977640" cy="201168"/>
+          </a:xfrm>
+          <a:prstGeom prst="rect">
+            <a:avLst/>
+          </a:prstGeom>
+          <a:noFill/>
+          <a:ln/>
+        </p:spPr>
+        <p:txBody>
+          <a:bodyPr wrap="square" lIns="0" tIns="0" rIns="0" bIns="0" rtlCol="0" anchor="t"/>
+          <a:lstStyle/>
+          <a:p>
+            <a:pPr algn="l" indent="0" marL="0">
+              <a:lnSpc>
+                <a:spcPct val="115000"/>
+              </a:lnSpc>
+              <a:buNone/>
+            </a:pPr>
+            <a:r>
+              <a:rPr lang="en-US" sz="850" dirty="0">
+                <a:solidFill>
+                  <a:srgbClr val="1A1A1A"/>
+                </a:solidFill>
+                <a:latin typeface="Meiryo" pitchFamily="34" charset="0"/>
+                <a:ea typeface="Meiryo" pitchFamily="34" charset="-122"/>
+                <a:cs typeface="Meiryo" pitchFamily="34" charset="-120"/>
+              </a:rPr>
+              <a:t>その効果として、技能継承が円滑になった企業 (2)</a:t>
+            </a:r>
+            <a:endParaRPr lang="en-US" sz="850" dirty="0"/>
+          </a:p>
+        </p:txBody>
+      </p:sp>
+      <p:sp>
+        <p:nvSpPr>
+          <p:cNvPr id="16" name="Shape 13"/>
+          <p:cNvSpPr/>
+          <p:nvPr/>
+        </p:nvSpPr>
+        <p:spPr>
+          <a:xfrm>
+            <a:off x="4846320" y="2203704"/>
+            <a:ext cx="3291840" cy="274320"/>
+          </a:xfrm>
+          <a:prstGeom prst="rect">
+            <a:avLst/>
+          </a:prstGeom>
+          <a:solidFill>
+            <a:srgbClr val="F2F2F2"/>
+          </a:solidFill>
+          <a:ln/>
+        </p:spPr>
+      </p:sp>
+      <p:sp>
+        <p:nvSpPr>
+          <p:cNvPr id="17" name="bar-1"/>
+          <p:cNvSpPr/>
+          <p:nvPr/>
+        </p:nvSpPr>
+        <p:spPr>
+          <a:xfrm>
+            <a:off x="4846320" y="2203704"/>
+            <a:ext cx="286390" cy="274320"/>
+          </a:xfrm>
+          <a:prstGeom prst="rect">
+            <a:avLst/>
+          </a:prstGeom>
+          <a:solidFill>
+            <a:srgbClr val="4D4D4D"/>
+          </a:solidFill>
+          <a:ln/>
+        </p:spPr>
+      </p:sp>
+      <p:sp>
+        <p:nvSpPr>
+          <p:cNvPr id="18" name="Text 15"/>
+          <p:cNvSpPr txBox="1"/>
+          <p:nvPr/>
+        </p:nvSpPr>
+        <p:spPr>
+          <a:xfrm>
+            <a:off x="5187574" y="2185416"/>
+            <a:ext cx="685800" cy="310896"/>
+          </a:xfrm>
+          <a:prstGeom prst="rect">
+            <a:avLst/>
+          </a:prstGeom>
+          <a:noFill/>
+          <a:ln/>
+        </p:spPr>
+        <p:txBody>
+          <a:bodyPr wrap="square" lIns="0" tIns="0" rIns="0" bIns="0" rtlCol="0" anchor="ctr"/>
+          <a:lstStyle/>
+          <a:p>
+            <a:pPr algn="l" indent="0" marL="0">
+              <a:lnSpc>
+                <a:spcPct val="115000"/>
+              </a:lnSpc>
+              <a:buNone/>
+            </a:pPr>
+            <a:r>
+              <a:rPr lang="en-US" sz="1400" b="1" dirty="0">
+                <a:solidFill>
+                  <a:srgbClr val="1A1A1A"/>
+                </a:solidFill>
+                <a:latin typeface="Meiryo" pitchFamily="34" charset="0"/>
+                <a:ea typeface="Meiryo" pitchFamily="34" charset="-122"/>
+                <a:cs typeface="Meiryo" pitchFamily="34" charset="-120"/>
+              </a:rPr>
+              <a:t>8.7%</a:t>
+            </a:r>
+            <a:endParaRPr lang="en-US" sz="1400" dirty="0"/>
+          </a:p>
+        </p:txBody>
+      </p:sp>
+      <p:sp>
+        <p:nvSpPr>
+          <p:cNvPr id="19" name="stat-0"/>
+          <p:cNvSpPr/>
+          <p:nvPr/>
+        </p:nvSpPr>
+        <p:spPr>
+          <a:xfrm>
+            <a:off x="4800600" y="2715768"/>
+            <a:ext cx="1943100" cy="1325880"/>
           </a:xfrm>
           <a:prstGeom prst="rect">
             <a:avLst/>
@@ -4732,14 +5068,14 @@
       </p:sp>
       <p:sp>
         <p:nvSpPr>
-          <p:cNvPr id="11" name="Text 8"/>
+          <p:cNvPr id="20" name="Text 17"/>
           <p:cNvSpPr txBox="1"/>
           <p:nvPr/>
         </p:nvSpPr>
         <p:spPr>
           <a:xfrm>
-            <a:off x="5047488" y="1188720"/>
-            <a:ext cx="1655064" cy="457200"/>
+            <a:off x="4910328" y="2807208"/>
+            <a:ext cx="1723644" cy="411480"/>
           </a:xfrm>
           <a:prstGeom prst="rect">
             <a:avLst/>
@@ -4766,7 +5102,7 @@
                 <a:ea typeface="Meiryo" pitchFamily="34" charset="-122"/>
                 <a:cs typeface="Meiryo" pitchFamily="34" charset="-120"/>
               </a:rPr>
-              <a:t>36.7%</a:t>
+              <a:t>54.8%</a:t>
             </a:r>
             <a:endParaRPr lang="en-US" sz="2000" dirty="0"/>
           </a:p>
@@ -4774,14 +5110,14 @@
       </p:sp>
       <p:sp>
         <p:nvSpPr>
-          <p:cNvPr id="12" name="Text 9"/>
+          <p:cNvPr id="21" name="Text 18"/>
           <p:cNvSpPr txBox="1"/>
           <p:nvPr/>
         </p:nvSpPr>
         <p:spPr>
           <a:xfrm>
-            <a:off x="5047488" y="1737360"/>
-            <a:ext cx="1655064" cy="731520"/>
+            <a:off x="4910328" y="3264408"/>
+            <a:ext cx="1723644" cy="731520"/>
           </a:xfrm>
           <a:prstGeom prst="rect">
             <a:avLst/>
@@ -4800,7 +5136,7 @@
               <a:buNone/>
             </a:pPr>
             <a:r>
-              <a:rPr lang="en-US" sz="950" dirty="0">
+              <a:rPr lang="en-US" sz="900" dirty="0">
                 <a:solidFill>
                   <a:srgbClr val="1A1A1A"/>
                 </a:solidFill>
@@ -4808,22 +5144,22 @@
                 <a:ea typeface="Meiryo" pitchFamily="34" charset="-122"/>
                 <a:cs typeface="Meiryo" pitchFamily="34" charset="-120"/>
               </a:rPr>
-              <a:t>建設業就業者のうち55歳以上（29歳以下は11.7%）</a:t>
-            </a:r>
-            <a:endParaRPr lang="en-US" sz="950" dirty="0"/>
-          </a:p>
-        </p:txBody>
-      </p:sp>
-      <p:sp>
-        <p:nvSpPr>
-          <p:cNvPr id="13" name="stat-1"/>
+              <a:t>技能継承の取組で最も多いのは「再雇用・勤務延長でベテランに居続けてもらう」(3)</a:t>
+            </a:r>
+            <a:endParaRPr lang="en-US" sz="900" dirty="0"/>
+          </a:p>
+        </p:txBody>
+      </p:sp>
+      <p:sp>
+        <p:nvSpPr>
+          <p:cNvPr id="22" name="stat-1"/>
           <p:cNvSpPr/>
           <p:nvPr/>
         </p:nvSpPr>
         <p:spPr>
           <a:xfrm>
-            <a:off x="6903720" y="1051560"/>
-            <a:ext cx="1874520" cy="1481328"/>
+            <a:off x="6835140" y="2715768"/>
+            <a:ext cx="1943100" cy="1325880"/>
           </a:xfrm>
           <a:prstGeom prst="rect">
             <a:avLst/>
@@ -4841,14 +5177,14 @@
       </p:sp>
       <p:sp>
         <p:nvSpPr>
-          <p:cNvPr id="14" name="Text 11"/>
+          <p:cNvPr id="23" name="Text 20"/>
           <p:cNvSpPr txBox="1"/>
           <p:nvPr/>
         </p:nvSpPr>
         <p:spPr>
           <a:xfrm>
-            <a:off x="7013448" y="1188720"/>
-            <a:ext cx="1655064" cy="457200"/>
+            <a:off x="6944868" y="2807208"/>
+            <a:ext cx="1723644" cy="411480"/>
           </a:xfrm>
           <a:prstGeom prst="rect">
             <a:avLst/>
@@ -4875,7 +5211,7 @@
                 <a:ea typeface="Meiryo" pitchFamily="34" charset="-122"/>
                 <a:cs typeface="Meiryo" pitchFamily="34" charset="-120"/>
               </a:rPr>
-              <a:t>1,033万人</a:t>
+              <a:t>62.8%</a:t>
             </a:r>
             <a:endParaRPr lang="en-US" sz="2000" dirty="0"/>
           </a:p>
@@ -4883,14 +5219,14 @@
       </p:sp>
       <p:sp>
         <p:nvSpPr>
-          <p:cNvPr id="15" name="Text 12"/>
+          <p:cNvPr id="24" name="Text 21"/>
           <p:cNvSpPr txBox="1"/>
           <p:nvPr/>
         </p:nvSpPr>
         <p:spPr>
           <a:xfrm>
-            <a:off x="7013448" y="1737360"/>
-            <a:ext cx="1655064" cy="731520"/>
+            <a:off x="6944868" y="3264408"/>
+            <a:ext cx="1723644" cy="731520"/>
           </a:xfrm>
           <a:prstGeom prst="rect">
             <a:avLst/>
@@ -4909,7 +5245,7 @@
               <a:buNone/>
             </a:pPr>
             <a:r>
-              <a:rPr lang="en-US" sz="950" dirty="0">
+              <a:rPr lang="en-US" sz="900" dirty="0">
                 <a:solidFill>
                   <a:srgbClr val="1A1A1A"/>
                 </a:solidFill>
@@ -4917,47 +5253,22 @@
                 <a:ea typeface="Meiryo" pitchFamily="34" charset="-122"/>
                 <a:cs typeface="Meiryo" pitchFamily="34" charset="-120"/>
               </a:rPr>
-              <a:t>製造業就業者数（2025年。2023年の1,055万人から減少）</a:t>
-            </a:r>
-            <a:endParaRPr lang="en-US" sz="950" dirty="0"/>
-          </a:p>
-        </p:txBody>
-      </p:sp>
-      <p:sp>
-        <p:nvSpPr>
-          <p:cNvPr id="16" name="stat-2"/>
-          <p:cNvSpPr/>
-          <p:nvPr/>
-        </p:nvSpPr>
-        <p:spPr>
-          <a:xfrm>
-            <a:off x="4937760" y="2624328"/>
-            <a:ext cx="1874520" cy="1481328"/>
-          </a:xfrm>
-          <a:prstGeom prst="rect">
-            <a:avLst/>
-          </a:prstGeom>
-          <a:solidFill>
-            <a:srgbClr val="FFFFFF"/>
-          </a:solidFill>
-          <a:ln w="9525">
-            <a:solidFill>
-              <a:srgbClr val="BFBFBF"/>
-            </a:solidFill>
-            <a:prstDash val="solid"/>
-          </a:ln>
-        </p:spPr>
-      </p:sp>
-      <p:sp>
-        <p:nvSpPr>
-          <p:cNvPr id="17" name="Text 14"/>
+              <a:t>製造業の育成上の問題「指導する人材が不足」。「育成する時間がない」も45.4% (3)</a:t>
+            </a:r>
+            <a:endParaRPr lang="en-US" sz="900" dirty="0"/>
+          </a:p>
+        </p:txBody>
+      </p:sp>
+      <p:sp>
+        <p:nvSpPr>
+          <p:cNvPr id="25" name="Text 22"/>
           <p:cNvSpPr txBox="1"/>
           <p:nvPr/>
         </p:nvSpPr>
         <p:spPr>
           <a:xfrm>
-            <a:off x="5047488" y="2761488"/>
-            <a:ext cx="1655064" cy="457200"/>
+            <a:off x="365760" y="4535424"/>
+            <a:ext cx="8412480" cy="274320"/>
           </a:xfrm>
           <a:prstGeom prst="rect">
             <a:avLst/>
@@ -4966,48 +5277,6 @@
           <a:ln/>
         </p:spPr>
         <p:txBody>
-          <a:bodyPr wrap="square" lIns="0" tIns="0" rIns="0" bIns="0" rtlCol="0" anchor="ctr"/>
-          <a:lstStyle/>
-          <a:p>
-            <a:pPr algn="l" indent="0" marL="0">
-              <a:lnSpc>
-                <a:spcPct val="115000"/>
-              </a:lnSpc>
-              <a:buNone/>
-            </a:pPr>
-            <a:r>
-              <a:rPr lang="en-US" sz="2000" b="1" dirty="0">
-                <a:solidFill>
-                  <a:srgbClr val="1A1A1A"/>
-                </a:solidFill>
-                <a:latin typeface="Meiryo" pitchFamily="34" charset="0"/>
-                <a:ea typeface="Meiryo" pitchFamily="34" charset="-122"/>
-                <a:cs typeface="Meiryo" pitchFamily="34" charset="-120"/>
-              </a:rPr>
-              <a:t>3社に2社</a:t>
-            </a:r>
-            <a:endParaRPr lang="en-US" sz="2000" dirty="0"/>
-          </a:p>
-        </p:txBody>
-      </p:sp>
-      <p:sp>
-        <p:nvSpPr>
-          <p:cNvPr id="18" name="Text 15"/>
-          <p:cNvSpPr txBox="1"/>
-          <p:nvPr/>
-        </p:nvSpPr>
-        <p:spPr>
-          <a:xfrm>
-            <a:off x="5047488" y="3310128"/>
-            <a:ext cx="1655064" cy="731520"/>
-          </a:xfrm>
-          <a:prstGeom prst="rect">
-            <a:avLst/>
-          </a:prstGeom>
-          <a:noFill/>
-          <a:ln/>
-        </p:spPr>
-        <p:txBody>
           <a:bodyPr wrap="square" lIns="0" tIns="0" rIns="0" bIns="0" rtlCol="0" anchor="t"/>
           <a:lstStyle/>
           <a:p>
@@ -5018,166 +5287,15 @@
               <a:buNone/>
             </a:pPr>
             <a:r>
-              <a:rPr lang="en-US" sz="950" dirty="0">
-                <a:solidFill>
-                  <a:srgbClr val="1A1A1A"/>
-                </a:solidFill>
-                <a:latin typeface="Meiryo" pitchFamily="34" charset="0"/>
-                <a:ea typeface="Meiryo" pitchFamily="34" charset="-122"/>
-                <a:cs typeface="Meiryo" pitchFamily="34" charset="-120"/>
-              </a:rPr>
-              <a:t>技能継承がうまくいっていない製造企業</a:t>
-            </a:r>
-            <a:endParaRPr lang="en-US" sz="950" dirty="0"/>
-          </a:p>
-        </p:txBody>
-      </p:sp>
-      <p:sp>
-        <p:nvSpPr>
-          <p:cNvPr id="19" name="stat-3"/>
-          <p:cNvSpPr/>
-          <p:nvPr/>
-        </p:nvSpPr>
-        <p:spPr>
-          <a:xfrm>
-            <a:off x="6903720" y="2624328"/>
-            <a:ext cx="1874520" cy="1481328"/>
-          </a:xfrm>
-          <a:prstGeom prst="rect">
-            <a:avLst/>
-          </a:prstGeom>
-          <a:solidFill>
-            <a:srgbClr val="FFFFFF"/>
-          </a:solidFill>
-          <a:ln w="9525">
-            <a:solidFill>
-              <a:srgbClr val="BFBFBF"/>
-            </a:solidFill>
-            <a:prstDash val="solid"/>
-          </a:ln>
-        </p:spPr>
-      </p:sp>
-      <p:sp>
-        <p:nvSpPr>
-          <p:cNvPr id="20" name="Text 17"/>
-          <p:cNvSpPr txBox="1"/>
-          <p:nvPr/>
-        </p:nvSpPr>
-        <p:spPr>
-          <a:xfrm>
-            <a:off x="7013448" y="2761488"/>
-            <a:ext cx="1655064" cy="457200"/>
-          </a:xfrm>
-          <a:prstGeom prst="rect">
-            <a:avLst/>
-          </a:prstGeom>
-          <a:noFill/>
-          <a:ln/>
-        </p:spPr>
-        <p:txBody>
-          <a:bodyPr wrap="square" lIns="0" tIns="0" rIns="0" bIns="0" rtlCol="0" anchor="ctr"/>
-          <a:lstStyle/>
-          <a:p>
-            <a:pPr algn="l" indent="0" marL="0">
-              <a:lnSpc>
-                <a:spcPct val="115000"/>
-              </a:lnSpc>
-              <a:buNone/>
-            </a:pPr>
-            <a:r>
-              <a:rPr lang="en-US" sz="2000" b="1" dirty="0">
-                <a:solidFill>
-                  <a:srgbClr val="1A1A1A"/>
-                </a:solidFill>
-                <a:latin typeface="Meiryo" pitchFamily="34" charset="0"/>
-                <a:ea typeface="Meiryo" pitchFamily="34" charset="-122"/>
-                <a:cs typeface="Meiryo" pitchFamily="34" charset="-120"/>
-              </a:rPr>
-              <a:t>21.7%</a:t>
-            </a:r>
-            <a:endParaRPr lang="en-US" sz="2000" dirty="0"/>
-          </a:p>
-        </p:txBody>
-      </p:sp>
-      <p:sp>
-        <p:nvSpPr>
-          <p:cNvPr id="21" name="Text 18"/>
-          <p:cNvSpPr txBox="1"/>
-          <p:nvPr/>
-        </p:nvSpPr>
-        <p:spPr>
-          <a:xfrm>
-            <a:off x="7013448" y="3310128"/>
-            <a:ext cx="1655064" cy="731520"/>
-          </a:xfrm>
-          <a:prstGeom prst="rect">
-            <a:avLst/>
-          </a:prstGeom>
-          <a:noFill/>
-          <a:ln/>
-        </p:spPr>
-        <p:txBody>
-          <a:bodyPr wrap="square" lIns="0" tIns="0" rIns="0" bIns="0" rtlCol="0" anchor="t"/>
-          <a:lstStyle/>
-          <a:p>
-            <a:pPr algn="l" indent="0" marL="0">
-              <a:lnSpc>
-                <a:spcPct val="115000"/>
-              </a:lnSpc>
-              <a:buNone/>
-            </a:pPr>
-            <a:r>
-              <a:rPr lang="en-US" sz="950" dirty="0">
-                <a:solidFill>
-                  <a:srgbClr val="1A1A1A"/>
-                </a:solidFill>
-                <a:latin typeface="Meiryo" pitchFamily="34" charset="0"/>
-                <a:ea typeface="Meiryo" pitchFamily="34" charset="-122"/>
-                <a:cs typeface="Meiryo" pitchFamily="34" charset="-120"/>
-              </a:rPr>
-              <a:t>技能継承にデジタル技術を活用している企業</a:t>
-            </a:r>
-            <a:endParaRPr lang="en-US" sz="950" dirty="0"/>
-          </a:p>
-        </p:txBody>
-      </p:sp>
-      <p:sp>
-        <p:nvSpPr>
-          <p:cNvPr id="22" name="Text 19"/>
-          <p:cNvSpPr txBox="1"/>
-          <p:nvPr/>
-        </p:nvSpPr>
-        <p:spPr>
-          <a:xfrm>
-            <a:off x="365760" y="4480560"/>
-            <a:ext cx="8412480" cy="347472"/>
-          </a:xfrm>
-          <a:prstGeom prst="rect">
-            <a:avLst/>
-          </a:prstGeom>
-          <a:noFill/>
-          <a:ln/>
-        </p:spPr>
-        <p:txBody>
-          <a:bodyPr wrap="square" lIns="0" tIns="0" rIns="0" bIns="0" rtlCol="0" anchor="t"/>
-          <a:lstStyle/>
-          <a:p>
-            <a:pPr algn="l" indent="0" marL="0">
-              <a:lnSpc>
-                <a:spcPct val="115000"/>
-              </a:lnSpc>
-              <a:buNone/>
-            </a:pPr>
-            <a:r>
               <a:rPr lang="en-US" sz="800" dirty="0">
                 <a:solidFill>
-                  <a:srgbClr val="4D4D4D"/>
-                </a:solidFill>
-                <a:latin typeface="Meiryo" pitchFamily="34" charset="0"/>
-                <a:ea typeface="Meiryo" pitchFamily="34" charset="-122"/>
-                <a:cs typeface="Meiryo" pitchFamily="34" charset="-120"/>
-              </a:rPr>
-              <a:t>出典：国土交通省（総務省「労働力調査」2024年）／経済産業省・厚生労働省・文部科学省「ものづくり白書」2026年版／労働政策研究・研修機構「ものづくり産業における人材確保・定着と技能継承に関する調査」（2026年5月）</a:t>
+                  <a:srgbClr val="8C8C8C"/>
+                </a:solidFill>
+                <a:latin typeface="Meiryo" pitchFamily="34" charset="0"/>
+                <a:ea typeface="Meiryo" pitchFamily="34" charset="-122"/>
+                <a:cs typeface="Meiryo" pitchFamily="34" charset="-120"/>
+              </a:rPr>
+              <a:t>(1) 労働政策研究・研修機構 調査シリーズNo.267（2026年4月）　(2) 同 No.265（2026年3月）　(3) 経済産業省・厚生労働省・文部科学省「2026年版 ものづくり白書」（令和8年5月）</a:t>
             </a:r>
             <a:endParaRPr lang="en-US" sz="800" dirty="0"/>
           </a:p>
@@ -5334,7 +5452,7 @@
                 <a:ea typeface="Meiryo" pitchFamily="34" charset="-122"/>
                 <a:cs typeface="Meiryo" pitchFamily="34" charset="-120"/>
               </a:rPr>
-              <a:t>データを集めて終わらせない。勘どころを言語化し、研修資料・音声番組・動画まで当社が作って届ける</a:t>
+              <a:t>記録と整理は手段。差別化は③：連続工程の勘どころを、研修資料・音声番組・動画にして当社が届ける</a:t>
             </a:r>
             <a:endParaRPr lang="en-US" sz="1200" dirty="0"/>
           </a:p>
@@ -5539,7 +5657,7 @@
                 <a:ea typeface="Meiryo" pitchFamily="34" charset="-122"/>
                 <a:cs typeface="Meiryo" pitchFamily="34" charset="-120"/>
               </a:rPr>
-              <a:t>記録アプリ（音声・写真）＋MES連携</a:t>
+              <a:t>記録アプリ（音声）。構造化を現場に求めない (1)</a:t>
             </a:r>
             <a:endParaRPr lang="en-US" sz="850" dirty="0"/>
           </a:p>
@@ -5974,7 +6092,7 @@
                 <a:ea typeface="Meiryo" pitchFamily="34" charset="-122"/>
                 <a:cs typeface="Meiryo" pitchFamily="34" charset="-120"/>
               </a:rPr>
-              <a:t>現場が忙しくて作れない研修資料・音声番組・動画を当社が制作し、現場に届ける</a:t>
+              <a:t>指導役が足りず（59.5%）、育成の時間もない（47.4%）(2)。だから教材は当社が作って届ける</a:t>
             </a:r>
             <a:endParaRPr lang="en-US" sz="950" dirty="0"/>
           </a:p>
@@ -6075,7 +6193,7 @@
                 <a:ea typeface="Meiryo" pitchFamily="34" charset="-122"/>
                 <a:cs typeface="Meiryo" pitchFamily="34" charset="-120"/>
               </a:rPr>
-              <a:t>渡し方を増やす（製品戦略：基盤が先、追加機能は年1本ずつ）</a:t>
+              <a:t>渡し方を増やす（製品戦略：教材化を初年度から、追加機能は年1本ずつ）</a:t>
             </a:r>
             <a:endParaRPr lang="en-US" sz="950" dirty="0"/>
           </a:p>
@@ -6373,7 +6491,7 @@
                 <a:ea typeface="Meiryo" pitchFamily="34" charset="-122"/>
                 <a:cs typeface="Meiryo" pitchFamily="34" charset="-120"/>
               </a:rPr>
-              <a:t>2年目</a:t>
+              <a:t>1年目</a:t>
             </a:r>
             <a:endParaRPr lang="en-US" sz="800" dirty="0"/>
           </a:p>
@@ -6606,7 +6724,7 @@
                 <a:ea typeface="Meiryo" pitchFamily="34" charset="-122"/>
                 <a:cs typeface="Meiryo" pitchFamily="34" charset="-120"/>
               </a:rPr>
-              <a:t>3年目</a:t>
+              <a:t>2年目</a:t>
             </a:r>
             <a:endParaRPr lang="en-US" sz="800" dirty="0"/>
           </a:p>
@@ -6839,7 +6957,7 @@
                 <a:ea typeface="Meiryo" pitchFamily="34" charset="-122"/>
                 <a:cs typeface="Meiryo" pitchFamily="34" charset="-120"/>
               </a:rPr>
-              <a:t>4年目</a:t>
+              <a:t>3年目</a:t>
             </a:r>
             <a:endParaRPr lang="en-US" sz="800" dirty="0"/>
           </a:p>
@@ -7072,7 +7190,7 @@
                 <a:ea typeface="Meiryo" pitchFamily="34" charset="-122"/>
                 <a:cs typeface="Meiryo" pitchFamily="34" charset="-120"/>
               </a:rPr>
-              <a:t>5年目</a:t>
+              <a:t>4年目</a:t>
             </a:r>
             <a:endParaRPr lang="en-US" sz="800" dirty="0"/>
           </a:p>
@@ -7876,7 +7994,7 @@
                 <a:ea typeface="Meiryo" pitchFamily="34" charset="-122"/>
                 <a:cs typeface="Meiryo" pitchFamily="34" charset="-120"/>
               </a:rPr>
-              <a:t>作る：</a:t>
+              <a:t>作らない：</a:t>
             </a:r>
             <a:pPr algn="l" indent="0" marL="0">
               <a:lnSpc>
@@ -7896,7 +8014,7 @@
                 <a:ea typeface="Meiryo" pitchFamily="34" charset="-122"/>
                 <a:cs typeface="Meiryo" pitchFamily="34" charset="-120"/>
               </a:rPr>
-              <a:t>記録の構造化（生成AI）と、渡し方の設計</a:t>
+              <a:t>音声記録・AI構造化は汎用技術。自前開発は最小限</a:t>
             </a:r>
             <a:endParaRPr lang="en-US" sz="850" dirty="0"/>
           </a:p>
@@ -7919,7 +8037,7 @@
                 <a:ea typeface="Meiryo" pitchFamily="34" charset="-122"/>
                 <a:cs typeface="Meiryo" pitchFamily="34" charset="-120"/>
               </a:rPr>
-              <a:t>組む：</a:t>
+              <a:t>作る：</a:t>
             </a:r>
             <a:pPr algn="l" indent="0" marL="0">
               <a:lnSpc>
@@ -7939,7 +8057,7 @@
                 <a:ea typeface="Meiryo" pitchFamily="34" charset="-122"/>
                 <a:cs typeface="Meiryo" pitchFamily="34" charset="-120"/>
               </a:rPr>
-              <a:t>CAD・3D・触覚デバイスはベンダー・大学と共同研究</a:t>
+              <a:t>連続工程の工程データとの紐づけ、教材化の手順</a:t>
             </a:r>
             <a:endParaRPr lang="en-US" sz="850" dirty="0"/>
           </a:p>
@@ -7962,7 +8080,7 @@
                 <a:ea typeface="Meiryo" pitchFamily="34" charset="-122"/>
                 <a:cs typeface="Meiryo" pitchFamily="34" charset="-120"/>
               </a:rPr>
-              <a:t>試す：</a:t>
+              <a:t>組む：</a:t>
             </a:r>
             <a:pPr algn="l" indent="0" marL="0">
               <a:lnSpc>
@@ -7982,7 +8100,7 @@
                 <a:ea typeface="Meiryo" pitchFamily="34" charset="-122"/>
                 <a:cs typeface="Meiryo" pitchFamily="34" charset="-120"/>
               </a:rPr>
-              <a:t>CVC出資元の工場を実証の場にする</a:t>
+              <a:t>CAD・3D・触覚デバイスはベンダー・大学と共同研究</a:t>
             </a:r>
             <a:endParaRPr lang="en-US" sz="850" dirty="0"/>
           </a:p>
@@ -8165,13 +8283,13 @@
             <a:r>
               <a:rPr lang="en-US" sz="800" dirty="0">
                 <a:solidFill>
-                  <a:srgbClr val="4D4D4D"/>
-                </a:solidFill>
-                <a:latin typeface="Meiryo" pitchFamily="34" charset="0"/>
-                <a:ea typeface="Meiryo" pitchFamily="34" charset="-122"/>
-                <a:cs typeface="Meiryo" pitchFamily="34" charset="-120"/>
-              </a:rPr>
-              <a:t>対象：電線・ケーブル工場の生産技術・製造部門（のちに、その製品を施工する工事会社）。R&amp;D行はエンジニア2→9名の範囲で進め、製品化前の売上は計画に含めない</a:t>
+                  <a:srgbClr val="8C8C8C"/>
+                </a:solidFill>
+                <a:latin typeface="Meiryo" pitchFamily="34" charset="0"/>
+                <a:ea typeface="Meiryo" pitchFamily="34" charset="-122"/>
+                <a:cs typeface="Meiryo" pitchFamily="34" charset="-120"/>
+              </a:rPr>
+              <a:t>(1) 内閣府「人工知能基本計画」（令和8年7月14日 閣議決定）「完全なデータの構造化をしない形での現場データの活用を推進する」　(2) 厚生労働省「令和6年度 能力開発基本調査」（2025年6月公表）。R&amp;D行は製品化前の売上を計画に含めない</a:t>
             </a:r>
             <a:endParaRPr lang="en-US" sz="800" dirty="0"/>
           </a:p>
@@ -9958,7 +10076,7 @@
                 <a:ea typeface="Meiryo" pitchFamily="34" charset="-122"/>
                 <a:cs typeface="Meiryo" pitchFamily="34" charset="-120"/>
               </a:rPr>
-              <a:t>競合 ─ 判断の理由を内製で仕組み化した事業会社は、希少</a:t>
+              <a:t>競合 ─ 「貯める」会社は現れた。当社は「渡す」で分かれる</a:t>
             </a:r>
             <a:endParaRPr lang="en-US" sz="2000" dirty="0"/>
           </a:p>
@@ -10000,7 +10118,7 @@
                 <a:ea typeface="Meiryo" pitchFamily="34" charset="-122"/>
                 <a:cs typeface="Meiryo" pitchFamily="34" charset="-120"/>
               </a:rPr>
-              <a:t>製造業では大手がSIerと組んで始めたが、電力インフラ（電線・送配電・電気工事）では公開事例が見当たらない</a:t>
+              <a:t>判断の理由を扱う会社は現れた。連続工程の現場処置を、教材にして届ける会社はまだない</a:t>
             </a:r>
             <a:endParaRPr lang="en-US" sz="1200" dirty="0"/>
           </a:p>
@@ -10015,7 +10133,7 @@
         <p:spPr>
           <a:xfrm>
             <a:off x="365760" y="1051560"/>
-            <a:ext cx="4114800" cy="237744"/>
+            <a:ext cx="3977640" cy="237744"/>
           </a:xfrm>
           <a:prstGeom prst="rect">
             <a:avLst/>
@@ -10056,8 +10174,8 @@
         </p:nvSpPr>
         <p:spPr>
           <a:xfrm>
-            <a:off x="2514600" y="1435608"/>
-            <a:ext cx="1828800" cy="1234440"/>
+            <a:off x="2446020" y="1435608"/>
+            <a:ext cx="1805940" cy="1234440"/>
           </a:xfrm>
           <a:prstGeom prst="rect">
             <a:avLst/>
@@ -10076,8 +10194,8 @@
         </p:nvSpPr>
         <p:spPr>
           <a:xfrm>
-            <a:off x="685800" y="2670048"/>
-            <a:ext cx="3657600" cy="0"/>
+            <a:off x="640080" y="2670048"/>
+            <a:ext cx="3611880" cy="0"/>
           </a:xfrm>
           <a:prstGeom prst="line">
             <a:avLst/>
@@ -10099,7 +10217,7 @@
         </p:nvSpPr>
         <p:spPr>
           <a:xfrm>
-            <a:off x="2514600" y="1435608"/>
+            <a:off x="2446020" y="1435608"/>
             <a:ext cx="0" cy="2468880"/>
           </a:xfrm>
           <a:prstGeom prst="line">
@@ -10122,7 +10240,7 @@
         </p:nvSpPr>
         <p:spPr>
           <a:xfrm>
-            <a:off x="1600200" y="1216152"/>
+            <a:off x="1531620" y="1216152"/>
             <a:ext cx="1828800" cy="182880"/>
           </a:xfrm>
           <a:prstGeom prst="rect">
@@ -10164,7 +10282,7 @@
         </p:nvSpPr>
         <p:spPr>
           <a:xfrm>
-            <a:off x="1600200" y="3941064"/>
+            <a:off x="1531620" y="3941064"/>
             <a:ext cx="1828800" cy="182880"/>
           </a:xfrm>
           <a:prstGeom prst="rect">
@@ -10206,8 +10324,8 @@
         </p:nvSpPr>
         <p:spPr>
           <a:xfrm>
-            <a:off x="685800" y="2697480"/>
-            <a:ext cx="1737360" cy="182880"/>
+            <a:off x="640080" y="2697480"/>
+            <a:ext cx="1280160" cy="182880"/>
           </a:xfrm>
           <a:prstGeom prst="rect">
             <a:avLst/>
@@ -10234,7 +10352,7 @@
                 <a:ea typeface="Meiryo" pitchFamily="34" charset="-122"/>
                 <a:cs typeface="Meiryo" pitchFamily="34" charset="-120"/>
               </a:rPr>
-              <a:t>← 実績（何が起きたか）</a:t>
+              <a:t>← 実績・手順</a:t>
             </a:r>
             <a:endParaRPr lang="en-US" sz="800" dirty="0"/>
           </a:p>
@@ -10248,8 +10366,8 @@
         </p:nvSpPr>
         <p:spPr>
           <a:xfrm>
-            <a:off x="2606040" y="2697480"/>
-            <a:ext cx="1737360" cy="182880"/>
+            <a:off x="2971800" y="2697480"/>
+            <a:ext cx="1280160" cy="182880"/>
           </a:xfrm>
           <a:prstGeom prst="rect">
             <a:avLst/>
@@ -10276,7 +10394,7 @@
                 <a:ea typeface="Meiryo" pitchFamily="34" charset="-122"/>
                 <a:cs typeface="Meiryo" pitchFamily="34" charset="-120"/>
               </a:rPr>
-              <a:t>判断の理由（なぜ）→</a:t>
+              <a:t>判断の理由 →</a:t>
             </a:r>
             <a:endParaRPr lang="en-US" sz="800" dirty="0"/>
           </a:p>
@@ -10290,8 +10408,8 @@
         </p:nvSpPr>
         <p:spPr>
           <a:xfrm>
-            <a:off x="1051560" y="1757477"/>
-            <a:ext cx="146304" cy="146304"/>
+            <a:off x="932688" y="1663294"/>
+            <a:ext cx="137160" cy="137160"/>
           </a:xfrm>
           <a:prstGeom prst="ellipse">
             <a:avLst/>
@@ -10315,8 +10433,8 @@
         </p:nvSpPr>
         <p:spPr>
           <a:xfrm>
-            <a:off x="1243584" y="1720901"/>
-            <a:ext cx="1463040" cy="219456"/>
+            <a:off x="1106424" y="1631290"/>
+            <a:ext cx="1554480" cy="201168"/>
           </a:xfrm>
           <a:prstGeom prst="rect">
             <a:avLst/>
@@ -10335,7 +10453,7 @@
               <a:buNone/>
             </a:pPr>
             <a:r>
-              <a:rPr lang="en-US" sz="850" dirty="0">
+              <a:rPr lang="en-US" sz="800" dirty="0">
                 <a:solidFill>
                   <a:srgbClr val="1A1A1A"/>
                 </a:solidFill>
@@ -10345,20 +10463,20 @@
               </a:rPr>
               <a:t>MES・ERP</a:t>
             </a:r>
-            <a:endParaRPr lang="en-US" sz="850" dirty="0"/>
-          </a:p>
-        </p:txBody>
-      </p:sp>
-      <p:sp>
-        <p:nvSpPr>
-          <p:cNvPr id="15" name="pos-搬送ロボット・検査AI"/>
+            <a:endParaRPr lang="en-US" sz="800" dirty="0"/>
+          </a:p>
+        </p:txBody>
+      </p:sp>
+      <p:sp>
+        <p:nvSpPr>
+          <p:cNvPr id="15" name="pos-tebiki・Teachme Biz（器）"/>
           <p:cNvSpPr/>
           <p:nvPr/>
         </p:nvSpPr>
         <p:spPr>
           <a:xfrm>
-            <a:off x="978408" y="2251253"/>
-            <a:ext cx="146304" cy="146304"/>
+            <a:off x="860450" y="2157070"/>
+            <a:ext cx="137160" cy="137160"/>
           </a:xfrm>
           <a:prstGeom prst="ellipse">
             <a:avLst/>
@@ -10382,8 +10500,8 @@
         </p:nvSpPr>
         <p:spPr>
           <a:xfrm>
-            <a:off x="1170432" y="2214677"/>
-            <a:ext cx="1463040" cy="219456"/>
+            <a:off x="1034186" y="2125066"/>
+            <a:ext cx="1554480" cy="201168"/>
           </a:xfrm>
           <a:prstGeom prst="rect">
             <a:avLst/>
@@ -10402,7 +10520,7 @@
               <a:buNone/>
             </a:pPr>
             <a:r>
-              <a:rPr lang="en-US" sz="850" dirty="0">
+              <a:rPr lang="en-US" sz="800" dirty="0">
                 <a:solidFill>
                   <a:srgbClr val="1A1A1A"/>
                 </a:solidFill>
@@ -10410,22 +10528,22 @@
                 <a:ea typeface="Meiryo" pitchFamily="34" charset="-122"/>
                 <a:cs typeface="Meiryo" pitchFamily="34" charset="-120"/>
               </a:rPr>
-              <a:t>搬送ロボット・検査AI</a:t>
-            </a:r>
-            <a:endParaRPr lang="en-US" sz="850" dirty="0"/>
-          </a:p>
-        </p:txBody>
-      </p:sp>
-      <p:sp>
-        <p:nvSpPr>
-          <p:cNvPr id="17" name="pos-コンサル（BPR）"/>
+              <a:t>tebiki・Teachme Biz（器）</a:t>
+            </a:r>
+            <a:endParaRPr lang="en-US" sz="800" dirty="0"/>
+          </a:p>
+        </p:txBody>
+      </p:sp>
+      <p:sp>
+        <p:nvSpPr>
+          <p:cNvPr id="17" name="pos-CADDi（組立・図面）"/>
           <p:cNvSpPr/>
           <p:nvPr/>
         </p:nvSpPr>
         <p:spPr>
           <a:xfrm>
-            <a:off x="2660904" y="3436315"/>
-            <a:ext cx="146304" cy="146304"/>
+            <a:off x="2666390" y="1613916"/>
+            <a:ext cx="137160" cy="137160"/>
           </a:xfrm>
           <a:prstGeom prst="ellipse">
             <a:avLst/>
@@ -10449,8 +10567,8 @@
         </p:nvSpPr>
         <p:spPr>
           <a:xfrm>
-            <a:off x="2852928" y="3399739"/>
-            <a:ext cx="1463040" cy="219456"/>
+            <a:off x="2840126" y="1581912"/>
+            <a:ext cx="1554480" cy="201168"/>
           </a:xfrm>
           <a:prstGeom prst="rect">
             <a:avLst/>
@@ -10469,7 +10587,7 @@
               <a:buNone/>
             </a:pPr>
             <a:r>
-              <a:rPr lang="en-US" sz="850" dirty="0">
+              <a:rPr lang="en-US" sz="800" dirty="0">
                 <a:solidFill>
                   <a:srgbClr val="1A1A1A"/>
                 </a:solidFill>
@@ -10477,22 +10595,22 @@
                 <a:ea typeface="Meiryo" pitchFamily="34" charset="-122"/>
                 <a:cs typeface="Meiryo" pitchFamily="34" charset="-120"/>
               </a:rPr>
-              <a:t>コンサル（BPR）</a:t>
-            </a:r>
-            <a:endParaRPr lang="en-US" sz="850" dirty="0"/>
-          </a:p>
-        </p:txBody>
-      </p:sp>
-      <p:sp>
-        <p:nvSpPr>
-          <p:cNvPr id="19" name="pos-社内の熟練者（属人）"/>
+              <a:t>CADDi（組立・図面）</a:t>
+            </a:r>
+            <a:endParaRPr lang="en-US" sz="800" dirty="0"/>
+          </a:p>
+        </p:txBody>
+      </p:sp>
+      <p:sp>
+        <p:nvSpPr>
+          <p:cNvPr id="19" name="pos-Airion（貯めるまで）"/>
           <p:cNvSpPr/>
           <p:nvPr/>
         </p:nvSpPr>
         <p:spPr>
           <a:xfrm>
-            <a:off x="3685032" y="2991917"/>
-            <a:ext cx="146304" cy="146304"/>
+            <a:off x="3099816" y="2255825"/>
+            <a:ext cx="137160" cy="137160"/>
           </a:xfrm>
           <a:prstGeom prst="ellipse">
             <a:avLst/>
@@ -10516,8 +10634,8 @@
         </p:nvSpPr>
         <p:spPr>
           <a:xfrm>
-            <a:off x="2660904" y="3156509"/>
-            <a:ext cx="1280160" cy="219456"/>
+            <a:off x="3273552" y="2223821"/>
+            <a:ext cx="1554480" cy="201168"/>
           </a:xfrm>
           <a:prstGeom prst="rect">
             <a:avLst/>
@@ -10529,6 +10647,73 @@
           <a:bodyPr wrap="square" lIns="0" tIns="0" rIns="0" bIns="0" rtlCol="0" anchor="ctr"/>
           <a:lstStyle/>
           <a:p>
+            <a:pPr algn="l" indent="0" marL="0">
+              <a:lnSpc>
+                <a:spcPct val="115000"/>
+              </a:lnSpc>
+              <a:buNone/>
+            </a:pPr>
+            <a:r>
+              <a:rPr lang="en-US" sz="800" dirty="0">
+                <a:solidFill>
+                  <a:srgbClr val="1A1A1A"/>
+                </a:solidFill>
+                <a:latin typeface="Meiryo" pitchFamily="34" charset="0"/>
+                <a:ea typeface="Meiryo" pitchFamily="34" charset="-122"/>
+                <a:cs typeface="Meiryo" pitchFamily="34" charset="-120"/>
+              </a:rPr>
+              <a:t>Airion（貯めるまで）</a:t>
+            </a:r>
+            <a:endParaRPr lang="en-US" sz="800" dirty="0"/>
+          </a:p>
+        </p:txBody>
+      </p:sp>
+      <p:sp>
+        <p:nvSpPr>
+          <p:cNvPr id="21" name="pos-三現ワークス"/>
+          <p:cNvSpPr/>
+          <p:nvPr/>
+        </p:nvSpPr>
+        <p:spPr>
+          <a:xfrm>
+            <a:off x="3790188" y="1927555"/>
+            <a:ext cx="201168" cy="201168"/>
+          </a:xfrm>
+          <a:prstGeom prst="ellipse">
+            <a:avLst/>
+          </a:prstGeom>
+          <a:solidFill>
+            <a:srgbClr val="1A1A1A"/>
+          </a:solidFill>
+          <a:ln w="15875">
+            <a:solidFill>
+              <a:srgbClr val="1A1A1A"/>
+            </a:solidFill>
+            <a:prstDash val="solid"/>
+          </a:ln>
+        </p:spPr>
+      </p:sp>
+      <p:sp>
+        <p:nvSpPr>
+          <p:cNvPr id="22" name="Text 19"/>
+          <p:cNvSpPr txBox="1"/>
+          <p:nvPr/>
+        </p:nvSpPr>
+        <p:spPr>
+          <a:xfrm>
+            <a:off x="2199132" y="1927555"/>
+            <a:ext cx="1554480" cy="201168"/>
+          </a:xfrm>
+          <a:prstGeom prst="rect">
+            <a:avLst/>
+          </a:prstGeom>
+          <a:noFill/>
+          <a:ln/>
+        </p:spPr>
+        <p:txBody>
+          <a:bodyPr wrap="square" lIns="0" tIns="0" rIns="0" bIns="0" rtlCol="0" anchor="ctr"/>
+          <a:lstStyle/>
+          <a:p>
             <a:pPr algn="r" indent="0" marL="0">
               <a:lnSpc>
                 <a:spcPct val="115000"/>
@@ -10536,7 +10721,7 @@
               <a:buNone/>
             </a:pPr>
             <a:r>
-              <a:rPr lang="en-US" sz="850" dirty="0">
+              <a:rPr lang="en-US" sz="1000" b="1" dirty="0">
                 <a:solidFill>
                   <a:srgbClr val="1A1A1A"/>
                 </a:solidFill>
@@ -10544,22 +10729,22 @@
                 <a:ea typeface="Meiryo" pitchFamily="34" charset="-122"/>
                 <a:cs typeface="Meiryo" pitchFamily="34" charset="-120"/>
               </a:rPr>
-              <a:t>社内の熟練者（属人）</a:t>
-            </a:r>
-            <a:endParaRPr lang="en-US" sz="850" dirty="0"/>
-          </a:p>
-        </p:txBody>
-      </p:sp>
-      <p:sp>
-        <p:nvSpPr>
-          <p:cNvPr id="21" name="pos-大手の内製（＋大手SIer）"/>
+              <a:t>三現ワークス</a:t>
+            </a:r>
+            <a:endParaRPr lang="en-US" sz="1000" dirty="0"/>
+          </a:p>
+        </p:txBody>
+      </p:sp>
+      <p:sp>
+        <p:nvSpPr>
+          <p:cNvPr id="23" name="pos-三菱総研 匠AI"/>
           <p:cNvSpPr/>
           <p:nvPr/>
         </p:nvSpPr>
         <p:spPr>
           <a:xfrm>
-            <a:off x="2880360" y="2251253"/>
-            <a:ext cx="146304" cy="146304"/>
+            <a:off x="2810866" y="3095244"/>
+            <a:ext cx="137160" cy="137160"/>
           </a:xfrm>
           <a:prstGeom prst="ellipse">
             <a:avLst/>
@@ -10577,14 +10762,14 @@
       </p:sp>
       <p:sp>
         <p:nvSpPr>
-          <p:cNvPr id="22" name="Text 19"/>
+          <p:cNvPr id="24" name="Text 21"/>
           <p:cNvSpPr txBox="1"/>
           <p:nvPr/>
         </p:nvSpPr>
         <p:spPr>
           <a:xfrm>
-            <a:off x="3072384" y="2214677"/>
-            <a:ext cx="1463040" cy="219456"/>
+            <a:off x="2984602" y="3063240"/>
+            <a:ext cx="1554480" cy="201168"/>
           </a:xfrm>
           <a:prstGeom prst="rect">
             <a:avLst/>
@@ -10603,7 +10788,7 @@
               <a:buNone/>
             </a:pPr>
             <a:r>
-              <a:rPr lang="en-US" sz="850" dirty="0">
+              <a:rPr lang="en-US" sz="800" dirty="0">
                 <a:solidFill>
                   <a:srgbClr val="1A1A1A"/>
                 </a:solidFill>
@@ -10611,22 +10796,22 @@
                 <a:ea typeface="Meiryo" pitchFamily="34" charset="-122"/>
                 <a:cs typeface="Meiryo" pitchFamily="34" charset="-120"/>
               </a:rPr>
-              <a:t>大手の内製（＋大手SIer）</a:t>
-            </a:r>
-            <a:endParaRPr lang="en-US" sz="850" dirty="0"/>
-          </a:p>
-        </p:txBody>
-      </p:sp>
-      <p:sp>
-        <p:nvSpPr>
-          <p:cNvPr id="23" name="pos-動画マニュアルSaaS"/>
+              <a:t>三菱総研 匠AI</a:t>
+            </a:r>
+            <a:endParaRPr lang="en-US" sz="800" dirty="0"/>
+          </a:p>
+        </p:txBody>
+      </p:sp>
+      <p:sp>
+        <p:nvSpPr>
+          <p:cNvPr id="25" name="pos-社内の熟練者（属人）"/>
           <p:cNvSpPr/>
           <p:nvPr/>
         </p:nvSpPr>
         <p:spPr>
           <a:xfrm>
-            <a:off x="2295144" y="1485900"/>
-            <a:ext cx="146304" cy="146304"/>
+            <a:off x="3677717" y="3539642"/>
+            <a:ext cx="137160" cy="137160"/>
           </a:xfrm>
           <a:prstGeom prst="ellipse">
             <a:avLst/>
@@ -10644,14 +10829,14 @@
       </p:sp>
       <p:sp>
         <p:nvSpPr>
-          <p:cNvPr id="24" name="Text 21"/>
+          <p:cNvPr id="26" name="Text 23"/>
           <p:cNvSpPr txBox="1"/>
           <p:nvPr/>
         </p:nvSpPr>
         <p:spPr>
           <a:xfrm>
-            <a:off x="786384" y="1449324"/>
-            <a:ext cx="1463040" cy="219456"/>
+            <a:off x="2086661" y="3507638"/>
+            <a:ext cx="1554480" cy="201168"/>
           </a:xfrm>
           <a:prstGeom prst="rect">
             <a:avLst/>
@@ -10670,7 +10855,7 @@
               <a:buNone/>
             </a:pPr>
             <a:r>
-              <a:rPr lang="en-US" sz="850" dirty="0">
+              <a:rPr lang="en-US" sz="800" dirty="0">
                 <a:solidFill>
                   <a:srgbClr val="1A1A1A"/>
                 </a:solidFill>
@@ -10678,47 +10863,22 @@
                 <a:ea typeface="Meiryo" pitchFamily="34" charset="-122"/>
                 <a:cs typeface="Meiryo" pitchFamily="34" charset="-120"/>
               </a:rPr>
-              <a:t>動画マニュアルSaaS</a:t>
-            </a:r>
-            <a:endParaRPr lang="en-US" sz="850" dirty="0"/>
-          </a:p>
-        </p:txBody>
-      </p:sp>
-      <p:sp>
-        <p:nvSpPr>
-          <p:cNvPr id="25" name="pos-三現ワークス"/>
-          <p:cNvSpPr/>
-          <p:nvPr/>
-        </p:nvSpPr>
-        <p:spPr>
-          <a:xfrm>
-            <a:off x="3511296" y="1730045"/>
-            <a:ext cx="201168" cy="201168"/>
-          </a:xfrm>
-          <a:prstGeom prst="ellipse">
-            <a:avLst/>
-          </a:prstGeom>
-          <a:solidFill>
-            <a:srgbClr val="1A1A1A"/>
-          </a:solidFill>
-          <a:ln w="15875">
-            <a:solidFill>
-              <a:srgbClr val="1A1A1A"/>
-            </a:solidFill>
-            <a:prstDash val="solid"/>
-          </a:ln>
-        </p:spPr>
-      </p:sp>
-      <p:sp>
-        <p:nvSpPr>
-          <p:cNvPr id="26" name="Text 23"/>
+              <a:t>社内の熟練者（属人）</a:t>
+            </a:r>
+            <a:endParaRPr lang="en-US" sz="800" dirty="0"/>
+          </a:p>
+        </p:txBody>
+      </p:sp>
+      <p:sp>
+        <p:nvSpPr>
+          <p:cNvPr id="27" name="Text 24"/>
           <p:cNvSpPr txBox="1"/>
           <p:nvPr/>
         </p:nvSpPr>
         <p:spPr>
           <a:xfrm>
-            <a:off x="2002536" y="1720901"/>
-            <a:ext cx="1463040" cy="219456"/>
+            <a:off x="4526280" y="1051560"/>
+            <a:ext cx="4251960" cy="237744"/>
           </a:xfrm>
           <a:prstGeom prst="rect">
             <a:avLst/>
@@ -10727,48 +10887,6 @@
           <a:ln/>
         </p:spPr>
         <p:txBody>
-          <a:bodyPr wrap="square" lIns="0" tIns="0" rIns="0" bIns="0" rtlCol="0" anchor="ctr"/>
-          <a:lstStyle/>
-          <a:p>
-            <a:pPr algn="r" indent="0" marL="0">
-              <a:lnSpc>
-                <a:spcPct val="115000"/>
-              </a:lnSpc>
-              <a:buNone/>
-            </a:pPr>
-            <a:r>
-              <a:rPr lang="en-US" sz="1000" b="1" dirty="0">
-                <a:solidFill>
-                  <a:srgbClr val="1A1A1A"/>
-                </a:solidFill>
-                <a:latin typeface="Meiryo" pitchFamily="34" charset="0"/>
-                <a:ea typeface="Meiryo" pitchFamily="34" charset="-122"/>
-                <a:cs typeface="Meiryo" pitchFamily="34" charset="-120"/>
-              </a:rPr>
-              <a:t>三現ワークス</a:t>
-            </a:r>
-            <a:endParaRPr lang="en-US" sz="1000" dirty="0"/>
-          </a:p>
-        </p:txBody>
-      </p:sp>
-      <p:sp>
-        <p:nvSpPr>
-          <p:cNvPr id="27" name="Text 24"/>
-          <p:cNvSpPr txBox="1"/>
-          <p:nvPr/>
-        </p:nvSpPr>
-        <p:spPr>
-          <a:xfrm>
-            <a:off x="4617720" y="1051560"/>
-            <a:ext cx="4160520" cy="237744"/>
-          </a:xfrm>
-          <a:prstGeom prst="rect">
-            <a:avLst/>
-          </a:prstGeom>
-          <a:noFill/>
-          <a:ln/>
-        </p:spPr>
-        <p:txBody>
           <a:bodyPr wrap="square" lIns="0" tIns="0" rIns="0" bIns="0" rtlCol="0" anchor="t"/>
           <a:lstStyle/>
           <a:p>
@@ -10787,790 +10905,1492 @@
                 <a:ea typeface="Meiryo" pitchFamily="34" charset="-122"/>
                 <a:cs typeface="Meiryo" pitchFamily="34" charset="-120"/>
               </a:rPr>
-              <a:t>内製化の先行事例（公開情報）</a:t>
+              <a:t>貯める（記録・構造化）と、渡す（教材にして届ける）</a:t>
             </a:r>
             <a:endParaRPr lang="en-US" sz="1050" dirty="0"/>
           </a:p>
         </p:txBody>
       </p:sp>
-      <p:sp>
-        <p:nvSpPr>
-          <p:cNvPr id="28" name="Shape 25"/>
+      <p:graphicFrame>
+        <p:nvGraphicFramePr>
+          <p:cNvPr id="6" name="store-handoff"/>
+          <p:cNvGraphicFramePr>
+            <a:graphicFrameLocks noGrp="1"/>
+          </p:cNvGraphicFramePr>
+          <p:nvPr>
+            <p:extLst>
+              <p:ext uri="{D42A27DB-BD31-4B8C-83A1-F6EECF244321}">
+                <p14:modId xmlns:p14="http://schemas.microsoft.com/office/powerpoint/2010/main" val="1579011935"/>
+              </p:ext>
+            </p:extLst>
+          </p:nvPr>
+        </p:nvGraphicFramePr>
+        <p:xfrm>
+          <a:off x="4526280" y="1325880"/>
+          <a:ext cx="4251960" cy="914400"/>
+        </p:xfrm>
+        <a:graphic>
+          <a:graphicData uri="http://schemas.openxmlformats.org/drawingml/2006/table">
+            <a:tbl>
+              <a:tblPr/>
+              <a:tblGrid>
+                <a:gridCol w="1371600"/>
+                <a:gridCol w="1005840"/>
+                <a:gridCol w="1005840"/>
+                <a:gridCol w="868680"/>
+              </a:tblGrid>
+              <a:tr h="246888">
+                <a:tc>
+                  <a:txBody>
+                    <a:bodyPr/>
+                    <a:lstStyle/>
+                    <a:p>
+                      <a:pPr algn="l" indent="0" marL="0">
+                        <a:buNone/>
+                      </a:pPr>
+                      <a:r>
+                        <a:rPr lang="en-US" sz="800" b="1" dirty="0">
+                          <a:solidFill>
+                            <a:srgbClr val="1A1A1A"/>
+                          </a:solidFill>
+                          <a:latin typeface="Meiryo" pitchFamily="34" charset="0"/>
+                          <a:ea typeface="Meiryo" pitchFamily="34" charset="-122"/>
+                          <a:cs typeface="Meiryo" pitchFamily="34" charset="-120"/>
+                        </a:rPr>
+                        <a:t>会社・サービス</a:t>
+                      </a:r>
+                      <a:endParaRPr lang="en-US" sz="800" dirty="0">
+                        <a:latin typeface="Meiryo" charset="0"/>
+                        <a:ea typeface="Meiryo" charset="0"/>
+                        <a:cs typeface="Meiryo" charset="0"/>
+                      </a:endParaRPr>
+                    </a:p>
+                  </a:txBody>
+                  <a:tcPr marL="54864" marR="54864" marT="18288" marB="18288" anchor="ctr">
+                    <a:lnL w="0" cap="flat" cmpd="sng" algn="ctr">
+                      <a:noFill/>
+                    </a:lnL>
+                    <a:lnR w="0" cap="flat" cmpd="sng" algn="ctr">
+                      <a:noFill/>
+                    </a:lnR>
+                    <a:lnT w="0" cap="flat" cmpd="sng" algn="ctr">
+                      <a:noFill/>
+                    </a:lnT>
+                    <a:lnB w="19050" cap="flat" cmpd="sng" algn="ctr">
+                      <a:solidFill>
+                        <a:srgbClr val="1A1A1A"/>
+                      </a:solidFill>
+                      <a:prstDash val="solid"/>
+                      <a:round/>
+                      <a:headEnd type="none" w="med" len="med"/>
+                      <a:tailEnd type="none" w="med" len="med"/>
+                    </a:lnB>
+                    <a:solidFill>
+                      <a:srgbClr val="F2F2F2"/>
+                    </a:solidFill>
+                  </a:tcPr>
+                </a:tc>
+                <a:tc>
+                  <a:txBody>
+                    <a:bodyPr/>
+                    <a:lstStyle/>
+                    <a:p>
+                      <a:pPr algn="l" indent="0" marL="0">
+                        <a:buNone/>
+                      </a:pPr>
+                      <a:r>
+                        <a:rPr lang="en-US" sz="800" b="1" dirty="0">
+                          <a:solidFill>
+                            <a:srgbClr val="1A1A1A"/>
+                          </a:solidFill>
+                          <a:latin typeface="Meiryo" pitchFamily="34" charset="0"/>
+                          <a:ea typeface="Meiryo" pitchFamily="34" charset="-122"/>
+                          <a:cs typeface="Meiryo" pitchFamily="34" charset="-120"/>
+                        </a:rPr>
+                        <a:t>貯める</a:t>
+                      </a:r>
+                      <a:endParaRPr lang="en-US" sz="800" dirty="0">
+                        <a:latin typeface="Meiryo" charset="0"/>
+                        <a:ea typeface="Meiryo" charset="0"/>
+                        <a:cs typeface="Meiryo" charset="0"/>
+                      </a:endParaRPr>
+                    </a:p>
+                  </a:txBody>
+                  <a:tcPr marL="54864" marR="54864" marT="18288" marB="18288" anchor="ctr">
+                    <a:lnL w="0" cap="flat" cmpd="sng" algn="ctr">
+                      <a:noFill/>
+                    </a:lnL>
+                    <a:lnR w="0" cap="flat" cmpd="sng" algn="ctr">
+                      <a:noFill/>
+                    </a:lnR>
+                    <a:lnT w="0" cap="flat" cmpd="sng" algn="ctr">
+                      <a:noFill/>
+                    </a:lnT>
+                    <a:lnB w="19050" cap="flat" cmpd="sng" algn="ctr">
+                      <a:solidFill>
+                        <a:srgbClr val="1A1A1A"/>
+                      </a:solidFill>
+                      <a:prstDash val="solid"/>
+                      <a:round/>
+                      <a:headEnd type="none" w="med" len="med"/>
+                      <a:tailEnd type="none" w="med" len="med"/>
+                    </a:lnB>
+                    <a:solidFill>
+                      <a:srgbClr val="F2F2F2"/>
+                    </a:solidFill>
+                  </a:tcPr>
+                </a:tc>
+                <a:tc>
+                  <a:txBody>
+                    <a:bodyPr/>
+                    <a:lstStyle/>
+                    <a:p>
+                      <a:pPr algn="l" indent="0" marL="0">
+                        <a:buNone/>
+                      </a:pPr>
+                      <a:r>
+                        <a:rPr lang="en-US" sz="800" b="1" dirty="0">
+                          <a:solidFill>
+                            <a:srgbClr val="1A1A1A"/>
+                          </a:solidFill>
+                          <a:latin typeface="Meiryo" pitchFamily="34" charset="0"/>
+                          <a:ea typeface="Meiryo" pitchFamily="34" charset="-122"/>
+                          <a:cs typeface="Meiryo" pitchFamily="34" charset="-120"/>
+                        </a:rPr>
+                        <a:t>渡す</a:t>
+                      </a:r>
+                      <a:endParaRPr lang="en-US" sz="800" dirty="0">
+                        <a:latin typeface="Meiryo" charset="0"/>
+                        <a:ea typeface="Meiryo" charset="0"/>
+                        <a:cs typeface="Meiryo" charset="0"/>
+                      </a:endParaRPr>
+                    </a:p>
+                  </a:txBody>
+                  <a:tcPr marL="54864" marR="54864" marT="18288" marB="18288" anchor="ctr">
+                    <a:lnL w="0" cap="flat" cmpd="sng" algn="ctr">
+                      <a:noFill/>
+                    </a:lnL>
+                    <a:lnR w="0" cap="flat" cmpd="sng" algn="ctr">
+                      <a:noFill/>
+                    </a:lnR>
+                    <a:lnT w="0" cap="flat" cmpd="sng" algn="ctr">
+                      <a:noFill/>
+                    </a:lnT>
+                    <a:lnB w="19050" cap="flat" cmpd="sng" algn="ctr">
+                      <a:solidFill>
+                        <a:srgbClr val="1A1A1A"/>
+                      </a:solidFill>
+                      <a:prstDash val="solid"/>
+                      <a:round/>
+                      <a:headEnd type="none" w="med" len="med"/>
+                      <a:tailEnd type="none" w="med" len="med"/>
+                    </a:lnB>
+                    <a:solidFill>
+                      <a:srgbClr val="F2F2F2"/>
+                    </a:solidFill>
+                  </a:tcPr>
+                </a:tc>
+                <a:tc>
+                  <a:txBody>
+                    <a:bodyPr/>
+                    <a:lstStyle/>
+                    <a:p>
+                      <a:pPr algn="l" indent="0" marL="0">
+                        <a:buNone/>
+                      </a:pPr>
+                      <a:r>
+                        <a:rPr lang="en-US" sz="800" b="1" dirty="0">
+                          <a:solidFill>
+                            <a:srgbClr val="1A1A1A"/>
+                          </a:solidFill>
+                          <a:latin typeface="Meiryo" pitchFamily="34" charset="0"/>
+                          <a:ea typeface="Meiryo" pitchFamily="34" charset="-122"/>
+                          <a:cs typeface="Meiryo" pitchFamily="34" charset="-120"/>
+                        </a:rPr>
+                        <a:t>対象</a:t>
+                      </a:r>
+                      <a:endParaRPr lang="en-US" sz="800" dirty="0">
+                        <a:latin typeface="Meiryo" charset="0"/>
+                        <a:ea typeface="Meiryo" charset="0"/>
+                        <a:cs typeface="Meiryo" charset="0"/>
+                      </a:endParaRPr>
+                    </a:p>
+                  </a:txBody>
+                  <a:tcPr marL="54864" marR="54864" marT="18288" marB="18288" anchor="ctr">
+                    <a:lnL w="0" cap="flat" cmpd="sng" algn="ctr">
+                      <a:noFill/>
+                    </a:lnL>
+                    <a:lnR w="0" cap="flat" cmpd="sng" algn="ctr">
+                      <a:noFill/>
+                    </a:lnR>
+                    <a:lnT w="0" cap="flat" cmpd="sng" algn="ctr">
+                      <a:noFill/>
+                    </a:lnT>
+                    <a:lnB w="19050" cap="flat" cmpd="sng" algn="ctr">
+                      <a:solidFill>
+                        <a:srgbClr val="1A1A1A"/>
+                      </a:solidFill>
+                      <a:prstDash val="solid"/>
+                      <a:round/>
+                      <a:headEnd type="none" w="med" len="med"/>
+                      <a:tailEnd type="none" w="med" len="med"/>
+                    </a:lnB>
+                    <a:solidFill>
+                      <a:srgbClr val="F2F2F2"/>
+                    </a:solidFill>
+                  </a:tcPr>
+                </a:tc>
+              </a:tr>
+              <a:tr h="246888">
+                <a:tc>
+                  <a:txBody>
+                    <a:bodyPr/>
+                    <a:lstStyle/>
+                    <a:p>
+                      <a:pPr algn="l" indent="0" marL="0">
+                        <a:buNone/>
+                      </a:pPr>
+                      <a:r>
+                        <a:rPr lang="en-US" sz="800" dirty="0">
+                          <a:solidFill>
+                            <a:srgbClr val="1A1A1A"/>
+                          </a:solidFill>
+                          <a:latin typeface="Meiryo" pitchFamily="34" charset="0"/>
+                          <a:ea typeface="Meiryo" pitchFamily="34" charset="-122"/>
+                          <a:cs typeface="Meiryo" pitchFamily="34" charset="-120"/>
+                        </a:rPr>
+                        <a:t>Airion 技能継承くん</a:t>
+                      </a:r>
+                      <a:endParaRPr lang="en-US" sz="800" dirty="0">
+                        <a:latin typeface="Meiryo" charset="0"/>
+                        <a:ea typeface="Meiryo" charset="0"/>
+                        <a:cs typeface="Meiryo" charset="0"/>
+                      </a:endParaRPr>
+                    </a:p>
+                  </a:txBody>
+                  <a:tcPr marL="54864" marR="54864" marT="18288" marB="18288" anchor="ctr">
+                    <a:lnL w="0" cap="flat" cmpd="sng" algn="ctr">
+                      <a:noFill/>
+                    </a:lnL>
+                    <a:lnR w="0" cap="flat" cmpd="sng" algn="ctr">
+                      <a:noFill/>
+                    </a:lnR>
+                    <a:lnT w="0" cap="flat" cmpd="sng" algn="ctr">
+                      <a:noFill/>
+                    </a:lnT>
+                    <a:lnB w="9525" cap="flat" cmpd="sng" algn="ctr">
+                      <a:solidFill>
+                        <a:srgbClr val="BFBFBF"/>
+                      </a:solidFill>
+                      <a:prstDash val="solid"/>
+                      <a:round/>
+                      <a:headEnd type="none" w="med" len="med"/>
+                      <a:tailEnd type="none" w="med" len="med"/>
+                    </a:lnB>
+                    <a:solidFill>
+                      <a:srgbClr val="FFFFFF"/>
+                    </a:solidFill>
+                  </a:tcPr>
+                </a:tc>
+                <a:tc>
+                  <a:txBody>
+                    <a:bodyPr/>
+                    <a:lstStyle/>
+                    <a:p>
+                      <a:pPr algn="l" indent="0" marL="0">
+                        <a:buNone/>
+                      </a:pPr>
+                      <a:r>
+                        <a:rPr lang="en-US" sz="800" dirty="0">
+                          <a:solidFill>
+                            <a:srgbClr val="1A1A1A"/>
+                          </a:solidFill>
+                          <a:latin typeface="Meiryo" pitchFamily="34" charset="0"/>
+                          <a:ea typeface="Meiryo" pitchFamily="34" charset="-122"/>
+                          <a:cs typeface="Meiryo" pitchFamily="34" charset="-120"/>
+                        </a:rPr>
+                        <a:t>○ AI対話</a:t>
+                      </a:r>
+                      <a:endParaRPr lang="en-US" sz="800" dirty="0">
+                        <a:latin typeface="Meiryo" charset="0"/>
+                        <a:ea typeface="Meiryo" charset="0"/>
+                        <a:cs typeface="Meiryo" charset="0"/>
+                      </a:endParaRPr>
+                    </a:p>
+                  </a:txBody>
+                  <a:tcPr marL="54864" marR="54864" marT="18288" marB="18288" anchor="ctr">
+                    <a:lnL w="0" cap="flat" cmpd="sng" algn="ctr">
+                      <a:noFill/>
+                    </a:lnL>
+                    <a:lnR w="0" cap="flat" cmpd="sng" algn="ctr">
+                      <a:noFill/>
+                    </a:lnR>
+                    <a:lnT w="0" cap="flat" cmpd="sng" algn="ctr">
+                      <a:noFill/>
+                    </a:lnT>
+                    <a:lnB w="9525" cap="flat" cmpd="sng" algn="ctr">
+                      <a:solidFill>
+                        <a:srgbClr val="BFBFBF"/>
+                      </a:solidFill>
+                      <a:prstDash val="solid"/>
+                      <a:round/>
+                      <a:headEnd type="none" w="med" len="med"/>
+                      <a:tailEnd type="none" w="med" len="med"/>
+                    </a:lnB>
+                    <a:solidFill>
+                      <a:srgbClr val="FFFFFF"/>
+                    </a:solidFill>
+                  </a:tcPr>
+                </a:tc>
+                <a:tc>
+                  <a:txBody>
+                    <a:bodyPr/>
+                    <a:lstStyle/>
+                    <a:p>
+                      <a:pPr algn="l" indent="0" marL="0">
+                        <a:buNone/>
+                      </a:pPr>
+                      <a:r>
+                        <a:rPr lang="en-US" sz="800" dirty="0">
+                          <a:solidFill>
+                            <a:srgbClr val="1A1A1A"/>
+                          </a:solidFill>
+                          <a:latin typeface="Meiryo" pitchFamily="34" charset="0"/>
+                          <a:ea typeface="Meiryo" pitchFamily="34" charset="-122"/>
+                          <a:cs typeface="Meiryo" pitchFamily="34" charset="-120"/>
+                        </a:rPr>
+                        <a:t>× 顧客任せ</a:t>
+                      </a:r>
+                      <a:endParaRPr lang="en-US" sz="800" dirty="0">
+                        <a:latin typeface="Meiryo" charset="0"/>
+                        <a:ea typeface="Meiryo" charset="0"/>
+                        <a:cs typeface="Meiryo" charset="0"/>
+                      </a:endParaRPr>
+                    </a:p>
+                  </a:txBody>
+                  <a:tcPr marL="54864" marR="54864" marT="18288" marB="18288" anchor="ctr">
+                    <a:lnL w="0" cap="flat" cmpd="sng" algn="ctr">
+                      <a:noFill/>
+                    </a:lnL>
+                    <a:lnR w="0" cap="flat" cmpd="sng" algn="ctr">
+                      <a:noFill/>
+                    </a:lnR>
+                    <a:lnT w="0" cap="flat" cmpd="sng" algn="ctr">
+                      <a:noFill/>
+                    </a:lnT>
+                    <a:lnB w="9525" cap="flat" cmpd="sng" algn="ctr">
+                      <a:solidFill>
+                        <a:srgbClr val="BFBFBF"/>
+                      </a:solidFill>
+                      <a:prstDash val="solid"/>
+                      <a:round/>
+                      <a:headEnd type="none" w="med" len="med"/>
+                      <a:tailEnd type="none" w="med" len="med"/>
+                    </a:lnB>
+                    <a:solidFill>
+                      <a:srgbClr val="FFFFFF"/>
+                    </a:solidFill>
+                  </a:tcPr>
+                </a:tc>
+                <a:tc>
+                  <a:txBody>
+                    <a:bodyPr/>
+                    <a:lstStyle/>
+                    <a:p>
+                      <a:pPr algn="l" indent="0" marL="0">
+                        <a:buNone/>
+                      </a:pPr>
+                      <a:r>
+                        <a:rPr lang="en-US" sz="800" dirty="0">
+                          <a:solidFill>
+                            <a:srgbClr val="1A1A1A"/>
+                          </a:solidFill>
+                          <a:latin typeface="Meiryo" pitchFamily="34" charset="0"/>
+                          <a:ea typeface="Meiryo" pitchFamily="34" charset="-122"/>
+                          <a:cs typeface="Meiryo" pitchFamily="34" charset="-120"/>
+                        </a:rPr>
+                        <a:t>業種横断</a:t>
+                      </a:r>
+                      <a:endParaRPr lang="en-US" sz="800" dirty="0">
+                        <a:latin typeface="Meiryo" charset="0"/>
+                        <a:ea typeface="Meiryo" charset="0"/>
+                        <a:cs typeface="Meiryo" charset="0"/>
+                      </a:endParaRPr>
+                    </a:p>
+                  </a:txBody>
+                  <a:tcPr marL="54864" marR="54864" marT="18288" marB="18288" anchor="ctr">
+                    <a:lnL w="0" cap="flat" cmpd="sng" algn="ctr">
+                      <a:noFill/>
+                    </a:lnL>
+                    <a:lnR w="0" cap="flat" cmpd="sng" algn="ctr">
+                      <a:noFill/>
+                    </a:lnR>
+                    <a:lnT w="0" cap="flat" cmpd="sng" algn="ctr">
+                      <a:noFill/>
+                    </a:lnT>
+                    <a:lnB w="9525" cap="flat" cmpd="sng" algn="ctr">
+                      <a:solidFill>
+                        <a:srgbClr val="BFBFBF"/>
+                      </a:solidFill>
+                      <a:prstDash val="solid"/>
+                      <a:round/>
+                      <a:headEnd type="none" w="med" len="med"/>
+                      <a:tailEnd type="none" w="med" len="med"/>
+                    </a:lnB>
+                    <a:solidFill>
+                      <a:srgbClr val="FFFFFF"/>
+                    </a:solidFill>
+                  </a:tcPr>
+                </a:tc>
+              </a:tr>
+              <a:tr h="246888">
+                <a:tc>
+                  <a:txBody>
+                    <a:bodyPr/>
+                    <a:lstStyle/>
+                    <a:p>
+                      <a:pPr algn="l" indent="0" marL="0">
+                        <a:buNone/>
+                      </a:pPr>
+                      <a:r>
+                        <a:rPr lang="en-US" sz="800" dirty="0">
+                          <a:solidFill>
+                            <a:srgbClr val="1A1A1A"/>
+                          </a:solidFill>
+                          <a:latin typeface="Meiryo" pitchFamily="34" charset="0"/>
+                          <a:ea typeface="Meiryo" pitchFamily="34" charset="-122"/>
+                          <a:cs typeface="Meiryo" pitchFamily="34" charset="-120"/>
+                        </a:rPr>
+                        <a:t>キャディ CADDi</a:t>
+                      </a:r>
+                      <a:endParaRPr lang="en-US" sz="800" dirty="0">
+                        <a:latin typeface="Meiryo" charset="0"/>
+                        <a:ea typeface="Meiryo" charset="0"/>
+                        <a:cs typeface="Meiryo" charset="0"/>
+                      </a:endParaRPr>
+                    </a:p>
+                  </a:txBody>
+                  <a:tcPr marL="54864" marR="54864" marT="18288" marB="18288" anchor="ctr">
+                    <a:lnL w="0" cap="flat" cmpd="sng" algn="ctr">
+                      <a:noFill/>
+                    </a:lnL>
+                    <a:lnR w="0" cap="flat" cmpd="sng" algn="ctr">
+                      <a:noFill/>
+                    </a:lnR>
+                    <a:lnT w="0" cap="flat" cmpd="sng" algn="ctr">
+                      <a:noFill/>
+                    </a:lnT>
+                    <a:lnB w="9525" cap="flat" cmpd="sng" algn="ctr">
+                      <a:solidFill>
+                        <a:srgbClr val="BFBFBF"/>
+                      </a:solidFill>
+                      <a:prstDash val="solid"/>
+                      <a:round/>
+                      <a:headEnd type="none" w="med" len="med"/>
+                      <a:tailEnd type="none" w="med" len="med"/>
+                    </a:lnB>
+                    <a:solidFill>
+                      <a:srgbClr val="FFFFFF"/>
+                    </a:solidFill>
+                  </a:tcPr>
+                </a:tc>
+                <a:tc>
+                  <a:txBody>
+                    <a:bodyPr/>
+                    <a:lstStyle/>
+                    <a:p>
+                      <a:pPr algn="l" indent="0" marL="0">
+                        <a:buNone/>
+                      </a:pPr>
+                      <a:r>
+                        <a:rPr lang="en-US" sz="800" dirty="0">
+                          <a:solidFill>
+                            <a:srgbClr val="1A1A1A"/>
+                          </a:solidFill>
+                          <a:latin typeface="Meiryo" pitchFamily="34" charset="0"/>
+                          <a:ea typeface="Meiryo" pitchFamily="34" charset="-122"/>
+                          <a:cs typeface="Meiryo" pitchFamily="34" charset="-120"/>
+                        </a:rPr>
+                        <a:t>○ 判断履歴</a:t>
+                      </a:r>
+                      <a:endParaRPr lang="en-US" sz="800" dirty="0">
+                        <a:latin typeface="Meiryo" charset="0"/>
+                        <a:ea typeface="Meiryo" charset="0"/>
+                        <a:cs typeface="Meiryo" charset="0"/>
+                      </a:endParaRPr>
+                    </a:p>
+                  </a:txBody>
+                  <a:tcPr marL="54864" marR="54864" marT="18288" marB="18288" anchor="ctr">
+                    <a:lnL w="0" cap="flat" cmpd="sng" algn="ctr">
+                      <a:noFill/>
+                    </a:lnL>
+                    <a:lnR w="0" cap="flat" cmpd="sng" algn="ctr">
+                      <a:noFill/>
+                    </a:lnR>
+                    <a:lnT w="0" cap="flat" cmpd="sng" algn="ctr">
+                      <a:noFill/>
+                    </a:lnT>
+                    <a:lnB w="9525" cap="flat" cmpd="sng" algn="ctr">
+                      <a:solidFill>
+                        <a:srgbClr val="BFBFBF"/>
+                      </a:solidFill>
+                      <a:prstDash val="solid"/>
+                      <a:round/>
+                      <a:headEnd type="none" w="med" len="med"/>
+                      <a:tailEnd type="none" w="med" len="med"/>
+                    </a:lnB>
+                    <a:solidFill>
+                      <a:srgbClr val="FFFFFF"/>
+                    </a:solidFill>
+                  </a:tcPr>
+                </a:tc>
+                <a:tc>
+                  <a:txBody>
+                    <a:bodyPr/>
+                    <a:lstStyle/>
+                    <a:p>
+                      <a:pPr algn="l" indent="0" marL="0">
+                        <a:buNone/>
+                      </a:pPr>
+                      <a:r>
+                        <a:rPr lang="en-US" sz="800" dirty="0">
+                          <a:solidFill>
+                            <a:srgbClr val="1A1A1A"/>
+                          </a:solidFill>
+                          <a:latin typeface="Meiryo" pitchFamily="34" charset="0"/>
+                          <a:ea typeface="Meiryo" pitchFamily="34" charset="-122"/>
+                          <a:cs typeface="Meiryo" pitchFamily="34" charset="-120"/>
+                        </a:rPr>
+                        <a:t>×</a:t>
+                      </a:r>
+                      <a:endParaRPr lang="en-US" sz="800" dirty="0">
+                        <a:latin typeface="Meiryo" charset="0"/>
+                        <a:ea typeface="Meiryo" charset="0"/>
+                        <a:cs typeface="Meiryo" charset="0"/>
+                      </a:endParaRPr>
+                    </a:p>
+                  </a:txBody>
+                  <a:tcPr marL="54864" marR="54864" marT="18288" marB="18288" anchor="ctr">
+                    <a:lnL w="0" cap="flat" cmpd="sng" algn="ctr">
+                      <a:noFill/>
+                    </a:lnL>
+                    <a:lnR w="0" cap="flat" cmpd="sng" algn="ctr">
+                      <a:noFill/>
+                    </a:lnR>
+                    <a:lnT w="0" cap="flat" cmpd="sng" algn="ctr">
+                      <a:noFill/>
+                    </a:lnT>
+                    <a:lnB w="9525" cap="flat" cmpd="sng" algn="ctr">
+                      <a:solidFill>
+                        <a:srgbClr val="BFBFBF"/>
+                      </a:solidFill>
+                      <a:prstDash val="solid"/>
+                      <a:round/>
+                      <a:headEnd type="none" w="med" len="med"/>
+                      <a:tailEnd type="none" w="med" len="med"/>
+                    </a:lnB>
+                    <a:solidFill>
+                      <a:srgbClr val="FFFFFF"/>
+                    </a:solidFill>
+                  </a:tcPr>
+                </a:tc>
+                <a:tc>
+                  <a:txBody>
+                    <a:bodyPr/>
+                    <a:lstStyle/>
+                    <a:p>
+                      <a:pPr algn="l" indent="0" marL="0">
+                        <a:buNone/>
+                      </a:pPr>
+                      <a:r>
+                        <a:rPr lang="en-US" sz="800" dirty="0">
+                          <a:solidFill>
+                            <a:srgbClr val="1A1A1A"/>
+                          </a:solidFill>
+                          <a:latin typeface="Meiryo" pitchFamily="34" charset="0"/>
+                          <a:ea typeface="Meiryo" pitchFamily="34" charset="-122"/>
+                          <a:cs typeface="Meiryo" pitchFamily="34" charset="-120"/>
+                        </a:rPr>
+                        <a:t>組立・図面</a:t>
+                      </a:r>
+                      <a:endParaRPr lang="en-US" sz="800" dirty="0">
+                        <a:latin typeface="Meiryo" charset="0"/>
+                        <a:ea typeface="Meiryo" charset="0"/>
+                        <a:cs typeface="Meiryo" charset="0"/>
+                      </a:endParaRPr>
+                    </a:p>
+                  </a:txBody>
+                  <a:tcPr marL="54864" marR="54864" marT="18288" marB="18288" anchor="ctr">
+                    <a:lnL w="0" cap="flat" cmpd="sng" algn="ctr">
+                      <a:noFill/>
+                    </a:lnL>
+                    <a:lnR w="0" cap="flat" cmpd="sng" algn="ctr">
+                      <a:noFill/>
+                    </a:lnR>
+                    <a:lnT w="0" cap="flat" cmpd="sng" algn="ctr">
+                      <a:noFill/>
+                    </a:lnT>
+                    <a:lnB w="9525" cap="flat" cmpd="sng" algn="ctr">
+                      <a:solidFill>
+                        <a:srgbClr val="BFBFBF"/>
+                      </a:solidFill>
+                      <a:prstDash val="solid"/>
+                      <a:round/>
+                      <a:headEnd type="none" w="med" len="med"/>
+                      <a:tailEnd type="none" w="med" len="med"/>
+                    </a:lnB>
+                    <a:solidFill>
+                      <a:srgbClr val="FFFFFF"/>
+                    </a:solidFill>
+                  </a:tcPr>
+                </a:tc>
+              </a:tr>
+              <a:tr h="246888">
+                <a:tc>
+                  <a:txBody>
+                    <a:bodyPr/>
+                    <a:lstStyle/>
+                    <a:p>
+                      <a:pPr algn="l" indent="0" marL="0">
+                        <a:buNone/>
+                      </a:pPr>
+                      <a:r>
+                        <a:rPr lang="en-US" sz="800" dirty="0">
+                          <a:solidFill>
+                            <a:srgbClr val="1A1A1A"/>
+                          </a:solidFill>
+                          <a:latin typeface="Meiryo" pitchFamily="34" charset="0"/>
+                          <a:ea typeface="Meiryo" pitchFamily="34" charset="-122"/>
+                          <a:cs typeface="Meiryo" pitchFamily="34" charset="-120"/>
+                        </a:rPr>
+                        <a:t>三菱総研 匠AI</a:t>
+                      </a:r>
+                      <a:endParaRPr lang="en-US" sz="800" dirty="0">
+                        <a:latin typeface="Meiryo" charset="0"/>
+                        <a:ea typeface="Meiryo" charset="0"/>
+                        <a:cs typeface="Meiryo" charset="0"/>
+                      </a:endParaRPr>
+                    </a:p>
+                  </a:txBody>
+                  <a:tcPr marL="54864" marR="54864" marT="18288" marB="18288" anchor="ctr">
+                    <a:lnL w="0" cap="flat" cmpd="sng" algn="ctr">
+                      <a:noFill/>
+                    </a:lnL>
+                    <a:lnR w="0" cap="flat" cmpd="sng" algn="ctr">
+                      <a:noFill/>
+                    </a:lnR>
+                    <a:lnT w="0" cap="flat" cmpd="sng" algn="ctr">
+                      <a:noFill/>
+                    </a:lnT>
+                    <a:lnB w="9525" cap="flat" cmpd="sng" algn="ctr">
+                      <a:solidFill>
+                        <a:srgbClr val="BFBFBF"/>
+                      </a:solidFill>
+                      <a:prstDash val="solid"/>
+                      <a:round/>
+                      <a:headEnd type="none" w="med" len="med"/>
+                      <a:tailEnd type="none" w="med" len="med"/>
+                    </a:lnB>
+                    <a:solidFill>
+                      <a:srgbClr val="FFFFFF"/>
+                    </a:solidFill>
+                  </a:tcPr>
+                </a:tc>
+                <a:tc>
+                  <a:txBody>
+                    <a:bodyPr/>
+                    <a:lstStyle/>
+                    <a:p>
+                      <a:pPr algn="l" indent="0" marL="0">
+                        <a:buNone/>
+                      </a:pPr>
+                      <a:r>
+                        <a:rPr lang="en-US" sz="800" dirty="0">
+                          <a:solidFill>
+                            <a:srgbClr val="1A1A1A"/>
+                          </a:solidFill>
+                          <a:latin typeface="Meiryo" pitchFamily="34" charset="0"/>
+                          <a:ea typeface="Meiryo" pitchFamily="34" charset="-122"/>
+                          <a:cs typeface="Meiryo" pitchFamily="34" charset="-120"/>
+                        </a:rPr>
+                        <a:t>○ コンサル型</a:t>
+                      </a:r>
+                      <a:endParaRPr lang="en-US" sz="800" dirty="0">
+                        <a:latin typeface="Meiryo" charset="0"/>
+                        <a:ea typeface="Meiryo" charset="0"/>
+                        <a:cs typeface="Meiryo" charset="0"/>
+                      </a:endParaRPr>
+                    </a:p>
+                  </a:txBody>
+                  <a:tcPr marL="54864" marR="54864" marT="18288" marB="18288" anchor="ctr">
+                    <a:lnL w="0" cap="flat" cmpd="sng" algn="ctr">
+                      <a:noFill/>
+                    </a:lnL>
+                    <a:lnR w="0" cap="flat" cmpd="sng" algn="ctr">
+                      <a:noFill/>
+                    </a:lnR>
+                    <a:lnT w="0" cap="flat" cmpd="sng" algn="ctr">
+                      <a:noFill/>
+                    </a:lnT>
+                    <a:lnB w="9525" cap="flat" cmpd="sng" algn="ctr">
+                      <a:solidFill>
+                        <a:srgbClr val="BFBFBF"/>
+                      </a:solidFill>
+                      <a:prstDash val="solid"/>
+                      <a:round/>
+                      <a:headEnd type="none" w="med" len="med"/>
+                      <a:tailEnd type="none" w="med" len="med"/>
+                    </a:lnB>
+                    <a:solidFill>
+                      <a:srgbClr val="FFFFFF"/>
+                    </a:solidFill>
+                  </a:tcPr>
+                </a:tc>
+                <a:tc>
+                  <a:txBody>
+                    <a:bodyPr/>
+                    <a:lstStyle/>
+                    <a:p>
+                      <a:pPr algn="l" indent="0" marL="0">
+                        <a:buNone/>
+                      </a:pPr>
+                      <a:r>
+                        <a:rPr lang="en-US" sz="800" dirty="0">
+                          <a:solidFill>
+                            <a:srgbClr val="1A1A1A"/>
+                          </a:solidFill>
+                          <a:latin typeface="Meiryo" pitchFamily="34" charset="0"/>
+                          <a:ea typeface="Meiryo" pitchFamily="34" charset="-122"/>
+                          <a:cs typeface="Meiryo" pitchFamily="34" charset="-120"/>
+                        </a:rPr>
+                        <a:t>×</a:t>
+                      </a:r>
+                      <a:endParaRPr lang="en-US" sz="800" dirty="0">
+                        <a:latin typeface="Meiryo" charset="0"/>
+                        <a:ea typeface="Meiryo" charset="0"/>
+                        <a:cs typeface="Meiryo" charset="0"/>
+                      </a:endParaRPr>
+                    </a:p>
+                  </a:txBody>
+                  <a:tcPr marL="54864" marR="54864" marT="18288" marB="18288" anchor="ctr">
+                    <a:lnL w="0" cap="flat" cmpd="sng" algn="ctr">
+                      <a:noFill/>
+                    </a:lnL>
+                    <a:lnR w="0" cap="flat" cmpd="sng" algn="ctr">
+                      <a:noFill/>
+                    </a:lnR>
+                    <a:lnT w="0" cap="flat" cmpd="sng" algn="ctr">
+                      <a:noFill/>
+                    </a:lnT>
+                    <a:lnB w="9525" cap="flat" cmpd="sng" algn="ctr">
+                      <a:solidFill>
+                        <a:srgbClr val="BFBFBF"/>
+                      </a:solidFill>
+                      <a:prstDash val="solid"/>
+                      <a:round/>
+                      <a:headEnd type="none" w="med" len="med"/>
+                      <a:tailEnd type="none" w="med" len="med"/>
+                    </a:lnB>
+                    <a:solidFill>
+                      <a:srgbClr val="FFFFFF"/>
+                    </a:solidFill>
+                  </a:tcPr>
+                </a:tc>
+                <a:tc>
+                  <a:txBody>
+                    <a:bodyPr/>
+                    <a:lstStyle/>
+                    <a:p>
+                      <a:pPr algn="l" indent="0" marL="0">
+                        <a:buNone/>
+                      </a:pPr>
+                      <a:r>
+                        <a:rPr lang="en-US" sz="800" dirty="0">
+                          <a:solidFill>
+                            <a:srgbClr val="1A1A1A"/>
+                          </a:solidFill>
+                          <a:latin typeface="Meiryo" pitchFamily="34" charset="0"/>
+                          <a:ea typeface="Meiryo" pitchFamily="34" charset="-122"/>
+                          <a:cs typeface="Meiryo" pitchFamily="34" charset="-120"/>
+                        </a:rPr>
+                        <a:t>個別案件</a:t>
+                      </a:r>
+                      <a:endParaRPr lang="en-US" sz="800" dirty="0">
+                        <a:latin typeface="Meiryo" charset="0"/>
+                        <a:ea typeface="Meiryo" charset="0"/>
+                        <a:cs typeface="Meiryo" charset="0"/>
+                      </a:endParaRPr>
+                    </a:p>
+                  </a:txBody>
+                  <a:tcPr marL="54864" marR="54864" marT="18288" marB="18288" anchor="ctr">
+                    <a:lnL w="0" cap="flat" cmpd="sng" algn="ctr">
+                      <a:noFill/>
+                    </a:lnL>
+                    <a:lnR w="0" cap="flat" cmpd="sng" algn="ctr">
+                      <a:noFill/>
+                    </a:lnR>
+                    <a:lnT w="0" cap="flat" cmpd="sng" algn="ctr">
+                      <a:noFill/>
+                    </a:lnT>
+                    <a:lnB w="9525" cap="flat" cmpd="sng" algn="ctr">
+                      <a:solidFill>
+                        <a:srgbClr val="BFBFBF"/>
+                      </a:solidFill>
+                      <a:prstDash val="solid"/>
+                      <a:round/>
+                      <a:headEnd type="none" w="med" len="med"/>
+                      <a:tailEnd type="none" w="med" len="med"/>
+                    </a:lnB>
+                    <a:solidFill>
+                      <a:srgbClr val="FFFFFF"/>
+                    </a:solidFill>
+                  </a:tcPr>
+                </a:tc>
+              </a:tr>
+              <a:tr h="246888">
+                <a:tc>
+                  <a:txBody>
+                    <a:bodyPr/>
+                    <a:lstStyle/>
+                    <a:p>
+                      <a:pPr algn="l" indent="0" marL="0">
+                        <a:buNone/>
+                      </a:pPr>
+                      <a:r>
+                        <a:rPr lang="en-US" sz="800" dirty="0">
+                          <a:solidFill>
+                            <a:srgbClr val="1A1A1A"/>
+                          </a:solidFill>
+                          <a:latin typeface="Meiryo" pitchFamily="34" charset="0"/>
+                          <a:ea typeface="Meiryo" pitchFamily="34" charset="-122"/>
+                          <a:cs typeface="Meiryo" pitchFamily="34" charset="-120"/>
+                        </a:rPr>
+                        <a:t>FRONTEO KIBIT</a:t>
+                      </a:r>
+                      <a:endParaRPr lang="en-US" sz="800" dirty="0">
+                        <a:latin typeface="Meiryo" charset="0"/>
+                        <a:ea typeface="Meiryo" charset="0"/>
+                        <a:cs typeface="Meiryo" charset="0"/>
+                      </a:endParaRPr>
+                    </a:p>
+                  </a:txBody>
+                  <a:tcPr marL="54864" marR="54864" marT="18288" marB="18288" anchor="ctr">
+                    <a:lnL w="0" cap="flat" cmpd="sng" algn="ctr">
+                      <a:noFill/>
+                    </a:lnL>
+                    <a:lnR w="0" cap="flat" cmpd="sng" algn="ctr">
+                      <a:noFill/>
+                    </a:lnR>
+                    <a:lnT w="0" cap="flat" cmpd="sng" algn="ctr">
+                      <a:noFill/>
+                    </a:lnT>
+                    <a:lnB w="9525" cap="flat" cmpd="sng" algn="ctr">
+                      <a:solidFill>
+                        <a:srgbClr val="BFBFBF"/>
+                      </a:solidFill>
+                      <a:prstDash val="solid"/>
+                      <a:round/>
+                      <a:headEnd type="none" w="med" len="med"/>
+                      <a:tailEnd type="none" w="med" len="med"/>
+                    </a:lnB>
+                    <a:solidFill>
+                      <a:srgbClr val="FFFFFF"/>
+                    </a:solidFill>
+                  </a:tcPr>
+                </a:tc>
+                <a:tc>
+                  <a:txBody>
+                    <a:bodyPr/>
+                    <a:lstStyle/>
+                    <a:p>
+                      <a:pPr algn="l" indent="0" marL="0">
+                        <a:buNone/>
+                      </a:pPr>
+                      <a:r>
+                        <a:rPr lang="en-US" sz="800" dirty="0">
+                          <a:solidFill>
+                            <a:srgbClr val="1A1A1A"/>
+                          </a:solidFill>
+                          <a:latin typeface="Meiryo" pitchFamily="34" charset="0"/>
+                          <a:ea typeface="Meiryo" pitchFamily="34" charset="-122"/>
+                          <a:cs typeface="Meiryo" pitchFamily="34" charset="-120"/>
+                        </a:rPr>
+                        <a:t>△ 既存文書</a:t>
+                      </a:r>
+                      <a:endParaRPr lang="en-US" sz="800" dirty="0">
+                        <a:latin typeface="Meiryo" charset="0"/>
+                        <a:ea typeface="Meiryo" charset="0"/>
+                        <a:cs typeface="Meiryo" charset="0"/>
+                      </a:endParaRPr>
+                    </a:p>
+                  </a:txBody>
+                  <a:tcPr marL="54864" marR="54864" marT="18288" marB="18288" anchor="ctr">
+                    <a:lnL w="0" cap="flat" cmpd="sng" algn="ctr">
+                      <a:noFill/>
+                    </a:lnL>
+                    <a:lnR w="0" cap="flat" cmpd="sng" algn="ctr">
+                      <a:noFill/>
+                    </a:lnR>
+                    <a:lnT w="0" cap="flat" cmpd="sng" algn="ctr">
+                      <a:noFill/>
+                    </a:lnT>
+                    <a:lnB w="9525" cap="flat" cmpd="sng" algn="ctr">
+                      <a:solidFill>
+                        <a:srgbClr val="BFBFBF"/>
+                      </a:solidFill>
+                      <a:prstDash val="solid"/>
+                      <a:round/>
+                      <a:headEnd type="none" w="med" len="med"/>
+                      <a:tailEnd type="none" w="med" len="med"/>
+                    </a:lnB>
+                    <a:solidFill>
+                      <a:srgbClr val="FFFFFF"/>
+                    </a:solidFill>
+                  </a:tcPr>
+                </a:tc>
+                <a:tc>
+                  <a:txBody>
+                    <a:bodyPr/>
+                    <a:lstStyle/>
+                    <a:p>
+                      <a:pPr algn="l" indent="0" marL="0">
+                        <a:buNone/>
+                      </a:pPr>
+                      <a:r>
+                        <a:rPr lang="en-US" sz="800" dirty="0">
+                          <a:solidFill>
+                            <a:srgbClr val="1A1A1A"/>
+                          </a:solidFill>
+                          <a:latin typeface="Meiryo" pitchFamily="34" charset="0"/>
+                          <a:ea typeface="Meiryo" pitchFamily="34" charset="-122"/>
+                          <a:cs typeface="Meiryo" pitchFamily="34" charset="-120"/>
+                        </a:rPr>
+                        <a:t>×</a:t>
+                      </a:r>
+                      <a:endParaRPr lang="en-US" sz="800" dirty="0">
+                        <a:latin typeface="Meiryo" charset="0"/>
+                        <a:ea typeface="Meiryo" charset="0"/>
+                        <a:cs typeface="Meiryo" charset="0"/>
+                      </a:endParaRPr>
+                    </a:p>
+                  </a:txBody>
+                  <a:tcPr marL="54864" marR="54864" marT="18288" marB="18288" anchor="ctr">
+                    <a:lnL w="0" cap="flat" cmpd="sng" algn="ctr">
+                      <a:noFill/>
+                    </a:lnL>
+                    <a:lnR w="0" cap="flat" cmpd="sng" algn="ctr">
+                      <a:noFill/>
+                    </a:lnR>
+                    <a:lnT w="0" cap="flat" cmpd="sng" algn="ctr">
+                      <a:noFill/>
+                    </a:lnT>
+                    <a:lnB w="9525" cap="flat" cmpd="sng" algn="ctr">
+                      <a:solidFill>
+                        <a:srgbClr val="BFBFBF"/>
+                      </a:solidFill>
+                      <a:prstDash val="solid"/>
+                      <a:round/>
+                      <a:headEnd type="none" w="med" len="med"/>
+                      <a:tailEnd type="none" w="med" len="med"/>
+                    </a:lnB>
+                    <a:solidFill>
+                      <a:srgbClr val="FFFFFF"/>
+                    </a:solidFill>
+                  </a:tcPr>
+                </a:tc>
+                <a:tc>
+                  <a:txBody>
+                    <a:bodyPr/>
+                    <a:lstStyle/>
+                    <a:p>
+                      <a:pPr algn="l" indent="0" marL="0">
+                        <a:buNone/>
+                      </a:pPr>
+                      <a:r>
+                        <a:rPr lang="en-US" sz="800" dirty="0">
+                          <a:solidFill>
+                            <a:srgbClr val="1A1A1A"/>
+                          </a:solidFill>
+                          <a:latin typeface="Meiryo" pitchFamily="34" charset="0"/>
+                          <a:ea typeface="Meiryo" pitchFamily="34" charset="-122"/>
+                          <a:cs typeface="Meiryo" pitchFamily="34" charset="-120"/>
+                        </a:rPr>
+                        <a:t>業種横断</a:t>
+                      </a:r>
+                      <a:endParaRPr lang="en-US" sz="800" dirty="0">
+                        <a:latin typeface="Meiryo" charset="0"/>
+                        <a:ea typeface="Meiryo" charset="0"/>
+                        <a:cs typeface="Meiryo" charset="0"/>
+                      </a:endParaRPr>
+                    </a:p>
+                  </a:txBody>
+                  <a:tcPr marL="54864" marR="54864" marT="18288" marB="18288" anchor="ctr">
+                    <a:lnL w="0" cap="flat" cmpd="sng" algn="ctr">
+                      <a:noFill/>
+                    </a:lnL>
+                    <a:lnR w="0" cap="flat" cmpd="sng" algn="ctr">
+                      <a:noFill/>
+                    </a:lnR>
+                    <a:lnT w="0" cap="flat" cmpd="sng" algn="ctr">
+                      <a:noFill/>
+                    </a:lnT>
+                    <a:lnB w="9525" cap="flat" cmpd="sng" algn="ctr">
+                      <a:solidFill>
+                        <a:srgbClr val="BFBFBF"/>
+                      </a:solidFill>
+                      <a:prstDash val="solid"/>
+                      <a:round/>
+                      <a:headEnd type="none" w="med" len="med"/>
+                      <a:tailEnd type="none" w="med" len="med"/>
+                    </a:lnB>
+                    <a:solidFill>
+                      <a:srgbClr val="FFFFFF"/>
+                    </a:solidFill>
+                  </a:tcPr>
+                </a:tc>
+              </a:tr>
+              <a:tr h="246888">
+                <a:tc>
+                  <a:txBody>
+                    <a:bodyPr/>
+                    <a:lstStyle/>
+                    <a:p>
+                      <a:pPr algn="l" indent="0" marL="0">
+                        <a:buNone/>
+                      </a:pPr>
+                      <a:r>
+                        <a:rPr lang="en-US" sz="800" dirty="0">
+                          <a:solidFill>
+                            <a:srgbClr val="1A1A1A"/>
+                          </a:solidFill>
+                          <a:latin typeface="Meiryo" pitchFamily="34" charset="0"/>
+                          <a:ea typeface="Meiryo" pitchFamily="34" charset="-122"/>
+                          <a:cs typeface="Meiryo" pitchFamily="34" charset="-120"/>
+                        </a:rPr>
+                        <a:t>tebiki／Teachme Biz</a:t>
+                      </a:r>
+                      <a:endParaRPr lang="en-US" sz="800" dirty="0">
+                        <a:latin typeface="Meiryo" charset="0"/>
+                        <a:ea typeface="Meiryo" charset="0"/>
+                        <a:cs typeface="Meiryo" charset="0"/>
+                      </a:endParaRPr>
+                    </a:p>
+                  </a:txBody>
+                  <a:tcPr marL="54864" marR="54864" marT="18288" marB="18288" anchor="ctr">
+                    <a:lnL w="0" cap="flat" cmpd="sng" algn="ctr">
+                      <a:noFill/>
+                    </a:lnL>
+                    <a:lnR w="0" cap="flat" cmpd="sng" algn="ctr">
+                      <a:noFill/>
+                    </a:lnR>
+                    <a:lnT w="0" cap="flat" cmpd="sng" algn="ctr">
+                      <a:noFill/>
+                    </a:lnT>
+                    <a:lnB w="9525" cap="flat" cmpd="sng" algn="ctr">
+                      <a:solidFill>
+                        <a:srgbClr val="BFBFBF"/>
+                      </a:solidFill>
+                      <a:prstDash val="solid"/>
+                      <a:round/>
+                      <a:headEnd type="none" w="med" len="med"/>
+                      <a:tailEnd type="none" w="med" len="med"/>
+                    </a:lnB>
+                    <a:solidFill>
+                      <a:srgbClr val="FFFFFF"/>
+                    </a:solidFill>
+                  </a:tcPr>
+                </a:tc>
+                <a:tc>
+                  <a:txBody>
+                    <a:bodyPr/>
+                    <a:lstStyle/>
+                    <a:p>
+                      <a:pPr algn="l" indent="0" marL="0">
+                        <a:buNone/>
+                      </a:pPr>
+                      <a:r>
+                        <a:rPr lang="en-US" sz="800" dirty="0">
+                          <a:solidFill>
+                            <a:srgbClr val="1A1A1A"/>
+                          </a:solidFill>
+                          <a:latin typeface="Meiryo" pitchFamily="34" charset="0"/>
+                          <a:ea typeface="Meiryo" pitchFamily="34" charset="-122"/>
+                          <a:cs typeface="Meiryo" pitchFamily="34" charset="-120"/>
+                        </a:rPr>
+                        <a:t>×</a:t>
+                      </a:r>
+                      <a:endParaRPr lang="en-US" sz="800" dirty="0">
+                        <a:latin typeface="Meiryo" charset="0"/>
+                        <a:ea typeface="Meiryo" charset="0"/>
+                        <a:cs typeface="Meiryo" charset="0"/>
+                      </a:endParaRPr>
+                    </a:p>
+                  </a:txBody>
+                  <a:tcPr marL="54864" marR="54864" marT="18288" marB="18288" anchor="ctr">
+                    <a:lnL w="0" cap="flat" cmpd="sng" algn="ctr">
+                      <a:noFill/>
+                    </a:lnL>
+                    <a:lnR w="0" cap="flat" cmpd="sng" algn="ctr">
+                      <a:noFill/>
+                    </a:lnR>
+                    <a:lnT w="0" cap="flat" cmpd="sng" algn="ctr">
+                      <a:noFill/>
+                    </a:lnT>
+                    <a:lnB w="9525" cap="flat" cmpd="sng" algn="ctr">
+                      <a:solidFill>
+                        <a:srgbClr val="BFBFBF"/>
+                      </a:solidFill>
+                      <a:prstDash val="solid"/>
+                      <a:round/>
+                      <a:headEnd type="none" w="med" len="med"/>
+                      <a:tailEnd type="none" w="med" len="med"/>
+                    </a:lnB>
+                    <a:solidFill>
+                      <a:srgbClr val="FFFFFF"/>
+                    </a:solidFill>
+                  </a:tcPr>
+                </a:tc>
+                <a:tc>
+                  <a:txBody>
+                    <a:bodyPr/>
+                    <a:lstStyle/>
+                    <a:p>
+                      <a:pPr algn="l" indent="0" marL="0">
+                        <a:buNone/>
+                      </a:pPr>
+                      <a:r>
+                        <a:rPr lang="en-US" sz="800" dirty="0">
+                          <a:solidFill>
+                            <a:srgbClr val="1A1A1A"/>
+                          </a:solidFill>
+                          <a:latin typeface="Meiryo" pitchFamily="34" charset="0"/>
+                          <a:ea typeface="Meiryo" pitchFamily="34" charset="-122"/>
+                          <a:cs typeface="Meiryo" pitchFamily="34" charset="-120"/>
+                        </a:rPr>
+                        <a:t>△ 器のみ</a:t>
+                      </a:r>
+                      <a:endParaRPr lang="en-US" sz="800" dirty="0">
+                        <a:latin typeface="Meiryo" charset="0"/>
+                        <a:ea typeface="Meiryo" charset="0"/>
+                        <a:cs typeface="Meiryo" charset="0"/>
+                      </a:endParaRPr>
+                    </a:p>
+                  </a:txBody>
+                  <a:tcPr marL="54864" marR="54864" marT="18288" marB="18288" anchor="ctr">
+                    <a:lnL w="0" cap="flat" cmpd="sng" algn="ctr">
+                      <a:noFill/>
+                    </a:lnL>
+                    <a:lnR w="0" cap="flat" cmpd="sng" algn="ctr">
+                      <a:noFill/>
+                    </a:lnR>
+                    <a:lnT w="0" cap="flat" cmpd="sng" algn="ctr">
+                      <a:noFill/>
+                    </a:lnT>
+                    <a:lnB w="9525" cap="flat" cmpd="sng" algn="ctr">
+                      <a:solidFill>
+                        <a:srgbClr val="BFBFBF"/>
+                      </a:solidFill>
+                      <a:prstDash val="solid"/>
+                      <a:round/>
+                      <a:headEnd type="none" w="med" len="med"/>
+                      <a:tailEnd type="none" w="med" len="med"/>
+                    </a:lnB>
+                    <a:solidFill>
+                      <a:srgbClr val="FFFFFF"/>
+                    </a:solidFill>
+                  </a:tcPr>
+                </a:tc>
+                <a:tc>
+                  <a:txBody>
+                    <a:bodyPr/>
+                    <a:lstStyle/>
+                    <a:p>
+                      <a:pPr algn="l" indent="0" marL="0">
+                        <a:buNone/>
+                      </a:pPr>
+                      <a:r>
+                        <a:rPr lang="en-US" sz="800" dirty="0">
+                          <a:solidFill>
+                            <a:srgbClr val="1A1A1A"/>
+                          </a:solidFill>
+                          <a:latin typeface="Meiryo" pitchFamily="34" charset="0"/>
+                          <a:ea typeface="Meiryo" pitchFamily="34" charset="-122"/>
+                          <a:cs typeface="Meiryo" pitchFamily="34" charset="-120"/>
+                        </a:rPr>
+                        <a:t>業種横断</a:t>
+                      </a:r>
+                      <a:endParaRPr lang="en-US" sz="800" dirty="0">
+                        <a:latin typeface="Meiryo" charset="0"/>
+                        <a:ea typeface="Meiryo" charset="0"/>
+                        <a:cs typeface="Meiryo" charset="0"/>
+                      </a:endParaRPr>
+                    </a:p>
+                  </a:txBody>
+                  <a:tcPr marL="54864" marR="54864" marT="18288" marB="18288" anchor="ctr">
+                    <a:lnL w="0" cap="flat" cmpd="sng" algn="ctr">
+                      <a:noFill/>
+                    </a:lnL>
+                    <a:lnR w="0" cap="flat" cmpd="sng" algn="ctr">
+                      <a:noFill/>
+                    </a:lnR>
+                    <a:lnT w="0" cap="flat" cmpd="sng" algn="ctr">
+                      <a:noFill/>
+                    </a:lnT>
+                    <a:lnB w="9525" cap="flat" cmpd="sng" algn="ctr">
+                      <a:solidFill>
+                        <a:srgbClr val="BFBFBF"/>
+                      </a:solidFill>
+                      <a:prstDash val="solid"/>
+                      <a:round/>
+                      <a:headEnd type="none" w="med" len="med"/>
+                      <a:tailEnd type="none" w="med" len="med"/>
+                    </a:lnB>
+                    <a:solidFill>
+                      <a:srgbClr val="FFFFFF"/>
+                    </a:solidFill>
+                  </a:tcPr>
+                </a:tc>
+              </a:tr>
+              <a:tr h="246888">
+                <a:tc>
+                  <a:txBody>
+                    <a:bodyPr/>
+                    <a:lstStyle/>
+                    <a:p>
+                      <a:pPr algn="l" indent="0" marL="0">
+                        <a:buNone/>
+                      </a:pPr>
+                      <a:r>
+                        <a:rPr lang="en-US" sz="800" b="1" dirty="0">
+                          <a:solidFill>
+                            <a:srgbClr val="1A1A1A"/>
+                          </a:solidFill>
+                          <a:latin typeface="Meiryo" pitchFamily="34" charset="0"/>
+                          <a:ea typeface="Meiryo" pitchFamily="34" charset="-122"/>
+                          <a:cs typeface="Meiryo" pitchFamily="34" charset="-120"/>
+                        </a:rPr>
+                        <a:t>三現ワークス</a:t>
+                      </a:r>
+                      <a:endParaRPr lang="en-US" sz="800" dirty="0">
+                        <a:latin typeface="Meiryo" charset="0"/>
+                        <a:ea typeface="Meiryo" charset="0"/>
+                        <a:cs typeface="Meiryo" charset="0"/>
+                      </a:endParaRPr>
+                    </a:p>
+                  </a:txBody>
+                  <a:tcPr marL="54864" marR="54864" marT="18288" marB="18288" anchor="ctr">
+                    <a:lnL w="0" cap="flat" cmpd="sng" algn="ctr">
+                      <a:noFill/>
+                    </a:lnL>
+                    <a:lnR w="0" cap="flat" cmpd="sng" algn="ctr">
+                      <a:noFill/>
+                    </a:lnR>
+                    <a:lnT w="19050" cap="flat" cmpd="sng" algn="ctr">
+                      <a:solidFill>
+                        <a:srgbClr val="1A1A1A"/>
+                      </a:solidFill>
+                      <a:prstDash val="solid"/>
+                      <a:round/>
+                      <a:headEnd type="none" w="med" len="med"/>
+                      <a:tailEnd type="none" w="med" len="med"/>
+                    </a:lnT>
+                    <a:lnB w="9525" cap="flat" cmpd="sng" algn="ctr">
+                      <a:solidFill>
+                        <a:srgbClr val="BFBFBF"/>
+                      </a:solidFill>
+                      <a:prstDash val="solid"/>
+                      <a:round/>
+                      <a:headEnd type="none" w="med" len="med"/>
+                      <a:tailEnd type="none" w="med" len="med"/>
+                    </a:lnB>
+                    <a:solidFill>
+                      <a:srgbClr val="FFFFFF"/>
+                    </a:solidFill>
+                  </a:tcPr>
+                </a:tc>
+                <a:tc>
+                  <a:txBody>
+                    <a:bodyPr/>
+                    <a:lstStyle/>
+                    <a:p>
+                      <a:pPr algn="l" indent="0" marL="0">
+                        <a:buNone/>
+                      </a:pPr>
+                      <a:r>
+                        <a:rPr lang="en-US" sz="800" b="1" dirty="0">
+                          <a:solidFill>
+                            <a:srgbClr val="1A1A1A"/>
+                          </a:solidFill>
+                          <a:latin typeface="Meiryo" pitchFamily="34" charset="0"/>
+                          <a:ea typeface="Meiryo" pitchFamily="34" charset="-122"/>
+                          <a:cs typeface="Meiryo" pitchFamily="34" charset="-120"/>
+                        </a:rPr>
+                        <a:t>○ 音声で一言</a:t>
+                      </a:r>
+                      <a:endParaRPr lang="en-US" sz="800" dirty="0">
+                        <a:latin typeface="Meiryo" charset="0"/>
+                        <a:ea typeface="Meiryo" charset="0"/>
+                        <a:cs typeface="Meiryo" charset="0"/>
+                      </a:endParaRPr>
+                    </a:p>
+                  </a:txBody>
+                  <a:tcPr marL="54864" marR="54864" marT="18288" marB="18288" anchor="ctr">
+                    <a:lnL w="0" cap="flat" cmpd="sng" algn="ctr">
+                      <a:noFill/>
+                    </a:lnL>
+                    <a:lnR w="0" cap="flat" cmpd="sng" algn="ctr">
+                      <a:noFill/>
+                    </a:lnR>
+                    <a:lnT w="19050" cap="flat" cmpd="sng" algn="ctr">
+                      <a:solidFill>
+                        <a:srgbClr val="1A1A1A"/>
+                      </a:solidFill>
+                      <a:prstDash val="solid"/>
+                      <a:round/>
+                      <a:headEnd type="none" w="med" len="med"/>
+                      <a:tailEnd type="none" w="med" len="med"/>
+                    </a:lnT>
+                    <a:lnB w="9525" cap="flat" cmpd="sng" algn="ctr">
+                      <a:solidFill>
+                        <a:srgbClr val="BFBFBF"/>
+                      </a:solidFill>
+                      <a:prstDash val="solid"/>
+                      <a:round/>
+                      <a:headEnd type="none" w="med" len="med"/>
+                      <a:tailEnd type="none" w="med" len="med"/>
+                    </a:lnB>
+                    <a:solidFill>
+                      <a:srgbClr val="FFFFFF"/>
+                    </a:solidFill>
+                  </a:tcPr>
+                </a:tc>
+                <a:tc>
+                  <a:txBody>
+                    <a:bodyPr/>
+                    <a:lstStyle/>
+                    <a:p>
+                      <a:pPr algn="l" indent="0" marL="0">
+                        <a:buNone/>
+                      </a:pPr>
+                      <a:r>
+                        <a:rPr lang="en-US" sz="800" b="1" dirty="0">
+                          <a:solidFill>
+                            <a:srgbClr val="1A1A1A"/>
+                          </a:solidFill>
+                          <a:latin typeface="Meiryo" pitchFamily="34" charset="0"/>
+                          <a:ea typeface="Meiryo" pitchFamily="34" charset="-122"/>
+                          <a:cs typeface="Meiryo" pitchFamily="34" charset="-120"/>
+                        </a:rPr>
+                        <a:t>○ 当社が制作</a:t>
+                      </a:r>
+                      <a:endParaRPr lang="en-US" sz="800" dirty="0">
+                        <a:latin typeface="Meiryo" charset="0"/>
+                        <a:ea typeface="Meiryo" charset="0"/>
+                        <a:cs typeface="Meiryo" charset="0"/>
+                      </a:endParaRPr>
+                    </a:p>
+                  </a:txBody>
+                  <a:tcPr marL="54864" marR="54864" marT="18288" marB="18288" anchor="ctr">
+                    <a:lnL w="0" cap="flat" cmpd="sng" algn="ctr">
+                      <a:noFill/>
+                    </a:lnL>
+                    <a:lnR w="0" cap="flat" cmpd="sng" algn="ctr">
+                      <a:noFill/>
+                    </a:lnR>
+                    <a:lnT w="19050" cap="flat" cmpd="sng" algn="ctr">
+                      <a:solidFill>
+                        <a:srgbClr val="1A1A1A"/>
+                      </a:solidFill>
+                      <a:prstDash val="solid"/>
+                      <a:round/>
+                      <a:headEnd type="none" w="med" len="med"/>
+                      <a:tailEnd type="none" w="med" len="med"/>
+                    </a:lnT>
+                    <a:lnB w="9525" cap="flat" cmpd="sng" algn="ctr">
+                      <a:solidFill>
+                        <a:srgbClr val="BFBFBF"/>
+                      </a:solidFill>
+                      <a:prstDash val="solid"/>
+                      <a:round/>
+                      <a:headEnd type="none" w="med" len="med"/>
+                      <a:tailEnd type="none" w="med" len="med"/>
+                    </a:lnB>
+                    <a:solidFill>
+                      <a:srgbClr val="FFFFFF"/>
+                    </a:solidFill>
+                  </a:tcPr>
+                </a:tc>
+                <a:tc>
+                  <a:txBody>
+                    <a:bodyPr/>
+                    <a:lstStyle/>
+                    <a:p>
+                      <a:pPr algn="l" indent="0" marL="0">
+                        <a:buNone/>
+                      </a:pPr>
+                      <a:r>
+                        <a:rPr lang="en-US" sz="800" b="1" dirty="0">
+                          <a:solidFill>
+                            <a:srgbClr val="1A1A1A"/>
+                          </a:solidFill>
+                          <a:latin typeface="Meiryo" pitchFamily="34" charset="0"/>
+                          <a:ea typeface="Meiryo" pitchFamily="34" charset="-122"/>
+                          <a:cs typeface="Meiryo" pitchFamily="34" charset="-120"/>
+                        </a:rPr>
+                        <a:t>連続工程</a:t>
+                      </a:r>
+                      <a:endParaRPr lang="en-US" sz="800" dirty="0">
+                        <a:latin typeface="Meiryo" charset="0"/>
+                        <a:ea typeface="Meiryo" charset="0"/>
+                        <a:cs typeface="Meiryo" charset="0"/>
+                      </a:endParaRPr>
+                    </a:p>
+                  </a:txBody>
+                  <a:tcPr marL="54864" marR="54864" marT="18288" marB="18288" anchor="ctr">
+                    <a:lnL w="0" cap="flat" cmpd="sng" algn="ctr">
+                      <a:noFill/>
+                    </a:lnL>
+                    <a:lnR w="0" cap="flat" cmpd="sng" algn="ctr">
+                      <a:noFill/>
+                    </a:lnR>
+                    <a:lnT w="19050" cap="flat" cmpd="sng" algn="ctr">
+                      <a:solidFill>
+                        <a:srgbClr val="1A1A1A"/>
+                      </a:solidFill>
+                      <a:prstDash val="solid"/>
+                      <a:round/>
+                      <a:headEnd type="none" w="med" len="med"/>
+                      <a:tailEnd type="none" w="med" len="med"/>
+                    </a:lnT>
+                    <a:lnB w="9525" cap="flat" cmpd="sng" algn="ctr">
+                      <a:solidFill>
+                        <a:srgbClr val="BFBFBF"/>
+                      </a:solidFill>
+                      <a:prstDash val="solid"/>
+                      <a:round/>
+                      <a:headEnd type="none" w="med" len="med"/>
+                      <a:tailEnd type="none" w="med" len="med"/>
+                    </a:lnB>
+                    <a:solidFill>
+                      <a:srgbClr val="FFFFFF"/>
+                    </a:solidFill>
+                  </a:tcPr>
+                </a:tc>
+              </a:tr>
+            </a:tbl>
+          </a:graphicData>
+        </a:graphic>
+      </p:graphicFrame>
+      <p:sp>
+        <p:nvSpPr>
+          <p:cNvPr id="29" name="threat"/>
           <p:cNvSpPr/>
           <p:nvPr/>
         </p:nvSpPr>
         <p:spPr>
           <a:xfrm>
-            <a:off x="4617720" y="1307592"/>
-            <a:ext cx="4160520" cy="0"/>
-          </a:xfrm>
-          <a:prstGeom prst="line">
-            <a:avLst/>
-          </a:prstGeom>
-          <a:noFill/>
-          <a:ln w="9525">
-            <a:solidFill>
-              <a:srgbClr val="BFBFBF"/>
-            </a:solidFill>
-            <a:prstDash val="solid"/>
-          </a:ln>
-        </p:spPr>
-      </p:sp>
-      <p:sp>
-        <p:nvSpPr>
-          <p:cNvPr id="29" name="Text 26"/>
-          <p:cNvSpPr txBox="1"/>
-          <p:nvPr/>
-        </p:nvSpPr>
-        <p:spPr>
-          <a:xfrm>
-            <a:off x="4617720" y="1307592"/>
-            <a:ext cx="1325880" cy="228600"/>
-          </a:xfrm>
-          <a:prstGeom prst="rect">
-            <a:avLst/>
-          </a:prstGeom>
-          <a:noFill/>
-          <a:ln/>
-        </p:spPr>
-        <p:txBody>
-          <a:bodyPr wrap="square" lIns="0" tIns="0" rIns="0" bIns="0" rtlCol="0" anchor="ctr"/>
-          <a:lstStyle/>
-          <a:p>
-            <a:pPr algn="l" indent="0" marL="0">
-              <a:lnSpc>
-                <a:spcPct val="115000"/>
-              </a:lnSpc>
-              <a:buNone/>
-            </a:pPr>
-            <a:r>
-              <a:rPr lang="en-US" sz="850" b="1" dirty="0">
-                <a:solidFill>
-                  <a:srgbClr val="1A1A1A"/>
-                </a:solidFill>
-                <a:latin typeface="Meiryo" pitchFamily="34" charset="0"/>
-                <a:ea typeface="Meiryo" pitchFamily="34" charset="-122"/>
-                <a:cs typeface="Meiryo" pitchFamily="34" charset="-120"/>
-              </a:rPr>
-              <a:t>ダイキン×日立</a:t>
-            </a:r>
-            <a:endParaRPr lang="en-US" sz="850" dirty="0"/>
-          </a:p>
-        </p:txBody>
-      </p:sp>
-      <p:sp>
-        <p:nvSpPr>
-          <p:cNvPr id="30" name="Text 27"/>
-          <p:cNvSpPr txBox="1"/>
-          <p:nvPr/>
-        </p:nvSpPr>
-        <p:spPr>
-          <a:xfrm>
-            <a:off x="5943600" y="1307592"/>
-            <a:ext cx="2468880" cy="228600"/>
-          </a:xfrm>
-          <a:prstGeom prst="rect">
-            <a:avLst/>
-          </a:prstGeom>
-          <a:noFill/>
-          <a:ln/>
-        </p:spPr>
-        <p:txBody>
-          <a:bodyPr wrap="square" lIns="0" tIns="0" rIns="0" bIns="0" rtlCol="0" anchor="ctr"/>
-          <a:lstStyle/>
-          <a:p>
-            <a:pPr algn="l" indent="0" marL="0">
-              <a:lnSpc>
-                <a:spcPct val="115000"/>
-              </a:lnSpc>
-              <a:buNone/>
-            </a:pPr>
-            <a:r>
-              <a:rPr lang="en-US" sz="800" dirty="0">
-                <a:solidFill>
-                  <a:srgbClr val="1A1A1A"/>
-                </a:solidFill>
-                <a:latin typeface="Meiryo" pitchFamily="34" charset="0"/>
-                <a:ea typeface="Meiryo" pitchFamily="34" charset="-122"/>
-                <a:cs typeface="Meiryo" pitchFamily="34" charset="-120"/>
-              </a:rPr>
-              <a:t>ろう付け技能をIoT・画像解析でデジタル化</a:t>
-            </a:r>
-            <a:endParaRPr lang="en-US" sz="800" dirty="0"/>
-          </a:p>
-        </p:txBody>
-      </p:sp>
-      <p:sp>
-        <p:nvSpPr>
-          <p:cNvPr id="31" name="Text 28"/>
-          <p:cNvSpPr txBox="1"/>
-          <p:nvPr/>
-        </p:nvSpPr>
-        <p:spPr>
-          <a:xfrm>
-            <a:off x="8412480" y="1307592"/>
-            <a:ext cx="365760" cy="228600"/>
-          </a:xfrm>
-          <a:prstGeom prst="rect">
-            <a:avLst/>
-          </a:prstGeom>
-          <a:noFill/>
-          <a:ln/>
-        </p:spPr>
-        <p:txBody>
-          <a:bodyPr wrap="square" lIns="0" tIns="0" rIns="0" bIns="0" rtlCol="0" anchor="ctr"/>
-          <a:lstStyle/>
-          <a:p>
-            <a:pPr algn="r" indent="0" marL="0">
-              <a:lnSpc>
-                <a:spcPct val="115000"/>
-              </a:lnSpc>
-              <a:buNone/>
-            </a:pPr>
-            <a:r>
-              <a:rPr lang="en-US" sz="800" dirty="0">
-                <a:solidFill>
-                  <a:srgbClr val="4D4D4D"/>
-                </a:solidFill>
-                <a:latin typeface="Meiryo" pitchFamily="34" charset="0"/>
-                <a:ea typeface="Meiryo" pitchFamily="34" charset="-122"/>
-                <a:cs typeface="Meiryo" pitchFamily="34" charset="-120"/>
-              </a:rPr>
-              <a:t>2017</a:t>
-            </a:r>
-            <a:endParaRPr lang="en-US" sz="800" dirty="0"/>
-          </a:p>
-        </p:txBody>
-      </p:sp>
-      <p:sp>
-        <p:nvSpPr>
-          <p:cNvPr id="32" name="Shape 29"/>
-          <p:cNvSpPr/>
-          <p:nvPr/>
-        </p:nvSpPr>
-        <p:spPr>
-          <a:xfrm>
-            <a:off x="4617720" y="1536192"/>
-            <a:ext cx="4160520" cy="0"/>
-          </a:xfrm>
-          <a:prstGeom prst="line">
-            <a:avLst/>
-          </a:prstGeom>
-          <a:noFill/>
-          <a:ln w="9525">
-            <a:solidFill>
-              <a:srgbClr val="BFBFBF"/>
-            </a:solidFill>
-            <a:prstDash val="solid"/>
-          </a:ln>
-        </p:spPr>
-      </p:sp>
-      <p:sp>
-        <p:nvSpPr>
-          <p:cNvPr id="33" name="Text 30"/>
-          <p:cNvSpPr txBox="1"/>
-          <p:nvPr/>
-        </p:nvSpPr>
-        <p:spPr>
-          <a:xfrm>
-            <a:off x="4617720" y="1536192"/>
-            <a:ext cx="1325880" cy="228600"/>
-          </a:xfrm>
-          <a:prstGeom prst="rect">
-            <a:avLst/>
-          </a:prstGeom>
-          <a:noFill/>
-          <a:ln/>
-        </p:spPr>
-        <p:txBody>
-          <a:bodyPr wrap="square" lIns="0" tIns="0" rIns="0" bIns="0" rtlCol="0" anchor="ctr"/>
-          <a:lstStyle/>
-          <a:p>
-            <a:pPr algn="l" indent="0" marL="0">
-              <a:lnSpc>
-                <a:spcPct val="115000"/>
-              </a:lnSpc>
-              <a:buNone/>
-            </a:pPr>
-            <a:r>
-              <a:rPr lang="en-US" sz="850" b="1" dirty="0">
-                <a:solidFill>
-                  <a:srgbClr val="1A1A1A"/>
-                </a:solidFill>
-                <a:latin typeface="Meiryo" pitchFamily="34" charset="0"/>
-                <a:ea typeface="Meiryo" pitchFamily="34" charset="-122"/>
-                <a:cs typeface="Meiryo" pitchFamily="34" charset="-120"/>
-              </a:rPr>
-              <a:t>住友ゴム×NEC</a:t>
-            </a:r>
-            <a:endParaRPr lang="en-US" sz="850" dirty="0"/>
-          </a:p>
-        </p:txBody>
-      </p:sp>
-      <p:sp>
-        <p:nvSpPr>
-          <p:cNvPr id="34" name="Text 31"/>
-          <p:cNvSpPr txBox="1"/>
-          <p:nvPr/>
-        </p:nvSpPr>
-        <p:spPr>
-          <a:xfrm>
-            <a:off x="5943600" y="1536192"/>
-            <a:ext cx="2468880" cy="228600"/>
-          </a:xfrm>
-          <a:prstGeom prst="rect">
-            <a:avLst/>
-          </a:prstGeom>
-          <a:noFill/>
-          <a:ln/>
-        </p:spPr>
-        <p:txBody>
-          <a:bodyPr wrap="square" lIns="0" tIns="0" rIns="0" bIns="0" rtlCol="0" anchor="ctr"/>
-          <a:lstStyle/>
-          <a:p>
-            <a:pPr algn="l" indent="0" marL="0">
-              <a:lnSpc>
-                <a:spcPct val="115000"/>
-              </a:lnSpc>
-              <a:buNone/>
-            </a:pPr>
-            <a:r>
-              <a:rPr lang="en-US" sz="800" dirty="0">
-                <a:solidFill>
-                  <a:srgbClr val="1A1A1A"/>
-                </a:solidFill>
-                <a:latin typeface="Meiryo" pitchFamily="34" charset="0"/>
-                <a:ea typeface="Meiryo" pitchFamily="34" charset="-122"/>
-                <a:cs typeface="Meiryo" pitchFamily="34" charset="-120"/>
-              </a:rPr>
-              <a:t>タイヤ設計の熟練者ノウハウをAI化</a:t>
-            </a:r>
-            <a:endParaRPr lang="en-US" sz="800" dirty="0"/>
-          </a:p>
-        </p:txBody>
-      </p:sp>
-      <p:sp>
-        <p:nvSpPr>
-          <p:cNvPr id="35" name="Text 32"/>
-          <p:cNvSpPr txBox="1"/>
-          <p:nvPr/>
-        </p:nvSpPr>
-        <p:spPr>
-          <a:xfrm>
-            <a:off x="8412480" y="1536192"/>
-            <a:ext cx="365760" cy="228600"/>
-          </a:xfrm>
-          <a:prstGeom prst="rect">
-            <a:avLst/>
-          </a:prstGeom>
-          <a:noFill/>
-          <a:ln/>
-        </p:spPr>
-        <p:txBody>
-          <a:bodyPr wrap="square" lIns="0" tIns="0" rIns="0" bIns="0" rtlCol="0" anchor="ctr"/>
-          <a:lstStyle/>
-          <a:p>
-            <a:pPr algn="r" indent="0" marL="0">
-              <a:lnSpc>
-                <a:spcPct val="115000"/>
-              </a:lnSpc>
-              <a:buNone/>
-            </a:pPr>
-            <a:r>
-              <a:rPr lang="en-US" sz="800" dirty="0">
-                <a:solidFill>
-                  <a:srgbClr val="4D4D4D"/>
-                </a:solidFill>
-                <a:latin typeface="Meiryo" pitchFamily="34" charset="0"/>
-                <a:ea typeface="Meiryo" pitchFamily="34" charset="-122"/>
-                <a:cs typeface="Meiryo" pitchFamily="34" charset="-120"/>
-              </a:rPr>
-              <a:t>2022</a:t>
-            </a:r>
-            <a:endParaRPr lang="en-US" sz="800" dirty="0"/>
-          </a:p>
-        </p:txBody>
-      </p:sp>
-      <p:sp>
-        <p:nvSpPr>
-          <p:cNvPr id="36" name="Shape 33"/>
-          <p:cNvSpPr/>
-          <p:nvPr/>
-        </p:nvSpPr>
-        <p:spPr>
-          <a:xfrm>
-            <a:off x="4617720" y="1764792"/>
-            <a:ext cx="4160520" cy="0"/>
-          </a:xfrm>
-          <a:prstGeom prst="line">
-            <a:avLst/>
-          </a:prstGeom>
-          <a:noFill/>
-          <a:ln w="9525">
-            <a:solidFill>
-              <a:srgbClr val="BFBFBF"/>
-            </a:solidFill>
-            <a:prstDash val="solid"/>
-          </a:ln>
-        </p:spPr>
-      </p:sp>
-      <p:sp>
-        <p:nvSpPr>
-          <p:cNvPr id="37" name="Text 34"/>
-          <p:cNvSpPr txBox="1"/>
-          <p:nvPr/>
-        </p:nvSpPr>
-        <p:spPr>
-          <a:xfrm>
-            <a:off x="4617720" y="1764792"/>
-            <a:ext cx="1325880" cy="228600"/>
-          </a:xfrm>
-          <a:prstGeom prst="rect">
-            <a:avLst/>
-          </a:prstGeom>
-          <a:noFill/>
-          <a:ln/>
-        </p:spPr>
-        <p:txBody>
-          <a:bodyPr wrap="square" lIns="0" tIns="0" rIns="0" bIns="0" rtlCol="0" anchor="ctr"/>
-          <a:lstStyle/>
-          <a:p>
-            <a:pPr algn="l" indent="0" marL="0">
-              <a:lnSpc>
-                <a:spcPct val="115000"/>
-              </a:lnSpc>
-              <a:buNone/>
-            </a:pPr>
-            <a:r>
-              <a:rPr lang="en-US" sz="850" b="1" dirty="0">
-                <a:solidFill>
-                  <a:srgbClr val="1A1A1A"/>
-                </a:solidFill>
-                <a:latin typeface="Meiryo" pitchFamily="34" charset="0"/>
-                <a:ea typeface="Meiryo" pitchFamily="34" charset="-122"/>
-                <a:cs typeface="Meiryo" pitchFamily="34" charset="-120"/>
-              </a:rPr>
-              <a:t>ライオン×NTTデータ</a:t>
-            </a:r>
-            <a:endParaRPr lang="en-US" sz="850" dirty="0"/>
-          </a:p>
-        </p:txBody>
-      </p:sp>
-      <p:sp>
-        <p:nvSpPr>
-          <p:cNvPr id="38" name="Text 35"/>
-          <p:cNvSpPr txBox="1"/>
-          <p:nvPr/>
-        </p:nvSpPr>
-        <p:spPr>
-          <a:xfrm>
-            <a:off x="5943600" y="1764792"/>
-            <a:ext cx="2468880" cy="228600"/>
-          </a:xfrm>
-          <a:prstGeom prst="rect">
-            <a:avLst/>
-          </a:prstGeom>
-          <a:noFill/>
-          <a:ln/>
-        </p:spPr>
-        <p:txBody>
-          <a:bodyPr wrap="square" lIns="0" tIns="0" rIns="0" bIns="0" rtlCol="0" anchor="ctr"/>
-          <a:lstStyle/>
-          <a:p>
-            <a:pPr algn="l" indent="0" marL="0">
-              <a:lnSpc>
-                <a:spcPct val="115000"/>
-              </a:lnSpc>
-              <a:buNone/>
-            </a:pPr>
-            <a:r>
-              <a:rPr lang="en-US" sz="800" dirty="0">
-                <a:solidFill>
-                  <a:srgbClr val="1A1A1A"/>
-                </a:solidFill>
-                <a:latin typeface="Meiryo" pitchFamily="34" charset="0"/>
-                <a:ea typeface="Meiryo" pitchFamily="34" charset="-122"/>
-                <a:cs typeface="Meiryo" pitchFamily="34" charset="-120"/>
-              </a:rPr>
-              <a:t>製造プロセスの勘所集を生成AIで検索</a:t>
-            </a:r>
-            <a:endParaRPr lang="en-US" sz="800" dirty="0"/>
-          </a:p>
-        </p:txBody>
-      </p:sp>
-      <p:sp>
-        <p:nvSpPr>
-          <p:cNvPr id="39" name="Text 36"/>
-          <p:cNvSpPr txBox="1"/>
-          <p:nvPr/>
-        </p:nvSpPr>
-        <p:spPr>
-          <a:xfrm>
-            <a:off x="8412480" y="1764792"/>
-            <a:ext cx="365760" cy="228600"/>
-          </a:xfrm>
-          <a:prstGeom prst="rect">
-            <a:avLst/>
-          </a:prstGeom>
-          <a:noFill/>
-          <a:ln/>
-        </p:spPr>
-        <p:txBody>
-          <a:bodyPr wrap="square" lIns="0" tIns="0" rIns="0" bIns="0" rtlCol="0" anchor="ctr"/>
-          <a:lstStyle/>
-          <a:p>
-            <a:pPr algn="r" indent="0" marL="0">
-              <a:lnSpc>
-                <a:spcPct val="115000"/>
-              </a:lnSpc>
-              <a:buNone/>
-            </a:pPr>
-            <a:r>
-              <a:rPr lang="en-US" sz="800" dirty="0">
-                <a:solidFill>
-                  <a:srgbClr val="4D4D4D"/>
-                </a:solidFill>
-                <a:latin typeface="Meiryo" pitchFamily="34" charset="0"/>
-                <a:ea typeface="Meiryo" pitchFamily="34" charset="-122"/>
-                <a:cs typeface="Meiryo" pitchFamily="34" charset="-120"/>
-              </a:rPr>
-              <a:t>2024</a:t>
-            </a:r>
-            <a:endParaRPr lang="en-US" sz="800" dirty="0"/>
-          </a:p>
-        </p:txBody>
-      </p:sp>
-      <p:sp>
-        <p:nvSpPr>
-          <p:cNvPr id="40" name="Shape 37"/>
-          <p:cNvSpPr/>
-          <p:nvPr/>
-        </p:nvSpPr>
-        <p:spPr>
-          <a:xfrm>
-            <a:off x="4617720" y="1993392"/>
-            <a:ext cx="4160520" cy="0"/>
-          </a:xfrm>
-          <a:prstGeom prst="line">
-            <a:avLst/>
-          </a:prstGeom>
-          <a:noFill/>
-          <a:ln w="9525">
-            <a:solidFill>
-              <a:srgbClr val="BFBFBF"/>
-            </a:solidFill>
-            <a:prstDash val="solid"/>
-          </a:ln>
-        </p:spPr>
-      </p:sp>
-      <p:sp>
-        <p:nvSpPr>
-          <p:cNvPr id="41" name="Text 38"/>
-          <p:cNvSpPr txBox="1"/>
-          <p:nvPr/>
-        </p:nvSpPr>
-        <p:spPr>
-          <a:xfrm>
-            <a:off x="4617720" y="1993392"/>
-            <a:ext cx="1325880" cy="228600"/>
-          </a:xfrm>
-          <a:prstGeom prst="rect">
-            <a:avLst/>
-          </a:prstGeom>
-          <a:noFill/>
-          <a:ln/>
-        </p:spPr>
-        <p:txBody>
-          <a:bodyPr wrap="square" lIns="0" tIns="0" rIns="0" bIns="0" rtlCol="0" anchor="ctr"/>
-          <a:lstStyle/>
-          <a:p>
-            <a:pPr algn="l" indent="0" marL="0">
-              <a:lnSpc>
-                <a:spcPct val="115000"/>
-              </a:lnSpc>
-              <a:buNone/>
-            </a:pPr>
-            <a:r>
-              <a:rPr lang="en-US" sz="850" b="1" dirty="0">
-                <a:solidFill>
-                  <a:srgbClr val="1A1A1A"/>
-                </a:solidFill>
-                <a:latin typeface="Meiryo" pitchFamily="34" charset="0"/>
-                <a:ea typeface="Meiryo" pitchFamily="34" charset="-122"/>
-                <a:cs typeface="Meiryo" pitchFamily="34" charset="-120"/>
-              </a:rPr>
-              <a:t>日立 大みか事業所</a:t>
-            </a:r>
-            <a:endParaRPr lang="en-US" sz="850" dirty="0"/>
-          </a:p>
-        </p:txBody>
-      </p:sp>
-      <p:sp>
-        <p:nvSpPr>
-          <p:cNvPr id="42" name="Text 39"/>
-          <p:cNvSpPr txBox="1"/>
-          <p:nvPr/>
-        </p:nvSpPr>
-        <p:spPr>
-          <a:xfrm>
-            <a:off x="5943600" y="1993392"/>
-            <a:ext cx="2468880" cy="228600"/>
-          </a:xfrm>
-          <a:prstGeom prst="rect">
-            <a:avLst/>
-          </a:prstGeom>
-          <a:noFill/>
-          <a:ln/>
-        </p:spPr>
-        <p:txBody>
-          <a:bodyPr wrap="square" lIns="0" tIns="0" rIns="0" bIns="0" rtlCol="0" anchor="ctr"/>
-          <a:lstStyle/>
-          <a:p>
-            <a:pPr algn="l" indent="0" marL="0">
-              <a:lnSpc>
-                <a:spcPct val="115000"/>
-              </a:lnSpc>
-              <a:buNone/>
-            </a:pPr>
-            <a:r>
-              <a:rPr lang="en-US" sz="800" dirty="0">
-                <a:solidFill>
-                  <a:srgbClr val="1A1A1A"/>
-                </a:solidFill>
-                <a:latin typeface="Meiryo" pitchFamily="34" charset="0"/>
-                <a:ea typeface="Meiryo" pitchFamily="34" charset="-122"/>
-                <a:cs typeface="Meiryo" pitchFamily="34" charset="-120"/>
-              </a:rPr>
-              <a:t>熟練者の知見で、事例検索を約9割短縮</a:t>
-            </a:r>
-            <a:endParaRPr lang="en-US" sz="800" dirty="0"/>
-          </a:p>
-        </p:txBody>
-      </p:sp>
-      <p:sp>
-        <p:nvSpPr>
-          <p:cNvPr id="43" name="Text 40"/>
-          <p:cNvSpPr txBox="1"/>
-          <p:nvPr/>
-        </p:nvSpPr>
-        <p:spPr>
-          <a:xfrm>
-            <a:off x="8412480" y="1993392"/>
-            <a:ext cx="365760" cy="228600"/>
-          </a:xfrm>
-          <a:prstGeom prst="rect">
-            <a:avLst/>
-          </a:prstGeom>
-          <a:noFill/>
-          <a:ln/>
-        </p:spPr>
-        <p:txBody>
-          <a:bodyPr wrap="square" lIns="0" tIns="0" rIns="0" bIns="0" rtlCol="0" anchor="ctr"/>
-          <a:lstStyle/>
-          <a:p>
-            <a:pPr algn="r" indent="0" marL="0">
-              <a:lnSpc>
-                <a:spcPct val="115000"/>
-              </a:lnSpc>
-              <a:buNone/>
-            </a:pPr>
-            <a:r>
-              <a:rPr lang="en-US" sz="800" dirty="0">
-                <a:solidFill>
-                  <a:srgbClr val="4D4D4D"/>
-                </a:solidFill>
-                <a:latin typeface="Meiryo" pitchFamily="34" charset="0"/>
-                <a:ea typeface="Meiryo" pitchFamily="34" charset="-122"/>
-                <a:cs typeface="Meiryo" pitchFamily="34" charset="-120"/>
-              </a:rPr>
-              <a:t>2025</a:t>
-            </a:r>
-            <a:endParaRPr lang="en-US" sz="800" dirty="0"/>
-          </a:p>
-        </p:txBody>
-      </p:sp>
-      <p:sp>
-        <p:nvSpPr>
-          <p:cNvPr id="44" name="Shape 41"/>
-          <p:cNvSpPr/>
-          <p:nvPr/>
-        </p:nvSpPr>
-        <p:spPr>
-          <a:xfrm>
-            <a:off x="4617720" y="2221992"/>
-            <a:ext cx="4160520" cy="0"/>
-          </a:xfrm>
-          <a:prstGeom prst="line">
-            <a:avLst/>
-          </a:prstGeom>
-          <a:noFill/>
-          <a:ln w="9525">
-            <a:solidFill>
-              <a:srgbClr val="BFBFBF"/>
-            </a:solidFill>
-            <a:prstDash val="solid"/>
-          </a:ln>
-        </p:spPr>
-      </p:sp>
-      <p:sp>
-        <p:nvSpPr>
-          <p:cNvPr id="45" name="Text 42"/>
-          <p:cNvSpPr txBox="1"/>
-          <p:nvPr/>
-        </p:nvSpPr>
-        <p:spPr>
-          <a:xfrm>
-            <a:off x="4617720" y="2221992"/>
-            <a:ext cx="1325880" cy="228600"/>
-          </a:xfrm>
-          <a:prstGeom prst="rect">
-            <a:avLst/>
-          </a:prstGeom>
-          <a:noFill/>
-          <a:ln/>
-        </p:spPr>
-        <p:txBody>
-          <a:bodyPr wrap="square" lIns="0" tIns="0" rIns="0" bIns="0" rtlCol="0" anchor="ctr"/>
-          <a:lstStyle/>
-          <a:p>
-            <a:pPr algn="l" indent="0" marL="0">
-              <a:lnSpc>
-                <a:spcPct val="115000"/>
-              </a:lnSpc>
-              <a:buNone/>
-            </a:pPr>
-            <a:r>
-              <a:rPr lang="en-US" sz="850" b="1" dirty="0">
-                <a:solidFill>
-                  <a:srgbClr val="1A1A1A"/>
-                </a:solidFill>
-                <a:latin typeface="Meiryo" pitchFamily="34" charset="0"/>
-                <a:ea typeface="Meiryo" pitchFamily="34" charset="-122"/>
-                <a:cs typeface="Meiryo" pitchFamily="34" charset="-120"/>
-              </a:rPr>
-              <a:t>川崎重工×NTTデータ</a:t>
-            </a:r>
-            <a:endParaRPr lang="en-US" sz="850" dirty="0"/>
-          </a:p>
-        </p:txBody>
-      </p:sp>
-      <p:sp>
-        <p:nvSpPr>
-          <p:cNvPr id="46" name="Text 43"/>
-          <p:cNvSpPr txBox="1"/>
-          <p:nvPr/>
-        </p:nvSpPr>
-        <p:spPr>
-          <a:xfrm>
-            <a:off x="5943600" y="2221992"/>
-            <a:ext cx="2468880" cy="228600"/>
-          </a:xfrm>
-          <a:prstGeom prst="rect">
-            <a:avLst/>
-          </a:prstGeom>
-          <a:noFill/>
-          <a:ln/>
-        </p:spPr>
-        <p:txBody>
-          <a:bodyPr wrap="square" lIns="0" tIns="0" rIns="0" bIns="0" rtlCol="0" anchor="ctr"/>
-          <a:lstStyle/>
-          <a:p>
-            <a:pPr algn="l" indent="0" marL="0">
-              <a:lnSpc>
-                <a:spcPct val="115000"/>
-              </a:lnSpc>
-              <a:buNone/>
-            </a:pPr>
-            <a:r>
-              <a:rPr lang="en-US" sz="800" dirty="0">
-                <a:solidFill>
-                  <a:srgbClr val="1A1A1A"/>
-                </a:solidFill>
-                <a:latin typeface="Meiryo" pitchFamily="34" charset="0"/>
-                <a:ea typeface="Meiryo" pitchFamily="34" charset="-122"/>
-                <a:cs typeface="Meiryo" pitchFamily="34" charset="-120"/>
-              </a:rPr>
-              <a:t>生成AIによる暗黙知伝承</a:t>
-            </a:r>
-            <a:endParaRPr lang="en-US" sz="800" dirty="0"/>
-          </a:p>
-        </p:txBody>
-      </p:sp>
-      <p:sp>
-        <p:nvSpPr>
-          <p:cNvPr id="47" name="Text 44"/>
-          <p:cNvSpPr txBox="1"/>
-          <p:nvPr/>
-        </p:nvSpPr>
-        <p:spPr>
-          <a:xfrm>
-            <a:off x="8412480" y="2221992"/>
-            <a:ext cx="365760" cy="228600"/>
-          </a:xfrm>
-          <a:prstGeom prst="rect">
-            <a:avLst/>
-          </a:prstGeom>
-          <a:noFill/>
-          <a:ln/>
-        </p:spPr>
-        <p:txBody>
-          <a:bodyPr wrap="square" lIns="0" tIns="0" rIns="0" bIns="0" rtlCol="0" anchor="ctr"/>
-          <a:lstStyle/>
-          <a:p>
-            <a:pPr algn="r" indent="0" marL="0">
-              <a:lnSpc>
-                <a:spcPct val="115000"/>
-              </a:lnSpc>
-              <a:buNone/>
-            </a:pPr>
-            <a:r>
-              <a:rPr lang="en-US" sz="800" dirty="0">
-                <a:solidFill>
-                  <a:srgbClr val="4D4D4D"/>
-                </a:solidFill>
-                <a:latin typeface="Meiryo" pitchFamily="34" charset="0"/>
-                <a:ea typeface="Meiryo" pitchFamily="34" charset="-122"/>
-                <a:cs typeface="Meiryo" pitchFamily="34" charset="-120"/>
-              </a:rPr>
-              <a:t>2025</a:t>
-            </a:r>
-            <a:endParaRPr lang="en-US" sz="800" dirty="0"/>
-          </a:p>
-        </p:txBody>
-      </p:sp>
-      <p:sp>
-        <p:nvSpPr>
-          <p:cNvPr id="48" name="Shape 45"/>
-          <p:cNvSpPr/>
-          <p:nvPr/>
-        </p:nvSpPr>
-        <p:spPr>
-          <a:xfrm>
-            <a:off x="4617720" y="2450592"/>
-            <a:ext cx="4160520" cy="0"/>
-          </a:xfrm>
-          <a:prstGeom prst="line">
-            <a:avLst/>
-          </a:prstGeom>
-          <a:noFill/>
-          <a:ln w="9525">
-            <a:solidFill>
-              <a:srgbClr val="BFBFBF"/>
-            </a:solidFill>
-            <a:prstDash val="solid"/>
-          </a:ln>
-        </p:spPr>
-      </p:sp>
-      <p:sp>
-        <p:nvSpPr>
-          <p:cNvPr id="49" name="precedent-summary"/>
-          <p:cNvSpPr/>
-          <p:nvPr/>
-        </p:nvSpPr>
-        <p:spPr>
-          <a:xfrm>
-            <a:off x="4617720" y="2514600"/>
-            <a:ext cx="4160520" cy="457200"/>
+            <a:off x="4526280" y="3145536"/>
+            <a:ext cx="4251960" cy="603504"/>
           </a:xfrm>
           <a:prstGeom prst="rect">
             <a:avLst/>
@@ -11583,14 +12403,14 @@
       </p:sp>
       <p:sp>
         <p:nvSpPr>
-          <p:cNvPr id="50" name="Text 47"/>
+          <p:cNvPr id="30" name="Text 26"/>
           <p:cNvSpPr txBox="1"/>
           <p:nvPr/>
         </p:nvSpPr>
         <p:spPr>
           <a:xfrm>
-            <a:off x="4727448" y="2514600"/>
-            <a:ext cx="3941064" cy="457200"/>
+            <a:off x="4636008" y="3145536"/>
+            <a:ext cx="4032504" cy="603504"/>
           </a:xfrm>
           <a:prstGeom prst="rect">
             <a:avLst/>
@@ -11606,6 +12426,9 @@
               <a:lnSpc>
                 <a:spcPct val="115000"/>
               </a:lnSpc>
+              <a:spcAft>
+                <a:spcPts val="200"/>
+              </a:spcAft>
               <a:buNone/>
             </a:pPr>
             <a:r>
@@ -11617,12 +12440,15 @@
                 <a:ea typeface="Meiryo" pitchFamily="34" charset="-122"/>
                 <a:cs typeface="Meiryo" pitchFamily="34" charset="-120"/>
               </a:rPr>
-              <a:t>共通点：</a:t>
-            </a:r>
-            <a:pPr algn="l" indent="0" marL="0">
-              <a:lnSpc>
-                <a:spcPct val="115000"/>
-              </a:lnSpc>
+              <a:t>最大の脅威：</a:t>
+            </a:r>
+            <a:pPr algn="l" indent="0" marL="0">
+              <a:lnSpc>
+                <a:spcPct val="115000"/>
+              </a:lnSpc>
+              <a:spcAft>
+                <a:spcPts val="200"/>
+              </a:spcAft>
               <a:buNone/>
             </a:pPr>
             <a:r>
@@ -11634,22 +12460,65 @@
                 <a:ea typeface="Meiryo" pitchFamily="34" charset="-122"/>
                 <a:cs typeface="Meiryo" pitchFamily="34" charset="-120"/>
               </a:rPr>
-              <a:t>大手が大手SIerと個別開発。中堅の工場には予算も人手も届かない。電力インフラでは、古河電工がスマートグラスでの技術伝承を構想する段階</a:t>
+              <a:t>CADDiが連続工程に降りてくること。課題認識は同じ（「製造業の叡智の8割以上は暗黙知」）</a:t>
             </a:r>
             <a:endParaRPr lang="en-US" sz="850" dirty="0"/>
           </a:p>
-        </p:txBody>
-      </p:sp>
-      <p:sp>
-        <p:nvSpPr>
-          <p:cNvPr id="51" name="Text 48"/>
+          <a:p>
+            <a:pPr algn="l" indent="0" marL="0">
+              <a:lnSpc>
+                <a:spcPct val="115000"/>
+              </a:lnSpc>
+              <a:spcAft>
+                <a:spcPts val="200"/>
+              </a:spcAft>
+              <a:buNone/>
+            </a:pPr>
+            <a:r>
+              <a:rPr lang="en-US" sz="850" b="1" dirty="0">
+                <a:solidFill>
+                  <a:srgbClr val="FFFFFF"/>
+                </a:solidFill>
+                <a:latin typeface="Meiryo" pitchFamily="34" charset="0"/>
+                <a:ea typeface="Meiryo" pitchFamily="34" charset="-122"/>
+                <a:cs typeface="Meiryo" pitchFamily="34" charset="-120"/>
+              </a:rPr>
+              <a:t>防御線：</a:t>
+            </a:r>
+            <a:pPr algn="l" indent="0" marL="0">
+              <a:lnSpc>
+                <a:spcPct val="115000"/>
+              </a:lnSpc>
+              <a:spcAft>
+                <a:spcPts val="200"/>
+              </a:spcAft>
+              <a:buNone/>
+            </a:pPr>
+            <a:r>
+              <a:rPr lang="en-US" sz="850" dirty="0">
+                <a:solidFill>
+                  <a:srgbClr val="FFFFFF"/>
+                </a:solidFill>
+                <a:latin typeface="Meiryo" pitchFamily="34" charset="0"/>
+                <a:ea typeface="Meiryo" pitchFamily="34" charset="-122"/>
+                <a:cs typeface="Meiryo" pitchFamily="34" charset="-120"/>
+              </a:rPr>
+              <a:t>図面に現れない現場処置の蓄積と、現場で監修できる人</a:t>
+            </a:r>
+            <a:endParaRPr lang="en-US" sz="850" dirty="0"/>
+          </a:p>
+        </p:txBody>
+      </p:sp>
+      <p:sp>
+        <p:nvSpPr>
+          <p:cNvPr id="31" name="Text 27"/>
           <p:cNvSpPr txBox="1"/>
           <p:nvPr/>
         </p:nvSpPr>
         <p:spPr>
           <a:xfrm>
-            <a:off x="4617720" y="3063240"/>
-            <a:ext cx="4160520" cy="237744"/>
+            <a:off x="4526280" y="3822192"/>
+            <a:ext cx="4251960" cy="457200"/>
           </a:xfrm>
           <a:prstGeom prst="rect">
             <a:avLst/>
@@ -11665,10 +12534,13 @@
               <a:lnSpc>
                 <a:spcPct val="115000"/>
               </a:lnSpc>
-              <a:buNone/>
-            </a:pPr>
-            <a:r>
-              <a:rPr lang="en-US" sz="1050" b="1" dirty="0">
+              <a:spcAft>
+                <a:spcPts val="200"/>
+              </a:spcAft>
+              <a:buNone/>
+            </a:pPr>
+            <a:r>
+              <a:rPr lang="en-US" sz="850" b="1" dirty="0">
                 <a:solidFill>
                   <a:srgbClr val="1A1A1A"/>
                 </a:solidFill>
@@ -11676,42 +12548,85 @@
                 <a:ea typeface="Meiryo" pitchFamily="34" charset="-122"/>
                 <a:cs typeface="Meiryo" pitchFamily="34" charset="-120"/>
               </a:rPr>
-              <a:t>STP と競争戦略</a:t>
-            </a:r>
-            <a:endParaRPr lang="en-US" sz="1050" dirty="0"/>
-          </a:p>
-        </p:txBody>
-      </p:sp>
-      <p:sp>
-        <p:nvSpPr>
-          <p:cNvPr id="52" name="Shape 49"/>
-          <p:cNvSpPr/>
-          <p:nvPr/>
-        </p:nvSpPr>
-        <p:spPr>
-          <a:xfrm>
-            <a:off x="4617720" y="3328416"/>
-            <a:ext cx="274320" cy="201168"/>
-          </a:xfrm>
-          <a:prstGeom prst="rect">
-            <a:avLst/>
-          </a:prstGeom>
-          <a:solidFill>
-            <a:srgbClr val="1A1A1A"/>
-          </a:solidFill>
-          <a:ln/>
-        </p:spPr>
-      </p:sp>
-      <p:sp>
-        <p:nvSpPr>
-          <p:cNvPr id="53" name="Text 50"/>
+              <a:t>STP：</a:t>
+            </a:r>
+            <a:pPr algn="l" indent="0" marL="0">
+              <a:lnSpc>
+                <a:spcPct val="115000"/>
+              </a:lnSpc>
+              <a:spcAft>
+                <a:spcPts val="200"/>
+              </a:spcAft>
+              <a:buNone/>
+            </a:pPr>
+            <a:r>
+              <a:rPr lang="en-US" sz="850" dirty="0">
+                <a:solidFill>
+                  <a:srgbClr val="1A1A1A"/>
+                </a:solidFill>
+                <a:latin typeface="Meiryo" pitchFamily="34" charset="0"/>
+                <a:ea typeface="Meiryo" pitchFamily="34" charset="-122"/>
+                <a:cs typeface="Meiryo" pitchFamily="34" charset="-120"/>
+              </a:rPr>
+              <a:t>工程の形（連続／組立／施工）×規模で区分し、中堅の電線工場を狙う</a:t>
+            </a:r>
+            <a:endParaRPr lang="en-US" sz="850" dirty="0"/>
+          </a:p>
+          <a:p>
+            <a:pPr algn="l" indent="0" marL="0">
+              <a:lnSpc>
+                <a:spcPct val="115000"/>
+              </a:lnSpc>
+              <a:spcAft>
+                <a:spcPts val="200"/>
+              </a:spcAft>
+              <a:buNone/>
+            </a:pPr>
+            <a:r>
+              <a:rPr lang="en-US" sz="850" b="1" dirty="0">
+                <a:solidFill>
+                  <a:srgbClr val="1A1A1A"/>
+                </a:solidFill>
+                <a:latin typeface="Meiryo" pitchFamily="34" charset="0"/>
+                <a:ea typeface="Meiryo" pitchFamily="34" charset="-122"/>
+                <a:cs typeface="Meiryo" pitchFamily="34" charset="-120"/>
+              </a:rPr>
+              <a:t>競争戦略：</a:t>
+            </a:r>
+            <a:pPr algn="l" indent="0" marL="0">
+              <a:lnSpc>
+                <a:spcPct val="115000"/>
+              </a:lnSpc>
+              <a:spcAft>
+                <a:spcPts val="200"/>
+              </a:spcAft>
+              <a:buNone/>
+            </a:pPr>
+            <a:r>
+              <a:rPr lang="en-US" sz="850" dirty="0">
+                <a:solidFill>
+                  <a:srgbClr val="1A1A1A"/>
+                </a:solidFill>
+                <a:latin typeface="Meiryo" pitchFamily="34" charset="0"/>
+                <a:ea typeface="Meiryo" pitchFamily="34" charset="-122"/>
+                <a:cs typeface="Meiryo" pitchFamily="34" charset="-120"/>
+              </a:rPr>
+              <a:t>ニッチャー（コトラー）×差別化集中（ポーター）。大手の内製は個別開発で中堅に届かない</a:t>
+            </a:r>
+            <a:endParaRPr lang="en-US" sz="850" dirty="0"/>
+          </a:p>
+        </p:txBody>
+      </p:sp>
+      <p:sp>
+        <p:nvSpPr>
+          <p:cNvPr id="32" name="Text 28"/>
           <p:cNvSpPr txBox="1"/>
           <p:nvPr/>
         </p:nvSpPr>
         <p:spPr>
           <a:xfrm>
-            <a:off x="4617720" y="3328416"/>
-            <a:ext cx="274320" cy="201168"/>
+            <a:off x="365760" y="4553712"/>
+            <a:ext cx="8412480" cy="256032"/>
           </a:xfrm>
           <a:prstGeom prst="rect">
             <a:avLst/>
@@ -11720,298 +12635,6 @@
           <a:ln/>
         </p:spPr>
         <p:txBody>
-          <a:bodyPr wrap="square" lIns="0" tIns="0" rIns="0" bIns="0" rtlCol="0" anchor="ctr"/>
-          <a:lstStyle/>
-          <a:p>
-            <a:pPr algn="ctr" indent="0" marL="0">
-              <a:lnSpc>
-                <a:spcPct val="115000"/>
-              </a:lnSpc>
-              <a:buNone/>
-            </a:pPr>
-            <a:r>
-              <a:rPr lang="en-US" sz="900" b="1" dirty="0">
-                <a:solidFill>
-                  <a:srgbClr val="FFFFFF"/>
-                </a:solidFill>
-                <a:latin typeface="Meiryo" pitchFamily="34" charset="0"/>
-                <a:ea typeface="Meiryo" pitchFamily="34" charset="-122"/>
-                <a:cs typeface="Meiryo" pitchFamily="34" charset="-120"/>
-              </a:rPr>
-              <a:t>S</a:t>
-            </a:r>
-            <a:endParaRPr lang="en-US" sz="900" dirty="0"/>
-          </a:p>
-        </p:txBody>
-      </p:sp>
-      <p:sp>
-        <p:nvSpPr>
-          <p:cNvPr id="54" name="Text 51"/>
-          <p:cNvSpPr txBox="1"/>
-          <p:nvPr/>
-        </p:nvSpPr>
-        <p:spPr>
-          <a:xfrm>
-            <a:off x="4983480" y="3300984"/>
-            <a:ext cx="3794760" cy="256032"/>
-          </a:xfrm>
-          <a:prstGeom prst="rect">
-            <a:avLst/>
-          </a:prstGeom>
-          <a:noFill/>
-          <a:ln/>
-        </p:spPr>
-        <p:txBody>
-          <a:bodyPr wrap="square" lIns="0" tIns="0" rIns="0" bIns="0" rtlCol="0" anchor="ctr"/>
-          <a:lstStyle/>
-          <a:p>
-            <a:pPr algn="l" indent="0" marL="0">
-              <a:lnSpc>
-                <a:spcPct val="115000"/>
-              </a:lnSpc>
-              <a:buNone/>
-            </a:pPr>
-            <a:r>
-              <a:rPr lang="en-US" sz="850" dirty="0">
-                <a:solidFill>
-                  <a:srgbClr val="1A1A1A"/>
-                </a:solidFill>
-                <a:latin typeface="Meiryo" pitchFamily="34" charset="0"/>
-                <a:ea typeface="Meiryo" pitchFamily="34" charset="-122"/>
-                <a:cs typeface="Meiryo" pitchFamily="34" charset="-120"/>
-              </a:rPr>
-              <a:t>製造業を工程と規模で区分：大手（内製できる）／中堅（できない）</a:t>
-            </a:r>
-            <a:endParaRPr lang="en-US" sz="850" dirty="0"/>
-          </a:p>
-        </p:txBody>
-      </p:sp>
-      <p:sp>
-        <p:nvSpPr>
-          <p:cNvPr id="55" name="Shape 52"/>
-          <p:cNvSpPr/>
-          <p:nvPr/>
-        </p:nvSpPr>
-        <p:spPr>
-          <a:xfrm>
-            <a:off x="4617720" y="3593592"/>
-            <a:ext cx="274320" cy="201168"/>
-          </a:xfrm>
-          <a:prstGeom prst="rect">
-            <a:avLst/>
-          </a:prstGeom>
-          <a:solidFill>
-            <a:srgbClr val="1A1A1A"/>
-          </a:solidFill>
-          <a:ln/>
-        </p:spPr>
-      </p:sp>
-      <p:sp>
-        <p:nvSpPr>
-          <p:cNvPr id="56" name="Text 53"/>
-          <p:cNvSpPr txBox="1"/>
-          <p:nvPr/>
-        </p:nvSpPr>
-        <p:spPr>
-          <a:xfrm>
-            <a:off x="4617720" y="3593592"/>
-            <a:ext cx="274320" cy="201168"/>
-          </a:xfrm>
-          <a:prstGeom prst="rect">
-            <a:avLst/>
-          </a:prstGeom>
-          <a:noFill/>
-          <a:ln/>
-        </p:spPr>
-        <p:txBody>
-          <a:bodyPr wrap="square" lIns="0" tIns="0" rIns="0" bIns="0" rtlCol="0" anchor="ctr"/>
-          <a:lstStyle/>
-          <a:p>
-            <a:pPr algn="ctr" indent="0" marL="0">
-              <a:lnSpc>
-                <a:spcPct val="115000"/>
-              </a:lnSpc>
-              <a:buNone/>
-            </a:pPr>
-            <a:r>
-              <a:rPr lang="en-US" sz="900" b="1" dirty="0">
-                <a:solidFill>
-                  <a:srgbClr val="FFFFFF"/>
-                </a:solidFill>
-                <a:latin typeface="Meiryo" pitchFamily="34" charset="0"/>
-                <a:ea typeface="Meiryo" pitchFamily="34" charset="-122"/>
-                <a:cs typeface="Meiryo" pitchFamily="34" charset="-120"/>
-              </a:rPr>
-              <a:t>T</a:t>
-            </a:r>
-            <a:endParaRPr lang="en-US" sz="900" dirty="0"/>
-          </a:p>
-        </p:txBody>
-      </p:sp>
-      <p:sp>
-        <p:nvSpPr>
-          <p:cNvPr id="57" name="Text 54"/>
-          <p:cNvSpPr txBox="1"/>
-          <p:nvPr/>
-        </p:nvSpPr>
-        <p:spPr>
-          <a:xfrm>
-            <a:off x="4983480" y="3566160"/>
-            <a:ext cx="3794760" cy="256032"/>
-          </a:xfrm>
-          <a:prstGeom prst="rect">
-            <a:avLst/>
-          </a:prstGeom>
-          <a:noFill/>
-          <a:ln/>
-        </p:spPr>
-        <p:txBody>
-          <a:bodyPr wrap="square" lIns="0" tIns="0" rIns="0" bIns="0" rtlCol="0" anchor="ctr"/>
-          <a:lstStyle/>
-          <a:p>
-            <a:pPr algn="l" indent="0" marL="0">
-              <a:lnSpc>
-                <a:spcPct val="115000"/>
-              </a:lnSpc>
-              <a:buNone/>
-            </a:pPr>
-            <a:r>
-              <a:rPr lang="en-US" sz="850" dirty="0">
-                <a:solidFill>
-                  <a:srgbClr val="1A1A1A"/>
-                </a:solidFill>
-                <a:latin typeface="Meiryo" pitchFamily="34" charset="0"/>
-                <a:ea typeface="Meiryo" pitchFamily="34" charset="-122"/>
-                <a:cs typeface="Meiryo" pitchFamily="34" charset="-120"/>
-              </a:rPr>
-              <a:t>中堅の電線・ケーブル工場。熟練者の判断が品質を左右する</a:t>
-            </a:r>
-            <a:endParaRPr lang="en-US" sz="850" dirty="0"/>
-          </a:p>
-        </p:txBody>
-      </p:sp>
-      <p:sp>
-        <p:nvSpPr>
-          <p:cNvPr id="58" name="Shape 55"/>
-          <p:cNvSpPr/>
-          <p:nvPr/>
-        </p:nvSpPr>
-        <p:spPr>
-          <a:xfrm>
-            <a:off x="4617720" y="3858768"/>
-            <a:ext cx="274320" cy="201168"/>
-          </a:xfrm>
-          <a:prstGeom prst="rect">
-            <a:avLst/>
-          </a:prstGeom>
-          <a:solidFill>
-            <a:srgbClr val="1A1A1A"/>
-          </a:solidFill>
-          <a:ln/>
-        </p:spPr>
-      </p:sp>
-      <p:sp>
-        <p:nvSpPr>
-          <p:cNvPr id="59" name="Text 56"/>
-          <p:cNvSpPr txBox="1"/>
-          <p:nvPr/>
-        </p:nvSpPr>
-        <p:spPr>
-          <a:xfrm>
-            <a:off x="4617720" y="3858768"/>
-            <a:ext cx="274320" cy="201168"/>
-          </a:xfrm>
-          <a:prstGeom prst="rect">
-            <a:avLst/>
-          </a:prstGeom>
-          <a:noFill/>
-          <a:ln/>
-        </p:spPr>
-        <p:txBody>
-          <a:bodyPr wrap="square" lIns="0" tIns="0" rIns="0" bIns="0" rtlCol="0" anchor="ctr"/>
-          <a:lstStyle/>
-          <a:p>
-            <a:pPr algn="ctr" indent="0" marL="0">
-              <a:lnSpc>
-                <a:spcPct val="115000"/>
-              </a:lnSpc>
-              <a:buNone/>
-            </a:pPr>
-            <a:r>
-              <a:rPr lang="en-US" sz="900" b="1" dirty="0">
-                <a:solidFill>
-                  <a:srgbClr val="FFFFFF"/>
-                </a:solidFill>
-                <a:latin typeface="Meiryo" pitchFamily="34" charset="0"/>
-                <a:ea typeface="Meiryo" pitchFamily="34" charset="-122"/>
-                <a:cs typeface="Meiryo" pitchFamily="34" charset="-120"/>
-              </a:rPr>
-              <a:t>P</a:t>
-            </a:r>
-            <a:endParaRPr lang="en-US" sz="900" dirty="0"/>
-          </a:p>
-        </p:txBody>
-      </p:sp>
-      <p:sp>
-        <p:nvSpPr>
-          <p:cNvPr id="60" name="Text 57"/>
-          <p:cNvSpPr txBox="1"/>
-          <p:nvPr/>
-        </p:nvSpPr>
-        <p:spPr>
-          <a:xfrm>
-            <a:off x="4983480" y="3831336"/>
-            <a:ext cx="3794760" cy="256032"/>
-          </a:xfrm>
-          <a:prstGeom prst="rect">
-            <a:avLst/>
-          </a:prstGeom>
-          <a:noFill/>
-          <a:ln/>
-        </p:spPr>
-        <p:txBody>
-          <a:bodyPr wrap="square" lIns="0" tIns="0" rIns="0" bIns="0" rtlCol="0" anchor="ctr"/>
-          <a:lstStyle/>
-          <a:p>
-            <a:pPr algn="l" indent="0" marL="0">
-              <a:lnSpc>
-                <a:spcPct val="115000"/>
-              </a:lnSpc>
-              <a:buNone/>
-            </a:pPr>
-            <a:r>
-              <a:rPr lang="en-US" sz="850" dirty="0">
-                <a:solidFill>
-                  <a:srgbClr val="1A1A1A"/>
-                </a:solidFill>
-                <a:latin typeface="Meiryo" pitchFamily="34" charset="0"/>
-                <a:ea typeface="Meiryo" pitchFamily="34" charset="-122"/>
-                <a:cs typeface="Meiryo" pitchFamily="34" charset="-120"/>
-              </a:rPr>
-              <a:t>大手の内製と同じことを、教材制作込みのサービスで中堅に届ける</a:t>
-            </a:r>
-            <a:endParaRPr lang="en-US" sz="850" dirty="0"/>
-          </a:p>
-        </p:txBody>
-      </p:sp>
-      <p:sp>
-        <p:nvSpPr>
-          <p:cNvPr id="61" name="Text 58"/>
-          <p:cNvSpPr txBox="1"/>
-          <p:nvPr/>
-        </p:nvSpPr>
-        <p:spPr>
-          <a:xfrm>
-            <a:off x="4617720" y="4123944"/>
-            <a:ext cx="4160520" cy="329184"/>
-          </a:xfrm>
-          <a:prstGeom prst="rect">
-            <a:avLst/>
-          </a:prstGeom>
-          <a:noFill/>
-          <a:ln/>
-        </p:spPr>
-        <p:txBody>
           <a:bodyPr wrap="square" lIns="0" tIns="0" rIns="0" bIns="0" rtlCol="0" anchor="t"/>
           <a:lstStyle/>
           <a:p>
@@ -12019,126 +12642,18 @@
               <a:lnSpc>
                 <a:spcPct val="115000"/>
               </a:lnSpc>
-              <a:spcAft>
-                <a:spcPts val="100"/>
-              </a:spcAft>
-              <a:buNone/>
-            </a:pPr>
-            <a:r>
-              <a:rPr lang="en-US" sz="850" b="1" dirty="0">
-                <a:solidFill>
-                  <a:srgbClr val="1A1A1A"/>
-                </a:solidFill>
-                <a:latin typeface="Meiryo" pitchFamily="34" charset="0"/>
-                <a:ea typeface="Meiryo" pitchFamily="34" charset="-122"/>
-                <a:cs typeface="Meiryo" pitchFamily="34" charset="-120"/>
-              </a:rPr>
-              <a:t>競争戦略：</a:t>
-            </a:r>
-            <a:pPr algn="l" indent="0" marL="0">
-              <a:lnSpc>
-                <a:spcPct val="115000"/>
-              </a:lnSpc>
-              <a:spcAft>
-                <a:spcPts val="100"/>
-              </a:spcAft>
-              <a:buNone/>
-            </a:pPr>
-            <a:r>
-              <a:rPr lang="en-US" sz="850" dirty="0">
-                <a:solidFill>
-                  <a:srgbClr val="1A1A1A"/>
-                </a:solidFill>
-                <a:latin typeface="Meiryo" pitchFamily="34" charset="0"/>
-                <a:ea typeface="Meiryo" pitchFamily="34" charset="-122"/>
-                <a:cs typeface="Meiryo" pitchFamily="34" charset="-120"/>
-              </a:rPr>
-              <a:t>ニッチャー（コトラー）×差別化集中（ポーター）</a:t>
-            </a:r>
-            <a:endParaRPr lang="en-US" sz="850" dirty="0"/>
-          </a:p>
-          <a:p>
-            <a:pPr algn="l" indent="0" marL="0">
-              <a:lnSpc>
-                <a:spcPct val="115000"/>
-              </a:lnSpc>
-              <a:spcAft>
-                <a:spcPts val="100"/>
-              </a:spcAft>
-              <a:buNone/>
-            </a:pPr>
-            <a:r>
-              <a:rPr lang="en-US" sz="850" b="1" dirty="0">
-                <a:solidFill>
-                  <a:srgbClr val="1A1A1A"/>
-                </a:solidFill>
-                <a:latin typeface="Meiryo" pitchFamily="34" charset="0"/>
-                <a:ea typeface="Meiryo" pitchFamily="34" charset="-122"/>
-                <a:cs typeface="Meiryo" pitchFamily="34" charset="-120"/>
-              </a:rPr>
-              <a:t>弱み：</a:t>
-            </a:r>
-            <a:pPr algn="l" indent="0" marL="0">
-              <a:lnSpc>
-                <a:spcPct val="115000"/>
-              </a:lnSpc>
-              <a:spcAft>
-                <a:spcPts val="100"/>
-              </a:spcAft>
-              <a:buNone/>
-            </a:pPr>
-            <a:r>
-              <a:rPr lang="en-US" sz="850" dirty="0">
-                <a:solidFill>
-                  <a:srgbClr val="1A1A1A"/>
-                </a:solidFill>
-                <a:latin typeface="Meiryo" pitchFamily="34" charset="0"/>
-                <a:ea typeface="Meiryo" pitchFamily="34" charset="-122"/>
-                <a:cs typeface="Meiryo" pitchFamily="34" charset="-120"/>
-              </a:rPr>
-              <a:t>製造現場の実務経験が浅い／営業・資金調達が未経験</a:t>
-            </a:r>
-            <a:endParaRPr lang="en-US" sz="850" dirty="0"/>
-          </a:p>
-        </p:txBody>
-      </p:sp>
-      <p:sp>
-        <p:nvSpPr>
-          <p:cNvPr id="62" name="Text 59"/>
-          <p:cNvSpPr txBox="1"/>
-          <p:nvPr/>
-        </p:nvSpPr>
-        <p:spPr>
-          <a:xfrm>
-            <a:off x="365760" y="4535424"/>
-            <a:ext cx="8412480" cy="310896"/>
-          </a:xfrm>
-          <a:prstGeom prst="rect">
-            <a:avLst/>
-          </a:prstGeom>
-          <a:noFill/>
-          <a:ln/>
-        </p:spPr>
-        <p:txBody>
-          <a:bodyPr wrap="square" lIns="0" tIns="0" rIns="0" bIns="0" rtlCol="0" anchor="t"/>
-          <a:lstStyle/>
-          <a:p>
-            <a:pPr algn="l" indent="0" marL="0">
-              <a:lnSpc>
-                <a:spcPct val="115000"/>
-              </a:lnSpc>
               <a:buNone/>
             </a:pPr>
             <a:r>
               <a:rPr lang="en-US" sz="800" dirty="0">
                 <a:solidFill>
-                  <a:srgbClr val="4D4D4D"/>
-                </a:solidFill>
-                <a:latin typeface="Meiryo" pitchFamily="34" charset="0"/>
-                <a:ea typeface="Meiryo" pitchFamily="34" charset="-122"/>
-                <a:cs typeface="Meiryo" pitchFamily="34" charset="-120"/>
-              </a:rPr>
-              <a:t>出典：日立製作所・ダイキン工業（2017年9月）、NEC（2022年11月）、ライオン・NTTデータ（2024年6月）、日立（2025年6月）、NTTデータ（2025年12月）、MONOist 古河電工インタビュー（2021年3月）。※電力インフラに公開事例が見当たらないことは、存在しないことを意味しない</a:t>
+                  <a:srgbClr val="8C8C8C"/>
+                </a:solidFill>
+                <a:latin typeface="Meiryo" pitchFamily="34" charset="0"/>
+                <a:ea typeface="Meiryo" pitchFamily="34" charset="-122"/>
+                <a:cs typeface="Meiryo" pitchFamily="34" charset="-120"/>
+              </a:rPr>
+              <a:t>出典：各社公表資料（Airion 2025年7月、キャディ 2026年8月6日、三菱総合研究所、FRONTEO、tebiki、スタディスト）。詳細と大手の内製事例は補足資料</a:t>
             </a:r>
             <a:endParaRPr lang="en-US" sz="800" dirty="0"/>
           </a:p>
@@ -18217,7 +18732,7 @@
                 <a:ea typeface="Meiryo" pitchFamily="34" charset="-122"/>
                 <a:cs typeface="Meiryo" pitchFamily="34" charset="-120"/>
               </a:rPr>
-              <a:t>大手SIer・ロボットベンダーの参入</a:t>
+              <a:t>CADDiなど大手基盤の連続工程参入</a:t>
             </a:r>
             <a:endParaRPr lang="en-US" sz="1400" dirty="0"/>
           </a:p>
@@ -18237,7 +18752,7 @@
                 <a:ea typeface="Meiryo" pitchFamily="34" charset="-122"/>
                 <a:cs typeface="Meiryo" pitchFamily="34" charset="-120"/>
               </a:rPr>
-              <a:t>→ 蓄積した判断記録が障壁。機能は模倣可能、現場の履歴は移設不能</a:t>
+              <a:t>→ 図面に現れない現場処置の蓄積と監修人材が障壁</a:t>
             </a:r>
             <a:endParaRPr lang="en-US" sz="1400" dirty="0"/>
           </a:p>

--- a/deck/セルフマネジメント課題_事業構想プレゼン.pptx
+++ b/deck/セルフマネジメント課題_事業構想プレゼン.pptx
@@ -2225,8 +2225,8 @@
             <a:r>
               <a:rPr lang="en-US" dirty="0"/>
               <a:t>【2:00 - 3:30】
-要約：引退した熟練者が隣で教えてくれる現場をつくる。差別化は、教材にして届けること
-設問①、解決策です。目指すのは、引退した熟練者が隣で教えてくれるような現場です。熟練者は、異常に対処したらタブレットに音声で一言残すだけです。構造化を現場に求めない設計で、これは国の人工知能基本計画の方針とも一致します。生成AIがそれを条件・処置・理由に分けて事例にします。ただ、記録と整理はすでに他社も手がけており、当社の差別化にはなりません。差別化は三つ目です。指導役が足りない事業所は59.5%、育成の時間がない事業所は47.4%あります。貯めたデータから教材を作る作業が現場に残ると、使われません。だから当社が、連続工程の勘どころを研修資料、通勤中に聞ける音声番組、短い動画にして届けます。教材化は初年度から提供し、その後、危険箇所の表示、3Dの仮想工場、音声での作図と渡し方を増やします。技術は作らない部分を決めています。音声記録やAIの構造化は汎用技術を使い、自前開発は工程データとの紐づけと教材化の手順に集中します。</a:t>
+要約：引退した熟練者が隣で教えてくれる現場を、スマートグラスでつくる
+設問①、解決策です。目指すのは、引退した熟練者が隣で教えてくれるような現場で、その道具がスマートグラスです。一つ目、記録は自動です。作業中の会話と、作業対象の画像をグラスが常時収録します。熟練者は記録のために何もしなくてよい。構造化を現場に求めない設計で、国の人工知能基本計画の方針とも一致します。二つ目、生成AIが会話と画像から、条件・処置・理由を取り出し、ロットや設備のデータ、図面と紐づけます。三つ目、渡す相手は三つです。若手には、グラス越しに図面や作業手順を現物に重ね、違いがあれば知らせます。管理者には、会話と画像から作業内容を判定し、進捗を自動で報告します。日報を書く手間が減り、報告が早くなり、管理者は現場を見に行かなくても状況が分かります。そして後からは、勘どころを音声番組や動画、研修資料にして当社が作って届けます。指導役が足りない事業所は59.5%、育成の時間がない事業所は47.4%あるからです。端末は市販のものを使い、当社は中身とアプリに集中します。常時収録は、作業時間と作業エリアに限り、本人の同意のもとで行います。</a:t>
             </a:r>
             <a:endParaRPr lang="en-US" dirty="0"/>
           </a:p>
@@ -2316,7 +2316,7 @@
               <a:rPr lang="en-US" dirty="0"/>
               <a:t>【3:30 - 4:40】
 要約：顧客は1拠点あたり年300万円を払い、約2か月で元を取る
-次に、お金の流れです。お客様の工場1拠点が毎年払うのは、アプリと基盤の利用料100万円、記録するラインの数に応じた登録料100万円、そして教材制作や危険表示など選んだ機能の料金100万円、合わせて年300万円です。初年度だけ、当社の担当者が現場に入る導入支援200万円が加わり、500万円になります。お客様から見ると、右のグラフのとおり、対象者100名の拠点で毎月240万円分の工数が浮き、約2.1か月で500万円を上回ります。ただし月6時間の削減は、建設業の書類電子化の実績を当てはめた仮定です。当社から見ると、利用料は粗利率85%で毎年積み上がり、導入支援は粗利率40%で一度きりです。お客様が増えるほど、利用料が積み上がっていく構造です。</a:t>
+次に、お金の流れです。お客様の工場1拠点が毎年払うのは、アプリと基盤の利用料100万円、記録するラインの数に応じた登録料100万円、そして教材制作や危険表示など選んだ機能の料金100万円、合わせて年300万円です。初年度だけ、当社の担当者が現場に入る導入支援200万円が加わり、500万円になります。お客様から見ると、右のグラフのとおり、対象者100名の拠点で毎月240万円分の工数が浮き、約2.1か月で500万円を上回ります。浮く工数の中心は、日報や進捗報告といった書類作業で、グラスの自動報告で置き換わる部分です。月6時間という値は、建設業の書類電子化の実績を当てはめた仮定です。当社から見ると、利用料は粗利率85%で毎年積み上がり、導入支援は粗利率40%で一度きりです。なお、スマートグラス端末の費用はこの試算に含めていません。</a:t>
             </a:r>
             <a:endParaRPr lang="en-US" dirty="0"/>
           </a:p>
@@ -2406,7 +2406,7 @@
               <a:rPr lang="en-US" dirty="0"/>
               <a:t>【4:40 - 5:50】
 要約：「貯める」会社は現れた。当社は「渡す」で分かれる
-最初に自分で自分に突きつけた問いが三つありました。コンサルと何が違うのか、同じことをしている会社はないのか、大手が降りてきたらどうするのか、です。調べると、判断の理由を扱う会社はすでに現れています。東大発のAirionは、ベテランとAIの対話で知識を構造化します。キャディのCADDiは、設計意図や判断履歴をデータ化しています。正直に言えば、貯める部分は当社とほぼ同じ設計です。これは、この課題に市場があることの証明だと考えています。分かれるのは渡す部分です。どの会社も、貯めたものを教材にして届けるところまではやっていません。また、CADDiの対象は組立の製造業で、扱うのは図面とBOMです。電線のような連続工程の現場処置は、図面には現れません。最大の脅威は、CADDiが連続工程に降りてくることです。防御線は、図面に現れない現場処置の蓄積と、現場で監修できる人です。</a:t>
+最初に自分で自分に突きつけた問いが三つありました。コンサルと何が違うのか、同じことをしている会社はないのか、大手が降りてきたらどうするのか、です。調べると、判断の理由を扱う会社はすでに現れています。東大発のAirionは、ベテランとAIの対話で知識を構造化します。キャディのCADDiは、設計意図や判断履歴をデータ化しています。スマートグラスで手順を表示するAR作業支援も各社にあります。正直に言えば、それぞれの部品は他社にもあります。分かれるのは組み合わせと対象です。連続工程の現場で、会話から自動で貯め、現物に重ねてその場で渡し、さらに教材にまでする会社はまだありません。CADDiの対象は組立の製造業で、扱うのは図面とBOMです。電線のような連続工程の現場処置は、図面には現れません。最大の脅威は、CADDiが連続工程に降りてくることです。防御線は、図面に現れない現場処置の蓄積と、現場で監修できる人です。</a:t>
             </a:r>
             <a:endParaRPr lang="en-US" dirty="0"/>
           </a:p>
@@ -5452,7 +5452,7 @@
                 <a:ea typeface="Meiryo" pitchFamily="34" charset="-122"/>
                 <a:cs typeface="Meiryo" pitchFamily="34" charset="-120"/>
               </a:rPr>
-              <a:t>記録と整理は手段。差別化は③：連続工程の勘どころを、研修資料・音声番組・動画にして当社が届ける</a:t>
+              <a:t>スマートグラスで、記録と報告は自動に。図面と手順は現物に重ねて照合し、教材は当社が作る</a:t>
             </a:r>
             <a:endParaRPr lang="en-US" sz="1200" dirty="0"/>
           </a:p>
@@ -5467,7 +5467,7 @@
         <p:spPr>
           <a:xfrm>
             <a:off x="365760" y="1024128"/>
-            <a:ext cx="2578608" cy="1371600"/>
+            <a:ext cx="2578608" cy="1463040"/>
           </a:xfrm>
           <a:prstGeom prst="rect">
             <a:avLst/>
@@ -5539,7 +5539,7 @@
                 <a:ea typeface="Meiryo" pitchFamily="34" charset="-122"/>
                 <a:cs typeface="Meiryo" pitchFamily="34" charset="-120"/>
               </a:rPr>
-              <a:t>① 記録する</a:t>
+              <a:t>① 自動で記録</a:t>
             </a:r>
             <a:pPr algn="l" indent="0" marL="0">
               <a:lnSpc>
@@ -5556,7 +5556,7 @@
                 <a:ea typeface="Meiryo" pitchFamily="34" charset="-122"/>
                 <a:cs typeface="Meiryo" pitchFamily="34" charset="-120"/>
               </a:rPr>
-              <a:t>　熟練者</a:t>
+              <a:t>　スマートグラス</a:t>
             </a:r>
             <a:endParaRPr lang="en-US" sz="1100" dirty="0"/>
           </a:p>
@@ -5571,7 +5571,7 @@
         <p:spPr>
           <a:xfrm>
             <a:off x="475488" y="1353312"/>
-            <a:ext cx="2359152" cy="603504"/>
+            <a:ext cx="2359152" cy="786384"/>
           </a:xfrm>
           <a:prstGeom prst="rect">
             <a:avLst/>
@@ -5598,7 +5598,7 @@
                 <a:ea typeface="Meiryo" pitchFamily="34" charset="-122"/>
                 <a:cs typeface="Meiryo" pitchFamily="34" charset="-120"/>
               </a:rPr>
-              <a:t>異常に対処したら、タブレットに音声で一言残す。例「湿度が高いので温度を2℃下げた」</a:t>
+              <a:t>作業中の会話と、作業対象の画像を常時収録。熟練者は何もしなくてよい</a:t>
             </a:r>
             <a:endParaRPr lang="en-US" sz="950" dirty="0"/>
           </a:p>
@@ -5612,7 +5612,7 @@
         </p:nvSpPr>
         <p:spPr>
           <a:xfrm>
-            <a:off x="475488" y="2029968"/>
+            <a:off x="475488" y="2157984"/>
             <a:ext cx="2359152" cy="310896"/>
           </a:xfrm>
           <a:prstGeom prst="rect">
@@ -5657,7 +5657,7 @@
                 <a:ea typeface="Meiryo" pitchFamily="34" charset="-122"/>
                 <a:cs typeface="Meiryo" pitchFamily="34" charset="-120"/>
               </a:rPr>
-              <a:t>記録アプリ（音声）。構造化を現場に求めない (1)</a:t>
+              <a:t>市販のスマートグラス。構造化を現場に求めない (1)</a:t>
             </a:r>
             <a:endParaRPr lang="en-US" sz="850" dirty="0"/>
           </a:p>
@@ -5671,7 +5671,7 @@
         </p:nvSpPr>
         <p:spPr>
           <a:xfrm>
-            <a:off x="2944368" y="1545336"/>
+            <a:off x="2944368" y="1591056"/>
             <a:ext cx="338328" cy="329184"/>
           </a:xfrm>
           <a:prstGeom prst="rect">
@@ -5714,7 +5714,7 @@
         <p:spPr>
           <a:xfrm>
             <a:off x="3282696" y="1024128"/>
-            <a:ext cx="2578608" cy="1371600"/>
+            <a:ext cx="2578608" cy="1463040"/>
           </a:xfrm>
           <a:prstGeom prst="rect">
             <a:avLst/>
@@ -5818,7 +5818,7 @@
         <p:spPr>
           <a:xfrm>
             <a:off x="3392424" y="1353312"/>
-            <a:ext cx="2359152" cy="603504"/>
+            <a:ext cx="2359152" cy="786384"/>
           </a:xfrm>
           <a:prstGeom prst="rect">
             <a:avLst/>
@@ -5845,7 +5845,7 @@
                 <a:ea typeface="Meiryo" pitchFamily="34" charset="-122"/>
                 <a:cs typeface="Meiryo" pitchFamily="34" charset="-120"/>
               </a:rPr>
-              <a:t>一言を「条件・処置・理由」に分けて文章化し、ロット・設備データと紐づけて事例にする</a:t>
+              <a:t>会話と画像から「条件・処置・理由」を取り出し、ロット・設備データ・図面と紐づける</a:t>
             </a:r>
             <a:endParaRPr lang="en-US" sz="950" dirty="0"/>
           </a:p>
@@ -5859,7 +5859,7 @@
         </p:nvSpPr>
         <p:spPr>
           <a:xfrm>
-            <a:off x="3392424" y="2029968"/>
+            <a:off x="3392424" y="2157984"/>
             <a:ext cx="2359152" cy="310896"/>
           </a:xfrm>
           <a:prstGeom prst="rect">
@@ -5918,7 +5918,7 @@
         </p:nvSpPr>
         <p:spPr>
           <a:xfrm>
-            <a:off x="5861304" y="1545336"/>
+            <a:off x="5861304" y="1591056"/>
             <a:ext cx="338328" cy="329184"/>
           </a:xfrm>
           <a:prstGeom prst="rect">
@@ -5961,7 +5961,7 @@
         <p:spPr>
           <a:xfrm>
             <a:off x="6199632" y="1024128"/>
-            <a:ext cx="2578608" cy="1371600"/>
+            <a:ext cx="2578608" cy="1463040"/>
           </a:xfrm>
           <a:prstGeom prst="rect">
             <a:avLst/>
@@ -6033,7 +6033,7 @@
                 <a:ea typeface="Meiryo" pitchFamily="34" charset="-122"/>
                 <a:cs typeface="Meiryo" pitchFamily="34" charset="-120"/>
               </a:rPr>
-              <a:t>③ 教材にして渡す</a:t>
+              <a:t>③ 渡す</a:t>
             </a:r>
             <a:pPr algn="l" indent="0" marL="0">
               <a:lnSpc>
@@ -6050,7 +6050,7 @@
                 <a:ea typeface="Meiryo" pitchFamily="34" charset="-122"/>
                 <a:cs typeface="Meiryo" pitchFamily="34" charset="-120"/>
               </a:rPr>
-              <a:t>　当社</a:t>
+              <a:t>　若手・管理者</a:t>
             </a:r>
             <a:endParaRPr lang="en-US" sz="1100" dirty="0"/>
           </a:p>
@@ -6065,7 +6065,7 @@
         <p:spPr>
           <a:xfrm>
             <a:off x="6309360" y="1353312"/>
-            <a:ext cx="2359152" cy="603504"/>
+            <a:ext cx="2359152" cy="786384"/>
           </a:xfrm>
           <a:prstGeom prst="rect">
             <a:avLst/>
@@ -6081,10 +6081,13 @@
               <a:lnSpc>
                 <a:spcPct val="115000"/>
               </a:lnSpc>
-              <a:buNone/>
-            </a:pPr>
-            <a:r>
-              <a:rPr lang="en-US" sz="950" dirty="0">
+              <a:spcAft>
+                <a:spcPts val="200"/>
+              </a:spcAft>
+              <a:buNone/>
+            </a:pPr>
+            <a:r>
+              <a:rPr lang="en-US" sz="850" dirty="0">
                 <a:solidFill>
                   <a:srgbClr val="1A1A1A"/>
                 </a:solidFill>
@@ -6092,9 +6095,55 @@
                 <a:ea typeface="Meiryo" pitchFamily="34" charset="-122"/>
                 <a:cs typeface="Meiryo" pitchFamily="34" charset="-120"/>
               </a:rPr>
-              <a:t>指導役が足りず（59.5%）、育成の時間もない（47.4%）(2)。だから教材は当社が作って届ける</a:t>
-            </a:r>
-            <a:endParaRPr lang="en-US" sz="950" dirty="0"/>
+              <a:t>若手へ：図面・手順を現物に重ね、差異を表示</a:t>
+            </a:r>
+            <a:endParaRPr lang="en-US" sz="850" dirty="0"/>
+          </a:p>
+          <a:p>
+            <a:pPr algn="l" indent="0" marL="0">
+              <a:lnSpc>
+                <a:spcPct val="115000"/>
+              </a:lnSpc>
+              <a:spcAft>
+                <a:spcPts val="200"/>
+              </a:spcAft>
+              <a:buNone/>
+            </a:pPr>
+            <a:r>
+              <a:rPr lang="en-US" sz="850" dirty="0">
+                <a:solidFill>
+                  <a:srgbClr val="1A1A1A"/>
+                </a:solidFill>
+                <a:latin typeface="Meiryo" pitchFamily="34" charset="0"/>
+                <a:ea typeface="Meiryo" pitchFamily="34" charset="-122"/>
+                <a:cs typeface="Meiryo" pitchFamily="34" charset="-120"/>
+              </a:rPr>
+              <a:t>管理者へ：作業を判定し、進捗を自動で報告</a:t>
+            </a:r>
+            <a:endParaRPr lang="en-US" sz="850" dirty="0"/>
+          </a:p>
+          <a:p>
+            <a:pPr algn="l" indent="0" marL="0">
+              <a:lnSpc>
+                <a:spcPct val="115000"/>
+              </a:lnSpc>
+              <a:spcAft>
+                <a:spcPts val="200"/>
+              </a:spcAft>
+              <a:buNone/>
+            </a:pPr>
+            <a:r>
+              <a:rPr lang="en-US" sz="850" dirty="0">
+                <a:solidFill>
+                  <a:srgbClr val="1A1A1A"/>
+                </a:solidFill>
+                <a:latin typeface="Meiryo" pitchFamily="34" charset="0"/>
+                <a:ea typeface="Meiryo" pitchFamily="34" charset="-122"/>
+                <a:cs typeface="Meiryo" pitchFamily="34" charset="-120"/>
+              </a:rPr>
+              <a:t>後から：教材を当社が制作 (2)</a:t>
+            </a:r>
+            <a:endParaRPr lang="en-US" sz="850" dirty="0"/>
           </a:p>
         </p:txBody>
       </p:sp>
@@ -6106,7 +6155,7 @@
         </p:nvSpPr>
         <p:spPr>
           <a:xfrm>
-            <a:off x="6309360" y="2029968"/>
+            <a:off x="6309360" y="2157984"/>
             <a:ext cx="2359152" cy="310896"/>
           </a:xfrm>
           <a:prstGeom prst="rect">
@@ -6151,7 +6200,7 @@
                 <a:ea typeface="Meiryo" pitchFamily="34" charset="-122"/>
                 <a:cs typeface="Meiryo" pitchFamily="34" charset="-120"/>
               </a:rPr>
-              <a:t>生成AIで台本→当社が監修→配信</a:t>
+              <a:t>グラス表示・自動報告・当社の監修</a:t>
             </a:r>
             <a:endParaRPr lang="en-US" sz="850" dirty="0"/>
           </a:p>
@@ -6165,7 +6214,7 @@
         </p:nvSpPr>
         <p:spPr>
           <a:xfrm>
-            <a:off x="365760" y="2542032"/>
+            <a:off x="365760" y="2578608"/>
             <a:ext cx="4572000" cy="219456"/>
           </a:xfrm>
           <a:prstGeom prst="rect">
@@ -6193,7 +6242,7 @@
                 <a:ea typeface="Meiryo" pitchFamily="34" charset="-122"/>
                 <a:cs typeface="Meiryo" pitchFamily="34" charset="-120"/>
               </a:rPr>
-              <a:t>渡し方を増やす（製品戦略：教材化を初年度から、追加機能は年1本ずつ）</a:t>
+              <a:t>渡し方を増やす（製品戦略：収録と教材化を初年度から、追加機能は年1本ずつ）</a:t>
             </a:r>
             <a:endParaRPr lang="en-US" sz="950" dirty="0"/>
           </a:p>
@@ -6207,7 +6256,7 @@
         </p:nvSpPr>
         <p:spPr>
           <a:xfrm>
-            <a:off x="365760" y="2788920"/>
+            <a:off x="365760" y="2825496"/>
             <a:ext cx="4572000" cy="0"/>
           </a:xfrm>
           <a:prstGeom prst="line">
@@ -6230,7 +6279,7 @@
         </p:nvSpPr>
         <p:spPr>
           <a:xfrm>
-            <a:off x="402336" y="2788920"/>
+            <a:off x="402336" y="2825496"/>
             <a:ext cx="420624" cy="228600"/>
           </a:xfrm>
           <a:prstGeom prst="rect">
@@ -6272,7 +6321,7 @@
         </p:nvSpPr>
         <p:spPr>
           <a:xfrm>
-            <a:off x="822960" y="2788920"/>
+            <a:off x="822960" y="2825496"/>
             <a:ext cx="621792" cy="228600"/>
           </a:xfrm>
           <a:prstGeom prst="rect">
@@ -6314,7 +6363,7 @@
         </p:nvSpPr>
         <p:spPr>
           <a:xfrm>
-            <a:off x="1444752" y="2788920"/>
+            <a:off x="1444752" y="2825496"/>
             <a:ext cx="603504" cy="228600"/>
           </a:xfrm>
           <a:prstGeom prst="rect">
@@ -6342,7 +6391,7 @@
                 <a:ea typeface="Meiryo" pitchFamily="34" charset="-122"/>
                 <a:cs typeface="Meiryo" pitchFamily="34" charset="-120"/>
               </a:rPr>
-              <a:t>画面</a:t>
+              <a:t>収録・報告</a:t>
             </a:r>
             <a:endParaRPr lang="en-US" sz="800" dirty="0"/>
           </a:p>
@@ -6356,7 +6405,7 @@
         </p:nvSpPr>
         <p:spPr>
           <a:xfrm>
-            <a:off x="2048256" y="2788920"/>
+            <a:off x="2048256" y="2825496"/>
             <a:ext cx="2468880" cy="228600"/>
           </a:xfrm>
           <a:prstGeom prst="rect">
@@ -6384,7 +6433,7 @@
                 <a:ea typeface="Meiryo" pitchFamily="34" charset="-122"/>
                 <a:cs typeface="Meiryo" pitchFamily="34" charset="-120"/>
               </a:rPr>
-              <a:t>記録・過去事例の検索（全顧客）</a:t>
+              <a:t>常時収録、進捗の自動報告、事例検索</a:t>
             </a:r>
             <a:endParaRPr lang="en-US" sz="800" dirty="0"/>
           </a:p>
@@ -6398,7 +6447,7 @@
         </p:nvSpPr>
         <p:spPr>
           <a:xfrm>
-            <a:off x="4517136" y="2788920"/>
+            <a:off x="4517136" y="2825496"/>
             <a:ext cx="384048" cy="228600"/>
           </a:xfrm>
           <a:prstGeom prst="rect">
@@ -6440,7 +6489,7 @@
         </p:nvSpPr>
         <p:spPr>
           <a:xfrm>
-            <a:off x="365760" y="3017520"/>
+            <a:off x="365760" y="3054096"/>
             <a:ext cx="4572000" cy="0"/>
           </a:xfrm>
           <a:prstGeom prst="line">
@@ -6463,7 +6512,7 @@
         </p:nvSpPr>
         <p:spPr>
           <a:xfrm>
-            <a:off x="402336" y="3017520"/>
+            <a:off x="402336" y="3054096"/>
             <a:ext cx="420624" cy="228600"/>
           </a:xfrm>
           <a:prstGeom prst="rect">
@@ -6505,7 +6554,7 @@
         </p:nvSpPr>
         <p:spPr>
           <a:xfrm>
-            <a:off x="822960" y="3017520"/>
+            <a:off x="822960" y="3054096"/>
             <a:ext cx="621792" cy="228600"/>
           </a:xfrm>
           <a:prstGeom prst="rect">
@@ -6547,7 +6596,7 @@
         </p:nvSpPr>
         <p:spPr>
           <a:xfrm>
-            <a:off x="1444752" y="3017520"/>
+            <a:off x="1444752" y="3054096"/>
             <a:ext cx="603504" cy="228600"/>
           </a:xfrm>
           <a:prstGeom prst="rect">
@@ -6589,7 +6638,7 @@
         </p:nvSpPr>
         <p:spPr>
           <a:xfrm>
-            <a:off x="2048256" y="3017520"/>
+            <a:off x="2048256" y="3054096"/>
             <a:ext cx="2468880" cy="228600"/>
           </a:xfrm>
           <a:prstGeom prst="rect">
@@ -6631,7 +6680,7 @@
         </p:nvSpPr>
         <p:spPr>
           <a:xfrm>
-            <a:off x="4517136" y="3017520"/>
+            <a:off x="4517136" y="3054096"/>
             <a:ext cx="384048" cy="228600"/>
           </a:xfrm>
           <a:prstGeom prst="rect">
@@ -6673,7 +6722,7 @@
         </p:nvSpPr>
         <p:spPr>
           <a:xfrm>
-            <a:off x="365760" y="3246120"/>
+            <a:off x="365760" y="3282696"/>
             <a:ext cx="4572000" cy="0"/>
           </a:xfrm>
           <a:prstGeom prst="line">
@@ -6696,7 +6745,7 @@
         </p:nvSpPr>
         <p:spPr>
           <a:xfrm>
-            <a:off x="402336" y="3246120"/>
+            <a:off x="402336" y="3282696"/>
             <a:ext cx="420624" cy="228600"/>
           </a:xfrm>
           <a:prstGeom prst="rect">
@@ -6738,7 +6787,7 @@
         </p:nvSpPr>
         <p:spPr>
           <a:xfrm>
-            <a:off x="822960" y="3246120"/>
+            <a:off x="822960" y="3282696"/>
             <a:ext cx="621792" cy="228600"/>
           </a:xfrm>
           <a:prstGeom prst="rect">
@@ -6780,7 +6829,7 @@
         </p:nvSpPr>
         <p:spPr>
           <a:xfrm>
-            <a:off x="1444752" y="3246120"/>
+            <a:off x="1444752" y="3282696"/>
             <a:ext cx="603504" cy="228600"/>
           </a:xfrm>
           <a:prstGeom prst="rect">
@@ -6822,7 +6871,7 @@
         </p:nvSpPr>
         <p:spPr>
           <a:xfrm>
-            <a:off x="2048256" y="3246120"/>
+            <a:off x="2048256" y="3282696"/>
             <a:ext cx="2468880" cy="228600"/>
           </a:xfrm>
           <a:prstGeom prst="rect">
@@ -6850,7 +6899,7 @@
                 <a:ea typeface="Meiryo" pitchFamily="34" charset="-122"/>
                 <a:cs typeface="Meiryo" pitchFamily="34" charset="-120"/>
               </a:rPr>
-              <a:t>手順書を開くと過去の事故・ヒヤリ地点を表示</a:t>
+              <a:t>危険箇所・過去のヒヤリ地点をグラスに表示</a:t>
             </a:r>
             <a:endParaRPr lang="en-US" sz="800" dirty="0"/>
           </a:p>
@@ -6864,7 +6913,7 @@
         </p:nvSpPr>
         <p:spPr>
           <a:xfrm>
-            <a:off x="4517136" y="3246120"/>
+            <a:off x="4517136" y="3282696"/>
             <a:ext cx="384048" cy="228600"/>
           </a:xfrm>
           <a:prstGeom prst="rect">
@@ -6906,7 +6955,7 @@
         </p:nvSpPr>
         <p:spPr>
           <a:xfrm>
-            <a:off x="365760" y="3474720"/>
+            <a:off x="365760" y="3511296"/>
             <a:ext cx="4572000" cy="0"/>
           </a:xfrm>
           <a:prstGeom prst="line">
@@ -6929,7 +6978,7 @@
         </p:nvSpPr>
         <p:spPr>
           <a:xfrm>
-            <a:off x="402336" y="3474720"/>
+            <a:off x="402336" y="3511296"/>
             <a:ext cx="420624" cy="228600"/>
           </a:xfrm>
           <a:prstGeom prst="rect">
@@ -6971,7 +7020,7 @@
         </p:nvSpPr>
         <p:spPr>
           <a:xfrm>
-            <a:off x="822960" y="3474720"/>
+            <a:off x="822960" y="3511296"/>
             <a:ext cx="621792" cy="228600"/>
           </a:xfrm>
           <a:prstGeom prst="rect">
@@ -6999,7 +7048,7 @@
                 <a:ea typeface="Meiryo" pitchFamily="34" charset="-122"/>
                 <a:cs typeface="Meiryo" pitchFamily="34" charset="-120"/>
               </a:rPr>
-              <a:t>TWIN</a:t>
+              <a:t>GLASS</a:t>
             </a:r>
             <a:endParaRPr lang="en-US" sz="850" dirty="0"/>
           </a:p>
@@ -7013,7 +7062,7 @@
         </p:nvSpPr>
         <p:spPr>
           <a:xfrm>
-            <a:off x="1444752" y="3474720"/>
+            <a:off x="1444752" y="3511296"/>
             <a:ext cx="603504" cy="228600"/>
           </a:xfrm>
           <a:prstGeom prst="rect">
@@ -7041,7 +7090,7 @@
                 <a:ea typeface="Meiryo" pitchFamily="34" charset="-122"/>
                 <a:cs typeface="Meiryo" pitchFamily="34" charset="-120"/>
               </a:rPr>
-              <a:t>3D</a:t>
+              <a:t>照合</a:t>
             </a:r>
             <a:endParaRPr lang="en-US" sz="800" dirty="0"/>
           </a:p>
@@ -7055,7 +7104,7 @@
         </p:nvSpPr>
         <p:spPr>
           <a:xfrm>
-            <a:off x="2048256" y="3474720"/>
+            <a:off x="2048256" y="3511296"/>
             <a:ext cx="2468880" cy="228600"/>
           </a:xfrm>
           <a:prstGeom prst="rect">
@@ -7083,7 +7132,7 @@
                 <a:ea typeface="Meiryo" pitchFamily="34" charset="-122"/>
                 <a:cs typeface="Meiryo" pitchFamily="34" charset="-120"/>
               </a:rPr>
-              <a:t>3D仮想工場でレイアウト・ラインの流れを試算</a:t>
+              <a:t>図面・作業手順を現物に重ね、差異を検出</a:t>
             </a:r>
             <a:endParaRPr lang="en-US" sz="800" dirty="0"/>
           </a:p>
@@ -7097,7 +7146,7 @@
         </p:nvSpPr>
         <p:spPr>
           <a:xfrm>
-            <a:off x="4517136" y="3474720"/>
+            <a:off x="4517136" y="3511296"/>
             <a:ext cx="384048" cy="228600"/>
           </a:xfrm>
           <a:prstGeom prst="rect">
@@ -7139,7 +7188,7 @@
         </p:nvSpPr>
         <p:spPr>
           <a:xfrm>
-            <a:off x="365760" y="3703320"/>
+            <a:off x="365760" y="3739896"/>
             <a:ext cx="4572000" cy="0"/>
           </a:xfrm>
           <a:prstGeom prst="line">
@@ -7162,7 +7211,7 @@
         </p:nvSpPr>
         <p:spPr>
           <a:xfrm>
-            <a:off x="402336" y="3703320"/>
+            <a:off x="402336" y="3739896"/>
             <a:ext cx="420624" cy="228600"/>
           </a:xfrm>
           <a:prstGeom prst="rect">
@@ -7204,7 +7253,7 @@
         </p:nvSpPr>
         <p:spPr>
           <a:xfrm>
-            <a:off x="822960" y="3703320"/>
+            <a:off x="822960" y="3739896"/>
             <a:ext cx="621792" cy="228600"/>
           </a:xfrm>
           <a:prstGeom prst="rect">
@@ -7232,7 +7281,7 @@
                 <a:ea typeface="Meiryo" pitchFamily="34" charset="-122"/>
                 <a:cs typeface="Meiryo" pitchFamily="34" charset="-120"/>
               </a:rPr>
-              <a:t>DRAW</a:t>
+              <a:t>TWIN</a:t>
             </a:r>
             <a:endParaRPr lang="en-US" sz="850" dirty="0"/>
           </a:p>
@@ -7246,7 +7295,7 @@
         </p:nvSpPr>
         <p:spPr>
           <a:xfrm>
-            <a:off x="1444752" y="3703320"/>
+            <a:off x="1444752" y="3739896"/>
             <a:ext cx="603504" cy="228600"/>
           </a:xfrm>
           <a:prstGeom prst="rect">
@@ -7274,7 +7323,7 @@
                 <a:ea typeface="Meiryo" pitchFamily="34" charset="-122"/>
                 <a:cs typeface="Meiryo" pitchFamily="34" charset="-120"/>
               </a:rPr>
-              <a:t>図面</a:t>
+              <a:t>3D</a:t>
             </a:r>
             <a:endParaRPr lang="en-US" sz="800" dirty="0"/>
           </a:p>
@@ -7288,7 +7337,7 @@
         </p:nvSpPr>
         <p:spPr>
           <a:xfrm>
-            <a:off x="2048256" y="3703320"/>
+            <a:off x="2048256" y="3739896"/>
             <a:ext cx="2468880" cy="228600"/>
           </a:xfrm>
           <a:prstGeom prst="rect">
@@ -7316,7 +7365,7 @@
                 <a:ea typeface="Meiryo" pitchFamily="34" charset="-122"/>
                 <a:cs typeface="Meiryo" pitchFamily="34" charset="-120"/>
               </a:rPr>
-              <a:t>登録したパターンを音声指示でCAD作図</a:t>
+              <a:t>設備の内部構造・工場全体を3Dで再現</a:t>
             </a:r>
             <a:endParaRPr lang="en-US" sz="800" dirty="0"/>
           </a:p>
@@ -7330,7 +7379,7 @@
         </p:nvSpPr>
         <p:spPr>
           <a:xfrm>
-            <a:off x="4517136" y="3703320"/>
+            <a:off x="4517136" y="3739896"/>
             <a:ext cx="384048" cy="228600"/>
           </a:xfrm>
           <a:prstGeom prst="rect">
@@ -7372,27 +7421,7 @@
         </p:nvSpPr>
         <p:spPr>
           <a:xfrm>
-            <a:off x="365760" y="3931920"/>
-            <a:ext cx="4572000" cy="228600"/>
-          </a:xfrm>
-          <a:prstGeom prst="rect">
-            <a:avLst/>
-          </a:prstGeom>
-          <a:solidFill>
-            <a:srgbClr val="F2F2F2"/>
-          </a:solidFill>
-          <a:ln/>
-        </p:spPr>
-      </p:sp>
-      <p:sp>
-        <p:nvSpPr>
-          <p:cNvPr id="54" name="Shape 51"/>
-          <p:cNvSpPr/>
-          <p:nvPr/>
-        </p:nvSpPr>
-        <p:spPr>
-          <a:xfrm>
-            <a:off x="365760" y="3931920"/>
+            <a:off x="365760" y="3968496"/>
             <a:ext cx="4572000" cy="0"/>
           </a:xfrm>
           <a:prstGeom prst="line">
@@ -7409,14 +7438,56 @@
       </p:sp>
       <p:sp>
         <p:nvSpPr>
+          <p:cNvPr id="54" name="Text 51"/>
+          <p:cNvSpPr txBox="1"/>
+          <p:nvPr/>
+        </p:nvSpPr>
+        <p:spPr>
+          <a:xfrm>
+            <a:off x="402336" y="3968496"/>
+            <a:ext cx="420624" cy="228600"/>
+          </a:xfrm>
+          <a:prstGeom prst="rect">
+            <a:avLst/>
+          </a:prstGeom>
+          <a:noFill/>
+          <a:ln/>
+        </p:spPr>
+        <p:txBody>
+          <a:bodyPr wrap="square" lIns="0" tIns="0" rIns="0" bIns="0" rtlCol="0" anchor="ctr"/>
+          <a:lstStyle/>
+          <a:p>
+            <a:pPr algn="l" indent="0" marL="0">
+              <a:lnSpc>
+                <a:spcPct val="115000"/>
+              </a:lnSpc>
+              <a:buNone/>
+            </a:pPr>
+            <a:r>
+              <a:rPr lang="en-US" sz="800" dirty="0">
+                <a:solidFill>
+                  <a:srgbClr val="4D4D4D"/>
+                </a:solidFill>
+                <a:latin typeface="Meiryo" pitchFamily="34" charset="0"/>
+                <a:ea typeface="Meiryo" pitchFamily="34" charset="-122"/>
+                <a:cs typeface="Meiryo" pitchFamily="34" charset="-120"/>
+              </a:rPr>
+              <a:t>5年目</a:t>
+            </a:r>
+            <a:endParaRPr lang="en-US" sz="800" dirty="0"/>
+          </a:p>
+        </p:txBody>
+      </p:sp>
+      <p:sp>
+        <p:nvSpPr>
           <p:cNvPr id="55" name="Text 52"/>
           <p:cNvSpPr txBox="1"/>
           <p:nvPr/>
         </p:nvSpPr>
         <p:spPr>
           <a:xfrm>
-            <a:off x="402336" y="3931920"/>
-            <a:ext cx="420624" cy="228600"/>
+            <a:off x="822960" y="3968496"/>
+            <a:ext cx="621792" cy="228600"/>
           </a:xfrm>
           <a:prstGeom prst="rect">
             <a:avLst/>
@@ -7435,17 +7506,17 @@
               <a:buNone/>
             </a:pPr>
             <a:r>
-              <a:rPr lang="en-US" sz="800" dirty="0">
-                <a:solidFill>
-                  <a:srgbClr val="4D4D4D"/>
-                </a:solidFill>
-                <a:latin typeface="Meiryo" pitchFamily="34" charset="0"/>
-                <a:ea typeface="Meiryo" pitchFamily="34" charset="-122"/>
-                <a:cs typeface="Meiryo" pitchFamily="34" charset="-120"/>
-              </a:rPr>
-              <a:t>研究</a:t>
-            </a:r>
-            <a:endParaRPr lang="en-US" sz="800" dirty="0"/>
+              <a:rPr lang="en-US" sz="850" b="1" dirty="0">
+                <a:solidFill>
+                  <a:srgbClr val="1A1A1A"/>
+                </a:solidFill>
+                <a:latin typeface="Meiryo" pitchFamily="34" charset="0"/>
+                <a:ea typeface="Meiryo" pitchFamily="34" charset="-122"/>
+                <a:cs typeface="Meiryo" pitchFamily="34" charset="-120"/>
+              </a:rPr>
+              <a:t>DRAW</a:t>
+            </a:r>
+            <a:endParaRPr lang="en-US" sz="850" dirty="0"/>
           </a:p>
         </p:txBody>
       </p:sp>
@@ -7457,8 +7528,8 @@
         </p:nvSpPr>
         <p:spPr>
           <a:xfrm>
-            <a:off x="822960" y="3931920"/>
-            <a:ext cx="621792" cy="228600"/>
+            <a:off x="1444752" y="3968496"/>
+            <a:ext cx="603504" cy="228600"/>
           </a:xfrm>
           <a:prstGeom prst="rect">
             <a:avLst/>
@@ -7477,17 +7548,17 @@
               <a:buNone/>
             </a:pPr>
             <a:r>
-              <a:rPr lang="en-US" sz="850" b="1" dirty="0">
-                <a:solidFill>
-                  <a:srgbClr val="1A1A1A"/>
-                </a:solidFill>
-                <a:latin typeface="Meiryo" pitchFamily="34" charset="0"/>
-                <a:ea typeface="Meiryo" pitchFamily="34" charset="-122"/>
-                <a:cs typeface="Meiryo" pitchFamily="34" charset="-120"/>
-              </a:rPr>
-              <a:t>HAPTIC</a:t>
-            </a:r>
-            <a:endParaRPr lang="en-US" sz="850" dirty="0"/>
+              <a:rPr lang="en-US" sz="800" dirty="0">
+                <a:solidFill>
+                  <a:srgbClr val="4D4D4D"/>
+                </a:solidFill>
+                <a:latin typeface="Meiryo" pitchFamily="34" charset="0"/>
+                <a:ea typeface="Meiryo" pitchFamily="34" charset="-122"/>
+                <a:cs typeface="Meiryo" pitchFamily="34" charset="-120"/>
+              </a:rPr>
+              <a:t>図面</a:t>
+            </a:r>
+            <a:endParaRPr lang="en-US" sz="800" dirty="0"/>
           </a:p>
         </p:txBody>
       </p:sp>
@@ -7499,8 +7570,8 @@
         </p:nvSpPr>
         <p:spPr>
           <a:xfrm>
-            <a:off x="1444752" y="3931920"/>
-            <a:ext cx="603504" cy="228600"/>
+            <a:off x="2048256" y="3968496"/>
+            <a:ext cx="2468880" cy="228600"/>
           </a:xfrm>
           <a:prstGeom prst="rect">
             <a:avLst/>
@@ -7521,13 +7592,13 @@
             <a:r>
               <a:rPr lang="en-US" sz="800" dirty="0">
                 <a:solidFill>
-                  <a:srgbClr val="4D4D4D"/>
-                </a:solidFill>
-                <a:latin typeface="Meiryo" pitchFamily="34" charset="0"/>
-                <a:ea typeface="Meiryo" pitchFamily="34" charset="-122"/>
-                <a:cs typeface="Meiryo" pitchFamily="34" charset="-120"/>
-              </a:rPr>
-              <a:t>触覚</a:t>
+                  <a:srgbClr val="1A1A1A"/>
+                </a:solidFill>
+                <a:latin typeface="Meiryo" pitchFamily="34" charset="0"/>
+                <a:ea typeface="Meiryo" pitchFamily="34" charset="-122"/>
+                <a:cs typeface="Meiryo" pitchFamily="34" charset="-120"/>
+              </a:rPr>
+              <a:t>登録したパターンを音声指示でCAD作図</a:t>
             </a:r>
             <a:endParaRPr lang="en-US" sz="800" dirty="0"/>
           </a:p>
@@ -7541,8 +7612,8 @@
         </p:nvSpPr>
         <p:spPr>
           <a:xfrm>
-            <a:off x="2048256" y="3931920"/>
-            <a:ext cx="2468880" cy="228600"/>
+            <a:off x="4517136" y="3968496"/>
+            <a:ext cx="384048" cy="228600"/>
           </a:xfrm>
           <a:prstGeom prst="rect">
             <a:avLst/>
@@ -7554,7 +7625,7 @@
           <a:bodyPr wrap="square" lIns="0" tIns="0" rIns="0" bIns="0" rtlCol="0" anchor="ctr"/>
           <a:lstStyle/>
           <a:p>
-            <a:pPr algn="l" indent="0" marL="0">
+            <a:pPr algn="r" indent="0" marL="0">
               <a:lnSpc>
                 <a:spcPct val="115000"/>
               </a:lnSpc>
@@ -7569,7 +7640,7 @@
                 <a:ea typeface="Meiryo" pitchFamily="34" charset="-122"/>
                 <a:cs typeface="Meiryo" pitchFamily="34" charset="-120"/>
               </a:rPr>
-              <a:t>力加減を体験できる訓練シミュレーター</a:t>
+              <a:t>製品</a:t>
             </a:r>
             <a:endParaRPr lang="en-US" sz="800" dirty="0"/>
           </a:p>
@@ -7577,55 +7648,13 @@
       </p:sp>
       <p:sp>
         <p:nvSpPr>
-          <p:cNvPr id="59" name="Text 56"/>
-          <p:cNvSpPr txBox="1"/>
-          <p:nvPr/>
-        </p:nvSpPr>
-        <p:spPr>
-          <a:xfrm>
-            <a:off x="4517136" y="3931920"/>
-            <a:ext cx="384048" cy="228600"/>
-          </a:xfrm>
-          <a:prstGeom prst="rect">
-            <a:avLst/>
-          </a:prstGeom>
-          <a:noFill/>
-          <a:ln/>
-        </p:spPr>
-        <p:txBody>
-          <a:bodyPr wrap="square" lIns="0" tIns="0" rIns="0" bIns="0" rtlCol="0" anchor="ctr"/>
-          <a:lstStyle/>
-          <a:p>
-            <a:pPr algn="r" indent="0" marL="0">
-              <a:lnSpc>
-                <a:spcPct val="115000"/>
-              </a:lnSpc>
-              <a:buNone/>
-            </a:pPr>
-            <a:r>
-              <a:rPr lang="en-US" sz="800" b="1" dirty="0">
-                <a:solidFill>
-                  <a:srgbClr val="1A1A1A"/>
-                </a:solidFill>
-                <a:latin typeface="Meiryo" pitchFamily="34" charset="0"/>
-                <a:ea typeface="Meiryo" pitchFamily="34" charset="-122"/>
-                <a:cs typeface="Meiryo" pitchFamily="34" charset="-120"/>
-              </a:rPr>
-              <a:t>R&amp;D</a:t>
-            </a:r>
-            <a:endParaRPr lang="en-US" sz="800" dirty="0"/>
-          </a:p>
-        </p:txBody>
-      </p:sp>
-      <p:sp>
-        <p:nvSpPr>
-          <p:cNvPr id="60" name="Shape 57"/>
+          <p:cNvPr id="59" name="Shape 56"/>
           <p:cNvSpPr/>
           <p:nvPr/>
         </p:nvSpPr>
         <p:spPr>
           <a:xfrm>
-            <a:off x="365760" y="4160520"/>
+            <a:off x="365760" y="4197096"/>
             <a:ext cx="4572000" cy="228600"/>
           </a:xfrm>
           <a:prstGeom prst="rect">
@@ -7639,13 +7668,13 @@
       </p:sp>
       <p:sp>
         <p:nvSpPr>
-          <p:cNvPr id="61" name="Shape 58"/>
+          <p:cNvPr id="60" name="Shape 57"/>
           <p:cNvSpPr/>
           <p:nvPr/>
         </p:nvSpPr>
         <p:spPr>
           <a:xfrm>
-            <a:off x="365760" y="4160520"/>
+            <a:off x="365760" y="4197096"/>
             <a:ext cx="4572000" cy="0"/>
           </a:xfrm>
           <a:prstGeom prst="line">
@@ -7662,14 +7691,56 @@
       </p:sp>
       <p:sp>
         <p:nvSpPr>
+          <p:cNvPr id="61" name="Text 58"/>
+          <p:cNvSpPr txBox="1"/>
+          <p:nvPr/>
+        </p:nvSpPr>
+        <p:spPr>
+          <a:xfrm>
+            <a:off x="402336" y="4197096"/>
+            <a:ext cx="420624" cy="228600"/>
+          </a:xfrm>
+          <a:prstGeom prst="rect">
+            <a:avLst/>
+          </a:prstGeom>
+          <a:noFill/>
+          <a:ln/>
+        </p:spPr>
+        <p:txBody>
+          <a:bodyPr wrap="square" lIns="0" tIns="0" rIns="0" bIns="0" rtlCol="0" anchor="ctr"/>
+          <a:lstStyle/>
+          <a:p>
+            <a:pPr algn="l" indent="0" marL="0">
+              <a:lnSpc>
+                <a:spcPct val="115000"/>
+              </a:lnSpc>
+              <a:buNone/>
+            </a:pPr>
+            <a:r>
+              <a:rPr lang="en-US" sz="800" dirty="0">
+                <a:solidFill>
+                  <a:srgbClr val="4D4D4D"/>
+                </a:solidFill>
+                <a:latin typeface="Meiryo" pitchFamily="34" charset="0"/>
+                <a:ea typeface="Meiryo" pitchFamily="34" charset="-122"/>
+                <a:cs typeface="Meiryo" pitchFamily="34" charset="-120"/>
+              </a:rPr>
+              <a:t>研究</a:t>
+            </a:r>
+            <a:endParaRPr lang="en-US" sz="800" dirty="0"/>
+          </a:p>
+        </p:txBody>
+      </p:sp>
+      <p:sp>
+        <p:nvSpPr>
           <p:cNvPr id="62" name="Text 59"/>
           <p:cNvSpPr txBox="1"/>
           <p:nvPr/>
         </p:nvSpPr>
         <p:spPr>
           <a:xfrm>
-            <a:off x="402336" y="4160520"/>
-            <a:ext cx="420624" cy="228600"/>
+            <a:off x="822960" y="4197096"/>
+            <a:ext cx="621792" cy="228600"/>
           </a:xfrm>
           <a:prstGeom prst="rect">
             <a:avLst/>
@@ -7688,17 +7759,17 @@
               <a:buNone/>
             </a:pPr>
             <a:r>
-              <a:rPr lang="en-US" sz="800" dirty="0">
-                <a:solidFill>
-                  <a:srgbClr val="4D4D4D"/>
-                </a:solidFill>
-                <a:latin typeface="Meiryo" pitchFamily="34" charset="0"/>
-                <a:ea typeface="Meiryo" pitchFamily="34" charset="-122"/>
-                <a:cs typeface="Meiryo" pitchFamily="34" charset="-120"/>
-              </a:rPr>
-              <a:t>研究</a:t>
-            </a:r>
-            <a:endParaRPr lang="en-US" sz="800" dirty="0"/>
+              <a:rPr lang="en-US" sz="850" b="1" dirty="0">
+                <a:solidFill>
+                  <a:srgbClr val="1A1A1A"/>
+                </a:solidFill>
+                <a:latin typeface="Meiryo" pitchFamily="34" charset="0"/>
+                <a:ea typeface="Meiryo" pitchFamily="34" charset="-122"/>
+                <a:cs typeface="Meiryo" pitchFamily="34" charset="-120"/>
+              </a:rPr>
+              <a:t>HAPTIC</a:t>
+            </a:r>
+            <a:endParaRPr lang="en-US" sz="850" dirty="0"/>
           </a:p>
         </p:txBody>
       </p:sp>
@@ -7710,8 +7781,8 @@
         </p:nvSpPr>
         <p:spPr>
           <a:xfrm>
-            <a:off x="822960" y="4160520"/>
-            <a:ext cx="621792" cy="228600"/>
+            <a:off x="1444752" y="4197096"/>
+            <a:ext cx="603504" cy="228600"/>
           </a:xfrm>
           <a:prstGeom prst="rect">
             <a:avLst/>
@@ -7730,17 +7801,17 @@
               <a:buNone/>
             </a:pPr>
             <a:r>
-              <a:rPr lang="en-US" sz="850" b="1" dirty="0">
-                <a:solidFill>
-                  <a:srgbClr val="1A1A1A"/>
-                </a:solidFill>
-                <a:latin typeface="Meiryo" pitchFamily="34" charset="0"/>
-                <a:ea typeface="Meiryo" pitchFamily="34" charset="-122"/>
-                <a:cs typeface="Meiryo" pitchFamily="34" charset="-120"/>
-              </a:rPr>
-              <a:t>FLOW</a:t>
-            </a:r>
-            <a:endParaRPr lang="en-US" sz="850" dirty="0"/>
+              <a:rPr lang="en-US" sz="800" dirty="0">
+                <a:solidFill>
+                  <a:srgbClr val="4D4D4D"/>
+                </a:solidFill>
+                <a:latin typeface="Meiryo" pitchFamily="34" charset="0"/>
+                <a:ea typeface="Meiryo" pitchFamily="34" charset="-122"/>
+                <a:cs typeface="Meiryo" pitchFamily="34" charset="-120"/>
+              </a:rPr>
+              <a:t>触覚・機械</a:t>
+            </a:r>
+            <a:endParaRPr lang="en-US" sz="800" dirty="0"/>
           </a:p>
         </p:txBody>
       </p:sp>
@@ -7752,8 +7823,8 @@
         </p:nvSpPr>
         <p:spPr>
           <a:xfrm>
-            <a:off x="1444752" y="4160520"/>
-            <a:ext cx="603504" cy="228600"/>
+            <a:off x="2048256" y="4197096"/>
+            <a:ext cx="2468880" cy="228600"/>
           </a:xfrm>
           <a:prstGeom prst="rect">
             <a:avLst/>
@@ -7774,13 +7845,13 @@
             <a:r>
               <a:rPr lang="en-US" sz="800" dirty="0">
                 <a:solidFill>
-                  <a:srgbClr val="4D4D4D"/>
-                </a:solidFill>
-                <a:latin typeface="Meiryo" pitchFamily="34" charset="0"/>
-                <a:ea typeface="Meiryo" pitchFamily="34" charset="-122"/>
-                <a:cs typeface="Meiryo" pitchFamily="34" charset="-120"/>
-              </a:rPr>
-              <a:t>機械</a:t>
+                  <a:srgbClr val="1A1A1A"/>
+                </a:solidFill>
+                <a:latin typeface="Meiryo" pitchFamily="34" charset="0"/>
+                <a:ea typeface="Meiryo" pitchFamily="34" charset="-122"/>
+                <a:cs typeface="Meiryo" pitchFamily="34" charset="-120"/>
+              </a:rPr>
+              <a:t>力加減の訓練シミュレーター／ロボット連携</a:t>
             </a:r>
             <a:endParaRPr lang="en-US" sz="800" dirty="0"/>
           </a:p>
@@ -7794,8 +7865,8 @@
         </p:nvSpPr>
         <p:spPr>
           <a:xfrm>
-            <a:off x="2048256" y="4160520"/>
-            <a:ext cx="2468880" cy="228600"/>
+            <a:off x="4517136" y="4197096"/>
+            <a:ext cx="384048" cy="228600"/>
           </a:xfrm>
           <a:prstGeom prst="rect">
             <a:avLst/>
@@ -7807,14 +7878,14 @@
           <a:bodyPr wrap="square" lIns="0" tIns="0" rIns="0" bIns="0" rtlCol="0" anchor="ctr"/>
           <a:lstStyle/>
           <a:p>
-            <a:pPr algn="l" indent="0" marL="0">
-              <a:lnSpc>
-                <a:spcPct val="115000"/>
-              </a:lnSpc>
-              <a:buNone/>
-            </a:pPr>
-            <a:r>
-              <a:rPr lang="en-US" sz="800" dirty="0">
+            <a:pPr algn="r" indent="0" marL="0">
+              <a:lnSpc>
+                <a:spcPct val="115000"/>
+              </a:lnSpc>
+              <a:buNone/>
+            </a:pPr>
+            <a:r>
+              <a:rPr lang="en-US" sz="800" b="1" dirty="0">
                 <a:solidFill>
                   <a:srgbClr val="1A1A1A"/>
                 </a:solidFill>
@@ -7822,7 +7893,7 @@
                 <a:ea typeface="Meiryo" pitchFamily="34" charset="-122"/>
                 <a:cs typeface="Meiryo" pitchFamily="34" charset="-120"/>
               </a:rPr>
-              <a:t>搬送ロボット・検査AIへ条件を直接渡す</a:t>
+              <a:t>R&amp;D</a:t>
             </a:r>
             <a:endParaRPr lang="en-US" sz="800" dirty="0"/>
           </a:p>
@@ -7830,55 +7901,13 @@
       </p:sp>
       <p:sp>
         <p:nvSpPr>
-          <p:cNvPr id="66" name="Text 63"/>
-          <p:cNvSpPr txBox="1"/>
-          <p:nvPr/>
-        </p:nvSpPr>
-        <p:spPr>
-          <a:xfrm>
-            <a:off x="4517136" y="4160520"/>
-            <a:ext cx="384048" cy="228600"/>
-          </a:xfrm>
-          <a:prstGeom prst="rect">
-            <a:avLst/>
-          </a:prstGeom>
-          <a:noFill/>
-          <a:ln/>
-        </p:spPr>
-        <p:txBody>
-          <a:bodyPr wrap="square" lIns="0" tIns="0" rIns="0" bIns="0" rtlCol="0" anchor="ctr"/>
-          <a:lstStyle/>
-          <a:p>
-            <a:pPr algn="r" indent="0" marL="0">
-              <a:lnSpc>
-                <a:spcPct val="115000"/>
-              </a:lnSpc>
-              <a:buNone/>
-            </a:pPr>
-            <a:r>
-              <a:rPr lang="en-US" sz="800" b="1" dirty="0">
-                <a:solidFill>
-                  <a:srgbClr val="1A1A1A"/>
-                </a:solidFill>
-                <a:latin typeface="Meiryo" pitchFamily="34" charset="0"/>
-                <a:ea typeface="Meiryo" pitchFamily="34" charset="-122"/>
-                <a:cs typeface="Meiryo" pitchFamily="34" charset="-120"/>
-              </a:rPr>
-              <a:t>R&amp;D</a:t>
-            </a:r>
-            <a:endParaRPr lang="en-US" sz="800" dirty="0"/>
-          </a:p>
-        </p:txBody>
-      </p:sp>
-      <p:sp>
-        <p:nvSpPr>
-          <p:cNvPr id="67" name="Shape 64"/>
+          <p:cNvPr id="66" name="Shape 63"/>
           <p:cNvSpPr/>
           <p:nvPr/>
         </p:nvSpPr>
         <p:spPr>
           <a:xfrm>
-            <a:off x="365760" y="4389120"/>
+            <a:off x="365760" y="4425696"/>
             <a:ext cx="4572000" cy="0"/>
           </a:xfrm>
           <a:prstGeom prst="line">
@@ -7895,13 +7924,13 @@
       </p:sp>
       <p:sp>
         <p:nvSpPr>
-          <p:cNvPr id="68" name="rnd"/>
+          <p:cNvPr id="67" name="rnd"/>
           <p:cNvSpPr/>
           <p:nvPr/>
         </p:nvSpPr>
         <p:spPr>
           <a:xfrm>
-            <a:off x="5120640" y="2542032"/>
+            <a:off x="5120640" y="2578608"/>
             <a:ext cx="3657600" cy="1207008"/>
           </a:xfrm>
           <a:prstGeom prst="rect">
@@ -7915,55 +7944,55 @@
       </p:sp>
       <p:sp>
         <p:nvSpPr>
+          <p:cNvPr id="68" name="Text 65"/>
+          <p:cNvSpPr txBox="1"/>
+          <p:nvPr/>
+        </p:nvSpPr>
+        <p:spPr>
+          <a:xfrm>
+            <a:off x="5230368" y="2624328"/>
+            <a:ext cx="3438144" cy="237744"/>
+          </a:xfrm>
+          <a:prstGeom prst="rect">
+            <a:avLst/>
+          </a:prstGeom>
+          <a:noFill/>
+          <a:ln/>
+        </p:spPr>
+        <p:txBody>
+          <a:bodyPr wrap="square" lIns="0" tIns="0" rIns="0" bIns="0" rtlCol="0" anchor="t"/>
+          <a:lstStyle/>
+          <a:p>
+            <a:pPr algn="l" indent="0" marL="0">
+              <a:lnSpc>
+                <a:spcPct val="115000"/>
+              </a:lnSpc>
+              <a:buNone/>
+            </a:pPr>
+            <a:r>
+              <a:rPr lang="en-US" sz="1050" b="1" dirty="0">
+                <a:solidFill>
+                  <a:srgbClr val="FFFFFF"/>
+                </a:solidFill>
+                <a:latin typeface="Meiryo" pitchFamily="34" charset="0"/>
+                <a:ea typeface="Meiryo" pitchFamily="34" charset="-122"/>
+                <a:cs typeface="Meiryo" pitchFamily="34" charset="-120"/>
+              </a:rPr>
+              <a:t>R&amp;D戦略（技術開発）</a:t>
+            </a:r>
+            <a:endParaRPr lang="en-US" sz="1050" dirty="0"/>
+          </a:p>
+        </p:txBody>
+      </p:sp>
+      <p:sp>
+        <p:nvSpPr>
           <p:cNvPr id="69" name="Text 66"/>
           <p:cNvSpPr txBox="1"/>
           <p:nvPr/>
         </p:nvSpPr>
         <p:spPr>
           <a:xfrm>
-            <a:off x="5230368" y="2587752"/>
-            <a:ext cx="3438144" cy="237744"/>
-          </a:xfrm>
-          <a:prstGeom prst="rect">
-            <a:avLst/>
-          </a:prstGeom>
-          <a:noFill/>
-          <a:ln/>
-        </p:spPr>
-        <p:txBody>
-          <a:bodyPr wrap="square" lIns="0" tIns="0" rIns="0" bIns="0" rtlCol="0" anchor="t"/>
-          <a:lstStyle/>
-          <a:p>
-            <a:pPr algn="l" indent="0" marL="0">
-              <a:lnSpc>
-                <a:spcPct val="115000"/>
-              </a:lnSpc>
-              <a:buNone/>
-            </a:pPr>
-            <a:r>
-              <a:rPr lang="en-US" sz="1050" b="1" dirty="0">
-                <a:solidFill>
-                  <a:srgbClr val="FFFFFF"/>
-                </a:solidFill>
-                <a:latin typeface="Meiryo" pitchFamily="34" charset="0"/>
-                <a:ea typeface="Meiryo" pitchFamily="34" charset="-122"/>
-                <a:cs typeface="Meiryo" pitchFamily="34" charset="-120"/>
-              </a:rPr>
-              <a:t>R&amp;D戦略（技術開発）</a:t>
-            </a:r>
-            <a:endParaRPr lang="en-US" sz="1050" dirty="0"/>
-          </a:p>
-        </p:txBody>
-      </p:sp>
-      <p:sp>
-        <p:nvSpPr>
-          <p:cNvPr id="70" name="Text 67"/>
-          <p:cNvSpPr txBox="1"/>
-          <p:nvPr/>
-        </p:nvSpPr>
-        <p:spPr>
-          <a:xfrm>
-            <a:off x="5230368" y="2834640"/>
+            <a:off x="5230368" y="2871216"/>
             <a:ext cx="3438144" cy="896112"/>
           </a:xfrm>
           <a:prstGeom prst="rect">
@@ -8100,7 +8129,7 @@
                 <a:ea typeface="Meiryo" pitchFamily="34" charset="-122"/>
                 <a:cs typeface="Meiryo" pitchFamily="34" charset="-120"/>
               </a:rPr>
-              <a:t>CAD・3D・触覚デバイスはベンダー・大学と共同研究</a:t>
+              <a:t>スマートグラス端末・CAD・3D・触覚はメーカー・大学と</a:t>
             </a:r>
             <a:endParaRPr lang="en-US" sz="850" dirty="0"/>
           </a:p>
@@ -8151,13 +8180,13 @@
       </p:sp>
       <p:sp>
         <p:nvSpPr>
-          <p:cNvPr id="71" name="onboarding"/>
+          <p:cNvPr id="70" name="onboarding"/>
           <p:cNvSpPr/>
           <p:nvPr/>
         </p:nvSpPr>
         <p:spPr>
           <a:xfrm>
-            <a:off x="5120640" y="3840480"/>
+            <a:off x="5120640" y="3877056"/>
             <a:ext cx="3657600" cy="658368"/>
           </a:xfrm>
           <a:prstGeom prst="rect">
@@ -8171,14 +8200,56 @@
       </p:sp>
       <p:sp>
         <p:nvSpPr>
+          <p:cNvPr id="71" name="Text 68"/>
+          <p:cNvSpPr txBox="1"/>
+          <p:nvPr/>
+        </p:nvSpPr>
+        <p:spPr>
+          <a:xfrm>
+            <a:off x="5230368" y="3913632"/>
+            <a:ext cx="3438144" cy="237744"/>
+          </a:xfrm>
+          <a:prstGeom prst="rect">
+            <a:avLst/>
+          </a:prstGeom>
+          <a:noFill/>
+          <a:ln/>
+        </p:spPr>
+        <p:txBody>
+          <a:bodyPr wrap="square" lIns="0" tIns="0" rIns="0" bIns="0" rtlCol="0" anchor="t"/>
+          <a:lstStyle/>
+          <a:p>
+            <a:pPr algn="l" indent="0" marL="0">
+              <a:lnSpc>
+                <a:spcPct val="115000"/>
+              </a:lnSpc>
+              <a:buNone/>
+            </a:pPr>
+            <a:r>
+              <a:rPr lang="en-US" sz="1000" b="1" dirty="0">
+                <a:solidFill>
+                  <a:srgbClr val="1A1A1A"/>
+                </a:solidFill>
+                <a:latin typeface="Meiryo" pitchFamily="34" charset="0"/>
+                <a:ea typeface="Meiryo" pitchFamily="34" charset="-122"/>
+                <a:cs typeface="Meiryo" pitchFamily="34" charset="-120"/>
+              </a:rPr>
+              <a:t>道具以外：導入支援（初年度・約2か月）</a:t>
+            </a:r>
+            <a:endParaRPr lang="en-US" sz="1000" dirty="0"/>
+          </a:p>
+        </p:txBody>
+      </p:sp>
+      <p:sp>
+        <p:nvSpPr>
           <p:cNvPr id="72" name="Text 69"/>
           <p:cNvSpPr txBox="1"/>
           <p:nvPr/>
         </p:nvSpPr>
         <p:spPr>
           <a:xfrm>
-            <a:off x="5230368" y="3877056"/>
-            <a:ext cx="3438144" cy="237744"/>
+            <a:off x="5230368" y="4151376"/>
+            <a:ext cx="3438144" cy="365760"/>
           </a:xfrm>
           <a:prstGeom prst="rect">
             <a:avLst/>
@@ -8197,7 +8268,7 @@
               <a:buNone/>
             </a:pPr>
             <a:r>
-              <a:rPr lang="en-US" sz="1000" b="1" dirty="0">
+              <a:rPr lang="en-US" sz="850" dirty="0">
                 <a:solidFill>
                   <a:srgbClr val="1A1A1A"/>
                 </a:solidFill>
@@ -8205,9 +8276,9 @@
                 <a:ea typeface="Meiryo" pitchFamily="34" charset="-122"/>
                 <a:cs typeface="Meiryo" pitchFamily="34" charset="-120"/>
               </a:rPr>
-              <a:t>道具以外：導入支援（初年度・約2か月）</a:t>
-            </a:r>
-            <a:endParaRPr lang="en-US" sz="1000" dirty="0"/>
+              <a:t>当社の担当者が現場に入り、熟練者への聞き取り・帳票の移行・現場研修まで行う</a:t>
+            </a:r>
+            <a:endParaRPr lang="en-US" sz="850" dirty="0"/>
           </a:p>
         </p:txBody>
       </p:sp>
@@ -8219,8 +8290,8 @@
         </p:nvSpPr>
         <p:spPr>
           <a:xfrm>
-            <a:off x="5230368" y="4114800"/>
-            <a:ext cx="3438144" cy="365760"/>
+            <a:off x="365760" y="4517136"/>
+            <a:ext cx="8412480" cy="274320"/>
           </a:xfrm>
           <a:prstGeom prst="rect">
             <a:avLst/>
@@ -8239,48 +8310,6 @@
               <a:buNone/>
             </a:pPr>
             <a:r>
-              <a:rPr lang="en-US" sz="850" dirty="0">
-                <a:solidFill>
-                  <a:srgbClr val="1A1A1A"/>
-                </a:solidFill>
-                <a:latin typeface="Meiryo" pitchFamily="34" charset="0"/>
-                <a:ea typeface="Meiryo" pitchFamily="34" charset="-122"/>
-                <a:cs typeface="Meiryo" pitchFamily="34" charset="-120"/>
-              </a:rPr>
-              <a:t>当社の担当者が現場に入り、熟練者への聞き取り・帳票の移行・現場研修まで行う</a:t>
-            </a:r>
-            <a:endParaRPr lang="en-US" sz="850" dirty="0"/>
-          </a:p>
-        </p:txBody>
-      </p:sp>
-      <p:sp>
-        <p:nvSpPr>
-          <p:cNvPr id="74" name="Text 71"/>
-          <p:cNvSpPr txBox="1"/>
-          <p:nvPr/>
-        </p:nvSpPr>
-        <p:spPr>
-          <a:xfrm>
-            <a:off x="365760" y="4517136"/>
-            <a:ext cx="8412480" cy="274320"/>
-          </a:xfrm>
-          <a:prstGeom prst="rect">
-            <a:avLst/>
-          </a:prstGeom>
-          <a:noFill/>
-          <a:ln/>
-        </p:spPr>
-        <p:txBody>
-          <a:bodyPr wrap="square" lIns="0" tIns="0" rIns="0" bIns="0" rtlCol="0" anchor="t"/>
-          <a:lstStyle/>
-          <a:p>
-            <a:pPr algn="l" indent="0" marL="0">
-              <a:lnSpc>
-                <a:spcPct val="115000"/>
-              </a:lnSpc>
-              <a:buNone/>
-            </a:pPr>
-            <a:r>
               <a:rPr lang="en-US" sz="800" dirty="0">
                 <a:solidFill>
                   <a:srgbClr val="8C8C8C"/>
@@ -8289,7 +8318,7 @@
                 <a:ea typeface="Meiryo" pitchFamily="34" charset="-122"/>
                 <a:cs typeface="Meiryo" pitchFamily="34" charset="-120"/>
               </a:rPr>
-              <a:t>(1) 内閣府「人工知能基本計画」（令和8年7月14日 閣議決定）「完全なデータの構造化をしない形での現場データの活用を推進する」　(2) 厚生労働省「令和6年度 能力開発基本調査」（2025年6月公表）。R&amp;D行は製品化前の売上を計画に含めない</a:t>
+              <a:t>(1) 内閣府「人工知能基本計画」（令和8年7月14日 閣議決定）「完全なデータの構造化をしない形での現場データの活用を推進する」　(2) 指導役不足59.5%・育成時間なし47.4%：厚生労働省「令和6年度 能力開発基本調査」（2025年6月公表）。常時収録は作業時間・作業エリアに限り、本人同意のもとで行う</a:t>
             </a:r>
             <a:endParaRPr lang="en-US" sz="800" dirty="0"/>
           </a:p>
@@ -9961,7 +9990,7 @@
                 <a:ea typeface="Meiryo" pitchFamily="34" charset="-122"/>
                 <a:cs typeface="Meiryo" pitchFamily="34" charset="-120"/>
               </a:rPr>
-              <a:t>横軸は経過月数。時間単価4,000円（780万円÷1,950h）×月6h×100名＝月240万円。月6hは建設業の書類電子化実績を準用した仮定。年300万円は顧客効果の約1割（価値基準価格）</a:t>
+              <a:t>横軸は経過月数。時間単価4,000円（780万円÷1,950h）×月6h×100名＝月240万円。月6hは日報・進捗報告などの書類作業の削減分で、建設業の書類電子化実績（月6.5h）を準用した仮定</a:t>
             </a:r>
             <a:endParaRPr lang="en-US" sz="800" dirty="0"/>
           </a:p>
@@ -10118,7 +10147,7 @@
                 <a:ea typeface="Meiryo" pitchFamily="34" charset="-122"/>
                 <a:cs typeface="Meiryo" pitchFamily="34" charset="-120"/>
               </a:rPr>
-              <a:t>判断の理由を扱う会社は現れた。連続工程の現場処置を、教材にして届ける会社はまだない</a:t>
+              <a:t>判断の理由を扱う会社は現れた。連続工程の現場で、現物に重ねて渡し、教材にまでする会社はまだない</a:t>
             </a:r>
             <a:endParaRPr lang="en-US" sz="1200" dirty="0"/>
           </a:p>
@@ -10536,13 +10565,13 @@
       </p:sp>
       <p:sp>
         <p:nvSpPr>
-          <p:cNvPr id="17" name="pos-CADDi（組立・図面）"/>
+          <p:cNvPr id="17" name="pos-AR作業支援"/>
           <p:cNvSpPr/>
           <p:nvPr/>
         </p:nvSpPr>
         <p:spPr>
           <a:xfrm>
-            <a:off x="2666390" y="1613916"/>
+            <a:off x="1799539" y="2428646"/>
             <a:ext cx="137160" cy="137160"/>
           </a:xfrm>
           <a:prstGeom prst="ellipse">
@@ -10567,7 +10596,7 @@
         </p:nvSpPr>
         <p:spPr>
           <a:xfrm>
-            <a:off x="2840126" y="1581912"/>
+            <a:off x="208483" y="2396642"/>
             <a:ext cx="1554480" cy="201168"/>
           </a:xfrm>
           <a:prstGeom prst="rect">
@@ -10580,7 +10609,7 @@
           <a:bodyPr wrap="square" lIns="0" tIns="0" rIns="0" bIns="0" rtlCol="0" anchor="ctr"/>
           <a:lstStyle/>
           <a:p>
-            <a:pPr algn="l" indent="0" marL="0">
+            <a:pPr algn="r" indent="0" marL="0">
               <a:lnSpc>
                 <a:spcPct val="115000"/>
               </a:lnSpc>
@@ -10595,7 +10624,7 @@
                 <a:ea typeface="Meiryo" pitchFamily="34" charset="-122"/>
                 <a:cs typeface="Meiryo" pitchFamily="34" charset="-120"/>
               </a:rPr>
-              <a:t>CADDi（組立・図面）</a:t>
+              <a:t>AR作業支援</a:t>
             </a:r>
             <a:endParaRPr lang="en-US" sz="800" dirty="0"/>
           </a:p>
@@ -10603,13 +10632,13 @@
       </p:sp>
       <p:sp>
         <p:nvSpPr>
-          <p:cNvPr id="19" name="pos-Airion（貯めるまで）"/>
+          <p:cNvPr id="19" name="pos-CADDi（組立・図面）"/>
           <p:cNvSpPr/>
           <p:nvPr/>
         </p:nvSpPr>
         <p:spPr>
           <a:xfrm>
-            <a:off x="3099816" y="2255825"/>
+            <a:off x="2666390" y="1613916"/>
             <a:ext cx="137160" cy="137160"/>
           </a:xfrm>
           <a:prstGeom prst="ellipse">
@@ -10634,6 +10663,73 @@
         </p:nvSpPr>
         <p:spPr>
           <a:xfrm>
+            <a:off x="2840126" y="1581912"/>
+            <a:ext cx="1554480" cy="201168"/>
+          </a:xfrm>
+          <a:prstGeom prst="rect">
+            <a:avLst/>
+          </a:prstGeom>
+          <a:noFill/>
+          <a:ln/>
+        </p:spPr>
+        <p:txBody>
+          <a:bodyPr wrap="square" lIns="0" tIns="0" rIns="0" bIns="0" rtlCol="0" anchor="ctr"/>
+          <a:lstStyle/>
+          <a:p>
+            <a:pPr algn="l" indent="0" marL="0">
+              <a:lnSpc>
+                <a:spcPct val="115000"/>
+              </a:lnSpc>
+              <a:buNone/>
+            </a:pPr>
+            <a:r>
+              <a:rPr lang="en-US" sz="800" dirty="0">
+                <a:solidFill>
+                  <a:srgbClr val="1A1A1A"/>
+                </a:solidFill>
+                <a:latin typeface="Meiryo" pitchFamily="34" charset="0"/>
+                <a:ea typeface="Meiryo" pitchFamily="34" charset="-122"/>
+                <a:cs typeface="Meiryo" pitchFamily="34" charset="-120"/>
+              </a:rPr>
+              <a:t>CADDi（組立・図面）</a:t>
+            </a:r>
+            <a:endParaRPr lang="en-US" sz="800" dirty="0"/>
+          </a:p>
+        </p:txBody>
+      </p:sp>
+      <p:sp>
+        <p:nvSpPr>
+          <p:cNvPr id="21" name="pos-Airion（貯めるまで）"/>
+          <p:cNvSpPr/>
+          <p:nvPr/>
+        </p:nvSpPr>
+        <p:spPr>
+          <a:xfrm>
+            <a:off x="3099816" y="2255825"/>
+            <a:ext cx="137160" cy="137160"/>
+          </a:xfrm>
+          <a:prstGeom prst="ellipse">
+            <a:avLst/>
+          </a:prstGeom>
+          <a:solidFill>
+            <a:srgbClr val="FFFFFF"/>
+          </a:solidFill>
+          <a:ln w="15875">
+            <a:solidFill>
+              <a:srgbClr val="1A1A1A"/>
+            </a:solidFill>
+            <a:prstDash val="solid"/>
+          </a:ln>
+        </p:spPr>
+      </p:sp>
+      <p:sp>
+        <p:nvSpPr>
+          <p:cNvPr id="22" name="Text 19"/>
+          <p:cNvSpPr txBox="1"/>
+          <p:nvPr/>
+        </p:nvSpPr>
+        <p:spPr>
+          <a:xfrm>
             <a:off x="3273552" y="2223821"/>
             <a:ext cx="1554480" cy="201168"/>
           </a:xfrm>
@@ -10670,7 +10766,7 @@
       </p:sp>
       <p:sp>
         <p:nvSpPr>
-          <p:cNvPr id="21" name="pos-三現ワークス"/>
+          <p:cNvPr id="23" name="pos-三現ワークス"/>
           <p:cNvSpPr/>
           <p:nvPr/>
         </p:nvSpPr>
@@ -10695,7 +10791,7 @@
       </p:sp>
       <p:sp>
         <p:nvSpPr>
-          <p:cNvPr id="22" name="Text 19"/>
+          <p:cNvPr id="24" name="Text 21"/>
           <p:cNvSpPr txBox="1"/>
           <p:nvPr/>
         </p:nvSpPr>
@@ -10737,7 +10833,7 @@
       </p:sp>
       <p:sp>
         <p:nvSpPr>
-          <p:cNvPr id="23" name="pos-三菱総研 匠AI"/>
+          <p:cNvPr id="25" name="pos-三菱総研 匠AI"/>
           <p:cNvSpPr/>
           <p:nvPr/>
         </p:nvSpPr>
@@ -10762,7 +10858,7 @@
       </p:sp>
       <p:sp>
         <p:nvSpPr>
-          <p:cNvPr id="24" name="Text 21"/>
+          <p:cNvPr id="26" name="Text 23"/>
           <p:cNvSpPr txBox="1"/>
           <p:nvPr/>
         </p:nvSpPr>
@@ -10804,7 +10900,7 @@
       </p:sp>
       <p:sp>
         <p:nvSpPr>
-          <p:cNvPr id="25" name="pos-社内の熟練者（属人）"/>
+          <p:cNvPr id="27" name="pos-社内の熟練者（属人）"/>
           <p:cNvSpPr/>
           <p:nvPr/>
         </p:nvSpPr>
@@ -10829,7 +10925,7 @@
       </p:sp>
       <p:sp>
         <p:nvSpPr>
-          <p:cNvPr id="26" name="Text 23"/>
+          <p:cNvPr id="28" name="Text 25"/>
           <p:cNvSpPr txBox="1"/>
           <p:nvPr/>
         </p:nvSpPr>
@@ -10871,7 +10967,7 @@
       </p:sp>
       <p:sp>
         <p:nvSpPr>
-          <p:cNvPr id="27" name="Text 24"/>
+          <p:cNvPr id="29" name="Text 26"/>
           <p:cNvSpPr txBox="1"/>
           <p:nvPr/>
         </p:nvSpPr>
@@ -12161,6 +12257,208 @@
                         <a:buNone/>
                       </a:pPr>
                       <a:r>
+                        <a:rPr lang="en-US" sz="800" dirty="0">
+                          <a:solidFill>
+                            <a:srgbClr val="1A1A1A"/>
+                          </a:solidFill>
+                          <a:latin typeface="Meiryo" pitchFamily="34" charset="0"/>
+                          <a:ea typeface="Meiryo" pitchFamily="34" charset="-122"/>
+                          <a:cs typeface="Meiryo" pitchFamily="34" charset="-120"/>
+                        </a:rPr>
+                        <a:t>AR作業支援（各社）</a:t>
+                      </a:r>
+                      <a:endParaRPr lang="en-US" sz="800" dirty="0">
+                        <a:latin typeface="Meiryo" charset="0"/>
+                        <a:ea typeface="Meiryo" charset="0"/>
+                        <a:cs typeface="Meiryo" charset="0"/>
+                      </a:endParaRPr>
+                    </a:p>
+                  </a:txBody>
+                  <a:tcPr marL="54864" marR="54864" marT="18288" marB="18288" anchor="ctr">
+                    <a:lnL w="0" cap="flat" cmpd="sng" algn="ctr">
+                      <a:noFill/>
+                    </a:lnL>
+                    <a:lnR w="0" cap="flat" cmpd="sng" algn="ctr">
+                      <a:noFill/>
+                    </a:lnR>
+                    <a:lnT w="0" cap="flat" cmpd="sng" algn="ctr">
+                      <a:noFill/>
+                    </a:lnT>
+                    <a:lnB w="9525" cap="flat" cmpd="sng" algn="ctr">
+                      <a:solidFill>
+                        <a:srgbClr val="BFBFBF"/>
+                      </a:solidFill>
+                      <a:prstDash val="solid"/>
+                      <a:round/>
+                      <a:headEnd type="none" w="med" len="med"/>
+                      <a:tailEnd type="none" w="med" len="med"/>
+                    </a:lnB>
+                    <a:solidFill>
+                      <a:srgbClr val="FFFFFF"/>
+                    </a:solidFill>
+                  </a:tcPr>
+                </a:tc>
+                <a:tc>
+                  <a:txBody>
+                    <a:bodyPr/>
+                    <a:lstStyle/>
+                    <a:p>
+                      <a:pPr algn="l" indent="0" marL="0">
+                        <a:buNone/>
+                      </a:pPr>
+                      <a:r>
+                        <a:rPr lang="en-US" sz="800" dirty="0">
+                          <a:solidFill>
+                            <a:srgbClr val="1A1A1A"/>
+                          </a:solidFill>
+                          <a:latin typeface="Meiryo" pitchFamily="34" charset="0"/>
+                          <a:ea typeface="Meiryo" pitchFamily="34" charset="-122"/>
+                          <a:cs typeface="Meiryo" pitchFamily="34" charset="-120"/>
+                        </a:rPr>
+                        <a:t>×</a:t>
+                      </a:r>
+                      <a:endParaRPr lang="en-US" sz="800" dirty="0">
+                        <a:latin typeface="Meiryo" charset="0"/>
+                        <a:ea typeface="Meiryo" charset="0"/>
+                        <a:cs typeface="Meiryo" charset="0"/>
+                      </a:endParaRPr>
+                    </a:p>
+                  </a:txBody>
+                  <a:tcPr marL="54864" marR="54864" marT="18288" marB="18288" anchor="ctr">
+                    <a:lnL w="0" cap="flat" cmpd="sng" algn="ctr">
+                      <a:noFill/>
+                    </a:lnL>
+                    <a:lnR w="0" cap="flat" cmpd="sng" algn="ctr">
+                      <a:noFill/>
+                    </a:lnR>
+                    <a:lnT w="0" cap="flat" cmpd="sng" algn="ctr">
+                      <a:noFill/>
+                    </a:lnT>
+                    <a:lnB w="9525" cap="flat" cmpd="sng" algn="ctr">
+                      <a:solidFill>
+                        <a:srgbClr val="BFBFBF"/>
+                      </a:solidFill>
+                      <a:prstDash val="solid"/>
+                      <a:round/>
+                      <a:headEnd type="none" w="med" len="med"/>
+                      <a:tailEnd type="none" w="med" len="med"/>
+                    </a:lnB>
+                    <a:solidFill>
+                      <a:srgbClr val="FFFFFF"/>
+                    </a:solidFill>
+                  </a:tcPr>
+                </a:tc>
+                <a:tc>
+                  <a:txBody>
+                    <a:bodyPr/>
+                    <a:lstStyle/>
+                    <a:p>
+                      <a:pPr algn="l" indent="0" marL="0">
+                        <a:buNone/>
+                      </a:pPr>
+                      <a:r>
+                        <a:rPr lang="en-US" sz="800" dirty="0">
+                          <a:solidFill>
+                            <a:srgbClr val="1A1A1A"/>
+                          </a:solidFill>
+                          <a:latin typeface="Meiryo" pitchFamily="34" charset="0"/>
+                          <a:ea typeface="Meiryo" pitchFamily="34" charset="-122"/>
+                          <a:cs typeface="Meiryo" pitchFamily="34" charset="-120"/>
+                        </a:rPr>
+                        <a:t>△ 手順表示</a:t>
+                      </a:r>
+                      <a:endParaRPr lang="en-US" sz="800" dirty="0">
+                        <a:latin typeface="Meiryo" charset="0"/>
+                        <a:ea typeface="Meiryo" charset="0"/>
+                        <a:cs typeface="Meiryo" charset="0"/>
+                      </a:endParaRPr>
+                    </a:p>
+                  </a:txBody>
+                  <a:tcPr marL="54864" marR="54864" marT="18288" marB="18288" anchor="ctr">
+                    <a:lnL w="0" cap="flat" cmpd="sng" algn="ctr">
+                      <a:noFill/>
+                    </a:lnL>
+                    <a:lnR w="0" cap="flat" cmpd="sng" algn="ctr">
+                      <a:noFill/>
+                    </a:lnR>
+                    <a:lnT w="0" cap="flat" cmpd="sng" algn="ctr">
+                      <a:noFill/>
+                    </a:lnT>
+                    <a:lnB w="9525" cap="flat" cmpd="sng" algn="ctr">
+                      <a:solidFill>
+                        <a:srgbClr val="BFBFBF"/>
+                      </a:solidFill>
+                      <a:prstDash val="solid"/>
+                      <a:round/>
+                      <a:headEnd type="none" w="med" len="med"/>
+                      <a:tailEnd type="none" w="med" len="med"/>
+                    </a:lnB>
+                    <a:solidFill>
+                      <a:srgbClr val="FFFFFF"/>
+                    </a:solidFill>
+                  </a:tcPr>
+                </a:tc>
+                <a:tc>
+                  <a:txBody>
+                    <a:bodyPr/>
+                    <a:lstStyle/>
+                    <a:p>
+                      <a:pPr algn="l" indent="0" marL="0">
+                        <a:buNone/>
+                      </a:pPr>
+                      <a:r>
+                        <a:rPr lang="en-US" sz="800" dirty="0">
+                          <a:solidFill>
+                            <a:srgbClr val="1A1A1A"/>
+                          </a:solidFill>
+                          <a:latin typeface="Meiryo" pitchFamily="34" charset="0"/>
+                          <a:ea typeface="Meiryo" pitchFamily="34" charset="-122"/>
+                          <a:cs typeface="Meiryo" pitchFamily="34" charset="-120"/>
+                        </a:rPr>
+                        <a:t>業種横断</a:t>
+                      </a:r>
+                      <a:endParaRPr lang="en-US" sz="800" dirty="0">
+                        <a:latin typeface="Meiryo" charset="0"/>
+                        <a:ea typeface="Meiryo" charset="0"/>
+                        <a:cs typeface="Meiryo" charset="0"/>
+                      </a:endParaRPr>
+                    </a:p>
+                  </a:txBody>
+                  <a:tcPr marL="54864" marR="54864" marT="18288" marB="18288" anchor="ctr">
+                    <a:lnL w="0" cap="flat" cmpd="sng" algn="ctr">
+                      <a:noFill/>
+                    </a:lnL>
+                    <a:lnR w="0" cap="flat" cmpd="sng" algn="ctr">
+                      <a:noFill/>
+                    </a:lnR>
+                    <a:lnT w="0" cap="flat" cmpd="sng" algn="ctr">
+                      <a:noFill/>
+                    </a:lnT>
+                    <a:lnB w="9525" cap="flat" cmpd="sng" algn="ctr">
+                      <a:solidFill>
+                        <a:srgbClr val="BFBFBF"/>
+                      </a:solidFill>
+                      <a:prstDash val="solid"/>
+                      <a:round/>
+                      <a:headEnd type="none" w="med" len="med"/>
+                      <a:tailEnd type="none" w="med" len="med"/>
+                    </a:lnB>
+                    <a:solidFill>
+                      <a:srgbClr val="FFFFFF"/>
+                    </a:solidFill>
+                  </a:tcPr>
+                </a:tc>
+              </a:tr>
+              <a:tr h="246888">
+                <a:tc>
+                  <a:txBody>
+                    <a:bodyPr/>
+                    <a:lstStyle/>
+                    <a:p>
+                      <a:pPr algn="l" indent="0" marL="0">
+                        <a:buNone/>
+                      </a:pPr>
+                      <a:r>
                         <a:rPr lang="en-US" sz="800" b="1" dirty="0">
                           <a:solidFill>
                             <a:srgbClr val="1A1A1A"/>
@@ -12225,7 +12523,7 @@
                           <a:ea typeface="Meiryo" pitchFamily="34" charset="-122"/>
                           <a:cs typeface="Meiryo" pitchFamily="34" charset="-120"/>
                         </a:rPr>
-                        <a:t>○ 音声で一言</a:t>
+                        <a:t>○ 常時収録</a:t>
                       </a:r>
                       <a:endParaRPr lang="en-US" sz="800" dirty="0">
                         <a:latin typeface="Meiryo" charset="0"/>
@@ -12281,7 +12579,7 @@
                           <a:ea typeface="Meiryo" pitchFamily="34" charset="-122"/>
                           <a:cs typeface="Meiryo" pitchFamily="34" charset="-120"/>
                         </a:rPr>
-                        <a:t>○ 当社が制作</a:t>
+                        <a:t>○ 現物照合＋教材</a:t>
                       </a:r>
                       <a:endParaRPr lang="en-US" sz="800" dirty="0">
                         <a:latin typeface="Meiryo" charset="0"/>
@@ -12383,13 +12681,13 @@
       </p:graphicFrame>
       <p:sp>
         <p:nvSpPr>
-          <p:cNvPr id="29" name="threat"/>
+          <p:cNvPr id="31" name="threat"/>
           <p:cNvSpPr/>
           <p:nvPr/>
         </p:nvSpPr>
         <p:spPr>
           <a:xfrm>
-            <a:off x="4526280" y="3145536"/>
+            <a:off x="4526280" y="3374136"/>
             <a:ext cx="4251960" cy="603504"/>
           </a:xfrm>
           <a:prstGeom prst="rect">
@@ -12403,13 +12701,13 @@
       </p:sp>
       <p:sp>
         <p:nvSpPr>
-          <p:cNvPr id="30" name="Text 26"/>
+          <p:cNvPr id="32" name="Text 28"/>
           <p:cNvSpPr txBox="1"/>
           <p:nvPr/>
         </p:nvSpPr>
         <p:spPr>
           <a:xfrm>
-            <a:off x="4636008" y="3145536"/>
+            <a:off x="4636008" y="3374136"/>
             <a:ext cx="4032504" cy="603504"/>
           </a:xfrm>
           <a:prstGeom prst="rect">
@@ -12511,14 +12809,14 @@
       </p:sp>
       <p:sp>
         <p:nvSpPr>
-          <p:cNvPr id="31" name="Text 27"/>
+          <p:cNvPr id="33" name="Text 29"/>
           <p:cNvSpPr txBox="1"/>
           <p:nvPr/>
         </p:nvSpPr>
         <p:spPr>
           <a:xfrm>
-            <a:off x="4526280" y="3822192"/>
-            <a:ext cx="4251960" cy="457200"/>
+            <a:off x="4526280" y="4014216"/>
+            <a:ext cx="4251960" cy="420624"/>
           </a:xfrm>
           <a:prstGeom prst="rect">
             <a:avLst/>
@@ -12535,12 +12833,12 @@
                 <a:spcPct val="115000"/>
               </a:lnSpc>
               <a:spcAft>
-                <a:spcPts val="200"/>
+                <a:spcPts val="100"/>
               </a:spcAft>
               <a:buNone/>
             </a:pPr>
             <a:r>
-              <a:rPr lang="en-US" sz="850" b="1" dirty="0">
+              <a:rPr lang="en-US" sz="800" b="1" dirty="0">
                 <a:solidFill>
                   <a:srgbClr val="1A1A1A"/>
                 </a:solidFill>
@@ -12555,12 +12853,12 @@
                 <a:spcPct val="115000"/>
               </a:lnSpc>
               <a:spcAft>
-                <a:spcPts val="200"/>
+                <a:spcPts val="100"/>
               </a:spcAft>
               <a:buNone/>
             </a:pPr>
             <a:r>
-              <a:rPr lang="en-US" sz="850" dirty="0">
+              <a:rPr lang="en-US" sz="800" dirty="0">
                 <a:solidFill>
                   <a:srgbClr val="1A1A1A"/>
                 </a:solidFill>
@@ -12570,7 +12868,7 @@
               </a:rPr>
               <a:t>工程の形（連続／組立／施工）×規模で区分し、中堅の電線工場を狙う</a:t>
             </a:r>
-            <a:endParaRPr lang="en-US" sz="850" dirty="0"/>
+            <a:endParaRPr lang="en-US" sz="800" dirty="0"/>
           </a:p>
           <a:p>
             <a:pPr algn="l" indent="0" marL="0">
@@ -12578,12 +12876,12 @@
                 <a:spcPct val="115000"/>
               </a:lnSpc>
               <a:spcAft>
-                <a:spcPts val="200"/>
+                <a:spcPts val="100"/>
               </a:spcAft>
               <a:buNone/>
             </a:pPr>
             <a:r>
-              <a:rPr lang="en-US" sz="850" b="1" dirty="0">
+              <a:rPr lang="en-US" sz="800" b="1" dirty="0">
                 <a:solidFill>
                   <a:srgbClr val="1A1A1A"/>
                 </a:solidFill>
@@ -12598,12 +12896,12 @@
                 <a:spcPct val="115000"/>
               </a:lnSpc>
               <a:spcAft>
-                <a:spcPts val="200"/>
+                <a:spcPts val="100"/>
               </a:spcAft>
               <a:buNone/>
             </a:pPr>
             <a:r>
-              <a:rPr lang="en-US" sz="850" dirty="0">
+              <a:rPr lang="en-US" sz="800" dirty="0">
                 <a:solidFill>
                   <a:srgbClr val="1A1A1A"/>
                 </a:solidFill>
@@ -12613,20 +12911,20 @@
               </a:rPr>
               <a:t>ニッチャー（コトラー）×差別化集中（ポーター）。大手の内製は個別開発で中堅に届かない</a:t>
             </a:r>
-            <a:endParaRPr lang="en-US" sz="850" dirty="0"/>
-          </a:p>
-        </p:txBody>
-      </p:sp>
-      <p:sp>
-        <p:nvSpPr>
-          <p:cNvPr id="32" name="Text 28"/>
+            <a:endParaRPr lang="en-US" sz="800" dirty="0"/>
+          </a:p>
+        </p:txBody>
+      </p:sp>
+      <p:sp>
+        <p:nvSpPr>
+          <p:cNvPr id="34" name="Text 30"/>
           <p:cNvSpPr txBox="1"/>
           <p:nvPr/>
         </p:nvSpPr>
         <p:spPr>
           <a:xfrm>
-            <a:off x="365760" y="4553712"/>
-            <a:ext cx="8412480" cy="256032"/>
+            <a:off x="365760" y="4608576"/>
+            <a:ext cx="8412480" cy="219456"/>
           </a:xfrm>
           <a:prstGeom prst="rect">
             <a:avLst/>

--- a/deck/セルフマネジメント課題_事業構想プレゼン.pptx
+++ b/deck/セルフマネジメント課題_事業構想プレゼン.pptx
@@ -2225,8 +2225,8 @@
             <a:r>
               <a:rPr lang="en-US" dirty="0"/>
               <a:t>【2:00 - 3:30】
-要約：引退した熟練者が隣で教えてくれる現場を、スマートグラスでつくる
-設問①、解決策です。目指すのは、引退した熟練者が隣で教えてくれるような現場で、その道具がスマートグラスです。一つ目、記録は自動です。作業中の会話と、作業対象の画像をグラスが常時収録します。熟練者は記録のために何もしなくてよい。構造化を現場に求めない設計で、国の人工知能基本計画の方針とも一致します。二つ目、生成AIが会話と画像から、条件・処置・理由を取り出し、ロットや設備のデータ、図面と紐づけます。三つ目、渡す相手は三つです。若手には、グラス越しに図面や作業手順を現物に重ね、違いがあれば知らせます。管理者には、会話と画像から作業内容を判定し、進捗を自動で報告します。日報を書く手間が減り、報告が早くなり、管理者は現場を見に行かなくても状況が分かります。そして後からは、勘どころを音声番組や動画、研修資料にして当社が作って届けます。指導役が足りない事業所は59.5%、育成の時間がない事業所は47.4%あるからです。端末は市販のものを使い、当社は中身とアプリに集中します。常時収録は、作業時間と作業エリアに限り、本人の同意のもとで行います。</a:t>
+要約：一人称の作業データを撮り続け、報告を自動にし、人とAIの教材にする
+設問①、解決策です。目指すのは、引退した熟練者が隣で教えてくれるような現場です。道具はスマートグラスやヘルメットカメラです。作業者の一人称の動画と会話を、常に撮り続けます。記録のために写真を撮ったり、入力したりする必要はありません。生成AIが映像と会話から、条件・処置・理由を取り出し、ロットや設備のデータ、図面と紐づけます。使い道は三つです。若手には、図面や作業手順を現物に重ねて、違いを知らせます。管理者には、報告書の手順に沿って写真を抜き出し、当日の作業報告書を自動で作ります。現場代理人が立会に行けなくても、遠隔で確認できます。そして後からは、勘どころを教材にして当社が届けます。これを3段階で進めます。まず記録と報告の自動化、次に図面との照合と品質管理、手順ごとの解説動画の自動生成。最後に、蓄積した一人称の動画で作業そのものをAIに学ばせ、ロボットに渡すフィジカルAIへ進みます。ここで大事なのは、記録することと理解することは違う、という点です。映像のどの場面が重要かを見分けられるのは、現場を知る人です。当社は、現場経験者が映像に意味を付け、人のレビューで学習を回し続ける仕組みを作ります。常時収録は、作業時間と作業エリアに限り、本人の同意のもとで行います。</a:t>
             </a:r>
             <a:endParaRPr lang="en-US" dirty="0"/>
           </a:p>
@@ -5452,7 +5452,7 @@
                 <a:ea typeface="Meiryo" pitchFamily="34" charset="-122"/>
                 <a:cs typeface="Meiryo" pitchFamily="34" charset="-120"/>
               </a:rPr>
-              <a:t>スマートグラスで、記録と報告は自動に。図面と手順は現物に重ねて照合し、教材は当社が作る</a:t>
+              <a:t>一人称の動画と会話を撮り続け、報告は自動に。データは人の教材になり、やがてフィジカルAIの先生になる</a:t>
             </a:r>
             <a:endParaRPr lang="en-US" sz="1200" dirty="0"/>
           </a:p>
@@ -5466,8 +5466,8 @@
         </p:nvSpPr>
         <p:spPr>
           <a:xfrm>
-            <a:off x="365760" y="1024128"/>
-            <a:ext cx="2578608" cy="1463040"/>
+            <a:off x="365760" y="1005840"/>
+            <a:ext cx="2578608" cy="1298448"/>
           </a:xfrm>
           <a:prstGeom prst="rect">
             <a:avLst/>
@@ -5491,7 +5491,7 @@
         </p:nvSpPr>
         <p:spPr>
           <a:xfrm>
-            <a:off x="365760" y="1024128"/>
+            <a:off x="365760" y="1005840"/>
             <a:ext cx="2578608" cy="274320"/>
           </a:xfrm>
           <a:prstGeom prst="rect">
@@ -5511,7 +5511,7 @@
         </p:nvSpPr>
         <p:spPr>
           <a:xfrm>
-            <a:off x="475488" y="1024128"/>
+            <a:off x="475488" y="1005840"/>
             <a:ext cx="2359152" cy="274320"/>
           </a:xfrm>
           <a:prstGeom prst="rect">
@@ -5556,7 +5556,7 @@
                 <a:ea typeface="Meiryo" pitchFamily="34" charset="-122"/>
                 <a:cs typeface="Meiryo" pitchFamily="34" charset="-120"/>
               </a:rPr>
-              <a:t>　スマートグラス</a:t>
+              <a:t>　グラス・カメラ</a:t>
             </a:r>
             <a:endParaRPr lang="en-US" sz="1100" dirty="0"/>
           </a:p>
@@ -5570,8 +5570,8 @@
         </p:nvSpPr>
         <p:spPr>
           <a:xfrm>
-            <a:off x="475488" y="1353312"/>
-            <a:ext cx="2359152" cy="786384"/>
+            <a:off x="475488" y="1335024"/>
+            <a:ext cx="2359152" cy="621792"/>
           </a:xfrm>
           <a:prstGeom prst="rect">
             <a:avLst/>
@@ -5598,7 +5598,7 @@
                 <a:ea typeface="Meiryo" pitchFamily="34" charset="-122"/>
                 <a:cs typeface="Meiryo" pitchFamily="34" charset="-120"/>
               </a:rPr>
-              <a:t>作業中の会話と、作業対象の画像を常時収録。熟練者は何もしなくてよい</a:t>
+              <a:t>作業者の一人称動画と会話を常時収録。記録のための撮影や入力は不要</a:t>
             </a:r>
             <a:endParaRPr lang="en-US" sz="950" dirty="0"/>
           </a:p>
@@ -5612,7 +5612,7 @@
         </p:nvSpPr>
         <p:spPr>
           <a:xfrm>
-            <a:off x="475488" y="2157984"/>
+            <a:off x="475488" y="1965960"/>
             <a:ext cx="2359152" cy="310896"/>
           </a:xfrm>
           <a:prstGeom prst="rect">
@@ -5657,7 +5657,7 @@
                 <a:ea typeface="Meiryo" pitchFamily="34" charset="-122"/>
                 <a:cs typeface="Meiryo" pitchFamily="34" charset="-120"/>
               </a:rPr>
-              <a:t>市販のスマートグラス。構造化を現場に求めない (1)</a:t>
+              <a:t>市販の端末。構造化を現場に求めない (1)</a:t>
             </a:r>
             <a:endParaRPr lang="en-US" sz="850" dirty="0"/>
           </a:p>
@@ -5671,7 +5671,7 @@
         </p:nvSpPr>
         <p:spPr>
           <a:xfrm>
-            <a:off x="2944368" y="1591056"/>
+            <a:off x="2944368" y="1490472"/>
             <a:ext cx="338328" cy="329184"/>
           </a:xfrm>
           <a:prstGeom prst="rect">
@@ -5713,8 +5713,8 @@
         </p:nvSpPr>
         <p:spPr>
           <a:xfrm>
-            <a:off x="3282696" y="1024128"/>
-            <a:ext cx="2578608" cy="1463040"/>
+            <a:off x="3282696" y="1005840"/>
+            <a:ext cx="2578608" cy="1298448"/>
           </a:xfrm>
           <a:prstGeom prst="rect">
             <a:avLst/>
@@ -5738,7 +5738,7 @@
         </p:nvSpPr>
         <p:spPr>
           <a:xfrm>
-            <a:off x="3282696" y="1024128"/>
+            <a:off x="3282696" y="1005840"/>
             <a:ext cx="2578608" cy="274320"/>
           </a:xfrm>
           <a:prstGeom prst="rect">
@@ -5758,7 +5758,7 @@
         </p:nvSpPr>
         <p:spPr>
           <a:xfrm>
-            <a:off x="3392424" y="1024128"/>
+            <a:off x="3392424" y="1005840"/>
             <a:ext cx="2359152" cy="274320"/>
           </a:xfrm>
           <a:prstGeom prst="rect">
@@ -5817,8 +5817,8 @@
         </p:nvSpPr>
         <p:spPr>
           <a:xfrm>
-            <a:off x="3392424" y="1353312"/>
-            <a:ext cx="2359152" cy="786384"/>
+            <a:off x="3392424" y="1335024"/>
+            <a:ext cx="2359152" cy="621792"/>
           </a:xfrm>
           <a:prstGeom prst="rect">
             <a:avLst/>
@@ -5845,7 +5845,7 @@
                 <a:ea typeface="Meiryo" pitchFamily="34" charset="-122"/>
                 <a:cs typeface="Meiryo" pitchFamily="34" charset="-120"/>
               </a:rPr>
-              <a:t>会話と画像から「条件・処置・理由」を取り出し、ロット・設備データ・図面と紐づける</a:t>
+              <a:t>映像と会話から「条件・処置・理由」を取り出し、ロット・設備データ・図面と紐づける</a:t>
             </a:r>
             <a:endParaRPr lang="en-US" sz="950" dirty="0"/>
           </a:p>
@@ -5859,7 +5859,7 @@
         </p:nvSpPr>
         <p:spPr>
           <a:xfrm>
-            <a:off x="3392424" y="2157984"/>
+            <a:off x="3392424" y="1965960"/>
             <a:ext cx="2359152" cy="310896"/>
           </a:xfrm>
           <a:prstGeom prst="rect">
@@ -5918,7 +5918,7 @@
         </p:nvSpPr>
         <p:spPr>
           <a:xfrm>
-            <a:off x="5861304" y="1591056"/>
+            <a:off x="5861304" y="1490472"/>
             <a:ext cx="338328" cy="329184"/>
           </a:xfrm>
           <a:prstGeom prst="rect">
@@ -5960,8 +5960,8 @@
         </p:nvSpPr>
         <p:spPr>
           <a:xfrm>
-            <a:off x="6199632" y="1024128"/>
-            <a:ext cx="2578608" cy="1463040"/>
+            <a:off x="6199632" y="1005840"/>
+            <a:ext cx="2578608" cy="1298448"/>
           </a:xfrm>
           <a:prstGeom prst="rect">
             <a:avLst/>
@@ -5985,7 +5985,7 @@
         </p:nvSpPr>
         <p:spPr>
           <a:xfrm>
-            <a:off x="6199632" y="1024128"/>
+            <a:off x="6199632" y="1005840"/>
             <a:ext cx="2578608" cy="274320"/>
           </a:xfrm>
           <a:prstGeom prst="rect">
@@ -6005,7 +6005,7 @@
         </p:nvSpPr>
         <p:spPr>
           <a:xfrm>
-            <a:off x="6309360" y="1024128"/>
+            <a:off x="6309360" y="1005840"/>
             <a:ext cx="2359152" cy="274320"/>
           </a:xfrm>
           <a:prstGeom prst="rect">
@@ -6064,8 +6064,8 @@
         </p:nvSpPr>
         <p:spPr>
           <a:xfrm>
-            <a:off x="6309360" y="1353312"/>
-            <a:ext cx="2359152" cy="786384"/>
+            <a:off x="6309360" y="1335024"/>
+            <a:ext cx="2359152" cy="621792"/>
           </a:xfrm>
           <a:prstGeom prst="rect">
             <a:avLst/>
@@ -6118,7 +6118,7 @@
                 <a:ea typeface="Meiryo" pitchFamily="34" charset="-122"/>
                 <a:cs typeface="Meiryo" pitchFamily="34" charset="-120"/>
               </a:rPr>
-              <a:t>管理者へ：作業を判定し、進捗を自動で報告</a:t>
+              <a:t>管理者へ：写真を抽出し、報告書を自動作成</a:t>
             </a:r>
             <a:endParaRPr lang="en-US" sz="850" dirty="0"/>
           </a:p>
@@ -6155,7 +6155,7 @@
         </p:nvSpPr>
         <p:spPr>
           <a:xfrm>
-            <a:off x="6309360" y="2157984"/>
+            <a:off x="6309360" y="1965960"/>
             <a:ext cx="2359152" cy="310896"/>
           </a:xfrm>
           <a:prstGeom prst="rect">
@@ -6214,7 +6214,7 @@
         </p:nvSpPr>
         <p:spPr>
           <a:xfrm>
-            <a:off x="365760" y="2578608"/>
+            <a:off x="365760" y="2395728"/>
             <a:ext cx="4572000" cy="219456"/>
           </a:xfrm>
           <a:prstGeom prst="rect">
@@ -6242,7 +6242,7 @@
                 <a:ea typeface="Meiryo" pitchFamily="34" charset="-122"/>
                 <a:cs typeface="Meiryo" pitchFamily="34" charset="-120"/>
               </a:rPr>
-              <a:t>渡し方を増やす（製品戦略：収録と教材化を初年度から、追加機能は年1本ずつ）</a:t>
+              <a:t>3段階で進化する（製品戦略：記録と報告から始め、フィジカルAIへ）</a:t>
             </a:r>
             <a:endParaRPr lang="en-US" sz="950" dirty="0"/>
           </a:p>
@@ -6250,19 +6250,21 @@
       </p:sp>
       <p:sp>
         <p:nvSpPr>
-          <p:cNvPr id="23" name="Shape 20"/>
+          <p:cNvPr id="23" name="stage-1"/>
           <p:cNvSpPr/>
           <p:nvPr/>
         </p:nvSpPr>
         <p:spPr>
           <a:xfrm>
-            <a:off x="365760" y="2825496"/>
-            <a:ext cx="4572000" cy="0"/>
-          </a:xfrm>
-          <a:prstGeom prst="line">
-            <a:avLst/>
-          </a:prstGeom>
-          <a:noFill/>
+            <a:off x="365760" y="2651760"/>
+            <a:ext cx="1463040" cy="1847088"/>
+          </a:xfrm>
+          <a:prstGeom prst="rect">
+            <a:avLst/>
+          </a:prstGeom>
+          <a:solidFill>
+            <a:srgbClr val="FFFFFF"/>
+          </a:solidFill>
           <a:ln w="9525">
             <a:solidFill>
               <a:srgbClr val="BFBFBF"/>
@@ -6273,14 +6275,34 @@
       </p:sp>
       <p:sp>
         <p:nvSpPr>
-          <p:cNvPr id="24" name="Text 21"/>
+          <p:cNvPr id="24" name="Shape 21"/>
+          <p:cNvSpPr/>
+          <p:nvPr/>
+        </p:nvSpPr>
+        <p:spPr>
+          <a:xfrm>
+            <a:off x="365760" y="2651760"/>
+            <a:ext cx="1463040" cy="402336"/>
+          </a:xfrm>
+          <a:prstGeom prst="rect">
+            <a:avLst/>
+          </a:prstGeom>
+          <a:solidFill>
+            <a:srgbClr val="1A1A1A"/>
+          </a:solidFill>
+          <a:ln/>
+        </p:spPr>
+      </p:sp>
+      <p:sp>
+        <p:nvSpPr>
+          <p:cNvPr id="25" name="Text 22"/>
           <p:cNvSpPr txBox="1"/>
           <p:nvPr/>
         </p:nvSpPr>
         <p:spPr>
           <a:xfrm>
-            <a:off x="402336" y="2825496"/>
-            <a:ext cx="420624" cy="228600"/>
+            <a:off x="438912" y="2670048"/>
+            <a:ext cx="1316736" cy="365760"/>
           </a:xfrm>
           <a:prstGeom prst="rect">
             <a:avLst/>
@@ -6301,28 +6323,48 @@
             <a:r>
               <a:rPr lang="en-US" sz="800" dirty="0">
                 <a:solidFill>
-                  <a:srgbClr val="4D4D4D"/>
-                </a:solidFill>
-                <a:latin typeface="Meiryo" pitchFamily="34" charset="0"/>
-                <a:ea typeface="Meiryo" pitchFamily="34" charset="-122"/>
-                <a:cs typeface="Meiryo" pitchFamily="34" charset="-120"/>
-              </a:rPr>
-              <a:t>1年目</a:t>
-            </a:r>
-            <a:endParaRPr lang="en-US" sz="800" dirty="0"/>
+                  <a:srgbClr val="FFFFFF"/>
+                </a:solidFill>
+                <a:latin typeface="Meiryo" pitchFamily="34" charset="0"/>
+                <a:ea typeface="Meiryo" pitchFamily="34" charset="-122"/>
+                <a:cs typeface="Meiryo" pitchFamily="34" charset="-120"/>
+              </a:rPr>
+              <a:t>段階1　1〜2年目</a:t>
+            </a:r>
+            <a:endParaRPr lang="en-US" sz="1400" dirty="0"/>
+          </a:p>
+          <a:p>
+            <a:pPr algn="l" indent="0" marL="0">
+              <a:lnSpc>
+                <a:spcPct val="115000"/>
+              </a:lnSpc>
+              <a:buNone/>
+            </a:pPr>
+            <a:r>
+              <a:rPr lang="en-US" sz="950" b="1" dirty="0">
+                <a:solidFill>
+                  <a:srgbClr val="FFFFFF"/>
+                </a:solidFill>
+                <a:latin typeface="Meiryo" pitchFamily="34" charset="0"/>
+                <a:ea typeface="Meiryo" pitchFamily="34" charset="-122"/>
+                <a:cs typeface="Meiryo" pitchFamily="34" charset="-120"/>
+              </a:rPr>
+              <a:t>記録と報告を自動に</a:t>
+            </a:r>
+            <a:endParaRPr lang="en-US" sz="1400" dirty="0"/>
           </a:p>
         </p:txBody>
       </p:sp>
       <p:sp>
         <p:nvSpPr>
-          <p:cNvPr id="25" name="Text 22"/>
+          <p:cNvPr id="26" name="Text 23"/>
           <p:cNvSpPr txBox="1"/>
           <p:nvPr/>
         </p:nvSpPr>
         <p:spPr>
           <a:xfrm>
-            <a:off x="822960" y="2825496"/>
-            <a:ext cx="621792" cy="228600"/>
+            <a:off x="438912" y="3108960"/>
+            <a:ext cx="1316736" cy="1024128"/>
           </a:xfrm>
           <a:prstGeom prst="rect">
             <a:avLst/>
@@ -6331,17 +6373,20 @@
           <a:ln/>
         </p:spPr>
         <p:txBody>
-          <a:bodyPr wrap="square" lIns="0" tIns="0" rIns="0" bIns="0" rtlCol="0" anchor="ctr"/>
+          <a:bodyPr wrap="square" lIns="0" tIns="0" rIns="0" bIns="0" rtlCol="0" anchor="t"/>
           <a:lstStyle/>
           <a:p>
             <a:pPr algn="l" indent="0" marL="0">
               <a:lnSpc>
                 <a:spcPct val="115000"/>
               </a:lnSpc>
-              <a:buNone/>
-            </a:pPr>
-            <a:r>
-              <a:rPr lang="en-US" sz="850" b="1" dirty="0">
+              <a:spcAft>
+                <a:spcPts val="100"/>
+              </a:spcAft>
+              <a:buNone/>
+            </a:pPr>
+            <a:r>
+              <a:rPr lang="en-US" sz="800" dirty="0">
                 <a:solidFill>
                   <a:srgbClr val="1A1A1A"/>
                 </a:solidFill>
@@ -6349,22 +6394,68 @@
                 <a:ea typeface="Meiryo" pitchFamily="34" charset="-122"/>
                 <a:cs typeface="Meiryo" pitchFamily="34" charset="-120"/>
               </a:rPr>
-              <a:t>基盤</a:t>
-            </a:r>
-            <a:endParaRPr lang="en-US" sz="850" dirty="0"/>
+              <a:t>・一人称動画と会話を常時収録。写真撮影は不要</a:t>
+            </a:r>
+            <a:endParaRPr lang="en-US" sz="800" dirty="0"/>
+          </a:p>
+          <a:p>
+            <a:pPr algn="l" indent="0" marL="0">
+              <a:lnSpc>
+                <a:spcPct val="115000"/>
+              </a:lnSpc>
+              <a:spcAft>
+                <a:spcPts val="100"/>
+              </a:spcAft>
+              <a:buNone/>
+            </a:pPr>
+            <a:r>
+              <a:rPr lang="en-US" sz="800" dirty="0">
+                <a:solidFill>
+                  <a:srgbClr val="1A1A1A"/>
+                </a:solidFill>
+                <a:latin typeface="Meiryo" pitchFamily="34" charset="0"/>
+                <a:ea typeface="Meiryo" pitchFamily="34" charset="-122"/>
+                <a:cs typeface="Meiryo" pitchFamily="34" charset="-120"/>
+              </a:rPr>
+              <a:t>・報告書の手順に沿って写真を抽出し、日報を自動作成</a:t>
+            </a:r>
+            <a:endParaRPr lang="en-US" sz="800" dirty="0"/>
+          </a:p>
+          <a:p>
+            <a:pPr algn="l" indent="0" marL="0">
+              <a:lnSpc>
+                <a:spcPct val="115000"/>
+              </a:lnSpc>
+              <a:spcAft>
+                <a:spcPts val="100"/>
+              </a:spcAft>
+              <a:buNone/>
+            </a:pPr>
+            <a:r>
+              <a:rPr lang="en-US" sz="800" dirty="0">
+                <a:solidFill>
+                  <a:srgbClr val="1A1A1A"/>
+                </a:solidFill>
+                <a:latin typeface="Meiryo" pitchFamily="34" charset="0"/>
+                <a:ea typeface="Meiryo" pitchFamily="34" charset="-122"/>
+                <a:cs typeface="Meiryo" pitchFamily="34" charset="-120"/>
+              </a:rPr>
+              <a:t>・立会できなくても遠隔で確認</a:t>
+            </a:r>
+            <a:endParaRPr lang="en-US" sz="800" dirty="0"/>
           </a:p>
         </p:txBody>
       </p:sp>
       <p:sp>
         <p:nvSpPr>
-          <p:cNvPr id="26" name="Text 23"/>
+          <p:cNvPr id="27" name="Text 24"/>
           <p:cNvSpPr txBox="1"/>
           <p:nvPr/>
         </p:nvSpPr>
         <p:spPr>
           <a:xfrm>
-            <a:off x="1444752" y="2825496"/>
-            <a:ext cx="603504" cy="228600"/>
+            <a:off x="438912" y="4151376"/>
+            <a:ext cx="1316736" cy="310896"/>
           </a:xfrm>
           <a:prstGeom prst="rect">
             <a:avLst/>
@@ -6373,7 +6464,7 @@
           <a:ln/>
         </p:spPr>
         <p:txBody>
-          <a:bodyPr wrap="square" lIns="0" tIns="0" rIns="0" bIns="0" rtlCol="0" anchor="ctr"/>
+          <a:bodyPr wrap="square" lIns="0" tIns="0" rIns="0" bIns="0" rtlCol="0" anchor="t"/>
           <a:lstStyle/>
           <a:p>
             <a:pPr algn="l" indent="0" marL="0">
@@ -6383,7 +6474,7 @@
               <a:buNone/>
             </a:pPr>
             <a:r>
-              <a:rPr lang="en-US" sz="800" dirty="0">
+              <a:rPr lang="en-US" sz="800" b="1" dirty="0">
                 <a:solidFill>
                   <a:srgbClr val="4D4D4D"/>
                 </a:solidFill>
@@ -6391,7 +6482,7 @@
                 <a:ea typeface="Meiryo" pitchFamily="34" charset="-122"/>
                 <a:cs typeface="Meiryo" pitchFamily="34" charset="-120"/>
               </a:rPr>
-              <a:t>収録・報告</a:t>
+              <a:t>基盤・KNACK（教材）</a:t>
             </a:r>
             <a:endParaRPr lang="en-US" sz="800" dirty="0"/>
           </a:p>
@@ -6399,103 +6490,21 @@
       </p:sp>
       <p:sp>
         <p:nvSpPr>
-          <p:cNvPr id="27" name="Text 24"/>
-          <p:cNvSpPr txBox="1"/>
-          <p:nvPr/>
-        </p:nvSpPr>
-        <p:spPr>
-          <a:xfrm>
-            <a:off x="2048256" y="2825496"/>
-            <a:ext cx="2468880" cy="228600"/>
-          </a:xfrm>
-          <a:prstGeom prst="rect">
-            <a:avLst/>
-          </a:prstGeom>
-          <a:noFill/>
-          <a:ln/>
-        </p:spPr>
-        <p:txBody>
-          <a:bodyPr wrap="square" lIns="0" tIns="0" rIns="0" bIns="0" rtlCol="0" anchor="ctr"/>
-          <a:lstStyle/>
-          <a:p>
-            <a:pPr algn="l" indent="0" marL="0">
-              <a:lnSpc>
-                <a:spcPct val="115000"/>
-              </a:lnSpc>
-              <a:buNone/>
-            </a:pPr>
-            <a:r>
-              <a:rPr lang="en-US" sz="800" dirty="0">
-                <a:solidFill>
-                  <a:srgbClr val="1A1A1A"/>
-                </a:solidFill>
-                <a:latin typeface="Meiryo" pitchFamily="34" charset="0"/>
-                <a:ea typeface="Meiryo" pitchFamily="34" charset="-122"/>
-                <a:cs typeface="Meiryo" pitchFamily="34" charset="-120"/>
-              </a:rPr>
-              <a:t>常時収録、進捗の自動報告、事例検索</a:t>
-            </a:r>
-            <a:endParaRPr lang="en-US" sz="800" dirty="0"/>
-          </a:p>
-        </p:txBody>
-      </p:sp>
-      <p:sp>
-        <p:nvSpPr>
-          <p:cNvPr id="28" name="Text 25"/>
-          <p:cNvSpPr txBox="1"/>
-          <p:nvPr/>
-        </p:nvSpPr>
-        <p:spPr>
-          <a:xfrm>
-            <a:off x="4517136" y="2825496"/>
-            <a:ext cx="384048" cy="228600"/>
-          </a:xfrm>
-          <a:prstGeom prst="rect">
-            <a:avLst/>
-          </a:prstGeom>
-          <a:noFill/>
-          <a:ln/>
-        </p:spPr>
-        <p:txBody>
-          <a:bodyPr wrap="square" lIns="0" tIns="0" rIns="0" bIns="0" rtlCol="0" anchor="ctr"/>
-          <a:lstStyle/>
-          <a:p>
-            <a:pPr algn="r" indent="0" marL="0">
-              <a:lnSpc>
-                <a:spcPct val="115000"/>
-              </a:lnSpc>
-              <a:buNone/>
-            </a:pPr>
-            <a:r>
-              <a:rPr lang="en-US" sz="800" dirty="0">
-                <a:solidFill>
-                  <a:srgbClr val="1A1A1A"/>
-                </a:solidFill>
-                <a:latin typeface="Meiryo" pitchFamily="34" charset="0"/>
-                <a:ea typeface="Meiryo" pitchFamily="34" charset="-122"/>
-                <a:cs typeface="Meiryo" pitchFamily="34" charset="-120"/>
-              </a:rPr>
-              <a:t>製品</a:t>
-            </a:r>
-            <a:endParaRPr lang="en-US" sz="800" dirty="0"/>
-          </a:p>
-        </p:txBody>
-      </p:sp>
-      <p:sp>
-        <p:nvSpPr>
-          <p:cNvPr id="29" name="Shape 26"/>
+          <p:cNvPr id="28" name="stage-2"/>
           <p:cNvSpPr/>
           <p:nvPr/>
         </p:nvSpPr>
         <p:spPr>
           <a:xfrm>
-            <a:off x="365760" y="3054096"/>
-            <a:ext cx="4572000" cy="0"/>
-          </a:xfrm>
-          <a:prstGeom prst="line">
-            <a:avLst/>
-          </a:prstGeom>
-          <a:noFill/>
+            <a:off x="1920240" y="2651760"/>
+            <a:ext cx="1463040" cy="1847088"/>
+          </a:xfrm>
+          <a:prstGeom prst="rect">
+            <a:avLst/>
+          </a:prstGeom>
+          <a:solidFill>
+            <a:srgbClr val="FFFFFF"/>
+          </a:solidFill>
           <a:ln w="9525">
             <a:solidFill>
               <a:srgbClr val="BFBFBF"/>
@@ -6506,14 +6515,34 @@
       </p:sp>
       <p:sp>
         <p:nvSpPr>
+          <p:cNvPr id="29" name="Shape 26"/>
+          <p:cNvSpPr/>
+          <p:nvPr/>
+        </p:nvSpPr>
+        <p:spPr>
+          <a:xfrm>
+            <a:off x="1920240" y="2651760"/>
+            <a:ext cx="1463040" cy="402336"/>
+          </a:xfrm>
+          <a:prstGeom prst="rect">
+            <a:avLst/>
+          </a:prstGeom>
+          <a:solidFill>
+            <a:srgbClr val="1A1A1A"/>
+          </a:solidFill>
+          <a:ln/>
+        </p:spPr>
+      </p:sp>
+      <p:sp>
+        <p:nvSpPr>
           <p:cNvPr id="30" name="Text 27"/>
           <p:cNvSpPr txBox="1"/>
           <p:nvPr/>
         </p:nvSpPr>
         <p:spPr>
           <a:xfrm>
-            <a:off x="402336" y="3054096"/>
-            <a:ext cx="420624" cy="228600"/>
+            <a:off x="1993392" y="2670048"/>
+            <a:ext cx="1316736" cy="365760"/>
           </a:xfrm>
           <a:prstGeom prst="rect">
             <a:avLst/>
@@ -6534,15 +6563,35 @@
             <a:r>
               <a:rPr lang="en-US" sz="800" dirty="0">
                 <a:solidFill>
-                  <a:srgbClr val="4D4D4D"/>
-                </a:solidFill>
-                <a:latin typeface="Meiryo" pitchFamily="34" charset="0"/>
-                <a:ea typeface="Meiryo" pitchFamily="34" charset="-122"/>
-                <a:cs typeface="Meiryo" pitchFamily="34" charset="-120"/>
-              </a:rPr>
-              <a:t>1年目</a:t>
-            </a:r>
-            <a:endParaRPr lang="en-US" sz="800" dirty="0"/>
+                  <a:srgbClr val="FFFFFF"/>
+                </a:solidFill>
+                <a:latin typeface="Meiryo" pitchFamily="34" charset="0"/>
+                <a:ea typeface="Meiryo" pitchFamily="34" charset="-122"/>
+                <a:cs typeface="Meiryo" pitchFamily="34" charset="-120"/>
+              </a:rPr>
+              <a:t>段階2　3〜4年目</a:t>
+            </a:r>
+            <a:endParaRPr lang="en-US" sz="1400" dirty="0"/>
+          </a:p>
+          <a:p>
+            <a:pPr algn="l" indent="0" marL="0">
+              <a:lnSpc>
+                <a:spcPct val="115000"/>
+              </a:lnSpc>
+              <a:buNone/>
+            </a:pPr>
+            <a:r>
+              <a:rPr lang="en-US" sz="950" b="1" dirty="0">
+                <a:solidFill>
+                  <a:srgbClr val="FFFFFF"/>
+                </a:solidFill>
+                <a:latin typeface="Meiryo" pitchFamily="34" charset="0"/>
+                <a:ea typeface="Meiryo" pitchFamily="34" charset="-122"/>
+                <a:cs typeface="Meiryo" pitchFamily="34" charset="-120"/>
+              </a:rPr>
+              <a:t>照合して品質を守る</a:t>
+            </a:r>
+            <a:endParaRPr lang="en-US" sz="1400" dirty="0"/>
           </a:p>
         </p:txBody>
       </p:sp>
@@ -6554,8 +6603,8 @@
         </p:nvSpPr>
         <p:spPr>
           <a:xfrm>
-            <a:off x="822960" y="3054096"/>
-            <a:ext cx="621792" cy="228600"/>
+            <a:off x="1993392" y="3108960"/>
+            <a:ext cx="1316736" cy="1024128"/>
           </a:xfrm>
           <a:prstGeom prst="rect">
             <a:avLst/>
@@ -6564,17 +6613,20 @@
           <a:ln/>
         </p:spPr>
         <p:txBody>
-          <a:bodyPr wrap="square" lIns="0" tIns="0" rIns="0" bIns="0" rtlCol="0" anchor="ctr"/>
+          <a:bodyPr wrap="square" lIns="0" tIns="0" rIns="0" bIns="0" rtlCol="0" anchor="t"/>
           <a:lstStyle/>
           <a:p>
             <a:pPr algn="l" indent="0" marL="0">
               <a:lnSpc>
                 <a:spcPct val="115000"/>
               </a:lnSpc>
-              <a:buNone/>
-            </a:pPr>
-            <a:r>
-              <a:rPr lang="en-US" sz="850" b="1" dirty="0">
+              <a:spcAft>
+                <a:spcPts val="100"/>
+              </a:spcAft>
+              <a:buNone/>
+            </a:pPr>
+            <a:r>
+              <a:rPr lang="en-US" sz="800" dirty="0">
                 <a:solidFill>
                   <a:srgbClr val="1A1A1A"/>
                 </a:solidFill>
@@ -6582,9 +6634,55 @@
                 <a:ea typeface="Meiryo" pitchFamily="34" charset="-122"/>
                 <a:cs typeface="Meiryo" pitchFamily="34" charset="-120"/>
               </a:rPr>
-              <a:t>KNACK</a:t>
-            </a:r>
-            <a:endParaRPr lang="en-US" sz="850" dirty="0"/>
+              <a:t>・図面・手順と現物を照合し差異を検出</a:t>
+            </a:r>
+            <a:endParaRPr lang="en-US" sz="800" dirty="0"/>
+          </a:p>
+          <a:p>
+            <a:pPr algn="l" indent="0" marL="0">
+              <a:lnSpc>
+                <a:spcPct val="115000"/>
+              </a:lnSpc>
+              <a:spcAft>
+                <a:spcPts val="100"/>
+              </a:spcAft>
+              <a:buNone/>
+            </a:pPr>
+            <a:r>
+              <a:rPr lang="en-US" sz="800" dirty="0">
+                <a:solidFill>
+                  <a:srgbClr val="1A1A1A"/>
+                </a:solidFill>
+                <a:latin typeface="Meiryo" pitchFamily="34" charset="0"/>
+                <a:ea typeface="Meiryo" pitchFamily="34" charset="-122"/>
+                <a:cs typeface="Meiryo" pitchFamily="34" charset="-120"/>
+              </a:rPr>
+              <a:t>・手順ミスを履歴で後追い確認</a:t>
+            </a:r>
+            <a:endParaRPr lang="en-US" sz="800" dirty="0"/>
+          </a:p>
+          <a:p>
+            <a:pPr algn="l" indent="0" marL="0">
+              <a:lnSpc>
+                <a:spcPct val="115000"/>
+              </a:lnSpc>
+              <a:spcAft>
+                <a:spcPts val="100"/>
+              </a:spcAft>
+              <a:buNone/>
+            </a:pPr>
+            <a:r>
+              <a:rPr lang="en-US" sz="800" dirty="0">
+                <a:solidFill>
+                  <a:srgbClr val="1A1A1A"/>
+                </a:solidFill>
+                <a:latin typeface="Meiryo" pitchFamily="34" charset="0"/>
+                <a:ea typeface="Meiryo" pitchFamily="34" charset="-122"/>
+                <a:cs typeface="Meiryo" pitchFamily="34" charset="-120"/>
+              </a:rPr>
+              <a:t>・手順ごとの解説動画をAIが生成</a:t>
+            </a:r>
+            <a:endParaRPr lang="en-US" sz="800" dirty="0"/>
           </a:p>
         </p:txBody>
       </p:sp>
@@ -6596,8 +6694,8 @@
         </p:nvSpPr>
         <p:spPr>
           <a:xfrm>
-            <a:off x="1444752" y="3054096"/>
-            <a:ext cx="603504" cy="228600"/>
+            <a:off x="1993392" y="4151376"/>
+            <a:ext cx="1316736" cy="310896"/>
           </a:xfrm>
           <a:prstGeom prst="rect">
             <a:avLst/>
@@ -6606,7 +6704,7 @@
           <a:ln/>
         </p:spPr>
         <p:txBody>
-          <a:bodyPr wrap="square" lIns="0" tIns="0" rIns="0" bIns="0" rtlCol="0" anchor="ctr"/>
+          <a:bodyPr wrap="square" lIns="0" tIns="0" rIns="0" bIns="0" rtlCol="0" anchor="t"/>
           <a:lstStyle/>
           <a:p>
             <a:pPr algn="l" indent="0" marL="0">
@@ -6616,7 +6714,7 @@
               <a:buNone/>
             </a:pPr>
             <a:r>
-              <a:rPr lang="en-US" sz="800" dirty="0">
+              <a:rPr lang="en-US" sz="800" b="1" dirty="0">
                 <a:solidFill>
                   <a:srgbClr val="4D4D4D"/>
                 </a:solidFill>
@@ -6624,7 +6722,7 @@
                 <a:ea typeface="Meiryo" pitchFamily="34" charset="-122"/>
                 <a:cs typeface="Meiryo" pitchFamily="34" charset="-120"/>
               </a:rPr>
-              <a:t>教材</a:t>
+              <a:t>SAFE・GLASS・TWIN・DRAW</a:t>
             </a:r>
             <a:endParaRPr lang="en-US" sz="800" dirty="0"/>
           </a:p>
@@ -6632,103 +6730,21 @@
       </p:sp>
       <p:sp>
         <p:nvSpPr>
-          <p:cNvPr id="33" name="Text 30"/>
-          <p:cNvSpPr txBox="1"/>
-          <p:nvPr/>
-        </p:nvSpPr>
-        <p:spPr>
-          <a:xfrm>
-            <a:off x="2048256" y="3054096"/>
-            <a:ext cx="2468880" cy="228600"/>
-          </a:xfrm>
-          <a:prstGeom prst="rect">
-            <a:avLst/>
-          </a:prstGeom>
-          <a:noFill/>
-          <a:ln/>
-        </p:spPr>
-        <p:txBody>
-          <a:bodyPr wrap="square" lIns="0" tIns="0" rIns="0" bIns="0" rtlCol="0" anchor="ctr"/>
-          <a:lstStyle/>
-          <a:p>
-            <a:pPr algn="l" indent="0" marL="0">
-              <a:lnSpc>
-                <a:spcPct val="115000"/>
-              </a:lnSpc>
-              <a:buNone/>
-            </a:pPr>
-            <a:r>
-              <a:rPr lang="en-US" sz="800" dirty="0">
-                <a:solidFill>
-                  <a:srgbClr val="1A1A1A"/>
-                </a:solidFill>
-                <a:latin typeface="Meiryo" pitchFamily="34" charset="0"/>
-                <a:ea typeface="Meiryo" pitchFamily="34" charset="-122"/>
-                <a:cs typeface="Meiryo" pitchFamily="34" charset="-120"/>
-              </a:rPr>
-              <a:t>勘どころの音声番組・動画・研修資料を制作</a:t>
-            </a:r>
-            <a:endParaRPr lang="en-US" sz="800" dirty="0"/>
-          </a:p>
-        </p:txBody>
-      </p:sp>
-      <p:sp>
-        <p:nvSpPr>
-          <p:cNvPr id="34" name="Text 31"/>
-          <p:cNvSpPr txBox="1"/>
-          <p:nvPr/>
-        </p:nvSpPr>
-        <p:spPr>
-          <a:xfrm>
-            <a:off x="4517136" y="3054096"/>
-            <a:ext cx="384048" cy="228600"/>
-          </a:xfrm>
-          <a:prstGeom prst="rect">
-            <a:avLst/>
-          </a:prstGeom>
-          <a:noFill/>
-          <a:ln/>
-        </p:spPr>
-        <p:txBody>
-          <a:bodyPr wrap="square" lIns="0" tIns="0" rIns="0" bIns="0" rtlCol="0" anchor="ctr"/>
-          <a:lstStyle/>
-          <a:p>
-            <a:pPr algn="r" indent="0" marL="0">
-              <a:lnSpc>
-                <a:spcPct val="115000"/>
-              </a:lnSpc>
-              <a:buNone/>
-            </a:pPr>
-            <a:r>
-              <a:rPr lang="en-US" sz="800" dirty="0">
-                <a:solidFill>
-                  <a:srgbClr val="1A1A1A"/>
-                </a:solidFill>
-                <a:latin typeface="Meiryo" pitchFamily="34" charset="0"/>
-                <a:ea typeface="Meiryo" pitchFamily="34" charset="-122"/>
-                <a:cs typeface="Meiryo" pitchFamily="34" charset="-120"/>
-              </a:rPr>
-              <a:t>製品</a:t>
-            </a:r>
-            <a:endParaRPr lang="en-US" sz="800" dirty="0"/>
-          </a:p>
-        </p:txBody>
-      </p:sp>
-      <p:sp>
-        <p:nvSpPr>
-          <p:cNvPr id="35" name="Shape 32"/>
+          <p:cNvPr id="33" name="stage-3"/>
           <p:cNvSpPr/>
           <p:nvPr/>
         </p:nvSpPr>
         <p:spPr>
           <a:xfrm>
-            <a:off x="365760" y="3282696"/>
-            <a:ext cx="4572000" cy="0"/>
-          </a:xfrm>
-          <a:prstGeom prst="line">
-            <a:avLst/>
-          </a:prstGeom>
-          <a:noFill/>
+            <a:off x="3474720" y="2651760"/>
+            <a:ext cx="1463040" cy="1847088"/>
+          </a:xfrm>
+          <a:prstGeom prst="rect">
+            <a:avLst/>
+          </a:prstGeom>
+          <a:solidFill>
+            <a:srgbClr val="F2F2F2"/>
+          </a:solidFill>
           <a:ln w="9525">
             <a:solidFill>
               <a:srgbClr val="BFBFBF"/>
@@ -6739,14 +6755,34 @@
       </p:sp>
       <p:sp>
         <p:nvSpPr>
-          <p:cNvPr id="36" name="Text 33"/>
+          <p:cNvPr id="34" name="Shape 31"/>
+          <p:cNvSpPr/>
+          <p:nvPr/>
+        </p:nvSpPr>
+        <p:spPr>
+          <a:xfrm>
+            <a:off x="3474720" y="2651760"/>
+            <a:ext cx="1463040" cy="402336"/>
+          </a:xfrm>
+          <a:prstGeom prst="rect">
+            <a:avLst/>
+          </a:prstGeom>
+          <a:solidFill>
+            <a:srgbClr val="1A1A1A"/>
+          </a:solidFill>
+          <a:ln/>
+        </p:spPr>
+      </p:sp>
+      <p:sp>
+        <p:nvSpPr>
+          <p:cNvPr id="35" name="Text 32"/>
           <p:cNvSpPr txBox="1"/>
           <p:nvPr/>
         </p:nvSpPr>
         <p:spPr>
           <a:xfrm>
-            <a:off x="402336" y="3282696"/>
-            <a:ext cx="420624" cy="228600"/>
+            <a:off x="3547872" y="2670048"/>
+            <a:ext cx="1316736" cy="365760"/>
           </a:xfrm>
           <a:prstGeom prst="rect">
             <a:avLst/>
@@ -6767,13 +6803,124 @@
             <a:r>
               <a:rPr lang="en-US" sz="800" dirty="0">
                 <a:solidFill>
-                  <a:srgbClr val="4D4D4D"/>
-                </a:solidFill>
-                <a:latin typeface="Meiryo" pitchFamily="34" charset="0"/>
-                <a:ea typeface="Meiryo" pitchFamily="34" charset="-122"/>
-                <a:cs typeface="Meiryo" pitchFamily="34" charset="-120"/>
-              </a:rPr>
-              <a:t>2年目</a:t>
+                  <a:srgbClr val="FFFFFF"/>
+                </a:solidFill>
+                <a:latin typeface="Meiryo" pitchFamily="34" charset="0"/>
+                <a:ea typeface="Meiryo" pitchFamily="34" charset="-122"/>
+                <a:cs typeface="Meiryo" pitchFamily="34" charset="-120"/>
+              </a:rPr>
+              <a:t>段階3　5年目〜</a:t>
+            </a:r>
+            <a:endParaRPr lang="en-US" sz="1400" dirty="0"/>
+          </a:p>
+          <a:p>
+            <a:pPr algn="l" indent="0" marL="0">
+              <a:lnSpc>
+                <a:spcPct val="115000"/>
+              </a:lnSpc>
+              <a:buNone/>
+            </a:pPr>
+            <a:r>
+              <a:rPr lang="en-US" sz="950" b="1" dirty="0">
+                <a:solidFill>
+                  <a:srgbClr val="FFFFFF"/>
+                </a:solidFill>
+                <a:latin typeface="Meiryo" pitchFamily="34" charset="0"/>
+                <a:ea typeface="Meiryo" pitchFamily="34" charset="-122"/>
+                <a:cs typeface="Meiryo" pitchFamily="34" charset="-120"/>
+              </a:rPr>
+              <a:t>作業をAIが学ぶ</a:t>
+            </a:r>
+            <a:endParaRPr lang="en-US" sz="1400" dirty="0"/>
+          </a:p>
+        </p:txBody>
+      </p:sp>
+      <p:sp>
+        <p:nvSpPr>
+          <p:cNvPr id="36" name="Text 33"/>
+          <p:cNvSpPr txBox="1"/>
+          <p:nvPr/>
+        </p:nvSpPr>
+        <p:spPr>
+          <a:xfrm>
+            <a:off x="3547872" y="3108960"/>
+            <a:ext cx="1316736" cy="1024128"/>
+          </a:xfrm>
+          <a:prstGeom prst="rect">
+            <a:avLst/>
+          </a:prstGeom>
+          <a:noFill/>
+          <a:ln/>
+        </p:spPr>
+        <p:txBody>
+          <a:bodyPr wrap="square" lIns="0" tIns="0" rIns="0" bIns="0" rtlCol="0" anchor="t"/>
+          <a:lstStyle/>
+          <a:p>
+            <a:pPr algn="l" indent="0" marL="0">
+              <a:lnSpc>
+                <a:spcPct val="115000"/>
+              </a:lnSpc>
+              <a:spcAft>
+                <a:spcPts val="100"/>
+              </a:spcAft>
+              <a:buNone/>
+            </a:pPr>
+            <a:r>
+              <a:rPr lang="en-US" sz="800" dirty="0">
+                <a:solidFill>
+                  <a:srgbClr val="1A1A1A"/>
+                </a:solidFill>
+                <a:latin typeface="Meiryo" pitchFamily="34" charset="0"/>
+                <a:ea typeface="Meiryo" pitchFamily="34" charset="-122"/>
+                <a:cs typeface="Meiryo" pitchFamily="34" charset="-120"/>
+              </a:rPr>
+              <a:t>・蓄積した一人称動画で作業をAIが学習</a:t>
+            </a:r>
+            <a:endParaRPr lang="en-US" sz="800" dirty="0"/>
+          </a:p>
+          <a:p>
+            <a:pPr algn="l" indent="0" marL="0">
+              <a:lnSpc>
+                <a:spcPct val="115000"/>
+              </a:lnSpc>
+              <a:spcAft>
+                <a:spcPts val="100"/>
+              </a:spcAft>
+              <a:buNone/>
+            </a:pPr>
+            <a:r>
+              <a:rPr lang="en-US" sz="800" dirty="0">
+                <a:solidFill>
+                  <a:srgbClr val="1A1A1A"/>
+                </a:solidFill>
+                <a:latin typeface="Meiryo" pitchFamily="34" charset="0"/>
+                <a:ea typeface="Meiryo" pitchFamily="34" charset="-122"/>
+                <a:cs typeface="Meiryo" pitchFamily="34" charset="-120"/>
+              </a:rPr>
+              <a:t>・学んだ手順をロボット・検査AIへ</a:t>
+            </a:r>
+            <a:endParaRPr lang="en-US" sz="800" dirty="0"/>
+          </a:p>
+          <a:p>
+            <a:pPr algn="l" indent="0" marL="0">
+              <a:lnSpc>
+                <a:spcPct val="115000"/>
+              </a:lnSpc>
+              <a:spcAft>
+                <a:spcPts val="100"/>
+              </a:spcAft>
+              <a:buNone/>
+            </a:pPr>
+            <a:r>
+              <a:rPr lang="en-US" sz="800" dirty="0">
+                <a:solidFill>
+                  <a:srgbClr val="1A1A1A"/>
+                </a:solidFill>
+                <a:latin typeface="Meiryo" pitchFamily="34" charset="0"/>
+                <a:ea typeface="Meiryo" pitchFamily="34" charset="-122"/>
+                <a:cs typeface="Meiryo" pitchFamily="34" charset="-120"/>
+              </a:rPr>
+              <a:t>・力加減は触覚シミュレーターで訓練</a:t>
             </a:r>
             <a:endParaRPr lang="en-US" sz="800" dirty="0"/>
           </a:p>
@@ -6787,8 +6934,8 @@
         </p:nvSpPr>
         <p:spPr>
           <a:xfrm>
-            <a:off x="822960" y="3282696"/>
-            <a:ext cx="621792" cy="228600"/>
+            <a:off x="3547872" y="4151376"/>
+            <a:ext cx="1316736" cy="310896"/>
           </a:xfrm>
           <a:prstGeom prst="rect">
             <a:avLst/>
@@ -6797,7 +6944,7 @@
           <a:ln/>
         </p:spPr>
         <p:txBody>
-          <a:bodyPr wrap="square" lIns="0" tIns="0" rIns="0" bIns="0" rtlCol="0" anchor="ctr"/>
+          <a:bodyPr wrap="square" lIns="0" tIns="0" rIns="0" bIns="0" rtlCol="0" anchor="t"/>
           <a:lstStyle/>
           <a:p>
             <a:pPr algn="l" indent="0" marL="0">
@@ -6807,30 +6954,50 @@
               <a:buNone/>
             </a:pPr>
             <a:r>
-              <a:rPr lang="en-US" sz="850" b="1" dirty="0">
-                <a:solidFill>
-                  <a:srgbClr val="1A1A1A"/>
-                </a:solidFill>
-                <a:latin typeface="Meiryo" pitchFamily="34" charset="0"/>
-                <a:ea typeface="Meiryo" pitchFamily="34" charset="-122"/>
-                <a:cs typeface="Meiryo" pitchFamily="34" charset="-120"/>
-              </a:rPr>
-              <a:t>SAFE</a:t>
-            </a:r>
-            <a:endParaRPr lang="en-US" sz="850" dirty="0"/>
+              <a:rPr lang="en-US" sz="800" b="1" dirty="0">
+                <a:solidFill>
+                  <a:srgbClr val="4D4D4D"/>
+                </a:solidFill>
+                <a:latin typeface="Meiryo" pitchFamily="34" charset="0"/>
+                <a:ea typeface="Meiryo" pitchFamily="34" charset="-122"/>
+                <a:cs typeface="Meiryo" pitchFamily="34" charset="-120"/>
+              </a:rPr>
+              <a:t>HAPTIC・FLOW（R&amp;D）</a:t>
+            </a:r>
+            <a:endParaRPr lang="en-US" sz="800" dirty="0"/>
           </a:p>
         </p:txBody>
       </p:sp>
       <p:sp>
         <p:nvSpPr>
-          <p:cNvPr id="38" name="Text 35"/>
+          <p:cNvPr id="38" name="rnd"/>
+          <p:cNvSpPr/>
+          <p:nvPr/>
+        </p:nvSpPr>
+        <p:spPr>
+          <a:xfrm>
+            <a:off x="5120640" y="2395728"/>
+            <a:ext cx="3657600" cy="1371600"/>
+          </a:xfrm>
+          <a:prstGeom prst="rect">
+            <a:avLst/>
+          </a:prstGeom>
+          <a:solidFill>
+            <a:srgbClr val="1A1A1A"/>
+          </a:solidFill>
+          <a:ln/>
+        </p:spPr>
+      </p:sp>
+      <p:sp>
+        <p:nvSpPr>
+          <p:cNvPr id="39" name="Text 36"/>
           <p:cNvSpPr txBox="1"/>
           <p:nvPr/>
         </p:nvSpPr>
         <p:spPr>
           <a:xfrm>
-            <a:off x="1444752" y="3282696"/>
-            <a:ext cx="603504" cy="228600"/>
+            <a:off x="5230368" y="2441448"/>
+            <a:ext cx="3438144" cy="237744"/>
           </a:xfrm>
           <a:prstGeom prst="rect">
             <a:avLst/>
@@ -6839,7 +7006,7 @@
           <a:ln/>
         </p:spPr>
         <p:txBody>
-          <a:bodyPr wrap="square" lIns="0" tIns="0" rIns="0" bIns="0" rtlCol="0" anchor="ctr"/>
+          <a:bodyPr wrap="square" lIns="0" tIns="0" rIns="0" bIns="0" rtlCol="0" anchor="t"/>
           <a:lstStyle/>
           <a:p>
             <a:pPr algn="l" indent="0" marL="0">
@@ -6849,30 +7016,30 @@
               <a:buNone/>
             </a:pPr>
             <a:r>
-              <a:rPr lang="en-US" sz="800" dirty="0">
-                <a:solidFill>
-                  <a:srgbClr val="4D4D4D"/>
-                </a:solidFill>
-                <a:latin typeface="Meiryo" pitchFamily="34" charset="0"/>
-                <a:ea typeface="Meiryo" pitchFamily="34" charset="-122"/>
-                <a:cs typeface="Meiryo" pitchFamily="34" charset="-120"/>
-              </a:rPr>
-              <a:t>警告</a:t>
-            </a:r>
-            <a:endParaRPr lang="en-US" sz="800" dirty="0"/>
+              <a:rPr lang="en-US" sz="1050" b="1" dirty="0">
+                <a:solidFill>
+                  <a:srgbClr val="FFFFFF"/>
+                </a:solidFill>
+                <a:latin typeface="Meiryo" pitchFamily="34" charset="0"/>
+                <a:ea typeface="Meiryo" pitchFamily="34" charset="-122"/>
+                <a:cs typeface="Meiryo" pitchFamily="34" charset="-120"/>
+              </a:rPr>
+              <a:t>R&amp;D戦略：記録ではなく「理解」をつくる</a:t>
+            </a:r>
+            <a:endParaRPr lang="en-US" sz="1050" dirty="0"/>
           </a:p>
         </p:txBody>
       </p:sp>
       <p:sp>
         <p:nvSpPr>
-          <p:cNvPr id="39" name="Text 36"/>
+          <p:cNvPr id="40" name="Text 37"/>
           <p:cNvSpPr txBox="1"/>
           <p:nvPr/>
         </p:nvSpPr>
         <p:spPr>
           <a:xfrm>
-            <a:off x="2048256" y="3282696"/>
-            <a:ext cx="2468880" cy="228600"/>
+            <a:off x="5230368" y="2688336"/>
+            <a:ext cx="3438144" cy="1042416"/>
           </a:xfrm>
           <a:prstGeom prst="rect">
             <a:avLst/>
@@ -6881,781 +7048,172 @@
           <a:ln/>
         </p:spPr>
         <p:txBody>
-          <a:bodyPr wrap="square" lIns="0" tIns="0" rIns="0" bIns="0" rtlCol="0" anchor="ctr"/>
+          <a:bodyPr wrap="square" lIns="0" tIns="0" rIns="0" bIns="0" rtlCol="0" anchor="t"/>
           <a:lstStyle/>
           <a:p>
             <a:pPr algn="l" indent="0" marL="0">
               <a:lnSpc>
                 <a:spcPct val="115000"/>
               </a:lnSpc>
-              <a:buNone/>
-            </a:pPr>
-            <a:r>
-              <a:rPr lang="en-US" sz="800" dirty="0">
-                <a:solidFill>
-                  <a:srgbClr val="1A1A1A"/>
-                </a:solidFill>
-                <a:latin typeface="Meiryo" pitchFamily="34" charset="0"/>
-                <a:ea typeface="Meiryo" pitchFamily="34" charset="-122"/>
-                <a:cs typeface="Meiryo" pitchFamily="34" charset="-120"/>
-              </a:rPr>
-              <a:t>危険箇所・過去のヒヤリ地点をグラスに表示</a:t>
-            </a:r>
-            <a:endParaRPr lang="en-US" sz="800" dirty="0"/>
+              <a:spcAft>
+                <a:spcPts val="200"/>
+              </a:spcAft>
+              <a:buNone/>
+            </a:pPr>
+            <a:r>
+              <a:rPr lang="en-US" sz="850" dirty="0">
+                <a:solidFill>
+                  <a:srgbClr val="FFFFFF"/>
+                </a:solidFill>
+                <a:latin typeface="Meiryo" pitchFamily="34" charset="0"/>
+                <a:ea typeface="Meiryo" pitchFamily="34" charset="-122"/>
+                <a:cs typeface="Meiryo" pitchFamily="34" charset="-120"/>
+              </a:rPr>
+              <a:t>記録と理解は違う。どの場面が重要かを見分けられるのは、現場を知る人</a:t>
+            </a:r>
+            <a:endParaRPr lang="en-US" sz="850" dirty="0"/>
+          </a:p>
+          <a:p>
+            <a:pPr algn="l" indent="0" marL="0">
+              <a:lnSpc>
+                <a:spcPct val="115000"/>
+              </a:lnSpc>
+              <a:spcAft>
+                <a:spcPts val="200"/>
+              </a:spcAft>
+              <a:buNone/>
+            </a:pPr>
+            <a:r>
+              <a:rPr lang="en-US" sz="850" b="1" dirty="0">
+                <a:solidFill>
+                  <a:srgbClr val="FFFFFF"/>
+                </a:solidFill>
+                <a:latin typeface="Meiryo" pitchFamily="34" charset="0"/>
+                <a:ea typeface="Meiryo" pitchFamily="34" charset="-122"/>
+                <a:cs typeface="Meiryo" pitchFamily="34" charset="-120"/>
+              </a:rPr>
+              <a:t>作らない：</a:t>
+            </a:r>
+            <a:pPr algn="l" indent="0" marL="0">
+              <a:lnSpc>
+                <a:spcPct val="115000"/>
+              </a:lnSpc>
+              <a:spcAft>
+                <a:spcPts val="200"/>
+              </a:spcAft>
+              <a:buNone/>
+            </a:pPr>
+            <a:r>
+              <a:rPr lang="en-US" sz="850" dirty="0">
+                <a:solidFill>
+                  <a:srgbClr val="FFFFFF"/>
+                </a:solidFill>
+                <a:latin typeface="Meiryo" pitchFamily="34" charset="0"/>
+                <a:ea typeface="Meiryo" pitchFamily="34" charset="-122"/>
+                <a:cs typeface="Meiryo" pitchFamily="34" charset="-120"/>
+              </a:rPr>
+              <a:t>映像・音声の記録とAI構造化は汎用技術</a:t>
+            </a:r>
+            <a:endParaRPr lang="en-US" sz="850" dirty="0"/>
+          </a:p>
+          <a:p>
+            <a:pPr algn="l" indent="0" marL="0">
+              <a:lnSpc>
+                <a:spcPct val="115000"/>
+              </a:lnSpc>
+              <a:spcAft>
+                <a:spcPts val="200"/>
+              </a:spcAft>
+              <a:buNone/>
+            </a:pPr>
+            <a:r>
+              <a:rPr lang="en-US" sz="850" b="1" dirty="0">
+                <a:solidFill>
+                  <a:srgbClr val="FFFFFF"/>
+                </a:solidFill>
+                <a:latin typeface="Meiryo" pitchFamily="34" charset="0"/>
+                <a:ea typeface="Meiryo" pitchFamily="34" charset="-122"/>
+                <a:cs typeface="Meiryo" pitchFamily="34" charset="-120"/>
+              </a:rPr>
+              <a:t>作る：</a:t>
+            </a:r>
+            <a:pPr algn="l" indent="0" marL="0">
+              <a:lnSpc>
+                <a:spcPct val="115000"/>
+              </a:lnSpc>
+              <a:spcAft>
+                <a:spcPts val="200"/>
+              </a:spcAft>
+              <a:buNone/>
+            </a:pPr>
+            <a:r>
+              <a:rPr lang="en-US" sz="850" dirty="0">
+                <a:solidFill>
+                  <a:srgbClr val="FFFFFF"/>
+                </a:solidFill>
+                <a:latin typeface="Meiryo" pitchFamily="34" charset="0"/>
+                <a:ea typeface="Meiryo" pitchFamily="34" charset="-122"/>
+                <a:cs typeface="Meiryo" pitchFamily="34" charset="-120"/>
+              </a:rPr>
+              <a:t>現場経験者が映像に意味（手順・重要場面）を付け、人のレビューで学習を回し続ける仕組み</a:t>
+            </a:r>
+            <a:endParaRPr lang="en-US" sz="850" dirty="0"/>
+          </a:p>
+          <a:p>
+            <a:pPr algn="l" indent="0" marL="0">
+              <a:lnSpc>
+                <a:spcPct val="115000"/>
+              </a:lnSpc>
+              <a:spcAft>
+                <a:spcPts val="200"/>
+              </a:spcAft>
+              <a:buNone/>
+            </a:pPr>
+            <a:r>
+              <a:rPr lang="en-US" sz="850" b="1" dirty="0">
+                <a:solidFill>
+                  <a:srgbClr val="FFFFFF"/>
+                </a:solidFill>
+                <a:latin typeface="Meiryo" pitchFamily="34" charset="0"/>
+                <a:ea typeface="Meiryo" pitchFamily="34" charset="-122"/>
+                <a:cs typeface="Meiryo" pitchFamily="34" charset="-120"/>
+              </a:rPr>
+              <a:t>組む：</a:t>
+            </a:r>
+            <a:pPr algn="l" indent="0" marL="0">
+              <a:lnSpc>
+                <a:spcPct val="115000"/>
+              </a:lnSpc>
+              <a:spcAft>
+                <a:spcPts val="200"/>
+              </a:spcAft>
+              <a:buNone/>
+            </a:pPr>
+            <a:r>
+              <a:rPr lang="en-US" sz="850" dirty="0">
+                <a:solidFill>
+                  <a:srgbClr val="FFFFFF"/>
+                </a:solidFill>
+                <a:latin typeface="Meiryo" pitchFamily="34" charset="0"/>
+                <a:ea typeface="Meiryo" pitchFamily="34" charset="-122"/>
+                <a:cs typeface="Meiryo" pitchFamily="34" charset="-120"/>
+              </a:rPr>
+              <a:t>グラス・ヘルメットカメラ・CAD・3Dはメーカー・大学と</a:t>
+            </a:r>
+            <a:endParaRPr lang="en-US" sz="850" dirty="0"/>
           </a:p>
         </p:txBody>
       </p:sp>
       <p:sp>
         <p:nvSpPr>
-          <p:cNvPr id="40" name="Text 37"/>
-          <p:cNvSpPr txBox="1"/>
-          <p:nvPr/>
-        </p:nvSpPr>
-        <p:spPr>
-          <a:xfrm>
-            <a:off x="4517136" y="3282696"/>
-            <a:ext cx="384048" cy="228600"/>
-          </a:xfrm>
-          <a:prstGeom prst="rect">
-            <a:avLst/>
-          </a:prstGeom>
-          <a:noFill/>
-          <a:ln/>
-        </p:spPr>
-        <p:txBody>
-          <a:bodyPr wrap="square" lIns="0" tIns="0" rIns="0" bIns="0" rtlCol="0" anchor="ctr"/>
-          <a:lstStyle/>
-          <a:p>
-            <a:pPr algn="r" indent="0" marL="0">
-              <a:lnSpc>
-                <a:spcPct val="115000"/>
-              </a:lnSpc>
-              <a:buNone/>
-            </a:pPr>
-            <a:r>
-              <a:rPr lang="en-US" sz="800" dirty="0">
-                <a:solidFill>
-                  <a:srgbClr val="1A1A1A"/>
-                </a:solidFill>
-                <a:latin typeface="Meiryo" pitchFamily="34" charset="0"/>
-                <a:ea typeface="Meiryo" pitchFamily="34" charset="-122"/>
-                <a:cs typeface="Meiryo" pitchFamily="34" charset="-120"/>
-              </a:rPr>
-              <a:t>製品</a:t>
-            </a:r>
-            <a:endParaRPr lang="en-US" sz="800" dirty="0"/>
-          </a:p>
-        </p:txBody>
-      </p:sp>
-      <p:sp>
-        <p:nvSpPr>
-          <p:cNvPr id="41" name="Shape 38"/>
+          <p:cNvPr id="41" name="onboarding"/>
           <p:cNvSpPr/>
           <p:nvPr/>
         </p:nvSpPr>
         <p:spPr>
           <a:xfrm>
-            <a:off x="365760" y="3511296"/>
-            <a:ext cx="4572000" cy="0"/>
-          </a:xfrm>
-          <a:prstGeom prst="line">
-            <a:avLst/>
-          </a:prstGeom>
-          <a:noFill/>
-          <a:ln w="9525">
-            <a:solidFill>
-              <a:srgbClr val="BFBFBF"/>
-            </a:solidFill>
-            <a:prstDash val="solid"/>
-          </a:ln>
-        </p:spPr>
-      </p:sp>
-      <p:sp>
-        <p:nvSpPr>
-          <p:cNvPr id="42" name="Text 39"/>
-          <p:cNvSpPr txBox="1"/>
-          <p:nvPr/>
-        </p:nvSpPr>
-        <p:spPr>
-          <a:xfrm>
-            <a:off x="402336" y="3511296"/>
-            <a:ext cx="420624" cy="228600"/>
-          </a:xfrm>
-          <a:prstGeom prst="rect">
-            <a:avLst/>
-          </a:prstGeom>
-          <a:noFill/>
-          <a:ln/>
-        </p:spPr>
-        <p:txBody>
-          <a:bodyPr wrap="square" lIns="0" tIns="0" rIns="0" bIns="0" rtlCol="0" anchor="ctr"/>
-          <a:lstStyle/>
-          <a:p>
-            <a:pPr algn="l" indent="0" marL="0">
-              <a:lnSpc>
-                <a:spcPct val="115000"/>
-              </a:lnSpc>
-              <a:buNone/>
-            </a:pPr>
-            <a:r>
-              <a:rPr lang="en-US" sz="800" dirty="0">
-                <a:solidFill>
-                  <a:srgbClr val="4D4D4D"/>
-                </a:solidFill>
-                <a:latin typeface="Meiryo" pitchFamily="34" charset="0"/>
-                <a:ea typeface="Meiryo" pitchFamily="34" charset="-122"/>
-                <a:cs typeface="Meiryo" pitchFamily="34" charset="-120"/>
-              </a:rPr>
-              <a:t>3年目</a:t>
-            </a:r>
-            <a:endParaRPr lang="en-US" sz="800" dirty="0"/>
-          </a:p>
-        </p:txBody>
-      </p:sp>
-      <p:sp>
-        <p:nvSpPr>
-          <p:cNvPr id="43" name="Text 40"/>
-          <p:cNvSpPr txBox="1"/>
-          <p:nvPr/>
-        </p:nvSpPr>
-        <p:spPr>
-          <a:xfrm>
-            <a:off x="822960" y="3511296"/>
-            <a:ext cx="621792" cy="228600"/>
-          </a:xfrm>
-          <a:prstGeom prst="rect">
-            <a:avLst/>
-          </a:prstGeom>
-          <a:noFill/>
-          <a:ln/>
-        </p:spPr>
-        <p:txBody>
-          <a:bodyPr wrap="square" lIns="0" tIns="0" rIns="0" bIns="0" rtlCol="0" anchor="ctr"/>
-          <a:lstStyle/>
-          <a:p>
-            <a:pPr algn="l" indent="0" marL="0">
-              <a:lnSpc>
-                <a:spcPct val="115000"/>
-              </a:lnSpc>
-              <a:buNone/>
-            </a:pPr>
-            <a:r>
-              <a:rPr lang="en-US" sz="850" b="1" dirty="0">
-                <a:solidFill>
-                  <a:srgbClr val="1A1A1A"/>
-                </a:solidFill>
-                <a:latin typeface="Meiryo" pitchFamily="34" charset="0"/>
-                <a:ea typeface="Meiryo" pitchFamily="34" charset="-122"/>
-                <a:cs typeface="Meiryo" pitchFamily="34" charset="-120"/>
-              </a:rPr>
-              <a:t>GLASS</a:t>
-            </a:r>
-            <a:endParaRPr lang="en-US" sz="850" dirty="0"/>
-          </a:p>
-        </p:txBody>
-      </p:sp>
-      <p:sp>
-        <p:nvSpPr>
-          <p:cNvPr id="44" name="Text 41"/>
-          <p:cNvSpPr txBox="1"/>
-          <p:nvPr/>
-        </p:nvSpPr>
-        <p:spPr>
-          <a:xfrm>
-            <a:off x="1444752" y="3511296"/>
-            <a:ext cx="603504" cy="228600"/>
-          </a:xfrm>
-          <a:prstGeom prst="rect">
-            <a:avLst/>
-          </a:prstGeom>
-          <a:noFill/>
-          <a:ln/>
-        </p:spPr>
-        <p:txBody>
-          <a:bodyPr wrap="square" lIns="0" tIns="0" rIns="0" bIns="0" rtlCol="0" anchor="ctr"/>
-          <a:lstStyle/>
-          <a:p>
-            <a:pPr algn="l" indent="0" marL="0">
-              <a:lnSpc>
-                <a:spcPct val="115000"/>
-              </a:lnSpc>
-              <a:buNone/>
-            </a:pPr>
-            <a:r>
-              <a:rPr lang="en-US" sz="800" dirty="0">
-                <a:solidFill>
-                  <a:srgbClr val="4D4D4D"/>
-                </a:solidFill>
-                <a:latin typeface="Meiryo" pitchFamily="34" charset="0"/>
-                <a:ea typeface="Meiryo" pitchFamily="34" charset="-122"/>
-                <a:cs typeface="Meiryo" pitchFamily="34" charset="-120"/>
-              </a:rPr>
-              <a:t>照合</a:t>
-            </a:r>
-            <a:endParaRPr lang="en-US" sz="800" dirty="0"/>
-          </a:p>
-        </p:txBody>
-      </p:sp>
-      <p:sp>
-        <p:nvSpPr>
-          <p:cNvPr id="45" name="Text 42"/>
-          <p:cNvSpPr txBox="1"/>
-          <p:nvPr/>
-        </p:nvSpPr>
-        <p:spPr>
-          <a:xfrm>
-            <a:off x="2048256" y="3511296"/>
-            <a:ext cx="2468880" cy="228600"/>
-          </a:xfrm>
-          <a:prstGeom prst="rect">
-            <a:avLst/>
-          </a:prstGeom>
-          <a:noFill/>
-          <a:ln/>
-        </p:spPr>
-        <p:txBody>
-          <a:bodyPr wrap="square" lIns="0" tIns="0" rIns="0" bIns="0" rtlCol="0" anchor="ctr"/>
-          <a:lstStyle/>
-          <a:p>
-            <a:pPr algn="l" indent="0" marL="0">
-              <a:lnSpc>
-                <a:spcPct val="115000"/>
-              </a:lnSpc>
-              <a:buNone/>
-            </a:pPr>
-            <a:r>
-              <a:rPr lang="en-US" sz="800" dirty="0">
-                <a:solidFill>
-                  <a:srgbClr val="1A1A1A"/>
-                </a:solidFill>
-                <a:latin typeface="Meiryo" pitchFamily="34" charset="0"/>
-                <a:ea typeface="Meiryo" pitchFamily="34" charset="-122"/>
-                <a:cs typeface="Meiryo" pitchFamily="34" charset="-120"/>
-              </a:rPr>
-              <a:t>図面・作業手順を現物に重ね、差異を検出</a:t>
-            </a:r>
-            <a:endParaRPr lang="en-US" sz="800" dirty="0"/>
-          </a:p>
-        </p:txBody>
-      </p:sp>
-      <p:sp>
-        <p:nvSpPr>
-          <p:cNvPr id="46" name="Text 43"/>
-          <p:cNvSpPr txBox="1"/>
-          <p:nvPr/>
-        </p:nvSpPr>
-        <p:spPr>
-          <a:xfrm>
-            <a:off x="4517136" y="3511296"/>
-            <a:ext cx="384048" cy="228600"/>
-          </a:xfrm>
-          <a:prstGeom prst="rect">
-            <a:avLst/>
-          </a:prstGeom>
-          <a:noFill/>
-          <a:ln/>
-        </p:spPr>
-        <p:txBody>
-          <a:bodyPr wrap="square" lIns="0" tIns="0" rIns="0" bIns="0" rtlCol="0" anchor="ctr"/>
-          <a:lstStyle/>
-          <a:p>
-            <a:pPr algn="r" indent="0" marL="0">
-              <a:lnSpc>
-                <a:spcPct val="115000"/>
-              </a:lnSpc>
-              <a:buNone/>
-            </a:pPr>
-            <a:r>
-              <a:rPr lang="en-US" sz="800" dirty="0">
-                <a:solidFill>
-                  <a:srgbClr val="1A1A1A"/>
-                </a:solidFill>
-                <a:latin typeface="Meiryo" pitchFamily="34" charset="0"/>
-                <a:ea typeface="Meiryo" pitchFamily="34" charset="-122"/>
-                <a:cs typeface="Meiryo" pitchFamily="34" charset="-120"/>
-              </a:rPr>
-              <a:t>製品</a:t>
-            </a:r>
-            <a:endParaRPr lang="en-US" sz="800" dirty="0"/>
-          </a:p>
-        </p:txBody>
-      </p:sp>
-      <p:sp>
-        <p:nvSpPr>
-          <p:cNvPr id="47" name="Shape 44"/>
-          <p:cNvSpPr/>
-          <p:nvPr/>
-        </p:nvSpPr>
-        <p:spPr>
-          <a:xfrm>
-            <a:off x="365760" y="3739896"/>
-            <a:ext cx="4572000" cy="0"/>
-          </a:xfrm>
-          <a:prstGeom prst="line">
-            <a:avLst/>
-          </a:prstGeom>
-          <a:noFill/>
-          <a:ln w="9525">
-            <a:solidFill>
-              <a:srgbClr val="BFBFBF"/>
-            </a:solidFill>
-            <a:prstDash val="solid"/>
-          </a:ln>
-        </p:spPr>
-      </p:sp>
-      <p:sp>
-        <p:nvSpPr>
-          <p:cNvPr id="48" name="Text 45"/>
-          <p:cNvSpPr txBox="1"/>
-          <p:nvPr/>
-        </p:nvSpPr>
-        <p:spPr>
-          <a:xfrm>
-            <a:off x="402336" y="3739896"/>
-            <a:ext cx="420624" cy="228600"/>
-          </a:xfrm>
-          <a:prstGeom prst="rect">
-            <a:avLst/>
-          </a:prstGeom>
-          <a:noFill/>
-          <a:ln/>
-        </p:spPr>
-        <p:txBody>
-          <a:bodyPr wrap="square" lIns="0" tIns="0" rIns="0" bIns="0" rtlCol="0" anchor="ctr"/>
-          <a:lstStyle/>
-          <a:p>
-            <a:pPr algn="l" indent="0" marL="0">
-              <a:lnSpc>
-                <a:spcPct val="115000"/>
-              </a:lnSpc>
-              <a:buNone/>
-            </a:pPr>
-            <a:r>
-              <a:rPr lang="en-US" sz="800" dirty="0">
-                <a:solidFill>
-                  <a:srgbClr val="4D4D4D"/>
-                </a:solidFill>
-                <a:latin typeface="Meiryo" pitchFamily="34" charset="0"/>
-                <a:ea typeface="Meiryo" pitchFamily="34" charset="-122"/>
-                <a:cs typeface="Meiryo" pitchFamily="34" charset="-120"/>
-              </a:rPr>
-              <a:t>4年目</a:t>
-            </a:r>
-            <a:endParaRPr lang="en-US" sz="800" dirty="0"/>
-          </a:p>
-        </p:txBody>
-      </p:sp>
-      <p:sp>
-        <p:nvSpPr>
-          <p:cNvPr id="49" name="Text 46"/>
-          <p:cNvSpPr txBox="1"/>
-          <p:nvPr/>
-        </p:nvSpPr>
-        <p:spPr>
-          <a:xfrm>
-            <a:off x="822960" y="3739896"/>
-            <a:ext cx="621792" cy="228600"/>
-          </a:xfrm>
-          <a:prstGeom prst="rect">
-            <a:avLst/>
-          </a:prstGeom>
-          <a:noFill/>
-          <a:ln/>
-        </p:spPr>
-        <p:txBody>
-          <a:bodyPr wrap="square" lIns="0" tIns="0" rIns="0" bIns="0" rtlCol="0" anchor="ctr"/>
-          <a:lstStyle/>
-          <a:p>
-            <a:pPr algn="l" indent="0" marL="0">
-              <a:lnSpc>
-                <a:spcPct val="115000"/>
-              </a:lnSpc>
-              <a:buNone/>
-            </a:pPr>
-            <a:r>
-              <a:rPr lang="en-US" sz="850" b="1" dirty="0">
-                <a:solidFill>
-                  <a:srgbClr val="1A1A1A"/>
-                </a:solidFill>
-                <a:latin typeface="Meiryo" pitchFamily="34" charset="0"/>
-                <a:ea typeface="Meiryo" pitchFamily="34" charset="-122"/>
-                <a:cs typeface="Meiryo" pitchFamily="34" charset="-120"/>
-              </a:rPr>
-              <a:t>TWIN</a:t>
-            </a:r>
-            <a:endParaRPr lang="en-US" sz="850" dirty="0"/>
-          </a:p>
-        </p:txBody>
-      </p:sp>
-      <p:sp>
-        <p:nvSpPr>
-          <p:cNvPr id="50" name="Text 47"/>
-          <p:cNvSpPr txBox="1"/>
-          <p:nvPr/>
-        </p:nvSpPr>
-        <p:spPr>
-          <a:xfrm>
-            <a:off x="1444752" y="3739896"/>
-            <a:ext cx="603504" cy="228600"/>
-          </a:xfrm>
-          <a:prstGeom prst="rect">
-            <a:avLst/>
-          </a:prstGeom>
-          <a:noFill/>
-          <a:ln/>
-        </p:spPr>
-        <p:txBody>
-          <a:bodyPr wrap="square" lIns="0" tIns="0" rIns="0" bIns="0" rtlCol="0" anchor="ctr"/>
-          <a:lstStyle/>
-          <a:p>
-            <a:pPr algn="l" indent="0" marL="0">
-              <a:lnSpc>
-                <a:spcPct val="115000"/>
-              </a:lnSpc>
-              <a:buNone/>
-            </a:pPr>
-            <a:r>
-              <a:rPr lang="en-US" sz="800" dirty="0">
-                <a:solidFill>
-                  <a:srgbClr val="4D4D4D"/>
-                </a:solidFill>
-                <a:latin typeface="Meiryo" pitchFamily="34" charset="0"/>
-                <a:ea typeface="Meiryo" pitchFamily="34" charset="-122"/>
-                <a:cs typeface="Meiryo" pitchFamily="34" charset="-120"/>
-              </a:rPr>
-              <a:t>3D</a:t>
-            </a:r>
-            <a:endParaRPr lang="en-US" sz="800" dirty="0"/>
-          </a:p>
-        </p:txBody>
-      </p:sp>
-      <p:sp>
-        <p:nvSpPr>
-          <p:cNvPr id="51" name="Text 48"/>
-          <p:cNvSpPr txBox="1"/>
-          <p:nvPr/>
-        </p:nvSpPr>
-        <p:spPr>
-          <a:xfrm>
-            <a:off x="2048256" y="3739896"/>
-            <a:ext cx="2468880" cy="228600"/>
-          </a:xfrm>
-          <a:prstGeom prst="rect">
-            <a:avLst/>
-          </a:prstGeom>
-          <a:noFill/>
-          <a:ln/>
-        </p:spPr>
-        <p:txBody>
-          <a:bodyPr wrap="square" lIns="0" tIns="0" rIns="0" bIns="0" rtlCol="0" anchor="ctr"/>
-          <a:lstStyle/>
-          <a:p>
-            <a:pPr algn="l" indent="0" marL="0">
-              <a:lnSpc>
-                <a:spcPct val="115000"/>
-              </a:lnSpc>
-              <a:buNone/>
-            </a:pPr>
-            <a:r>
-              <a:rPr lang="en-US" sz="800" dirty="0">
-                <a:solidFill>
-                  <a:srgbClr val="1A1A1A"/>
-                </a:solidFill>
-                <a:latin typeface="Meiryo" pitchFamily="34" charset="0"/>
-                <a:ea typeface="Meiryo" pitchFamily="34" charset="-122"/>
-                <a:cs typeface="Meiryo" pitchFamily="34" charset="-120"/>
-              </a:rPr>
-              <a:t>設備の内部構造・工場全体を3Dで再現</a:t>
-            </a:r>
-            <a:endParaRPr lang="en-US" sz="800" dirty="0"/>
-          </a:p>
-        </p:txBody>
-      </p:sp>
-      <p:sp>
-        <p:nvSpPr>
-          <p:cNvPr id="52" name="Text 49"/>
-          <p:cNvSpPr txBox="1"/>
-          <p:nvPr/>
-        </p:nvSpPr>
-        <p:spPr>
-          <a:xfrm>
-            <a:off x="4517136" y="3739896"/>
-            <a:ext cx="384048" cy="228600"/>
-          </a:xfrm>
-          <a:prstGeom prst="rect">
-            <a:avLst/>
-          </a:prstGeom>
-          <a:noFill/>
-          <a:ln/>
-        </p:spPr>
-        <p:txBody>
-          <a:bodyPr wrap="square" lIns="0" tIns="0" rIns="0" bIns="0" rtlCol="0" anchor="ctr"/>
-          <a:lstStyle/>
-          <a:p>
-            <a:pPr algn="r" indent="0" marL="0">
-              <a:lnSpc>
-                <a:spcPct val="115000"/>
-              </a:lnSpc>
-              <a:buNone/>
-            </a:pPr>
-            <a:r>
-              <a:rPr lang="en-US" sz="800" dirty="0">
-                <a:solidFill>
-                  <a:srgbClr val="1A1A1A"/>
-                </a:solidFill>
-                <a:latin typeface="Meiryo" pitchFamily="34" charset="0"/>
-                <a:ea typeface="Meiryo" pitchFamily="34" charset="-122"/>
-                <a:cs typeface="Meiryo" pitchFamily="34" charset="-120"/>
-              </a:rPr>
-              <a:t>製品</a:t>
-            </a:r>
-            <a:endParaRPr lang="en-US" sz="800" dirty="0"/>
-          </a:p>
-        </p:txBody>
-      </p:sp>
-      <p:sp>
-        <p:nvSpPr>
-          <p:cNvPr id="53" name="Shape 50"/>
-          <p:cNvSpPr/>
-          <p:nvPr/>
-        </p:nvSpPr>
-        <p:spPr>
-          <a:xfrm>
-            <a:off x="365760" y="3968496"/>
-            <a:ext cx="4572000" cy="0"/>
-          </a:xfrm>
-          <a:prstGeom prst="line">
-            <a:avLst/>
-          </a:prstGeom>
-          <a:noFill/>
-          <a:ln w="9525">
-            <a:solidFill>
-              <a:srgbClr val="BFBFBF"/>
-            </a:solidFill>
-            <a:prstDash val="solid"/>
-          </a:ln>
-        </p:spPr>
-      </p:sp>
-      <p:sp>
-        <p:nvSpPr>
-          <p:cNvPr id="54" name="Text 51"/>
-          <p:cNvSpPr txBox="1"/>
-          <p:nvPr/>
-        </p:nvSpPr>
-        <p:spPr>
-          <a:xfrm>
-            <a:off x="402336" y="3968496"/>
-            <a:ext cx="420624" cy="228600"/>
-          </a:xfrm>
-          <a:prstGeom prst="rect">
-            <a:avLst/>
-          </a:prstGeom>
-          <a:noFill/>
-          <a:ln/>
-        </p:spPr>
-        <p:txBody>
-          <a:bodyPr wrap="square" lIns="0" tIns="0" rIns="0" bIns="0" rtlCol="0" anchor="ctr"/>
-          <a:lstStyle/>
-          <a:p>
-            <a:pPr algn="l" indent="0" marL="0">
-              <a:lnSpc>
-                <a:spcPct val="115000"/>
-              </a:lnSpc>
-              <a:buNone/>
-            </a:pPr>
-            <a:r>
-              <a:rPr lang="en-US" sz="800" dirty="0">
-                <a:solidFill>
-                  <a:srgbClr val="4D4D4D"/>
-                </a:solidFill>
-                <a:latin typeface="Meiryo" pitchFamily="34" charset="0"/>
-                <a:ea typeface="Meiryo" pitchFamily="34" charset="-122"/>
-                <a:cs typeface="Meiryo" pitchFamily="34" charset="-120"/>
-              </a:rPr>
-              <a:t>5年目</a:t>
-            </a:r>
-            <a:endParaRPr lang="en-US" sz="800" dirty="0"/>
-          </a:p>
-        </p:txBody>
-      </p:sp>
-      <p:sp>
-        <p:nvSpPr>
-          <p:cNvPr id="55" name="Text 52"/>
-          <p:cNvSpPr txBox="1"/>
-          <p:nvPr/>
-        </p:nvSpPr>
-        <p:spPr>
-          <a:xfrm>
-            <a:off x="822960" y="3968496"/>
-            <a:ext cx="621792" cy="228600"/>
-          </a:xfrm>
-          <a:prstGeom prst="rect">
-            <a:avLst/>
-          </a:prstGeom>
-          <a:noFill/>
-          <a:ln/>
-        </p:spPr>
-        <p:txBody>
-          <a:bodyPr wrap="square" lIns="0" tIns="0" rIns="0" bIns="0" rtlCol="0" anchor="ctr"/>
-          <a:lstStyle/>
-          <a:p>
-            <a:pPr algn="l" indent="0" marL="0">
-              <a:lnSpc>
-                <a:spcPct val="115000"/>
-              </a:lnSpc>
-              <a:buNone/>
-            </a:pPr>
-            <a:r>
-              <a:rPr lang="en-US" sz="850" b="1" dirty="0">
-                <a:solidFill>
-                  <a:srgbClr val="1A1A1A"/>
-                </a:solidFill>
-                <a:latin typeface="Meiryo" pitchFamily="34" charset="0"/>
-                <a:ea typeface="Meiryo" pitchFamily="34" charset="-122"/>
-                <a:cs typeface="Meiryo" pitchFamily="34" charset="-120"/>
-              </a:rPr>
-              <a:t>DRAW</a:t>
-            </a:r>
-            <a:endParaRPr lang="en-US" sz="850" dirty="0"/>
-          </a:p>
-        </p:txBody>
-      </p:sp>
-      <p:sp>
-        <p:nvSpPr>
-          <p:cNvPr id="56" name="Text 53"/>
-          <p:cNvSpPr txBox="1"/>
-          <p:nvPr/>
-        </p:nvSpPr>
-        <p:spPr>
-          <a:xfrm>
-            <a:off x="1444752" y="3968496"/>
-            <a:ext cx="603504" cy="228600"/>
-          </a:xfrm>
-          <a:prstGeom prst="rect">
-            <a:avLst/>
-          </a:prstGeom>
-          <a:noFill/>
-          <a:ln/>
-        </p:spPr>
-        <p:txBody>
-          <a:bodyPr wrap="square" lIns="0" tIns="0" rIns="0" bIns="0" rtlCol="0" anchor="ctr"/>
-          <a:lstStyle/>
-          <a:p>
-            <a:pPr algn="l" indent="0" marL="0">
-              <a:lnSpc>
-                <a:spcPct val="115000"/>
-              </a:lnSpc>
-              <a:buNone/>
-            </a:pPr>
-            <a:r>
-              <a:rPr lang="en-US" sz="800" dirty="0">
-                <a:solidFill>
-                  <a:srgbClr val="4D4D4D"/>
-                </a:solidFill>
-                <a:latin typeface="Meiryo" pitchFamily="34" charset="0"/>
-                <a:ea typeface="Meiryo" pitchFamily="34" charset="-122"/>
-                <a:cs typeface="Meiryo" pitchFamily="34" charset="-120"/>
-              </a:rPr>
-              <a:t>図面</a:t>
-            </a:r>
-            <a:endParaRPr lang="en-US" sz="800" dirty="0"/>
-          </a:p>
-        </p:txBody>
-      </p:sp>
-      <p:sp>
-        <p:nvSpPr>
-          <p:cNvPr id="57" name="Text 54"/>
-          <p:cNvSpPr txBox="1"/>
-          <p:nvPr/>
-        </p:nvSpPr>
-        <p:spPr>
-          <a:xfrm>
-            <a:off x="2048256" y="3968496"/>
-            <a:ext cx="2468880" cy="228600"/>
-          </a:xfrm>
-          <a:prstGeom prst="rect">
-            <a:avLst/>
-          </a:prstGeom>
-          <a:noFill/>
-          <a:ln/>
-        </p:spPr>
-        <p:txBody>
-          <a:bodyPr wrap="square" lIns="0" tIns="0" rIns="0" bIns="0" rtlCol="0" anchor="ctr"/>
-          <a:lstStyle/>
-          <a:p>
-            <a:pPr algn="l" indent="0" marL="0">
-              <a:lnSpc>
-                <a:spcPct val="115000"/>
-              </a:lnSpc>
-              <a:buNone/>
-            </a:pPr>
-            <a:r>
-              <a:rPr lang="en-US" sz="800" dirty="0">
-                <a:solidFill>
-                  <a:srgbClr val="1A1A1A"/>
-                </a:solidFill>
-                <a:latin typeface="Meiryo" pitchFamily="34" charset="0"/>
-                <a:ea typeface="Meiryo" pitchFamily="34" charset="-122"/>
-                <a:cs typeface="Meiryo" pitchFamily="34" charset="-120"/>
-              </a:rPr>
-              <a:t>登録したパターンを音声指示でCAD作図</a:t>
-            </a:r>
-            <a:endParaRPr lang="en-US" sz="800" dirty="0"/>
-          </a:p>
-        </p:txBody>
-      </p:sp>
-      <p:sp>
-        <p:nvSpPr>
-          <p:cNvPr id="58" name="Text 55"/>
-          <p:cNvSpPr txBox="1"/>
-          <p:nvPr/>
-        </p:nvSpPr>
-        <p:spPr>
-          <a:xfrm>
-            <a:off x="4517136" y="3968496"/>
-            <a:ext cx="384048" cy="228600"/>
-          </a:xfrm>
-          <a:prstGeom prst="rect">
-            <a:avLst/>
-          </a:prstGeom>
-          <a:noFill/>
-          <a:ln/>
-        </p:spPr>
-        <p:txBody>
-          <a:bodyPr wrap="square" lIns="0" tIns="0" rIns="0" bIns="0" rtlCol="0" anchor="ctr"/>
-          <a:lstStyle/>
-          <a:p>
-            <a:pPr algn="r" indent="0" marL="0">
-              <a:lnSpc>
-                <a:spcPct val="115000"/>
-              </a:lnSpc>
-              <a:buNone/>
-            </a:pPr>
-            <a:r>
-              <a:rPr lang="en-US" sz="800" dirty="0">
-                <a:solidFill>
-                  <a:srgbClr val="1A1A1A"/>
-                </a:solidFill>
-                <a:latin typeface="Meiryo" pitchFamily="34" charset="0"/>
-                <a:ea typeface="Meiryo" pitchFamily="34" charset="-122"/>
-                <a:cs typeface="Meiryo" pitchFamily="34" charset="-120"/>
-              </a:rPr>
-              <a:t>製品</a:t>
-            </a:r>
-            <a:endParaRPr lang="en-US" sz="800" dirty="0"/>
-          </a:p>
-        </p:txBody>
-      </p:sp>
-      <p:sp>
-        <p:nvSpPr>
-          <p:cNvPr id="59" name="Shape 56"/>
-          <p:cNvSpPr/>
-          <p:nvPr/>
-        </p:nvSpPr>
-        <p:spPr>
-          <a:xfrm>
-            <a:off x="365760" y="4197096"/>
-            <a:ext cx="4572000" cy="228600"/>
+            <a:off x="5120640" y="3858768"/>
+            <a:ext cx="3657600" cy="530352"/>
           </a:xfrm>
           <a:prstGeom prst="rect">
             <a:avLst/>
@@ -7668,37 +7226,14 @@
       </p:sp>
       <p:sp>
         <p:nvSpPr>
-          <p:cNvPr id="60" name="Shape 57"/>
-          <p:cNvSpPr/>
-          <p:nvPr/>
-        </p:nvSpPr>
-        <p:spPr>
-          <a:xfrm>
-            <a:off x="365760" y="4197096"/>
-            <a:ext cx="4572000" cy="0"/>
-          </a:xfrm>
-          <a:prstGeom prst="line">
-            <a:avLst/>
-          </a:prstGeom>
-          <a:noFill/>
-          <a:ln w="9525">
-            <a:solidFill>
-              <a:srgbClr val="BFBFBF"/>
-            </a:solidFill>
-            <a:prstDash val="solid"/>
-          </a:ln>
-        </p:spPr>
-      </p:sp>
-      <p:sp>
-        <p:nvSpPr>
-          <p:cNvPr id="61" name="Text 58"/>
+          <p:cNvPr id="42" name="Text 39"/>
           <p:cNvSpPr txBox="1"/>
           <p:nvPr/>
         </p:nvSpPr>
         <p:spPr>
           <a:xfrm>
-            <a:off x="402336" y="4197096"/>
-            <a:ext cx="420624" cy="228600"/>
+            <a:off x="5230368" y="3858768"/>
+            <a:ext cx="3438144" cy="530352"/>
           </a:xfrm>
           <a:prstGeom prst="rect">
             <a:avLst/>
@@ -7717,574 +7252,43 @@
               <a:buNone/>
             </a:pPr>
             <a:r>
-              <a:rPr lang="en-US" sz="800" dirty="0">
-                <a:solidFill>
-                  <a:srgbClr val="4D4D4D"/>
-                </a:solidFill>
-                <a:latin typeface="Meiryo" pitchFamily="34" charset="0"/>
-                <a:ea typeface="Meiryo" pitchFamily="34" charset="-122"/>
-                <a:cs typeface="Meiryo" pitchFamily="34" charset="-120"/>
-              </a:rPr>
-              <a:t>研究</a:t>
-            </a:r>
-            <a:endParaRPr lang="en-US" sz="800" dirty="0"/>
+              <a:rPr lang="en-US" sz="950" b="1" dirty="0">
+                <a:solidFill>
+                  <a:srgbClr val="1A1A1A"/>
+                </a:solidFill>
+                <a:latin typeface="Meiryo" pitchFamily="34" charset="0"/>
+                <a:ea typeface="Meiryo" pitchFamily="34" charset="-122"/>
+                <a:cs typeface="Meiryo" pitchFamily="34" charset="-120"/>
+              </a:rPr>
+              <a:t>道具以外：導入支援（初年度・約2か月）</a:t>
+            </a:r>
+            <a:endParaRPr lang="en-US" sz="850" dirty="0"/>
+          </a:p>
+          <a:p>
+            <a:pPr algn="l" indent="0" marL="0">
+              <a:lnSpc>
+                <a:spcPct val="115000"/>
+              </a:lnSpc>
+              <a:buNone/>
+            </a:pPr>
+            <a:r>
+              <a:rPr lang="en-US" sz="850" dirty="0">
+                <a:solidFill>
+                  <a:srgbClr val="1A1A1A"/>
+                </a:solidFill>
+                <a:latin typeface="Meiryo" pitchFamily="34" charset="0"/>
+                <a:ea typeface="Meiryo" pitchFamily="34" charset="-122"/>
+                <a:cs typeface="Meiryo" pitchFamily="34" charset="-120"/>
+              </a:rPr>
+              <a:t>当社の担当者が現場に入り、聞き取り・帳票の移行・研修まで行う</a:t>
+            </a:r>
+            <a:endParaRPr lang="en-US" sz="850" dirty="0"/>
           </a:p>
         </p:txBody>
       </p:sp>
       <p:sp>
         <p:nvSpPr>
-          <p:cNvPr id="62" name="Text 59"/>
-          <p:cNvSpPr txBox="1"/>
-          <p:nvPr/>
-        </p:nvSpPr>
-        <p:spPr>
-          <a:xfrm>
-            <a:off x="822960" y="4197096"/>
-            <a:ext cx="621792" cy="228600"/>
-          </a:xfrm>
-          <a:prstGeom prst="rect">
-            <a:avLst/>
-          </a:prstGeom>
-          <a:noFill/>
-          <a:ln/>
-        </p:spPr>
-        <p:txBody>
-          <a:bodyPr wrap="square" lIns="0" tIns="0" rIns="0" bIns="0" rtlCol="0" anchor="ctr"/>
-          <a:lstStyle/>
-          <a:p>
-            <a:pPr algn="l" indent="0" marL="0">
-              <a:lnSpc>
-                <a:spcPct val="115000"/>
-              </a:lnSpc>
-              <a:buNone/>
-            </a:pPr>
-            <a:r>
-              <a:rPr lang="en-US" sz="850" b="1" dirty="0">
-                <a:solidFill>
-                  <a:srgbClr val="1A1A1A"/>
-                </a:solidFill>
-                <a:latin typeface="Meiryo" pitchFamily="34" charset="0"/>
-                <a:ea typeface="Meiryo" pitchFamily="34" charset="-122"/>
-                <a:cs typeface="Meiryo" pitchFamily="34" charset="-120"/>
-              </a:rPr>
-              <a:t>HAPTIC</a:t>
-            </a:r>
-            <a:endParaRPr lang="en-US" sz="850" dirty="0"/>
-          </a:p>
-        </p:txBody>
-      </p:sp>
-      <p:sp>
-        <p:nvSpPr>
-          <p:cNvPr id="63" name="Text 60"/>
-          <p:cNvSpPr txBox="1"/>
-          <p:nvPr/>
-        </p:nvSpPr>
-        <p:spPr>
-          <a:xfrm>
-            <a:off x="1444752" y="4197096"/>
-            <a:ext cx="603504" cy="228600"/>
-          </a:xfrm>
-          <a:prstGeom prst="rect">
-            <a:avLst/>
-          </a:prstGeom>
-          <a:noFill/>
-          <a:ln/>
-        </p:spPr>
-        <p:txBody>
-          <a:bodyPr wrap="square" lIns="0" tIns="0" rIns="0" bIns="0" rtlCol="0" anchor="ctr"/>
-          <a:lstStyle/>
-          <a:p>
-            <a:pPr algn="l" indent="0" marL="0">
-              <a:lnSpc>
-                <a:spcPct val="115000"/>
-              </a:lnSpc>
-              <a:buNone/>
-            </a:pPr>
-            <a:r>
-              <a:rPr lang="en-US" sz="800" dirty="0">
-                <a:solidFill>
-                  <a:srgbClr val="4D4D4D"/>
-                </a:solidFill>
-                <a:latin typeface="Meiryo" pitchFamily="34" charset="0"/>
-                <a:ea typeface="Meiryo" pitchFamily="34" charset="-122"/>
-                <a:cs typeface="Meiryo" pitchFamily="34" charset="-120"/>
-              </a:rPr>
-              <a:t>触覚・機械</a:t>
-            </a:r>
-            <a:endParaRPr lang="en-US" sz="800" dirty="0"/>
-          </a:p>
-        </p:txBody>
-      </p:sp>
-      <p:sp>
-        <p:nvSpPr>
-          <p:cNvPr id="64" name="Text 61"/>
-          <p:cNvSpPr txBox="1"/>
-          <p:nvPr/>
-        </p:nvSpPr>
-        <p:spPr>
-          <a:xfrm>
-            <a:off x="2048256" y="4197096"/>
-            <a:ext cx="2468880" cy="228600"/>
-          </a:xfrm>
-          <a:prstGeom prst="rect">
-            <a:avLst/>
-          </a:prstGeom>
-          <a:noFill/>
-          <a:ln/>
-        </p:spPr>
-        <p:txBody>
-          <a:bodyPr wrap="square" lIns="0" tIns="0" rIns="0" bIns="0" rtlCol="0" anchor="ctr"/>
-          <a:lstStyle/>
-          <a:p>
-            <a:pPr algn="l" indent="0" marL="0">
-              <a:lnSpc>
-                <a:spcPct val="115000"/>
-              </a:lnSpc>
-              <a:buNone/>
-            </a:pPr>
-            <a:r>
-              <a:rPr lang="en-US" sz="800" dirty="0">
-                <a:solidFill>
-                  <a:srgbClr val="1A1A1A"/>
-                </a:solidFill>
-                <a:latin typeface="Meiryo" pitchFamily="34" charset="0"/>
-                <a:ea typeface="Meiryo" pitchFamily="34" charset="-122"/>
-                <a:cs typeface="Meiryo" pitchFamily="34" charset="-120"/>
-              </a:rPr>
-              <a:t>力加減の訓練シミュレーター／ロボット連携</a:t>
-            </a:r>
-            <a:endParaRPr lang="en-US" sz="800" dirty="0"/>
-          </a:p>
-        </p:txBody>
-      </p:sp>
-      <p:sp>
-        <p:nvSpPr>
-          <p:cNvPr id="65" name="Text 62"/>
-          <p:cNvSpPr txBox="1"/>
-          <p:nvPr/>
-        </p:nvSpPr>
-        <p:spPr>
-          <a:xfrm>
-            <a:off x="4517136" y="4197096"/>
-            <a:ext cx="384048" cy="228600"/>
-          </a:xfrm>
-          <a:prstGeom prst="rect">
-            <a:avLst/>
-          </a:prstGeom>
-          <a:noFill/>
-          <a:ln/>
-        </p:spPr>
-        <p:txBody>
-          <a:bodyPr wrap="square" lIns="0" tIns="0" rIns="0" bIns="0" rtlCol="0" anchor="ctr"/>
-          <a:lstStyle/>
-          <a:p>
-            <a:pPr algn="r" indent="0" marL="0">
-              <a:lnSpc>
-                <a:spcPct val="115000"/>
-              </a:lnSpc>
-              <a:buNone/>
-            </a:pPr>
-            <a:r>
-              <a:rPr lang="en-US" sz="800" b="1" dirty="0">
-                <a:solidFill>
-                  <a:srgbClr val="1A1A1A"/>
-                </a:solidFill>
-                <a:latin typeface="Meiryo" pitchFamily="34" charset="0"/>
-                <a:ea typeface="Meiryo" pitchFamily="34" charset="-122"/>
-                <a:cs typeface="Meiryo" pitchFamily="34" charset="-120"/>
-              </a:rPr>
-              <a:t>R&amp;D</a:t>
-            </a:r>
-            <a:endParaRPr lang="en-US" sz="800" dirty="0"/>
-          </a:p>
-        </p:txBody>
-      </p:sp>
-      <p:sp>
-        <p:nvSpPr>
-          <p:cNvPr id="66" name="Shape 63"/>
-          <p:cNvSpPr/>
-          <p:nvPr/>
-        </p:nvSpPr>
-        <p:spPr>
-          <a:xfrm>
-            <a:off x="365760" y="4425696"/>
-            <a:ext cx="4572000" cy="0"/>
-          </a:xfrm>
-          <a:prstGeom prst="line">
-            <a:avLst/>
-          </a:prstGeom>
-          <a:noFill/>
-          <a:ln w="9525">
-            <a:solidFill>
-              <a:srgbClr val="BFBFBF"/>
-            </a:solidFill>
-            <a:prstDash val="solid"/>
-          </a:ln>
-        </p:spPr>
-      </p:sp>
-      <p:sp>
-        <p:nvSpPr>
-          <p:cNvPr id="67" name="rnd"/>
-          <p:cNvSpPr/>
-          <p:nvPr/>
-        </p:nvSpPr>
-        <p:spPr>
-          <a:xfrm>
-            <a:off x="5120640" y="2578608"/>
-            <a:ext cx="3657600" cy="1207008"/>
-          </a:xfrm>
-          <a:prstGeom prst="rect">
-            <a:avLst/>
-          </a:prstGeom>
-          <a:solidFill>
-            <a:srgbClr val="1A1A1A"/>
-          </a:solidFill>
-          <a:ln/>
-        </p:spPr>
-      </p:sp>
-      <p:sp>
-        <p:nvSpPr>
-          <p:cNvPr id="68" name="Text 65"/>
-          <p:cNvSpPr txBox="1"/>
-          <p:nvPr/>
-        </p:nvSpPr>
-        <p:spPr>
-          <a:xfrm>
-            <a:off x="5230368" y="2624328"/>
-            <a:ext cx="3438144" cy="237744"/>
-          </a:xfrm>
-          <a:prstGeom prst="rect">
-            <a:avLst/>
-          </a:prstGeom>
-          <a:noFill/>
-          <a:ln/>
-        </p:spPr>
-        <p:txBody>
-          <a:bodyPr wrap="square" lIns="0" tIns="0" rIns="0" bIns="0" rtlCol="0" anchor="t"/>
-          <a:lstStyle/>
-          <a:p>
-            <a:pPr algn="l" indent="0" marL="0">
-              <a:lnSpc>
-                <a:spcPct val="115000"/>
-              </a:lnSpc>
-              <a:buNone/>
-            </a:pPr>
-            <a:r>
-              <a:rPr lang="en-US" sz="1050" b="1" dirty="0">
-                <a:solidFill>
-                  <a:srgbClr val="FFFFFF"/>
-                </a:solidFill>
-                <a:latin typeface="Meiryo" pitchFamily="34" charset="0"/>
-                <a:ea typeface="Meiryo" pitchFamily="34" charset="-122"/>
-                <a:cs typeface="Meiryo" pitchFamily="34" charset="-120"/>
-              </a:rPr>
-              <a:t>R&amp;D戦略（技術開発）</a:t>
-            </a:r>
-            <a:endParaRPr lang="en-US" sz="1050" dirty="0"/>
-          </a:p>
-        </p:txBody>
-      </p:sp>
-      <p:sp>
-        <p:nvSpPr>
-          <p:cNvPr id="69" name="Text 66"/>
-          <p:cNvSpPr txBox="1"/>
-          <p:nvPr/>
-        </p:nvSpPr>
-        <p:spPr>
-          <a:xfrm>
-            <a:off x="5230368" y="2871216"/>
-            <a:ext cx="3438144" cy="896112"/>
-          </a:xfrm>
-          <a:prstGeom prst="rect">
-            <a:avLst/>
-          </a:prstGeom>
-          <a:noFill/>
-          <a:ln/>
-        </p:spPr>
-        <p:txBody>
-          <a:bodyPr wrap="square" lIns="0" tIns="0" rIns="0" bIns="0" rtlCol="0" anchor="t"/>
-          <a:lstStyle/>
-          <a:p>
-            <a:pPr algn="l" indent="0" marL="0">
-              <a:lnSpc>
-                <a:spcPct val="115000"/>
-              </a:lnSpc>
-              <a:spcAft>
-                <a:spcPts val="100"/>
-              </a:spcAft>
-              <a:buNone/>
-            </a:pPr>
-            <a:r>
-              <a:rPr lang="en-US" sz="850" b="1" dirty="0">
-                <a:solidFill>
-                  <a:srgbClr val="FFFFFF"/>
-                </a:solidFill>
-                <a:latin typeface="Meiryo" pitchFamily="34" charset="0"/>
-                <a:ea typeface="Meiryo" pitchFamily="34" charset="-122"/>
-                <a:cs typeface="Meiryo" pitchFamily="34" charset="-120"/>
-              </a:rPr>
-              <a:t>作らない：</a:t>
-            </a:r>
-            <a:pPr algn="l" indent="0" marL="0">
-              <a:lnSpc>
-                <a:spcPct val="115000"/>
-              </a:lnSpc>
-              <a:spcAft>
-                <a:spcPts val="100"/>
-              </a:spcAft>
-              <a:buNone/>
-            </a:pPr>
-            <a:r>
-              <a:rPr lang="en-US" sz="850" dirty="0">
-                <a:solidFill>
-                  <a:srgbClr val="FFFFFF"/>
-                </a:solidFill>
-                <a:latin typeface="Meiryo" pitchFamily="34" charset="0"/>
-                <a:ea typeface="Meiryo" pitchFamily="34" charset="-122"/>
-                <a:cs typeface="Meiryo" pitchFamily="34" charset="-120"/>
-              </a:rPr>
-              <a:t>音声記録・AI構造化は汎用技術。自前開発は最小限</a:t>
-            </a:r>
-            <a:endParaRPr lang="en-US" sz="850" dirty="0"/>
-          </a:p>
-          <a:p>
-            <a:pPr algn="l" indent="0" marL="0">
-              <a:lnSpc>
-                <a:spcPct val="115000"/>
-              </a:lnSpc>
-              <a:spcAft>
-                <a:spcPts val="100"/>
-              </a:spcAft>
-              <a:buNone/>
-            </a:pPr>
-            <a:r>
-              <a:rPr lang="en-US" sz="850" b="1" dirty="0">
-                <a:solidFill>
-                  <a:srgbClr val="FFFFFF"/>
-                </a:solidFill>
-                <a:latin typeface="Meiryo" pitchFamily="34" charset="0"/>
-                <a:ea typeface="Meiryo" pitchFamily="34" charset="-122"/>
-                <a:cs typeface="Meiryo" pitchFamily="34" charset="-120"/>
-              </a:rPr>
-              <a:t>作る：</a:t>
-            </a:r>
-            <a:pPr algn="l" indent="0" marL="0">
-              <a:lnSpc>
-                <a:spcPct val="115000"/>
-              </a:lnSpc>
-              <a:spcAft>
-                <a:spcPts val="100"/>
-              </a:spcAft>
-              <a:buNone/>
-            </a:pPr>
-            <a:r>
-              <a:rPr lang="en-US" sz="850" dirty="0">
-                <a:solidFill>
-                  <a:srgbClr val="FFFFFF"/>
-                </a:solidFill>
-                <a:latin typeface="Meiryo" pitchFamily="34" charset="0"/>
-                <a:ea typeface="Meiryo" pitchFamily="34" charset="-122"/>
-                <a:cs typeface="Meiryo" pitchFamily="34" charset="-120"/>
-              </a:rPr>
-              <a:t>連続工程の工程データとの紐づけ、教材化の手順</a:t>
-            </a:r>
-            <a:endParaRPr lang="en-US" sz="850" dirty="0"/>
-          </a:p>
-          <a:p>
-            <a:pPr algn="l" indent="0" marL="0">
-              <a:lnSpc>
-                <a:spcPct val="115000"/>
-              </a:lnSpc>
-              <a:spcAft>
-                <a:spcPts val="100"/>
-              </a:spcAft>
-              <a:buNone/>
-            </a:pPr>
-            <a:r>
-              <a:rPr lang="en-US" sz="850" b="1" dirty="0">
-                <a:solidFill>
-                  <a:srgbClr val="FFFFFF"/>
-                </a:solidFill>
-                <a:latin typeface="Meiryo" pitchFamily="34" charset="0"/>
-                <a:ea typeface="Meiryo" pitchFamily="34" charset="-122"/>
-                <a:cs typeface="Meiryo" pitchFamily="34" charset="-120"/>
-              </a:rPr>
-              <a:t>組む：</a:t>
-            </a:r>
-            <a:pPr algn="l" indent="0" marL="0">
-              <a:lnSpc>
-                <a:spcPct val="115000"/>
-              </a:lnSpc>
-              <a:spcAft>
-                <a:spcPts val="100"/>
-              </a:spcAft>
-              <a:buNone/>
-            </a:pPr>
-            <a:r>
-              <a:rPr lang="en-US" sz="850" dirty="0">
-                <a:solidFill>
-                  <a:srgbClr val="FFFFFF"/>
-                </a:solidFill>
-                <a:latin typeface="Meiryo" pitchFamily="34" charset="0"/>
-                <a:ea typeface="Meiryo" pitchFamily="34" charset="-122"/>
-                <a:cs typeface="Meiryo" pitchFamily="34" charset="-120"/>
-              </a:rPr>
-              <a:t>スマートグラス端末・CAD・3D・触覚はメーカー・大学と</a:t>
-            </a:r>
-            <a:endParaRPr lang="en-US" sz="850" dirty="0"/>
-          </a:p>
-          <a:p>
-            <a:pPr algn="l" indent="0" marL="0">
-              <a:lnSpc>
-                <a:spcPct val="115000"/>
-              </a:lnSpc>
-              <a:spcAft>
-                <a:spcPts val="100"/>
-              </a:spcAft>
-              <a:buNone/>
-            </a:pPr>
-            <a:r>
-              <a:rPr lang="en-US" sz="850" b="1" dirty="0">
-                <a:solidFill>
-                  <a:srgbClr val="FFFFFF"/>
-                </a:solidFill>
-                <a:latin typeface="Meiryo" pitchFamily="34" charset="0"/>
-                <a:ea typeface="Meiryo" pitchFamily="34" charset="-122"/>
-                <a:cs typeface="Meiryo" pitchFamily="34" charset="-120"/>
-              </a:rPr>
-              <a:t>試作済み：</a:t>
-            </a:r>
-            <a:pPr algn="l" indent="0" marL="0">
-              <a:lnSpc>
-                <a:spcPct val="115000"/>
-              </a:lnSpc>
-              <a:spcAft>
-                <a:spcPts val="100"/>
-              </a:spcAft>
-              <a:buNone/>
-            </a:pPr>
-            <a:r>
-              <a:rPr lang="en-US" sz="850" dirty="0">
-                <a:solidFill>
-                  <a:srgbClr val="FFFFFF"/>
-                </a:solidFill>
-                <a:latin typeface="Meiryo" pitchFamily="34" charset="0"/>
-                <a:ea typeface="Meiryo" pitchFamily="34" charset="-122"/>
-                <a:cs typeface="Meiryo" pitchFamily="34" charset="-120"/>
-              </a:rPr>
-              <a:t>ニュース要約→音声合成→ポッドキャスト自動配信を個人で実装</a:t>
-            </a:r>
-            <a:endParaRPr lang="en-US" sz="850" dirty="0"/>
-          </a:p>
-        </p:txBody>
-      </p:sp>
-      <p:sp>
-        <p:nvSpPr>
-          <p:cNvPr id="70" name="onboarding"/>
-          <p:cNvSpPr/>
-          <p:nvPr/>
-        </p:nvSpPr>
-        <p:spPr>
-          <a:xfrm>
-            <a:off x="5120640" y="3877056"/>
-            <a:ext cx="3657600" cy="658368"/>
-          </a:xfrm>
-          <a:prstGeom prst="rect">
-            <a:avLst/>
-          </a:prstGeom>
-          <a:solidFill>
-            <a:srgbClr val="F2F2F2"/>
-          </a:solidFill>
-          <a:ln/>
-        </p:spPr>
-      </p:sp>
-      <p:sp>
-        <p:nvSpPr>
-          <p:cNvPr id="71" name="Text 68"/>
-          <p:cNvSpPr txBox="1"/>
-          <p:nvPr/>
-        </p:nvSpPr>
-        <p:spPr>
-          <a:xfrm>
-            <a:off x="5230368" y="3913632"/>
-            <a:ext cx="3438144" cy="237744"/>
-          </a:xfrm>
-          <a:prstGeom prst="rect">
-            <a:avLst/>
-          </a:prstGeom>
-          <a:noFill/>
-          <a:ln/>
-        </p:spPr>
-        <p:txBody>
-          <a:bodyPr wrap="square" lIns="0" tIns="0" rIns="0" bIns="0" rtlCol="0" anchor="t"/>
-          <a:lstStyle/>
-          <a:p>
-            <a:pPr algn="l" indent="0" marL="0">
-              <a:lnSpc>
-                <a:spcPct val="115000"/>
-              </a:lnSpc>
-              <a:buNone/>
-            </a:pPr>
-            <a:r>
-              <a:rPr lang="en-US" sz="1000" b="1" dirty="0">
-                <a:solidFill>
-                  <a:srgbClr val="1A1A1A"/>
-                </a:solidFill>
-                <a:latin typeface="Meiryo" pitchFamily="34" charset="0"/>
-                <a:ea typeface="Meiryo" pitchFamily="34" charset="-122"/>
-                <a:cs typeface="Meiryo" pitchFamily="34" charset="-120"/>
-              </a:rPr>
-              <a:t>道具以外：導入支援（初年度・約2か月）</a:t>
-            </a:r>
-            <a:endParaRPr lang="en-US" sz="1000" dirty="0"/>
-          </a:p>
-        </p:txBody>
-      </p:sp>
-      <p:sp>
-        <p:nvSpPr>
-          <p:cNvPr id="72" name="Text 69"/>
-          <p:cNvSpPr txBox="1"/>
-          <p:nvPr/>
-        </p:nvSpPr>
-        <p:spPr>
-          <a:xfrm>
-            <a:off x="5230368" y="4151376"/>
-            <a:ext cx="3438144" cy="365760"/>
-          </a:xfrm>
-          <a:prstGeom prst="rect">
-            <a:avLst/>
-          </a:prstGeom>
-          <a:noFill/>
-          <a:ln/>
-        </p:spPr>
-        <p:txBody>
-          <a:bodyPr wrap="square" lIns="0" tIns="0" rIns="0" bIns="0" rtlCol="0" anchor="t"/>
-          <a:lstStyle/>
-          <a:p>
-            <a:pPr algn="l" indent="0" marL="0">
-              <a:lnSpc>
-                <a:spcPct val="115000"/>
-              </a:lnSpc>
-              <a:buNone/>
-            </a:pPr>
-            <a:r>
-              <a:rPr lang="en-US" sz="850" dirty="0">
-                <a:solidFill>
-                  <a:srgbClr val="1A1A1A"/>
-                </a:solidFill>
-                <a:latin typeface="Meiryo" pitchFamily="34" charset="0"/>
-                <a:ea typeface="Meiryo" pitchFamily="34" charset="-122"/>
-                <a:cs typeface="Meiryo" pitchFamily="34" charset="-120"/>
-              </a:rPr>
-              <a:t>当社の担当者が現場に入り、熟練者への聞き取り・帳票の移行・現場研修まで行う</a:t>
-            </a:r>
-            <a:endParaRPr lang="en-US" sz="850" dirty="0"/>
-          </a:p>
-        </p:txBody>
-      </p:sp>
-      <p:sp>
-        <p:nvSpPr>
-          <p:cNvPr id="73" name="Text 70"/>
+          <p:cNvPr id="43" name="Text 40"/>
           <p:cNvSpPr txBox="1"/>
           <p:nvPr/>
         </p:nvSpPr>

--- a/deck/セルフマネジメント課題_事業構想プレゼン.pptx
+++ b/deck/セルフマネジメント課題_事業構想プレゼン.pptx
@@ -2046,7 +2046,7 @@
               <a:rPr lang="en-US" dirty="0"/>
               <a:t>【0:00 - 0:50】
 要約：人が減っても現場が迷わず回る仕組みをつくり、日本の品質を支える現場の勘を遺産として残す（設問③）
-株式会社三現ワークスの事業構想を発表します。三現とは、現場・現物・現実のことです。メイド・イン・ジャパンの品質を支えてきたのは、現場の熟練者の勘です。その勘は、記録に残らないまま、退職とともに失われつつあります。この会社の存在意義は「現場の勘を、次の担い手へ。」です。使命は、熟練者の勘を言葉にし、教材と仕組みで次の人へ渡すこと。5年後には85の拠点で、勘どころが教材として残っている状態を目指します。今年7月に閣議決定された国の人工知能基本計画も、暗黙知が豊富な現場へのAIの実装を推進すると明記しています。この会社は、その現場の側に立ちます。</a:t>
+株式会社カンツギの事業構想を発表します。カンツギは「勘を継ぐ」。金継ぎのように、途切れそうな現場の勘をデータで継ぎます。メイド・イン・ジャパンの品質を支えてきたのは、現場の熟練者の勘です。その勘は、記録に残らないまま、退職とともに失われつつあります。この会社の存在意義は「現場の勘を、次の担い手へ。」です。使命は、熟練者の勘を言葉にし、教材と仕組みで次の人へ渡すこと。5年後には85の拠点で、勘どころが教材として残っている状態を目指します。今年7月に閣議決定された国の人工知能基本計画も、暗黙知が豊富な現場へのAIの実装を推進すると明記しています。この会社は、その現場の側に立ちます。</a:t>
             </a:r>
             <a:endParaRPr lang="en-US" dirty="0"/>
           </a:p>
@@ -3460,7 +3460,7 @@
                 <a:ea typeface="Meiryo" pitchFamily="34" charset="-122"/>
                 <a:cs typeface="Meiryo" pitchFamily="34" charset="-120"/>
               </a:rPr>
-              <a:t>株式会社三現ワークス（事業構想）</a:t>
+              <a:t>株式会社カンツギ（事業構想）</a:t>
             </a:r>
             <a:endParaRPr lang="en-US" sz="1100" dirty="0"/>
           </a:p>
@@ -3502,7 +3502,7 @@
                 <a:ea typeface="Meiryo" pitchFamily="34" charset="-122"/>
                 <a:cs typeface="Meiryo" pitchFamily="34" charset="-120"/>
               </a:rPr>
-              <a:t>三現＝現場・現物・現実</a:t>
+              <a:t>勘継＝金継ぎのように現場の勘を継ぐ</a:t>
             </a:r>
             <a:endParaRPr lang="en-US" sz="950" dirty="0"/>
           </a:p>
@@ -9770,7 +9770,7 @@
       </p:sp>
       <p:sp>
         <p:nvSpPr>
-          <p:cNvPr id="23" name="pos-三現ワークス"/>
+          <p:cNvPr id="23" name="pos-カンツギ"/>
           <p:cNvSpPr/>
           <p:nvPr/>
         </p:nvSpPr>
@@ -9829,7 +9829,7 @@
                 <a:ea typeface="Meiryo" pitchFamily="34" charset="-122"/>
                 <a:cs typeface="Meiryo" pitchFamily="34" charset="-120"/>
               </a:rPr>
-              <a:t>三現ワークス</a:t>
+              <a:t>カンツギ</a:t>
             </a:r>
             <a:endParaRPr lang="en-US" sz="1000" dirty="0"/>
           </a:p>
@@ -11471,7 +11471,7 @@
                           <a:ea typeface="Meiryo" pitchFamily="34" charset="-122"/>
                           <a:cs typeface="Meiryo" pitchFamily="34" charset="-120"/>
                         </a:rPr>
-                        <a:t>三現ワークス</a:t>
+                        <a:t>カンツギ</a:t>
                       </a:r>
                       <a:endParaRPr lang="en-US" sz="800" dirty="0">
                         <a:latin typeface="Meiryo" charset="0"/>

--- a/deck/セルフマネジメント課題_事業構想プレゼン.pptx
+++ b/deck/セルフマネジメント課題_事業構想プレゼン.pptx
@@ -4182,7 +4182,7 @@
                 <a:ea typeface="Meiryo" pitchFamily="34" charset="-122"/>
                 <a:cs typeface="Meiryo" pitchFamily="34" charset="-120"/>
               </a:rPr>
-              <a:t>発表者：＿＿＿＿＿＿＿＿＿＿　　発表時間：10分</a:t>
+              <a:t>発表時間：10分</a:t>
             </a:r>
             <a:endParaRPr lang="en-US" sz="1050" dirty="0"/>
           </a:p>

--- a/deck/セルフマネジメント課題_事業構想プレゼン.pptx
+++ b/deck/セルフマネジメント課題_事業構想プレゼン.pptx
@@ -2676,7 +2676,7 @@
               <a:rPr lang="en-US" dirty="0"/>
               <a:t>【8:30 - 9:50】
 要約：最大のリスクは自分。判断基準を先に決めておく
-設問⑤、経営課題です。最大のリスクは競合ではなく、創業者である自分が律速になることです。準備期は、試験導入を3拠点に限定し、生産技術の経験者を迎えます。中期は、電線業界が353事業所と小さいため、製品の出口である施工会社へ同じ基盤を広げます。後期は、大手のデータ基盤が連続工程に降りてくることへの備えと、私がいなくても判断できる会社にすることです。そのための仕組みが下段のバランスト・スコアカードで、四つの指標を先に決めておきます。最後に、この事業の顧客・商品・収益は、すべて現在の勤務先の中にも存在します。だから復職後は、生産技術と情報システムの領域で、現場と技術のあいだを訳す役割を担いたいと考えています。そして、自らの役割を定義しきること自体が、業務を際限なく抱え込まないための再発防止策でもあります。以上です。</a:t>
+設問⑤、経営課題です。最大のリスクは競合ではなく、創業者である自分がボトルネックになることです。準備期は、試験導入を3拠点に限定し、生産技術の経験者を迎えます。中期は、電線業界が353事業所と小さいため、製品の出口である施工会社へ同じ基盤を広げます。後期は、大手のデータ基盤が連続工程に降りてくることへの備えと、私がいなくても判断できる会社にすることです。そのための仕組みが下段のバランスト・スコアカードで、四つの指標を先に決めておきます。最後に、この事業の顧客・商品・収益は、すべて現在の勤務先の中にも存在します。だから復職後は、生産技術と情報システムの領域で、現場と技術のあいだを訳す役割を担いたいと考えています。そして、自らの役割を定義しきること自体が、業務を際限なく抱え込まないための再発防止策でもあります。以上です。</a:t>
             </a:r>
             <a:endParaRPr lang="en-US" dirty="0"/>
           </a:p>
@@ -17550,7 +17550,7 @@
                 <a:ea typeface="Meiryo" pitchFamily="34" charset="-122"/>
                 <a:cs typeface="Meiryo" pitchFamily="34" charset="-120"/>
               </a:rPr>
-              <a:t>創業者が律速になる</a:t>
+              <a:t>創業者がボトルネックになる</a:t>
             </a:r>
             <a:endParaRPr lang="en-US" sz="1400" dirty="0"/>
           </a:p>

--- a/deck/セルフマネジメント課題_事業構想プレゼン.pptx
+++ b/deck/セルフマネジメント課題_事業構想プレゼン.pptx
@@ -2046,7 +2046,7 @@
               <a:rPr lang="en-US" dirty="0"/>
               <a:t>【0:00 - 0:50】
 要約：人が減っても現場が迷わず回る仕組みをつくり、日本の品質を支える現場の勘を遺産として残す（設問③）
-株式会社カンツギの事業構想を発表します。カンツギは「勘を継ぐ」。金継ぎのように、途切れそうな現場の勘をデータで継ぎます。メイド・イン・ジャパンの品質を支えてきたのは、現場の熟練者の勘です。その勘は、記録に残らないまま、退職とともに失われつつあります。この会社の存在意義は「現場の勘を、次の担い手へ。」です。使命は、熟練者の勘を言葉にし、教材と仕組みで次の人へ渡すこと。5年後には85の拠点で、勘どころが教材として残っている状態を目指します。今年7月に閣議決定された国の人工知能基本計画も、暗黙知が豊富な現場へのAIの実装を推進すると明記しています。この会社は、その現場の側に立ちます。</a:t>
+株式会社カンツギの事業構想を発表します。カンツギは「勘を継ぐ」。金継ぎのように、途切れそうな現場の勘をデータで継ぎます。メイド・イン・ジャパンの品質を支えてきたのは、現場の熟練者の勘です。その勘は、記録に残らないまま、退職とともに失われつつあります。この会社の存在意義は「現場の勘を次の担い手へ」です。使命は、熟練者の勘を言葉にし、教材と仕組みで次の人へ渡すこと。5年後には85の拠点で、勘どころが教材として残っている状態を目指します。今年7月に閣議決定された国の人工知能基本計画も、暗黙知が豊富な現場へのAIの実装を推進すると明記しています。この会社は、その現場の側に立ちます。</a:t>
             </a:r>
             <a:endParaRPr lang="en-US" dirty="0"/>
           </a:p>
@@ -2829,7 +2829,7 @@
                 <a:ea typeface="Meiryo" pitchFamily="34" charset="-122"/>
                 <a:cs typeface="Meiryo" pitchFamily="34" charset="-120"/>
               </a:rPr>
-              <a:t>現場の勘を、次の担い手へ。</a:t>
+              <a:t>現場の勘を次の担い手へ</a:t>
             </a:r>
             <a:endParaRPr lang="en-US" sz="850" dirty="0"/>
           </a:p>
@@ -3356,7 +3356,7 @@
                 <a:ea typeface="Meiryo" pitchFamily="34" charset="-122"/>
                 <a:cs typeface="Meiryo" pitchFamily="34" charset="-120"/>
               </a:rPr>
-              <a:t>現場の勘を、</a:t>
+              <a:t>現場の勘を</a:t>
             </a:r>
             <a:endParaRPr lang="en-US" sz="2000" dirty="0"/>
           </a:p>
@@ -3376,7 +3376,7 @@
                 <a:ea typeface="Meiryo" pitchFamily="34" charset="-122"/>
                 <a:cs typeface="Meiryo" pitchFamily="34" charset="-120"/>
               </a:rPr>
-              <a:t>次の担い手へ。</a:t>
+              <a:t>次の担い手へ</a:t>
             </a:r>
             <a:endParaRPr lang="en-US" sz="2000" dirty="0"/>
           </a:p>
